--- a/Arquitectura de Sistemas Computacionales/Clases/Clase 12 - Pruebas de rendimiento y preparacion final/Presentacion.pptx
+++ b/Arquitectura de Sistemas Computacionales/Clases/Clase 12 - Pruebas de rendimiento y preparacion final/Presentacion.pptx
@@ -18,6 +18,20 @@
     <p:sldId id="266" r:id="rId17"/>
     <p:sldId id="267" r:id="rId18"/>
     <p:sldId id="268" r:id="rId19"/>
+    <p:sldId id="269" r:id="rId20"/>
+    <p:sldId id="270" r:id="rId21"/>
+    <p:sldId id="271" r:id="rId22"/>
+    <p:sldId id="272" r:id="rId23"/>
+    <p:sldId id="273" r:id="rId24"/>
+    <p:sldId id="274" r:id="rId25"/>
+    <p:sldId id="275" r:id="rId26"/>
+    <p:sldId id="276" r:id="rId27"/>
+    <p:sldId id="277" r:id="rId28"/>
+    <p:sldId id="278" r:id="rId29"/>
+    <p:sldId id="279" r:id="rId30"/>
+    <p:sldId id="280" r:id="rId31"/>
+    <p:sldId id="281" r:id="rId32"/>
+    <p:sldId id="282" r:id="rId33"/>
   </p:sldIdLst>
   <p:sldSz cx="12191695" cy="6858000" type="screen4x3"/>
   <p:notesSz cx="6858000" cy="9144000"/>
@@ -3576,7 +3590,7 @@
                 </a:solidFill>
                 <a:latin typeface="Calibri"/>
               </a:rPr>
-              <a:t>PI CloudLite — entregable de hoy</a:t>
+              <a:t>Los umbrales de percepcion, y por que son convenciones (1/2)</a:t>
             </a:r>
           </a:p>
         </p:txBody>
@@ -3615,25 +3629,7 @@
                 </a:solidFill>
                 <a:latin typeface="Calibri"/>
               </a:rPr>
-              <a:t>–   </a:t>
-            </a:r>
-            <a:r>
-              <a:rPr sz="2000" b="1" i="0">
-                <a:solidFill>
-                  <a:srgbClr val="333333"/>
-                </a:solidFill>
-                <a:latin typeface="Calibri"/>
-              </a:rPr>
-              <a:t>Entregable:</a:t>
-            </a:r>
-            <a:r>
-              <a:rPr sz="2000" b="0" i="0">
-                <a:solidFill>
-                  <a:srgbClr val="333333"/>
-                </a:solidFill>
-                <a:latin typeface="Calibri"/>
-              </a:rPr>
-              <a:t> Sección Rendimiento + guion de pitch + paquete casi-final</a:t>
+              <a:t>–   Por debajo de unos 100 milisegundos la respuesta se percibe instantanea; hasta cerca de 1 segundo el usuario mantiene el hilo aunque note la demora; pasados unos 10 segundos pierde la atencion y cambia de tarea o recarga.</a:t>
             </a:r>
           </a:p>
           <a:p>
@@ -3649,16 +3645,7 @@
                 </a:solidFill>
                 <a:latin typeface="Calibri"/>
               </a:rPr>
-              <a:t>–   Herramienta: </a:t>
-            </a:r>
-            <a:r>
-              <a:rPr sz="2000" b="1" i="0">
-                <a:solidFill>
-                  <a:srgbClr val="333333"/>
-                </a:solidFill>
-                <a:latin typeface="Calibri"/>
-              </a:rPr>
-              <a:t>Google Docs · draw.io · (opcional) lab contenedor</a:t>
+              <a:t>–   De ahi sale la convencion practica para una API interna, que ubica el objetivo de p95 entre 200 y 300 milisegundos dejando presupuesto para que el navegador y la red agreguen lo suyo</a:t>
             </a:r>
           </a:p>
           <a:p>
@@ -3674,25 +3661,7 @@
                 </a:solidFill>
                 <a:latin typeface="Calibri"/>
               </a:rPr>
-              <a:t>–   Todo lo que construyan hoy entra al </a:t>
-            </a:r>
-            <a:r>
-              <a:rPr sz="2000" b="1" i="0">
-                <a:solidFill>
-                  <a:srgbClr val="333333"/>
-                </a:solidFill>
-                <a:latin typeface="Calibri"/>
-              </a:rPr>
-              <a:t>informe/repo del PI</a:t>
-            </a:r>
-            <a:r>
-              <a:rPr sz="2000" b="0" i="0">
-                <a:solidFill>
-                  <a:srgbClr val="333333"/>
-                </a:solidFill>
-                <a:latin typeface="Calibri"/>
-              </a:rPr>
-              <a:t> (no es lab suelto).</a:t>
+              <a:t>–   Para carga de pagina completa la referencia publica de Core Web Vitals considera bueno un renderizado del contenido principal por debajo de 2.5 segundos.</a:t>
             </a:r>
           </a:p>
           <a:p>
@@ -3708,7 +3677,23 @@
                 </a:solidFill>
                 <a:latin typeface="Calibri"/>
               </a:rPr>
-              <a:t>–   Individual por defecto · el docente puede autorizar equipos de 2–3; la entrega en la plataforma del curso siempre es individual.</a:t>
+              <a:t>–   Ninguna es regla dura: un reporte pesado puede tener un objetivo legitimo de 3 segundos y un autocompletado necesita estar bajo 100.</a:t>
+            </a:r>
+          </a:p>
+          <a:p>
+            <a:pPr>
+              <a:spcAft>
+                <a:spcPts val="800"/>
+              </a:spcAft>
+            </a:pPr>
+            <a:r>
+              <a:rPr sz="2000" b="0" i="0">
+                <a:solidFill>
+                  <a:srgbClr val="333333"/>
+                </a:solidFill>
+                <a:latin typeface="Calibri"/>
+              </a:rPr>
+              <a:t>–   Lo que si es regla es que el numero se escribe antes de medir y se justifica con el caso de uso, no se ajusta despues para que la medicion salga bien.</a:t>
             </a:r>
           </a:p>
         </p:txBody>
@@ -3889,7 +3874,7 @@
                 </a:solidFill>
                 <a:latin typeface="Calibri"/>
               </a:rPr>
-              <a:t>Manos a la obra (paso a paso)</a:t>
+              <a:t>Los umbrales de percepcion, y por que son convenciones (2/2)</a:t>
             </a:r>
           </a:p>
         </p:txBody>
@@ -3922,22 +3907,13 @@
               </a:spcAft>
             </a:pPr>
             <a:r>
-              <a:rPr sz="1600" b="1" i="0">
-                <a:solidFill>
-                  <a:srgbClr val="333333"/>
-                </a:solidFill>
-                <a:latin typeface="Calibri"/>
-              </a:rPr>
-              <a:t>1.</a:t>
-            </a:r>
-            <a:r>
-              <a:rPr sz="1600" b="0" i="0">
-                <a:solidFill>
-                  <a:srgbClr val="333333"/>
-                </a:solidFill>
-                <a:latin typeface="Calibri"/>
-              </a:rPr>
-              <a:t> Paso 1: describan el escenario de carga del pico real de su dominio con los 6 datos obligatorios (evento del pico, usuarios concurrentes, peticiones por segundo, mezcla de operaciones en porcentajes que sumen 100, duracion de la ventana y volumen de datos de partida), verificando que la mezcla sume exactamente 100 por ciento y que el pico corresponda a una fecha real del calendario de su dominio.</a:t>
+              <a:rPr sz="2000" b="0" i="0">
+                <a:solidFill>
+                  <a:srgbClr val="333333"/>
+                </a:solidFill>
+                <a:latin typeface="Calibri"/>
+              </a:rPr>
+              <a:t>–   Junto al tiempo va siempre la tasa de error, el porcentaje de peticiones que fallan, porque un sistema que responde rapido devolviendo errores no cumple.</a:t>
             </a:r>
           </a:p>
           <a:p>
@@ -3947,31 +3923,13 @@
               </a:spcAft>
             </a:pPr>
             <a:r>
-              <a:rPr sz="1600" b="0" i="0">
-                <a:solidFill>
-                  <a:srgbClr val="333333"/>
-                </a:solidFill>
-                <a:latin typeface="Calibri"/>
-              </a:rPr>
-              <a:t>–   </a:t>
-            </a:r>
-            <a:r>
-              <a:rPr sz="1600" b="1" i="0">
-                <a:solidFill>
-                  <a:srgbClr val="333333"/>
-                </a:solidFill>
-                <a:latin typeface="Calibri"/>
-              </a:rPr>
-              <a:t>2.</a:t>
-            </a:r>
-            <a:r>
-              <a:rPr sz="1600" b="0" i="0">
-                <a:solidFill>
-                  <a:srgbClr val="333333"/>
-                </a:solidFill>
-                <a:latin typeface="Calibri"/>
-              </a:rPr>
-              <a:t> Paso 2: definan las 3 metricas objetivo en una tabla de 4 columnas con numero, ventana de medicion, forma de medirla y consecuencia de incumplirla, verificando que cada objetivo tenga un numero y una ventana (por ejemplo p95 por debajo de 800 ms en 5 minutos) y que ninguna diga rapido o aceptable sin cifra.</a:t>
+              <a:rPr sz="2000" b="0" i="0">
+                <a:solidFill>
+                  <a:srgbClr val="333333"/>
+                </a:solidFill>
+                <a:latin typeface="Calibri"/>
+              </a:rPr>
+              <a:t>–   Aqui aparecen tres siglas: el SLI es el indicador que se mide, el SLO es el objetivo interno que el equipo se compromete a cumplir y el SLA es el compromiso contractual con penalidad.</a:t>
             </a:r>
           </a:p>
           <a:p>
@@ -3981,31 +3939,13 @@
               </a:spcAft>
             </a:pPr>
             <a:r>
-              <a:rPr sz="1600" b="0" i="0">
-                <a:solidFill>
-                  <a:srgbClr val="333333"/>
-                </a:solidFill>
-                <a:latin typeface="Calibri"/>
-              </a:rPr>
-              <a:t>–   </a:t>
-            </a:r>
-            <a:r>
-              <a:rPr sz="1600" b="1" i="0">
-                <a:solidFill>
-                  <a:srgbClr val="333333"/>
-                </a:solidFill>
-                <a:latin typeface="Calibri"/>
-              </a:rPr>
-              <a:t>3.</a:t>
-            </a:r>
-            <a:r>
-              <a:rPr sz="1600" b="0" i="0">
-                <a:solidFill>
-                  <a:srgbClr val="333333"/>
-                </a:solidFill>
-                <a:latin typeface="Calibri"/>
-              </a:rPr>
-              <a:t> Paso 3: escriban en la plataforma del curso el sequenceDiagram del camino critico con el presupuesto de latencia repartido por salto, verificando que la suma de los tramos sea menor o igual al objetivo de p95 y que la nota final muestre el margen restante en milisegundos.</a:t>
+              <a:rPr sz="2000" b="0" i="0">
+                <a:solidFill>
+                  <a:srgbClr val="333333"/>
+                </a:solidFill>
+                <a:latin typeface="Calibri"/>
+              </a:rPr>
+              <a:t>–   Un SLO de 99.9 por ciento de disponibilidad, los "tres nueves", admite unos 43 minutos de caida al mes; el 99.99 baja a poco mas de 4 minutos</a:t>
             </a:r>
           </a:p>
           <a:p>
@@ -4015,65 +3955,13 @@
               </a:spcAft>
             </a:pPr>
             <a:r>
-              <a:rPr sz="1600" b="0" i="0">
-                <a:solidFill>
-                  <a:srgbClr val="333333"/>
-                </a:solidFill>
-                <a:latin typeface="Calibri"/>
-              </a:rPr>
-              <a:t>–   </a:t>
-            </a:r>
-            <a:r>
-              <a:rPr sz="1600" b="1" i="0">
-                <a:solidFill>
-                  <a:srgbClr val="333333"/>
-                </a:solidFill>
-                <a:latin typeface="Calibri"/>
-              </a:rPr>
-              <a:t>4.</a:t>
-            </a:r>
-            <a:r>
-              <a:rPr sz="1600" b="0" i="0">
-                <a:solidFill>
-                  <a:srgbClr val="333333"/>
-                </a:solidFill>
-                <a:latin typeface="Calibri"/>
-              </a:rPr>
-              <a:t> Paso 4: ensayen el pitch de 5 a 8 minutos con cronometro y llenen la tabla de guion de 6 filas con minuto, seccion, quien habla, mensaje clave y evidencia en pantalla, verificando que la suma de los minutos quede entre 5 y 8, que ninguna seccion pase de 2:00 (y, si el docente autorizo equipo, que todos los integrantes hablen) y que cada seccion tenga una evidencia concreta que se pueda mostrar.</a:t>
-            </a:r>
-          </a:p>
-          <a:p>
-            <a:pPr>
-              <a:spcAft>
-                <a:spcPts val="800"/>
-              </a:spcAft>
-            </a:pPr>
-            <a:r>
-              <a:rPr sz="1600" b="0" i="0">
-                <a:solidFill>
-                  <a:srgbClr val="333333"/>
-                </a:solidFill>
-                <a:latin typeface="Calibri"/>
-              </a:rPr>
-              <a:t>–   </a:t>
-            </a:r>
-            <a:r>
-              <a:rPr sz="1600" b="1" i="0">
-                <a:solidFill>
-                  <a:srgbClr val="333333"/>
-                </a:solidFill>
-                <a:latin typeface="Calibri"/>
-              </a:rPr>
-              <a:t>5.</a:t>
-            </a:r>
-            <a:r>
-              <a:rPr sz="1600" b="0" i="0">
-                <a:solidFill>
-                  <a:srgbClr val="333333"/>
-                </a:solidFill>
-                <a:latin typeface="Calibri"/>
-              </a:rPr>
-              <a:t> Paso 5: cierren los 5 items del backlog de la Clase 11 dejando registro de los residuales, dejen el paquete casi final ordenado en el repositorio o el Drive y suban las 6 preguntas a la plataforma del curso (modulo Talleres) antes del en la fecha que indique el docente, verificando que el cuello de botella declarado en el analisis sea el mismo que muestra el diagrama de secuencia.</a:t>
+              <a:rPr sz="2000" b="0" i="0">
+                <a:solidFill>
+                  <a:srgbClr val="333333"/>
+                </a:solidFill>
+                <a:latin typeface="Calibri"/>
+              </a:rPr>
+              <a:t>–   Y esa diferencia de un decimal suele multiplicar el costo de la arquitectura, lo que amarra con la tabla de la Clase 10.</a:t>
             </a:r>
           </a:p>
         </p:txBody>
@@ -4254,109 +4142,21 @@
                 </a:solidFill>
                 <a:latin typeface="Calibri"/>
               </a:rPr>
-              <a:t>Para continuar (PI)</a:t>
-            </a:r>
-          </a:p>
-        </p:txBody>
-      </p:sp>
-      <p:sp>
-        <p:nvSpPr>
-          <p:cNvPr id="5" name="Rounded Rectangle 4"/>
-          <p:cNvSpPr/>
-          <p:nvPr/>
-        </p:nvSpPr>
-        <p:spPr>
-          <a:xfrm>
-            <a:off x="457200" y="1261872"/>
-            <a:ext cx="11277295" cy="1051560"/>
-          </a:xfrm>
-          <a:prstGeom prst="roundRect">
-            <a:avLst>
-              <a:gd name="adj" fmla="val 12000"/>
-            </a:avLst>
-          </a:prstGeom>
-          <a:solidFill>
-            <a:srgbClr val="E8F4FA"/>
-          </a:solidFill>
-          <a:ln>
-            <a:noFill/>
-          </a:ln>
-        </p:spPr>
-        <p:style>
-          <a:lnRef idx="1">
-            <a:schemeClr val="accent1"/>
-          </a:lnRef>
-          <a:fillRef idx="3">
-            <a:schemeClr val="accent1"/>
-          </a:fillRef>
-          <a:effectRef idx="2">
-            <a:schemeClr val="accent1"/>
-          </a:effectRef>
-          <a:fontRef idx="minor">
-            <a:schemeClr val="lt1"/>
-          </a:fontRef>
-        </p:style>
-        <p:txBody>
-          <a:bodyPr rtlCol="0" anchor="ctr"/>
-          <a:lstStyle/>
-          <a:p>
-            <a:pPr algn="ctr"/>
-          </a:p>
-        </p:txBody>
-      </p:sp>
-      <p:sp>
-        <p:nvSpPr>
-          <p:cNvPr id="6" name="Rectangle 5"/>
-          <p:cNvSpPr/>
-          <p:nvPr/>
-        </p:nvSpPr>
-        <p:spPr>
-          <a:xfrm>
-            <a:off x="457200" y="1261872"/>
-            <a:ext cx="128016" cy="1051560"/>
-          </a:xfrm>
-          <a:prstGeom prst="rect">
-            <a:avLst/>
-          </a:prstGeom>
-          <a:solidFill>
-            <a:srgbClr val="269CCB"/>
-          </a:solidFill>
-          <a:ln>
-            <a:noFill/>
-          </a:ln>
-        </p:spPr>
-        <p:style>
-          <a:lnRef idx="1">
-            <a:schemeClr val="accent1"/>
-          </a:lnRef>
-          <a:fillRef idx="3">
-            <a:schemeClr val="accent1"/>
-          </a:fillRef>
-          <a:effectRef idx="2">
-            <a:schemeClr val="accent1"/>
-          </a:effectRef>
-          <a:fontRef idx="minor">
-            <a:schemeClr val="lt1"/>
-          </a:fontRef>
-        </p:style>
-        <p:txBody>
-          <a:bodyPr rtlCol="0" anchor="ctr"/>
-          <a:lstStyle/>
-          <a:p>
-            <a:pPr algn="ctr"/>
-          </a:p>
-        </p:txBody>
-      </p:sp>
-      <p:sp>
-        <p:nvSpPr>
-          <p:cNvPr id="7" name="TextBox 6"/>
+              <a:t>El escenario de carga: aritmetica de servilleta</a:t>
+            </a:r>
+          </a:p>
+        </p:txBody>
+      </p:sp>
+      <p:sp>
+        <p:nvSpPr>
+          <p:cNvPr id="5" name="TextBox 4"/>
           <p:cNvSpPr txBox="1"/>
           <p:nvPr/>
         </p:nvSpPr>
         <p:spPr>
           <a:xfrm>
-            <a:off x="777240" y="1399031"/>
-            <a:ext cx="10774375" cy="822959"/>
+            <a:off x="457200" y="1170432"/>
+            <a:ext cx="11277295" cy="5230368"/>
           </a:xfrm>
           <a:prstGeom prst="rect">
             <a:avLst/>
@@ -4369,313 +4169,106 @@
           </a:bodyPr>
           <a:lstStyle/>
           <a:p>
-            <a:r>
-              <a:rPr sz="1200" b="1" i="0">
-                <a:solidFill>
-                  <a:srgbClr val="269CCB"/>
-                </a:solidFill>
-                <a:latin typeface="Calibri"/>
-              </a:rPr>
-              <a:t>Info</a:t>
-            </a:r>
-          </a:p>
-          <a:p>
             <a:pPr>
-              <a:spcBef>
-                <a:spcPts val="400"/>
-              </a:spcBef>
+              <a:spcAft>
+                <a:spcPts val="800"/>
+              </a:spcAft>
             </a:pPr>
             <a:r>
-              <a:rPr sz="1400" b="0" i="0">
-                <a:solidFill>
-                  <a:srgbClr val="333333"/>
-                </a:solidFill>
-                <a:latin typeface="Calibri"/>
-              </a:rPr>
-              <a:t>Entregable: Sección Rendimiento + guion de pitch + paquete casi-final</a:t>
-            </a:r>
-          </a:p>
-        </p:txBody>
-      </p:sp>
-      <p:sp>
-        <p:nvSpPr>
-          <p:cNvPr id="8" name="Rounded Rectangle 7"/>
-          <p:cNvSpPr/>
-          <p:nvPr/>
-        </p:nvSpPr>
-        <p:spPr>
-          <a:xfrm>
-            <a:off x="457200" y="2478024"/>
-            <a:ext cx="11277295" cy="1051560"/>
-          </a:xfrm>
-          <a:prstGeom prst="roundRect">
-            <a:avLst>
-              <a:gd name="adj" fmla="val 12000"/>
-            </a:avLst>
-          </a:prstGeom>
-          <a:solidFill>
-            <a:srgbClr val="FFF8E1"/>
-          </a:solidFill>
-          <a:ln>
-            <a:noFill/>
-          </a:ln>
-        </p:spPr>
-        <p:style>
-          <a:lnRef idx="1">
-            <a:schemeClr val="accent1"/>
-          </a:lnRef>
-          <a:fillRef idx="3">
-            <a:schemeClr val="accent1"/>
-          </a:fillRef>
-          <a:effectRef idx="2">
-            <a:schemeClr val="accent1"/>
-          </a:effectRef>
-          <a:fontRef idx="minor">
-            <a:schemeClr val="lt1"/>
-          </a:fontRef>
-        </p:style>
-        <p:txBody>
-          <a:bodyPr rtlCol="0" anchor="ctr"/>
-          <a:lstStyle/>
-          <a:p>
-            <a:pPr algn="ctr"/>
-          </a:p>
-        </p:txBody>
-      </p:sp>
-      <p:sp>
-        <p:nvSpPr>
-          <p:cNvPr id="9" name="Rectangle 8"/>
-          <p:cNvSpPr/>
-          <p:nvPr/>
-        </p:nvSpPr>
-        <p:spPr>
-          <a:xfrm>
-            <a:off x="457200" y="2478024"/>
-            <a:ext cx="128016" cy="1051560"/>
-          </a:xfrm>
-          <a:prstGeom prst="rect">
-            <a:avLst/>
-          </a:prstGeom>
-          <a:solidFill>
-            <a:srgbClr val="FFD000"/>
-          </a:solidFill>
-          <a:ln>
-            <a:noFill/>
-          </a:ln>
-        </p:spPr>
-        <p:style>
-          <a:lnRef idx="1">
-            <a:schemeClr val="accent1"/>
-          </a:lnRef>
-          <a:fillRef idx="3">
-            <a:schemeClr val="accent1"/>
-          </a:fillRef>
-          <a:effectRef idx="2">
-            <a:schemeClr val="accent1"/>
-          </a:effectRef>
-          <a:fontRef idx="minor">
-            <a:schemeClr val="lt1"/>
-          </a:fontRef>
-        </p:style>
-        <p:txBody>
-          <a:bodyPr rtlCol="0" anchor="ctr"/>
-          <a:lstStyle/>
-          <a:p>
-            <a:pPr algn="ctr"/>
-          </a:p>
-        </p:txBody>
-      </p:sp>
-      <p:sp>
-        <p:nvSpPr>
-          <p:cNvPr id="10" name="TextBox 9"/>
-          <p:cNvSpPr txBox="1"/>
-          <p:nvPr/>
-        </p:nvSpPr>
-        <p:spPr>
-          <a:xfrm>
-            <a:off x="777240" y="2615184"/>
-            <a:ext cx="10774375" cy="822959"/>
-          </a:xfrm>
-          <a:prstGeom prst="rect">
-            <a:avLst/>
-          </a:prstGeom>
-          <a:noFill/>
-        </p:spPr>
-        <p:txBody>
-          <a:bodyPr wrap="square">
-            <a:spAutoFit/>
-          </a:bodyPr>
-          <a:lstStyle/>
-          <a:p>
-            <a:r>
-              <a:rPr sz="1200" b="1" i="0">
-                <a:solidFill>
-                  <a:srgbClr val="FFD000"/>
-                </a:solidFill>
-                <a:latin typeface="Calibri"/>
-              </a:rPr>
-              <a:t>Aclaración</a:t>
+              <a:rPr sz="2000" b="0" i="0">
+                <a:solidFill>
+                  <a:srgbClr val="333333"/>
+                </a:solidFill>
+                <a:latin typeface="Calibri"/>
+              </a:rPr>
+              <a:t>–   El segundo componente del entregable es el escenario de carga, y el estudiante casi siempre lo inventa exagerado.</a:t>
             </a:r>
           </a:p>
           <a:p>
             <a:pPr>
-              <a:spcBef>
-                <a:spcPts val="400"/>
-              </a:spcBef>
+              <a:spcAft>
+                <a:spcPts val="800"/>
+              </a:spcAft>
             </a:pPr>
             <a:r>
-              <a:rPr sz="1400" b="0" i="0">
-                <a:solidFill>
-                  <a:srgbClr val="333333"/>
-                </a:solidFill>
-                <a:latin typeface="Calibri"/>
-              </a:rPr>
-              <a:t>Subir evidencias al paquete CloudLite (Drive/repo) y a la plataforma del curso en la fecha que indique el docente.</a:t>
-            </a:r>
-          </a:p>
-        </p:txBody>
-      </p:sp>
-      <p:sp>
-        <p:nvSpPr>
-          <p:cNvPr id="11" name="Rounded Rectangle 10"/>
-          <p:cNvSpPr/>
-          <p:nvPr/>
-        </p:nvSpPr>
-        <p:spPr>
-          <a:xfrm>
-            <a:off x="457200" y="3694176"/>
-            <a:ext cx="11277295" cy="1051560"/>
-          </a:xfrm>
-          <a:prstGeom prst="roundRect">
-            <a:avLst>
-              <a:gd name="adj" fmla="val 12000"/>
-            </a:avLst>
-          </a:prstGeom>
-          <a:solidFill>
-            <a:srgbClr val="FBE4E4"/>
-          </a:solidFill>
-          <a:ln>
-            <a:noFill/>
-          </a:ln>
-        </p:spPr>
-        <p:style>
-          <a:lnRef idx="1">
-            <a:schemeClr val="accent1"/>
-          </a:lnRef>
-          <a:fillRef idx="3">
-            <a:schemeClr val="accent1"/>
-          </a:fillRef>
-          <a:effectRef idx="2">
-            <a:schemeClr val="accent1"/>
-          </a:effectRef>
-          <a:fontRef idx="minor">
-            <a:schemeClr val="lt1"/>
-          </a:fontRef>
-        </p:style>
-        <p:txBody>
-          <a:bodyPr rtlCol="0" anchor="ctr"/>
-          <a:lstStyle/>
-          <a:p>
-            <a:pPr algn="ctr"/>
-          </a:p>
-        </p:txBody>
-      </p:sp>
-      <p:sp>
-        <p:nvSpPr>
-          <p:cNvPr id="12" name="Rectangle 11"/>
-          <p:cNvSpPr/>
-          <p:nvPr/>
-        </p:nvSpPr>
-        <p:spPr>
-          <a:xfrm>
-            <a:off x="457200" y="3694176"/>
-            <a:ext cx="128016" cy="1051560"/>
-          </a:xfrm>
-          <a:prstGeom prst="rect">
-            <a:avLst/>
-          </a:prstGeom>
-          <a:solidFill>
-            <a:srgbClr val="A02030"/>
-          </a:solidFill>
-          <a:ln>
-            <a:noFill/>
-          </a:ln>
-        </p:spPr>
-        <p:style>
-          <a:lnRef idx="1">
-            <a:schemeClr val="accent1"/>
-          </a:lnRef>
-          <a:fillRef idx="3">
-            <a:schemeClr val="accent1"/>
-          </a:fillRef>
-          <a:effectRef idx="2">
-            <a:schemeClr val="accent1"/>
-          </a:effectRef>
-          <a:fontRef idx="minor">
-            <a:schemeClr val="lt1"/>
-          </a:fontRef>
-        </p:style>
-        <p:txBody>
-          <a:bodyPr rtlCol="0" anchor="ctr"/>
-          <a:lstStyle/>
-          <a:p>
-            <a:pPr algn="ctr"/>
-          </a:p>
-        </p:txBody>
-      </p:sp>
-      <p:sp>
-        <p:nvSpPr>
-          <p:cNvPr id="13" name="TextBox 12"/>
-          <p:cNvSpPr txBox="1"/>
-          <p:nvPr/>
-        </p:nvSpPr>
-        <p:spPr>
-          <a:xfrm>
-            <a:off x="777240" y="3831336"/>
-            <a:ext cx="10774375" cy="822959"/>
-          </a:xfrm>
-          <a:prstGeom prst="rect">
-            <a:avLst/>
-          </a:prstGeom>
-          <a:noFill/>
-        </p:spPr>
-        <p:txBody>
-          <a:bodyPr wrap="square">
-            <a:spAutoFit/>
-          </a:bodyPr>
-          <a:lstStyle/>
-          <a:p>
-            <a:r>
-              <a:rPr sz="1200" b="1" i="0">
-                <a:solidFill>
-                  <a:srgbClr val="A02030"/>
-                </a:solidFill>
-                <a:latin typeface="Calibri"/>
-              </a:rPr>
-              <a:t>Atención</a:t>
+              <a:rPr sz="2000" b="0" i="0">
+                <a:solidFill>
+                  <a:srgbClr val="333333"/>
+                </a:solidFill>
+                <a:latin typeface="Calibri"/>
+              </a:rPr>
+              <a:t>–   Suponga 1000 usuarios activos al dia, cada uno con unas 20 peticiones en su sesion: son 20000 peticiones diarias.</a:t>
             </a:r>
           </a:p>
           <a:p>
             <a:pPr>
-              <a:spcBef>
-                <a:spcPts val="400"/>
-              </a:spcBef>
+              <a:spcAft>
+                <a:spcPts val="800"/>
+              </a:spcAft>
             </a:pPr>
             <a:r>
-              <a:rPr sz="1400" b="0" i="0">
-                <a:solidFill>
-                  <a:srgbClr val="333333"/>
-                </a:solidFill>
-                <a:latin typeface="Calibri"/>
-              </a:rPr>
-              <a:t>Sin cloud de pago ni instalaciones obligatorias de hipervisores/Docker Desktop.</a:t>
-            </a:r>
-          </a:p>
-        </p:txBody>
-      </p:sp>
-      <p:sp>
-        <p:nvSpPr>
-          <p:cNvPr id="14" name="TextBox 13"/>
+              <a:rPr sz="2000" b="0" i="0">
+                <a:solidFill>
+                  <a:srgbClr val="333333"/>
+                </a:solidFill>
+                <a:latin typeface="Calibri"/>
+              </a:rPr>
+              <a:t>–   Si un 40 por ciento cae en una ventana de dos horas, eso es 8000 peticiones en 7200 segundos, algo mas de 1 RPS promedio en la hora pico.</a:t>
+            </a:r>
+          </a:p>
+          <a:p>
+            <a:pPr>
+              <a:spcAft>
+                <a:spcPts val="800"/>
+              </a:spcAft>
+            </a:pPr>
+            <a:r>
+              <a:rPr sz="2000" b="0" i="0">
+                <a:solidFill>
+                  <a:srgbClr val="333333"/>
+                </a:solidFill>
+                <a:latin typeface="Calibri"/>
+              </a:rPr>
+              <a:t>–   Como el trafico real llega en rafagas, se aplica un factor de pico de 3 a 5 veces y se dimensiona para unos 5 RPS.</a:t>
+            </a:r>
+          </a:p>
+          <a:p>
+            <a:pPr>
+              <a:spcAft>
+                <a:spcPts val="800"/>
+              </a:spcAft>
+            </a:pPr>
+            <a:r>
+              <a:rPr sz="2000" b="0" i="0">
+                <a:solidFill>
+                  <a:srgbClr val="333333"/>
+                </a:solidFill>
+                <a:latin typeface="Calibri"/>
+              </a:rPr>
+              <a:t>–   Ese numero es el que debe aparecer en el informe, y es un orden de magnitud tres mil veces menor que los "10000 RPS" que algun estudiante escribira por sonar ambicioso.</a:t>
+            </a:r>
+          </a:p>
+          <a:p>
+            <a:pPr>
+              <a:spcAft>
+                <a:spcPts val="800"/>
+              </a:spcAft>
+            </a:pPr>
+            <a:r>
+              <a:rPr sz="2000" b="0" i="0">
+                <a:solidFill>
+                  <a:srgbClr val="333333"/>
+                </a:solidFill>
+                <a:latin typeface="Calibri"/>
+              </a:rPr>
+              <a:t>–   La leccion es doble: un objetivo de rendimiento sin cuenta de sobre es marketing y no ingenieria, y dimensionar para 5 RPS en vez de 10000 es justamente lo que evita el sobreaprovisionamiento que la Clase 10 senalo como desperdicio.</a:t>
+            </a:r>
+          </a:p>
+        </p:txBody>
+      </p:sp>
+      <p:sp>
+        <p:nvSpPr>
+          <p:cNvPr id="6" name="TextBox 5"/>
           <p:cNvSpPr txBox="1"/>
           <p:nvPr/>
         </p:nvSpPr>
@@ -4743,13 +4336,13 @@
         <p:spPr>
           <a:xfrm>
             <a:off x="0" y="0"/>
-            <a:ext cx="12191695" cy="164592"/>
+            <a:ext cx="12191695" cy="960120"/>
           </a:xfrm>
           <a:prstGeom prst="rect">
             <a:avLst/>
           </a:prstGeom>
           <a:solidFill>
-            <a:srgbClr val="269CCB"/>
+            <a:srgbClr val="095292"/>
           </a:solidFill>
           <a:ln>
             <a:noFill/>
@@ -4777,30 +4370,49 @@
           </a:p>
         </p:txBody>
       </p:sp>
-      <p:pic>
-        <p:nvPicPr>
-          <p:cNvPr id="3" name="Picture 2" descr="logo_uniajc_color.png"/>
-          <p:cNvPicPr>
-            <a:picLocks noChangeAspect="1"/>
-          </p:cNvPicPr>
-          <p:nvPr/>
-        </p:nvPicPr>
-        <p:blipFill>
-          <a:blip r:embed="rId2"/>
-          <a:stretch>
-            <a:fillRect/>
-          </a:stretch>
-        </p:blipFill>
-        <p:spPr>
-          <a:xfrm>
-            <a:off x="10271455" y="5998464"/>
-            <a:ext cx="1463040" cy="643233"/>
-          </a:xfrm>
-          <a:prstGeom prst="rect">
-            <a:avLst/>
-          </a:prstGeom>
-        </p:spPr>
-      </p:pic>
+      <p:sp>
+        <p:nvSpPr>
+          <p:cNvPr id="3" name="Rectangle 2"/>
+          <p:cNvSpPr/>
+          <p:nvPr/>
+        </p:nvSpPr>
+        <p:spPr>
+          <a:xfrm>
+            <a:off x="0" y="960120"/>
+            <a:ext cx="12191695" cy="41148"/>
+          </a:xfrm>
+          <a:prstGeom prst="rect">
+            <a:avLst/>
+          </a:prstGeom>
+          <a:solidFill>
+            <a:srgbClr val="FFD000"/>
+          </a:solidFill>
+          <a:ln>
+            <a:noFill/>
+          </a:ln>
+        </p:spPr>
+        <p:style>
+          <a:lnRef idx="1">
+            <a:schemeClr val="accent1"/>
+          </a:lnRef>
+          <a:fillRef idx="3">
+            <a:schemeClr val="accent1"/>
+          </a:fillRef>
+          <a:effectRef idx="2">
+            <a:schemeClr val="accent1"/>
+          </a:effectRef>
+          <a:fontRef idx="minor">
+            <a:schemeClr val="lt1"/>
+          </a:fontRef>
+        </p:style>
+        <p:txBody>
+          <a:bodyPr rtlCol="0" anchor="ctr"/>
+          <a:lstStyle/>
+          <a:p>
+            <a:pPr algn="ctr"/>
+          </a:p>
+        </p:txBody>
+      </p:sp>
       <p:sp>
         <p:nvSpPr>
           <p:cNvPr id="4" name="TextBox 3"/>
@@ -4809,41 +4421,8 @@
         </p:nvSpPr>
         <p:spPr>
           <a:xfrm>
-            <a:off x="457200" y="1737360"/>
-            <a:ext cx="11277295" cy="1097280"/>
-          </a:xfrm>
-          <a:prstGeom prst="rect">
-            <a:avLst/>
-          </a:prstGeom>
-          <a:noFill/>
-        </p:spPr>
-        <p:txBody>
-          <a:bodyPr wrap="square" anchor="ctr"/>
-          <a:lstStyle/>
-          <a:p>
-            <a:pPr algn="ctr"/>
-            <a:r>
-              <a:rPr sz="3400" b="1" i="0">
-                <a:solidFill>
-                  <a:srgbClr val="095292"/>
-                </a:solidFill>
-                <a:latin typeface="Calibri"/>
-              </a:rPr>
-              <a:t>Clase 12 · PI en movimiento</a:t>
-            </a:r>
-          </a:p>
-        </p:txBody>
-      </p:sp>
-      <p:sp>
-        <p:nvSpPr>
-          <p:cNvPr id="5" name="TextBox 4"/>
-          <p:cNvSpPr txBox="1"/>
-          <p:nvPr/>
-        </p:nvSpPr>
-        <p:spPr>
-          <a:xfrm>
-            <a:off x="457200" y="3017520"/>
-            <a:ext cx="11277295" cy="1645920"/>
+            <a:off x="457200" y="164592"/>
+            <a:ext cx="11277295" cy="502920"/>
           </a:xfrm>
           <a:prstGeom prst="rect">
             <a:avLst/>
@@ -4856,65 +4435,28 @@
           </a:bodyPr>
           <a:lstStyle/>
           <a:p>
-            <a:pPr algn="ctr">
-              <a:spcAft>
-                <a:spcPts val="600"/>
-              </a:spcAft>
-            </a:pPr>
-            <a:r>
-              <a:rPr sz="1600" b="0" i="0">
-                <a:solidFill>
-                  <a:srgbClr val="333333"/>
-                </a:solidFill>
-                <a:latin typeface="Calibri"/>
-              </a:rPr>
-              <a:t>Escenario de rendimiento + ensayo 5–8 min de sustentación</a:t>
-            </a:r>
-          </a:p>
-          <a:p>
-            <a:pPr algn="ctr">
-              <a:spcAft>
-                <a:spcPts val="600"/>
-              </a:spcAft>
-            </a:pPr>
-            <a:r>
-              <a:rPr sz="1600" b="0" i="0">
-                <a:solidFill>
-                  <a:srgbClr val="333333"/>
-                </a:solidFill>
-                <a:latin typeface="Calibri"/>
-              </a:rPr>
-              <a:t>Evidencia: Sección Rendimiento + guion de pitch + paquete casi-final</a:t>
-            </a:r>
-          </a:p>
-          <a:p>
-            <a:pPr algn="ctr">
-              <a:spcAft>
-                <a:spcPts val="600"/>
-              </a:spcAft>
-            </a:pPr>
-            <a:r>
-              <a:rPr sz="1600" b="0" i="0">
-                <a:solidFill>
-                  <a:srgbClr val="333333"/>
-                </a:solidFill>
-                <a:latin typeface="Calibri"/>
-              </a:rPr>
-              <a:t>Siguiente paso = siguiente hito del PI CloudLite</a:t>
-            </a:r>
-          </a:p>
-        </p:txBody>
-      </p:sp>
-      <p:sp>
-        <p:nvSpPr>
-          <p:cNvPr id="6" name="TextBox 5"/>
+            <a:r>
+              <a:rPr sz="2600" b="1" i="0">
+                <a:solidFill>
+                  <a:srgbClr val="FFFFFF"/>
+                </a:solidFill>
+                <a:latin typeface="Calibri"/>
+              </a:rPr>
+              <a:t>El cuello de botella: siempre hay uno (1/2)</a:t>
+            </a:r>
+          </a:p>
+        </p:txBody>
+      </p:sp>
+      <p:sp>
+        <p:nvSpPr>
+          <p:cNvPr id="5" name="TextBox 4"/>
           <p:cNvSpPr txBox="1"/>
           <p:nvPr/>
         </p:nvSpPr>
         <p:spPr>
           <a:xfrm>
-            <a:off x="457200" y="4754880"/>
-            <a:ext cx="11277295" cy="640080"/>
+            <a:off x="457200" y="1170432"/>
+            <a:ext cx="11277295" cy="5230368"/>
           </a:xfrm>
           <a:prstGeom prst="rect">
             <a:avLst/>
@@ -4927,15 +4469,1774 @@
           </a:bodyPr>
           <a:lstStyle/>
           <a:p>
+            <a:pPr>
+              <a:spcAft>
+                <a:spcPts val="800"/>
+              </a:spcAft>
+            </a:pPr>
+            <a:r>
+              <a:rPr sz="2000" b="0" i="0">
+                <a:solidFill>
+                  <a:srgbClr val="333333"/>
+                </a:solidFill>
+                <a:latin typeface="Calibri"/>
+              </a:rPr>
+              <a:t>–   El tercer componente es el bottleneck, o cuello de botella: el componente que se agota primero y limita el rendimiento de todo el sistema.</a:t>
+            </a:r>
+          </a:p>
+          <a:p>
+            <a:pPr>
+              <a:spcAft>
+                <a:spcPts val="800"/>
+              </a:spcAft>
+            </a:pPr>
+            <a:r>
+              <a:rPr sz="2000" b="0" i="0">
+                <a:solidFill>
+                  <a:srgbClr val="333333"/>
+                </a:solidFill>
+                <a:latin typeface="Calibri"/>
+              </a:rPr>
+              <a:t>–   La afirmacion fuerte, que conviene decir tal cual, es que en cualquier instante hay exactamente un cuello de botella; "todo esta lento" nunca es un diagnostico, es la ausencia de uno.</a:t>
+            </a:r>
+          </a:p>
+          <a:p>
+            <a:pPr>
+              <a:spcAft>
+                <a:spcPts val="800"/>
+              </a:spcAft>
+            </a:pPr>
+            <a:r>
+              <a:rPr sz="2000" b="0" i="0">
+                <a:solidFill>
+                  <a:srgbClr val="333333"/>
+                </a:solidFill>
+                <a:latin typeface="Calibri"/>
+              </a:rPr>
+              <a:t>–   Se localiza con las senales doradas de la Clase 8, en particular la saturacion, mirando cual recurso esta cerca de su limite mientras los demas estan holgados.</a:t>
+            </a:r>
+          </a:p>
+          <a:p>
+            <a:pPr>
+              <a:spcAft>
+                <a:spcPts val="800"/>
+              </a:spcAft>
+            </a:pPr>
+            <a:r>
+              <a:rPr sz="2000" b="0" i="0">
+                <a:solidFill>
+                  <a:srgbClr val="333333"/>
+                </a:solidFill>
+                <a:latin typeface="Calibri"/>
+              </a:rPr>
+              <a:t>–   En CloudLite los candidatos son pocos y reconocibles.</a:t>
+            </a:r>
+          </a:p>
+          <a:p>
+            <a:pPr>
+              <a:spcAft>
+                <a:spcPts val="800"/>
+              </a:spcAft>
+            </a:pPr>
+            <a:r>
+              <a:rPr sz="2000" b="0" i="0">
+                <a:solidFill>
+                  <a:srgbClr val="333333"/>
+                </a:solidFill>
+                <a:latin typeface="Calibri"/>
+              </a:rPr>
+              <a:t>–   El primero es el problema N mas 1 en el endpoint de listado: la API pide la lista con una consulta y luego, dentro del ciclo, hace una consulta adicional por cada registro para traer un dato relacionado</a:t>
+            </a:r>
+          </a:p>
+        </p:txBody>
+      </p:sp>
+      <p:sp>
+        <p:nvSpPr>
+          <p:cNvPr id="6" name="TextBox 5"/>
+          <p:cNvSpPr txBox="1"/>
+          <p:nvPr/>
+        </p:nvSpPr>
+        <p:spPr>
+          <a:xfrm>
+            <a:off x="11185855" y="6473952"/>
+            <a:ext cx="640080" cy="274320"/>
+          </a:xfrm>
+          <a:prstGeom prst="rect">
+            <a:avLst/>
+          </a:prstGeom>
+          <a:noFill/>
+        </p:spPr>
+        <p:txBody>
+          <a:bodyPr wrap="square">
+            <a:spAutoFit/>
+          </a:bodyPr>
+          <a:lstStyle/>
+          <a:p>
+            <a:pPr algn="r"/>
+            <a:r>
+              <a:rPr sz="1100" b="0" i="0">
+                <a:solidFill>
+                  <a:srgbClr val="666666"/>
+                </a:solidFill>
+                <a:latin typeface="Calibri"/>
+              </a:rPr>
+              <a:t>13</a:t>
+            </a:r>
+          </a:p>
+        </p:txBody>
+      </p:sp>
+    </p:spTree>
+  </p:cSld>
+  <p:clrMapOvr>
+    <a:masterClrMapping/>
+  </p:clrMapOvr>
+</p:sld>
+</file>
+
+<file path=ppt/slides/slide14.xml><?xml version="1.0" encoding="utf-8"?>
+<p:sld xmlns:a="http://schemas.openxmlformats.org/drawingml/2006/main" xmlns:p="http://schemas.openxmlformats.org/presentationml/2006/main" xmlns:r="http://schemas.openxmlformats.org/officeDocument/2006/relationships">
+  <p:cSld>
+    <p:bg>
+      <p:bgPr>
+        <a:solidFill>
+          <a:srgbClr val="FFFFFF"/>
+        </a:solidFill>
+        <a:effectLst/>
+      </p:bgPr>
+    </p:bg>
+    <p:spTree>
+      <p:nvGrpSpPr>
+        <p:cNvPr id="1" name=""/>
+        <p:cNvGrpSpPr/>
+        <p:nvPr/>
+      </p:nvGrpSpPr>
+      <p:grpSpPr/>
+      <p:sp>
+        <p:nvSpPr>
+          <p:cNvPr id="2" name="Rectangle 1"/>
+          <p:cNvSpPr/>
+          <p:nvPr/>
+        </p:nvSpPr>
+        <p:spPr>
+          <a:xfrm>
+            <a:off x="0" y="0"/>
+            <a:ext cx="12191695" cy="960120"/>
+          </a:xfrm>
+          <a:prstGeom prst="rect">
+            <a:avLst/>
+          </a:prstGeom>
+          <a:solidFill>
+            <a:srgbClr val="095292"/>
+          </a:solidFill>
+          <a:ln>
+            <a:noFill/>
+          </a:ln>
+        </p:spPr>
+        <p:style>
+          <a:lnRef idx="1">
+            <a:schemeClr val="accent1"/>
+          </a:lnRef>
+          <a:fillRef idx="3">
+            <a:schemeClr val="accent1"/>
+          </a:fillRef>
+          <a:effectRef idx="2">
+            <a:schemeClr val="accent1"/>
+          </a:effectRef>
+          <a:fontRef idx="minor">
+            <a:schemeClr val="lt1"/>
+          </a:fontRef>
+        </p:style>
+        <p:txBody>
+          <a:bodyPr rtlCol="0" anchor="ctr"/>
+          <a:lstStyle/>
+          <a:p>
             <a:pPr algn="ctr"/>
-            <a:r>
-              <a:rPr sz="2000" b="1" i="0">
-                <a:solidFill>
-                  <a:srgbClr val="269CCB"/>
-                </a:solidFill>
-                <a:latin typeface="Calibri"/>
-              </a:rPr>
-              <a:t>Teoría al servicio del proyecto</a:t>
+          </a:p>
+        </p:txBody>
+      </p:sp>
+      <p:sp>
+        <p:nvSpPr>
+          <p:cNvPr id="3" name="Rectangle 2"/>
+          <p:cNvSpPr/>
+          <p:nvPr/>
+        </p:nvSpPr>
+        <p:spPr>
+          <a:xfrm>
+            <a:off x="0" y="960120"/>
+            <a:ext cx="12191695" cy="41148"/>
+          </a:xfrm>
+          <a:prstGeom prst="rect">
+            <a:avLst/>
+          </a:prstGeom>
+          <a:solidFill>
+            <a:srgbClr val="FFD000"/>
+          </a:solidFill>
+          <a:ln>
+            <a:noFill/>
+          </a:ln>
+        </p:spPr>
+        <p:style>
+          <a:lnRef idx="1">
+            <a:schemeClr val="accent1"/>
+          </a:lnRef>
+          <a:fillRef idx="3">
+            <a:schemeClr val="accent1"/>
+          </a:fillRef>
+          <a:effectRef idx="2">
+            <a:schemeClr val="accent1"/>
+          </a:effectRef>
+          <a:fontRef idx="minor">
+            <a:schemeClr val="lt1"/>
+          </a:fontRef>
+        </p:style>
+        <p:txBody>
+          <a:bodyPr rtlCol="0" anchor="ctr"/>
+          <a:lstStyle/>
+          <a:p>
+            <a:pPr algn="ctr"/>
+          </a:p>
+        </p:txBody>
+      </p:sp>
+      <p:sp>
+        <p:nvSpPr>
+          <p:cNvPr id="4" name="TextBox 3"/>
+          <p:cNvSpPr txBox="1"/>
+          <p:nvPr/>
+        </p:nvSpPr>
+        <p:spPr>
+          <a:xfrm>
+            <a:off x="457200" y="164592"/>
+            <a:ext cx="11277295" cy="502920"/>
+          </a:xfrm>
+          <a:prstGeom prst="rect">
+            <a:avLst/>
+          </a:prstGeom>
+          <a:noFill/>
+        </p:spPr>
+        <p:txBody>
+          <a:bodyPr wrap="square">
+            <a:spAutoFit/>
+          </a:bodyPr>
+          <a:lstStyle/>
+          <a:p>
+            <a:r>
+              <a:rPr sz="2600" b="1" i="0">
+                <a:solidFill>
+                  <a:srgbClr val="FFFFFF"/>
+                </a:solidFill>
+                <a:latin typeface="Calibri"/>
+              </a:rPr>
+              <a:t>El cuello de botella: siempre hay uno (2/2)</a:t>
+            </a:r>
+          </a:p>
+        </p:txBody>
+      </p:sp>
+      <p:sp>
+        <p:nvSpPr>
+          <p:cNvPr id="5" name="TextBox 4"/>
+          <p:cNvSpPr txBox="1"/>
+          <p:nvPr/>
+        </p:nvSpPr>
+        <p:spPr>
+          <a:xfrm>
+            <a:off x="457200" y="1170432"/>
+            <a:ext cx="11277295" cy="5230368"/>
+          </a:xfrm>
+          <a:prstGeom prst="rect">
+            <a:avLst/>
+          </a:prstGeom>
+          <a:noFill/>
+        </p:spPr>
+        <p:txBody>
+          <a:bodyPr wrap="square">
+            <a:spAutoFit/>
+          </a:bodyPr>
+          <a:lstStyle/>
+          <a:p>
+            <a:pPr>
+              <a:spcAft>
+                <a:spcPts val="800"/>
+              </a:spcAft>
+            </a:pPr>
+            <a:r>
+              <a:rPr sz="2000" b="0" i="0">
+                <a:solidFill>
+                  <a:srgbClr val="333333"/>
+                </a:solidFill>
+                <a:latin typeface="Calibri"/>
+              </a:rPr>
+              <a:t>–   Con 50 registros son 51 viajes a la base de datos y el tiempo se va en latencia de red acumulada, no en CPU.</a:t>
+            </a:r>
+          </a:p>
+          <a:p>
+            <a:pPr>
+              <a:spcAft>
+                <a:spcPts val="800"/>
+              </a:spcAft>
+            </a:pPr>
+            <a:r>
+              <a:rPr sz="2000" b="0" i="0">
+                <a:solidFill>
+                  <a:srgbClr val="333333"/>
+                </a:solidFill>
+                <a:latin typeface="Calibri"/>
+              </a:rPr>
+              <a:t>–   El segundo es el pool de conexiones: si el pool tiene 10 conexiones y llegan 40 peticiones concurrentes, 30 esperan turno y la latencia se dispara aunque la CPU de la API y la de la base de datos esten al 20 por ciento.</a:t>
+            </a:r>
+          </a:p>
+          <a:p>
+            <a:pPr>
+              <a:spcAft>
+                <a:spcPts val="800"/>
+              </a:spcAft>
+            </a:pPr>
+            <a:r>
+              <a:rPr sz="2000" b="0" i="0">
+                <a:solidFill>
+                  <a:srgbClr val="333333"/>
+                </a:solidFill>
+                <a:latin typeface="Calibri"/>
+              </a:rPr>
+              <a:t>–   El tercero, si CloudLite envia notificaciones de forma sincronica dentro de la peticion, es el proveedor externo: el usuario espera a que un tercero responda, y la mitigacion no es mas CPU sino sacar el envio de la ruta critica hacia una cola.</a:t>
+            </a:r>
+          </a:p>
+          <a:p>
+            <a:pPr>
+              <a:spcAft>
+                <a:spcPts val="800"/>
+              </a:spcAft>
+            </a:pPr>
+            <a:r>
+              <a:rPr sz="2000" b="0" i="0">
+                <a:solidFill>
+                  <a:srgbClr val="333333"/>
+                </a:solidFill>
+                <a:latin typeface="Calibri"/>
+              </a:rPr>
+              <a:t>–   Esos tres cubren la mayoria de los casos que los estudiantes van a sospechar.</a:t>
+            </a:r>
+          </a:p>
+        </p:txBody>
+      </p:sp>
+      <p:sp>
+        <p:nvSpPr>
+          <p:cNvPr id="6" name="TextBox 5"/>
+          <p:cNvSpPr txBox="1"/>
+          <p:nvPr/>
+        </p:nvSpPr>
+        <p:spPr>
+          <a:xfrm>
+            <a:off x="11185855" y="6473952"/>
+            <a:ext cx="640080" cy="274320"/>
+          </a:xfrm>
+          <a:prstGeom prst="rect">
+            <a:avLst/>
+          </a:prstGeom>
+          <a:noFill/>
+        </p:spPr>
+        <p:txBody>
+          <a:bodyPr wrap="square">
+            <a:spAutoFit/>
+          </a:bodyPr>
+          <a:lstStyle/>
+          <a:p>
+            <a:pPr algn="r"/>
+            <a:r>
+              <a:rPr sz="1100" b="0" i="0">
+                <a:solidFill>
+                  <a:srgbClr val="666666"/>
+                </a:solidFill>
+                <a:latin typeface="Calibri"/>
+              </a:rPr>
+              <a:t>14</a:t>
+            </a:r>
+          </a:p>
+        </p:txBody>
+      </p:sp>
+    </p:spTree>
+  </p:cSld>
+  <p:clrMapOvr>
+    <a:masterClrMapping/>
+  </p:clrMapOvr>
+</p:sld>
+</file>
+
+<file path=ppt/slides/slide15.xml><?xml version="1.0" encoding="utf-8"?>
+<p:sld xmlns:a="http://schemas.openxmlformats.org/drawingml/2006/main" xmlns:p="http://schemas.openxmlformats.org/presentationml/2006/main" xmlns:r="http://schemas.openxmlformats.org/officeDocument/2006/relationships">
+  <p:cSld>
+    <p:bg>
+      <p:bgPr>
+        <a:solidFill>
+          <a:srgbClr val="FFFFFF"/>
+        </a:solidFill>
+        <a:effectLst/>
+      </p:bgPr>
+    </p:bg>
+    <p:spTree>
+      <p:nvGrpSpPr>
+        <p:cNvPr id="1" name=""/>
+        <p:cNvGrpSpPr/>
+        <p:nvPr/>
+      </p:nvGrpSpPr>
+      <p:grpSpPr/>
+      <p:sp>
+        <p:nvSpPr>
+          <p:cNvPr id="2" name="Rectangle 1"/>
+          <p:cNvSpPr/>
+          <p:nvPr/>
+        </p:nvSpPr>
+        <p:spPr>
+          <a:xfrm>
+            <a:off x="0" y="0"/>
+            <a:ext cx="12191695" cy="960120"/>
+          </a:xfrm>
+          <a:prstGeom prst="rect">
+            <a:avLst/>
+          </a:prstGeom>
+          <a:solidFill>
+            <a:srgbClr val="095292"/>
+          </a:solidFill>
+          <a:ln>
+            <a:noFill/>
+          </a:ln>
+        </p:spPr>
+        <p:style>
+          <a:lnRef idx="1">
+            <a:schemeClr val="accent1"/>
+          </a:lnRef>
+          <a:fillRef idx="3">
+            <a:schemeClr val="accent1"/>
+          </a:fillRef>
+          <a:effectRef idx="2">
+            <a:schemeClr val="accent1"/>
+          </a:effectRef>
+          <a:fontRef idx="minor">
+            <a:schemeClr val="lt1"/>
+          </a:fontRef>
+        </p:style>
+        <p:txBody>
+          <a:bodyPr rtlCol="0" anchor="ctr"/>
+          <a:lstStyle/>
+          <a:p>
+            <a:pPr algn="ctr"/>
+          </a:p>
+        </p:txBody>
+      </p:sp>
+      <p:sp>
+        <p:nvSpPr>
+          <p:cNvPr id="3" name="Rectangle 2"/>
+          <p:cNvSpPr/>
+          <p:nvPr/>
+        </p:nvSpPr>
+        <p:spPr>
+          <a:xfrm>
+            <a:off x="0" y="960120"/>
+            <a:ext cx="12191695" cy="41148"/>
+          </a:xfrm>
+          <a:prstGeom prst="rect">
+            <a:avLst/>
+          </a:prstGeom>
+          <a:solidFill>
+            <a:srgbClr val="FFD000"/>
+          </a:solidFill>
+          <a:ln>
+            <a:noFill/>
+          </a:ln>
+        </p:spPr>
+        <p:style>
+          <a:lnRef idx="1">
+            <a:schemeClr val="accent1"/>
+          </a:lnRef>
+          <a:fillRef idx="3">
+            <a:schemeClr val="accent1"/>
+          </a:fillRef>
+          <a:effectRef idx="2">
+            <a:schemeClr val="accent1"/>
+          </a:effectRef>
+          <a:fontRef idx="minor">
+            <a:schemeClr val="lt1"/>
+          </a:fontRef>
+        </p:style>
+        <p:txBody>
+          <a:bodyPr rtlCol="0" anchor="ctr"/>
+          <a:lstStyle/>
+          <a:p>
+            <a:pPr algn="ctr"/>
+          </a:p>
+        </p:txBody>
+      </p:sp>
+      <p:sp>
+        <p:nvSpPr>
+          <p:cNvPr id="4" name="TextBox 3"/>
+          <p:cNvSpPr txBox="1"/>
+          <p:nvPr/>
+        </p:nvSpPr>
+        <p:spPr>
+          <a:xfrm>
+            <a:off x="457200" y="164592"/>
+            <a:ext cx="11277295" cy="502920"/>
+          </a:xfrm>
+          <a:prstGeom prst="rect">
+            <a:avLst/>
+          </a:prstGeom>
+          <a:noFill/>
+        </p:spPr>
+        <p:txBody>
+          <a:bodyPr wrap="square">
+            <a:spAutoFit/>
+          </a:bodyPr>
+          <a:lstStyle/>
+          <a:p>
+            <a:r>
+              <a:rPr sz="2600" b="1" i="0">
+                <a:solidFill>
+                  <a:srgbClr val="FFFFFF"/>
+                </a:solidFill>
+                <a:latin typeface="Calibri"/>
+              </a:rPr>
+              <a:t>Los tipos de prueba, por la pregunta que responden (1/2)</a:t>
+            </a:r>
+          </a:p>
+        </p:txBody>
+      </p:sp>
+      <p:sp>
+        <p:nvSpPr>
+          <p:cNvPr id="5" name="TextBox 4"/>
+          <p:cNvSpPr txBox="1"/>
+          <p:nvPr/>
+        </p:nvSpPr>
+        <p:spPr>
+          <a:xfrm>
+            <a:off x="457200" y="1170432"/>
+            <a:ext cx="11277295" cy="5230368"/>
+          </a:xfrm>
+          <a:prstGeom prst="rect">
+            <a:avLst/>
+          </a:prstGeom>
+          <a:noFill/>
+        </p:spPr>
+        <p:txBody>
+          <a:bodyPr wrap="square">
+            <a:spAutoFit/>
+          </a:bodyPr>
+          <a:lstStyle/>
+          <a:p>
+            <a:pPr>
+              <a:spcAft>
+                <a:spcPts val="800"/>
+              </a:spcAft>
+            </a:pPr>
+            <a:r>
+              <a:rPr sz="2000" b="0" i="0">
+                <a:solidFill>
+                  <a:srgbClr val="333333"/>
+                </a:solidFill>
+                <a:latin typeface="Calibri"/>
+              </a:rPr>
+              <a:t>–   Los tipos de prueba se distinguen por la pregunta que responden.</a:t>
+            </a:r>
+          </a:p>
+          <a:p>
+            <a:pPr>
+              <a:spcAft>
+                <a:spcPts val="800"/>
+              </a:spcAft>
+            </a:pPr>
+            <a:r>
+              <a:rPr sz="2000" b="0" i="0">
+                <a:solidFill>
+                  <a:srgbClr val="333333"/>
+                </a:solidFill>
+                <a:latin typeface="Calibri"/>
+              </a:rPr>
+              <a:t>–   La prueba de carga o baseline aplica la carga esperada y responde si el sistema cumple el SLO en condiciones normales.</a:t>
+            </a:r>
+          </a:p>
+          <a:p>
+            <a:pPr>
+              <a:spcAft>
+                <a:spcPts val="800"/>
+              </a:spcAft>
+            </a:pPr>
+            <a:r>
+              <a:rPr sz="2000" b="0" i="0">
+                <a:solidFill>
+                  <a:srgbClr val="333333"/>
+                </a:solidFill>
+                <a:latin typeface="Calibri"/>
+              </a:rPr>
+              <a:t>–   La prueba de estres sube la carga de forma progresiva hasta que el sistema se degrada o se rompe</a:t>
+            </a:r>
+          </a:p>
+          <a:p>
+            <a:pPr>
+              <a:spcAft>
+                <a:spcPts val="800"/>
+              </a:spcAft>
+            </a:pPr>
+            <a:r>
+              <a:rPr sz="2000" b="0" i="0">
+                <a:solidFill>
+                  <a:srgbClr val="333333"/>
+                </a:solidFill>
+                <a:latin typeface="Calibri"/>
+              </a:rPr>
+              <a:t>–   Y responde cual es la capacidad maxima y como se comporta al fallar; el dato interesante no es el punto de quiebre sino la forma de la falla, porque degradarse respondiendo lento es aceptable y caerse por completo no.</a:t>
+            </a:r>
+          </a:p>
+          <a:p>
+            <a:pPr>
+              <a:spcAft>
+                <a:spcPts val="800"/>
+              </a:spcAft>
+            </a:pPr>
+            <a:r>
+              <a:rPr sz="2000" b="0" i="0">
+                <a:solidFill>
+                  <a:srgbClr val="333333"/>
+                </a:solidFill>
+                <a:latin typeface="Calibri"/>
+              </a:rPr>
+              <a:t>–   La prueba de picos, o spike test, aplica una subida subita y grande simulando una promocion o una noticia viral</a:t>
+            </a:r>
+          </a:p>
+          <a:p>
+            <a:pPr>
+              <a:spcAft>
+                <a:spcPts val="800"/>
+              </a:spcAft>
+            </a:pPr>
+            <a:r>
+              <a:rPr sz="2000" b="0" i="0">
+                <a:solidFill>
+                  <a:srgbClr val="333333"/>
+                </a:solidFill>
+                <a:latin typeface="Calibri"/>
+              </a:rPr>
+              <a:t>–   Y responde si el sistema reacciona a tiempo; anticipa el limite del autoescalado de la Clase 13, porque arrancar una instancia toma decenas de segundos y un pico mas rapido golpea antes de que llegue la ayuda.</a:t>
+            </a:r>
+          </a:p>
+        </p:txBody>
+      </p:sp>
+      <p:sp>
+        <p:nvSpPr>
+          <p:cNvPr id="6" name="TextBox 5"/>
+          <p:cNvSpPr txBox="1"/>
+          <p:nvPr/>
+        </p:nvSpPr>
+        <p:spPr>
+          <a:xfrm>
+            <a:off x="11185855" y="6473952"/>
+            <a:ext cx="640080" cy="274320"/>
+          </a:xfrm>
+          <a:prstGeom prst="rect">
+            <a:avLst/>
+          </a:prstGeom>
+          <a:noFill/>
+        </p:spPr>
+        <p:txBody>
+          <a:bodyPr wrap="square">
+            <a:spAutoFit/>
+          </a:bodyPr>
+          <a:lstStyle/>
+          <a:p>
+            <a:pPr algn="r"/>
+            <a:r>
+              <a:rPr sz="1100" b="0" i="0">
+                <a:solidFill>
+                  <a:srgbClr val="666666"/>
+                </a:solidFill>
+                <a:latin typeface="Calibri"/>
+              </a:rPr>
+              <a:t>15</a:t>
+            </a:r>
+          </a:p>
+        </p:txBody>
+      </p:sp>
+    </p:spTree>
+  </p:cSld>
+  <p:clrMapOvr>
+    <a:masterClrMapping/>
+  </p:clrMapOvr>
+</p:sld>
+</file>
+
+<file path=ppt/slides/slide16.xml><?xml version="1.0" encoding="utf-8"?>
+<p:sld xmlns:a="http://schemas.openxmlformats.org/drawingml/2006/main" xmlns:p="http://schemas.openxmlformats.org/presentationml/2006/main" xmlns:r="http://schemas.openxmlformats.org/officeDocument/2006/relationships">
+  <p:cSld>
+    <p:bg>
+      <p:bgPr>
+        <a:solidFill>
+          <a:srgbClr val="FFFFFF"/>
+        </a:solidFill>
+        <a:effectLst/>
+      </p:bgPr>
+    </p:bg>
+    <p:spTree>
+      <p:nvGrpSpPr>
+        <p:cNvPr id="1" name=""/>
+        <p:cNvGrpSpPr/>
+        <p:nvPr/>
+      </p:nvGrpSpPr>
+      <p:grpSpPr/>
+      <p:sp>
+        <p:nvSpPr>
+          <p:cNvPr id="2" name="Rectangle 1"/>
+          <p:cNvSpPr/>
+          <p:nvPr/>
+        </p:nvSpPr>
+        <p:spPr>
+          <a:xfrm>
+            <a:off x="0" y="0"/>
+            <a:ext cx="12191695" cy="960120"/>
+          </a:xfrm>
+          <a:prstGeom prst="rect">
+            <a:avLst/>
+          </a:prstGeom>
+          <a:solidFill>
+            <a:srgbClr val="095292"/>
+          </a:solidFill>
+          <a:ln>
+            <a:noFill/>
+          </a:ln>
+        </p:spPr>
+        <p:style>
+          <a:lnRef idx="1">
+            <a:schemeClr val="accent1"/>
+          </a:lnRef>
+          <a:fillRef idx="3">
+            <a:schemeClr val="accent1"/>
+          </a:fillRef>
+          <a:effectRef idx="2">
+            <a:schemeClr val="accent1"/>
+          </a:effectRef>
+          <a:fontRef idx="minor">
+            <a:schemeClr val="lt1"/>
+          </a:fontRef>
+        </p:style>
+        <p:txBody>
+          <a:bodyPr rtlCol="0" anchor="ctr"/>
+          <a:lstStyle/>
+          <a:p>
+            <a:pPr algn="ctr"/>
+          </a:p>
+        </p:txBody>
+      </p:sp>
+      <p:sp>
+        <p:nvSpPr>
+          <p:cNvPr id="3" name="Rectangle 2"/>
+          <p:cNvSpPr/>
+          <p:nvPr/>
+        </p:nvSpPr>
+        <p:spPr>
+          <a:xfrm>
+            <a:off x="0" y="960120"/>
+            <a:ext cx="12191695" cy="41148"/>
+          </a:xfrm>
+          <a:prstGeom prst="rect">
+            <a:avLst/>
+          </a:prstGeom>
+          <a:solidFill>
+            <a:srgbClr val="FFD000"/>
+          </a:solidFill>
+          <a:ln>
+            <a:noFill/>
+          </a:ln>
+        </p:spPr>
+        <p:style>
+          <a:lnRef idx="1">
+            <a:schemeClr val="accent1"/>
+          </a:lnRef>
+          <a:fillRef idx="3">
+            <a:schemeClr val="accent1"/>
+          </a:fillRef>
+          <a:effectRef idx="2">
+            <a:schemeClr val="accent1"/>
+          </a:effectRef>
+          <a:fontRef idx="minor">
+            <a:schemeClr val="lt1"/>
+          </a:fontRef>
+        </p:style>
+        <p:txBody>
+          <a:bodyPr rtlCol="0" anchor="ctr"/>
+          <a:lstStyle/>
+          <a:p>
+            <a:pPr algn="ctr"/>
+          </a:p>
+        </p:txBody>
+      </p:sp>
+      <p:sp>
+        <p:nvSpPr>
+          <p:cNvPr id="4" name="TextBox 3"/>
+          <p:cNvSpPr txBox="1"/>
+          <p:nvPr/>
+        </p:nvSpPr>
+        <p:spPr>
+          <a:xfrm>
+            <a:off x="457200" y="164592"/>
+            <a:ext cx="11277295" cy="502920"/>
+          </a:xfrm>
+          <a:prstGeom prst="rect">
+            <a:avLst/>
+          </a:prstGeom>
+          <a:noFill/>
+        </p:spPr>
+        <p:txBody>
+          <a:bodyPr wrap="square">
+            <a:spAutoFit/>
+          </a:bodyPr>
+          <a:lstStyle/>
+          <a:p>
+            <a:r>
+              <a:rPr sz="2600" b="1" i="0">
+                <a:solidFill>
+                  <a:srgbClr val="FFFFFF"/>
+                </a:solidFill>
+                <a:latin typeface="Calibri"/>
+              </a:rPr>
+              <a:t>Los tipos de prueba, por la pregunta que responden (2/2)</a:t>
+            </a:r>
+          </a:p>
+        </p:txBody>
+      </p:sp>
+      <p:sp>
+        <p:nvSpPr>
+          <p:cNvPr id="5" name="TextBox 4"/>
+          <p:cNvSpPr txBox="1"/>
+          <p:nvPr/>
+        </p:nvSpPr>
+        <p:spPr>
+          <a:xfrm>
+            <a:off x="457200" y="1170432"/>
+            <a:ext cx="11277295" cy="5230368"/>
+          </a:xfrm>
+          <a:prstGeom prst="rect">
+            <a:avLst/>
+          </a:prstGeom>
+          <a:noFill/>
+        </p:spPr>
+        <p:txBody>
+          <a:bodyPr wrap="square">
+            <a:spAutoFit/>
+          </a:bodyPr>
+          <a:lstStyle/>
+          <a:p>
+            <a:pPr>
+              <a:spcAft>
+                <a:spcPts val="800"/>
+              </a:spcAft>
+            </a:pPr>
+            <a:r>
+              <a:rPr sz="2000" b="0" i="0">
+                <a:solidFill>
+                  <a:srgbClr val="333333"/>
+                </a:solidFill>
+                <a:latin typeface="Calibri"/>
+              </a:rPr>
+              <a:t>–   La prueba de resistencia, o soak, mantiene carga moderada durante horas y responde si hay fugas de memoria o conexiones que no se liberan; con menos de una hora no se detecta nada y de 2 a 4 horas es lo tipico.</a:t>
+            </a:r>
+          </a:p>
+          <a:p>
+            <a:pPr>
+              <a:spcAft>
+                <a:spcPts val="800"/>
+              </a:spcAft>
+            </a:pPr>
+            <a:r>
+              <a:rPr sz="2000" b="0" i="0">
+                <a:solidFill>
+                  <a:srgbClr val="333333"/>
+                </a:solidFill>
+                <a:latin typeface="Calibri"/>
+              </a:rPr>
+              <a:t>–   No se necesita ninguna herramienta de pago: en Killercoda se puede lanzar un contenedor con k6, hey o Apache Bench y golpear el stub del servicio, y si el lab no carga, el escenario se documenta en papel con la aritmetica de arriba.</a:t>
+            </a:r>
+          </a:p>
+          <a:p>
+            <a:pPr>
+              <a:spcAft>
+                <a:spcPts val="800"/>
+              </a:spcAft>
+            </a:pPr>
+            <a:r>
+              <a:rPr sz="2000" b="0" i="0">
+                <a:solidFill>
+                  <a:srgbClr val="333333"/>
+                </a:solidFill>
+                <a:latin typeface="Calibri"/>
+              </a:rPr>
+              <a:t>–   Un escenario bien razonado sin ejecucion vale mas que una ejecucion sin objetivo.</a:t>
+            </a:r>
+          </a:p>
+        </p:txBody>
+      </p:sp>
+      <p:sp>
+        <p:nvSpPr>
+          <p:cNvPr id="6" name="TextBox 5"/>
+          <p:cNvSpPr txBox="1"/>
+          <p:nvPr/>
+        </p:nvSpPr>
+        <p:spPr>
+          <a:xfrm>
+            <a:off x="11185855" y="6473952"/>
+            <a:ext cx="640080" cy="274320"/>
+          </a:xfrm>
+          <a:prstGeom prst="rect">
+            <a:avLst/>
+          </a:prstGeom>
+          <a:noFill/>
+        </p:spPr>
+        <p:txBody>
+          <a:bodyPr wrap="square">
+            <a:spAutoFit/>
+          </a:bodyPr>
+          <a:lstStyle/>
+          <a:p>
+            <a:pPr algn="r"/>
+            <a:r>
+              <a:rPr sz="1100" b="0" i="0">
+                <a:solidFill>
+                  <a:srgbClr val="666666"/>
+                </a:solidFill>
+                <a:latin typeface="Calibri"/>
+              </a:rPr>
+              <a:t>16</a:t>
+            </a:r>
+          </a:p>
+        </p:txBody>
+      </p:sp>
+    </p:spTree>
+  </p:cSld>
+  <p:clrMapOvr>
+    <a:masterClrMapping/>
+  </p:clrMapOvr>
+</p:sld>
+</file>
+
+<file path=ppt/slides/slide17.xml><?xml version="1.0" encoding="utf-8"?>
+<p:sld xmlns:a="http://schemas.openxmlformats.org/drawingml/2006/main" xmlns:p="http://schemas.openxmlformats.org/presentationml/2006/main" xmlns:r="http://schemas.openxmlformats.org/officeDocument/2006/relationships">
+  <p:cSld>
+    <p:bg>
+      <p:bgPr>
+        <a:solidFill>
+          <a:srgbClr val="FFFFFF"/>
+        </a:solidFill>
+        <a:effectLst/>
+      </p:bgPr>
+    </p:bg>
+    <p:spTree>
+      <p:nvGrpSpPr>
+        <p:cNvPr id="1" name=""/>
+        <p:cNvGrpSpPr/>
+        <p:nvPr/>
+      </p:nvGrpSpPr>
+      <p:grpSpPr/>
+      <p:sp>
+        <p:nvSpPr>
+          <p:cNvPr id="2" name="Rectangle 1"/>
+          <p:cNvSpPr/>
+          <p:nvPr/>
+        </p:nvSpPr>
+        <p:spPr>
+          <a:xfrm>
+            <a:off x="0" y="0"/>
+            <a:ext cx="12191695" cy="960120"/>
+          </a:xfrm>
+          <a:prstGeom prst="rect">
+            <a:avLst/>
+          </a:prstGeom>
+          <a:solidFill>
+            <a:srgbClr val="095292"/>
+          </a:solidFill>
+          <a:ln>
+            <a:noFill/>
+          </a:ln>
+        </p:spPr>
+        <p:style>
+          <a:lnRef idx="1">
+            <a:schemeClr val="accent1"/>
+          </a:lnRef>
+          <a:fillRef idx="3">
+            <a:schemeClr val="accent1"/>
+          </a:fillRef>
+          <a:effectRef idx="2">
+            <a:schemeClr val="accent1"/>
+          </a:effectRef>
+          <a:fontRef idx="minor">
+            <a:schemeClr val="lt1"/>
+          </a:fontRef>
+        </p:style>
+        <p:txBody>
+          <a:bodyPr rtlCol="0" anchor="ctr"/>
+          <a:lstStyle/>
+          <a:p>
+            <a:pPr algn="ctr"/>
+          </a:p>
+        </p:txBody>
+      </p:sp>
+      <p:sp>
+        <p:nvSpPr>
+          <p:cNvPr id="3" name="Rectangle 2"/>
+          <p:cNvSpPr/>
+          <p:nvPr/>
+        </p:nvSpPr>
+        <p:spPr>
+          <a:xfrm>
+            <a:off x="0" y="960120"/>
+            <a:ext cx="12191695" cy="41148"/>
+          </a:xfrm>
+          <a:prstGeom prst="rect">
+            <a:avLst/>
+          </a:prstGeom>
+          <a:solidFill>
+            <a:srgbClr val="FFD000"/>
+          </a:solidFill>
+          <a:ln>
+            <a:noFill/>
+          </a:ln>
+        </p:spPr>
+        <p:style>
+          <a:lnRef idx="1">
+            <a:schemeClr val="accent1"/>
+          </a:lnRef>
+          <a:fillRef idx="3">
+            <a:schemeClr val="accent1"/>
+          </a:fillRef>
+          <a:effectRef idx="2">
+            <a:schemeClr val="accent1"/>
+          </a:effectRef>
+          <a:fontRef idx="minor">
+            <a:schemeClr val="lt1"/>
+          </a:fontRef>
+        </p:style>
+        <p:txBody>
+          <a:bodyPr rtlCol="0" anchor="ctr"/>
+          <a:lstStyle/>
+          <a:p>
+            <a:pPr algn="ctr"/>
+          </a:p>
+        </p:txBody>
+      </p:sp>
+      <p:sp>
+        <p:nvSpPr>
+          <p:cNvPr id="4" name="TextBox 3"/>
+          <p:cNvSpPr txBox="1"/>
+          <p:nvPr/>
+        </p:nvSpPr>
+        <p:spPr>
+          <a:xfrm>
+            <a:off x="457200" y="164592"/>
+            <a:ext cx="11277295" cy="502920"/>
+          </a:xfrm>
+          <a:prstGeom prst="rect">
+            <a:avLst/>
+          </a:prstGeom>
+          <a:noFill/>
+        </p:spPr>
+        <p:txBody>
+          <a:bodyPr wrap="square">
+            <a:spAutoFit/>
+          </a:bodyPr>
+          <a:lstStyle/>
+          <a:p>
+            <a:r>
+              <a:rPr sz="2600" b="1" i="0">
+                <a:solidFill>
+                  <a:srgbClr val="FFFFFF"/>
+                </a:solidFill>
+                <a:latin typeface="Calibri"/>
+              </a:rPr>
+              <a:t>El ensayo del pitch: la segunda mitad tiene su propia teoria (1/2)</a:t>
+            </a:r>
+          </a:p>
+        </p:txBody>
+      </p:sp>
+      <p:sp>
+        <p:nvSpPr>
+          <p:cNvPr id="5" name="TextBox 4"/>
+          <p:cNvSpPr txBox="1"/>
+          <p:nvPr/>
+        </p:nvSpPr>
+        <p:spPr>
+          <a:xfrm>
+            <a:off x="457200" y="1170432"/>
+            <a:ext cx="11277295" cy="5230368"/>
+          </a:xfrm>
+          <a:prstGeom prst="rect">
+            <a:avLst/>
+          </a:prstGeom>
+          <a:noFill/>
+        </p:spPr>
+        <p:txBody>
+          <a:bodyPr wrap="square">
+            <a:spAutoFit/>
+          </a:bodyPr>
+          <a:lstStyle/>
+          <a:p>
+            <a:pPr>
+              <a:spcAft>
+                <a:spcPts val="800"/>
+              </a:spcAft>
+            </a:pPr>
+            <a:r>
+              <a:rPr sz="2000" b="0" i="0">
+                <a:solidFill>
+                  <a:srgbClr val="333333"/>
+                </a:solidFill>
+                <a:latin typeface="Calibri"/>
+              </a:rPr>
+              <a:t>–   La segunda mitad de la clase es el ensayo del pitch y tiene su propia teoria.</a:t>
+            </a:r>
+          </a:p>
+          <a:p>
+            <a:pPr>
+              <a:spcAft>
+                <a:spcPts val="800"/>
+              </a:spcAft>
+            </a:pPr>
+            <a:r>
+              <a:rPr sz="2000" b="0" i="0">
+                <a:solidFill>
+                  <a:srgbClr val="333333"/>
+                </a:solidFill>
+                <a:latin typeface="Calibri"/>
+              </a:rPr>
+              <a:t>–   Cinco a ocho minutos son entre 700 y 1000 palabras habladas, lo que alcanza para siete u ocho ideas y no mas, asi que el guion se escribe por presupuesto de tiempo: unos 45 segundos para el problema y el usuario</a:t>
+            </a:r>
+          </a:p>
+          <a:p>
+            <a:pPr>
+              <a:spcAft>
+                <a:spcPts val="800"/>
+              </a:spcAft>
+            </a:pPr>
+            <a:r>
+              <a:rPr sz="2000" b="0" i="0">
+                <a:solidFill>
+                  <a:srgbClr val="333333"/>
+                </a:solidFill>
+                <a:latin typeface="Calibri"/>
+              </a:rPr>
+              <a:t>–   60 para el diagrama de Contexto, 90 para los Contenedores y las decisiones que los separan, 60 para seguridad y despliegue, 45 para el pipeline y las metricas, 45 para costos y escalabilidad, y 30 de cierre.</a:t>
+            </a:r>
+          </a:p>
+          <a:p>
+            <a:pPr>
+              <a:spcAft>
+                <a:spcPts val="800"/>
+              </a:spcAft>
+            </a:pPr>
+            <a:r>
+              <a:rPr sz="2000" b="0" i="0">
+                <a:solidFill>
+                  <a:srgbClr val="333333"/>
+                </a:solidFill>
+                <a:latin typeface="Calibri"/>
+              </a:rPr>
+              <a:t>–   La regla de oro del pitch de arquitectura es que se presentan decisiones con su trade-off, no un recorrido por las cajas del diagrama: "elegimos base de datos gestionada aunque cuesta el doble</a:t>
+            </a:r>
+          </a:p>
+        </p:txBody>
+      </p:sp>
+      <p:sp>
+        <p:nvSpPr>
+          <p:cNvPr id="6" name="TextBox 5"/>
+          <p:cNvSpPr txBox="1"/>
+          <p:nvPr/>
+        </p:nvSpPr>
+        <p:spPr>
+          <a:xfrm>
+            <a:off x="11185855" y="6473952"/>
+            <a:ext cx="640080" cy="274320"/>
+          </a:xfrm>
+          <a:prstGeom prst="rect">
+            <a:avLst/>
+          </a:prstGeom>
+          <a:noFill/>
+        </p:spPr>
+        <p:txBody>
+          <a:bodyPr wrap="square">
+            <a:spAutoFit/>
+          </a:bodyPr>
+          <a:lstStyle/>
+          <a:p>
+            <a:pPr algn="r"/>
+            <a:r>
+              <a:rPr sz="1100" b="0" i="0">
+                <a:solidFill>
+                  <a:srgbClr val="666666"/>
+                </a:solidFill>
+                <a:latin typeface="Calibri"/>
+              </a:rPr>
+              <a:t>17</a:t>
+            </a:r>
+          </a:p>
+        </p:txBody>
+      </p:sp>
+    </p:spTree>
+  </p:cSld>
+  <p:clrMapOvr>
+    <a:masterClrMapping/>
+  </p:clrMapOvr>
+</p:sld>
+</file>
+
+<file path=ppt/slides/slide18.xml><?xml version="1.0" encoding="utf-8"?>
+<p:sld xmlns:a="http://schemas.openxmlformats.org/drawingml/2006/main" xmlns:p="http://schemas.openxmlformats.org/presentationml/2006/main" xmlns:r="http://schemas.openxmlformats.org/officeDocument/2006/relationships">
+  <p:cSld>
+    <p:bg>
+      <p:bgPr>
+        <a:solidFill>
+          <a:srgbClr val="FFFFFF"/>
+        </a:solidFill>
+        <a:effectLst/>
+      </p:bgPr>
+    </p:bg>
+    <p:spTree>
+      <p:nvGrpSpPr>
+        <p:cNvPr id="1" name=""/>
+        <p:cNvGrpSpPr/>
+        <p:nvPr/>
+      </p:nvGrpSpPr>
+      <p:grpSpPr/>
+      <p:sp>
+        <p:nvSpPr>
+          <p:cNvPr id="2" name="Rectangle 1"/>
+          <p:cNvSpPr/>
+          <p:nvPr/>
+        </p:nvSpPr>
+        <p:spPr>
+          <a:xfrm>
+            <a:off x="0" y="0"/>
+            <a:ext cx="12191695" cy="960120"/>
+          </a:xfrm>
+          <a:prstGeom prst="rect">
+            <a:avLst/>
+          </a:prstGeom>
+          <a:solidFill>
+            <a:srgbClr val="095292"/>
+          </a:solidFill>
+          <a:ln>
+            <a:noFill/>
+          </a:ln>
+        </p:spPr>
+        <p:style>
+          <a:lnRef idx="1">
+            <a:schemeClr val="accent1"/>
+          </a:lnRef>
+          <a:fillRef idx="3">
+            <a:schemeClr val="accent1"/>
+          </a:fillRef>
+          <a:effectRef idx="2">
+            <a:schemeClr val="accent1"/>
+          </a:effectRef>
+          <a:fontRef idx="minor">
+            <a:schemeClr val="lt1"/>
+          </a:fontRef>
+        </p:style>
+        <p:txBody>
+          <a:bodyPr rtlCol="0" anchor="ctr"/>
+          <a:lstStyle/>
+          <a:p>
+            <a:pPr algn="ctr"/>
+          </a:p>
+        </p:txBody>
+      </p:sp>
+      <p:sp>
+        <p:nvSpPr>
+          <p:cNvPr id="3" name="Rectangle 2"/>
+          <p:cNvSpPr/>
+          <p:nvPr/>
+        </p:nvSpPr>
+        <p:spPr>
+          <a:xfrm>
+            <a:off x="0" y="960120"/>
+            <a:ext cx="12191695" cy="41148"/>
+          </a:xfrm>
+          <a:prstGeom prst="rect">
+            <a:avLst/>
+          </a:prstGeom>
+          <a:solidFill>
+            <a:srgbClr val="FFD000"/>
+          </a:solidFill>
+          <a:ln>
+            <a:noFill/>
+          </a:ln>
+        </p:spPr>
+        <p:style>
+          <a:lnRef idx="1">
+            <a:schemeClr val="accent1"/>
+          </a:lnRef>
+          <a:fillRef idx="3">
+            <a:schemeClr val="accent1"/>
+          </a:fillRef>
+          <a:effectRef idx="2">
+            <a:schemeClr val="accent1"/>
+          </a:effectRef>
+          <a:fontRef idx="minor">
+            <a:schemeClr val="lt1"/>
+          </a:fontRef>
+        </p:style>
+        <p:txBody>
+          <a:bodyPr rtlCol="0" anchor="ctr"/>
+          <a:lstStyle/>
+          <a:p>
+            <a:pPr algn="ctr"/>
+          </a:p>
+        </p:txBody>
+      </p:sp>
+      <p:sp>
+        <p:nvSpPr>
+          <p:cNvPr id="4" name="TextBox 3"/>
+          <p:cNvSpPr txBox="1"/>
+          <p:nvPr/>
+        </p:nvSpPr>
+        <p:spPr>
+          <a:xfrm>
+            <a:off x="457200" y="164592"/>
+            <a:ext cx="11277295" cy="502920"/>
+          </a:xfrm>
+          <a:prstGeom prst="rect">
+            <a:avLst/>
+          </a:prstGeom>
+          <a:noFill/>
+        </p:spPr>
+        <p:txBody>
+          <a:bodyPr wrap="square">
+            <a:spAutoFit/>
+          </a:bodyPr>
+          <a:lstStyle/>
+          <a:p>
+            <a:r>
+              <a:rPr sz="2600" b="1" i="0">
+                <a:solidFill>
+                  <a:srgbClr val="FFFFFF"/>
+                </a:solidFill>
+                <a:latin typeface="Calibri"/>
+              </a:rPr>
+              <a:t>El ensayo del pitch: la segunda mitad tiene su propia teoria (2/2)</a:t>
+            </a:r>
+          </a:p>
+        </p:txBody>
+      </p:sp>
+      <p:sp>
+        <p:nvSpPr>
+          <p:cNvPr id="5" name="TextBox 4"/>
+          <p:cNvSpPr txBox="1"/>
+          <p:nvPr/>
+        </p:nvSpPr>
+        <p:spPr>
+          <a:xfrm>
+            <a:off x="457200" y="1170432"/>
+            <a:ext cx="11277295" cy="5230368"/>
+          </a:xfrm>
+          <a:prstGeom prst="rect">
+            <a:avLst/>
+          </a:prstGeom>
+          <a:noFill/>
+        </p:spPr>
+        <p:txBody>
+          <a:bodyPr wrap="square">
+            <a:spAutoFit/>
+          </a:bodyPr>
+          <a:lstStyle/>
+          <a:p>
+            <a:pPr>
+              <a:spcAft>
+                <a:spcPts val="800"/>
+              </a:spcAft>
+            </a:pPr>
+            <a:r>
+              <a:rPr sz="2000" b="0" i="0">
+                <a:solidFill>
+                  <a:srgbClr val="333333"/>
+                </a:solidFill>
+                <a:latin typeface="Calibri"/>
+              </a:rPr>
+              <a:t>–   Porque no podemos garantizar respaldos manuales" es una frase de arquitecto; "aqui tenemos una base de datos" es una leyenda de imagen.</a:t>
+            </a:r>
+          </a:p>
+          <a:p>
+            <a:pPr>
+              <a:spcAft>
+                <a:spcPts val="800"/>
+              </a:spcAft>
+            </a:pPr>
+            <a:r>
+              <a:rPr sz="2000" b="0" i="0">
+                <a:solidFill>
+                  <a:srgbClr val="333333"/>
+                </a:solidFill>
+                <a:latin typeface="Calibri"/>
+              </a:rPr>
+              <a:t>–   Se ensaya hoy con cronometro y en voz alta, porque leer mentalmente siempre da la mitad del tiempo real</a:t>
+            </a:r>
+          </a:p>
+          <a:p>
+            <a:pPr>
+              <a:spcAft>
+                <a:spcPts val="800"/>
+              </a:spcAft>
+            </a:pPr>
+            <a:r>
+              <a:rPr sz="2000" b="0" i="0">
+                <a:solidFill>
+                  <a:srgbClr val="333333"/>
+                </a:solidFill>
+                <a:latin typeface="Calibri"/>
+              </a:rPr>
+              <a:t>–   Y sin leer las diapositivas, ya que en la Clase 15 el criterio es que quien sustenta pueda explicar cualquier parte del sistema; si el docente autorizo equipos, se ensaya ademas con rotacion de expositor, porque alli el criterio aplica a cualquier integrante.</a:t>
+            </a:r>
+          </a:p>
+        </p:txBody>
+      </p:sp>
+      <p:sp>
+        <p:nvSpPr>
+          <p:cNvPr id="6" name="TextBox 5"/>
+          <p:cNvSpPr txBox="1"/>
+          <p:nvPr/>
+        </p:nvSpPr>
+        <p:spPr>
+          <a:xfrm>
+            <a:off x="11185855" y="6473952"/>
+            <a:ext cx="640080" cy="274320"/>
+          </a:xfrm>
+          <a:prstGeom prst="rect">
+            <a:avLst/>
+          </a:prstGeom>
+          <a:noFill/>
+        </p:spPr>
+        <p:txBody>
+          <a:bodyPr wrap="square">
+            <a:spAutoFit/>
+          </a:bodyPr>
+          <a:lstStyle/>
+          <a:p>
+            <a:pPr algn="r"/>
+            <a:r>
+              <a:rPr sz="1100" b="0" i="0">
+                <a:solidFill>
+                  <a:srgbClr val="666666"/>
+                </a:solidFill>
+                <a:latin typeface="Calibri"/>
+              </a:rPr>
+              <a:t>18</a:t>
+            </a:r>
+          </a:p>
+        </p:txBody>
+      </p:sp>
+    </p:spTree>
+  </p:cSld>
+  <p:clrMapOvr>
+    <a:masterClrMapping/>
+  </p:clrMapOvr>
+</p:sld>
+</file>
+
+<file path=ppt/slides/slide19.xml><?xml version="1.0" encoding="utf-8"?>
+<p:sld xmlns:a="http://schemas.openxmlformats.org/drawingml/2006/main" xmlns:p="http://schemas.openxmlformats.org/presentationml/2006/main" xmlns:r="http://schemas.openxmlformats.org/officeDocument/2006/relationships">
+  <p:cSld>
+    <p:bg>
+      <p:bgPr>
+        <a:solidFill>
+          <a:srgbClr val="FFFFFF"/>
+        </a:solidFill>
+        <a:effectLst/>
+      </p:bgPr>
+    </p:bg>
+    <p:spTree>
+      <p:nvGrpSpPr>
+        <p:cNvPr id="1" name=""/>
+        <p:cNvGrpSpPr/>
+        <p:nvPr/>
+      </p:nvGrpSpPr>
+      <p:grpSpPr/>
+      <p:sp>
+        <p:nvSpPr>
+          <p:cNvPr id="2" name="Rectangle 1"/>
+          <p:cNvSpPr/>
+          <p:nvPr/>
+        </p:nvSpPr>
+        <p:spPr>
+          <a:xfrm>
+            <a:off x="0" y="0"/>
+            <a:ext cx="12191695" cy="960120"/>
+          </a:xfrm>
+          <a:prstGeom prst="rect">
+            <a:avLst/>
+          </a:prstGeom>
+          <a:solidFill>
+            <a:srgbClr val="095292"/>
+          </a:solidFill>
+          <a:ln>
+            <a:noFill/>
+          </a:ln>
+        </p:spPr>
+        <p:style>
+          <a:lnRef idx="1">
+            <a:schemeClr val="accent1"/>
+          </a:lnRef>
+          <a:fillRef idx="3">
+            <a:schemeClr val="accent1"/>
+          </a:fillRef>
+          <a:effectRef idx="2">
+            <a:schemeClr val="accent1"/>
+          </a:effectRef>
+          <a:fontRef idx="minor">
+            <a:schemeClr val="lt1"/>
+          </a:fontRef>
+        </p:style>
+        <p:txBody>
+          <a:bodyPr rtlCol="0" anchor="ctr"/>
+          <a:lstStyle/>
+          <a:p>
+            <a:pPr algn="ctr"/>
+          </a:p>
+        </p:txBody>
+      </p:sp>
+      <p:sp>
+        <p:nvSpPr>
+          <p:cNvPr id="3" name="Rectangle 2"/>
+          <p:cNvSpPr/>
+          <p:nvPr/>
+        </p:nvSpPr>
+        <p:spPr>
+          <a:xfrm>
+            <a:off x="0" y="960120"/>
+            <a:ext cx="12191695" cy="41148"/>
+          </a:xfrm>
+          <a:prstGeom prst="rect">
+            <a:avLst/>
+          </a:prstGeom>
+          <a:solidFill>
+            <a:srgbClr val="FFD000"/>
+          </a:solidFill>
+          <a:ln>
+            <a:noFill/>
+          </a:ln>
+        </p:spPr>
+        <p:style>
+          <a:lnRef idx="1">
+            <a:schemeClr val="accent1"/>
+          </a:lnRef>
+          <a:fillRef idx="3">
+            <a:schemeClr val="accent1"/>
+          </a:fillRef>
+          <a:effectRef idx="2">
+            <a:schemeClr val="accent1"/>
+          </a:effectRef>
+          <a:fontRef idx="minor">
+            <a:schemeClr val="lt1"/>
+          </a:fontRef>
+        </p:style>
+        <p:txBody>
+          <a:bodyPr rtlCol="0" anchor="ctr"/>
+          <a:lstStyle/>
+          <a:p>
+            <a:pPr algn="ctr"/>
+          </a:p>
+        </p:txBody>
+      </p:sp>
+      <p:sp>
+        <p:nvSpPr>
+          <p:cNvPr id="4" name="TextBox 3"/>
+          <p:cNvSpPr txBox="1"/>
+          <p:nvPr/>
+        </p:nvSpPr>
+        <p:spPr>
+          <a:xfrm>
+            <a:off x="457200" y="164592"/>
+            <a:ext cx="11277295" cy="502920"/>
+          </a:xfrm>
+          <a:prstGeom prst="rect">
+            <a:avLst/>
+          </a:prstGeom>
+          <a:noFill/>
+        </p:spPr>
+        <p:txBody>
+          <a:bodyPr wrap="square">
+            <a:spAutoFit/>
+          </a:bodyPr>
+          <a:lstStyle/>
+          <a:p>
+            <a:r>
+              <a:rPr sz="2600" b="1" i="0">
+                <a:solidFill>
+                  <a:srgbClr val="FFFFFF"/>
+                </a:solidFill>
+                <a:latin typeface="Calibri"/>
+              </a:rPr>
+              <a:t>Preguntas frecuentes y cierre conceptual () (1/2)</a:t>
+            </a:r>
+          </a:p>
+        </p:txBody>
+      </p:sp>
+      <p:sp>
+        <p:nvSpPr>
+          <p:cNvPr id="5" name="TextBox 4"/>
+          <p:cNvSpPr txBox="1"/>
+          <p:nvPr/>
+        </p:nvSpPr>
+        <p:spPr>
+          <a:xfrm>
+            <a:off x="457200" y="1170432"/>
+            <a:ext cx="11277295" cy="5230368"/>
+          </a:xfrm>
+          <a:prstGeom prst="rect">
+            <a:avLst/>
+          </a:prstGeom>
+          <a:noFill/>
+        </p:spPr>
+        <p:txBody>
+          <a:bodyPr wrap="square">
+            <a:spAutoFit/>
+          </a:bodyPr>
+          <a:lstStyle/>
+          <a:p>
+            <a:pPr>
+              <a:spcAft>
+                <a:spcPts val="800"/>
+              </a:spcAft>
+            </a:pPr>
+            <a:r>
+              <a:rPr sz="1900" b="0" i="0">
+                <a:solidFill>
+                  <a:srgbClr val="333333"/>
+                </a:solidFill>
+                <a:latin typeface="Calibri"/>
+              </a:rPr>
+              <a:t>–   La primera es como se prueba rendimiento sin usuarios reales; la respuesta es que la carga se simula y que lo valioso no es el numero obtenido sino el modelo: si el estudiante puede decir cuantos usuarios, cuantas peticiones por usuario</a:t>
+            </a:r>
+          </a:p>
+          <a:p>
+            <a:pPr>
+              <a:spcAft>
+                <a:spcPts val="800"/>
+              </a:spcAft>
+            </a:pPr>
+            <a:r>
+              <a:rPr sz="1900" b="0" i="0">
+                <a:solidFill>
+                  <a:srgbClr val="333333"/>
+                </a:solidFill>
+                <a:latin typeface="Calibri"/>
+              </a:rPr>
+              <a:t>–   Que factor de pico y que componente cree que cede primero, ya esta haciendo ingenieria de rendimiento aunque el sistema sea un stub.</a:t>
+            </a:r>
+          </a:p>
+          <a:p>
+            <a:pPr>
+              <a:spcAft>
+                <a:spcPts val="800"/>
+              </a:spcAft>
+            </a:pPr>
+            <a:r>
+              <a:rPr sz="1900" b="0" i="0">
+                <a:solidFill>
+                  <a:srgbClr val="333333"/>
+                </a:solidFill>
+                <a:latin typeface="Calibri"/>
+              </a:rPr>
+              <a:t>–   La segunda es si no basta con decir que se usara cache; la respuesta es que una mitigacion sin medicion es una creencia</a:t>
+            </a:r>
+          </a:p>
+          <a:p>
+            <a:pPr>
+              <a:spcAft>
+                <a:spcPts val="800"/>
+              </a:spcAft>
+            </a:pPr>
+            <a:r>
+              <a:rPr sz="1900" b="0" i="0">
+                <a:solidFill>
+                  <a:srgbClr val="333333"/>
+                </a:solidFill>
+                <a:latin typeface="Calibri"/>
+              </a:rPr>
+              <a:t>–   Y que la pregunta correcta es cache de que, con que tiempo de vida, que porcentaje de aciertos se espera y que pasa cuando el dato cambia, porque una cache mal invalidada convierte un problema de lentitud en un problema de datos incorrectos, que es peor.</a:t>
+            </a:r>
+          </a:p>
+          <a:p>
+            <a:pPr>
+              <a:spcAft>
+                <a:spcPts val="800"/>
+              </a:spcAft>
+            </a:pPr>
+            <a:r>
+              <a:rPr sz="1900" b="0" i="0">
+                <a:solidFill>
+                  <a:srgbClr val="333333"/>
+                </a:solidFill>
+                <a:latin typeface="Calibri"/>
+              </a:rPr>
+              <a:t>–   La tercera es cual es un buen p95, y la respuesta debe resistir la tentacion de dar una cifra universal: depende del caso de uso</a:t>
+            </a:r>
+          </a:p>
+          <a:p>
+            <a:pPr>
+              <a:spcAft>
+                <a:spcPts val="800"/>
+              </a:spcAft>
+            </a:pPr>
+            <a:r>
+              <a:rPr sz="1900" b="0" i="0">
+                <a:solidFill>
+                  <a:srgbClr val="333333"/>
+                </a:solidFill>
+                <a:latin typeface="Calibri"/>
+              </a:rPr>
+              <a:t>–   Y el criterio es que el numero este justificado y sea alcanzable con la arquitectura dibujada</a:t>
+            </a:r>
+          </a:p>
+          <a:p>
+            <a:pPr>
+              <a:spcAft>
+                <a:spcPts val="800"/>
+              </a:spcAft>
+            </a:pPr>
+            <a:r>
+              <a:rPr sz="1900" b="0" i="0">
+                <a:solidFill>
+                  <a:srgbClr val="333333"/>
+                </a:solidFill>
+                <a:latin typeface="Calibri"/>
+              </a:rPr>
+              <a:t>–   Quien promete p95 de 50 milisegundos con una consulta que recorre toda la tabla tiene un objetivo incoherente, y eso es un hallazgo mas grave que tener un objetivo modesto.</a:t>
+            </a:r>
+          </a:p>
+        </p:txBody>
+      </p:sp>
+      <p:sp>
+        <p:nvSpPr>
+          <p:cNvPr id="6" name="TextBox 5"/>
+          <p:cNvSpPr txBox="1"/>
+          <p:nvPr/>
+        </p:nvSpPr>
+        <p:spPr>
+          <a:xfrm>
+            <a:off x="11185855" y="6473952"/>
+            <a:ext cx="640080" cy="274320"/>
+          </a:xfrm>
+          <a:prstGeom prst="rect">
+            <a:avLst/>
+          </a:prstGeom>
+          <a:noFill/>
+        </p:spPr>
+        <p:txBody>
+          <a:bodyPr wrap="square">
+            <a:spAutoFit/>
+          </a:bodyPr>
+          <a:lstStyle/>
+          <a:p>
+            <a:pPr algn="r"/>
+            <a:r>
+              <a:rPr sz="1100" b="0" i="0">
+                <a:solidFill>
+                  <a:srgbClr val="666666"/>
+                </a:solidFill>
+                <a:latin typeface="Calibri"/>
+              </a:rPr>
+              <a:t>19</a:t>
             </a:r>
           </a:p>
         </p:txBody>
@@ -5295,6 +6596,4399 @@
 </p:sld>
 </file>
 
+<file path=ppt/slides/slide20.xml><?xml version="1.0" encoding="utf-8"?>
+<p:sld xmlns:a="http://schemas.openxmlformats.org/drawingml/2006/main" xmlns:p="http://schemas.openxmlformats.org/presentationml/2006/main" xmlns:r="http://schemas.openxmlformats.org/officeDocument/2006/relationships">
+  <p:cSld>
+    <p:bg>
+      <p:bgPr>
+        <a:solidFill>
+          <a:srgbClr val="FFFFFF"/>
+        </a:solidFill>
+        <a:effectLst/>
+      </p:bgPr>
+    </p:bg>
+    <p:spTree>
+      <p:nvGrpSpPr>
+        <p:cNvPr id="1" name=""/>
+        <p:cNvGrpSpPr/>
+        <p:nvPr/>
+      </p:nvGrpSpPr>
+      <p:grpSpPr/>
+      <p:sp>
+        <p:nvSpPr>
+          <p:cNvPr id="2" name="Rectangle 1"/>
+          <p:cNvSpPr/>
+          <p:nvPr/>
+        </p:nvSpPr>
+        <p:spPr>
+          <a:xfrm>
+            <a:off x="0" y="0"/>
+            <a:ext cx="12191695" cy="960120"/>
+          </a:xfrm>
+          <a:prstGeom prst="rect">
+            <a:avLst/>
+          </a:prstGeom>
+          <a:solidFill>
+            <a:srgbClr val="095292"/>
+          </a:solidFill>
+          <a:ln>
+            <a:noFill/>
+          </a:ln>
+        </p:spPr>
+        <p:style>
+          <a:lnRef idx="1">
+            <a:schemeClr val="accent1"/>
+          </a:lnRef>
+          <a:fillRef idx="3">
+            <a:schemeClr val="accent1"/>
+          </a:fillRef>
+          <a:effectRef idx="2">
+            <a:schemeClr val="accent1"/>
+          </a:effectRef>
+          <a:fontRef idx="minor">
+            <a:schemeClr val="lt1"/>
+          </a:fontRef>
+        </p:style>
+        <p:txBody>
+          <a:bodyPr rtlCol="0" anchor="ctr"/>
+          <a:lstStyle/>
+          <a:p>
+            <a:pPr algn="ctr"/>
+          </a:p>
+        </p:txBody>
+      </p:sp>
+      <p:sp>
+        <p:nvSpPr>
+          <p:cNvPr id="3" name="Rectangle 2"/>
+          <p:cNvSpPr/>
+          <p:nvPr/>
+        </p:nvSpPr>
+        <p:spPr>
+          <a:xfrm>
+            <a:off x="0" y="960120"/>
+            <a:ext cx="12191695" cy="41148"/>
+          </a:xfrm>
+          <a:prstGeom prst="rect">
+            <a:avLst/>
+          </a:prstGeom>
+          <a:solidFill>
+            <a:srgbClr val="FFD000"/>
+          </a:solidFill>
+          <a:ln>
+            <a:noFill/>
+          </a:ln>
+        </p:spPr>
+        <p:style>
+          <a:lnRef idx="1">
+            <a:schemeClr val="accent1"/>
+          </a:lnRef>
+          <a:fillRef idx="3">
+            <a:schemeClr val="accent1"/>
+          </a:fillRef>
+          <a:effectRef idx="2">
+            <a:schemeClr val="accent1"/>
+          </a:effectRef>
+          <a:fontRef idx="minor">
+            <a:schemeClr val="lt1"/>
+          </a:fontRef>
+        </p:style>
+        <p:txBody>
+          <a:bodyPr rtlCol="0" anchor="ctr"/>
+          <a:lstStyle/>
+          <a:p>
+            <a:pPr algn="ctr"/>
+          </a:p>
+        </p:txBody>
+      </p:sp>
+      <p:sp>
+        <p:nvSpPr>
+          <p:cNvPr id="4" name="TextBox 3"/>
+          <p:cNvSpPr txBox="1"/>
+          <p:nvPr/>
+        </p:nvSpPr>
+        <p:spPr>
+          <a:xfrm>
+            <a:off x="457200" y="164592"/>
+            <a:ext cx="11277295" cy="502920"/>
+          </a:xfrm>
+          <a:prstGeom prst="rect">
+            <a:avLst/>
+          </a:prstGeom>
+          <a:noFill/>
+        </p:spPr>
+        <p:txBody>
+          <a:bodyPr wrap="square">
+            <a:spAutoFit/>
+          </a:bodyPr>
+          <a:lstStyle/>
+          <a:p>
+            <a:r>
+              <a:rPr sz="2600" b="1" i="0">
+                <a:solidFill>
+                  <a:srgbClr val="FFFFFF"/>
+                </a:solidFill>
+                <a:latin typeface="Calibri"/>
+              </a:rPr>
+              <a:t>Preguntas frecuentes y cierre conceptual () (2/2)</a:t>
+            </a:r>
+          </a:p>
+        </p:txBody>
+      </p:sp>
+      <p:sp>
+        <p:nvSpPr>
+          <p:cNvPr id="5" name="TextBox 4"/>
+          <p:cNvSpPr txBox="1"/>
+          <p:nvPr/>
+        </p:nvSpPr>
+        <p:spPr>
+          <a:xfrm>
+            <a:off x="457200" y="1170432"/>
+            <a:ext cx="11277295" cy="5230368"/>
+          </a:xfrm>
+          <a:prstGeom prst="rect">
+            <a:avLst/>
+          </a:prstGeom>
+          <a:noFill/>
+        </p:spPr>
+        <p:txBody>
+          <a:bodyPr wrap="square">
+            <a:spAutoFit/>
+          </a:bodyPr>
+          <a:lstStyle/>
+          <a:p>
+            <a:pPr>
+              <a:spcAft>
+                <a:spcPts val="800"/>
+              </a:spcAft>
+            </a:pPr>
+            <a:r>
+              <a:rPr sz="1900" b="0" i="0">
+                <a:solidFill>
+                  <a:srgbClr val="333333"/>
+                </a:solidFill>
+                <a:latin typeface="Calibri"/>
+              </a:rPr>
+              <a:t>–   Error tipico del docente que no domina el tema: aceptar "queremos que la app sea rapida" como objetivo de rendimiento.</a:t>
+            </a:r>
+          </a:p>
+          <a:p>
+            <a:pPr>
+              <a:spcAft>
+                <a:spcPts val="800"/>
+              </a:spcAft>
+            </a:pPr>
+            <a:r>
+              <a:rPr sz="1900" b="0" i="0">
+                <a:solidFill>
+                  <a:srgbClr val="333333"/>
+                </a:solidFill>
+                <a:latin typeface="Calibri"/>
+              </a:rPr>
+              <a:t>–   Sin metrica en percentil, sin umbral, sin condicion de carga y sin cuello de botella sospechado, la seccion de rendimiento del informe se convierte en adjetivos</a:t>
+            </a:r>
+          </a:p>
+          <a:p>
+            <a:pPr>
+              <a:spcAft>
+                <a:spcPts val="800"/>
+              </a:spcAft>
+            </a:pPr>
+            <a:r>
+              <a:rPr sz="1900" b="0" i="0">
+                <a:solidFill>
+                  <a:srgbClr val="333333"/>
+                </a:solidFill>
+                <a:latin typeface="Calibri"/>
+              </a:rPr>
+              <a:t>–   Y la consecuencia es inmediata aguas abajo: en la Clase 13 el estudiante no tiene nada sobre lo que basar el trigger del autoescalado y escribe "cuando la CPU suba"</a:t>
+            </a:r>
+          </a:p>
+          <a:p>
+            <a:pPr>
+              <a:spcAft>
+                <a:spcPts val="800"/>
+              </a:spcAft>
+            </a:pPr>
+            <a:r>
+              <a:rPr sz="1900" b="0" i="0">
+                <a:solidFill>
+                  <a:srgbClr val="333333"/>
+                </a:solidFill>
+                <a:latin typeface="Calibri"/>
+              </a:rPr>
+              <a:t>–   Y en la sustentacion de la Clase 15 no puede responder por que su diseno soporta la carga que dice soportar.</a:t>
+            </a:r>
+          </a:p>
+          <a:p>
+            <a:pPr>
+              <a:spcAft>
+                <a:spcPts val="800"/>
+              </a:spcAft>
+            </a:pPr>
+            <a:r>
+              <a:rPr sz="1900" b="0" i="0">
+                <a:solidFill>
+                  <a:srgbClr val="333333"/>
+                </a:solidFill>
+                <a:latin typeface="Calibri"/>
+              </a:rPr>
+              <a:t>–   El segundo error es dejar que el ensayo del pitch se convierta en un recorrido narrado del diagrama, leido en voz alta y sin una sola justificacion</a:t>
+            </a:r>
+          </a:p>
+          <a:p>
+            <a:pPr>
+              <a:spcAft>
+                <a:spcPts val="800"/>
+              </a:spcAft>
+            </a:pPr>
+            <a:r>
+              <a:rPr sz="1900" b="0" i="0">
+                <a:solidFill>
+                  <a:srgbClr val="333333"/>
+                </a:solidFill>
+                <a:latin typeface="Calibri"/>
+              </a:rPr>
+              <a:t>–   Y, en los equipos que el docente haya autorizado, permitir que un solo integrante hable mientras el resto observa.</a:t>
+            </a:r>
+          </a:p>
+          <a:p>
+            <a:pPr>
+              <a:spcAft>
+                <a:spcPts val="800"/>
+              </a:spcAft>
+            </a:pPr>
+            <a:r>
+              <a:rPr sz="1900" b="0" i="0">
+                <a:solidFill>
+                  <a:srgbClr val="333333"/>
+                </a:solidFill>
+                <a:latin typeface="Calibri"/>
+              </a:rPr>
+              <a:t>–   Si eso no se corrige hoy, en la Clase 15 la sustentacion llega como un guion memorizado que el Q&amp;A dirigido desarma en dos preguntas, y la nota cae por una razon que era corregible con quince minutos de ensayo bien dirigido.</a:t>
+            </a:r>
+          </a:p>
+        </p:txBody>
+      </p:sp>
+      <p:sp>
+        <p:nvSpPr>
+          <p:cNvPr id="6" name="TextBox 5"/>
+          <p:cNvSpPr txBox="1"/>
+          <p:nvPr/>
+        </p:nvSpPr>
+        <p:spPr>
+          <a:xfrm>
+            <a:off x="11185855" y="6473952"/>
+            <a:ext cx="640080" cy="274320"/>
+          </a:xfrm>
+          <a:prstGeom prst="rect">
+            <a:avLst/>
+          </a:prstGeom>
+          <a:noFill/>
+        </p:spPr>
+        <p:txBody>
+          <a:bodyPr wrap="square">
+            <a:spAutoFit/>
+          </a:bodyPr>
+          <a:lstStyle/>
+          <a:p>
+            <a:pPr algn="r"/>
+            <a:r>
+              <a:rPr sz="1100" b="0" i="0">
+                <a:solidFill>
+                  <a:srgbClr val="666666"/>
+                </a:solidFill>
+                <a:latin typeface="Calibri"/>
+              </a:rPr>
+              <a:t>20</a:t>
+            </a:r>
+          </a:p>
+        </p:txBody>
+      </p:sp>
+    </p:spTree>
+  </p:cSld>
+  <p:clrMapOvr>
+    <a:masterClrMapping/>
+  </p:clrMapOvr>
+</p:sld>
+</file>
+
+<file path=ppt/slides/slide21.xml><?xml version="1.0" encoding="utf-8"?>
+<p:sld xmlns:a="http://schemas.openxmlformats.org/drawingml/2006/main" xmlns:p="http://schemas.openxmlformats.org/presentationml/2006/main" xmlns:r="http://schemas.openxmlformats.org/officeDocument/2006/relationships">
+  <p:cSld>
+    <p:bg>
+      <p:bgPr>
+        <a:solidFill>
+          <a:srgbClr val="FFFFFF"/>
+        </a:solidFill>
+        <a:effectLst/>
+      </p:bgPr>
+    </p:bg>
+    <p:spTree>
+      <p:nvGrpSpPr>
+        <p:cNvPr id="1" name=""/>
+        <p:cNvGrpSpPr/>
+        <p:nvPr/>
+      </p:nvGrpSpPr>
+      <p:grpSpPr/>
+      <p:sp>
+        <p:nvSpPr>
+          <p:cNvPr id="2" name="Rectangle 1"/>
+          <p:cNvSpPr/>
+          <p:nvPr/>
+        </p:nvSpPr>
+        <p:spPr>
+          <a:xfrm>
+            <a:off x="0" y="0"/>
+            <a:ext cx="12191695" cy="960120"/>
+          </a:xfrm>
+          <a:prstGeom prst="rect">
+            <a:avLst/>
+          </a:prstGeom>
+          <a:solidFill>
+            <a:srgbClr val="095292"/>
+          </a:solidFill>
+          <a:ln>
+            <a:noFill/>
+          </a:ln>
+        </p:spPr>
+        <p:style>
+          <a:lnRef idx="1">
+            <a:schemeClr val="accent1"/>
+          </a:lnRef>
+          <a:fillRef idx="3">
+            <a:schemeClr val="accent1"/>
+          </a:fillRef>
+          <a:effectRef idx="2">
+            <a:schemeClr val="accent1"/>
+          </a:effectRef>
+          <a:fontRef idx="minor">
+            <a:schemeClr val="lt1"/>
+          </a:fontRef>
+        </p:style>
+        <p:txBody>
+          <a:bodyPr rtlCol="0" anchor="ctr"/>
+          <a:lstStyle/>
+          <a:p>
+            <a:pPr algn="ctr"/>
+          </a:p>
+        </p:txBody>
+      </p:sp>
+      <p:sp>
+        <p:nvSpPr>
+          <p:cNvPr id="3" name="Rectangle 2"/>
+          <p:cNvSpPr/>
+          <p:nvPr/>
+        </p:nvSpPr>
+        <p:spPr>
+          <a:xfrm>
+            <a:off x="0" y="960120"/>
+            <a:ext cx="12191695" cy="41148"/>
+          </a:xfrm>
+          <a:prstGeom prst="rect">
+            <a:avLst/>
+          </a:prstGeom>
+          <a:solidFill>
+            <a:srgbClr val="FFD000"/>
+          </a:solidFill>
+          <a:ln>
+            <a:noFill/>
+          </a:ln>
+        </p:spPr>
+        <p:style>
+          <a:lnRef idx="1">
+            <a:schemeClr val="accent1"/>
+          </a:lnRef>
+          <a:fillRef idx="3">
+            <a:schemeClr val="accent1"/>
+          </a:fillRef>
+          <a:effectRef idx="2">
+            <a:schemeClr val="accent1"/>
+          </a:effectRef>
+          <a:fontRef idx="minor">
+            <a:schemeClr val="lt1"/>
+          </a:fontRef>
+        </p:style>
+        <p:txBody>
+          <a:bodyPr rtlCol="0" anchor="ctr"/>
+          <a:lstStyle/>
+          <a:p>
+            <a:pPr algn="ctr"/>
+          </a:p>
+        </p:txBody>
+      </p:sp>
+      <p:sp>
+        <p:nvSpPr>
+          <p:cNvPr id="4" name="TextBox 3"/>
+          <p:cNvSpPr txBox="1"/>
+          <p:nvPr/>
+        </p:nvSpPr>
+        <p:spPr>
+          <a:xfrm>
+            <a:off x="457200" y="164592"/>
+            <a:ext cx="11277295" cy="502920"/>
+          </a:xfrm>
+          <a:prstGeom prst="rect">
+            <a:avLst/>
+          </a:prstGeom>
+          <a:noFill/>
+        </p:spPr>
+        <p:txBody>
+          <a:bodyPr wrap="square">
+            <a:spAutoFit/>
+          </a:bodyPr>
+          <a:lstStyle/>
+          <a:p>
+            <a:r>
+              <a:rPr sz="2600" b="1" i="0">
+                <a:solidFill>
+                  <a:srgbClr val="FFFFFF"/>
+                </a:solidFill>
+                <a:latin typeface="Calibri"/>
+              </a:rPr>
+              <a:t>«Que sea rapido» no es un requisito</a:t>
+            </a:r>
+          </a:p>
+        </p:txBody>
+      </p:sp>
+      <p:sp>
+        <p:nvSpPr>
+          <p:cNvPr id="5" name="Rounded Rectangle 4"/>
+          <p:cNvSpPr/>
+          <p:nvPr/>
+        </p:nvSpPr>
+        <p:spPr>
+          <a:xfrm>
+            <a:off x="457200" y="1261872"/>
+            <a:ext cx="5478627" cy="5093208"/>
+          </a:xfrm>
+          <a:prstGeom prst="roundRect">
+            <a:avLst>
+              <a:gd name="adj" fmla="val 12000"/>
+            </a:avLst>
+          </a:prstGeom>
+          <a:solidFill>
+            <a:srgbClr val="FBE4E4"/>
+          </a:solidFill>
+          <a:ln>
+            <a:noFill/>
+          </a:ln>
+        </p:spPr>
+        <p:style>
+          <a:lnRef idx="1">
+            <a:schemeClr val="accent1"/>
+          </a:lnRef>
+          <a:fillRef idx="3">
+            <a:schemeClr val="accent1"/>
+          </a:fillRef>
+          <a:effectRef idx="2">
+            <a:schemeClr val="accent1"/>
+          </a:effectRef>
+          <a:fontRef idx="minor">
+            <a:schemeClr val="lt1"/>
+          </a:fontRef>
+        </p:style>
+        <p:txBody>
+          <a:bodyPr rtlCol="0" anchor="ctr"/>
+          <a:lstStyle/>
+          <a:p>
+            <a:pPr algn="ctr"/>
+          </a:p>
+        </p:txBody>
+      </p:sp>
+      <p:sp>
+        <p:nvSpPr>
+          <p:cNvPr id="6" name="Rectangle 5"/>
+          <p:cNvSpPr/>
+          <p:nvPr/>
+        </p:nvSpPr>
+        <p:spPr>
+          <a:xfrm>
+            <a:off x="457200" y="1261872"/>
+            <a:ext cx="5478627" cy="502920"/>
+          </a:xfrm>
+          <a:prstGeom prst="rect">
+            <a:avLst/>
+          </a:prstGeom>
+          <a:solidFill>
+            <a:srgbClr val="A02030"/>
+          </a:solidFill>
+          <a:ln>
+            <a:noFill/>
+          </a:ln>
+        </p:spPr>
+        <p:style>
+          <a:lnRef idx="1">
+            <a:schemeClr val="accent1"/>
+          </a:lnRef>
+          <a:fillRef idx="3">
+            <a:schemeClr val="accent1"/>
+          </a:fillRef>
+          <a:effectRef idx="2">
+            <a:schemeClr val="accent1"/>
+          </a:effectRef>
+          <a:fontRef idx="minor">
+            <a:schemeClr val="lt1"/>
+          </a:fontRef>
+        </p:style>
+        <p:txBody>
+          <a:bodyPr rtlCol="0" anchor="ctr"/>
+          <a:lstStyle/>
+          <a:p>
+            <a:pPr algn="ctr"/>
+          </a:p>
+        </p:txBody>
+      </p:sp>
+      <p:sp>
+        <p:nvSpPr>
+          <p:cNvPr id="7" name="TextBox 6"/>
+          <p:cNvSpPr txBox="1"/>
+          <p:nvPr/>
+        </p:nvSpPr>
+        <p:spPr>
+          <a:xfrm>
+            <a:off x="594360" y="1353312"/>
+            <a:ext cx="5204307" cy="365760"/>
+          </a:xfrm>
+          <a:prstGeom prst="rect">
+            <a:avLst/>
+          </a:prstGeom>
+          <a:noFill/>
+        </p:spPr>
+        <p:txBody>
+          <a:bodyPr wrap="square" anchor="ctr"/>
+          <a:lstStyle/>
+          <a:p>
+            <a:pPr algn="ctr"/>
+            <a:r>
+              <a:rPr sz="1600" b="1" i="0">
+                <a:solidFill>
+                  <a:srgbClr val="FFFFFF"/>
+                </a:solidFill>
+                <a:latin typeface="Calibri"/>
+              </a:rPr>
+              <a:t>Enunciado vago</a:t>
+            </a:r>
+          </a:p>
+        </p:txBody>
+      </p:sp>
+      <p:sp>
+        <p:nvSpPr>
+          <p:cNvPr id="8" name="TextBox 7"/>
+          <p:cNvSpPr txBox="1"/>
+          <p:nvPr/>
+        </p:nvSpPr>
+        <p:spPr>
+          <a:xfrm>
+            <a:off x="621792" y="1901952"/>
+            <a:ext cx="5158587" cy="4498848"/>
+          </a:xfrm>
+          <a:prstGeom prst="rect">
+            <a:avLst/>
+          </a:prstGeom>
+          <a:noFill/>
+        </p:spPr>
+        <p:txBody>
+          <a:bodyPr wrap="square">
+            <a:spAutoFit/>
+          </a:bodyPr>
+          <a:lstStyle/>
+          <a:p>
+            <a:pPr>
+              <a:spcAft>
+                <a:spcPts val="800"/>
+              </a:spcAft>
+            </a:pPr>
+            <a:r>
+              <a:rPr sz="1500" b="0" i="0">
+                <a:solidFill>
+                  <a:srgbClr val="333333"/>
+                </a:solidFill>
+                <a:latin typeface="Calibri"/>
+              </a:rPr>
+              <a:t>–   «La app tiene que ser rapida»</a:t>
+            </a:r>
+          </a:p>
+          <a:p>
+            <a:pPr>
+              <a:spcAft>
+                <a:spcPts val="800"/>
+              </a:spcAft>
+            </a:pPr>
+            <a:r>
+              <a:rPr sz="1500" b="0" i="0">
+                <a:solidFill>
+                  <a:srgbClr val="333333"/>
+                </a:solidFill>
+                <a:latin typeface="Calibri"/>
+              </a:rPr>
+              <a:t>–   «Aguanta harta gente»</a:t>
+            </a:r>
+          </a:p>
+          <a:p>
+            <a:pPr>
+              <a:spcAft>
+                <a:spcPts val="800"/>
+              </a:spcAft>
+            </a:pPr>
+            <a:r>
+              <a:rPr sz="1500" b="0" i="0">
+                <a:solidFill>
+                  <a:srgbClr val="333333"/>
+                </a:solidFill>
+                <a:latin typeface="Calibri"/>
+              </a:rPr>
+              <a:t>–   «Si se pone lenta, le subimos recursos»</a:t>
+            </a:r>
+          </a:p>
+          <a:p>
+            <a:pPr>
+              <a:spcAft>
+                <a:spcPts val="800"/>
+              </a:spcAft>
+            </a:pPr>
+            <a:r>
+              <a:rPr sz="1500" b="0" i="0">
+                <a:solidFill>
+                  <a:srgbClr val="333333"/>
+                </a:solidFill>
+                <a:latin typeface="Calibri"/>
+              </a:rPr>
+              <a:t>–   No hay con que comparar despues</a:t>
+            </a:r>
+          </a:p>
+        </p:txBody>
+      </p:sp>
+      <p:sp>
+        <p:nvSpPr>
+          <p:cNvPr id="9" name="Rounded Rectangle 8"/>
+          <p:cNvSpPr/>
+          <p:nvPr/>
+        </p:nvSpPr>
+        <p:spPr>
+          <a:xfrm>
+            <a:off x="6255867" y="1261872"/>
+            <a:ext cx="5478627" cy="5093208"/>
+          </a:xfrm>
+          <a:prstGeom prst="roundRect">
+            <a:avLst>
+              <a:gd name="adj" fmla="val 12000"/>
+            </a:avLst>
+          </a:prstGeom>
+          <a:solidFill>
+            <a:srgbClr val="E8F4FA"/>
+          </a:solidFill>
+          <a:ln>
+            <a:noFill/>
+          </a:ln>
+        </p:spPr>
+        <p:style>
+          <a:lnRef idx="1">
+            <a:schemeClr val="accent1"/>
+          </a:lnRef>
+          <a:fillRef idx="3">
+            <a:schemeClr val="accent1"/>
+          </a:fillRef>
+          <a:effectRef idx="2">
+            <a:schemeClr val="accent1"/>
+          </a:effectRef>
+          <a:fontRef idx="minor">
+            <a:schemeClr val="lt1"/>
+          </a:fontRef>
+        </p:style>
+        <p:txBody>
+          <a:bodyPr rtlCol="0" anchor="ctr"/>
+          <a:lstStyle/>
+          <a:p>
+            <a:pPr algn="ctr"/>
+          </a:p>
+        </p:txBody>
+      </p:sp>
+      <p:sp>
+        <p:nvSpPr>
+          <p:cNvPr id="10" name="Rectangle 9"/>
+          <p:cNvSpPr/>
+          <p:nvPr/>
+        </p:nvSpPr>
+        <p:spPr>
+          <a:xfrm>
+            <a:off x="6255867" y="1261872"/>
+            <a:ext cx="5478627" cy="502920"/>
+          </a:xfrm>
+          <a:prstGeom prst="rect">
+            <a:avLst/>
+          </a:prstGeom>
+          <a:solidFill>
+            <a:srgbClr val="095292"/>
+          </a:solidFill>
+          <a:ln>
+            <a:noFill/>
+          </a:ln>
+        </p:spPr>
+        <p:style>
+          <a:lnRef idx="1">
+            <a:schemeClr val="accent1"/>
+          </a:lnRef>
+          <a:fillRef idx="3">
+            <a:schemeClr val="accent1"/>
+          </a:fillRef>
+          <a:effectRef idx="2">
+            <a:schemeClr val="accent1"/>
+          </a:effectRef>
+          <a:fontRef idx="minor">
+            <a:schemeClr val="lt1"/>
+          </a:fontRef>
+        </p:style>
+        <p:txBody>
+          <a:bodyPr rtlCol="0" anchor="ctr"/>
+          <a:lstStyle/>
+          <a:p>
+            <a:pPr algn="ctr"/>
+          </a:p>
+        </p:txBody>
+      </p:sp>
+      <p:sp>
+        <p:nvSpPr>
+          <p:cNvPr id="11" name="TextBox 10"/>
+          <p:cNvSpPr txBox="1"/>
+          <p:nvPr/>
+        </p:nvSpPr>
+        <p:spPr>
+          <a:xfrm>
+            <a:off x="6393027" y="1353312"/>
+            <a:ext cx="5204307" cy="365760"/>
+          </a:xfrm>
+          <a:prstGeom prst="rect">
+            <a:avLst/>
+          </a:prstGeom>
+          <a:noFill/>
+        </p:spPr>
+        <p:txBody>
+          <a:bodyPr wrap="square" anchor="ctr"/>
+          <a:lstStyle/>
+          <a:p>
+            <a:pPr algn="ctr"/>
+            <a:r>
+              <a:rPr sz="1600" b="1" i="0">
+                <a:solidFill>
+                  <a:srgbClr val="FFFFFF"/>
+                </a:solidFill>
+                <a:latin typeface="Calibri"/>
+              </a:rPr>
+              <a:t>Enunciado medible</a:t>
+            </a:r>
+          </a:p>
+        </p:txBody>
+      </p:sp>
+      <p:sp>
+        <p:nvSpPr>
+          <p:cNvPr id="12" name="TextBox 11"/>
+          <p:cNvSpPr txBox="1"/>
+          <p:nvPr/>
+        </p:nvSpPr>
+        <p:spPr>
+          <a:xfrm>
+            <a:off x="6420459" y="1901952"/>
+            <a:ext cx="5158587" cy="4498848"/>
+          </a:xfrm>
+          <a:prstGeom prst="rect">
+            <a:avLst/>
+          </a:prstGeom>
+          <a:noFill/>
+        </p:spPr>
+        <p:txBody>
+          <a:bodyPr wrap="square">
+            <a:spAutoFit/>
+          </a:bodyPr>
+          <a:lstStyle/>
+          <a:p>
+            <a:pPr>
+              <a:spcAft>
+                <a:spcPts val="800"/>
+              </a:spcAft>
+            </a:pPr>
+            <a:r>
+              <a:rPr sz="1500" b="0" i="0">
+                <a:solidFill>
+                  <a:srgbClr val="333333"/>
+                </a:solidFill>
+                <a:latin typeface="Calibri"/>
+              </a:rPr>
+              <a:t>–   </a:t>
+            </a:r>
+            <a:r>
+              <a:rPr sz="1500" b="1" i="0">
+                <a:solidFill>
+                  <a:srgbClr val="333333"/>
+                </a:solidFill>
+                <a:latin typeface="Calibri"/>
+              </a:rPr>
+              <a:t>p95 &lt; 300 ms</a:t>
+            </a:r>
+            <a:r>
+              <a:rPr sz="1500" b="0" i="0">
+                <a:solidFill>
+                  <a:srgbClr val="333333"/>
+                </a:solidFill>
+                <a:latin typeface="Calibri"/>
+              </a:rPr>
+              <a:t> en el endpoint de reserva</a:t>
+            </a:r>
+          </a:p>
+          <a:p>
+            <a:pPr>
+              <a:spcAft>
+                <a:spcPts val="800"/>
+              </a:spcAft>
+            </a:pPr>
+            <a:r>
+              <a:rPr sz="1500" b="0" i="0">
+                <a:solidFill>
+                  <a:srgbClr val="333333"/>
+                </a:solidFill>
+                <a:latin typeface="Calibri"/>
+              </a:rPr>
+              <a:t>–   Escenario: </a:t>
+            </a:r>
+            <a:r>
+              <a:rPr sz="1500" b="1" i="0">
+                <a:solidFill>
+                  <a:srgbClr val="333333"/>
+                </a:solidFill>
+                <a:latin typeface="Calibri"/>
+              </a:rPr>
+              <a:t>150 RPS</a:t>
+            </a:r>
+            <a:r>
+              <a:rPr sz="1500" b="0" i="0">
+                <a:solidFill>
+                  <a:srgbClr val="333333"/>
+                </a:solidFill>
+                <a:latin typeface="Calibri"/>
+              </a:rPr>
+              <a:t> en el pico de inicio de semestre</a:t>
+            </a:r>
+          </a:p>
+          <a:p>
+            <a:pPr>
+              <a:spcAft>
+                <a:spcPts val="800"/>
+              </a:spcAft>
+            </a:pPr>
+            <a:r>
+              <a:rPr sz="1500" b="0" i="0">
+                <a:solidFill>
+                  <a:srgbClr val="333333"/>
+                </a:solidFill>
+                <a:latin typeface="Calibri"/>
+              </a:rPr>
+              <a:t>–   Bottleneck sospechado: </a:t>
+            </a:r>
+            <a:r>
+              <a:rPr sz="1500" b="1" i="0">
+                <a:solidFill>
+                  <a:srgbClr val="333333"/>
+                </a:solidFill>
+                <a:latin typeface="Calibri"/>
+              </a:rPr>
+              <a:t>consulta a la BD</a:t>
+            </a:r>
+          </a:p>
+          <a:p>
+            <a:pPr>
+              <a:spcAft>
+                <a:spcPts val="800"/>
+              </a:spcAft>
+            </a:pPr>
+            <a:r>
+              <a:rPr sz="1500" b="0" i="0">
+                <a:solidFill>
+                  <a:srgbClr val="333333"/>
+                </a:solidFill>
+                <a:latin typeface="Calibri"/>
+              </a:rPr>
+              <a:t>–   Se puede verificar: pasa o no pasa</a:t>
+            </a:r>
+          </a:p>
+        </p:txBody>
+      </p:sp>
+      <p:sp>
+        <p:nvSpPr>
+          <p:cNvPr id="13" name="TextBox 12"/>
+          <p:cNvSpPr txBox="1"/>
+          <p:nvPr/>
+        </p:nvSpPr>
+        <p:spPr>
+          <a:xfrm>
+            <a:off x="11185855" y="6473952"/>
+            <a:ext cx="640080" cy="274320"/>
+          </a:xfrm>
+          <a:prstGeom prst="rect">
+            <a:avLst/>
+          </a:prstGeom>
+          <a:noFill/>
+        </p:spPr>
+        <p:txBody>
+          <a:bodyPr wrap="square">
+            <a:spAutoFit/>
+          </a:bodyPr>
+          <a:lstStyle/>
+          <a:p>
+            <a:pPr algn="r"/>
+            <a:r>
+              <a:rPr sz="1100" b="0" i="0">
+                <a:solidFill>
+                  <a:srgbClr val="666666"/>
+                </a:solidFill>
+                <a:latin typeface="Calibri"/>
+              </a:rPr>
+              <a:t>21</a:t>
+            </a:r>
+          </a:p>
+        </p:txBody>
+      </p:sp>
+    </p:spTree>
+  </p:cSld>
+  <p:clrMapOvr>
+    <a:masterClrMapping/>
+  </p:clrMapOvr>
+</p:sld>
+</file>
+
+<file path=ppt/slides/slide22.xml><?xml version="1.0" encoding="utf-8"?>
+<p:sld xmlns:a="http://schemas.openxmlformats.org/drawingml/2006/main" xmlns:p="http://schemas.openxmlformats.org/presentationml/2006/main" xmlns:r="http://schemas.openxmlformats.org/officeDocument/2006/relationships">
+  <p:cSld>
+    <p:bg>
+      <p:bgPr>
+        <a:solidFill>
+          <a:srgbClr val="FFFFFF"/>
+        </a:solidFill>
+        <a:effectLst/>
+      </p:bgPr>
+    </p:bg>
+    <p:spTree>
+      <p:nvGrpSpPr>
+        <p:cNvPr id="1" name=""/>
+        <p:cNvGrpSpPr/>
+        <p:nvPr/>
+      </p:nvGrpSpPr>
+      <p:grpSpPr/>
+      <p:sp>
+        <p:nvSpPr>
+          <p:cNvPr id="2" name="Rectangle 1"/>
+          <p:cNvSpPr/>
+          <p:nvPr/>
+        </p:nvSpPr>
+        <p:spPr>
+          <a:xfrm>
+            <a:off x="0" y="0"/>
+            <a:ext cx="12191695" cy="1170432"/>
+          </a:xfrm>
+          <a:prstGeom prst="rect">
+            <a:avLst/>
+          </a:prstGeom>
+          <a:solidFill>
+            <a:srgbClr val="095292"/>
+          </a:solidFill>
+          <a:ln>
+            <a:noFill/>
+          </a:ln>
+        </p:spPr>
+        <p:style>
+          <a:lnRef idx="1">
+            <a:schemeClr val="accent1"/>
+          </a:lnRef>
+          <a:fillRef idx="3">
+            <a:schemeClr val="accent1"/>
+          </a:fillRef>
+          <a:effectRef idx="2">
+            <a:schemeClr val="accent1"/>
+          </a:effectRef>
+          <a:fontRef idx="minor">
+            <a:schemeClr val="lt1"/>
+          </a:fontRef>
+        </p:style>
+        <p:txBody>
+          <a:bodyPr rtlCol="0" anchor="ctr"/>
+          <a:lstStyle/>
+          <a:p>
+            <a:pPr algn="ctr"/>
+          </a:p>
+        </p:txBody>
+      </p:sp>
+      <p:sp>
+        <p:nvSpPr>
+          <p:cNvPr id="3" name="Rectangle 2"/>
+          <p:cNvSpPr/>
+          <p:nvPr/>
+        </p:nvSpPr>
+        <p:spPr>
+          <a:xfrm>
+            <a:off x="0" y="1170432"/>
+            <a:ext cx="12191695" cy="41148"/>
+          </a:xfrm>
+          <a:prstGeom prst="rect">
+            <a:avLst/>
+          </a:prstGeom>
+          <a:solidFill>
+            <a:srgbClr val="FFD000"/>
+          </a:solidFill>
+          <a:ln>
+            <a:noFill/>
+          </a:ln>
+        </p:spPr>
+        <p:style>
+          <a:lnRef idx="1">
+            <a:schemeClr val="accent1"/>
+          </a:lnRef>
+          <a:fillRef idx="3">
+            <a:schemeClr val="accent1"/>
+          </a:fillRef>
+          <a:effectRef idx="2">
+            <a:schemeClr val="accent1"/>
+          </a:effectRef>
+          <a:fontRef idx="minor">
+            <a:schemeClr val="lt1"/>
+          </a:fontRef>
+        </p:style>
+        <p:txBody>
+          <a:bodyPr rtlCol="0" anchor="ctr"/>
+          <a:lstStyle/>
+          <a:p>
+            <a:pPr algn="ctr"/>
+          </a:p>
+        </p:txBody>
+      </p:sp>
+      <p:sp>
+        <p:nvSpPr>
+          <p:cNvPr id="4" name="TextBox 3"/>
+          <p:cNvSpPr txBox="1"/>
+          <p:nvPr/>
+        </p:nvSpPr>
+        <p:spPr>
+          <a:xfrm>
+            <a:off x="457200" y="164592"/>
+            <a:ext cx="11277295" cy="384048"/>
+          </a:xfrm>
+          <a:prstGeom prst="rect">
+            <a:avLst/>
+          </a:prstGeom>
+          <a:noFill/>
+        </p:spPr>
+        <p:txBody>
+          <a:bodyPr wrap="square">
+            <a:spAutoFit/>
+          </a:bodyPr>
+          <a:lstStyle/>
+          <a:p>
+            <a:r>
+              <a:rPr sz="2600" b="1" i="0">
+                <a:solidFill>
+                  <a:srgbClr val="FFFFFF"/>
+                </a:solidFill>
+                <a:latin typeface="Calibri"/>
+              </a:rPr>
+              <a:t>Herramientas de hoy</a:t>
+            </a:r>
+          </a:p>
+        </p:txBody>
+      </p:sp>
+      <p:sp>
+        <p:nvSpPr>
+          <p:cNvPr id="5" name="TextBox 4"/>
+          <p:cNvSpPr txBox="1"/>
+          <p:nvPr/>
+        </p:nvSpPr>
+        <p:spPr>
+          <a:xfrm>
+            <a:off x="457200" y="566928"/>
+            <a:ext cx="11277295" cy="411480"/>
+          </a:xfrm>
+          <a:prstGeom prst="rect">
+            <a:avLst/>
+          </a:prstGeom>
+          <a:noFill/>
+        </p:spPr>
+        <p:txBody>
+          <a:bodyPr wrap="square">
+            <a:spAutoFit/>
+          </a:bodyPr>
+          <a:lstStyle/>
+          <a:p>
+            <a:r>
+              <a:rPr sz="1400" b="0" i="0">
+                <a:solidFill>
+                  <a:srgbClr val="B8D8EE"/>
+                </a:solidFill>
+                <a:latin typeface="Calibri"/>
+              </a:rPr>
+              <a:t>Gratis · navegador o free tier · sin cuenta de pago</a:t>
+            </a:r>
+          </a:p>
+        </p:txBody>
+      </p:sp>
+      <p:sp>
+        <p:nvSpPr>
+          <p:cNvPr id="6" name="Rounded Rectangle 5"/>
+          <p:cNvSpPr/>
+          <p:nvPr/>
+        </p:nvSpPr>
+        <p:spPr>
+          <a:xfrm>
+            <a:off x="457200" y="1591056"/>
+            <a:ext cx="3624986" cy="2299716"/>
+          </a:xfrm>
+          <a:prstGeom prst="roundRect">
+            <a:avLst>
+              <a:gd name="adj" fmla="val 12000"/>
+            </a:avLst>
+          </a:prstGeom>
+          <a:solidFill>
+            <a:srgbClr val="F2F2F2"/>
+          </a:solidFill>
+          <a:ln>
+            <a:noFill/>
+          </a:ln>
+        </p:spPr>
+        <p:style>
+          <a:lnRef idx="1">
+            <a:schemeClr val="accent1"/>
+          </a:lnRef>
+          <a:fillRef idx="3">
+            <a:schemeClr val="accent1"/>
+          </a:fillRef>
+          <a:effectRef idx="2">
+            <a:schemeClr val="accent1"/>
+          </a:effectRef>
+          <a:fontRef idx="minor">
+            <a:schemeClr val="lt1"/>
+          </a:fontRef>
+        </p:style>
+        <p:txBody>
+          <a:bodyPr rtlCol="0" anchor="ctr"/>
+          <a:lstStyle/>
+          <a:p>
+            <a:pPr algn="ctr"/>
+          </a:p>
+        </p:txBody>
+      </p:sp>
+      <p:sp>
+        <p:nvSpPr>
+          <p:cNvPr id="7" name="Rectangle 6"/>
+          <p:cNvSpPr/>
+          <p:nvPr/>
+        </p:nvSpPr>
+        <p:spPr>
+          <a:xfrm>
+            <a:off x="457200" y="1591056"/>
+            <a:ext cx="3624986" cy="64008"/>
+          </a:xfrm>
+          <a:prstGeom prst="rect">
+            <a:avLst/>
+          </a:prstGeom>
+          <a:solidFill>
+            <a:srgbClr val="095292"/>
+          </a:solidFill>
+          <a:ln>
+            <a:noFill/>
+          </a:ln>
+        </p:spPr>
+        <p:style>
+          <a:lnRef idx="1">
+            <a:schemeClr val="accent1"/>
+          </a:lnRef>
+          <a:fillRef idx="3">
+            <a:schemeClr val="accent1"/>
+          </a:fillRef>
+          <a:effectRef idx="2">
+            <a:schemeClr val="accent1"/>
+          </a:effectRef>
+          <a:fontRef idx="minor">
+            <a:schemeClr val="lt1"/>
+          </a:fontRef>
+        </p:style>
+        <p:txBody>
+          <a:bodyPr rtlCol="0" anchor="ctr"/>
+          <a:lstStyle/>
+          <a:p>
+            <a:pPr algn="ctr"/>
+          </a:p>
+        </p:txBody>
+      </p:sp>
+      <p:sp>
+        <p:nvSpPr>
+          <p:cNvPr id="8" name="Rectangle 7"/>
+          <p:cNvSpPr/>
+          <p:nvPr/>
+        </p:nvSpPr>
+        <p:spPr>
+          <a:xfrm>
+            <a:off x="457200" y="1655064"/>
+            <a:ext cx="3624986" cy="27432"/>
+          </a:xfrm>
+          <a:prstGeom prst="rect">
+            <a:avLst/>
+          </a:prstGeom>
+          <a:solidFill>
+            <a:srgbClr val="FFD000"/>
+          </a:solidFill>
+          <a:ln>
+            <a:noFill/>
+          </a:ln>
+        </p:spPr>
+        <p:style>
+          <a:lnRef idx="1">
+            <a:schemeClr val="accent1"/>
+          </a:lnRef>
+          <a:fillRef idx="3">
+            <a:schemeClr val="accent1"/>
+          </a:fillRef>
+          <a:effectRef idx="2">
+            <a:schemeClr val="accent1"/>
+          </a:effectRef>
+          <a:fontRef idx="minor">
+            <a:schemeClr val="lt1"/>
+          </a:fontRef>
+        </p:style>
+        <p:txBody>
+          <a:bodyPr rtlCol="0" anchor="ctr"/>
+          <a:lstStyle/>
+          <a:p>
+            <a:pPr algn="ctr"/>
+          </a:p>
+        </p:txBody>
+      </p:sp>
+      <p:pic>
+        <p:nvPicPr>
+          <p:cNvPr id="9" name="Picture 8" descr="google_docs.png"/>
+          <p:cNvPicPr>
+            <a:picLocks noChangeAspect="1"/>
+          </p:cNvPicPr>
+          <p:nvPr/>
+        </p:nvPicPr>
+        <p:blipFill>
+          <a:blip r:embed="rId2"/>
+          <a:stretch>
+            <a:fillRect/>
+          </a:stretch>
+        </p:blipFill>
+        <p:spPr>
+          <a:xfrm>
+            <a:off x="1659331" y="1847087"/>
+            <a:ext cx="1220724" cy="1220724"/>
+          </a:xfrm>
+          <a:prstGeom prst="rect">
+            <a:avLst/>
+          </a:prstGeom>
+        </p:spPr>
+      </p:pic>
+      <p:sp>
+        <p:nvSpPr>
+          <p:cNvPr id="10" name="TextBox 9"/>
+          <p:cNvSpPr txBox="1"/>
+          <p:nvPr/>
+        </p:nvSpPr>
+        <p:spPr>
+          <a:xfrm>
+            <a:off x="530352" y="3159251"/>
+            <a:ext cx="3478682" cy="621792"/>
+          </a:xfrm>
+          <a:prstGeom prst="rect">
+            <a:avLst/>
+          </a:prstGeom>
+          <a:noFill/>
+        </p:spPr>
+        <p:txBody>
+          <a:bodyPr wrap="square" anchor="t"/>
+          <a:lstStyle/>
+          <a:p>
+            <a:pPr algn="ctr"/>
+            <a:r>
+              <a:rPr sz="1300" b="1" i="0">
+                <a:solidFill>
+                  <a:srgbClr val="095292"/>
+                </a:solidFill>
+                <a:latin typeface="Calibri"/>
+              </a:rPr>
+              <a:t>Google Docs</a:t>
+            </a:r>
+          </a:p>
+          <a:p>
+            <a:pPr algn="ctr">
+              <a:spcBef>
+                <a:spcPts val="200"/>
+              </a:spcBef>
+            </a:pPr>
+            <a:r>
+              <a:rPr sz="1000" b="0" i="0">
+                <a:solidFill>
+                  <a:srgbClr val="666666"/>
+                </a:solidFill>
+                <a:latin typeface="Calibri"/>
+              </a:rPr>
+              <a:t>Objetivo de rendimiento</a:t>
+            </a:r>
+          </a:p>
+        </p:txBody>
+      </p:sp>
+      <p:sp>
+        <p:nvSpPr>
+          <p:cNvPr id="11" name="Rounded Rectangle 10"/>
+          <p:cNvSpPr/>
+          <p:nvPr/>
+        </p:nvSpPr>
+        <p:spPr>
+          <a:xfrm>
+            <a:off x="4283354" y="1591056"/>
+            <a:ext cx="3624986" cy="2299716"/>
+          </a:xfrm>
+          <a:prstGeom prst="roundRect">
+            <a:avLst>
+              <a:gd name="adj" fmla="val 12000"/>
+            </a:avLst>
+          </a:prstGeom>
+          <a:solidFill>
+            <a:srgbClr val="F2F2F2"/>
+          </a:solidFill>
+          <a:ln>
+            <a:noFill/>
+          </a:ln>
+        </p:spPr>
+        <p:style>
+          <a:lnRef idx="1">
+            <a:schemeClr val="accent1"/>
+          </a:lnRef>
+          <a:fillRef idx="3">
+            <a:schemeClr val="accent1"/>
+          </a:fillRef>
+          <a:effectRef idx="2">
+            <a:schemeClr val="accent1"/>
+          </a:effectRef>
+          <a:fontRef idx="minor">
+            <a:schemeClr val="lt1"/>
+          </a:fontRef>
+        </p:style>
+        <p:txBody>
+          <a:bodyPr rtlCol="0" anchor="ctr"/>
+          <a:lstStyle/>
+          <a:p>
+            <a:pPr algn="ctr"/>
+          </a:p>
+        </p:txBody>
+      </p:sp>
+      <p:sp>
+        <p:nvSpPr>
+          <p:cNvPr id="12" name="Rectangle 11"/>
+          <p:cNvSpPr/>
+          <p:nvPr/>
+        </p:nvSpPr>
+        <p:spPr>
+          <a:xfrm>
+            <a:off x="4283354" y="1591056"/>
+            <a:ext cx="3624986" cy="64008"/>
+          </a:xfrm>
+          <a:prstGeom prst="rect">
+            <a:avLst/>
+          </a:prstGeom>
+          <a:solidFill>
+            <a:srgbClr val="095292"/>
+          </a:solidFill>
+          <a:ln>
+            <a:noFill/>
+          </a:ln>
+        </p:spPr>
+        <p:style>
+          <a:lnRef idx="1">
+            <a:schemeClr val="accent1"/>
+          </a:lnRef>
+          <a:fillRef idx="3">
+            <a:schemeClr val="accent1"/>
+          </a:fillRef>
+          <a:effectRef idx="2">
+            <a:schemeClr val="accent1"/>
+          </a:effectRef>
+          <a:fontRef idx="minor">
+            <a:schemeClr val="lt1"/>
+          </a:fontRef>
+        </p:style>
+        <p:txBody>
+          <a:bodyPr rtlCol="0" anchor="ctr"/>
+          <a:lstStyle/>
+          <a:p>
+            <a:pPr algn="ctr"/>
+          </a:p>
+        </p:txBody>
+      </p:sp>
+      <p:sp>
+        <p:nvSpPr>
+          <p:cNvPr id="13" name="Rectangle 12"/>
+          <p:cNvSpPr/>
+          <p:nvPr/>
+        </p:nvSpPr>
+        <p:spPr>
+          <a:xfrm>
+            <a:off x="4283354" y="1655064"/>
+            <a:ext cx="3624986" cy="27432"/>
+          </a:xfrm>
+          <a:prstGeom prst="rect">
+            <a:avLst/>
+          </a:prstGeom>
+          <a:solidFill>
+            <a:srgbClr val="FFD000"/>
+          </a:solidFill>
+          <a:ln>
+            <a:noFill/>
+          </a:ln>
+        </p:spPr>
+        <p:style>
+          <a:lnRef idx="1">
+            <a:schemeClr val="accent1"/>
+          </a:lnRef>
+          <a:fillRef idx="3">
+            <a:schemeClr val="accent1"/>
+          </a:fillRef>
+          <a:effectRef idx="2">
+            <a:schemeClr val="accent1"/>
+          </a:effectRef>
+          <a:fontRef idx="minor">
+            <a:schemeClr val="lt1"/>
+          </a:fontRef>
+        </p:style>
+        <p:txBody>
+          <a:bodyPr rtlCol="0" anchor="ctr"/>
+          <a:lstStyle/>
+          <a:p>
+            <a:pPr algn="ctr"/>
+          </a:p>
+        </p:txBody>
+      </p:sp>
+      <p:pic>
+        <p:nvPicPr>
+          <p:cNvPr id="14" name="Picture 13" descr="drawio.png"/>
+          <p:cNvPicPr>
+            <a:picLocks noChangeAspect="1"/>
+          </p:cNvPicPr>
+          <p:nvPr/>
+        </p:nvPicPr>
+        <p:blipFill>
+          <a:blip r:embed="rId3"/>
+          <a:stretch>
+            <a:fillRect/>
+          </a:stretch>
+        </p:blipFill>
+        <p:spPr>
+          <a:xfrm>
+            <a:off x="5485485" y="1847087"/>
+            <a:ext cx="1220724" cy="1220724"/>
+          </a:xfrm>
+          <a:prstGeom prst="rect">
+            <a:avLst/>
+          </a:prstGeom>
+        </p:spPr>
+      </p:pic>
+      <p:sp>
+        <p:nvSpPr>
+          <p:cNvPr id="15" name="TextBox 14"/>
+          <p:cNvSpPr txBox="1"/>
+          <p:nvPr/>
+        </p:nvSpPr>
+        <p:spPr>
+          <a:xfrm>
+            <a:off x="4356506" y="3159251"/>
+            <a:ext cx="3478682" cy="621792"/>
+          </a:xfrm>
+          <a:prstGeom prst="rect">
+            <a:avLst/>
+          </a:prstGeom>
+          <a:noFill/>
+        </p:spPr>
+        <p:txBody>
+          <a:bodyPr wrap="square" anchor="t"/>
+          <a:lstStyle/>
+          <a:p>
+            <a:pPr algn="ctr"/>
+            <a:r>
+              <a:rPr sz="1300" b="1" i="0">
+                <a:solidFill>
+                  <a:srgbClr val="095292"/>
+                </a:solidFill>
+                <a:latin typeface="Calibri"/>
+              </a:rPr>
+              <a:t>draw.io</a:t>
+            </a:r>
+          </a:p>
+          <a:p>
+            <a:pPr algn="ctr">
+              <a:spcBef>
+                <a:spcPts val="200"/>
+              </a:spcBef>
+            </a:pPr>
+            <a:r>
+              <a:rPr sz="1000" b="0" i="0">
+                <a:solidFill>
+                  <a:srgbClr val="666666"/>
+                </a:solidFill>
+                <a:latin typeface="Calibri"/>
+              </a:rPr>
+              <a:t>Bottleneck</a:t>
+            </a:r>
+          </a:p>
+        </p:txBody>
+      </p:sp>
+      <p:sp>
+        <p:nvSpPr>
+          <p:cNvPr id="16" name="Rounded Rectangle 15"/>
+          <p:cNvSpPr/>
+          <p:nvPr/>
+        </p:nvSpPr>
+        <p:spPr>
+          <a:xfrm>
+            <a:off x="8109508" y="1591056"/>
+            <a:ext cx="3624986" cy="2299716"/>
+          </a:xfrm>
+          <a:prstGeom prst="roundRect">
+            <a:avLst>
+              <a:gd name="adj" fmla="val 12000"/>
+            </a:avLst>
+          </a:prstGeom>
+          <a:solidFill>
+            <a:srgbClr val="F2F2F2"/>
+          </a:solidFill>
+          <a:ln>
+            <a:noFill/>
+          </a:ln>
+        </p:spPr>
+        <p:style>
+          <a:lnRef idx="1">
+            <a:schemeClr val="accent1"/>
+          </a:lnRef>
+          <a:fillRef idx="3">
+            <a:schemeClr val="accent1"/>
+          </a:fillRef>
+          <a:effectRef idx="2">
+            <a:schemeClr val="accent1"/>
+          </a:effectRef>
+          <a:fontRef idx="minor">
+            <a:schemeClr val="lt1"/>
+          </a:fontRef>
+        </p:style>
+        <p:txBody>
+          <a:bodyPr rtlCol="0" anchor="ctr"/>
+          <a:lstStyle/>
+          <a:p>
+            <a:pPr algn="ctr"/>
+          </a:p>
+        </p:txBody>
+      </p:sp>
+      <p:sp>
+        <p:nvSpPr>
+          <p:cNvPr id="17" name="Rectangle 16"/>
+          <p:cNvSpPr/>
+          <p:nvPr/>
+        </p:nvSpPr>
+        <p:spPr>
+          <a:xfrm>
+            <a:off x="8109508" y="1591056"/>
+            <a:ext cx="3624986" cy="64008"/>
+          </a:xfrm>
+          <a:prstGeom prst="rect">
+            <a:avLst/>
+          </a:prstGeom>
+          <a:solidFill>
+            <a:srgbClr val="095292"/>
+          </a:solidFill>
+          <a:ln>
+            <a:noFill/>
+          </a:ln>
+        </p:spPr>
+        <p:style>
+          <a:lnRef idx="1">
+            <a:schemeClr val="accent1"/>
+          </a:lnRef>
+          <a:fillRef idx="3">
+            <a:schemeClr val="accent1"/>
+          </a:fillRef>
+          <a:effectRef idx="2">
+            <a:schemeClr val="accent1"/>
+          </a:effectRef>
+          <a:fontRef idx="minor">
+            <a:schemeClr val="lt1"/>
+          </a:fontRef>
+        </p:style>
+        <p:txBody>
+          <a:bodyPr rtlCol="0" anchor="ctr"/>
+          <a:lstStyle/>
+          <a:p>
+            <a:pPr algn="ctr"/>
+          </a:p>
+        </p:txBody>
+      </p:sp>
+      <p:sp>
+        <p:nvSpPr>
+          <p:cNvPr id="18" name="Rectangle 17"/>
+          <p:cNvSpPr/>
+          <p:nvPr/>
+        </p:nvSpPr>
+        <p:spPr>
+          <a:xfrm>
+            <a:off x="8109508" y="1655064"/>
+            <a:ext cx="3624986" cy="27432"/>
+          </a:xfrm>
+          <a:prstGeom prst="rect">
+            <a:avLst/>
+          </a:prstGeom>
+          <a:solidFill>
+            <a:srgbClr val="FFD000"/>
+          </a:solidFill>
+          <a:ln>
+            <a:noFill/>
+          </a:ln>
+        </p:spPr>
+        <p:style>
+          <a:lnRef idx="1">
+            <a:schemeClr val="accent1"/>
+          </a:lnRef>
+          <a:fillRef idx="3">
+            <a:schemeClr val="accent1"/>
+          </a:fillRef>
+          <a:effectRef idx="2">
+            <a:schemeClr val="accent1"/>
+          </a:effectRef>
+          <a:fontRef idx="minor">
+            <a:schemeClr val="lt1"/>
+          </a:fontRef>
+        </p:style>
+        <p:txBody>
+          <a:bodyPr rtlCol="0" anchor="ctr"/>
+          <a:lstStyle/>
+          <a:p>
+            <a:pPr algn="ctr"/>
+          </a:p>
+        </p:txBody>
+      </p:sp>
+      <p:pic>
+        <p:nvPicPr>
+          <p:cNvPr id="19" name="Picture 18" descr="mermaid.png"/>
+          <p:cNvPicPr>
+            <a:picLocks noChangeAspect="1"/>
+          </p:cNvPicPr>
+          <p:nvPr/>
+        </p:nvPicPr>
+        <p:blipFill>
+          <a:blip r:embed="rId4"/>
+          <a:stretch>
+            <a:fillRect/>
+          </a:stretch>
+        </p:blipFill>
+        <p:spPr>
+          <a:xfrm>
+            <a:off x="9311640" y="1847087"/>
+            <a:ext cx="1220724" cy="1220724"/>
+          </a:xfrm>
+          <a:prstGeom prst="rect">
+            <a:avLst/>
+          </a:prstGeom>
+        </p:spPr>
+      </p:pic>
+      <p:sp>
+        <p:nvSpPr>
+          <p:cNvPr id="20" name="TextBox 19"/>
+          <p:cNvSpPr txBox="1"/>
+          <p:nvPr/>
+        </p:nvSpPr>
+        <p:spPr>
+          <a:xfrm>
+            <a:off x="8182660" y="3159251"/>
+            <a:ext cx="3478682" cy="621792"/>
+          </a:xfrm>
+          <a:prstGeom prst="rect">
+            <a:avLst/>
+          </a:prstGeom>
+          <a:noFill/>
+        </p:spPr>
+        <p:txBody>
+          <a:bodyPr wrap="square" anchor="t"/>
+          <a:lstStyle/>
+          <a:p>
+            <a:pPr algn="ctr"/>
+            <a:r>
+              <a:rPr sz="1300" b="1" i="0">
+                <a:solidFill>
+                  <a:srgbClr val="095292"/>
+                </a:solidFill>
+                <a:latin typeface="Calibri"/>
+              </a:rPr>
+              <a:t>Mermaid</a:t>
+            </a:r>
+          </a:p>
+          <a:p>
+            <a:pPr algn="ctr">
+              <a:spcBef>
+                <a:spcPts val="200"/>
+              </a:spcBef>
+            </a:pPr>
+            <a:r>
+              <a:rPr sz="1000" b="0" i="0">
+                <a:solidFill>
+                  <a:srgbClr val="666666"/>
+                </a:solidFill>
+                <a:latin typeface="Calibri"/>
+              </a:rPr>
+              <a:t>Codigo del diagrama</a:t>
+            </a:r>
+          </a:p>
+        </p:txBody>
+      </p:sp>
+      <p:sp>
+        <p:nvSpPr>
+          <p:cNvPr id="21" name="Rounded Rectangle 20"/>
+          <p:cNvSpPr/>
+          <p:nvPr/>
+        </p:nvSpPr>
+        <p:spPr>
+          <a:xfrm>
+            <a:off x="4283354" y="4055364"/>
+            <a:ext cx="3624986" cy="2299716"/>
+          </a:xfrm>
+          <a:prstGeom prst="roundRect">
+            <a:avLst>
+              <a:gd name="adj" fmla="val 12000"/>
+            </a:avLst>
+          </a:prstGeom>
+          <a:solidFill>
+            <a:srgbClr val="F2F2F2"/>
+          </a:solidFill>
+          <a:ln>
+            <a:noFill/>
+          </a:ln>
+        </p:spPr>
+        <p:style>
+          <a:lnRef idx="1">
+            <a:schemeClr val="accent1"/>
+          </a:lnRef>
+          <a:fillRef idx="3">
+            <a:schemeClr val="accent1"/>
+          </a:fillRef>
+          <a:effectRef idx="2">
+            <a:schemeClr val="accent1"/>
+          </a:effectRef>
+          <a:fontRef idx="minor">
+            <a:schemeClr val="lt1"/>
+          </a:fontRef>
+        </p:style>
+        <p:txBody>
+          <a:bodyPr rtlCol="0" anchor="ctr"/>
+          <a:lstStyle/>
+          <a:p>
+            <a:pPr algn="ctr"/>
+          </a:p>
+        </p:txBody>
+      </p:sp>
+      <p:sp>
+        <p:nvSpPr>
+          <p:cNvPr id="22" name="Rectangle 21"/>
+          <p:cNvSpPr/>
+          <p:nvPr/>
+        </p:nvSpPr>
+        <p:spPr>
+          <a:xfrm>
+            <a:off x="4283354" y="4055364"/>
+            <a:ext cx="3624986" cy="64008"/>
+          </a:xfrm>
+          <a:prstGeom prst="rect">
+            <a:avLst/>
+          </a:prstGeom>
+          <a:solidFill>
+            <a:srgbClr val="095292"/>
+          </a:solidFill>
+          <a:ln>
+            <a:noFill/>
+          </a:ln>
+        </p:spPr>
+        <p:style>
+          <a:lnRef idx="1">
+            <a:schemeClr val="accent1"/>
+          </a:lnRef>
+          <a:fillRef idx="3">
+            <a:schemeClr val="accent1"/>
+          </a:fillRef>
+          <a:effectRef idx="2">
+            <a:schemeClr val="accent1"/>
+          </a:effectRef>
+          <a:fontRef idx="minor">
+            <a:schemeClr val="lt1"/>
+          </a:fontRef>
+        </p:style>
+        <p:txBody>
+          <a:bodyPr rtlCol="0" anchor="ctr"/>
+          <a:lstStyle/>
+          <a:p>
+            <a:pPr algn="ctr"/>
+          </a:p>
+        </p:txBody>
+      </p:sp>
+      <p:sp>
+        <p:nvSpPr>
+          <p:cNvPr id="23" name="Rectangle 22"/>
+          <p:cNvSpPr/>
+          <p:nvPr/>
+        </p:nvSpPr>
+        <p:spPr>
+          <a:xfrm>
+            <a:off x="4283354" y="4119372"/>
+            <a:ext cx="3624986" cy="27432"/>
+          </a:xfrm>
+          <a:prstGeom prst="rect">
+            <a:avLst/>
+          </a:prstGeom>
+          <a:solidFill>
+            <a:srgbClr val="FFD000"/>
+          </a:solidFill>
+          <a:ln>
+            <a:noFill/>
+          </a:ln>
+        </p:spPr>
+        <p:style>
+          <a:lnRef idx="1">
+            <a:schemeClr val="accent1"/>
+          </a:lnRef>
+          <a:fillRef idx="3">
+            <a:schemeClr val="accent1"/>
+          </a:fillRef>
+          <a:effectRef idx="2">
+            <a:schemeClr val="accent1"/>
+          </a:effectRef>
+          <a:fontRef idx="minor">
+            <a:schemeClr val="lt1"/>
+          </a:fontRef>
+        </p:style>
+        <p:txBody>
+          <a:bodyPr rtlCol="0" anchor="ctr"/>
+          <a:lstStyle/>
+          <a:p>
+            <a:pPr algn="ctr"/>
+          </a:p>
+        </p:txBody>
+      </p:sp>
+      <p:pic>
+        <p:nvPicPr>
+          <p:cNvPr id="24" name="Picture 23" descr="examlab.png"/>
+          <p:cNvPicPr>
+            <a:picLocks noChangeAspect="1"/>
+          </p:cNvPicPr>
+          <p:nvPr/>
+        </p:nvPicPr>
+        <p:blipFill>
+          <a:blip r:embed="rId5"/>
+          <a:stretch>
+            <a:fillRect/>
+          </a:stretch>
+        </p:blipFill>
+        <p:spPr>
+          <a:xfrm>
+            <a:off x="5485485" y="4311396"/>
+            <a:ext cx="1220724" cy="1220724"/>
+          </a:xfrm>
+          <a:prstGeom prst="rect">
+            <a:avLst/>
+          </a:prstGeom>
+        </p:spPr>
+      </p:pic>
+      <p:sp>
+        <p:nvSpPr>
+          <p:cNvPr id="25" name="TextBox 24"/>
+          <p:cNvSpPr txBox="1"/>
+          <p:nvPr/>
+        </p:nvSpPr>
+        <p:spPr>
+          <a:xfrm>
+            <a:off x="4356506" y="5623560"/>
+            <a:ext cx="3478682" cy="621792"/>
+          </a:xfrm>
+          <a:prstGeom prst="rect">
+            <a:avLst/>
+          </a:prstGeom>
+          <a:noFill/>
+        </p:spPr>
+        <p:txBody>
+          <a:bodyPr wrap="square" anchor="t"/>
+          <a:lstStyle/>
+          <a:p>
+            <a:pPr algn="ctr"/>
+            <a:r>
+              <a:rPr sz="1300" b="1" i="0">
+                <a:solidFill>
+                  <a:srgbClr val="095292"/>
+                </a:solidFill>
+                <a:latin typeface="Calibri"/>
+              </a:rPr>
+              <a:t>la plataforma del curso</a:t>
+            </a:r>
+          </a:p>
+          <a:p>
+            <a:pPr algn="ctr">
+              <a:spcBef>
+                <a:spcPts val="200"/>
+              </a:spcBef>
+            </a:pPr>
+            <a:r>
+              <a:rPr sz="1000" b="0" i="0">
+                <a:solidFill>
+                  <a:srgbClr val="666666"/>
+                </a:solidFill>
+                <a:latin typeface="Calibri"/>
+              </a:rPr>
+              <a:t>Donde se entrega</a:t>
+            </a:r>
+          </a:p>
+        </p:txBody>
+      </p:sp>
+      <p:sp>
+        <p:nvSpPr>
+          <p:cNvPr id="26" name="TextBox 25"/>
+          <p:cNvSpPr txBox="1"/>
+          <p:nvPr/>
+        </p:nvSpPr>
+        <p:spPr>
+          <a:xfrm>
+            <a:off x="11185855" y="6473952"/>
+            <a:ext cx="640080" cy="274320"/>
+          </a:xfrm>
+          <a:prstGeom prst="rect">
+            <a:avLst/>
+          </a:prstGeom>
+          <a:noFill/>
+        </p:spPr>
+        <p:txBody>
+          <a:bodyPr wrap="square">
+            <a:spAutoFit/>
+          </a:bodyPr>
+          <a:lstStyle/>
+          <a:p>
+            <a:pPr algn="r"/>
+            <a:r>
+              <a:rPr sz="1100" b="0" i="0">
+                <a:solidFill>
+                  <a:srgbClr val="666666"/>
+                </a:solidFill>
+                <a:latin typeface="Calibri"/>
+              </a:rPr>
+              <a:t>22</a:t>
+            </a:r>
+          </a:p>
+        </p:txBody>
+      </p:sp>
+    </p:spTree>
+  </p:cSld>
+  <p:clrMapOvr>
+    <a:masterClrMapping/>
+  </p:clrMapOvr>
+</p:sld>
+</file>
+
+<file path=ppt/slides/slide23.xml><?xml version="1.0" encoding="utf-8"?>
+<p:sld xmlns:a="http://schemas.openxmlformats.org/drawingml/2006/main" xmlns:p="http://schemas.openxmlformats.org/presentationml/2006/main" xmlns:r="http://schemas.openxmlformats.org/officeDocument/2006/relationships">
+  <p:cSld>
+    <p:bg>
+      <p:bgPr>
+        <a:solidFill>
+          <a:srgbClr val="FFFFFF"/>
+        </a:solidFill>
+        <a:effectLst/>
+      </p:bgPr>
+    </p:bg>
+    <p:spTree>
+      <p:nvGrpSpPr>
+        <p:cNvPr id="1" name=""/>
+        <p:cNvGrpSpPr/>
+        <p:nvPr/>
+      </p:nvGrpSpPr>
+      <p:grpSpPr/>
+      <p:sp>
+        <p:nvSpPr>
+          <p:cNvPr id="2" name="Rectangle 1"/>
+          <p:cNvSpPr/>
+          <p:nvPr/>
+        </p:nvSpPr>
+        <p:spPr>
+          <a:xfrm>
+            <a:off x="0" y="0"/>
+            <a:ext cx="12191695" cy="1170432"/>
+          </a:xfrm>
+          <a:prstGeom prst="rect">
+            <a:avLst/>
+          </a:prstGeom>
+          <a:solidFill>
+            <a:srgbClr val="095292"/>
+          </a:solidFill>
+          <a:ln>
+            <a:noFill/>
+          </a:ln>
+        </p:spPr>
+        <p:style>
+          <a:lnRef idx="1">
+            <a:schemeClr val="accent1"/>
+          </a:lnRef>
+          <a:fillRef idx="3">
+            <a:schemeClr val="accent1"/>
+          </a:fillRef>
+          <a:effectRef idx="2">
+            <a:schemeClr val="accent1"/>
+          </a:effectRef>
+          <a:fontRef idx="minor">
+            <a:schemeClr val="lt1"/>
+          </a:fontRef>
+        </p:style>
+        <p:txBody>
+          <a:bodyPr rtlCol="0" anchor="ctr"/>
+          <a:lstStyle/>
+          <a:p>
+            <a:pPr algn="ctr"/>
+          </a:p>
+        </p:txBody>
+      </p:sp>
+      <p:sp>
+        <p:nvSpPr>
+          <p:cNvPr id="3" name="Rectangle 2"/>
+          <p:cNvSpPr/>
+          <p:nvPr/>
+        </p:nvSpPr>
+        <p:spPr>
+          <a:xfrm>
+            <a:off x="0" y="1170432"/>
+            <a:ext cx="12191695" cy="41148"/>
+          </a:xfrm>
+          <a:prstGeom prst="rect">
+            <a:avLst/>
+          </a:prstGeom>
+          <a:solidFill>
+            <a:srgbClr val="FFD000"/>
+          </a:solidFill>
+          <a:ln>
+            <a:noFill/>
+          </a:ln>
+        </p:spPr>
+        <p:style>
+          <a:lnRef idx="1">
+            <a:schemeClr val="accent1"/>
+          </a:lnRef>
+          <a:fillRef idx="3">
+            <a:schemeClr val="accent1"/>
+          </a:fillRef>
+          <a:effectRef idx="2">
+            <a:schemeClr val="accent1"/>
+          </a:effectRef>
+          <a:fontRef idx="minor">
+            <a:schemeClr val="lt1"/>
+          </a:fontRef>
+        </p:style>
+        <p:txBody>
+          <a:bodyPr rtlCol="0" anchor="ctr"/>
+          <a:lstStyle/>
+          <a:p>
+            <a:pPr algn="ctr"/>
+          </a:p>
+        </p:txBody>
+      </p:sp>
+      <p:sp>
+        <p:nvSpPr>
+          <p:cNvPr id="4" name="TextBox 3"/>
+          <p:cNvSpPr txBox="1"/>
+          <p:nvPr/>
+        </p:nvSpPr>
+        <p:spPr>
+          <a:xfrm>
+            <a:off x="457200" y="164592"/>
+            <a:ext cx="11277295" cy="384048"/>
+          </a:xfrm>
+          <a:prstGeom prst="rect">
+            <a:avLst/>
+          </a:prstGeom>
+          <a:noFill/>
+        </p:spPr>
+        <p:txBody>
+          <a:bodyPr wrap="square">
+            <a:spAutoFit/>
+          </a:bodyPr>
+          <a:lstStyle/>
+          <a:p>
+            <a:r>
+              <a:rPr sz="2600" b="1" i="0">
+                <a:solidFill>
+                  <a:srgbClr val="FFFFFF"/>
+                </a:solidFill>
+                <a:latin typeface="Calibri"/>
+              </a:rPr>
+              <a:t>Del boceto a la plataforma del curso (diagrama)</a:t>
+            </a:r>
+          </a:p>
+        </p:txBody>
+      </p:sp>
+      <p:sp>
+        <p:nvSpPr>
+          <p:cNvPr id="5" name="TextBox 4"/>
+          <p:cNvSpPr txBox="1"/>
+          <p:nvPr/>
+        </p:nvSpPr>
+        <p:spPr>
+          <a:xfrm>
+            <a:off x="457200" y="566928"/>
+            <a:ext cx="11277295" cy="411480"/>
+          </a:xfrm>
+          <a:prstGeom prst="rect">
+            <a:avLst/>
+          </a:prstGeom>
+          <a:noFill/>
+        </p:spPr>
+        <p:txBody>
+          <a:bodyPr wrap="square">
+            <a:spAutoFit/>
+          </a:bodyPr>
+          <a:lstStyle/>
+          <a:p>
+            <a:r>
+              <a:rPr sz="1400" b="0" i="0">
+                <a:solidFill>
+                  <a:srgbClr val="B8D8EE"/>
+                </a:solidFill>
+                <a:latin typeface="Calibri"/>
+              </a:rPr>
+              <a:t>El diagrama se entrega como código Mermaid dentro de la plataforma del curso, no como imagen</a:t>
+            </a:r>
+          </a:p>
+        </p:txBody>
+      </p:sp>
+      <p:sp>
+        <p:nvSpPr>
+          <p:cNvPr id="6" name="Rounded Rectangle 5"/>
+          <p:cNvSpPr/>
+          <p:nvPr/>
+        </p:nvSpPr>
+        <p:spPr>
+          <a:xfrm>
+            <a:off x="457200" y="1659636"/>
+            <a:ext cx="11277295" cy="1051560"/>
+          </a:xfrm>
+          <a:prstGeom prst="roundRect">
+            <a:avLst>
+              <a:gd name="adj" fmla="val 12000"/>
+            </a:avLst>
+          </a:prstGeom>
+          <a:solidFill>
+            <a:srgbClr val="F2F2F2"/>
+          </a:solidFill>
+          <a:ln>
+            <a:noFill/>
+          </a:ln>
+        </p:spPr>
+        <p:style>
+          <a:lnRef idx="1">
+            <a:schemeClr val="accent1"/>
+          </a:lnRef>
+          <a:fillRef idx="3">
+            <a:schemeClr val="accent1"/>
+          </a:fillRef>
+          <a:effectRef idx="2">
+            <a:schemeClr val="accent1"/>
+          </a:effectRef>
+          <a:fontRef idx="minor">
+            <a:schemeClr val="lt1"/>
+          </a:fontRef>
+        </p:style>
+        <p:txBody>
+          <a:bodyPr rtlCol="0" anchor="ctr"/>
+          <a:lstStyle/>
+          <a:p>
+            <a:pPr algn="ctr"/>
+          </a:p>
+        </p:txBody>
+      </p:sp>
+      <p:sp>
+        <p:nvSpPr>
+          <p:cNvPr id="7" name="Rounded Rectangle 6"/>
+          <p:cNvSpPr/>
+          <p:nvPr/>
+        </p:nvSpPr>
+        <p:spPr>
+          <a:xfrm>
+            <a:off x="594360" y="1965960"/>
+            <a:ext cx="438912" cy="438912"/>
+          </a:xfrm>
+          <a:prstGeom prst="roundRect">
+            <a:avLst>
+              <a:gd name="adj" fmla="val 12000"/>
+            </a:avLst>
+          </a:prstGeom>
+          <a:solidFill>
+            <a:srgbClr val="095292"/>
+          </a:solidFill>
+          <a:ln>
+            <a:noFill/>
+          </a:ln>
+        </p:spPr>
+        <p:style>
+          <a:lnRef idx="1">
+            <a:schemeClr val="accent1"/>
+          </a:lnRef>
+          <a:fillRef idx="3">
+            <a:schemeClr val="accent1"/>
+          </a:fillRef>
+          <a:effectRef idx="2">
+            <a:schemeClr val="accent1"/>
+          </a:effectRef>
+          <a:fontRef idx="minor">
+            <a:schemeClr val="lt1"/>
+          </a:fontRef>
+        </p:style>
+        <p:txBody>
+          <a:bodyPr rtlCol="0" anchor="ctr"/>
+          <a:lstStyle/>
+          <a:p>
+            <a:pPr algn="ctr"/>
+          </a:p>
+        </p:txBody>
+      </p:sp>
+      <p:sp>
+        <p:nvSpPr>
+          <p:cNvPr id="8" name="TextBox 7"/>
+          <p:cNvSpPr txBox="1"/>
+          <p:nvPr/>
+        </p:nvSpPr>
+        <p:spPr>
+          <a:xfrm>
+            <a:off x="594360" y="1965960"/>
+            <a:ext cx="438912" cy="438912"/>
+          </a:xfrm>
+          <a:prstGeom prst="rect">
+            <a:avLst/>
+          </a:prstGeom>
+          <a:noFill/>
+        </p:spPr>
+        <p:txBody>
+          <a:bodyPr wrap="square" anchor="ctr"/>
+          <a:lstStyle/>
+          <a:p>
+            <a:pPr algn="ctr"/>
+            <a:r>
+              <a:rPr sz="1600" b="1" i="0">
+                <a:solidFill>
+                  <a:srgbClr val="FFFFFF"/>
+                </a:solidFill>
+                <a:latin typeface="Calibri"/>
+              </a:rPr>
+              <a:t>1</a:t>
+            </a:r>
+          </a:p>
+        </p:txBody>
+      </p:sp>
+      <p:sp>
+        <p:nvSpPr>
+          <p:cNvPr id="9" name="TextBox 8"/>
+          <p:cNvSpPr txBox="1"/>
+          <p:nvPr/>
+        </p:nvSpPr>
+        <p:spPr>
+          <a:xfrm>
+            <a:off x="1188720" y="1751076"/>
+            <a:ext cx="10271455" cy="886968"/>
+          </a:xfrm>
+          <a:prstGeom prst="rect">
+            <a:avLst/>
+          </a:prstGeom>
+          <a:noFill/>
+        </p:spPr>
+        <p:txBody>
+          <a:bodyPr wrap="square" anchor="ctr"/>
+          <a:lstStyle/>
+          <a:p>
+            <a:r>
+              <a:rPr sz="1500" b="1" i="0">
+                <a:solidFill>
+                  <a:srgbClr val="095292"/>
+                </a:solidFill>
+                <a:latin typeface="Calibri"/>
+              </a:rPr>
+              <a:t>Disena visual</a:t>
+            </a:r>
+          </a:p>
+          <a:p>
+            <a:pPr>
+              <a:spcBef>
+                <a:spcPts val="200"/>
+              </a:spcBef>
+            </a:pPr>
+            <a:r>
+              <a:rPr sz="1300" b="0" i="0">
+                <a:solidFill>
+                  <a:srgbClr val="333333"/>
+                </a:solidFill>
+                <a:latin typeface="Calibri"/>
+              </a:rPr>
+              <a:t>Dibuja el diagrama como quieras en Excalidraw o draw.io: es mas rapido arrastrar cajas que escribir codigo, y ahi es donde piensas el modelo.</a:t>
+            </a:r>
+          </a:p>
+        </p:txBody>
+      </p:sp>
+      <p:sp>
+        <p:nvSpPr>
+          <p:cNvPr id="10" name="Rounded Rectangle 9"/>
+          <p:cNvSpPr/>
+          <p:nvPr/>
+        </p:nvSpPr>
+        <p:spPr>
+          <a:xfrm>
+            <a:off x="457200" y="2802636"/>
+            <a:ext cx="11277295" cy="1051560"/>
+          </a:xfrm>
+          <a:prstGeom prst="roundRect">
+            <a:avLst>
+              <a:gd name="adj" fmla="val 12000"/>
+            </a:avLst>
+          </a:prstGeom>
+          <a:solidFill>
+            <a:srgbClr val="E8F4FA"/>
+          </a:solidFill>
+          <a:ln>
+            <a:noFill/>
+          </a:ln>
+        </p:spPr>
+        <p:style>
+          <a:lnRef idx="1">
+            <a:schemeClr val="accent1"/>
+          </a:lnRef>
+          <a:fillRef idx="3">
+            <a:schemeClr val="accent1"/>
+          </a:fillRef>
+          <a:effectRef idx="2">
+            <a:schemeClr val="accent1"/>
+          </a:effectRef>
+          <a:fontRef idx="minor">
+            <a:schemeClr val="lt1"/>
+          </a:fontRef>
+        </p:style>
+        <p:txBody>
+          <a:bodyPr rtlCol="0" anchor="ctr"/>
+          <a:lstStyle/>
+          <a:p>
+            <a:pPr algn="ctr"/>
+          </a:p>
+        </p:txBody>
+      </p:sp>
+      <p:sp>
+        <p:nvSpPr>
+          <p:cNvPr id="11" name="Rounded Rectangle 10"/>
+          <p:cNvSpPr/>
+          <p:nvPr/>
+        </p:nvSpPr>
+        <p:spPr>
+          <a:xfrm>
+            <a:off x="594360" y="3108960"/>
+            <a:ext cx="438912" cy="438912"/>
+          </a:xfrm>
+          <a:prstGeom prst="roundRect">
+            <a:avLst>
+              <a:gd name="adj" fmla="val 12000"/>
+            </a:avLst>
+          </a:prstGeom>
+          <a:solidFill>
+            <a:srgbClr val="095292"/>
+          </a:solidFill>
+          <a:ln>
+            <a:noFill/>
+          </a:ln>
+        </p:spPr>
+        <p:style>
+          <a:lnRef idx="1">
+            <a:schemeClr val="accent1"/>
+          </a:lnRef>
+          <a:fillRef idx="3">
+            <a:schemeClr val="accent1"/>
+          </a:fillRef>
+          <a:effectRef idx="2">
+            <a:schemeClr val="accent1"/>
+          </a:effectRef>
+          <a:fontRef idx="minor">
+            <a:schemeClr val="lt1"/>
+          </a:fontRef>
+        </p:style>
+        <p:txBody>
+          <a:bodyPr rtlCol="0" anchor="ctr"/>
+          <a:lstStyle/>
+          <a:p>
+            <a:pPr algn="ctr"/>
+          </a:p>
+        </p:txBody>
+      </p:sp>
+      <p:sp>
+        <p:nvSpPr>
+          <p:cNvPr id="12" name="TextBox 11"/>
+          <p:cNvSpPr txBox="1"/>
+          <p:nvPr/>
+        </p:nvSpPr>
+        <p:spPr>
+          <a:xfrm>
+            <a:off x="594360" y="3108960"/>
+            <a:ext cx="438912" cy="438912"/>
+          </a:xfrm>
+          <a:prstGeom prst="rect">
+            <a:avLst/>
+          </a:prstGeom>
+          <a:noFill/>
+        </p:spPr>
+        <p:txBody>
+          <a:bodyPr wrap="square" anchor="ctr"/>
+          <a:lstStyle/>
+          <a:p>
+            <a:pPr algn="ctr"/>
+            <a:r>
+              <a:rPr sz="1600" b="1" i="0">
+                <a:solidFill>
+                  <a:srgbClr val="FFFFFF"/>
+                </a:solidFill>
+                <a:latin typeface="Calibri"/>
+              </a:rPr>
+              <a:t>2</a:t>
+            </a:r>
+          </a:p>
+        </p:txBody>
+      </p:sp>
+      <p:sp>
+        <p:nvSpPr>
+          <p:cNvPr id="13" name="TextBox 12"/>
+          <p:cNvSpPr txBox="1"/>
+          <p:nvPr/>
+        </p:nvSpPr>
+        <p:spPr>
+          <a:xfrm>
+            <a:off x="1188720" y="2894076"/>
+            <a:ext cx="10271455" cy="886968"/>
+          </a:xfrm>
+          <a:prstGeom prst="rect">
+            <a:avLst/>
+          </a:prstGeom>
+          <a:noFill/>
+        </p:spPr>
+        <p:txBody>
+          <a:bodyPr wrap="square" anchor="ctr"/>
+          <a:lstStyle/>
+          <a:p>
+            <a:r>
+              <a:rPr sz="1500" b="1" i="0">
+                <a:solidFill>
+                  <a:srgbClr val="095292"/>
+                </a:solidFill>
+                <a:latin typeface="Calibri"/>
+              </a:rPr>
+              <a:t>Traduce con IA</a:t>
+            </a:r>
+          </a:p>
+          <a:p>
+            <a:pPr>
+              <a:spcBef>
+                <a:spcPts val="200"/>
+              </a:spcBef>
+            </a:pPr>
+            <a:r>
+              <a:rPr sz="1300" b="0" i="0">
+                <a:solidFill>
+                  <a:srgbClr val="333333"/>
+                </a:solidFill>
+                <a:latin typeface="Calibri"/>
+              </a:rPr>
+              <a:t>Copia o describe tu boceto a una IA y pidele el codigo Mermaid: «convierte este diagrama a Mermaid usando sequenceDiagram». Revisa el resultado: la IA acierta la sintaxis, no tu modelo.</a:t>
+            </a:r>
+          </a:p>
+        </p:txBody>
+      </p:sp>
+      <p:sp>
+        <p:nvSpPr>
+          <p:cNvPr id="14" name="Rounded Rectangle 13"/>
+          <p:cNvSpPr/>
+          <p:nvPr/>
+        </p:nvSpPr>
+        <p:spPr>
+          <a:xfrm>
+            <a:off x="457200" y="3945636"/>
+            <a:ext cx="11277295" cy="1051560"/>
+          </a:xfrm>
+          <a:prstGeom prst="roundRect">
+            <a:avLst>
+              <a:gd name="adj" fmla="val 12000"/>
+            </a:avLst>
+          </a:prstGeom>
+          <a:solidFill>
+            <a:srgbClr val="F2F2F2"/>
+          </a:solidFill>
+          <a:ln>
+            <a:noFill/>
+          </a:ln>
+        </p:spPr>
+        <p:style>
+          <a:lnRef idx="1">
+            <a:schemeClr val="accent1"/>
+          </a:lnRef>
+          <a:fillRef idx="3">
+            <a:schemeClr val="accent1"/>
+          </a:fillRef>
+          <a:effectRef idx="2">
+            <a:schemeClr val="accent1"/>
+          </a:effectRef>
+          <a:fontRef idx="minor">
+            <a:schemeClr val="lt1"/>
+          </a:fontRef>
+        </p:style>
+        <p:txBody>
+          <a:bodyPr rtlCol="0" anchor="ctr"/>
+          <a:lstStyle/>
+          <a:p>
+            <a:pPr algn="ctr"/>
+          </a:p>
+        </p:txBody>
+      </p:sp>
+      <p:sp>
+        <p:nvSpPr>
+          <p:cNvPr id="15" name="Rounded Rectangle 14"/>
+          <p:cNvSpPr/>
+          <p:nvPr/>
+        </p:nvSpPr>
+        <p:spPr>
+          <a:xfrm>
+            <a:off x="594360" y="4251960"/>
+            <a:ext cx="438912" cy="438912"/>
+          </a:xfrm>
+          <a:prstGeom prst="roundRect">
+            <a:avLst>
+              <a:gd name="adj" fmla="val 12000"/>
+            </a:avLst>
+          </a:prstGeom>
+          <a:solidFill>
+            <a:srgbClr val="095292"/>
+          </a:solidFill>
+          <a:ln>
+            <a:noFill/>
+          </a:ln>
+        </p:spPr>
+        <p:style>
+          <a:lnRef idx="1">
+            <a:schemeClr val="accent1"/>
+          </a:lnRef>
+          <a:fillRef idx="3">
+            <a:schemeClr val="accent1"/>
+          </a:fillRef>
+          <a:effectRef idx="2">
+            <a:schemeClr val="accent1"/>
+          </a:effectRef>
+          <a:fontRef idx="minor">
+            <a:schemeClr val="lt1"/>
+          </a:fontRef>
+        </p:style>
+        <p:txBody>
+          <a:bodyPr rtlCol="0" anchor="ctr"/>
+          <a:lstStyle/>
+          <a:p>
+            <a:pPr algn="ctr"/>
+          </a:p>
+        </p:txBody>
+      </p:sp>
+      <p:sp>
+        <p:nvSpPr>
+          <p:cNvPr id="16" name="TextBox 15"/>
+          <p:cNvSpPr txBox="1"/>
+          <p:nvPr/>
+        </p:nvSpPr>
+        <p:spPr>
+          <a:xfrm>
+            <a:off x="594360" y="4251960"/>
+            <a:ext cx="438912" cy="438912"/>
+          </a:xfrm>
+          <a:prstGeom prst="rect">
+            <a:avLst/>
+          </a:prstGeom>
+          <a:noFill/>
+        </p:spPr>
+        <p:txBody>
+          <a:bodyPr wrap="square" anchor="ctr"/>
+          <a:lstStyle/>
+          <a:p>
+            <a:pPr algn="ctr"/>
+            <a:r>
+              <a:rPr sz="1600" b="1" i="0">
+                <a:solidFill>
+                  <a:srgbClr val="FFFFFF"/>
+                </a:solidFill>
+                <a:latin typeface="Calibri"/>
+              </a:rPr>
+              <a:t>3</a:t>
+            </a:r>
+          </a:p>
+        </p:txBody>
+      </p:sp>
+      <p:sp>
+        <p:nvSpPr>
+          <p:cNvPr id="17" name="TextBox 16"/>
+          <p:cNvSpPr txBox="1"/>
+          <p:nvPr/>
+        </p:nvSpPr>
+        <p:spPr>
+          <a:xfrm>
+            <a:off x="1188720" y="4037076"/>
+            <a:ext cx="10271455" cy="886968"/>
+          </a:xfrm>
+          <a:prstGeom prst="rect">
+            <a:avLst/>
+          </a:prstGeom>
+          <a:noFill/>
+        </p:spPr>
+        <p:txBody>
+          <a:bodyPr wrap="square" anchor="ctr"/>
+          <a:lstStyle/>
+          <a:p>
+            <a:r>
+              <a:rPr sz="1500" b="1" i="0">
+                <a:solidFill>
+                  <a:srgbClr val="095292"/>
+                </a:solidFill>
+                <a:latin typeface="Calibri"/>
+              </a:rPr>
+              <a:t>Pega y renderiza en la plataforma del curso</a:t>
+            </a:r>
+          </a:p>
+          <a:p>
+            <a:pPr>
+              <a:spcBef>
+                <a:spcPts val="200"/>
+              </a:spcBef>
+            </a:pPr>
+            <a:r>
+              <a:rPr sz="1300" b="0" i="0">
+                <a:solidFill>
+                  <a:srgbClr val="333333"/>
+                </a:solidFill>
+                <a:latin typeface="Calibri"/>
+              </a:rPr>
+              <a:t>Pega ese codigo en la caja de texto de la pregunta y mira como lo dibuja la plataforma. Si no renderiza, corrige ahi mismo: lo que se califica es el diagrama renderizado dentro de la plataforma del curso.</a:t>
+            </a:r>
+          </a:p>
+        </p:txBody>
+      </p:sp>
+      <p:sp>
+        <p:nvSpPr>
+          <p:cNvPr id="18" name="Rounded Rectangle 17"/>
+          <p:cNvSpPr/>
+          <p:nvPr/>
+        </p:nvSpPr>
+        <p:spPr>
+          <a:xfrm>
+            <a:off x="457200" y="5088636"/>
+            <a:ext cx="11277295" cy="1051560"/>
+          </a:xfrm>
+          <a:prstGeom prst="roundRect">
+            <a:avLst>
+              <a:gd name="adj" fmla="val 12000"/>
+            </a:avLst>
+          </a:prstGeom>
+          <a:solidFill>
+            <a:srgbClr val="E8F4FA"/>
+          </a:solidFill>
+          <a:ln>
+            <a:noFill/>
+          </a:ln>
+        </p:spPr>
+        <p:style>
+          <a:lnRef idx="1">
+            <a:schemeClr val="accent1"/>
+          </a:lnRef>
+          <a:fillRef idx="3">
+            <a:schemeClr val="accent1"/>
+          </a:fillRef>
+          <a:effectRef idx="2">
+            <a:schemeClr val="accent1"/>
+          </a:effectRef>
+          <a:fontRef idx="minor">
+            <a:schemeClr val="lt1"/>
+          </a:fontRef>
+        </p:style>
+        <p:txBody>
+          <a:bodyPr rtlCol="0" anchor="ctr"/>
+          <a:lstStyle/>
+          <a:p>
+            <a:pPr algn="ctr"/>
+          </a:p>
+        </p:txBody>
+      </p:sp>
+      <p:sp>
+        <p:nvSpPr>
+          <p:cNvPr id="19" name="Rounded Rectangle 18"/>
+          <p:cNvSpPr/>
+          <p:nvPr/>
+        </p:nvSpPr>
+        <p:spPr>
+          <a:xfrm>
+            <a:off x="594360" y="5394960"/>
+            <a:ext cx="438912" cy="438912"/>
+          </a:xfrm>
+          <a:prstGeom prst="roundRect">
+            <a:avLst>
+              <a:gd name="adj" fmla="val 12000"/>
+            </a:avLst>
+          </a:prstGeom>
+          <a:solidFill>
+            <a:srgbClr val="095292"/>
+          </a:solidFill>
+          <a:ln>
+            <a:noFill/>
+          </a:ln>
+        </p:spPr>
+        <p:style>
+          <a:lnRef idx="1">
+            <a:schemeClr val="accent1"/>
+          </a:lnRef>
+          <a:fillRef idx="3">
+            <a:schemeClr val="accent1"/>
+          </a:fillRef>
+          <a:effectRef idx="2">
+            <a:schemeClr val="accent1"/>
+          </a:effectRef>
+          <a:fontRef idx="minor">
+            <a:schemeClr val="lt1"/>
+          </a:fontRef>
+        </p:style>
+        <p:txBody>
+          <a:bodyPr rtlCol="0" anchor="ctr"/>
+          <a:lstStyle/>
+          <a:p>
+            <a:pPr algn="ctr"/>
+          </a:p>
+        </p:txBody>
+      </p:sp>
+      <p:sp>
+        <p:nvSpPr>
+          <p:cNvPr id="20" name="TextBox 19"/>
+          <p:cNvSpPr txBox="1"/>
+          <p:nvPr/>
+        </p:nvSpPr>
+        <p:spPr>
+          <a:xfrm>
+            <a:off x="594360" y="5394960"/>
+            <a:ext cx="438912" cy="438912"/>
+          </a:xfrm>
+          <a:prstGeom prst="rect">
+            <a:avLst/>
+          </a:prstGeom>
+          <a:noFill/>
+        </p:spPr>
+        <p:txBody>
+          <a:bodyPr wrap="square" anchor="ctr"/>
+          <a:lstStyle/>
+          <a:p>
+            <a:pPr algn="ctr"/>
+            <a:r>
+              <a:rPr sz="1600" b="1" i="0">
+                <a:solidFill>
+                  <a:srgbClr val="FFFFFF"/>
+                </a:solidFill>
+                <a:latin typeface="Calibri"/>
+              </a:rPr>
+              <a:t>4</a:t>
+            </a:r>
+          </a:p>
+        </p:txBody>
+      </p:sp>
+      <p:sp>
+        <p:nvSpPr>
+          <p:cNvPr id="21" name="TextBox 20"/>
+          <p:cNvSpPr txBox="1"/>
+          <p:nvPr/>
+        </p:nvSpPr>
+        <p:spPr>
+          <a:xfrm>
+            <a:off x="1188720" y="5180076"/>
+            <a:ext cx="10271455" cy="886968"/>
+          </a:xfrm>
+          <a:prstGeom prst="rect">
+            <a:avLst/>
+          </a:prstGeom>
+          <a:noFill/>
+        </p:spPr>
+        <p:txBody>
+          <a:bodyPr wrap="square" anchor="ctr"/>
+          <a:lstStyle/>
+          <a:p>
+            <a:r>
+              <a:rPr sz="1500" b="1" i="0">
+                <a:solidFill>
+                  <a:srgbClr val="095292"/>
+                </a:solidFill>
+                <a:latin typeface="Calibri"/>
+              </a:rPr>
+              <a:t>Guarda el PNG para tu PI</a:t>
+            </a:r>
+          </a:p>
+          <a:p>
+            <a:pPr>
+              <a:spcBef>
+                <a:spcPts val="200"/>
+              </a:spcBef>
+            </a:pPr>
+            <a:r>
+              <a:rPr sz="1300" b="0" i="0">
+                <a:solidFill>
+                  <a:srgbClr val="333333"/>
+                </a:solidFill>
+                <a:latin typeface="Calibri"/>
+              </a:rPr>
+              <a:t>Exporta tambien la imagen a la carpeta de tu Proyecto Integrador. Esa copia es para tu informe; no reemplaza la respuesta en la plataforma.</a:t>
+            </a:r>
+          </a:p>
+        </p:txBody>
+      </p:sp>
+      <p:sp>
+        <p:nvSpPr>
+          <p:cNvPr id="22" name="TextBox 21"/>
+          <p:cNvSpPr txBox="1"/>
+          <p:nvPr/>
+        </p:nvSpPr>
+        <p:spPr>
+          <a:xfrm>
+            <a:off x="11185855" y="6473952"/>
+            <a:ext cx="640080" cy="274320"/>
+          </a:xfrm>
+          <a:prstGeom prst="rect">
+            <a:avLst/>
+          </a:prstGeom>
+          <a:noFill/>
+        </p:spPr>
+        <p:txBody>
+          <a:bodyPr wrap="square">
+            <a:spAutoFit/>
+          </a:bodyPr>
+          <a:lstStyle/>
+          <a:p>
+            <a:pPr algn="r"/>
+            <a:r>
+              <a:rPr sz="1100" b="0" i="0">
+                <a:solidFill>
+                  <a:srgbClr val="666666"/>
+                </a:solidFill>
+                <a:latin typeface="Calibri"/>
+              </a:rPr>
+              <a:t>23</a:t>
+            </a:r>
+          </a:p>
+        </p:txBody>
+      </p:sp>
+    </p:spTree>
+  </p:cSld>
+  <p:clrMapOvr>
+    <a:masterClrMapping/>
+  </p:clrMapOvr>
+</p:sld>
+</file>
+
+<file path=ppt/slides/slide24.xml><?xml version="1.0" encoding="utf-8"?>
+<p:sld xmlns:a="http://schemas.openxmlformats.org/drawingml/2006/main" xmlns:p="http://schemas.openxmlformats.org/presentationml/2006/main" xmlns:r="http://schemas.openxmlformats.org/officeDocument/2006/relationships">
+  <p:cSld>
+    <p:bg>
+      <p:bgPr>
+        <a:solidFill>
+          <a:srgbClr val="FFFFFF"/>
+        </a:solidFill>
+        <a:effectLst/>
+      </p:bgPr>
+    </p:bg>
+    <p:spTree>
+      <p:nvGrpSpPr>
+        <p:cNvPr id="1" name=""/>
+        <p:cNvGrpSpPr/>
+        <p:nvPr/>
+      </p:nvGrpSpPr>
+      <p:grpSpPr/>
+      <p:sp>
+        <p:nvSpPr>
+          <p:cNvPr id="2" name="Rectangle 1"/>
+          <p:cNvSpPr/>
+          <p:nvPr/>
+        </p:nvSpPr>
+        <p:spPr>
+          <a:xfrm>
+            <a:off x="0" y="0"/>
+            <a:ext cx="12191695" cy="960120"/>
+          </a:xfrm>
+          <a:prstGeom prst="rect">
+            <a:avLst/>
+          </a:prstGeom>
+          <a:solidFill>
+            <a:srgbClr val="095292"/>
+          </a:solidFill>
+          <a:ln>
+            <a:noFill/>
+          </a:ln>
+        </p:spPr>
+        <p:style>
+          <a:lnRef idx="1">
+            <a:schemeClr val="accent1"/>
+          </a:lnRef>
+          <a:fillRef idx="3">
+            <a:schemeClr val="accent1"/>
+          </a:fillRef>
+          <a:effectRef idx="2">
+            <a:schemeClr val="accent1"/>
+          </a:effectRef>
+          <a:fontRef idx="minor">
+            <a:schemeClr val="lt1"/>
+          </a:fontRef>
+        </p:style>
+        <p:txBody>
+          <a:bodyPr rtlCol="0" anchor="ctr"/>
+          <a:lstStyle/>
+          <a:p>
+            <a:pPr algn="ctr"/>
+          </a:p>
+        </p:txBody>
+      </p:sp>
+      <p:sp>
+        <p:nvSpPr>
+          <p:cNvPr id="3" name="Rectangle 2"/>
+          <p:cNvSpPr/>
+          <p:nvPr/>
+        </p:nvSpPr>
+        <p:spPr>
+          <a:xfrm>
+            <a:off x="0" y="960120"/>
+            <a:ext cx="12191695" cy="41148"/>
+          </a:xfrm>
+          <a:prstGeom prst="rect">
+            <a:avLst/>
+          </a:prstGeom>
+          <a:solidFill>
+            <a:srgbClr val="FFD000"/>
+          </a:solidFill>
+          <a:ln>
+            <a:noFill/>
+          </a:ln>
+        </p:spPr>
+        <p:style>
+          <a:lnRef idx="1">
+            <a:schemeClr val="accent1"/>
+          </a:lnRef>
+          <a:fillRef idx="3">
+            <a:schemeClr val="accent1"/>
+          </a:fillRef>
+          <a:effectRef idx="2">
+            <a:schemeClr val="accent1"/>
+          </a:effectRef>
+          <a:fontRef idx="minor">
+            <a:schemeClr val="lt1"/>
+          </a:fontRef>
+        </p:style>
+        <p:txBody>
+          <a:bodyPr rtlCol="0" anchor="ctr"/>
+          <a:lstStyle/>
+          <a:p>
+            <a:pPr algn="ctr"/>
+          </a:p>
+        </p:txBody>
+      </p:sp>
+      <p:sp>
+        <p:nvSpPr>
+          <p:cNvPr id="4" name="TextBox 3"/>
+          <p:cNvSpPr txBox="1"/>
+          <p:nvPr/>
+        </p:nvSpPr>
+        <p:spPr>
+          <a:xfrm>
+            <a:off x="457200" y="164592"/>
+            <a:ext cx="11277295" cy="502920"/>
+          </a:xfrm>
+          <a:prstGeom prst="rect">
+            <a:avLst/>
+          </a:prstGeom>
+          <a:noFill/>
+        </p:spPr>
+        <p:txBody>
+          <a:bodyPr wrap="square">
+            <a:spAutoFit/>
+          </a:bodyPr>
+          <a:lstStyle/>
+          <a:p>
+            <a:r>
+              <a:rPr sz="2600" b="1" i="0">
+                <a:solidFill>
+                  <a:srgbClr val="FFFFFF"/>
+                </a:solidFill>
+                <a:latin typeface="Calibri"/>
+              </a:rPr>
+              <a:t>PI CloudLite — entregable de hoy</a:t>
+            </a:r>
+          </a:p>
+        </p:txBody>
+      </p:sp>
+      <p:sp>
+        <p:nvSpPr>
+          <p:cNvPr id="5" name="TextBox 4"/>
+          <p:cNvSpPr txBox="1"/>
+          <p:nvPr/>
+        </p:nvSpPr>
+        <p:spPr>
+          <a:xfrm>
+            <a:off x="457200" y="1170432"/>
+            <a:ext cx="11277295" cy="5230368"/>
+          </a:xfrm>
+          <a:prstGeom prst="rect">
+            <a:avLst/>
+          </a:prstGeom>
+          <a:noFill/>
+        </p:spPr>
+        <p:txBody>
+          <a:bodyPr wrap="square">
+            <a:spAutoFit/>
+          </a:bodyPr>
+          <a:lstStyle/>
+          <a:p>
+            <a:pPr>
+              <a:spcAft>
+                <a:spcPts val="800"/>
+              </a:spcAft>
+            </a:pPr>
+            <a:r>
+              <a:rPr sz="2000" b="0" i="0">
+                <a:solidFill>
+                  <a:srgbClr val="333333"/>
+                </a:solidFill>
+                <a:latin typeface="Calibri"/>
+              </a:rPr>
+              <a:t>–   </a:t>
+            </a:r>
+            <a:r>
+              <a:rPr sz="2000" b="1" i="0">
+                <a:solidFill>
+                  <a:srgbClr val="333333"/>
+                </a:solidFill>
+                <a:latin typeface="Calibri"/>
+              </a:rPr>
+              <a:t>Entregable:</a:t>
+            </a:r>
+            <a:r>
+              <a:rPr sz="2000" b="0" i="0">
+                <a:solidFill>
+                  <a:srgbClr val="333333"/>
+                </a:solidFill>
+                <a:latin typeface="Calibri"/>
+              </a:rPr>
+              <a:t> Sección Rendimiento + guion de pitch + paquete casi-final</a:t>
+            </a:r>
+          </a:p>
+          <a:p>
+            <a:pPr>
+              <a:spcAft>
+                <a:spcPts val="800"/>
+              </a:spcAft>
+            </a:pPr>
+            <a:r>
+              <a:rPr sz="2000" b="0" i="0">
+                <a:solidFill>
+                  <a:srgbClr val="333333"/>
+                </a:solidFill>
+                <a:latin typeface="Calibri"/>
+              </a:rPr>
+              <a:t>–   Herramienta: </a:t>
+            </a:r>
+            <a:r>
+              <a:rPr sz="2000" b="1" i="0">
+                <a:solidFill>
+                  <a:srgbClr val="333333"/>
+                </a:solidFill>
+                <a:latin typeface="Calibri"/>
+              </a:rPr>
+              <a:t>Google Docs · draw.io · (opcional) lab contenedor</a:t>
+            </a:r>
+          </a:p>
+          <a:p>
+            <a:pPr>
+              <a:spcAft>
+                <a:spcPts val="800"/>
+              </a:spcAft>
+            </a:pPr>
+            <a:r>
+              <a:rPr sz="2000" b="0" i="0">
+                <a:solidFill>
+                  <a:srgbClr val="333333"/>
+                </a:solidFill>
+                <a:latin typeface="Calibri"/>
+              </a:rPr>
+              <a:t>–   Todo lo que construyan hoy entra al </a:t>
+            </a:r>
+            <a:r>
+              <a:rPr sz="2000" b="1" i="0">
+                <a:solidFill>
+                  <a:srgbClr val="333333"/>
+                </a:solidFill>
+                <a:latin typeface="Calibri"/>
+              </a:rPr>
+              <a:t>informe/repo del PI</a:t>
+            </a:r>
+            <a:r>
+              <a:rPr sz="2000" b="0" i="0">
+                <a:solidFill>
+                  <a:srgbClr val="333333"/>
+                </a:solidFill>
+                <a:latin typeface="Calibri"/>
+              </a:rPr>
+              <a:t> (no es lab suelto).</a:t>
+            </a:r>
+          </a:p>
+          <a:p>
+            <a:pPr>
+              <a:spcAft>
+                <a:spcPts val="800"/>
+              </a:spcAft>
+            </a:pPr>
+            <a:r>
+              <a:rPr sz="2000" b="0" i="0">
+                <a:solidFill>
+                  <a:srgbClr val="333333"/>
+                </a:solidFill>
+                <a:latin typeface="Calibri"/>
+              </a:rPr>
+              <a:t>–   Individual por defecto · el docente puede autorizar equipos de 2–3; la entrega en la plataforma del curso siempre es individual.</a:t>
+            </a:r>
+          </a:p>
+        </p:txBody>
+      </p:sp>
+      <p:sp>
+        <p:nvSpPr>
+          <p:cNvPr id="6" name="TextBox 5"/>
+          <p:cNvSpPr txBox="1"/>
+          <p:nvPr/>
+        </p:nvSpPr>
+        <p:spPr>
+          <a:xfrm>
+            <a:off x="11185855" y="6473952"/>
+            <a:ext cx="640080" cy="274320"/>
+          </a:xfrm>
+          <a:prstGeom prst="rect">
+            <a:avLst/>
+          </a:prstGeom>
+          <a:noFill/>
+        </p:spPr>
+        <p:txBody>
+          <a:bodyPr wrap="square">
+            <a:spAutoFit/>
+          </a:bodyPr>
+          <a:lstStyle/>
+          <a:p>
+            <a:pPr algn="r"/>
+            <a:r>
+              <a:rPr sz="1100" b="0" i="0">
+                <a:solidFill>
+                  <a:srgbClr val="666666"/>
+                </a:solidFill>
+                <a:latin typeface="Calibri"/>
+              </a:rPr>
+              <a:t>24</a:t>
+            </a:r>
+          </a:p>
+        </p:txBody>
+      </p:sp>
+    </p:spTree>
+  </p:cSld>
+  <p:clrMapOvr>
+    <a:masterClrMapping/>
+  </p:clrMapOvr>
+</p:sld>
+</file>
+
+<file path=ppt/slides/slide25.xml><?xml version="1.0" encoding="utf-8"?>
+<p:sld xmlns:a="http://schemas.openxmlformats.org/drawingml/2006/main" xmlns:p="http://schemas.openxmlformats.org/presentationml/2006/main" xmlns:r="http://schemas.openxmlformats.org/officeDocument/2006/relationships">
+  <p:cSld>
+    <p:bg>
+      <p:bgPr>
+        <a:solidFill>
+          <a:srgbClr val="FFFFFF"/>
+        </a:solidFill>
+        <a:effectLst/>
+      </p:bgPr>
+    </p:bg>
+    <p:spTree>
+      <p:nvGrpSpPr>
+        <p:cNvPr id="1" name=""/>
+        <p:cNvGrpSpPr/>
+        <p:nvPr/>
+      </p:nvGrpSpPr>
+      <p:grpSpPr/>
+      <p:sp>
+        <p:nvSpPr>
+          <p:cNvPr id="2" name="Rectangle 1"/>
+          <p:cNvSpPr/>
+          <p:nvPr/>
+        </p:nvSpPr>
+        <p:spPr>
+          <a:xfrm>
+            <a:off x="0" y="0"/>
+            <a:ext cx="12191695" cy="960120"/>
+          </a:xfrm>
+          <a:prstGeom prst="rect">
+            <a:avLst/>
+          </a:prstGeom>
+          <a:solidFill>
+            <a:srgbClr val="095292"/>
+          </a:solidFill>
+          <a:ln>
+            <a:noFill/>
+          </a:ln>
+        </p:spPr>
+        <p:style>
+          <a:lnRef idx="1">
+            <a:schemeClr val="accent1"/>
+          </a:lnRef>
+          <a:fillRef idx="3">
+            <a:schemeClr val="accent1"/>
+          </a:fillRef>
+          <a:effectRef idx="2">
+            <a:schemeClr val="accent1"/>
+          </a:effectRef>
+          <a:fontRef idx="minor">
+            <a:schemeClr val="lt1"/>
+          </a:fontRef>
+        </p:style>
+        <p:txBody>
+          <a:bodyPr rtlCol="0" anchor="ctr"/>
+          <a:lstStyle/>
+          <a:p>
+            <a:pPr algn="ctr"/>
+          </a:p>
+        </p:txBody>
+      </p:sp>
+      <p:sp>
+        <p:nvSpPr>
+          <p:cNvPr id="3" name="Rectangle 2"/>
+          <p:cNvSpPr/>
+          <p:nvPr/>
+        </p:nvSpPr>
+        <p:spPr>
+          <a:xfrm>
+            <a:off x="0" y="960120"/>
+            <a:ext cx="12191695" cy="41148"/>
+          </a:xfrm>
+          <a:prstGeom prst="rect">
+            <a:avLst/>
+          </a:prstGeom>
+          <a:solidFill>
+            <a:srgbClr val="FFD000"/>
+          </a:solidFill>
+          <a:ln>
+            <a:noFill/>
+          </a:ln>
+        </p:spPr>
+        <p:style>
+          <a:lnRef idx="1">
+            <a:schemeClr val="accent1"/>
+          </a:lnRef>
+          <a:fillRef idx="3">
+            <a:schemeClr val="accent1"/>
+          </a:fillRef>
+          <a:effectRef idx="2">
+            <a:schemeClr val="accent1"/>
+          </a:effectRef>
+          <a:fontRef idx="minor">
+            <a:schemeClr val="lt1"/>
+          </a:fontRef>
+        </p:style>
+        <p:txBody>
+          <a:bodyPr rtlCol="0" anchor="ctr"/>
+          <a:lstStyle/>
+          <a:p>
+            <a:pPr algn="ctr"/>
+          </a:p>
+        </p:txBody>
+      </p:sp>
+      <p:sp>
+        <p:nvSpPr>
+          <p:cNvPr id="4" name="TextBox 3"/>
+          <p:cNvSpPr txBox="1"/>
+          <p:nvPr/>
+        </p:nvSpPr>
+        <p:spPr>
+          <a:xfrm>
+            <a:off x="457200" y="164592"/>
+            <a:ext cx="11277295" cy="502920"/>
+          </a:xfrm>
+          <a:prstGeom prst="rect">
+            <a:avLst/>
+          </a:prstGeom>
+          <a:noFill/>
+        </p:spPr>
+        <p:txBody>
+          <a:bodyPr wrap="square">
+            <a:spAutoFit/>
+          </a:bodyPr>
+          <a:lstStyle/>
+          <a:p>
+            <a:r>
+              <a:rPr sz="2600" b="1" i="0">
+                <a:solidFill>
+                  <a:srgbClr val="FFFFFF"/>
+                </a:solidFill>
+                <a:latin typeface="Calibri"/>
+              </a:rPr>
+              <a:t>Manos a la obra (paso a paso)</a:t>
+            </a:r>
+          </a:p>
+        </p:txBody>
+      </p:sp>
+      <p:sp>
+        <p:nvSpPr>
+          <p:cNvPr id="5" name="TextBox 4"/>
+          <p:cNvSpPr txBox="1"/>
+          <p:nvPr/>
+        </p:nvSpPr>
+        <p:spPr>
+          <a:xfrm>
+            <a:off x="457200" y="1170432"/>
+            <a:ext cx="11277295" cy="5230368"/>
+          </a:xfrm>
+          <a:prstGeom prst="rect">
+            <a:avLst/>
+          </a:prstGeom>
+          <a:noFill/>
+        </p:spPr>
+        <p:txBody>
+          <a:bodyPr wrap="square">
+            <a:spAutoFit/>
+          </a:bodyPr>
+          <a:lstStyle/>
+          <a:p>
+            <a:pPr>
+              <a:spcAft>
+                <a:spcPts val="800"/>
+              </a:spcAft>
+            </a:pPr>
+            <a:r>
+              <a:rPr sz="1600" b="1" i="0">
+                <a:solidFill>
+                  <a:srgbClr val="333333"/>
+                </a:solidFill>
+                <a:latin typeface="Calibri"/>
+              </a:rPr>
+              <a:t>1.</a:t>
+            </a:r>
+            <a:r>
+              <a:rPr sz="1600" b="0" i="0">
+                <a:solidFill>
+                  <a:srgbClr val="333333"/>
+                </a:solidFill>
+                <a:latin typeface="Calibri"/>
+              </a:rPr>
+              <a:t> Paso 1: describan el escenario de carga del pico real de su dominio con los 6 datos obligatorios (evento del pico, usuarios concurrentes, peticiones por segundo, mezcla de operaciones en porcentajes que sumen 100, duracion de la ventana y volumen de datos de partida), verificando que la mezcla sume exactamente 100 por ciento y que el pico corresponda a una fecha real del calendario de su dominio.</a:t>
+            </a:r>
+          </a:p>
+          <a:p>
+            <a:pPr>
+              <a:spcAft>
+                <a:spcPts val="800"/>
+              </a:spcAft>
+            </a:pPr>
+            <a:r>
+              <a:rPr sz="1600" b="0" i="0">
+                <a:solidFill>
+                  <a:srgbClr val="333333"/>
+                </a:solidFill>
+                <a:latin typeface="Calibri"/>
+              </a:rPr>
+              <a:t>–   </a:t>
+            </a:r>
+            <a:r>
+              <a:rPr sz="1600" b="1" i="0">
+                <a:solidFill>
+                  <a:srgbClr val="333333"/>
+                </a:solidFill>
+                <a:latin typeface="Calibri"/>
+              </a:rPr>
+              <a:t>2.</a:t>
+            </a:r>
+            <a:r>
+              <a:rPr sz="1600" b="0" i="0">
+                <a:solidFill>
+                  <a:srgbClr val="333333"/>
+                </a:solidFill>
+                <a:latin typeface="Calibri"/>
+              </a:rPr>
+              <a:t> Paso 2: definan las 3 metricas objetivo en una tabla de 4 columnas con numero, ventana de medicion, forma de medirla y consecuencia de incumplirla, verificando que cada objetivo tenga un numero y una ventana (por ejemplo p95 por debajo de 800 ms en 5 minutos) y que ninguna diga rapido o aceptable sin cifra.</a:t>
+            </a:r>
+          </a:p>
+          <a:p>
+            <a:pPr>
+              <a:spcAft>
+                <a:spcPts val="800"/>
+              </a:spcAft>
+            </a:pPr>
+            <a:r>
+              <a:rPr sz="1600" b="0" i="0">
+                <a:solidFill>
+                  <a:srgbClr val="333333"/>
+                </a:solidFill>
+                <a:latin typeface="Calibri"/>
+              </a:rPr>
+              <a:t>–   </a:t>
+            </a:r>
+            <a:r>
+              <a:rPr sz="1600" b="1" i="0">
+                <a:solidFill>
+                  <a:srgbClr val="333333"/>
+                </a:solidFill>
+                <a:latin typeface="Calibri"/>
+              </a:rPr>
+              <a:t>3.</a:t>
+            </a:r>
+            <a:r>
+              <a:rPr sz="1600" b="0" i="0">
+                <a:solidFill>
+                  <a:srgbClr val="333333"/>
+                </a:solidFill>
+                <a:latin typeface="Calibri"/>
+              </a:rPr>
+              <a:t> Paso 3: escriban en la plataforma del curso el sequenceDiagram del camino critico con el presupuesto de latencia repartido por salto, verificando que la suma de los tramos sea menor o igual al objetivo de p95 y que la nota final muestre el margen restante en milisegundos.</a:t>
+            </a:r>
+          </a:p>
+          <a:p>
+            <a:pPr>
+              <a:spcAft>
+                <a:spcPts val="800"/>
+              </a:spcAft>
+            </a:pPr>
+            <a:r>
+              <a:rPr sz="1600" b="0" i="0">
+                <a:solidFill>
+                  <a:srgbClr val="333333"/>
+                </a:solidFill>
+                <a:latin typeface="Calibri"/>
+              </a:rPr>
+              <a:t>–   </a:t>
+            </a:r>
+            <a:r>
+              <a:rPr sz="1600" b="1" i="0">
+                <a:solidFill>
+                  <a:srgbClr val="333333"/>
+                </a:solidFill>
+                <a:latin typeface="Calibri"/>
+              </a:rPr>
+              <a:t>4.</a:t>
+            </a:r>
+            <a:r>
+              <a:rPr sz="1600" b="0" i="0">
+                <a:solidFill>
+                  <a:srgbClr val="333333"/>
+                </a:solidFill>
+                <a:latin typeface="Calibri"/>
+              </a:rPr>
+              <a:t> Paso 4: ensayen el pitch de 5 a 8 minutos con cronometro y llenen la tabla de guion de 6 filas con minuto, seccion, quien habla, mensaje clave y evidencia en pantalla, verificando que la suma de los minutos quede entre 5 y 8, que ninguna seccion pase de 2:00 (y, si el docente autorizo equipo, que todos los integrantes hablen) y que cada seccion tenga una evidencia concreta que se pueda mostrar.</a:t>
+            </a:r>
+          </a:p>
+          <a:p>
+            <a:pPr>
+              <a:spcAft>
+                <a:spcPts val="800"/>
+              </a:spcAft>
+            </a:pPr>
+            <a:r>
+              <a:rPr sz="1600" b="0" i="0">
+                <a:solidFill>
+                  <a:srgbClr val="333333"/>
+                </a:solidFill>
+                <a:latin typeface="Calibri"/>
+              </a:rPr>
+              <a:t>–   </a:t>
+            </a:r>
+            <a:r>
+              <a:rPr sz="1600" b="1" i="0">
+                <a:solidFill>
+                  <a:srgbClr val="333333"/>
+                </a:solidFill>
+                <a:latin typeface="Calibri"/>
+              </a:rPr>
+              <a:t>5.</a:t>
+            </a:r>
+            <a:r>
+              <a:rPr sz="1600" b="0" i="0">
+                <a:solidFill>
+                  <a:srgbClr val="333333"/>
+                </a:solidFill>
+                <a:latin typeface="Calibri"/>
+              </a:rPr>
+              <a:t> Paso 5: cierren los 5 items del backlog de la Clase 11 dejando registro de los residuales, dejen el paquete casi final ordenado en el repositorio o el Drive y suban las 6 preguntas a la plataforma del curso (modulo Talleres) antes del en la fecha que indique el docente, verificando que el cuello de botella declarado en el analisis sea el mismo que muestra el diagrama de secuencia.</a:t>
+            </a:r>
+          </a:p>
+        </p:txBody>
+      </p:sp>
+      <p:sp>
+        <p:nvSpPr>
+          <p:cNvPr id="6" name="TextBox 5"/>
+          <p:cNvSpPr txBox="1"/>
+          <p:nvPr/>
+        </p:nvSpPr>
+        <p:spPr>
+          <a:xfrm>
+            <a:off x="11185855" y="6473952"/>
+            <a:ext cx="640080" cy="274320"/>
+          </a:xfrm>
+          <a:prstGeom prst="rect">
+            <a:avLst/>
+          </a:prstGeom>
+          <a:noFill/>
+        </p:spPr>
+        <p:txBody>
+          <a:bodyPr wrap="square">
+            <a:spAutoFit/>
+          </a:bodyPr>
+          <a:lstStyle/>
+          <a:p>
+            <a:pPr algn="r"/>
+            <a:r>
+              <a:rPr sz="1100" b="0" i="0">
+                <a:solidFill>
+                  <a:srgbClr val="666666"/>
+                </a:solidFill>
+                <a:latin typeface="Calibri"/>
+              </a:rPr>
+              <a:t>25</a:t>
+            </a:r>
+          </a:p>
+        </p:txBody>
+      </p:sp>
+    </p:spTree>
+  </p:cSld>
+  <p:clrMapOvr>
+    <a:masterClrMapping/>
+  </p:clrMapOvr>
+</p:sld>
+</file>
+
+<file path=ppt/slides/slide26.xml><?xml version="1.0" encoding="utf-8"?>
+<p:sld xmlns:a="http://schemas.openxmlformats.org/drawingml/2006/main" xmlns:p="http://schemas.openxmlformats.org/presentationml/2006/main" xmlns:r="http://schemas.openxmlformats.org/officeDocument/2006/relationships">
+  <p:cSld>
+    <p:bg>
+      <p:bgPr>
+        <a:solidFill>
+          <a:srgbClr val="FFFFFF"/>
+        </a:solidFill>
+        <a:effectLst/>
+      </p:bgPr>
+    </p:bg>
+    <p:spTree>
+      <p:nvGrpSpPr>
+        <p:cNvPr id="1" name=""/>
+        <p:cNvGrpSpPr/>
+        <p:nvPr/>
+      </p:nvGrpSpPr>
+      <p:grpSpPr/>
+      <p:sp>
+        <p:nvSpPr>
+          <p:cNvPr id="2" name="Rectangle 1"/>
+          <p:cNvSpPr/>
+          <p:nvPr/>
+        </p:nvSpPr>
+        <p:spPr>
+          <a:xfrm>
+            <a:off x="0" y="0"/>
+            <a:ext cx="12191695" cy="960120"/>
+          </a:xfrm>
+          <a:prstGeom prst="rect">
+            <a:avLst/>
+          </a:prstGeom>
+          <a:solidFill>
+            <a:srgbClr val="095292"/>
+          </a:solidFill>
+          <a:ln>
+            <a:noFill/>
+          </a:ln>
+        </p:spPr>
+        <p:style>
+          <a:lnRef idx="1">
+            <a:schemeClr val="accent1"/>
+          </a:lnRef>
+          <a:fillRef idx="3">
+            <a:schemeClr val="accent1"/>
+          </a:fillRef>
+          <a:effectRef idx="2">
+            <a:schemeClr val="accent1"/>
+          </a:effectRef>
+          <a:fontRef idx="minor">
+            <a:schemeClr val="lt1"/>
+          </a:fontRef>
+        </p:style>
+        <p:txBody>
+          <a:bodyPr rtlCol="0" anchor="ctr"/>
+          <a:lstStyle/>
+          <a:p>
+            <a:pPr algn="ctr"/>
+          </a:p>
+        </p:txBody>
+      </p:sp>
+      <p:sp>
+        <p:nvSpPr>
+          <p:cNvPr id="3" name="Rectangle 2"/>
+          <p:cNvSpPr/>
+          <p:nvPr/>
+        </p:nvSpPr>
+        <p:spPr>
+          <a:xfrm>
+            <a:off x="0" y="960120"/>
+            <a:ext cx="12191695" cy="41148"/>
+          </a:xfrm>
+          <a:prstGeom prst="rect">
+            <a:avLst/>
+          </a:prstGeom>
+          <a:solidFill>
+            <a:srgbClr val="FFD000"/>
+          </a:solidFill>
+          <a:ln>
+            <a:noFill/>
+          </a:ln>
+        </p:spPr>
+        <p:style>
+          <a:lnRef idx="1">
+            <a:schemeClr val="accent1"/>
+          </a:lnRef>
+          <a:fillRef idx="3">
+            <a:schemeClr val="accent1"/>
+          </a:fillRef>
+          <a:effectRef idx="2">
+            <a:schemeClr val="accent1"/>
+          </a:effectRef>
+          <a:fontRef idx="minor">
+            <a:schemeClr val="lt1"/>
+          </a:fontRef>
+        </p:style>
+        <p:txBody>
+          <a:bodyPr rtlCol="0" anchor="ctr"/>
+          <a:lstStyle/>
+          <a:p>
+            <a:pPr algn="ctr"/>
+          </a:p>
+        </p:txBody>
+      </p:sp>
+      <p:sp>
+        <p:nvSpPr>
+          <p:cNvPr id="4" name="TextBox 3"/>
+          <p:cNvSpPr txBox="1"/>
+          <p:nvPr/>
+        </p:nvSpPr>
+        <p:spPr>
+          <a:xfrm>
+            <a:off x="457200" y="164592"/>
+            <a:ext cx="11277295" cy="502920"/>
+          </a:xfrm>
+          <a:prstGeom prst="rect">
+            <a:avLst/>
+          </a:prstGeom>
+          <a:noFill/>
+        </p:spPr>
+        <p:txBody>
+          <a:bodyPr wrap="square">
+            <a:spAutoFit/>
+          </a:bodyPr>
+          <a:lstStyle/>
+          <a:p>
+            <a:r>
+              <a:rPr sz="2600" b="1" i="0">
+                <a:solidFill>
+                  <a:srgbClr val="FFFFFF"/>
+                </a:solidFill>
+                <a:latin typeface="Calibri"/>
+              </a:rPr>
+              <a:t>Para continuar (PI)</a:t>
+            </a:r>
+          </a:p>
+        </p:txBody>
+      </p:sp>
+      <p:sp>
+        <p:nvSpPr>
+          <p:cNvPr id="5" name="Rounded Rectangle 4"/>
+          <p:cNvSpPr/>
+          <p:nvPr/>
+        </p:nvSpPr>
+        <p:spPr>
+          <a:xfrm>
+            <a:off x="457200" y="1261872"/>
+            <a:ext cx="11277295" cy="1051560"/>
+          </a:xfrm>
+          <a:prstGeom prst="roundRect">
+            <a:avLst>
+              <a:gd name="adj" fmla="val 12000"/>
+            </a:avLst>
+          </a:prstGeom>
+          <a:solidFill>
+            <a:srgbClr val="E8F4FA"/>
+          </a:solidFill>
+          <a:ln>
+            <a:noFill/>
+          </a:ln>
+        </p:spPr>
+        <p:style>
+          <a:lnRef idx="1">
+            <a:schemeClr val="accent1"/>
+          </a:lnRef>
+          <a:fillRef idx="3">
+            <a:schemeClr val="accent1"/>
+          </a:fillRef>
+          <a:effectRef idx="2">
+            <a:schemeClr val="accent1"/>
+          </a:effectRef>
+          <a:fontRef idx="minor">
+            <a:schemeClr val="lt1"/>
+          </a:fontRef>
+        </p:style>
+        <p:txBody>
+          <a:bodyPr rtlCol="0" anchor="ctr"/>
+          <a:lstStyle/>
+          <a:p>
+            <a:pPr algn="ctr"/>
+          </a:p>
+        </p:txBody>
+      </p:sp>
+      <p:sp>
+        <p:nvSpPr>
+          <p:cNvPr id="6" name="Rectangle 5"/>
+          <p:cNvSpPr/>
+          <p:nvPr/>
+        </p:nvSpPr>
+        <p:spPr>
+          <a:xfrm>
+            <a:off x="457200" y="1261872"/>
+            <a:ext cx="128016" cy="1051560"/>
+          </a:xfrm>
+          <a:prstGeom prst="rect">
+            <a:avLst/>
+          </a:prstGeom>
+          <a:solidFill>
+            <a:srgbClr val="269CCB"/>
+          </a:solidFill>
+          <a:ln>
+            <a:noFill/>
+          </a:ln>
+        </p:spPr>
+        <p:style>
+          <a:lnRef idx="1">
+            <a:schemeClr val="accent1"/>
+          </a:lnRef>
+          <a:fillRef idx="3">
+            <a:schemeClr val="accent1"/>
+          </a:fillRef>
+          <a:effectRef idx="2">
+            <a:schemeClr val="accent1"/>
+          </a:effectRef>
+          <a:fontRef idx="minor">
+            <a:schemeClr val="lt1"/>
+          </a:fontRef>
+        </p:style>
+        <p:txBody>
+          <a:bodyPr rtlCol="0" anchor="ctr"/>
+          <a:lstStyle/>
+          <a:p>
+            <a:pPr algn="ctr"/>
+          </a:p>
+        </p:txBody>
+      </p:sp>
+      <p:sp>
+        <p:nvSpPr>
+          <p:cNvPr id="7" name="TextBox 6"/>
+          <p:cNvSpPr txBox="1"/>
+          <p:nvPr/>
+        </p:nvSpPr>
+        <p:spPr>
+          <a:xfrm>
+            <a:off x="777240" y="1399031"/>
+            <a:ext cx="10774375" cy="822959"/>
+          </a:xfrm>
+          <a:prstGeom prst="rect">
+            <a:avLst/>
+          </a:prstGeom>
+          <a:noFill/>
+        </p:spPr>
+        <p:txBody>
+          <a:bodyPr wrap="square">
+            <a:spAutoFit/>
+          </a:bodyPr>
+          <a:lstStyle/>
+          <a:p>
+            <a:r>
+              <a:rPr sz="1200" b="1" i="0">
+                <a:solidFill>
+                  <a:srgbClr val="269CCB"/>
+                </a:solidFill>
+                <a:latin typeface="Calibri"/>
+              </a:rPr>
+              <a:t>Info</a:t>
+            </a:r>
+          </a:p>
+          <a:p>
+            <a:pPr>
+              <a:spcBef>
+                <a:spcPts val="400"/>
+              </a:spcBef>
+            </a:pPr>
+            <a:r>
+              <a:rPr sz="1400" b="0" i="0">
+                <a:solidFill>
+                  <a:srgbClr val="333333"/>
+                </a:solidFill>
+                <a:latin typeface="Calibri"/>
+              </a:rPr>
+              <a:t>Entregable: Sección Rendimiento + guion de pitch + paquete casi-final</a:t>
+            </a:r>
+          </a:p>
+        </p:txBody>
+      </p:sp>
+      <p:sp>
+        <p:nvSpPr>
+          <p:cNvPr id="8" name="Rounded Rectangle 7"/>
+          <p:cNvSpPr/>
+          <p:nvPr/>
+        </p:nvSpPr>
+        <p:spPr>
+          <a:xfrm>
+            <a:off x="457200" y="2478024"/>
+            <a:ext cx="11277295" cy="1051560"/>
+          </a:xfrm>
+          <a:prstGeom prst="roundRect">
+            <a:avLst>
+              <a:gd name="adj" fmla="val 12000"/>
+            </a:avLst>
+          </a:prstGeom>
+          <a:solidFill>
+            <a:srgbClr val="FFF8E1"/>
+          </a:solidFill>
+          <a:ln>
+            <a:noFill/>
+          </a:ln>
+        </p:spPr>
+        <p:style>
+          <a:lnRef idx="1">
+            <a:schemeClr val="accent1"/>
+          </a:lnRef>
+          <a:fillRef idx="3">
+            <a:schemeClr val="accent1"/>
+          </a:fillRef>
+          <a:effectRef idx="2">
+            <a:schemeClr val="accent1"/>
+          </a:effectRef>
+          <a:fontRef idx="minor">
+            <a:schemeClr val="lt1"/>
+          </a:fontRef>
+        </p:style>
+        <p:txBody>
+          <a:bodyPr rtlCol="0" anchor="ctr"/>
+          <a:lstStyle/>
+          <a:p>
+            <a:pPr algn="ctr"/>
+          </a:p>
+        </p:txBody>
+      </p:sp>
+      <p:sp>
+        <p:nvSpPr>
+          <p:cNvPr id="9" name="Rectangle 8"/>
+          <p:cNvSpPr/>
+          <p:nvPr/>
+        </p:nvSpPr>
+        <p:spPr>
+          <a:xfrm>
+            <a:off x="457200" y="2478024"/>
+            <a:ext cx="128016" cy="1051560"/>
+          </a:xfrm>
+          <a:prstGeom prst="rect">
+            <a:avLst/>
+          </a:prstGeom>
+          <a:solidFill>
+            <a:srgbClr val="FFD000"/>
+          </a:solidFill>
+          <a:ln>
+            <a:noFill/>
+          </a:ln>
+        </p:spPr>
+        <p:style>
+          <a:lnRef idx="1">
+            <a:schemeClr val="accent1"/>
+          </a:lnRef>
+          <a:fillRef idx="3">
+            <a:schemeClr val="accent1"/>
+          </a:fillRef>
+          <a:effectRef idx="2">
+            <a:schemeClr val="accent1"/>
+          </a:effectRef>
+          <a:fontRef idx="minor">
+            <a:schemeClr val="lt1"/>
+          </a:fontRef>
+        </p:style>
+        <p:txBody>
+          <a:bodyPr rtlCol="0" anchor="ctr"/>
+          <a:lstStyle/>
+          <a:p>
+            <a:pPr algn="ctr"/>
+          </a:p>
+        </p:txBody>
+      </p:sp>
+      <p:sp>
+        <p:nvSpPr>
+          <p:cNvPr id="10" name="TextBox 9"/>
+          <p:cNvSpPr txBox="1"/>
+          <p:nvPr/>
+        </p:nvSpPr>
+        <p:spPr>
+          <a:xfrm>
+            <a:off x="777240" y="2615184"/>
+            <a:ext cx="10774375" cy="822959"/>
+          </a:xfrm>
+          <a:prstGeom prst="rect">
+            <a:avLst/>
+          </a:prstGeom>
+          <a:noFill/>
+        </p:spPr>
+        <p:txBody>
+          <a:bodyPr wrap="square">
+            <a:spAutoFit/>
+          </a:bodyPr>
+          <a:lstStyle/>
+          <a:p>
+            <a:r>
+              <a:rPr sz="1200" b="1" i="0">
+                <a:solidFill>
+                  <a:srgbClr val="FFD000"/>
+                </a:solidFill>
+                <a:latin typeface="Calibri"/>
+              </a:rPr>
+              <a:t>Aclaración</a:t>
+            </a:r>
+          </a:p>
+          <a:p>
+            <a:pPr>
+              <a:spcBef>
+                <a:spcPts val="400"/>
+              </a:spcBef>
+            </a:pPr>
+            <a:r>
+              <a:rPr sz="1400" b="0" i="0">
+                <a:solidFill>
+                  <a:srgbClr val="333333"/>
+                </a:solidFill>
+                <a:latin typeface="Calibri"/>
+              </a:rPr>
+              <a:t>Subir evidencias al paquete CloudLite (Drive/repo) y a la plataforma del curso en la fecha que indique el docente.</a:t>
+            </a:r>
+          </a:p>
+        </p:txBody>
+      </p:sp>
+      <p:sp>
+        <p:nvSpPr>
+          <p:cNvPr id="11" name="Rounded Rectangle 10"/>
+          <p:cNvSpPr/>
+          <p:nvPr/>
+        </p:nvSpPr>
+        <p:spPr>
+          <a:xfrm>
+            <a:off x="457200" y="3694176"/>
+            <a:ext cx="11277295" cy="1051560"/>
+          </a:xfrm>
+          <a:prstGeom prst="roundRect">
+            <a:avLst>
+              <a:gd name="adj" fmla="val 12000"/>
+            </a:avLst>
+          </a:prstGeom>
+          <a:solidFill>
+            <a:srgbClr val="FBE4E4"/>
+          </a:solidFill>
+          <a:ln>
+            <a:noFill/>
+          </a:ln>
+        </p:spPr>
+        <p:style>
+          <a:lnRef idx="1">
+            <a:schemeClr val="accent1"/>
+          </a:lnRef>
+          <a:fillRef idx="3">
+            <a:schemeClr val="accent1"/>
+          </a:fillRef>
+          <a:effectRef idx="2">
+            <a:schemeClr val="accent1"/>
+          </a:effectRef>
+          <a:fontRef idx="minor">
+            <a:schemeClr val="lt1"/>
+          </a:fontRef>
+        </p:style>
+        <p:txBody>
+          <a:bodyPr rtlCol="0" anchor="ctr"/>
+          <a:lstStyle/>
+          <a:p>
+            <a:pPr algn="ctr"/>
+          </a:p>
+        </p:txBody>
+      </p:sp>
+      <p:sp>
+        <p:nvSpPr>
+          <p:cNvPr id="12" name="Rectangle 11"/>
+          <p:cNvSpPr/>
+          <p:nvPr/>
+        </p:nvSpPr>
+        <p:spPr>
+          <a:xfrm>
+            <a:off x="457200" y="3694176"/>
+            <a:ext cx="128016" cy="1051560"/>
+          </a:xfrm>
+          <a:prstGeom prst="rect">
+            <a:avLst/>
+          </a:prstGeom>
+          <a:solidFill>
+            <a:srgbClr val="A02030"/>
+          </a:solidFill>
+          <a:ln>
+            <a:noFill/>
+          </a:ln>
+        </p:spPr>
+        <p:style>
+          <a:lnRef idx="1">
+            <a:schemeClr val="accent1"/>
+          </a:lnRef>
+          <a:fillRef idx="3">
+            <a:schemeClr val="accent1"/>
+          </a:fillRef>
+          <a:effectRef idx="2">
+            <a:schemeClr val="accent1"/>
+          </a:effectRef>
+          <a:fontRef idx="minor">
+            <a:schemeClr val="lt1"/>
+          </a:fontRef>
+        </p:style>
+        <p:txBody>
+          <a:bodyPr rtlCol="0" anchor="ctr"/>
+          <a:lstStyle/>
+          <a:p>
+            <a:pPr algn="ctr"/>
+          </a:p>
+        </p:txBody>
+      </p:sp>
+      <p:sp>
+        <p:nvSpPr>
+          <p:cNvPr id="13" name="TextBox 12"/>
+          <p:cNvSpPr txBox="1"/>
+          <p:nvPr/>
+        </p:nvSpPr>
+        <p:spPr>
+          <a:xfrm>
+            <a:off x="777240" y="3831336"/>
+            <a:ext cx="10774375" cy="822959"/>
+          </a:xfrm>
+          <a:prstGeom prst="rect">
+            <a:avLst/>
+          </a:prstGeom>
+          <a:noFill/>
+        </p:spPr>
+        <p:txBody>
+          <a:bodyPr wrap="square">
+            <a:spAutoFit/>
+          </a:bodyPr>
+          <a:lstStyle/>
+          <a:p>
+            <a:r>
+              <a:rPr sz="1200" b="1" i="0">
+                <a:solidFill>
+                  <a:srgbClr val="A02030"/>
+                </a:solidFill>
+                <a:latin typeface="Calibri"/>
+              </a:rPr>
+              <a:t>Atención</a:t>
+            </a:r>
+          </a:p>
+          <a:p>
+            <a:pPr>
+              <a:spcBef>
+                <a:spcPts val="400"/>
+              </a:spcBef>
+            </a:pPr>
+            <a:r>
+              <a:rPr sz="1400" b="0" i="0">
+                <a:solidFill>
+                  <a:srgbClr val="333333"/>
+                </a:solidFill>
+                <a:latin typeface="Calibri"/>
+              </a:rPr>
+              <a:t>Sin cloud de pago ni instalaciones obligatorias de hipervisores/Docker Desktop.</a:t>
+            </a:r>
+          </a:p>
+        </p:txBody>
+      </p:sp>
+      <p:sp>
+        <p:nvSpPr>
+          <p:cNvPr id="14" name="TextBox 13"/>
+          <p:cNvSpPr txBox="1"/>
+          <p:nvPr/>
+        </p:nvSpPr>
+        <p:spPr>
+          <a:xfrm>
+            <a:off x="11185855" y="6473952"/>
+            <a:ext cx="640080" cy="274320"/>
+          </a:xfrm>
+          <a:prstGeom prst="rect">
+            <a:avLst/>
+          </a:prstGeom>
+          <a:noFill/>
+        </p:spPr>
+        <p:txBody>
+          <a:bodyPr wrap="square">
+            <a:spAutoFit/>
+          </a:bodyPr>
+          <a:lstStyle/>
+          <a:p>
+            <a:pPr algn="r"/>
+            <a:r>
+              <a:rPr sz="1100" b="0" i="0">
+                <a:solidFill>
+                  <a:srgbClr val="666666"/>
+                </a:solidFill>
+                <a:latin typeface="Calibri"/>
+              </a:rPr>
+              <a:t>26</a:t>
+            </a:r>
+          </a:p>
+        </p:txBody>
+      </p:sp>
+    </p:spTree>
+  </p:cSld>
+  <p:clrMapOvr>
+    <a:masterClrMapping/>
+  </p:clrMapOvr>
+</p:sld>
+</file>
+
+<file path=ppt/slides/slide27.xml><?xml version="1.0" encoding="utf-8"?>
+<p:sld xmlns:a="http://schemas.openxmlformats.org/drawingml/2006/main" xmlns:p="http://schemas.openxmlformats.org/presentationml/2006/main" xmlns:r="http://schemas.openxmlformats.org/officeDocument/2006/relationships">
+  <p:cSld>
+    <p:bg>
+      <p:bgPr>
+        <a:solidFill>
+          <a:srgbClr val="FFFFFF"/>
+        </a:solidFill>
+        <a:effectLst/>
+      </p:bgPr>
+    </p:bg>
+    <p:spTree>
+      <p:nvGrpSpPr>
+        <p:cNvPr id="1" name=""/>
+        <p:cNvGrpSpPr/>
+        <p:nvPr/>
+      </p:nvGrpSpPr>
+      <p:grpSpPr/>
+      <p:sp>
+        <p:nvSpPr>
+          <p:cNvPr id="2" name="Rectangle 1"/>
+          <p:cNvSpPr/>
+          <p:nvPr/>
+        </p:nvSpPr>
+        <p:spPr>
+          <a:xfrm>
+            <a:off x="0" y="0"/>
+            <a:ext cx="12191695" cy="164592"/>
+          </a:xfrm>
+          <a:prstGeom prst="rect">
+            <a:avLst/>
+          </a:prstGeom>
+          <a:solidFill>
+            <a:srgbClr val="269CCB"/>
+          </a:solidFill>
+          <a:ln>
+            <a:noFill/>
+          </a:ln>
+        </p:spPr>
+        <p:style>
+          <a:lnRef idx="1">
+            <a:schemeClr val="accent1"/>
+          </a:lnRef>
+          <a:fillRef idx="3">
+            <a:schemeClr val="accent1"/>
+          </a:fillRef>
+          <a:effectRef idx="2">
+            <a:schemeClr val="accent1"/>
+          </a:effectRef>
+          <a:fontRef idx="minor">
+            <a:schemeClr val="lt1"/>
+          </a:fontRef>
+        </p:style>
+        <p:txBody>
+          <a:bodyPr rtlCol="0" anchor="ctr"/>
+          <a:lstStyle/>
+          <a:p>
+            <a:pPr algn="ctr"/>
+          </a:p>
+        </p:txBody>
+      </p:sp>
+      <p:pic>
+        <p:nvPicPr>
+          <p:cNvPr id="3" name="Picture 2" descr="logo_uniajc_color.png"/>
+          <p:cNvPicPr>
+            <a:picLocks noChangeAspect="1"/>
+          </p:cNvPicPr>
+          <p:nvPr/>
+        </p:nvPicPr>
+        <p:blipFill>
+          <a:blip r:embed="rId2"/>
+          <a:stretch>
+            <a:fillRect/>
+          </a:stretch>
+        </p:blipFill>
+        <p:spPr>
+          <a:xfrm>
+            <a:off x="10271455" y="5998464"/>
+            <a:ext cx="1463040" cy="643233"/>
+          </a:xfrm>
+          <a:prstGeom prst="rect">
+            <a:avLst/>
+          </a:prstGeom>
+        </p:spPr>
+      </p:pic>
+      <p:sp>
+        <p:nvSpPr>
+          <p:cNvPr id="4" name="TextBox 3"/>
+          <p:cNvSpPr txBox="1"/>
+          <p:nvPr/>
+        </p:nvSpPr>
+        <p:spPr>
+          <a:xfrm>
+            <a:off x="457200" y="1737360"/>
+            <a:ext cx="11277295" cy="1097280"/>
+          </a:xfrm>
+          <a:prstGeom prst="rect">
+            <a:avLst/>
+          </a:prstGeom>
+          <a:noFill/>
+        </p:spPr>
+        <p:txBody>
+          <a:bodyPr wrap="square" anchor="ctr"/>
+          <a:lstStyle/>
+          <a:p>
+            <a:pPr algn="ctr"/>
+            <a:r>
+              <a:rPr sz="3400" b="1" i="0">
+                <a:solidFill>
+                  <a:srgbClr val="095292"/>
+                </a:solidFill>
+                <a:latin typeface="Calibri"/>
+              </a:rPr>
+              <a:t>Clase 12 · PI en movimiento</a:t>
+            </a:r>
+          </a:p>
+        </p:txBody>
+      </p:sp>
+      <p:sp>
+        <p:nvSpPr>
+          <p:cNvPr id="5" name="TextBox 4"/>
+          <p:cNvSpPr txBox="1"/>
+          <p:nvPr/>
+        </p:nvSpPr>
+        <p:spPr>
+          <a:xfrm>
+            <a:off x="457200" y="3017520"/>
+            <a:ext cx="11277295" cy="1645920"/>
+          </a:xfrm>
+          <a:prstGeom prst="rect">
+            <a:avLst/>
+          </a:prstGeom>
+          <a:noFill/>
+        </p:spPr>
+        <p:txBody>
+          <a:bodyPr wrap="square">
+            <a:spAutoFit/>
+          </a:bodyPr>
+          <a:lstStyle/>
+          <a:p>
+            <a:pPr algn="ctr">
+              <a:spcAft>
+                <a:spcPts val="600"/>
+              </a:spcAft>
+            </a:pPr>
+            <a:r>
+              <a:rPr sz="1600" b="0" i="0">
+                <a:solidFill>
+                  <a:srgbClr val="333333"/>
+                </a:solidFill>
+                <a:latin typeface="Calibri"/>
+              </a:rPr>
+              <a:t>Escenario de rendimiento + ensayo 5–8 min de sustentación</a:t>
+            </a:r>
+          </a:p>
+          <a:p>
+            <a:pPr algn="ctr">
+              <a:spcAft>
+                <a:spcPts val="600"/>
+              </a:spcAft>
+            </a:pPr>
+            <a:r>
+              <a:rPr sz="1600" b="0" i="0">
+                <a:solidFill>
+                  <a:srgbClr val="333333"/>
+                </a:solidFill>
+                <a:latin typeface="Calibri"/>
+              </a:rPr>
+              <a:t>Evidencia: Sección Rendimiento + guion de pitch + paquete casi-final</a:t>
+            </a:r>
+          </a:p>
+          <a:p>
+            <a:pPr algn="ctr">
+              <a:spcAft>
+                <a:spcPts val="600"/>
+              </a:spcAft>
+            </a:pPr>
+            <a:r>
+              <a:rPr sz="1600" b="0" i="0">
+                <a:solidFill>
+                  <a:srgbClr val="333333"/>
+                </a:solidFill>
+                <a:latin typeface="Calibri"/>
+              </a:rPr>
+              <a:t>Siguiente paso = siguiente hito del PI CloudLite</a:t>
+            </a:r>
+          </a:p>
+        </p:txBody>
+      </p:sp>
+      <p:sp>
+        <p:nvSpPr>
+          <p:cNvPr id="6" name="TextBox 5"/>
+          <p:cNvSpPr txBox="1"/>
+          <p:nvPr/>
+        </p:nvSpPr>
+        <p:spPr>
+          <a:xfrm>
+            <a:off x="457200" y="4754880"/>
+            <a:ext cx="11277295" cy="640080"/>
+          </a:xfrm>
+          <a:prstGeom prst="rect">
+            <a:avLst/>
+          </a:prstGeom>
+          <a:noFill/>
+        </p:spPr>
+        <p:txBody>
+          <a:bodyPr wrap="square">
+            <a:spAutoFit/>
+          </a:bodyPr>
+          <a:lstStyle/>
+          <a:p>
+            <a:pPr algn="ctr"/>
+            <a:r>
+              <a:rPr sz="2000" b="1" i="0">
+                <a:solidFill>
+                  <a:srgbClr val="269CCB"/>
+                </a:solidFill>
+                <a:latin typeface="Calibri"/>
+              </a:rPr>
+              <a:t>Teoría al servicio del proyecto</a:t>
+            </a:r>
+          </a:p>
+        </p:txBody>
+      </p:sp>
+    </p:spTree>
+  </p:cSld>
+  <p:clrMapOvr>
+    <a:masterClrMapping/>
+  </p:clrMapOvr>
+</p:sld>
+</file>
+
 <file path=ppt/slides/slide3.xml><?xml version="1.0" encoding="utf-8"?>
 <p:sld xmlns:a="http://schemas.openxmlformats.org/drawingml/2006/main" xmlns:p="http://schemas.openxmlformats.org/presentationml/2006/main" xmlns:r="http://schemas.openxmlformats.org/officeDocument/2006/relationships">
   <p:cSld>
@@ -6420,142 +12114,21 @@
                 </a:solidFill>
                 <a:latin typeface="Calibri"/>
               </a:rPr>
-              <a:t>«Que sea rapido» no es un requisito</a:t>
-            </a:r>
-          </a:p>
-        </p:txBody>
-      </p:sp>
-      <p:sp>
-        <p:nvSpPr>
-          <p:cNvPr id="5" name="Rounded Rectangle 4"/>
-          <p:cNvSpPr/>
-          <p:nvPr/>
-        </p:nvSpPr>
-        <p:spPr>
-          <a:xfrm>
-            <a:off x="457200" y="1261872"/>
-            <a:ext cx="5478627" cy="5093208"/>
-          </a:xfrm>
-          <a:prstGeom prst="roundRect">
-            <a:avLst>
-              <a:gd name="adj" fmla="val 12000"/>
-            </a:avLst>
-          </a:prstGeom>
-          <a:solidFill>
-            <a:srgbClr val="FBE4E4"/>
-          </a:solidFill>
-          <a:ln>
-            <a:noFill/>
-          </a:ln>
-        </p:spPr>
-        <p:style>
-          <a:lnRef idx="1">
-            <a:schemeClr val="accent1"/>
-          </a:lnRef>
-          <a:fillRef idx="3">
-            <a:schemeClr val="accent1"/>
-          </a:fillRef>
-          <a:effectRef idx="2">
-            <a:schemeClr val="accent1"/>
-          </a:effectRef>
-          <a:fontRef idx="minor">
-            <a:schemeClr val="lt1"/>
-          </a:fontRef>
-        </p:style>
-        <p:txBody>
-          <a:bodyPr rtlCol="0" anchor="ctr"/>
-          <a:lstStyle/>
-          <a:p>
-            <a:pPr algn="ctr"/>
-          </a:p>
-        </p:txBody>
-      </p:sp>
-      <p:sp>
-        <p:nvSpPr>
-          <p:cNvPr id="6" name="Rectangle 5"/>
-          <p:cNvSpPr/>
-          <p:nvPr/>
-        </p:nvSpPr>
-        <p:spPr>
-          <a:xfrm>
-            <a:off x="457200" y="1261872"/>
-            <a:ext cx="5478627" cy="502920"/>
-          </a:xfrm>
-          <a:prstGeom prst="rect">
-            <a:avLst/>
-          </a:prstGeom>
-          <a:solidFill>
-            <a:srgbClr val="A02030"/>
-          </a:solidFill>
-          <a:ln>
-            <a:noFill/>
-          </a:ln>
-        </p:spPr>
-        <p:style>
-          <a:lnRef idx="1">
-            <a:schemeClr val="accent1"/>
-          </a:lnRef>
-          <a:fillRef idx="3">
-            <a:schemeClr val="accent1"/>
-          </a:fillRef>
-          <a:effectRef idx="2">
-            <a:schemeClr val="accent1"/>
-          </a:effectRef>
-          <a:fontRef idx="minor">
-            <a:schemeClr val="lt1"/>
-          </a:fontRef>
-        </p:style>
-        <p:txBody>
-          <a:bodyPr rtlCol="0" anchor="ctr"/>
-          <a:lstStyle/>
-          <a:p>
-            <a:pPr algn="ctr"/>
-          </a:p>
-        </p:txBody>
-      </p:sp>
-      <p:sp>
-        <p:nvSpPr>
-          <p:cNvPr id="7" name="TextBox 6"/>
+              <a:t>Latencia, throughput y concurrencia: la identidad que las une</a:t>
+            </a:r>
+          </a:p>
+        </p:txBody>
+      </p:sp>
+      <p:sp>
+        <p:nvSpPr>
+          <p:cNvPr id="5" name="TextBox 4"/>
           <p:cNvSpPr txBox="1"/>
           <p:nvPr/>
         </p:nvSpPr>
         <p:spPr>
           <a:xfrm>
-            <a:off x="594360" y="1353312"/>
-            <a:ext cx="5204307" cy="365760"/>
-          </a:xfrm>
-          <a:prstGeom prst="rect">
-            <a:avLst/>
-          </a:prstGeom>
-          <a:noFill/>
-        </p:spPr>
-        <p:txBody>
-          <a:bodyPr wrap="square" anchor="ctr"/>
-          <a:lstStyle/>
-          <a:p>
-            <a:pPr algn="ctr"/>
-            <a:r>
-              <a:rPr sz="1600" b="1" i="0">
-                <a:solidFill>
-                  <a:srgbClr val="FFFFFF"/>
-                </a:solidFill>
-                <a:latin typeface="Calibri"/>
-              </a:rPr>
-              <a:t>Enunciado vago</a:t>
-            </a:r>
-          </a:p>
-        </p:txBody>
-      </p:sp>
-      <p:sp>
-        <p:nvSpPr>
-          <p:cNvPr id="8" name="TextBox 7"/>
-          <p:cNvSpPr txBox="1"/>
-          <p:nvPr/>
-        </p:nvSpPr>
-        <p:spPr>
-          <a:xfrm>
-            <a:off x="621792" y="1901952"/>
-            <a:ext cx="5158587" cy="4498848"/>
+            <a:off x="457200" y="1170432"/>
+            <a:ext cx="11277295" cy="5230368"/>
           </a:xfrm>
           <a:prstGeom prst="rect">
             <a:avLst/>
@@ -6574,13 +12147,13 @@
               </a:spcAft>
             </a:pPr>
             <a:r>
-              <a:rPr sz="1500" b="0" i="0">
-                <a:solidFill>
-                  <a:srgbClr val="333333"/>
-                </a:solidFill>
-                <a:latin typeface="Calibri"/>
-              </a:rPr>
-              <a:t>–   «La app tiene que ser rapida»</a:t>
+              <a:rPr sz="2000" b="0" i="0">
+                <a:solidFill>
+                  <a:srgbClr val="333333"/>
+                </a:solidFill>
+                <a:latin typeface="Calibri"/>
+              </a:rPr>
+              <a:t>–   Rendimiento es la unica parte del curso donde el estudiante puede pasar de opinar a medir, y por eso conviene empezar por el vocabulario exacto.</a:t>
             </a:r>
           </a:p>
           <a:p>
@@ -6590,13 +12163,13 @@
               </a:spcAft>
             </a:pPr>
             <a:r>
-              <a:rPr sz="1500" b="0" i="0">
-                <a:solidFill>
-                  <a:srgbClr val="333333"/>
-                </a:solidFill>
-                <a:latin typeface="Calibri"/>
-              </a:rPr>
-              <a:t>–   «Aguanta harta gente»</a:t>
+              <a:rPr sz="2000" b="0" i="0">
+                <a:solidFill>
+                  <a:srgbClr val="333333"/>
+                </a:solidFill>
+                <a:latin typeface="Calibri"/>
+              </a:rPr>
+              <a:t>–   Hay dos magnitudes que se confunden todo el tiempo.</a:t>
             </a:r>
           </a:p>
           <a:p>
@@ -6606,13 +12179,13 @@
               </a:spcAft>
             </a:pPr>
             <a:r>
-              <a:rPr sz="1500" b="0" i="0">
-                <a:solidFill>
-                  <a:srgbClr val="333333"/>
-                </a:solidFill>
-                <a:latin typeface="Calibri"/>
-              </a:rPr>
-              <a:t>–   «Si se pone lenta, le subimos recursos»</a:t>
+              <a:rPr sz="2000" b="0" i="0">
+                <a:solidFill>
+                  <a:srgbClr val="333333"/>
+                </a:solidFill>
+                <a:latin typeface="Calibri"/>
+              </a:rPr>
+              <a:t>–   La latencia, o tiempo de respuesta, es cuanto tarda UNA peticion desde que sale del cliente hasta que llega la respuesta completa; se mide en milisegundos y es lo que siente el usuario.</a:t>
             </a:r>
           </a:p>
           <a:p>
@@ -6622,159 +12195,15 @@
               </a:spcAft>
             </a:pPr>
             <a:r>
-              <a:rPr sz="1500" b="0" i="0">
-                <a:solidFill>
-                  <a:srgbClr val="333333"/>
-                </a:solidFill>
-                <a:latin typeface="Calibri"/>
-              </a:rPr>
-              <a:t>–   No hay con que comparar despues</a:t>
-            </a:r>
-          </a:p>
-        </p:txBody>
-      </p:sp>
-      <p:sp>
-        <p:nvSpPr>
-          <p:cNvPr id="9" name="Rounded Rectangle 8"/>
-          <p:cNvSpPr/>
-          <p:nvPr/>
-        </p:nvSpPr>
-        <p:spPr>
-          <a:xfrm>
-            <a:off x="6255867" y="1261872"/>
-            <a:ext cx="5478627" cy="5093208"/>
-          </a:xfrm>
-          <a:prstGeom prst="roundRect">
-            <a:avLst>
-              <a:gd name="adj" fmla="val 12000"/>
-            </a:avLst>
-          </a:prstGeom>
-          <a:solidFill>
-            <a:srgbClr val="E8F4FA"/>
-          </a:solidFill>
-          <a:ln>
-            <a:noFill/>
-          </a:ln>
-        </p:spPr>
-        <p:style>
-          <a:lnRef idx="1">
-            <a:schemeClr val="accent1"/>
-          </a:lnRef>
-          <a:fillRef idx="3">
-            <a:schemeClr val="accent1"/>
-          </a:fillRef>
-          <a:effectRef idx="2">
-            <a:schemeClr val="accent1"/>
-          </a:effectRef>
-          <a:fontRef idx="minor">
-            <a:schemeClr val="lt1"/>
-          </a:fontRef>
-        </p:style>
-        <p:txBody>
-          <a:bodyPr rtlCol="0" anchor="ctr"/>
-          <a:lstStyle/>
-          <a:p>
-            <a:pPr algn="ctr"/>
-          </a:p>
-        </p:txBody>
-      </p:sp>
-      <p:sp>
-        <p:nvSpPr>
-          <p:cNvPr id="10" name="Rectangle 9"/>
-          <p:cNvSpPr/>
-          <p:nvPr/>
-        </p:nvSpPr>
-        <p:spPr>
-          <a:xfrm>
-            <a:off x="6255867" y="1261872"/>
-            <a:ext cx="5478627" cy="502920"/>
-          </a:xfrm>
-          <a:prstGeom prst="rect">
-            <a:avLst/>
-          </a:prstGeom>
-          <a:solidFill>
-            <a:srgbClr val="095292"/>
-          </a:solidFill>
-          <a:ln>
-            <a:noFill/>
-          </a:ln>
-        </p:spPr>
-        <p:style>
-          <a:lnRef idx="1">
-            <a:schemeClr val="accent1"/>
-          </a:lnRef>
-          <a:fillRef idx="3">
-            <a:schemeClr val="accent1"/>
-          </a:fillRef>
-          <a:effectRef idx="2">
-            <a:schemeClr val="accent1"/>
-          </a:effectRef>
-          <a:fontRef idx="minor">
-            <a:schemeClr val="lt1"/>
-          </a:fontRef>
-        </p:style>
-        <p:txBody>
-          <a:bodyPr rtlCol="0" anchor="ctr"/>
-          <a:lstStyle/>
-          <a:p>
-            <a:pPr algn="ctr"/>
-          </a:p>
-        </p:txBody>
-      </p:sp>
-      <p:sp>
-        <p:nvSpPr>
-          <p:cNvPr id="11" name="TextBox 10"/>
-          <p:cNvSpPr txBox="1"/>
-          <p:nvPr/>
-        </p:nvSpPr>
-        <p:spPr>
-          <a:xfrm>
-            <a:off x="6393027" y="1353312"/>
-            <a:ext cx="5204307" cy="365760"/>
-          </a:xfrm>
-          <a:prstGeom prst="rect">
-            <a:avLst/>
-          </a:prstGeom>
-          <a:noFill/>
-        </p:spPr>
-        <p:txBody>
-          <a:bodyPr wrap="square" anchor="ctr"/>
-          <a:lstStyle/>
-          <a:p>
-            <a:pPr algn="ctr"/>
-            <a:r>
-              <a:rPr sz="1600" b="1" i="0">
-                <a:solidFill>
-                  <a:srgbClr val="FFFFFF"/>
-                </a:solidFill>
-                <a:latin typeface="Calibri"/>
-              </a:rPr>
-              <a:t>Enunciado medible</a:t>
-            </a:r>
-          </a:p>
-        </p:txBody>
-      </p:sp>
-      <p:sp>
-        <p:nvSpPr>
-          <p:cNvPr id="12" name="TextBox 11"/>
-          <p:cNvSpPr txBox="1"/>
-          <p:nvPr/>
-        </p:nvSpPr>
-        <p:spPr>
-          <a:xfrm>
-            <a:off x="6420459" y="1901952"/>
-            <a:ext cx="5158587" cy="4498848"/>
-          </a:xfrm>
-          <a:prstGeom prst="rect">
-            <a:avLst/>
-          </a:prstGeom>
-          <a:noFill/>
-        </p:spPr>
-        <p:txBody>
-          <a:bodyPr wrap="square">
-            <a:spAutoFit/>
-          </a:bodyPr>
-          <a:lstStyle/>
+              <a:rPr sz="2000" b="0" i="0">
+                <a:solidFill>
+                  <a:srgbClr val="333333"/>
+                </a:solidFill>
+                <a:latin typeface="Calibri"/>
+              </a:rPr>
+              <a:t>–   El throughput, o caudal, es cuantas peticiones atiende el sistema por unidad de tiempo; se mide en peticiones por segundo, abreviado RPS, y es lo que importa para la capacidad.</a:t>
+            </a:r>
+          </a:p>
           <a:p>
             <a:pPr>
               <a:spcAft>
@@ -6782,31 +12211,13 @@
               </a:spcAft>
             </a:pPr>
             <a:r>
-              <a:rPr sz="1500" b="0" i="0">
-                <a:solidFill>
-                  <a:srgbClr val="333333"/>
-                </a:solidFill>
-                <a:latin typeface="Calibri"/>
-              </a:rPr>
-              <a:t>–   </a:t>
-            </a:r>
-            <a:r>
-              <a:rPr sz="1500" b="1" i="0">
-                <a:solidFill>
-                  <a:srgbClr val="333333"/>
-                </a:solidFill>
-                <a:latin typeface="Calibri"/>
-              </a:rPr>
-              <a:t>p95 &lt; 300 ms</a:t>
-            </a:r>
-            <a:r>
-              <a:rPr sz="1500" b="0" i="0">
-                <a:solidFill>
-                  <a:srgbClr val="333333"/>
-                </a:solidFill>
-                <a:latin typeface="Calibri"/>
-              </a:rPr>
-              <a:t> en el endpoint de reserva</a:t>
+              <a:rPr sz="2000" b="0" i="0">
+                <a:solidFill>
+                  <a:srgbClr val="333333"/>
+                </a:solidFill>
+                <a:latin typeface="Calibri"/>
+              </a:rPr>
+              <a:t>–   No se mueven juntas: un sistema puede atender 500 RPS con latencia terrible porque todo espera en cola, y otro puede tener latencia excelente con 3 RPS porque nadie lo usa.</a:t>
             </a:r>
           </a:p>
           <a:p>
@@ -6816,79 +12227,20 @@
               </a:spcAft>
             </a:pPr>
             <a:r>
-              <a:rPr sz="1500" b="0" i="0">
-                <a:solidFill>
-                  <a:srgbClr val="333333"/>
-                </a:solidFill>
-                <a:latin typeface="Calibri"/>
-              </a:rPr>
-              <a:t>–   Escenario: </a:t>
-            </a:r>
-            <a:r>
-              <a:rPr sz="1500" b="1" i="0">
-                <a:solidFill>
-                  <a:srgbClr val="333333"/>
-                </a:solidFill>
-                <a:latin typeface="Calibri"/>
-              </a:rPr>
-              <a:t>150 RPS</a:t>
-            </a:r>
-            <a:r>
-              <a:rPr sz="1500" b="0" i="0">
-                <a:solidFill>
-                  <a:srgbClr val="333333"/>
-                </a:solidFill>
-                <a:latin typeface="Calibri"/>
-              </a:rPr>
-              <a:t> en el pico de inicio de semestre</a:t>
-            </a:r>
-          </a:p>
-          <a:p>
-            <a:pPr>
-              <a:spcAft>
-                <a:spcPts val="800"/>
-              </a:spcAft>
-            </a:pPr>
-            <a:r>
-              <a:rPr sz="1500" b="0" i="0">
-                <a:solidFill>
-                  <a:srgbClr val="333333"/>
-                </a:solidFill>
-                <a:latin typeface="Calibri"/>
-              </a:rPr>
-              <a:t>–   Bottleneck sospechado: </a:t>
-            </a:r>
-            <a:r>
-              <a:rPr sz="1500" b="1" i="0">
-                <a:solidFill>
-                  <a:srgbClr val="333333"/>
-                </a:solidFill>
-                <a:latin typeface="Calibri"/>
-              </a:rPr>
-              <a:t>consulta a la BD</a:t>
-            </a:r>
-          </a:p>
-          <a:p>
-            <a:pPr>
-              <a:spcAft>
-                <a:spcPts val="800"/>
-              </a:spcAft>
-            </a:pPr>
-            <a:r>
-              <a:rPr sz="1500" b="0" i="0">
-                <a:solidFill>
-                  <a:srgbClr val="333333"/>
-                </a:solidFill>
-                <a:latin typeface="Calibri"/>
-              </a:rPr>
-              <a:t>–   Se puede verificar: pasa o no pasa</a:t>
-            </a:r>
-          </a:p>
-        </p:txBody>
-      </p:sp>
-      <p:sp>
-        <p:nvSpPr>
-          <p:cNvPr id="13" name="TextBox 12"/>
+              <a:rPr sz="2000" b="0" i="0">
+                <a:solidFill>
+                  <a:srgbClr val="333333"/>
+                </a:solidFill>
+                <a:latin typeface="Calibri"/>
+              </a:rPr>
+              <a:t>–   Si CloudLite atiende 5 RPS con 300 milisegundos, hay en promedio 1.5 peticiones simultaneas dentro del sistema, y ese numero decide cuantos hilos, cuantas conexiones a base de datos y cuantas instancias se necesitan.</a:t>
+            </a:r>
+          </a:p>
+        </p:txBody>
+      </p:sp>
+      <p:sp>
+        <p:nvSpPr>
+          <p:cNvPr id="6" name="TextBox 5"/>
           <p:cNvSpPr txBox="1"/>
           <p:nvPr/>
         </p:nvSpPr>
@@ -6956,7 +12308,7 @@
         <p:spPr>
           <a:xfrm>
             <a:off x="0" y="0"/>
-            <a:ext cx="12191695" cy="1170432"/>
+            <a:ext cx="12191695" cy="960120"/>
           </a:xfrm>
           <a:prstGeom prst="rect">
             <a:avLst/>
@@ -6998,7 +12350,7 @@
         </p:nvSpPr>
         <p:spPr>
           <a:xfrm>
-            <a:off x="0" y="1170432"/>
+            <a:off x="0" y="960120"/>
             <a:ext cx="12191695" cy="41148"/>
           </a:xfrm>
           <a:prstGeom prst="rect">
@@ -7042,7 +12394,7 @@
         <p:spPr>
           <a:xfrm>
             <a:off x="457200" y="164592"/>
-            <a:ext cx="11277295" cy="384048"/>
+            <a:ext cx="11277295" cy="502920"/>
           </a:xfrm>
           <a:prstGeom prst="rect">
             <a:avLst/>
@@ -7062,7 +12414,7 @@
                 </a:solidFill>
                 <a:latin typeface="Calibri"/>
               </a:rPr>
-              <a:t>Herramientas de hoy</a:t>
+              <a:t>Por que el promedio miente y el percentil no (1/2)</a:t>
             </a:r>
           </a:p>
         </p:txBody>
@@ -7075,8 +12427,8 @@
         </p:nvSpPr>
         <p:spPr>
           <a:xfrm>
-            <a:off x="457200" y="566928"/>
-            <a:ext cx="11277295" cy="411480"/>
+            <a:off x="457200" y="1170432"/>
+            <a:ext cx="11277295" cy="5230368"/>
           </a:xfrm>
           <a:prstGeom prst="rect">
             <a:avLst/>
@@ -7089,837 +12441,90 @@
           </a:bodyPr>
           <a:lstStyle/>
           <a:p>
-            <a:r>
-              <a:rPr sz="1400" b="0" i="0">
-                <a:solidFill>
-                  <a:srgbClr val="B8D8EE"/>
-                </a:solidFill>
-                <a:latin typeface="Calibri"/>
-              </a:rPr>
-              <a:t>Gratis · navegador o free tier · sin cuenta de pago</a:t>
-            </a:r>
-          </a:p>
-        </p:txBody>
-      </p:sp>
-      <p:sp>
-        <p:nvSpPr>
-          <p:cNvPr id="6" name="Rounded Rectangle 5"/>
-          <p:cNvSpPr/>
-          <p:nvPr/>
-        </p:nvSpPr>
-        <p:spPr>
-          <a:xfrm>
-            <a:off x="457200" y="1591056"/>
-            <a:ext cx="3624986" cy="2299716"/>
-          </a:xfrm>
-          <a:prstGeom prst="roundRect">
-            <a:avLst>
-              <a:gd name="adj" fmla="val 12000"/>
-            </a:avLst>
-          </a:prstGeom>
-          <a:solidFill>
-            <a:srgbClr val="F2F2F2"/>
-          </a:solidFill>
-          <a:ln>
-            <a:noFill/>
-          </a:ln>
-        </p:spPr>
-        <p:style>
-          <a:lnRef idx="1">
-            <a:schemeClr val="accent1"/>
-          </a:lnRef>
-          <a:fillRef idx="3">
-            <a:schemeClr val="accent1"/>
-          </a:fillRef>
-          <a:effectRef idx="2">
-            <a:schemeClr val="accent1"/>
-          </a:effectRef>
-          <a:fontRef idx="minor">
-            <a:schemeClr val="lt1"/>
-          </a:fontRef>
-        </p:style>
-        <p:txBody>
-          <a:bodyPr rtlCol="0" anchor="ctr"/>
-          <a:lstStyle/>
-          <a:p>
-            <a:pPr algn="ctr"/>
-          </a:p>
-        </p:txBody>
-      </p:sp>
-      <p:sp>
-        <p:nvSpPr>
-          <p:cNvPr id="7" name="Rectangle 6"/>
-          <p:cNvSpPr/>
-          <p:nvPr/>
-        </p:nvSpPr>
-        <p:spPr>
-          <a:xfrm>
-            <a:off x="457200" y="1591056"/>
-            <a:ext cx="3624986" cy="64008"/>
-          </a:xfrm>
-          <a:prstGeom prst="rect">
-            <a:avLst/>
-          </a:prstGeom>
-          <a:solidFill>
-            <a:srgbClr val="095292"/>
-          </a:solidFill>
-          <a:ln>
-            <a:noFill/>
-          </a:ln>
-        </p:spPr>
-        <p:style>
-          <a:lnRef idx="1">
-            <a:schemeClr val="accent1"/>
-          </a:lnRef>
-          <a:fillRef idx="3">
-            <a:schemeClr val="accent1"/>
-          </a:fillRef>
-          <a:effectRef idx="2">
-            <a:schemeClr val="accent1"/>
-          </a:effectRef>
-          <a:fontRef idx="minor">
-            <a:schemeClr val="lt1"/>
-          </a:fontRef>
-        </p:style>
-        <p:txBody>
-          <a:bodyPr rtlCol="0" anchor="ctr"/>
-          <a:lstStyle/>
-          <a:p>
-            <a:pPr algn="ctr"/>
-          </a:p>
-        </p:txBody>
-      </p:sp>
-      <p:sp>
-        <p:nvSpPr>
-          <p:cNvPr id="8" name="Rectangle 7"/>
-          <p:cNvSpPr/>
-          <p:nvPr/>
-        </p:nvSpPr>
-        <p:spPr>
-          <a:xfrm>
-            <a:off x="457200" y="1655064"/>
-            <a:ext cx="3624986" cy="27432"/>
-          </a:xfrm>
-          <a:prstGeom prst="rect">
-            <a:avLst/>
-          </a:prstGeom>
-          <a:solidFill>
-            <a:srgbClr val="FFD000"/>
-          </a:solidFill>
-          <a:ln>
-            <a:noFill/>
-          </a:ln>
-        </p:spPr>
-        <p:style>
-          <a:lnRef idx="1">
-            <a:schemeClr val="accent1"/>
-          </a:lnRef>
-          <a:fillRef idx="3">
-            <a:schemeClr val="accent1"/>
-          </a:fillRef>
-          <a:effectRef idx="2">
-            <a:schemeClr val="accent1"/>
-          </a:effectRef>
-          <a:fontRef idx="minor">
-            <a:schemeClr val="lt1"/>
-          </a:fontRef>
-        </p:style>
-        <p:txBody>
-          <a:bodyPr rtlCol="0" anchor="ctr"/>
-          <a:lstStyle/>
-          <a:p>
-            <a:pPr algn="ctr"/>
-          </a:p>
-        </p:txBody>
-      </p:sp>
-      <p:pic>
-        <p:nvPicPr>
-          <p:cNvPr id="9" name="Picture 8" descr="google_docs.png"/>
-          <p:cNvPicPr>
-            <a:picLocks noChangeAspect="1"/>
-          </p:cNvPicPr>
-          <p:nvPr/>
-        </p:nvPicPr>
-        <p:blipFill>
-          <a:blip r:embed="rId2"/>
-          <a:stretch>
-            <a:fillRect/>
-          </a:stretch>
-        </p:blipFill>
-        <p:spPr>
-          <a:xfrm>
-            <a:off x="1659331" y="1847087"/>
-            <a:ext cx="1220724" cy="1220724"/>
-          </a:xfrm>
-          <a:prstGeom prst="rect">
-            <a:avLst/>
-          </a:prstGeom>
-        </p:spPr>
-      </p:pic>
-      <p:sp>
-        <p:nvSpPr>
-          <p:cNvPr id="10" name="TextBox 9"/>
-          <p:cNvSpPr txBox="1"/>
-          <p:nvPr/>
-        </p:nvSpPr>
-        <p:spPr>
-          <a:xfrm>
-            <a:off x="530352" y="3159251"/>
-            <a:ext cx="3478682" cy="621792"/>
-          </a:xfrm>
-          <a:prstGeom prst="rect">
-            <a:avLst/>
-          </a:prstGeom>
-          <a:noFill/>
-        </p:spPr>
-        <p:txBody>
-          <a:bodyPr wrap="square" anchor="t"/>
-          <a:lstStyle/>
-          <a:p>
-            <a:pPr algn="ctr"/>
-            <a:r>
-              <a:rPr sz="1300" b="1" i="0">
-                <a:solidFill>
-                  <a:srgbClr val="095292"/>
-                </a:solidFill>
-                <a:latin typeface="Calibri"/>
-              </a:rPr>
-              <a:t>Google Docs</a:t>
-            </a:r>
-          </a:p>
-          <a:p>
-            <a:pPr algn="ctr">
-              <a:spcBef>
-                <a:spcPts val="200"/>
-              </a:spcBef>
+            <a:pPr>
+              <a:spcAft>
+                <a:spcPts val="800"/>
+              </a:spcAft>
             </a:pPr>
             <a:r>
-              <a:rPr sz="1000" b="0" i="0">
-                <a:solidFill>
-                  <a:srgbClr val="666666"/>
-                </a:solidFill>
-                <a:latin typeface="Calibri"/>
-              </a:rPr>
-              <a:t>Objetivo de rendimiento</a:t>
-            </a:r>
-          </a:p>
-        </p:txBody>
-      </p:sp>
-      <p:sp>
-        <p:nvSpPr>
-          <p:cNvPr id="11" name="Rounded Rectangle 10"/>
-          <p:cNvSpPr/>
-          <p:nvPr/>
-        </p:nvSpPr>
-        <p:spPr>
-          <a:xfrm>
-            <a:off x="4283354" y="1591056"/>
-            <a:ext cx="3624986" cy="2299716"/>
-          </a:xfrm>
-          <a:prstGeom prst="roundRect">
-            <a:avLst>
-              <a:gd name="adj" fmla="val 12000"/>
-            </a:avLst>
-          </a:prstGeom>
-          <a:solidFill>
-            <a:srgbClr val="F2F2F2"/>
-          </a:solidFill>
-          <a:ln>
-            <a:noFill/>
-          </a:ln>
-        </p:spPr>
-        <p:style>
-          <a:lnRef idx="1">
-            <a:schemeClr val="accent1"/>
-          </a:lnRef>
-          <a:fillRef idx="3">
-            <a:schemeClr val="accent1"/>
-          </a:fillRef>
-          <a:effectRef idx="2">
-            <a:schemeClr val="accent1"/>
-          </a:effectRef>
-          <a:fontRef idx="minor">
-            <a:schemeClr val="lt1"/>
-          </a:fontRef>
-        </p:style>
-        <p:txBody>
-          <a:bodyPr rtlCol="0" anchor="ctr"/>
-          <a:lstStyle/>
-          <a:p>
-            <a:pPr algn="ctr"/>
-          </a:p>
-        </p:txBody>
-      </p:sp>
-      <p:sp>
-        <p:nvSpPr>
-          <p:cNvPr id="12" name="Rectangle 11"/>
-          <p:cNvSpPr/>
-          <p:nvPr/>
-        </p:nvSpPr>
-        <p:spPr>
-          <a:xfrm>
-            <a:off x="4283354" y="1591056"/>
-            <a:ext cx="3624986" cy="64008"/>
-          </a:xfrm>
-          <a:prstGeom prst="rect">
-            <a:avLst/>
-          </a:prstGeom>
-          <a:solidFill>
-            <a:srgbClr val="095292"/>
-          </a:solidFill>
-          <a:ln>
-            <a:noFill/>
-          </a:ln>
-        </p:spPr>
-        <p:style>
-          <a:lnRef idx="1">
-            <a:schemeClr val="accent1"/>
-          </a:lnRef>
-          <a:fillRef idx="3">
-            <a:schemeClr val="accent1"/>
-          </a:fillRef>
-          <a:effectRef idx="2">
-            <a:schemeClr val="accent1"/>
-          </a:effectRef>
-          <a:fontRef idx="minor">
-            <a:schemeClr val="lt1"/>
-          </a:fontRef>
-        </p:style>
-        <p:txBody>
-          <a:bodyPr rtlCol="0" anchor="ctr"/>
-          <a:lstStyle/>
-          <a:p>
-            <a:pPr algn="ctr"/>
-          </a:p>
-        </p:txBody>
-      </p:sp>
-      <p:sp>
-        <p:nvSpPr>
-          <p:cNvPr id="13" name="Rectangle 12"/>
-          <p:cNvSpPr/>
-          <p:nvPr/>
-        </p:nvSpPr>
-        <p:spPr>
-          <a:xfrm>
-            <a:off x="4283354" y="1655064"/>
-            <a:ext cx="3624986" cy="27432"/>
-          </a:xfrm>
-          <a:prstGeom prst="rect">
-            <a:avLst/>
-          </a:prstGeom>
-          <a:solidFill>
-            <a:srgbClr val="FFD000"/>
-          </a:solidFill>
-          <a:ln>
-            <a:noFill/>
-          </a:ln>
-        </p:spPr>
-        <p:style>
-          <a:lnRef idx="1">
-            <a:schemeClr val="accent1"/>
-          </a:lnRef>
-          <a:fillRef idx="3">
-            <a:schemeClr val="accent1"/>
-          </a:fillRef>
-          <a:effectRef idx="2">
-            <a:schemeClr val="accent1"/>
-          </a:effectRef>
-          <a:fontRef idx="minor">
-            <a:schemeClr val="lt1"/>
-          </a:fontRef>
-        </p:style>
-        <p:txBody>
-          <a:bodyPr rtlCol="0" anchor="ctr"/>
-          <a:lstStyle/>
-          <a:p>
-            <a:pPr algn="ctr"/>
-          </a:p>
-        </p:txBody>
-      </p:sp>
-      <p:pic>
-        <p:nvPicPr>
-          <p:cNvPr id="14" name="Picture 13" descr="drawio.png"/>
-          <p:cNvPicPr>
-            <a:picLocks noChangeAspect="1"/>
-          </p:cNvPicPr>
-          <p:nvPr/>
-        </p:nvPicPr>
-        <p:blipFill>
-          <a:blip r:embed="rId3"/>
-          <a:stretch>
-            <a:fillRect/>
-          </a:stretch>
-        </p:blipFill>
-        <p:spPr>
-          <a:xfrm>
-            <a:off x="5485485" y="1847087"/>
-            <a:ext cx="1220724" cy="1220724"/>
-          </a:xfrm>
-          <a:prstGeom prst="rect">
-            <a:avLst/>
-          </a:prstGeom>
-        </p:spPr>
-      </p:pic>
-      <p:sp>
-        <p:nvSpPr>
-          <p:cNvPr id="15" name="TextBox 14"/>
-          <p:cNvSpPr txBox="1"/>
-          <p:nvPr/>
-        </p:nvSpPr>
-        <p:spPr>
-          <a:xfrm>
-            <a:off x="4356506" y="3159251"/>
-            <a:ext cx="3478682" cy="621792"/>
-          </a:xfrm>
-          <a:prstGeom prst="rect">
-            <a:avLst/>
-          </a:prstGeom>
-          <a:noFill/>
-        </p:spPr>
-        <p:txBody>
-          <a:bodyPr wrap="square" anchor="t"/>
-          <a:lstStyle/>
-          <a:p>
-            <a:pPr algn="ctr"/>
-            <a:r>
-              <a:rPr sz="1300" b="1" i="0">
-                <a:solidFill>
-                  <a:srgbClr val="095292"/>
-                </a:solidFill>
-                <a:latin typeface="Calibri"/>
-              </a:rPr>
-              <a:t>draw.io</a:t>
-            </a:r>
-          </a:p>
-          <a:p>
-            <a:pPr algn="ctr">
-              <a:spcBef>
-                <a:spcPts val="200"/>
-              </a:spcBef>
+              <a:rPr sz="2000" b="0" i="0">
+                <a:solidFill>
+                  <a:srgbClr val="333333"/>
+                </a:solidFill>
+                <a:latin typeface="Calibri"/>
+              </a:rPr>
+              <a:t>–   El corazon del tema es entender por que el promedio miente y el percentil no.</a:t>
+            </a:r>
+          </a:p>
+          <a:p>
+            <a:pPr>
+              <a:spcAft>
+                <a:spcPts val="800"/>
+              </a:spcAft>
             </a:pPr>
             <a:r>
-              <a:rPr sz="1000" b="0" i="0">
-                <a:solidFill>
-                  <a:srgbClr val="666666"/>
-                </a:solidFill>
-                <a:latin typeface="Calibri"/>
-              </a:rPr>
-              <a:t>Bottleneck</a:t>
-            </a:r>
-          </a:p>
-        </p:txBody>
-      </p:sp>
-      <p:sp>
-        <p:nvSpPr>
-          <p:cNvPr id="16" name="Rounded Rectangle 15"/>
-          <p:cNvSpPr/>
-          <p:nvPr/>
-        </p:nvSpPr>
-        <p:spPr>
-          <a:xfrm>
-            <a:off x="8109508" y="1591056"/>
-            <a:ext cx="3624986" cy="2299716"/>
-          </a:xfrm>
-          <a:prstGeom prst="roundRect">
-            <a:avLst>
-              <a:gd name="adj" fmla="val 12000"/>
-            </a:avLst>
-          </a:prstGeom>
-          <a:solidFill>
-            <a:srgbClr val="F2F2F2"/>
-          </a:solidFill>
-          <a:ln>
-            <a:noFill/>
-          </a:ln>
-        </p:spPr>
-        <p:style>
-          <a:lnRef idx="1">
-            <a:schemeClr val="accent1"/>
-          </a:lnRef>
-          <a:fillRef idx="3">
-            <a:schemeClr val="accent1"/>
-          </a:fillRef>
-          <a:effectRef idx="2">
-            <a:schemeClr val="accent1"/>
-          </a:effectRef>
-          <a:fontRef idx="minor">
-            <a:schemeClr val="lt1"/>
-          </a:fontRef>
-        </p:style>
-        <p:txBody>
-          <a:bodyPr rtlCol="0" anchor="ctr"/>
-          <a:lstStyle/>
-          <a:p>
-            <a:pPr algn="ctr"/>
-          </a:p>
-        </p:txBody>
-      </p:sp>
-      <p:sp>
-        <p:nvSpPr>
-          <p:cNvPr id="17" name="Rectangle 16"/>
-          <p:cNvSpPr/>
-          <p:nvPr/>
-        </p:nvSpPr>
-        <p:spPr>
-          <a:xfrm>
-            <a:off x="8109508" y="1591056"/>
-            <a:ext cx="3624986" cy="64008"/>
-          </a:xfrm>
-          <a:prstGeom prst="rect">
-            <a:avLst/>
-          </a:prstGeom>
-          <a:solidFill>
-            <a:srgbClr val="095292"/>
-          </a:solidFill>
-          <a:ln>
-            <a:noFill/>
-          </a:ln>
-        </p:spPr>
-        <p:style>
-          <a:lnRef idx="1">
-            <a:schemeClr val="accent1"/>
-          </a:lnRef>
-          <a:fillRef idx="3">
-            <a:schemeClr val="accent1"/>
-          </a:fillRef>
-          <a:effectRef idx="2">
-            <a:schemeClr val="accent1"/>
-          </a:effectRef>
-          <a:fontRef idx="minor">
-            <a:schemeClr val="lt1"/>
-          </a:fontRef>
-        </p:style>
-        <p:txBody>
-          <a:bodyPr rtlCol="0" anchor="ctr"/>
-          <a:lstStyle/>
-          <a:p>
-            <a:pPr algn="ctr"/>
-          </a:p>
-        </p:txBody>
-      </p:sp>
-      <p:sp>
-        <p:nvSpPr>
-          <p:cNvPr id="18" name="Rectangle 17"/>
-          <p:cNvSpPr/>
-          <p:nvPr/>
-        </p:nvSpPr>
-        <p:spPr>
-          <a:xfrm>
-            <a:off x="8109508" y="1655064"/>
-            <a:ext cx="3624986" cy="27432"/>
-          </a:xfrm>
-          <a:prstGeom prst="rect">
-            <a:avLst/>
-          </a:prstGeom>
-          <a:solidFill>
-            <a:srgbClr val="FFD000"/>
-          </a:solidFill>
-          <a:ln>
-            <a:noFill/>
-          </a:ln>
-        </p:spPr>
-        <p:style>
-          <a:lnRef idx="1">
-            <a:schemeClr val="accent1"/>
-          </a:lnRef>
-          <a:fillRef idx="3">
-            <a:schemeClr val="accent1"/>
-          </a:fillRef>
-          <a:effectRef idx="2">
-            <a:schemeClr val="accent1"/>
-          </a:effectRef>
-          <a:fontRef idx="minor">
-            <a:schemeClr val="lt1"/>
-          </a:fontRef>
-        </p:style>
-        <p:txBody>
-          <a:bodyPr rtlCol="0" anchor="ctr"/>
-          <a:lstStyle/>
-          <a:p>
-            <a:pPr algn="ctr"/>
-          </a:p>
-        </p:txBody>
-      </p:sp>
-      <p:pic>
-        <p:nvPicPr>
-          <p:cNvPr id="19" name="Picture 18" descr="mermaid.png"/>
-          <p:cNvPicPr>
-            <a:picLocks noChangeAspect="1"/>
-          </p:cNvPicPr>
-          <p:nvPr/>
-        </p:nvPicPr>
-        <p:blipFill>
-          <a:blip r:embed="rId4"/>
-          <a:stretch>
-            <a:fillRect/>
-          </a:stretch>
-        </p:blipFill>
-        <p:spPr>
-          <a:xfrm>
-            <a:off x="9311640" y="1847087"/>
-            <a:ext cx="1220724" cy="1220724"/>
-          </a:xfrm>
-          <a:prstGeom prst="rect">
-            <a:avLst/>
-          </a:prstGeom>
-        </p:spPr>
-      </p:pic>
-      <p:sp>
-        <p:nvSpPr>
-          <p:cNvPr id="20" name="TextBox 19"/>
-          <p:cNvSpPr txBox="1"/>
-          <p:nvPr/>
-        </p:nvSpPr>
-        <p:spPr>
-          <a:xfrm>
-            <a:off x="8182660" y="3159251"/>
-            <a:ext cx="3478682" cy="621792"/>
-          </a:xfrm>
-          <a:prstGeom prst="rect">
-            <a:avLst/>
-          </a:prstGeom>
-          <a:noFill/>
-        </p:spPr>
-        <p:txBody>
-          <a:bodyPr wrap="square" anchor="t"/>
-          <a:lstStyle/>
-          <a:p>
-            <a:pPr algn="ctr"/>
-            <a:r>
-              <a:rPr sz="1300" b="1" i="0">
-                <a:solidFill>
-                  <a:srgbClr val="095292"/>
-                </a:solidFill>
-                <a:latin typeface="Calibri"/>
-              </a:rPr>
-              <a:t>Mermaid</a:t>
-            </a:r>
-          </a:p>
-          <a:p>
-            <a:pPr algn="ctr">
-              <a:spcBef>
-                <a:spcPts val="200"/>
-              </a:spcBef>
+              <a:rPr sz="2000" b="0" i="0">
+                <a:solidFill>
+                  <a:srgbClr val="333333"/>
+                </a:solidFill>
+                <a:latin typeface="Calibri"/>
+              </a:rPr>
+              <a:t>–   Un percentil es el valor por debajo del cual cae un porcentaje dado de las observaciones ordenadas de menor a mayor: el p95 del tiempo de respuesta es el tiempo tal que el 95 por ciento de las peticiones respondieron en ese tiempo o menos, y el 5 por ciento restante tardo mas.</a:t>
+            </a:r>
+          </a:p>
+          <a:p>
+            <a:pPr>
+              <a:spcAft>
+                <a:spcPts val="800"/>
+              </a:spcAft>
             </a:pPr>
             <a:r>
-              <a:rPr sz="1000" b="0" i="0">
-                <a:solidFill>
-                  <a:srgbClr val="666666"/>
-                </a:solidFill>
-                <a:latin typeface="Calibri"/>
-              </a:rPr>
-              <a:t>Codigo del diagrama</a:t>
-            </a:r>
-          </a:p>
-        </p:txBody>
-      </p:sp>
-      <p:sp>
-        <p:nvSpPr>
-          <p:cNvPr id="21" name="Rounded Rectangle 20"/>
-          <p:cNvSpPr/>
-          <p:nvPr/>
-        </p:nvSpPr>
-        <p:spPr>
-          <a:xfrm>
-            <a:off x="4283354" y="4055364"/>
-            <a:ext cx="3624986" cy="2299716"/>
-          </a:xfrm>
-          <a:prstGeom prst="roundRect">
-            <a:avLst>
-              <a:gd name="adj" fmla="val 12000"/>
-            </a:avLst>
-          </a:prstGeom>
-          <a:solidFill>
-            <a:srgbClr val="F2F2F2"/>
-          </a:solidFill>
-          <a:ln>
-            <a:noFill/>
-          </a:ln>
-        </p:spPr>
-        <p:style>
-          <a:lnRef idx="1">
-            <a:schemeClr val="accent1"/>
-          </a:lnRef>
-          <a:fillRef idx="3">
-            <a:schemeClr val="accent1"/>
-          </a:fillRef>
-          <a:effectRef idx="2">
-            <a:schemeClr val="accent1"/>
-          </a:effectRef>
-          <a:fontRef idx="minor">
-            <a:schemeClr val="lt1"/>
-          </a:fontRef>
-        </p:style>
-        <p:txBody>
-          <a:bodyPr rtlCol="0" anchor="ctr"/>
-          <a:lstStyle/>
-          <a:p>
-            <a:pPr algn="ctr"/>
-          </a:p>
-        </p:txBody>
-      </p:sp>
-      <p:sp>
-        <p:nvSpPr>
-          <p:cNvPr id="22" name="Rectangle 21"/>
-          <p:cNvSpPr/>
-          <p:nvPr/>
-        </p:nvSpPr>
-        <p:spPr>
-          <a:xfrm>
-            <a:off x="4283354" y="4055364"/>
-            <a:ext cx="3624986" cy="64008"/>
-          </a:xfrm>
-          <a:prstGeom prst="rect">
-            <a:avLst/>
-          </a:prstGeom>
-          <a:solidFill>
-            <a:srgbClr val="095292"/>
-          </a:solidFill>
-          <a:ln>
-            <a:noFill/>
-          </a:ln>
-        </p:spPr>
-        <p:style>
-          <a:lnRef idx="1">
-            <a:schemeClr val="accent1"/>
-          </a:lnRef>
-          <a:fillRef idx="3">
-            <a:schemeClr val="accent1"/>
-          </a:fillRef>
-          <a:effectRef idx="2">
-            <a:schemeClr val="accent1"/>
-          </a:effectRef>
-          <a:fontRef idx="minor">
-            <a:schemeClr val="lt1"/>
-          </a:fontRef>
-        </p:style>
-        <p:txBody>
-          <a:bodyPr rtlCol="0" anchor="ctr"/>
-          <a:lstStyle/>
-          <a:p>
-            <a:pPr algn="ctr"/>
-          </a:p>
-        </p:txBody>
-      </p:sp>
-      <p:sp>
-        <p:nvSpPr>
-          <p:cNvPr id="23" name="Rectangle 22"/>
-          <p:cNvSpPr/>
-          <p:nvPr/>
-        </p:nvSpPr>
-        <p:spPr>
-          <a:xfrm>
-            <a:off x="4283354" y="4119372"/>
-            <a:ext cx="3624986" cy="27432"/>
-          </a:xfrm>
-          <a:prstGeom prst="rect">
-            <a:avLst/>
-          </a:prstGeom>
-          <a:solidFill>
-            <a:srgbClr val="FFD000"/>
-          </a:solidFill>
-          <a:ln>
-            <a:noFill/>
-          </a:ln>
-        </p:spPr>
-        <p:style>
-          <a:lnRef idx="1">
-            <a:schemeClr val="accent1"/>
-          </a:lnRef>
-          <a:fillRef idx="3">
-            <a:schemeClr val="accent1"/>
-          </a:fillRef>
-          <a:effectRef idx="2">
-            <a:schemeClr val="accent1"/>
-          </a:effectRef>
-          <a:fontRef idx="minor">
-            <a:schemeClr val="lt1"/>
-          </a:fontRef>
-        </p:style>
-        <p:txBody>
-          <a:bodyPr rtlCol="0" anchor="ctr"/>
-          <a:lstStyle/>
-          <a:p>
-            <a:pPr algn="ctr"/>
-          </a:p>
-        </p:txBody>
-      </p:sp>
-      <p:pic>
-        <p:nvPicPr>
-          <p:cNvPr id="24" name="Picture 23" descr="examlab.png"/>
-          <p:cNvPicPr>
-            <a:picLocks noChangeAspect="1"/>
-          </p:cNvPicPr>
-          <p:nvPr/>
-        </p:nvPicPr>
-        <p:blipFill>
-          <a:blip r:embed="rId5"/>
-          <a:stretch>
-            <a:fillRect/>
-          </a:stretch>
-        </p:blipFill>
-        <p:spPr>
-          <a:xfrm>
-            <a:off x="5485485" y="4311396"/>
-            <a:ext cx="1220724" cy="1220724"/>
-          </a:xfrm>
-          <a:prstGeom prst="rect">
-            <a:avLst/>
-          </a:prstGeom>
-        </p:spPr>
-      </p:pic>
-      <p:sp>
-        <p:nvSpPr>
-          <p:cNvPr id="25" name="TextBox 24"/>
-          <p:cNvSpPr txBox="1"/>
-          <p:nvPr/>
-        </p:nvSpPr>
-        <p:spPr>
-          <a:xfrm>
-            <a:off x="4356506" y="5623560"/>
-            <a:ext cx="3478682" cy="621792"/>
-          </a:xfrm>
-          <a:prstGeom prst="rect">
-            <a:avLst/>
-          </a:prstGeom>
-          <a:noFill/>
-        </p:spPr>
-        <p:txBody>
-          <a:bodyPr wrap="square" anchor="t"/>
-          <a:lstStyle/>
-          <a:p>
-            <a:pPr algn="ctr"/>
-            <a:r>
-              <a:rPr sz="1300" b="1" i="0">
-                <a:solidFill>
-                  <a:srgbClr val="095292"/>
-                </a:solidFill>
-                <a:latin typeface="Calibri"/>
-              </a:rPr>
-              <a:t>la plataforma del curso</a:t>
-            </a:r>
-          </a:p>
-          <a:p>
-            <a:pPr algn="ctr">
-              <a:spcBef>
-                <a:spcPts val="200"/>
-              </a:spcBef>
+              <a:rPr sz="2000" b="0" i="0">
+                <a:solidFill>
+                  <a:srgbClr val="333333"/>
+                </a:solidFill>
+                <a:latin typeface="Calibri"/>
+              </a:rPr>
+              <a:t>–   El ejemplo numerico es obligatorio porque convence de inmediato.</a:t>
+            </a:r>
+          </a:p>
+          <a:p>
+            <a:pPr>
+              <a:spcAft>
+                <a:spcPts val="800"/>
+              </a:spcAft>
             </a:pPr>
             <a:r>
-              <a:rPr sz="1000" b="0" i="0">
-                <a:solidFill>
-                  <a:srgbClr val="666666"/>
-                </a:solidFill>
-                <a:latin typeface="Calibri"/>
-              </a:rPr>
-              <a:t>Donde se entrega</a:t>
-            </a:r>
-          </a:p>
-        </p:txBody>
-      </p:sp>
-      <p:sp>
-        <p:nvSpPr>
-          <p:cNvPr id="26" name="TextBox 25"/>
+              <a:rPr sz="2000" b="0" i="0">
+                <a:solidFill>
+                  <a:srgbClr val="333333"/>
+                </a:solidFill>
+                <a:latin typeface="Calibri"/>
+              </a:rPr>
+              <a:t>–   Suponga 100 peticiones a CloudLite: 95 responden en 120 milisegundos y 5 responden en 4000 porque cayeron en una consulta sin indice.</a:t>
+            </a:r>
+          </a:p>
+          <a:p>
+            <a:pPr>
+              <a:spcAft>
+                <a:spcPts val="800"/>
+              </a:spcAft>
+            </a:pPr>
+            <a:r>
+              <a:rPr sz="2000" b="0" i="0">
+                <a:solidFill>
+                  <a:srgbClr val="333333"/>
+                </a:solidFill>
+                <a:latin typeface="Calibri"/>
+              </a:rPr>
+              <a:t>–   El promedio es 314 milisegundos, una cifra que suena aceptable y que no le paso a nadie: ninguna peticion real tardo 314 milisegundos.</a:t>
+            </a:r>
+          </a:p>
+        </p:txBody>
+      </p:sp>
+      <p:sp>
+        <p:nvSpPr>
+          <p:cNvPr id="6" name="TextBox 5"/>
           <p:cNvSpPr txBox="1"/>
           <p:nvPr/>
         </p:nvSpPr>
@@ -7987,7 +12592,7 @@
         <p:spPr>
           <a:xfrm>
             <a:off x="0" y="0"/>
-            <a:ext cx="12191695" cy="1170432"/>
+            <a:ext cx="12191695" cy="960120"/>
           </a:xfrm>
           <a:prstGeom prst="rect">
             <a:avLst/>
@@ -8029,7 +12634,7 @@
         </p:nvSpPr>
         <p:spPr>
           <a:xfrm>
-            <a:off x="0" y="1170432"/>
+            <a:off x="0" y="960120"/>
             <a:ext cx="12191695" cy="41148"/>
           </a:xfrm>
           <a:prstGeom prst="rect">
@@ -8073,7 +12678,7 @@
         <p:spPr>
           <a:xfrm>
             <a:off x="457200" y="164592"/>
-            <a:ext cx="11277295" cy="384048"/>
+            <a:ext cx="11277295" cy="502920"/>
           </a:xfrm>
           <a:prstGeom prst="rect">
             <a:avLst/>
@@ -8093,7 +12698,7 @@
                 </a:solidFill>
                 <a:latin typeface="Calibri"/>
               </a:rPr>
-              <a:t>Del boceto a la plataforma del curso (diagrama)</a:t>
+              <a:t>Por que el promedio miente y el percentil no (2/2)</a:t>
             </a:r>
           </a:p>
         </p:txBody>
@@ -8106,8 +12711,8 @@
         </p:nvSpPr>
         <p:spPr>
           <a:xfrm>
-            <a:off x="457200" y="566928"/>
-            <a:ext cx="11277295" cy="411480"/>
+            <a:off x="457200" y="1170432"/>
+            <a:ext cx="11277295" cy="5230368"/>
           </a:xfrm>
           <a:prstGeom prst="rect">
             <a:avLst/>
@@ -8120,705 +12725,74 @@
           </a:bodyPr>
           <a:lstStyle/>
           <a:p>
-            <a:r>
-              <a:rPr sz="1400" b="0" i="0">
-                <a:solidFill>
-                  <a:srgbClr val="B8D8EE"/>
-                </a:solidFill>
-                <a:latin typeface="Calibri"/>
-              </a:rPr>
-              <a:t>El diagrama se entrega como código Mermaid dentro de la plataforma del curso, no como imagen</a:t>
-            </a:r>
-          </a:p>
-        </p:txBody>
-      </p:sp>
-      <p:sp>
-        <p:nvSpPr>
-          <p:cNvPr id="6" name="Rounded Rectangle 5"/>
-          <p:cNvSpPr/>
-          <p:nvPr/>
-        </p:nvSpPr>
-        <p:spPr>
-          <a:xfrm>
-            <a:off x="457200" y="1659636"/>
-            <a:ext cx="11277295" cy="1051560"/>
-          </a:xfrm>
-          <a:prstGeom prst="roundRect">
-            <a:avLst>
-              <a:gd name="adj" fmla="val 12000"/>
-            </a:avLst>
-          </a:prstGeom>
-          <a:solidFill>
-            <a:srgbClr val="F2F2F2"/>
-          </a:solidFill>
-          <a:ln>
-            <a:noFill/>
-          </a:ln>
-        </p:spPr>
-        <p:style>
-          <a:lnRef idx="1">
-            <a:schemeClr val="accent1"/>
-          </a:lnRef>
-          <a:fillRef idx="3">
-            <a:schemeClr val="accent1"/>
-          </a:fillRef>
-          <a:effectRef idx="2">
-            <a:schemeClr val="accent1"/>
-          </a:effectRef>
-          <a:fontRef idx="minor">
-            <a:schemeClr val="lt1"/>
-          </a:fontRef>
-        </p:style>
-        <p:txBody>
-          <a:bodyPr rtlCol="0" anchor="ctr"/>
-          <a:lstStyle/>
-          <a:p>
-            <a:pPr algn="ctr"/>
-          </a:p>
-        </p:txBody>
-      </p:sp>
-      <p:sp>
-        <p:nvSpPr>
-          <p:cNvPr id="7" name="Rounded Rectangle 6"/>
-          <p:cNvSpPr/>
-          <p:nvPr/>
-        </p:nvSpPr>
-        <p:spPr>
-          <a:xfrm>
-            <a:off x="594360" y="1965960"/>
-            <a:ext cx="438912" cy="438912"/>
-          </a:xfrm>
-          <a:prstGeom prst="roundRect">
-            <a:avLst>
-              <a:gd name="adj" fmla="val 12000"/>
-            </a:avLst>
-          </a:prstGeom>
-          <a:solidFill>
-            <a:srgbClr val="095292"/>
-          </a:solidFill>
-          <a:ln>
-            <a:noFill/>
-          </a:ln>
-        </p:spPr>
-        <p:style>
-          <a:lnRef idx="1">
-            <a:schemeClr val="accent1"/>
-          </a:lnRef>
-          <a:fillRef idx="3">
-            <a:schemeClr val="accent1"/>
-          </a:fillRef>
-          <a:effectRef idx="2">
-            <a:schemeClr val="accent1"/>
-          </a:effectRef>
-          <a:fontRef idx="minor">
-            <a:schemeClr val="lt1"/>
-          </a:fontRef>
-        </p:style>
-        <p:txBody>
-          <a:bodyPr rtlCol="0" anchor="ctr"/>
-          <a:lstStyle/>
-          <a:p>
-            <a:pPr algn="ctr"/>
-          </a:p>
-        </p:txBody>
-      </p:sp>
-      <p:sp>
-        <p:nvSpPr>
-          <p:cNvPr id="8" name="TextBox 7"/>
-          <p:cNvSpPr txBox="1"/>
-          <p:nvPr/>
-        </p:nvSpPr>
-        <p:spPr>
-          <a:xfrm>
-            <a:off x="594360" y="1965960"/>
-            <a:ext cx="438912" cy="438912"/>
-          </a:xfrm>
-          <a:prstGeom prst="rect">
-            <a:avLst/>
-          </a:prstGeom>
-          <a:noFill/>
-        </p:spPr>
-        <p:txBody>
-          <a:bodyPr wrap="square" anchor="ctr"/>
-          <a:lstStyle/>
-          <a:p>
-            <a:pPr algn="ctr"/>
-            <a:r>
-              <a:rPr sz="1600" b="1" i="0">
-                <a:solidFill>
-                  <a:srgbClr val="FFFFFF"/>
-                </a:solidFill>
-                <a:latin typeface="Calibri"/>
-              </a:rPr>
-              <a:t>1</a:t>
-            </a:r>
-          </a:p>
-        </p:txBody>
-      </p:sp>
-      <p:sp>
-        <p:nvSpPr>
-          <p:cNvPr id="9" name="TextBox 8"/>
-          <p:cNvSpPr txBox="1"/>
-          <p:nvPr/>
-        </p:nvSpPr>
-        <p:spPr>
-          <a:xfrm>
-            <a:off x="1188720" y="1751076"/>
-            <a:ext cx="10271455" cy="886968"/>
-          </a:xfrm>
-          <a:prstGeom prst="rect">
-            <a:avLst/>
-          </a:prstGeom>
-          <a:noFill/>
-        </p:spPr>
-        <p:txBody>
-          <a:bodyPr wrap="square" anchor="ctr"/>
-          <a:lstStyle/>
-          <a:p>
-            <a:r>
-              <a:rPr sz="1500" b="1" i="0">
-                <a:solidFill>
-                  <a:srgbClr val="095292"/>
-                </a:solidFill>
-                <a:latin typeface="Calibri"/>
-              </a:rPr>
-              <a:t>Disena visual</a:t>
-            </a:r>
-          </a:p>
-          <a:p>
             <a:pPr>
-              <a:spcBef>
-                <a:spcPts val="200"/>
-              </a:spcBef>
+              <a:spcAft>
+                <a:spcPts val="800"/>
+              </a:spcAft>
             </a:pPr>
             <a:r>
-              <a:rPr sz="1300" b="0" i="0">
-                <a:solidFill>
-                  <a:srgbClr val="333333"/>
-                </a:solidFill>
-                <a:latin typeface="Calibri"/>
-              </a:rPr>
-              <a:t>Dibuja el diagrama como quieras en Excalidraw o draw.io: es mas rapido arrastrar cajas que escribir codigo, y ahi es donde piensas el modelo.</a:t>
-            </a:r>
-          </a:p>
-        </p:txBody>
-      </p:sp>
-      <p:sp>
-        <p:nvSpPr>
-          <p:cNvPr id="10" name="Rounded Rectangle 9"/>
-          <p:cNvSpPr/>
-          <p:nvPr/>
-        </p:nvSpPr>
-        <p:spPr>
-          <a:xfrm>
-            <a:off x="457200" y="2802636"/>
-            <a:ext cx="11277295" cy="1051560"/>
-          </a:xfrm>
-          <a:prstGeom prst="roundRect">
-            <a:avLst>
-              <a:gd name="adj" fmla="val 12000"/>
-            </a:avLst>
-          </a:prstGeom>
-          <a:solidFill>
-            <a:srgbClr val="E8F4FA"/>
-          </a:solidFill>
-          <a:ln>
-            <a:noFill/>
-          </a:ln>
-        </p:spPr>
-        <p:style>
-          <a:lnRef idx="1">
-            <a:schemeClr val="accent1"/>
-          </a:lnRef>
-          <a:fillRef idx="3">
-            <a:schemeClr val="accent1"/>
-          </a:fillRef>
-          <a:effectRef idx="2">
-            <a:schemeClr val="accent1"/>
-          </a:effectRef>
-          <a:fontRef idx="minor">
-            <a:schemeClr val="lt1"/>
-          </a:fontRef>
-        </p:style>
-        <p:txBody>
-          <a:bodyPr rtlCol="0" anchor="ctr"/>
-          <a:lstStyle/>
-          <a:p>
-            <a:pPr algn="ctr"/>
-          </a:p>
-        </p:txBody>
-      </p:sp>
-      <p:sp>
-        <p:nvSpPr>
-          <p:cNvPr id="11" name="Rounded Rectangle 10"/>
-          <p:cNvSpPr/>
-          <p:nvPr/>
-        </p:nvSpPr>
-        <p:spPr>
-          <a:xfrm>
-            <a:off x="594360" y="3108960"/>
-            <a:ext cx="438912" cy="438912"/>
-          </a:xfrm>
-          <a:prstGeom prst="roundRect">
-            <a:avLst>
-              <a:gd name="adj" fmla="val 12000"/>
-            </a:avLst>
-          </a:prstGeom>
-          <a:solidFill>
-            <a:srgbClr val="095292"/>
-          </a:solidFill>
-          <a:ln>
-            <a:noFill/>
-          </a:ln>
-        </p:spPr>
-        <p:style>
-          <a:lnRef idx="1">
-            <a:schemeClr val="accent1"/>
-          </a:lnRef>
-          <a:fillRef idx="3">
-            <a:schemeClr val="accent1"/>
-          </a:fillRef>
-          <a:effectRef idx="2">
-            <a:schemeClr val="accent1"/>
-          </a:effectRef>
-          <a:fontRef idx="minor">
-            <a:schemeClr val="lt1"/>
-          </a:fontRef>
-        </p:style>
-        <p:txBody>
-          <a:bodyPr rtlCol="0" anchor="ctr"/>
-          <a:lstStyle/>
-          <a:p>
-            <a:pPr algn="ctr"/>
-          </a:p>
-        </p:txBody>
-      </p:sp>
-      <p:sp>
-        <p:nvSpPr>
-          <p:cNvPr id="12" name="TextBox 11"/>
-          <p:cNvSpPr txBox="1"/>
-          <p:nvPr/>
-        </p:nvSpPr>
-        <p:spPr>
-          <a:xfrm>
-            <a:off x="594360" y="3108960"/>
-            <a:ext cx="438912" cy="438912"/>
-          </a:xfrm>
-          <a:prstGeom prst="rect">
-            <a:avLst/>
-          </a:prstGeom>
-          <a:noFill/>
-        </p:spPr>
-        <p:txBody>
-          <a:bodyPr wrap="square" anchor="ctr"/>
-          <a:lstStyle/>
-          <a:p>
-            <a:pPr algn="ctr"/>
-            <a:r>
-              <a:rPr sz="1600" b="1" i="0">
-                <a:solidFill>
-                  <a:srgbClr val="FFFFFF"/>
-                </a:solidFill>
-                <a:latin typeface="Calibri"/>
-              </a:rPr>
-              <a:t>2</a:t>
-            </a:r>
-          </a:p>
-        </p:txBody>
-      </p:sp>
-      <p:sp>
-        <p:nvSpPr>
-          <p:cNvPr id="13" name="TextBox 12"/>
-          <p:cNvSpPr txBox="1"/>
-          <p:nvPr/>
-        </p:nvSpPr>
-        <p:spPr>
-          <a:xfrm>
-            <a:off x="1188720" y="2894076"/>
-            <a:ext cx="10271455" cy="886968"/>
-          </a:xfrm>
-          <a:prstGeom prst="rect">
-            <a:avLst/>
-          </a:prstGeom>
-          <a:noFill/>
-        </p:spPr>
-        <p:txBody>
-          <a:bodyPr wrap="square" anchor="ctr"/>
-          <a:lstStyle/>
-          <a:p>
-            <a:r>
-              <a:rPr sz="1500" b="1" i="0">
-                <a:solidFill>
-                  <a:srgbClr val="095292"/>
-                </a:solidFill>
-                <a:latin typeface="Calibri"/>
-              </a:rPr>
-              <a:t>Traduce con IA</a:t>
+              <a:rPr sz="2000" b="0" i="0">
+                <a:solidFill>
+                  <a:srgbClr val="333333"/>
+                </a:solidFill>
+                <a:latin typeface="Calibri"/>
+              </a:rPr>
+              <a:t>–   El p50, o mediana, es 120; el p99 es 4000.</a:t>
             </a:r>
           </a:p>
           <a:p>
             <a:pPr>
-              <a:spcBef>
-                <a:spcPts val="200"/>
-              </a:spcBef>
+              <a:spcAft>
+                <a:spcPts val="800"/>
+              </a:spcAft>
             </a:pPr>
             <a:r>
-              <a:rPr sz="1300" b="0" i="0">
-                <a:solidFill>
-                  <a:srgbClr val="333333"/>
-                </a:solidFill>
-                <a:latin typeface="Calibri"/>
-              </a:rPr>
-              <a:t>Copia o describe tu boceto a una IA y pidele el codigo Mermaid: «convierte este diagrama a Mermaid usando sequenceDiagram». Revisa el resultado: la IA acierta la sintaxis, no tu modelo.</a:t>
-            </a:r>
-          </a:p>
-        </p:txBody>
-      </p:sp>
-      <p:sp>
-        <p:nvSpPr>
-          <p:cNvPr id="14" name="Rounded Rectangle 13"/>
-          <p:cNvSpPr/>
-          <p:nvPr/>
-        </p:nvSpPr>
-        <p:spPr>
-          <a:xfrm>
-            <a:off x="457200" y="3945636"/>
-            <a:ext cx="11277295" cy="1051560"/>
-          </a:xfrm>
-          <a:prstGeom prst="roundRect">
-            <a:avLst>
-              <a:gd name="adj" fmla="val 12000"/>
-            </a:avLst>
-          </a:prstGeom>
-          <a:solidFill>
-            <a:srgbClr val="F2F2F2"/>
-          </a:solidFill>
-          <a:ln>
-            <a:noFill/>
-          </a:ln>
-        </p:spPr>
-        <p:style>
-          <a:lnRef idx="1">
-            <a:schemeClr val="accent1"/>
-          </a:lnRef>
-          <a:fillRef idx="3">
-            <a:schemeClr val="accent1"/>
-          </a:fillRef>
-          <a:effectRef idx="2">
-            <a:schemeClr val="accent1"/>
-          </a:effectRef>
-          <a:fontRef idx="minor">
-            <a:schemeClr val="lt1"/>
-          </a:fontRef>
-        </p:style>
-        <p:txBody>
-          <a:bodyPr rtlCol="0" anchor="ctr"/>
-          <a:lstStyle/>
-          <a:p>
-            <a:pPr algn="ctr"/>
-          </a:p>
-        </p:txBody>
-      </p:sp>
-      <p:sp>
-        <p:nvSpPr>
-          <p:cNvPr id="15" name="Rounded Rectangle 14"/>
-          <p:cNvSpPr/>
-          <p:nvPr/>
-        </p:nvSpPr>
-        <p:spPr>
-          <a:xfrm>
-            <a:off x="594360" y="4251960"/>
-            <a:ext cx="438912" cy="438912"/>
-          </a:xfrm>
-          <a:prstGeom prst="roundRect">
-            <a:avLst>
-              <a:gd name="adj" fmla="val 12000"/>
-            </a:avLst>
-          </a:prstGeom>
-          <a:solidFill>
-            <a:srgbClr val="095292"/>
-          </a:solidFill>
-          <a:ln>
-            <a:noFill/>
-          </a:ln>
-        </p:spPr>
-        <p:style>
-          <a:lnRef idx="1">
-            <a:schemeClr val="accent1"/>
-          </a:lnRef>
-          <a:fillRef idx="3">
-            <a:schemeClr val="accent1"/>
-          </a:fillRef>
-          <a:effectRef idx="2">
-            <a:schemeClr val="accent1"/>
-          </a:effectRef>
-          <a:fontRef idx="minor">
-            <a:schemeClr val="lt1"/>
-          </a:fontRef>
-        </p:style>
-        <p:txBody>
-          <a:bodyPr rtlCol="0" anchor="ctr"/>
-          <a:lstStyle/>
-          <a:p>
-            <a:pPr algn="ctr"/>
-          </a:p>
-        </p:txBody>
-      </p:sp>
-      <p:sp>
-        <p:nvSpPr>
-          <p:cNvPr id="16" name="TextBox 15"/>
-          <p:cNvSpPr txBox="1"/>
-          <p:nvPr/>
-        </p:nvSpPr>
-        <p:spPr>
-          <a:xfrm>
-            <a:off x="594360" y="4251960"/>
-            <a:ext cx="438912" cy="438912"/>
-          </a:xfrm>
-          <a:prstGeom prst="rect">
-            <a:avLst/>
-          </a:prstGeom>
-          <a:noFill/>
-        </p:spPr>
-        <p:txBody>
-          <a:bodyPr wrap="square" anchor="ctr"/>
-          <a:lstStyle/>
-          <a:p>
-            <a:pPr algn="ctr"/>
-            <a:r>
-              <a:rPr sz="1600" b="1" i="0">
-                <a:solidFill>
-                  <a:srgbClr val="FFFFFF"/>
-                </a:solidFill>
-                <a:latin typeface="Calibri"/>
-              </a:rPr>
-              <a:t>3</a:t>
-            </a:r>
-          </a:p>
-        </p:txBody>
-      </p:sp>
-      <p:sp>
-        <p:nvSpPr>
-          <p:cNvPr id="17" name="TextBox 16"/>
-          <p:cNvSpPr txBox="1"/>
-          <p:nvPr/>
-        </p:nvSpPr>
-        <p:spPr>
-          <a:xfrm>
-            <a:off x="1188720" y="4037076"/>
-            <a:ext cx="10271455" cy="886968"/>
-          </a:xfrm>
-          <a:prstGeom prst="rect">
-            <a:avLst/>
-          </a:prstGeom>
-          <a:noFill/>
-        </p:spPr>
-        <p:txBody>
-          <a:bodyPr wrap="square" anchor="ctr"/>
-          <a:lstStyle/>
-          <a:p>
-            <a:r>
-              <a:rPr sz="1500" b="1" i="0">
-                <a:solidFill>
-                  <a:srgbClr val="095292"/>
-                </a:solidFill>
-                <a:latin typeface="Calibri"/>
-              </a:rPr>
-              <a:t>Pega y renderiza en la plataforma del curso</a:t>
+              <a:rPr sz="2000" b="0" i="0">
+                <a:solidFill>
+                  <a:srgbClr val="333333"/>
+                </a:solidFill>
+                <a:latin typeface="Calibri"/>
+              </a:rPr>
+              <a:t>–   Reportar el promedio esconde a cinco usuarios de cada cien esperando cuatro segundos; reportar p95 y p99 los hace visibles.</a:t>
             </a:r>
           </a:p>
           <a:p>
             <a:pPr>
-              <a:spcBef>
-                <a:spcPts val="200"/>
-              </a:spcBef>
+              <a:spcAft>
+                <a:spcPts val="800"/>
+              </a:spcAft>
             </a:pPr>
             <a:r>
-              <a:rPr sz="1300" b="0" i="0">
-                <a:solidFill>
-                  <a:srgbClr val="333333"/>
-                </a:solidFill>
-                <a:latin typeface="Calibri"/>
-              </a:rPr>
-              <a:t>Pega ese codigo en la caja de texto de la pregunta y mira como lo dibuja la plataforma. Si no renderiza, corrige ahi mismo: lo que se califica es el diagrama renderizado dentro de la plataforma del curso.</a:t>
-            </a:r>
-          </a:p>
-        </p:txBody>
-      </p:sp>
-      <p:sp>
-        <p:nvSpPr>
-          <p:cNvPr id="18" name="Rounded Rectangle 17"/>
-          <p:cNvSpPr/>
-          <p:nvPr/>
-        </p:nvSpPr>
-        <p:spPr>
-          <a:xfrm>
-            <a:off x="457200" y="5088636"/>
-            <a:ext cx="11277295" cy="1051560"/>
-          </a:xfrm>
-          <a:prstGeom prst="roundRect">
-            <a:avLst>
-              <a:gd name="adj" fmla="val 12000"/>
-            </a:avLst>
-          </a:prstGeom>
-          <a:solidFill>
-            <a:srgbClr val="E8F4FA"/>
-          </a:solidFill>
-          <a:ln>
-            <a:noFill/>
-          </a:ln>
-        </p:spPr>
-        <p:style>
-          <a:lnRef idx="1">
-            <a:schemeClr val="accent1"/>
-          </a:lnRef>
-          <a:fillRef idx="3">
-            <a:schemeClr val="accent1"/>
-          </a:fillRef>
-          <a:effectRef idx="2">
-            <a:schemeClr val="accent1"/>
-          </a:effectRef>
-          <a:fontRef idx="minor">
-            <a:schemeClr val="lt1"/>
-          </a:fontRef>
-        </p:style>
-        <p:txBody>
-          <a:bodyPr rtlCol="0" anchor="ctr"/>
-          <a:lstStyle/>
-          <a:p>
-            <a:pPr algn="ctr"/>
-          </a:p>
-        </p:txBody>
-      </p:sp>
-      <p:sp>
-        <p:nvSpPr>
-          <p:cNvPr id="19" name="Rounded Rectangle 18"/>
-          <p:cNvSpPr/>
-          <p:nvPr/>
-        </p:nvSpPr>
-        <p:spPr>
-          <a:xfrm>
-            <a:off x="594360" y="5394960"/>
-            <a:ext cx="438912" cy="438912"/>
-          </a:xfrm>
-          <a:prstGeom prst="roundRect">
-            <a:avLst>
-              <a:gd name="adj" fmla="val 12000"/>
-            </a:avLst>
-          </a:prstGeom>
-          <a:solidFill>
-            <a:srgbClr val="095292"/>
-          </a:solidFill>
-          <a:ln>
-            <a:noFill/>
-          </a:ln>
-        </p:spPr>
-        <p:style>
-          <a:lnRef idx="1">
-            <a:schemeClr val="accent1"/>
-          </a:lnRef>
-          <a:fillRef idx="3">
-            <a:schemeClr val="accent1"/>
-          </a:fillRef>
-          <a:effectRef idx="2">
-            <a:schemeClr val="accent1"/>
-          </a:effectRef>
-          <a:fontRef idx="minor">
-            <a:schemeClr val="lt1"/>
-          </a:fontRef>
-        </p:style>
-        <p:txBody>
-          <a:bodyPr rtlCol="0" anchor="ctr"/>
-          <a:lstStyle/>
-          <a:p>
-            <a:pPr algn="ctr"/>
-          </a:p>
-        </p:txBody>
-      </p:sp>
-      <p:sp>
-        <p:nvSpPr>
-          <p:cNvPr id="20" name="TextBox 19"/>
-          <p:cNvSpPr txBox="1"/>
-          <p:nvPr/>
-        </p:nvSpPr>
-        <p:spPr>
-          <a:xfrm>
-            <a:off x="594360" y="5394960"/>
-            <a:ext cx="438912" cy="438912"/>
-          </a:xfrm>
-          <a:prstGeom prst="rect">
-            <a:avLst/>
-          </a:prstGeom>
-          <a:noFill/>
-        </p:spPr>
-        <p:txBody>
-          <a:bodyPr wrap="square" anchor="ctr"/>
-          <a:lstStyle/>
-          <a:p>
-            <a:pPr algn="ctr"/>
-            <a:r>
-              <a:rPr sz="1600" b="1" i="0">
-                <a:solidFill>
-                  <a:srgbClr val="FFFFFF"/>
-                </a:solidFill>
-                <a:latin typeface="Calibri"/>
-              </a:rPr>
-              <a:t>4</a:t>
-            </a:r>
-          </a:p>
-        </p:txBody>
-      </p:sp>
-      <p:sp>
-        <p:nvSpPr>
-          <p:cNvPr id="21" name="TextBox 20"/>
-          <p:cNvSpPr txBox="1"/>
-          <p:nvPr/>
-        </p:nvSpPr>
-        <p:spPr>
-          <a:xfrm>
-            <a:off x="1188720" y="5180076"/>
-            <a:ext cx="10271455" cy="886968"/>
-          </a:xfrm>
-          <a:prstGeom prst="rect">
-            <a:avLst/>
-          </a:prstGeom>
-          <a:noFill/>
-        </p:spPr>
-        <p:txBody>
-          <a:bodyPr wrap="square" anchor="ctr"/>
-          <a:lstStyle/>
-          <a:p>
-            <a:r>
-              <a:rPr sz="1500" b="1" i="0">
-                <a:solidFill>
-                  <a:srgbClr val="095292"/>
-                </a:solidFill>
-                <a:latin typeface="Calibri"/>
-              </a:rPr>
-              <a:t>Guarda el PNG para tu PI</a:t>
+              <a:rPr sz="2000" b="0" i="0">
+                <a:solidFill>
+                  <a:srgbClr val="333333"/>
+                </a:solidFill>
+                <a:latin typeface="Calibri"/>
+              </a:rPr>
+              <a:t>–   Por eso la industria escribe sus objetivos en percentiles, y por eso el entregable de hoy exige un objetivo con la forma "p95 del endpoint de listado menor a 300 milisegundos con 5 RPS", que tiene metrica, umbral y condicion de carga.</a:t>
             </a:r>
           </a:p>
           <a:p>
             <a:pPr>
-              <a:spcBef>
-                <a:spcPts val="200"/>
-              </a:spcBef>
+              <a:spcAft>
+                <a:spcPts val="800"/>
+              </a:spcAft>
             </a:pPr>
             <a:r>
-              <a:rPr sz="1300" b="0" i="0">
-                <a:solidFill>
-                  <a:srgbClr val="333333"/>
-                </a:solidFill>
-                <a:latin typeface="Calibri"/>
-              </a:rPr>
-              <a:t>Exporta tambien la imagen a la carpeta de tu Proyecto Integrador. Esa copia es para tu informe; no reemplaza la respuesta en la plataforma.</a:t>
-            </a:r>
-          </a:p>
-        </p:txBody>
-      </p:sp>
-      <p:sp>
-        <p:nvSpPr>
-          <p:cNvPr id="22" name="TextBox 21"/>
+              <a:rPr sz="2000" b="0" i="0">
+                <a:solidFill>
+                  <a:srgbClr val="333333"/>
+                </a:solidFill>
+                <a:latin typeface="Calibri"/>
+              </a:rPr>
+              <a:t>–   Un objetivo sin condicion de carga no significa nada: cualquier sistema es rapido sin usuarios.</a:t>
+            </a:r>
+          </a:p>
+        </p:txBody>
+      </p:sp>
+      <p:sp>
+        <p:nvSpPr>
+          <p:cNvPr id="6" name="TextBox 5"/>
           <p:cNvSpPr txBox="1"/>
           <p:nvPr/>
         </p:nvSpPr>

--- a/Arquitectura de Sistemas Computacionales/Clases/Clase 12 - Pruebas de rendimiento y preparacion final/Presentacion.pptx
+++ b/Arquitectura de Sistemas Computacionales/Clases/Clase 12 - Pruebas de rendimiento y preparacion final/Presentacion.pptx
@@ -32,6 +32,9 @@
     <p:sldId id="280" r:id="rId31"/>
     <p:sldId id="281" r:id="rId32"/>
     <p:sldId id="282" r:id="rId33"/>
+    <p:sldId id="283" r:id="rId34"/>
+    <p:sldId id="284" r:id="rId35"/>
+    <p:sldId id="285" r:id="rId36"/>
   </p:sldIdLst>
   <p:sldSz cx="12191695" cy="6858000" type="screen4x3"/>
   <p:notesSz cx="6858000" cy="9144000"/>
@@ -3590,7 +3593,7 @@
                 </a:solidFill>
                 <a:latin typeface="Calibri"/>
               </a:rPr>
-              <a:t>Los umbrales de percepcion, y por que son convenciones (1/2)</a:t>
+              <a:t>Por que el promedio miente y el percentil no (2/2)</a:t>
             </a:r>
           </a:p>
         </p:txBody>
@@ -3629,7 +3632,7 @@
                 </a:solidFill>
                 <a:latin typeface="Calibri"/>
               </a:rPr>
-              <a:t>–   Por debajo de unos 100 milisegundos la respuesta se percibe instantanea; hasta cerca de 1 segundo el usuario mantiene el hilo aunque note la demora; pasados unos 10 segundos pierde la atencion y cambia de tarea o recarga.</a:t>
+              <a:t>–   El promedio es 314 milisegundos, una cifra que suena aceptable y que no le paso a nadie: ninguna peticion real tardo 314 milisegundos.</a:t>
             </a:r>
           </a:p>
           <a:p>
@@ -3645,7 +3648,7 @@
                 </a:solidFill>
                 <a:latin typeface="Calibri"/>
               </a:rPr>
-              <a:t>–   De ahi sale la convencion practica para una API interna, que ubica el objetivo de p95 entre 200 y 300 milisegundos dejando presupuesto para que el navegador y la red agreguen lo suyo</a:t>
+              <a:t>–   El p50, o mediana, es 120; el p99 es 4000.</a:t>
             </a:r>
           </a:p>
           <a:p>
@@ -3661,7 +3664,7 @@
                 </a:solidFill>
                 <a:latin typeface="Calibri"/>
               </a:rPr>
-              <a:t>–   Para carga de pagina completa la referencia publica de Core Web Vitals considera bueno un renderizado del contenido principal por debajo de 2.5 segundos.</a:t>
+              <a:t>–   Reportar el promedio esconde a cinco usuarios de cada cien esperando cuatro segundos; reportar p95 y p99 los hace visibles.</a:t>
             </a:r>
           </a:p>
           <a:p>
@@ -3677,23 +3680,7 @@
                 </a:solidFill>
                 <a:latin typeface="Calibri"/>
               </a:rPr>
-              <a:t>–   Ninguna es regla dura: un reporte pesado puede tener un objetivo legitimo de 3 segundos y un autocompletado necesita estar bajo 100.</a:t>
-            </a:r>
-          </a:p>
-          <a:p>
-            <a:pPr>
-              <a:spcAft>
-                <a:spcPts val="800"/>
-              </a:spcAft>
-            </a:pPr>
-            <a:r>
-              <a:rPr sz="2000" b="0" i="0">
-                <a:solidFill>
-                  <a:srgbClr val="333333"/>
-                </a:solidFill>
-                <a:latin typeface="Calibri"/>
-              </a:rPr>
-              <a:t>–   Lo que si es regla es que el numero se escribe antes de medir y se justifica con el caso de uso, no se ajusta despues para que la medicion salga bien.</a:t>
+              <a:t>–   Un objetivo sin condicion de carga no significa nada: cualquier sistema es rapido sin usuarios.</a:t>
             </a:r>
           </a:p>
         </p:txBody>
@@ -3874,7 +3861,7 @@
                 </a:solidFill>
                 <a:latin typeface="Calibri"/>
               </a:rPr>
-              <a:t>Los umbrales de percepcion, y por que son convenciones (2/2)</a:t>
+              <a:t>Los umbrales de percepcion, y por que son convenciones (1/2)</a:t>
             </a:r>
           </a:p>
         </p:txBody>
@@ -3913,7 +3900,7 @@
                 </a:solidFill>
                 <a:latin typeface="Calibri"/>
               </a:rPr>
-              <a:t>–   Junto al tiempo va siempre la tasa de error, el porcentaje de peticiones que fallan, porque un sistema que responde rapido devolviendo errores no cumple.</a:t>
+              <a:t>–   Por debajo de unos 100 milisegundos la respuesta se percibe instantanea; hasta cerca de 1 segundo el usuario mantiene el hilo aunque note la demora; pasados unos 10 segundos pierde la atencion y cambia de tarea o recarga.</a:t>
             </a:r>
           </a:p>
           <a:p>
@@ -3929,7 +3916,7 @@
                 </a:solidFill>
                 <a:latin typeface="Calibri"/>
               </a:rPr>
-              <a:t>–   Aqui aparecen tres siglas: el SLI es el indicador que se mide, el SLO es el objetivo interno que el equipo se compromete a cumplir y el SLA es el compromiso contractual con penalidad.</a:t>
+              <a:t>–   Ninguna es regla dura: un reporte pesado puede tener un objetivo legitimo de 3 segundos y un autocompletado necesita estar bajo 100.</a:t>
             </a:r>
           </a:p>
           <a:p>
@@ -3945,23 +3932,7 @@
                 </a:solidFill>
                 <a:latin typeface="Calibri"/>
               </a:rPr>
-              <a:t>–   Un SLO de 99.9 por ciento de disponibilidad, los "tres nueves", admite unos 43 minutos de caida al mes; el 99.99 baja a poco mas de 4 minutos</a:t>
-            </a:r>
-          </a:p>
-          <a:p>
-            <a:pPr>
-              <a:spcAft>
-                <a:spcPts val="800"/>
-              </a:spcAft>
-            </a:pPr>
-            <a:r>
-              <a:rPr sz="2000" b="0" i="0">
-                <a:solidFill>
-                  <a:srgbClr val="333333"/>
-                </a:solidFill>
-                <a:latin typeface="Calibri"/>
-              </a:rPr>
-              <a:t>–   Y esa diferencia de un decimal suele multiplicar el costo de la arquitectura, lo que amarra con la tabla de la Clase 10.</a:t>
+              <a:t>–   Junto al tiempo va siempre la tasa de error, el porcentaje de peticiones que fallan, porque un sistema que responde rapido devolviendo errores no cumple.</a:t>
             </a:r>
           </a:p>
         </p:txBody>
@@ -4142,7 +4113,7 @@
                 </a:solidFill>
                 <a:latin typeface="Calibri"/>
               </a:rPr>
-              <a:t>El escenario de carga: aritmetica de servilleta</a:t>
+              <a:t>Los umbrales de percepcion, y por que son convenciones (2/2)</a:t>
             </a:r>
           </a:p>
         </p:txBody>
@@ -4181,7 +4152,7 @@
                 </a:solidFill>
                 <a:latin typeface="Calibri"/>
               </a:rPr>
-              <a:t>–   El segundo componente del entregable es el escenario de carga, y el estudiante casi siempre lo inventa exagerado.</a:t>
+              <a:t>–   Aqui aparecen tres siglas: el SLI es el indicador que se mide, el SLO es el objetivo interno que el equipo se compromete a cumplir y el SLA es el compromiso contractual con penalidad.</a:t>
             </a:r>
           </a:p>
           <a:p>
@@ -4197,7 +4168,7 @@
                 </a:solidFill>
                 <a:latin typeface="Calibri"/>
               </a:rPr>
-              <a:t>–   Suponga 1000 usuarios activos al dia, cada uno con unas 20 peticiones en su sesion: son 20000 peticiones diarias.</a:t>
+              <a:t>–   Un SLO de 99.9 por ciento de disponibilidad, los "tres nueves", admite unos 43 minutos de caida al mes; el 99.99 baja a poco mas de 4 minutos</a:t>
             </a:r>
           </a:p>
           <a:p>
@@ -4213,55 +4184,7 @@
                 </a:solidFill>
                 <a:latin typeface="Calibri"/>
               </a:rPr>
-              <a:t>–   Si un 40 por ciento cae en una ventana de dos horas, eso es 8000 peticiones en 7200 segundos, algo mas de 1 RPS promedio en la hora pico.</a:t>
-            </a:r>
-          </a:p>
-          <a:p>
-            <a:pPr>
-              <a:spcAft>
-                <a:spcPts val="800"/>
-              </a:spcAft>
-            </a:pPr>
-            <a:r>
-              <a:rPr sz="2000" b="0" i="0">
-                <a:solidFill>
-                  <a:srgbClr val="333333"/>
-                </a:solidFill>
-                <a:latin typeface="Calibri"/>
-              </a:rPr>
-              <a:t>–   Como el trafico real llega en rafagas, se aplica un factor de pico de 3 a 5 veces y se dimensiona para unos 5 RPS.</a:t>
-            </a:r>
-          </a:p>
-          <a:p>
-            <a:pPr>
-              <a:spcAft>
-                <a:spcPts val="800"/>
-              </a:spcAft>
-            </a:pPr>
-            <a:r>
-              <a:rPr sz="2000" b="0" i="0">
-                <a:solidFill>
-                  <a:srgbClr val="333333"/>
-                </a:solidFill>
-                <a:latin typeface="Calibri"/>
-              </a:rPr>
-              <a:t>–   Ese numero es el que debe aparecer en el informe, y es un orden de magnitud tres mil veces menor que los "10000 RPS" que algun estudiante escribira por sonar ambicioso.</a:t>
-            </a:r>
-          </a:p>
-          <a:p>
-            <a:pPr>
-              <a:spcAft>
-                <a:spcPts val="800"/>
-              </a:spcAft>
-            </a:pPr>
-            <a:r>
-              <a:rPr sz="2000" b="0" i="0">
-                <a:solidFill>
-                  <a:srgbClr val="333333"/>
-                </a:solidFill>
-                <a:latin typeface="Calibri"/>
-              </a:rPr>
-              <a:t>–   La leccion es doble: un objetivo de rendimiento sin cuenta de sobre es marketing y no ingenieria, y dimensionar para 5 RPS en vez de 10000 es justamente lo que evita el sobreaprovisionamiento que la Clase 10 senalo como desperdicio.</a:t>
+              <a:t>–   Y esa diferencia de un decimal suele multiplicar el costo de la arquitectura, lo que amarra con la tabla de la Clase 10.</a:t>
             </a:r>
           </a:p>
         </p:txBody>
@@ -4442,7 +4365,7 @@
                 </a:solidFill>
                 <a:latin typeface="Calibri"/>
               </a:rPr>
-              <a:t>El cuello de botella: siempre hay uno (1/2)</a:t>
+              <a:t>El escenario de carga: aritmetica de servilleta (1/2)</a:t>
             </a:r>
           </a:p>
         </p:txBody>
@@ -4481,7 +4404,7 @@
                 </a:solidFill>
                 <a:latin typeface="Calibri"/>
               </a:rPr>
-              <a:t>–   El tercer componente es el bottleneck, o cuello de botella: el componente que se agota primero y limita el rendimiento de todo el sistema.</a:t>
+              <a:t>–   El segundo componente del entregable es el escenario de carga, y el estudiante casi siempre lo inventa exagerado.</a:t>
             </a:r>
           </a:p>
           <a:p>
@@ -4497,7 +4420,7 @@
                 </a:solidFill>
                 <a:latin typeface="Calibri"/>
               </a:rPr>
-              <a:t>–   La afirmacion fuerte, que conviene decir tal cual, es que en cualquier instante hay exactamente un cuello de botella; "todo esta lento" nunca es un diagnostico, es la ausencia de uno.</a:t>
+              <a:t>–   Suponga 1000 usuarios activos al dia, cada uno con unas 20 peticiones en su sesion: son 20000 peticiones diarias.</a:t>
             </a:r>
           </a:p>
           <a:p>
@@ -4513,7 +4436,7 @@
                 </a:solidFill>
                 <a:latin typeface="Calibri"/>
               </a:rPr>
-              <a:t>–   Se localiza con las senales doradas de la Clase 8, en particular la saturacion, mirando cual recurso esta cerca de su limite mientras los demas estan holgados.</a:t>
+              <a:t>–   Si un 40 por ciento cae en una ventana de dos horas, eso es 8000 peticiones en 7200 segundos, algo mas de 1 RPS promedio en la hora pico.</a:t>
             </a:r>
           </a:p>
           <a:p>
@@ -4529,23 +4452,7 @@
                 </a:solidFill>
                 <a:latin typeface="Calibri"/>
               </a:rPr>
-              <a:t>–   En CloudLite los candidatos son pocos y reconocibles.</a:t>
-            </a:r>
-          </a:p>
-          <a:p>
-            <a:pPr>
-              <a:spcAft>
-                <a:spcPts val="800"/>
-              </a:spcAft>
-            </a:pPr>
-            <a:r>
-              <a:rPr sz="2000" b="0" i="0">
-                <a:solidFill>
-                  <a:srgbClr val="333333"/>
-                </a:solidFill>
-                <a:latin typeface="Calibri"/>
-              </a:rPr>
-              <a:t>–   El primero es el problema N mas 1 en el endpoint de listado: la API pide la lista con una consulta y luego, dentro del ciclo, hace una consulta adicional por cada registro para traer un dato relacionado</a:t>
+              <a:t>–   Como el trafico real llega en rafagas, se aplica un factor de pico de 3 a 5 veces y se dimensiona para unos 5 RPS.</a:t>
             </a:r>
           </a:p>
         </p:txBody>
@@ -4726,7 +4633,7 @@
                 </a:solidFill>
                 <a:latin typeface="Calibri"/>
               </a:rPr>
-              <a:t>El cuello de botella: siempre hay uno (2/2)</a:t>
+              <a:t>El escenario de carga: aritmetica de servilleta (2/2)</a:t>
             </a:r>
           </a:p>
         </p:txBody>
@@ -4765,7 +4672,7 @@
                 </a:solidFill>
                 <a:latin typeface="Calibri"/>
               </a:rPr>
-              <a:t>–   Con 50 registros son 51 viajes a la base de datos y el tiempo se va en latencia de red acumulada, no en CPU.</a:t>
+              <a:t>–   Ese numero es el que debe aparecer en el informe, y es un orden de magnitud tres mil veces menor que los "10000 RPS" que algun estudiante escribira por sonar ambicioso.</a:t>
             </a:r>
           </a:p>
           <a:p>
@@ -4781,39 +4688,7 @@
                 </a:solidFill>
                 <a:latin typeface="Calibri"/>
               </a:rPr>
-              <a:t>–   El segundo es el pool de conexiones: si el pool tiene 10 conexiones y llegan 40 peticiones concurrentes, 30 esperan turno y la latencia se dispara aunque la CPU de la API y la de la base de datos esten al 20 por ciento.</a:t>
-            </a:r>
-          </a:p>
-          <a:p>
-            <a:pPr>
-              <a:spcAft>
-                <a:spcPts val="800"/>
-              </a:spcAft>
-            </a:pPr>
-            <a:r>
-              <a:rPr sz="2000" b="0" i="0">
-                <a:solidFill>
-                  <a:srgbClr val="333333"/>
-                </a:solidFill>
-                <a:latin typeface="Calibri"/>
-              </a:rPr>
-              <a:t>–   El tercero, si CloudLite envia notificaciones de forma sincronica dentro de la peticion, es el proveedor externo: el usuario espera a que un tercero responda, y la mitigacion no es mas CPU sino sacar el envio de la ruta critica hacia una cola.</a:t>
-            </a:r>
-          </a:p>
-          <a:p>
-            <a:pPr>
-              <a:spcAft>
-                <a:spcPts val="800"/>
-              </a:spcAft>
-            </a:pPr>
-            <a:r>
-              <a:rPr sz="2000" b="0" i="0">
-                <a:solidFill>
-                  <a:srgbClr val="333333"/>
-                </a:solidFill>
-                <a:latin typeface="Calibri"/>
-              </a:rPr>
-              <a:t>–   Esos tres cubren la mayoria de los casos que los estudiantes van a sospechar.</a:t>
+              <a:t>–   La leccion es doble: un objetivo de rendimiento sin cuenta de sobre es marketing y no ingenieria, y dimensionar para 5 RPS en vez de 10000 es justamente lo que evita el sobreaprovisionamiento que la Clase 10 senalo como desperdicio.</a:t>
             </a:r>
           </a:p>
         </p:txBody>
@@ -4994,7 +4869,7 @@
                 </a:solidFill>
                 <a:latin typeface="Calibri"/>
               </a:rPr>
-              <a:t>Los tipos de prueba, por la pregunta que responden (1/2)</a:t>
+              <a:t>El cuello de botella: siempre hay uno (1/2)</a:t>
             </a:r>
           </a:p>
         </p:txBody>
@@ -5033,7 +4908,7 @@
                 </a:solidFill>
                 <a:latin typeface="Calibri"/>
               </a:rPr>
-              <a:t>–   Los tipos de prueba se distinguen por la pregunta que responden.</a:t>
+              <a:t>–   El tercer componente es el bottleneck, o cuello de botella: el componente que se agota primero y limita el rendimiento de todo el sistema.</a:t>
             </a:r>
           </a:p>
           <a:p>
@@ -5049,7 +4924,7 @@
                 </a:solidFill>
                 <a:latin typeface="Calibri"/>
               </a:rPr>
-              <a:t>–   La prueba de carga o baseline aplica la carga esperada y responde si el sistema cumple el SLO en condiciones normales.</a:t>
+              <a:t>–   La afirmacion fuerte, que conviene decir tal cual, es que en cualquier instante hay exactamente un cuello de botella; "todo esta lento" nunca es un diagnostico, es la ausencia de uno.</a:t>
             </a:r>
           </a:p>
           <a:p>
@@ -5065,7 +4940,7 @@
                 </a:solidFill>
                 <a:latin typeface="Calibri"/>
               </a:rPr>
-              <a:t>–   La prueba de estres sube la carga de forma progresiva hasta que el sistema se degrada o se rompe</a:t>
+              <a:t>–   Se localiza con las senales doradas de la Clase 8, en particular la saturacion, mirando cual recurso esta cerca de su limite mientras los demas estan holgados.</a:t>
             </a:r>
           </a:p>
           <a:p>
@@ -5081,7 +4956,7 @@
                 </a:solidFill>
                 <a:latin typeface="Calibri"/>
               </a:rPr>
-              <a:t>–   Y responde cual es la capacidad maxima y como se comporta al fallar; el dato interesante no es el punto de quiebre sino la forma de la falla, porque degradarse respondiendo lento es aceptable y caerse por completo no.</a:t>
+              <a:t>–   En CloudLite los candidatos son pocos y reconocibles.</a:t>
             </a:r>
           </a:p>
           <a:p>
@@ -5097,23 +4972,7 @@
                 </a:solidFill>
                 <a:latin typeface="Calibri"/>
               </a:rPr>
-              <a:t>–   La prueba de picos, o spike test, aplica una subida subita y grande simulando una promocion o una noticia viral</a:t>
-            </a:r>
-          </a:p>
-          <a:p>
-            <a:pPr>
-              <a:spcAft>
-                <a:spcPts val="800"/>
-              </a:spcAft>
-            </a:pPr>
-            <a:r>
-              <a:rPr sz="2000" b="0" i="0">
-                <a:solidFill>
-                  <a:srgbClr val="333333"/>
-                </a:solidFill>
-                <a:latin typeface="Calibri"/>
-              </a:rPr>
-              <a:t>–   Y responde si el sistema reacciona a tiempo; anticipa el limite del autoescalado de la Clase 13, porque arrancar una instancia toma decenas de segundos y un pico mas rapido golpea antes de que llegue la ayuda.</a:t>
+              <a:t>–   El primero es el problema N mas 1 en el endpoint de listado: la API pide la lista con una consulta y luego, dentro del ciclo, hace una consulta adicional por cada registro para traer un dato relacionado</a:t>
             </a:r>
           </a:p>
         </p:txBody>
@@ -5294,7 +5153,7 @@
                 </a:solidFill>
                 <a:latin typeface="Calibri"/>
               </a:rPr>
-              <a:t>Los tipos de prueba, por la pregunta que responden (2/2)</a:t>
+              <a:t>El cuello de botella: siempre hay uno (2/2)</a:t>
             </a:r>
           </a:p>
         </p:txBody>
@@ -5333,7 +5192,7 @@
                 </a:solidFill>
                 <a:latin typeface="Calibri"/>
               </a:rPr>
-              <a:t>–   La prueba de resistencia, o soak, mantiene carga moderada durante horas y responde si hay fugas de memoria o conexiones que no se liberan; con menos de una hora no se detecta nada y de 2 a 4 horas es lo tipico.</a:t>
+              <a:t>–   Con 50 registros son 51 viajes a la base de datos y el tiempo se va en latencia de red acumulada, no en CPU.</a:t>
             </a:r>
           </a:p>
           <a:p>
@@ -5349,7 +5208,7 @@
                 </a:solidFill>
                 <a:latin typeface="Calibri"/>
               </a:rPr>
-              <a:t>–   No se necesita ninguna herramienta de pago: en Killercoda se puede lanzar un contenedor con k6, hey o Apache Bench y golpear el stub del servicio, y si el lab no carga, el escenario se documenta en papel con la aritmetica de arriba.</a:t>
+              <a:t>–   El segundo es el pool de conexiones: si el pool tiene 10 conexiones y llegan 40 peticiones concurrentes, 30 esperan turno y la latencia se dispara aunque la CPU de la API y la de la base de datos esten al 20 por ciento.</a:t>
             </a:r>
           </a:p>
           <a:p>
@@ -5365,7 +5224,7 @@
                 </a:solidFill>
                 <a:latin typeface="Calibri"/>
               </a:rPr>
-              <a:t>–   Un escenario bien razonado sin ejecucion vale mas que una ejecucion sin objetivo.</a:t>
+              <a:t>–   El tercero, si CloudLite envia notificaciones de forma sincronica dentro de la peticion, es el proveedor externo: el usuario espera a que un tercero responda, y la mitigacion no es mas CPU sino sacar el envio de la ruta critica hacia una cola.</a:t>
             </a:r>
           </a:p>
         </p:txBody>
@@ -5546,7 +5405,7 @@
                 </a:solidFill>
                 <a:latin typeface="Calibri"/>
               </a:rPr>
-              <a:t>El ensayo del pitch: la segunda mitad tiene su propia teoria (1/2)</a:t>
+              <a:t>Los tipos de prueba, por la pregunta que responden (1/2)</a:t>
             </a:r>
           </a:p>
         </p:txBody>
@@ -5585,7 +5444,7 @@
                 </a:solidFill>
                 <a:latin typeface="Calibri"/>
               </a:rPr>
-              <a:t>–   La segunda mitad de la clase es el ensayo del pitch y tiene su propia teoria.</a:t>
+              <a:t>–   La prueba de estres sube la carga de forma progresiva hasta que el sistema se degrada o se rompe</a:t>
             </a:r>
           </a:p>
           <a:p>
@@ -5601,7 +5460,7 @@
                 </a:solidFill>
                 <a:latin typeface="Calibri"/>
               </a:rPr>
-              <a:t>–   Cinco a ocho minutos son entre 700 y 1000 palabras habladas, lo que alcanza para siete u ocho ideas y no mas, asi que el guion se escribe por presupuesto de tiempo: unos 45 segundos para el problema y el usuario</a:t>
+              <a:t>–   Y responde cual es la capacidad maxima y como se comporta al fallar; el dato interesante no es el punto de quiebre sino la forma de la falla, porque degradarse respondiendo lento es aceptable y caerse por completo no.</a:t>
             </a:r>
           </a:p>
           <a:p>
@@ -5617,7 +5476,7 @@
                 </a:solidFill>
                 <a:latin typeface="Calibri"/>
               </a:rPr>
-              <a:t>–   60 para el diagrama de Contexto, 90 para los Contenedores y las decisiones que los separan, 60 para seguridad y despliegue, 45 para el pipeline y las metricas, 45 para costos y escalabilidad, y 30 de cierre.</a:t>
+              <a:t>–   La prueba de picos, o spike test, aplica una subida subita y grande simulando una promocion o una noticia viral</a:t>
             </a:r>
           </a:p>
           <a:p>
@@ -5633,7 +5492,7 @@
                 </a:solidFill>
                 <a:latin typeface="Calibri"/>
               </a:rPr>
-              <a:t>–   La regla de oro del pitch de arquitectura es que se presentan decisiones con su trade-off, no un recorrido por las cajas del diagrama: "elegimos base de datos gestionada aunque cuesta el doble</a:t>
+              <a:t>–   Y responde si el sistema reacciona a tiempo; anticipa el limite del autoescalado de la Clase 13, porque arrancar una instancia toma decenas de segundos y un pico mas rapido golpea antes de que llegue la ayuda.</a:t>
             </a:r>
           </a:p>
         </p:txBody>
@@ -5814,7 +5673,7 @@
                 </a:solidFill>
                 <a:latin typeface="Calibri"/>
               </a:rPr>
-              <a:t>El ensayo del pitch: la segunda mitad tiene su propia teoria (2/2)</a:t>
+              <a:t>Los tipos de prueba, por la pregunta que responden (2/2)</a:t>
             </a:r>
           </a:p>
         </p:txBody>
@@ -5853,7 +5712,7 @@
                 </a:solidFill>
                 <a:latin typeface="Calibri"/>
               </a:rPr>
-              <a:t>–   Porque no podemos garantizar respaldos manuales" es una frase de arquitecto; "aqui tenemos una base de datos" es una leyenda de imagen.</a:t>
+              <a:t>–   La prueba de resistencia, o soak, mantiene carga moderada durante horas y responde si hay fugas de memoria o conexiones que no se liberan; con menos de una hora no se detecta nada y de 2 a 4 horas es lo tipico.</a:t>
             </a:r>
           </a:p>
           <a:p>
@@ -5869,23 +5728,7 @@
                 </a:solidFill>
                 <a:latin typeface="Calibri"/>
               </a:rPr>
-              <a:t>–   Se ensaya hoy con cronometro y en voz alta, porque leer mentalmente siempre da la mitad del tiempo real</a:t>
-            </a:r>
-          </a:p>
-          <a:p>
-            <a:pPr>
-              <a:spcAft>
-                <a:spcPts val="800"/>
-              </a:spcAft>
-            </a:pPr>
-            <a:r>
-              <a:rPr sz="2000" b="0" i="0">
-                <a:solidFill>
-                  <a:srgbClr val="333333"/>
-                </a:solidFill>
-                <a:latin typeface="Calibri"/>
-              </a:rPr>
-              <a:t>–   Y sin leer las diapositivas, ya que en la Clase 15 el criterio es que quien sustenta pueda explicar cualquier parte del sistema; si el docente autorizo equipos, se ensaya ademas con rotacion de expositor, porque alli el criterio aplica a cualquier integrante.</a:t>
+              <a:t>–   No se necesita ninguna herramienta de pago: en Killercoda se puede lanzar un contenedor con k6, hey o Apache Bench y golpear el stub del servicio, y si el lab no carga, el escenario se documenta en papel con la aritmetica de arriba.</a:t>
             </a:r>
           </a:p>
         </p:txBody>
@@ -6066,7 +5909,7 @@
                 </a:solidFill>
                 <a:latin typeface="Calibri"/>
               </a:rPr>
-              <a:t>Preguntas frecuentes y cierre conceptual () (1/2)</a:t>
+              <a:t>El ensayo del pitch: la segunda mitad tiene su propia teoria (1/2)</a:t>
             </a:r>
           </a:p>
         </p:txBody>
@@ -6099,13 +5942,13 @@
               </a:spcAft>
             </a:pPr>
             <a:r>
-              <a:rPr sz="1900" b="0" i="0">
+              <a:rPr sz="2000" b="0" i="0">
                 <a:solidFill>
                   <a:srgbClr val="333333"/>
                 </a:solidFill>
                 <a:latin typeface="Calibri"/>
               </a:rPr>
-              <a:t>–   La primera es como se prueba rendimiento sin usuarios reales; la respuesta es que la carga se simula y que lo valioso no es el numero obtenido sino el modelo: si el estudiante puede decir cuantos usuarios, cuantas peticiones por usuario</a:t>
+              <a:t>–   La segunda mitad de la clase es el ensayo del pitch y tiene su propia teoria.</a:t>
             </a:r>
           </a:p>
           <a:p>
@@ -6115,13 +5958,13 @@
               </a:spcAft>
             </a:pPr>
             <a:r>
-              <a:rPr sz="1900" b="0" i="0">
+              <a:rPr sz="2000" b="0" i="0">
                 <a:solidFill>
                   <a:srgbClr val="333333"/>
                 </a:solidFill>
                 <a:latin typeface="Calibri"/>
               </a:rPr>
-              <a:t>–   Que factor de pico y que componente cree que cede primero, ya esta haciendo ingenieria de rendimiento aunque el sistema sea un stub.</a:t>
+              <a:t>–   Cinco a ocho minutos son entre 700 y 1000 palabras habladas, lo que alcanza para siete u ocho ideas y no mas, asi que el guion se escribe por presupuesto de tiempo: unos 45 segundos para el problema y el usuario</a:t>
             </a:r>
           </a:p>
           <a:p>
@@ -6131,13 +5974,13 @@
               </a:spcAft>
             </a:pPr>
             <a:r>
-              <a:rPr sz="1900" b="0" i="0">
+              <a:rPr sz="2000" b="0" i="0">
                 <a:solidFill>
                   <a:srgbClr val="333333"/>
                 </a:solidFill>
                 <a:latin typeface="Calibri"/>
               </a:rPr>
-              <a:t>–   La segunda es si no basta con decir que se usara cache; la respuesta es que una mitigacion sin medicion es una creencia</a:t>
+              <a:t>–   60 para el diagrama de Contexto, 90 para los Contenedores y las decisiones que los separan, 60 para seguridad y despliegue, 45 para el pipeline y las metricas, 45 para costos y escalabilidad, y 30 de cierre.</a:t>
             </a:r>
           </a:p>
           <a:p>
@@ -6147,61 +5990,13 @@
               </a:spcAft>
             </a:pPr>
             <a:r>
-              <a:rPr sz="1900" b="0" i="0">
+              <a:rPr sz="2000" b="0" i="0">
                 <a:solidFill>
                   <a:srgbClr val="333333"/>
                 </a:solidFill>
                 <a:latin typeface="Calibri"/>
               </a:rPr>
-              <a:t>–   Y que la pregunta correcta es cache de que, con que tiempo de vida, que porcentaje de aciertos se espera y que pasa cuando el dato cambia, porque una cache mal invalidada convierte un problema de lentitud en un problema de datos incorrectos, que es peor.</a:t>
-            </a:r>
-          </a:p>
-          <a:p>
-            <a:pPr>
-              <a:spcAft>
-                <a:spcPts val="800"/>
-              </a:spcAft>
-            </a:pPr>
-            <a:r>
-              <a:rPr sz="1900" b="0" i="0">
-                <a:solidFill>
-                  <a:srgbClr val="333333"/>
-                </a:solidFill>
-                <a:latin typeface="Calibri"/>
-              </a:rPr>
-              <a:t>–   La tercera es cual es un buen p95, y la respuesta debe resistir la tentacion de dar una cifra universal: depende del caso de uso</a:t>
-            </a:r>
-          </a:p>
-          <a:p>
-            <a:pPr>
-              <a:spcAft>
-                <a:spcPts val="800"/>
-              </a:spcAft>
-            </a:pPr>
-            <a:r>
-              <a:rPr sz="1900" b="0" i="0">
-                <a:solidFill>
-                  <a:srgbClr val="333333"/>
-                </a:solidFill>
-                <a:latin typeface="Calibri"/>
-              </a:rPr>
-              <a:t>–   Y el criterio es que el numero este justificado y sea alcanzable con la arquitectura dibujada</a:t>
-            </a:r>
-          </a:p>
-          <a:p>
-            <a:pPr>
-              <a:spcAft>
-                <a:spcPts val="800"/>
-              </a:spcAft>
-            </a:pPr>
-            <a:r>
-              <a:rPr sz="1900" b="0" i="0">
-                <a:solidFill>
-                  <a:srgbClr val="333333"/>
-                </a:solidFill>
-                <a:latin typeface="Calibri"/>
-              </a:rPr>
-              <a:t>–   Quien promete p95 de 50 milisegundos con una consulta que recorre toda la tabla tiene un objetivo incoherente, y eso es un hallazgo mas grave que tener un objetivo modesto.</a:t>
+              <a:t>–   La regla de oro del pitch de arquitectura es que se presentan decisiones con su trade-off, no un recorrido por las cajas del diagrama: "elegimos base de datos gestionada aunque cuesta el doble</a:t>
             </a:r>
           </a:p>
         </p:txBody>
@@ -6729,7 +6524,7 @@
                 </a:solidFill>
                 <a:latin typeface="Calibri"/>
               </a:rPr>
-              <a:t>Preguntas frecuentes y cierre conceptual () (2/2)</a:t>
+              <a:t>El ensayo del pitch: la segunda mitad tiene su propia teoria (2/2)</a:t>
             </a:r>
           </a:p>
         </p:txBody>
@@ -6762,13 +6557,13 @@
               </a:spcAft>
             </a:pPr>
             <a:r>
-              <a:rPr sz="1900" b="0" i="0">
+              <a:rPr sz="2000" b="0" i="0">
                 <a:solidFill>
                   <a:srgbClr val="333333"/>
                 </a:solidFill>
                 <a:latin typeface="Calibri"/>
               </a:rPr>
-              <a:t>–   Error tipico del docente que no domina el tema: aceptar "queremos que la app sea rapida" como objetivo de rendimiento.</a:t>
+              <a:t>–   Porque no podemos garantizar respaldos manuales" es una frase de arquitecto; "aqui tenemos una base de datos" es una leyenda de imagen.</a:t>
             </a:r>
           </a:p>
           <a:p>
@@ -6778,13 +6573,13 @@
               </a:spcAft>
             </a:pPr>
             <a:r>
-              <a:rPr sz="1900" b="0" i="0">
+              <a:rPr sz="2000" b="0" i="0">
                 <a:solidFill>
                   <a:srgbClr val="333333"/>
                 </a:solidFill>
                 <a:latin typeface="Calibri"/>
               </a:rPr>
-              <a:t>–   Sin metrica en percentil, sin umbral, sin condicion de carga y sin cuello de botella sospechado, la seccion de rendimiento del informe se convierte en adjetivos</a:t>
+              <a:t>–   Se ensaya hoy con cronometro y en voz alta, porque leer mentalmente siempre da la mitad del tiempo real</a:t>
             </a:r>
           </a:p>
           <a:p>
@@ -6794,77 +6589,13 @@
               </a:spcAft>
             </a:pPr>
             <a:r>
-              <a:rPr sz="1900" b="0" i="0">
+              <a:rPr sz="2000" b="0" i="0">
                 <a:solidFill>
                   <a:srgbClr val="333333"/>
                 </a:solidFill>
                 <a:latin typeface="Calibri"/>
               </a:rPr>
-              <a:t>–   Y la consecuencia es inmediata aguas abajo: en la Clase 13 el estudiante no tiene nada sobre lo que basar el trigger del autoescalado y escribe "cuando la CPU suba"</a:t>
-            </a:r>
-          </a:p>
-          <a:p>
-            <a:pPr>
-              <a:spcAft>
-                <a:spcPts val="800"/>
-              </a:spcAft>
-            </a:pPr>
-            <a:r>
-              <a:rPr sz="1900" b="0" i="0">
-                <a:solidFill>
-                  <a:srgbClr val="333333"/>
-                </a:solidFill>
-                <a:latin typeface="Calibri"/>
-              </a:rPr>
-              <a:t>–   Y en la sustentacion de la Clase 15 no puede responder por que su diseno soporta la carga que dice soportar.</a:t>
-            </a:r>
-          </a:p>
-          <a:p>
-            <a:pPr>
-              <a:spcAft>
-                <a:spcPts val="800"/>
-              </a:spcAft>
-            </a:pPr>
-            <a:r>
-              <a:rPr sz="1900" b="0" i="0">
-                <a:solidFill>
-                  <a:srgbClr val="333333"/>
-                </a:solidFill>
-                <a:latin typeface="Calibri"/>
-              </a:rPr>
-              <a:t>–   El segundo error es dejar que el ensayo del pitch se convierta en un recorrido narrado del diagrama, leido en voz alta y sin una sola justificacion</a:t>
-            </a:r>
-          </a:p>
-          <a:p>
-            <a:pPr>
-              <a:spcAft>
-                <a:spcPts val="800"/>
-              </a:spcAft>
-            </a:pPr>
-            <a:r>
-              <a:rPr sz="1900" b="0" i="0">
-                <a:solidFill>
-                  <a:srgbClr val="333333"/>
-                </a:solidFill>
-                <a:latin typeface="Calibri"/>
-              </a:rPr>
-              <a:t>–   Y, en los equipos que el docente haya autorizado, permitir que un solo integrante hable mientras el resto observa.</a:t>
-            </a:r>
-          </a:p>
-          <a:p>
-            <a:pPr>
-              <a:spcAft>
-                <a:spcPts val="800"/>
-              </a:spcAft>
-            </a:pPr>
-            <a:r>
-              <a:rPr sz="1900" b="0" i="0">
-                <a:solidFill>
-                  <a:srgbClr val="333333"/>
-                </a:solidFill>
-                <a:latin typeface="Calibri"/>
-              </a:rPr>
-              <a:t>–   Si eso no se corrige hoy, en la Clase 15 la sustentacion llega como un guion memorizado que el Q&amp;A dirigido desarma en dos preguntas, y la nota cae por una razon que era corregible con quince minutos de ensayo bien dirigido.</a:t>
+              <a:t>–   Y sin leer las diapositivas, ya que en la Clase 15 el criterio es que quien sustenta pueda explicar cualquier parte del sistema; si el docente autorizo equipos, se ensaya ademas con rotacion de expositor, porque alli el criterio aplica a cualquier integrante.</a:t>
             </a:r>
           </a:p>
         </p:txBody>
@@ -7045,142 +6776,21 @@
                 </a:solidFill>
                 <a:latin typeface="Calibri"/>
               </a:rPr>
-              <a:t>«Que sea rapido» no es un requisito</a:t>
-            </a:r>
-          </a:p>
-        </p:txBody>
-      </p:sp>
-      <p:sp>
-        <p:nvSpPr>
-          <p:cNvPr id="5" name="Rounded Rectangle 4"/>
-          <p:cNvSpPr/>
-          <p:nvPr/>
-        </p:nvSpPr>
-        <p:spPr>
-          <a:xfrm>
-            <a:off x="457200" y="1261872"/>
-            <a:ext cx="5478627" cy="5093208"/>
-          </a:xfrm>
-          <a:prstGeom prst="roundRect">
-            <a:avLst>
-              <a:gd name="adj" fmla="val 12000"/>
-            </a:avLst>
-          </a:prstGeom>
-          <a:solidFill>
-            <a:srgbClr val="FBE4E4"/>
-          </a:solidFill>
-          <a:ln>
-            <a:noFill/>
-          </a:ln>
-        </p:spPr>
-        <p:style>
-          <a:lnRef idx="1">
-            <a:schemeClr val="accent1"/>
-          </a:lnRef>
-          <a:fillRef idx="3">
-            <a:schemeClr val="accent1"/>
-          </a:fillRef>
-          <a:effectRef idx="2">
-            <a:schemeClr val="accent1"/>
-          </a:effectRef>
-          <a:fontRef idx="minor">
-            <a:schemeClr val="lt1"/>
-          </a:fontRef>
-        </p:style>
-        <p:txBody>
-          <a:bodyPr rtlCol="0" anchor="ctr"/>
-          <a:lstStyle/>
-          <a:p>
-            <a:pPr algn="ctr"/>
-          </a:p>
-        </p:txBody>
-      </p:sp>
-      <p:sp>
-        <p:nvSpPr>
-          <p:cNvPr id="6" name="Rectangle 5"/>
-          <p:cNvSpPr/>
-          <p:nvPr/>
-        </p:nvSpPr>
-        <p:spPr>
-          <a:xfrm>
-            <a:off x="457200" y="1261872"/>
-            <a:ext cx="5478627" cy="502920"/>
-          </a:xfrm>
-          <a:prstGeom prst="rect">
-            <a:avLst/>
-          </a:prstGeom>
-          <a:solidFill>
-            <a:srgbClr val="A02030"/>
-          </a:solidFill>
-          <a:ln>
-            <a:noFill/>
-          </a:ln>
-        </p:spPr>
-        <p:style>
-          <a:lnRef idx="1">
-            <a:schemeClr val="accent1"/>
-          </a:lnRef>
-          <a:fillRef idx="3">
-            <a:schemeClr val="accent1"/>
-          </a:fillRef>
-          <a:effectRef idx="2">
-            <a:schemeClr val="accent1"/>
-          </a:effectRef>
-          <a:fontRef idx="minor">
-            <a:schemeClr val="lt1"/>
-          </a:fontRef>
-        </p:style>
-        <p:txBody>
-          <a:bodyPr rtlCol="0" anchor="ctr"/>
-          <a:lstStyle/>
-          <a:p>
-            <a:pPr algn="ctr"/>
-          </a:p>
-        </p:txBody>
-      </p:sp>
-      <p:sp>
-        <p:nvSpPr>
-          <p:cNvPr id="7" name="TextBox 6"/>
+              <a:t>Preguntas frecuentes y cierre conceptual () (1/3)</a:t>
+            </a:r>
+          </a:p>
+        </p:txBody>
+      </p:sp>
+      <p:sp>
+        <p:nvSpPr>
+          <p:cNvPr id="5" name="TextBox 4"/>
           <p:cNvSpPr txBox="1"/>
           <p:nvPr/>
         </p:nvSpPr>
         <p:spPr>
           <a:xfrm>
-            <a:off x="594360" y="1353312"/>
-            <a:ext cx="5204307" cy="365760"/>
-          </a:xfrm>
-          <a:prstGeom prst="rect">
-            <a:avLst/>
-          </a:prstGeom>
-          <a:noFill/>
-        </p:spPr>
-        <p:txBody>
-          <a:bodyPr wrap="square" anchor="ctr"/>
-          <a:lstStyle/>
-          <a:p>
-            <a:pPr algn="ctr"/>
-            <a:r>
-              <a:rPr sz="1600" b="1" i="0">
-                <a:solidFill>
-                  <a:srgbClr val="FFFFFF"/>
-                </a:solidFill>
-                <a:latin typeface="Calibri"/>
-              </a:rPr>
-              <a:t>Enunciado vago</a:t>
-            </a:r>
-          </a:p>
-        </p:txBody>
-      </p:sp>
-      <p:sp>
-        <p:nvSpPr>
-          <p:cNvPr id="8" name="TextBox 7"/>
-          <p:cNvSpPr txBox="1"/>
-          <p:nvPr/>
-        </p:nvSpPr>
-        <p:spPr>
-          <a:xfrm>
-            <a:off x="621792" y="1901952"/>
-            <a:ext cx="5158587" cy="4498848"/>
+            <a:off x="457200" y="1170432"/>
+            <a:ext cx="11277295" cy="5230368"/>
           </a:xfrm>
           <a:prstGeom prst="rect">
             <a:avLst/>
@@ -7199,13 +6809,13 @@
               </a:spcAft>
             </a:pPr>
             <a:r>
-              <a:rPr sz="1500" b="0" i="0">
+              <a:rPr sz="2000" b="0" i="0">
                 <a:solidFill>
                   <a:srgbClr val="333333"/>
                 </a:solidFill>
                 <a:latin typeface="Calibri"/>
               </a:rPr>
-              <a:t>–   «La app tiene que ser rapida»</a:t>
+              <a:t>–   La primera es como se prueba rendimiento sin usuarios reales; la respuesta es que la carga se simula y que lo valioso no es el numero obtenido sino el modelo: si el estudiante puede decir cuantos usuarios, cuantas peticiones por usuario</a:t>
             </a:r>
           </a:p>
           <a:p>
@@ -7215,13 +6825,13 @@
               </a:spcAft>
             </a:pPr>
             <a:r>
-              <a:rPr sz="1500" b="0" i="0">
+              <a:rPr sz="2000" b="0" i="0">
                 <a:solidFill>
                   <a:srgbClr val="333333"/>
                 </a:solidFill>
                 <a:latin typeface="Calibri"/>
               </a:rPr>
-              <a:t>–   «Aguanta harta gente»</a:t>
+              <a:t>–   Que factor de pico y que componente cree que cede primero, ya esta haciendo ingenieria de rendimiento aunque el sistema sea un stub.</a:t>
             </a:r>
           </a:p>
           <a:p>
@@ -7231,13 +6841,13 @@
               </a:spcAft>
             </a:pPr>
             <a:r>
-              <a:rPr sz="1500" b="0" i="0">
+              <a:rPr sz="2000" b="0" i="0">
                 <a:solidFill>
                   <a:srgbClr val="333333"/>
                 </a:solidFill>
                 <a:latin typeface="Calibri"/>
               </a:rPr>
-              <a:t>–   «Si se pone lenta, le subimos recursos»</a:t>
+              <a:t>–   La segunda es si no basta con decir que se usara cache; la respuesta es que una mitigacion sin medicion es una creencia</a:t>
             </a:r>
           </a:p>
           <a:p>
@@ -7247,273 +6857,20 @@
               </a:spcAft>
             </a:pPr>
             <a:r>
-              <a:rPr sz="1500" b="0" i="0">
+              <a:rPr sz="2000" b="0" i="0">
                 <a:solidFill>
                   <a:srgbClr val="333333"/>
                 </a:solidFill>
                 <a:latin typeface="Calibri"/>
               </a:rPr>
-              <a:t>–   No hay con que comparar despues</a:t>
-            </a:r>
-          </a:p>
-        </p:txBody>
-      </p:sp>
-      <p:sp>
-        <p:nvSpPr>
-          <p:cNvPr id="9" name="Rounded Rectangle 8"/>
-          <p:cNvSpPr/>
-          <p:nvPr/>
-        </p:nvSpPr>
-        <p:spPr>
-          <a:xfrm>
-            <a:off x="6255867" y="1261872"/>
-            <a:ext cx="5478627" cy="5093208"/>
-          </a:xfrm>
-          <a:prstGeom prst="roundRect">
-            <a:avLst>
-              <a:gd name="adj" fmla="val 12000"/>
-            </a:avLst>
-          </a:prstGeom>
-          <a:solidFill>
-            <a:srgbClr val="E8F4FA"/>
-          </a:solidFill>
-          <a:ln>
-            <a:noFill/>
-          </a:ln>
-        </p:spPr>
-        <p:style>
-          <a:lnRef idx="1">
-            <a:schemeClr val="accent1"/>
-          </a:lnRef>
-          <a:fillRef idx="3">
-            <a:schemeClr val="accent1"/>
-          </a:fillRef>
-          <a:effectRef idx="2">
-            <a:schemeClr val="accent1"/>
-          </a:effectRef>
-          <a:fontRef idx="minor">
-            <a:schemeClr val="lt1"/>
-          </a:fontRef>
-        </p:style>
-        <p:txBody>
-          <a:bodyPr rtlCol="0" anchor="ctr"/>
-          <a:lstStyle/>
-          <a:p>
-            <a:pPr algn="ctr"/>
-          </a:p>
-        </p:txBody>
-      </p:sp>
-      <p:sp>
-        <p:nvSpPr>
-          <p:cNvPr id="10" name="Rectangle 9"/>
-          <p:cNvSpPr/>
-          <p:nvPr/>
-        </p:nvSpPr>
-        <p:spPr>
-          <a:xfrm>
-            <a:off x="6255867" y="1261872"/>
-            <a:ext cx="5478627" cy="502920"/>
-          </a:xfrm>
-          <a:prstGeom prst="rect">
-            <a:avLst/>
-          </a:prstGeom>
-          <a:solidFill>
-            <a:srgbClr val="095292"/>
-          </a:solidFill>
-          <a:ln>
-            <a:noFill/>
-          </a:ln>
-        </p:spPr>
-        <p:style>
-          <a:lnRef idx="1">
-            <a:schemeClr val="accent1"/>
-          </a:lnRef>
-          <a:fillRef idx="3">
-            <a:schemeClr val="accent1"/>
-          </a:fillRef>
-          <a:effectRef idx="2">
-            <a:schemeClr val="accent1"/>
-          </a:effectRef>
-          <a:fontRef idx="minor">
-            <a:schemeClr val="lt1"/>
-          </a:fontRef>
-        </p:style>
-        <p:txBody>
-          <a:bodyPr rtlCol="0" anchor="ctr"/>
-          <a:lstStyle/>
-          <a:p>
-            <a:pPr algn="ctr"/>
-          </a:p>
-        </p:txBody>
-      </p:sp>
-      <p:sp>
-        <p:nvSpPr>
-          <p:cNvPr id="11" name="TextBox 10"/>
-          <p:cNvSpPr txBox="1"/>
-          <p:nvPr/>
-        </p:nvSpPr>
-        <p:spPr>
-          <a:xfrm>
-            <a:off x="6393027" y="1353312"/>
-            <a:ext cx="5204307" cy="365760"/>
-          </a:xfrm>
-          <a:prstGeom prst="rect">
-            <a:avLst/>
-          </a:prstGeom>
-          <a:noFill/>
-        </p:spPr>
-        <p:txBody>
-          <a:bodyPr wrap="square" anchor="ctr"/>
-          <a:lstStyle/>
-          <a:p>
-            <a:pPr algn="ctr"/>
-            <a:r>
-              <a:rPr sz="1600" b="1" i="0">
-                <a:solidFill>
-                  <a:srgbClr val="FFFFFF"/>
-                </a:solidFill>
-                <a:latin typeface="Calibri"/>
-              </a:rPr>
-              <a:t>Enunciado medible</a:t>
-            </a:r>
-          </a:p>
-        </p:txBody>
-      </p:sp>
-      <p:sp>
-        <p:nvSpPr>
-          <p:cNvPr id="12" name="TextBox 11"/>
-          <p:cNvSpPr txBox="1"/>
-          <p:nvPr/>
-        </p:nvSpPr>
-        <p:spPr>
-          <a:xfrm>
-            <a:off x="6420459" y="1901952"/>
-            <a:ext cx="5158587" cy="4498848"/>
-          </a:xfrm>
-          <a:prstGeom prst="rect">
-            <a:avLst/>
-          </a:prstGeom>
-          <a:noFill/>
-        </p:spPr>
-        <p:txBody>
-          <a:bodyPr wrap="square">
-            <a:spAutoFit/>
-          </a:bodyPr>
-          <a:lstStyle/>
-          <a:p>
-            <a:pPr>
-              <a:spcAft>
-                <a:spcPts val="800"/>
-              </a:spcAft>
-            </a:pPr>
-            <a:r>
-              <a:rPr sz="1500" b="0" i="0">
-                <a:solidFill>
-                  <a:srgbClr val="333333"/>
-                </a:solidFill>
-                <a:latin typeface="Calibri"/>
-              </a:rPr>
-              <a:t>–   </a:t>
-            </a:r>
-            <a:r>
-              <a:rPr sz="1500" b="1" i="0">
-                <a:solidFill>
-                  <a:srgbClr val="333333"/>
-                </a:solidFill>
-                <a:latin typeface="Calibri"/>
-              </a:rPr>
-              <a:t>p95 &lt; 300 ms</a:t>
-            </a:r>
-            <a:r>
-              <a:rPr sz="1500" b="0" i="0">
-                <a:solidFill>
-                  <a:srgbClr val="333333"/>
-                </a:solidFill>
-                <a:latin typeface="Calibri"/>
-              </a:rPr>
-              <a:t> en el endpoint de reserva</a:t>
-            </a:r>
-          </a:p>
-          <a:p>
-            <a:pPr>
-              <a:spcAft>
-                <a:spcPts val="800"/>
-              </a:spcAft>
-            </a:pPr>
-            <a:r>
-              <a:rPr sz="1500" b="0" i="0">
-                <a:solidFill>
-                  <a:srgbClr val="333333"/>
-                </a:solidFill>
-                <a:latin typeface="Calibri"/>
-              </a:rPr>
-              <a:t>–   Escenario: </a:t>
-            </a:r>
-            <a:r>
-              <a:rPr sz="1500" b="1" i="0">
-                <a:solidFill>
-                  <a:srgbClr val="333333"/>
-                </a:solidFill>
-                <a:latin typeface="Calibri"/>
-              </a:rPr>
-              <a:t>150 RPS</a:t>
-            </a:r>
-            <a:r>
-              <a:rPr sz="1500" b="0" i="0">
-                <a:solidFill>
-                  <a:srgbClr val="333333"/>
-                </a:solidFill>
-                <a:latin typeface="Calibri"/>
-              </a:rPr>
-              <a:t> en el pico de inicio de semestre</a:t>
-            </a:r>
-          </a:p>
-          <a:p>
-            <a:pPr>
-              <a:spcAft>
-                <a:spcPts val="800"/>
-              </a:spcAft>
-            </a:pPr>
-            <a:r>
-              <a:rPr sz="1500" b="0" i="0">
-                <a:solidFill>
-                  <a:srgbClr val="333333"/>
-                </a:solidFill>
-                <a:latin typeface="Calibri"/>
-              </a:rPr>
-              <a:t>–   Bottleneck sospechado: </a:t>
-            </a:r>
-            <a:r>
-              <a:rPr sz="1500" b="1" i="0">
-                <a:solidFill>
-                  <a:srgbClr val="333333"/>
-                </a:solidFill>
-                <a:latin typeface="Calibri"/>
-              </a:rPr>
-              <a:t>consulta a la BD</a:t>
-            </a:r>
-          </a:p>
-          <a:p>
-            <a:pPr>
-              <a:spcAft>
-                <a:spcPts val="800"/>
-              </a:spcAft>
-            </a:pPr>
-            <a:r>
-              <a:rPr sz="1500" b="0" i="0">
-                <a:solidFill>
-                  <a:srgbClr val="333333"/>
-                </a:solidFill>
-                <a:latin typeface="Calibri"/>
-              </a:rPr>
-              <a:t>–   Se puede verificar: pasa o no pasa</a:t>
-            </a:r>
-          </a:p>
-        </p:txBody>
-      </p:sp>
-      <p:sp>
-        <p:nvSpPr>
-          <p:cNvPr id="13" name="TextBox 12"/>
+              <a:t>–   Y que la pregunta correcta es cache de que, con que tiempo de vida, que porcentaje de aciertos se espera y que pasa cuando el dato cambia, porque una cache mal invalidada convierte un problema de lentitud en un problema de datos incorrectos, que es peor.</a:t>
+            </a:r>
+          </a:p>
+        </p:txBody>
+      </p:sp>
+      <p:sp>
+        <p:nvSpPr>
+          <p:cNvPr id="6" name="TextBox 5"/>
           <p:cNvSpPr txBox="1"/>
           <p:nvPr/>
         </p:nvSpPr>
@@ -7581,7 +6938,7 @@
         <p:spPr>
           <a:xfrm>
             <a:off x="0" y="0"/>
-            <a:ext cx="12191695" cy="1170432"/>
+            <a:ext cx="12191695" cy="960120"/>
           </a:xfrm>
           <a:prstGeom prst="rect">
             <a:avLst/>
@@ -7623,7 +6980,7 @@
         </p:nvSpPr>
         <p:spPr>
           <a:xfrm>
-            <a:off x="0" y="1170432"/>
+            <a:off x="0" y="960120"/>
             <a:ext cx="12191695" cy="41148"/>
           </a:xfrm>
           <a:prstGeom prst="rect">
@@ -7667,7 +7024,7 @@
         <p:spPr>
           <a:xfrm>
             <a:off x="457200" y="164592"/>
-            <a:ext cx="11277295" cy="384048"/>
+            <a:ext cx="11277295" cy="502920"/>
           </a:xfrm>
           <a:prstGeom prst="rect">
             <a:avLst/>
@@ -7687,7 +7044,7 @@
                 </a:solidFill>
                 <a:latin typeface="Calibri"/>
               </a:rPr>
-              <a:t>Herramientas de hoy</a:t>
+              <a:t>Preguntas frecuentes y cierre conceptual () (2/3)</a:t>
             </a:r>
           </a:p>
         </p:txBody>
@@ -7700,8 +7057,8 @@
         </p:nvSpPr>
         <p:spPr>
           <a:xfrm>
-            <a:off x="457200" y="566928"/>
-            <a:ext cx="11277295" cy="411480"/>
+            <a:off x="457200" y="1170432"/>
+            <a:ext cx="11277295" cy="5230368"/>
           </a:xfrm>
           <a:prstGeom prst="rect">
             <a:avLst/>
@@ -7714,837 +7071,106 @@
           </a:bodyPr>
           <a:lstStyle/>
           <a:p>
-            <a:r>
-              <a:rPr sz="1400" b="0" i="0">
-                <a:solidFill>
-                  <a:srgbClr val="B8D8EE"/>
-                </a:solidFill>
-                <a:latin typeface="Calibri"/>
-              </a:rPr>
-              <a:t>Gratis · navegador o free tier · sin cuenta de pago</a:t>
-            </a:r>
-          </a:p>
-        </p:txBody>
-      </p:sp>
-      <p:sp>
-        <p:nvSpPr>
-          <p:cNvPr id="6" name="Rounded Rectangle 5"/>
-          <p:cNvSpPr/>
-          <p:nvPr/>
-        </p:nvSpPr>
-        <p:spPr>
-          <a:xfrm>
-            <a:off x="457200" y="1591056"/>
-            <a:ext cx="3624986" cy="2299716"/>
-          </a:xfrm>
-          <a:prstGeom prst="roundRect">
-            <a:avLst>
-              <a:gd name="adj" fmla="val 12000"/>
-            </a:avLst>
-          </a:prstGeom>
-          <a:solidFill>
-            <a:srgbClr val="F2F2F2"/>
-          </a:solidFill>
-          <a:ln>
-            <a:noFill/>
-          </a:ln>
-        </p:spPr>
-        <p:style>
-          <a:lnRef idx="1">
-            <a:schemeClr val="accent1"/>
-          </a:lnRef>
-          <a:fillRef idx="3">
-            <a:schemeClr val="accent1"/>
-          </a:fillRef>
-          <a:effectRef idx="2">
-            <a:schemeClr val="accent1"/>
-          </a:effectRef>
-          <a:fontRef idx="minor">
-            <a:schemeClr val="lt1"/>
-          </a:fontRef>
-        </p:style>
-        <p:txBody>
-          <a:bodyPr rtlCol="0" anchor="ctr"/>
-          <a:lstStyle/>
-          <a:p>
-            <a:pPr algn="ctr"/>
-          </a:p>
-        </p:txBody>
-      </p:sp>
-      <p:sp>
-        <p:nvSpPr>
-          <p:cNvPr id="7" name="Rectangle 6"/>
-          <p:cNvSpPr/>
-          <p:nvPr/>
-        </p:nvSpPr>
-        <p:spPr>
-          <a:xfrm>
-            <a:off x="457200" y="1591056"/>
-            <a:ext cx="3624986" cy="64008"/>
-          </a:xfrm>
-          <a:prstGeom prst="rect">
-            <a:avLst/>
-          </a:prstGeom>
-          <a:solidFill>
-            <a:srgbClr val="095292"/>
-          </a:solidFill>
-          <a:ln>
-            <a:noFill/>
-          </a:ln>
-        </p:spPr>
-        <p:style>
-          <a:lnRef idx="1">
-            <a:schemeClr val="accent1"/>
-          </a:lnRef>
-          <a:fillRef idx="3">
-            <a:schemeClr val="accent1"/>
-          </a:fillRef>
-          <a:effectRef idx="2">
-            <a:schemeClr val="accent1"/>
-          </a:effectRef>
-          <a:fontRef idx="minor">
-            <a:schemeClr val="lt1"/>
-          </a:fontRef>
-        </p:style>
-        <p:txBody>
-          <a:bodyPr rtlCol="0" anchor="ctr"/>
-          <a:lstStyle/>
-          <a:p>
-            <a:pPr algn="ctr"/>
-          </a:p>
-        </p:txBody>
-      </p:sp>
-      <p:sp>
-        <p:nvSpPr>
-          <p:cNvPr id="8" name="Rectangle 7"/>
-          <p:cNvSpPr/>
-          <p:nvPr/>
-        </p:nvSpPr>
-        <p:spPr>
-          <a:xfrm>
-            <a:off x="457200" y="1655064"/>
-            <a:ext cx="3624986" cy="27432"/>
-          </a:xfrm>
-          <a:prstGeom prst="rect">
-            <a:avLst/>
-          </a:prstGeom>
-          <a:solidFill>
-            <a:srgbClr val="FFD000"/>
-          </a:solidFill>
-          <a:ln>
-            <a:noFill/>
-          </a:ln>
-        </p:spPr>
-        <p:style>
-          <a:lnRef idx="1">
-            <a:schemeClr val="accent1"/>
-          </a:lnRef>
-          <a:fillRef idx="3">
-            <a:schemeClr val="accent1"/>
-          </a:fillRef>
-          <a:effectRef idx="2">
-            <a:schemeClr val="accent1"/>
-          </a:effectRef>
-          <a:fontRef idx="minor">
-            <a:schemeClr val="lt1"/>
-          </a:fontRef>
-        </p:style>
-        <p:txBody>
-          <a:bodyPr rtlCol="0" anchor="ctr"/>
-          <a:lstStyle/>
-          <a:p>
-            <a:pPr algn="ctr"/>
-          </a:p>
-        </p:txBody>
-      </p:sp>
-      <p:pic>
-        <p:nvPicPr>
-          <p:cNvPr id="9" name="Picture 8" descr="google_docs.png"/>
-          <p:cNvPicPr>
-            <a:picLocks noChangeAspect="1"/>
-          </p:cNvPicPr>
-          <p:nvPr/>
-        </p:nvPicPr>
-        <p:blipFill>
-          <a:blip r:embed="rId2"/>
-          <a:stretch>
-            <a:fillRect/>
-          </a:stretch>
-        </p:blipFill>
-        <p:spPr>
-          <a:xfrm>
-            <a:off x="1659331" y="1847087"/>
-            <a:ext cx="1220724" cy="1220724"/>
-          </a:xfrm>
-          <a:prstGeom prst="rect">
-            <a:avLst/>
-          </a:prstGeom>
-        </p:spPr>
-      </p:pic>
-      <p:sp>
-        <p:nvSpPr>
-          <p:cNvPr id="10" name="TextBox 9"/>
-          <p:cNvSpPr txBox="1"/>
-          <p:nvPr/>
-        </p:nvSpPr>
-        <p:spPr>
-          <a:xfrm>
-            <a:off x="530352" y="3159251"/>
-            <a:ext cx="3478682" cy="621792"/>
-          </a:xfrm>
-          <a:prstGeom prst="rect">
-            <a:avLst/>
-          </a:prstGeom>
-          <a:noFill/>
-        </p:spPr>
-        <p:txBody>
-          <a:bodyPr wrap="square" anchor="t"/>
-          <a:lstStyle/>
-          <a:p>
-            <a:pPr algn="ctr"/>
-            <a:r>
-              <a:rPr sz="1300" b="1" i="0">
-                <a:solidFill>
-                  <a:srgbClr val="095292"/>
-                </a:solidFill>
-                <a:latin typeface="Calibri"/>
-              </a:rPr>
-              <a:t>Google Docs</a:t>
-            </a:r>
-          </a:p>
-          <a:p>
-            <a:pPr algn="ctr">
-              <a:spcBef>
-                <a:spcPts val="200"/>
-              </a:spcBef>
+            <a:pPr>
+              <a:spcAft>
+                <a:spcPts val="800"/>
+              </a:spcAft>
             </a:pPr>
             <a:r>
-              <a:rPr sz="1000" b="0" i="0">
-                <a:solidFill>
-                  <a:srgbClr val="666666"/>
-                </a:solidFill>
-                <a:latin typeface="Calibri"/>
-              </a:rPr>
-              <a:t>Objetivo de rendimiento</a:t>
-            </a:r>
-          </a:p>
-        </p:txBody>
-      </p:sp>
-      <p:sp>
-        <p:nvSpPr>
-          <p:cNvPr id="11" name="Rounded Rectangle 10"/>
-          <p:cNvSpPr/>
-          <p:nvPr/>
-        </p:nvSpPr>
-        <p:spPr>
-          <a:xfrm>
-            <a:off x="4283354" y="1591056"/>
-            <a:ext cx="3624986" cy="2299716"/>
-          </a:xfrm>
-          <a:prstGeom prst="roundRect">
-            <a:avLst>
-              <a:gd name="adj" fmla="val 12000"/>
-            </a:avLst>
-          </a:prstGeom>
-          <a:solidFill>
-            <a:srgbClr val="F2F2F2"/>
-          </a:solidFill>
-          <a:ln>
-            <a:noFill/>
-          </a:ln>
-        </p:spPr>
-        <p:style>
-          <a:lnRef idx="1">
-            <a:schemeClr val="accent1"/>
-          </a:lnRef>
-          <a:fillRef idx="3">
-            <a:schemeClr val="accent1"/>
-          </a:fillRef>
-          <a:effectRef idx="2">
-            <a:schemeClr val="accent1"/>
-          </a:effectRef>
-          <a:fontRef idx="minor">
-            <a:schemeClr val="lt1"/>
-          </a:fontRef>
-        </p:style>
-        <p:txBody>
-          <a:bodyPr rtlCol="0" anchor="ctr"/>
-          <a:lstStyle/>
-          <a:p>
-            <a:pPr algn="ctr"/>
-          </a:p>
-        </p:txBody>
-      </p:sp>
-      <p:sp>
-        <p:nvSpPr>
-          <p:cNvPr id="12" name="Rectangle 11"/>
-          <p:cNvSpPr/>
-          <p:nvPr/>
-        </p:nvSpPr>
-        <p:spPr>
-          <a:xfrm>
-            <a:off x="4283354" y="1591056"/>
-            <a:ext cx="3624986" cy="64008"/>
-          </a:xfrm>
-          <a:prstGeom prst="rect">
-            <a:avLst/>
-          </a:prstGeom>
-          <a:solidFill>
-            <a:srgbClr val="095292"/>
-          </a:solidFill>
-          <a:ln>
-            <a:noFill/>
-          </a:ln>
-        </p:spPr>
-        <p:style>
-          <a:lnRef idx="1">
-            <a:schemeClr val="accent1"/>
-          </a:lnRef>
-          <a:fillRef idx="3">
-            <a:schemeClr val="accent1"/>
-          </a:fillRef>
-          <a:effectRef idx="2">
-            <a:schemeClr val="accent1"/>
-          </a:effectRef>
-          <a:fontRef idx="minor">
-            <a:schemeClr val="lt1"/>
-          </a:fontRef>
-        </p:style>
-        <p:txBody>
-          <a:bodyPr rtlCol="0" anchor="ctr"/>
-          <a:lstStyle/>
-          <a:p>
-            <a:pPr algn="ctr"/>
-          </a:p>
-        </p:txBody>
-      </p:sp>
-      <p:sp>
-        <p:nvSpPr>
-          <p:cNvPr id="13" name="Rectangle 12"/>
-          <p:cNvSpPr/>
-          <p:nvPr/>
-        </p:nvSpPr>
-        <p:spPr>
-          <a:xfrm>
-            <a:off x="4283354" y="1655064"/>
-            <a:ext cx="3624986" cy="27432"/>
-          </a:xfrm>
-          <a:prstGeom prst="rect">
-            <a:avLst/>
-          </a:prstGeom>
-          <a:solidFill>
-            <a:srgbClr val="FFD000"/>
-          </a:solidFill>
-          <a:ln>
-            <a:noFill/>
-          </a:ln>
-        </p:spPr>
-        <p:style>
-          <a:lnRef idx="1">
-            <a:schemeClr val="accent1"/>
-          </a:lnRef>
-          <a:fillRef idx="3">
-            <a:schemeClr val="accent1"/>
-          </a:fillRef>
-          <a:effectRef idx="2">
-            <a:schemeClr val="accent1"/>
-          </a:effectRef>
-          <a:fontRef idx="minor">
-            <a:schemeClr val="lt1"/>
-          </a:fontRef>
-        </p:style>
-        <p:txBody>
-          <a:bodyPr rtlCol="0" anchor="ctr"/>
-          <a:lstStyle/>
-          <a:p>
-            <a:pPr algn="ctr"/>
-          </a:p>
-        </p:txBody>
-      </p:sp>
-      <p:pic>
-        <p:nvPicPr>
-          <p:cNvPr id="14" name="Picture 13" descr="drawio.png"/>
-          <p:cNvPicPr>
-            <a:picLocks noChangeAspect="1"/>
-          </p:cNvPicPr>
-          <p:nvPr/>
-        </p:nvPicPr>
-        <p:blipFill>
-          <a:blip r:embed="rId3"/>
-          <a:stretch>
-            <a:fillRect/>
-          </a:stretch>
-        </p:blipFill>
-        <p:spPr>
-          <a:xfrm>
-            <a:off x="5485485" y="1847087"/>
-            <a:ext cx="1220724" cy="1220724"/>
-          </a:xfrm>
-          <a:prstGeom prst="rect">
-            <a:avLst/>
-          </a:prstGeom>
-        </p:spPr>
-      </p:pic>
-      <p:sp>
-        <p:nvSpPr>
-          <p:cNvPr id="15" name="TextBox 14"/>
-          <p:cNvSpPr txBox="1"/>
-          <p:nvPr/>
-        </p:nvSpPr>
-        <p:spPr>
-          <a:xfrm>
-            <a:off x="4356506" y="3159251"/>
-            <a:ext cx="3478682" cy="621792"/>
-          </a:xfrm>
-          <a:prstGeom prst="rect">
-            <a:avLst/>
-          </a:prstGeom>
-          <a:noFill/>
-        </p:spPr>
-        <p:txBody>
-          <a:bodyPr wrap="square" anchor="t"/>
-          <a:lstStyle/>
-          <a:p>
-            <a:pPr algn="ctr"/>
-            <a:r>
-              <a:rPr sz="1300" b="1" i="0">
-                <a:solidFill>
-                  <a:srgbClr val="095292"/>
-                </a:solidFill>
-                <a:latin typeface="Calibri"/>
-              </a:rPr>
-              <a:t>draw.io</a:t>
-            </a:r>
-          </a:p>
-          <a:p>
-            <a:pPr algn="ctr">
-              <a:spcBef>
-                <a:spcPts val="200"/>
-              </a:spcBef>
+              <a:rPr sz="2000" b="0" i="0">
+                <a:solidFill>
+                  <a:srgbClr val="333333"/>
+                </a:solidFill>
+                <a:latin typeface="Calibri"/>
+              </a:rPr>
+              <a:t>–   La tercera es cual es un buen p95, y la respuesta debe resistir la tentacion de dar una cifra universal: depende del caso de uso</a:t>
+            </a:r>
+          </a:p>
+          <a:p>
+            <a:pPr>
+              <a:spcAft>
+                <a:spcPts val="800"/>
+              </a:spcAft>
             </a:pPr>
             <a:r>
-              <a:rPr sz="1000" b="0" i="0">
-                <a:solidFill>
-                  <a:srgbClr val="666666"/>
-                </a:solidFill>
-                <a:latin typeface="Calibri"/>
-              </a:rPr>
-              <a:t>Bottleneck</a:t>
-            </a:r>
-          </a:p>
-        </p:txBody>
-      </p:sp>
-      <p:sp>
-        <p:nvSpPr>
-          <p:cNvPr id="16" name="Rounded Rectangle 15"/>
-          <p:cNvSpPr/>
-          <p:nvPr/>
-        </p:nvSpPr>
-        <p:spPr>
-          <a:xfrm>
-            <a:off x="8109508" y="1591056"/>
-            <a:ext cx="3624986" cy="2299716"/>
-          </a:xfrm>
-          <a:prstGeom prst="roundRect">
-            <a:avLst>
-              <a:gd name="adj" fmla="val 12000"/>
-            </a:avLst>
-          </a:prstGeom>
-          <a:solidFill>
-            <a:srgbClr val="F2F2F2"/>
-          </a:solidFill>
-          <a:ln>
-            <a:noFill/>
-          </a:ln>
-        </p:spPr>
-        <p:style>
-          <a:lnRef idx="1">
-            <a:schemeClr val="accent1"/>
-          </a:lnRef>
-          <a:fillRef idx="3">
-            <a:schemeClr val="accent1"/>
-          </a:fillRef>
-          <a:effectRef idx="2">
-            <a:schemeClr val="accent1"/>
-          </a:effectRef>
-          <a:fontRef idx="minor">
-            <a:schemeClr val="lt1"/>
-          </a:fontRef>
-        </p:style>
-        <p:txBody>
-          <a:bodyPr rtlCol="0" anchor="ctr"/>
-          <a:lstStyle/>
-          <a:p>
-            <a:pPr algn="ctr"/>
-          </a:p>
-        </p:txBody>
-      </p:sp>
-      <p:sp>
-        <p:nvSpPr>
-          <p:cNvPr id="17" name="Rectangle 16"/>
-          <p:cNvSpPr/>
-          <p:nvPr/>
-        </p:nvSpPr>
-        <p:spPr>
-          <a:xfrm>
-            <a:off x="8109508" y="1591056"/>
-            <a:ext cx="3624986" cy="64008"/>
-          </a:xfrm>
-          <a:prstGeom prst="rect">
-            <a:avLst/>
-          </a:prstGeom>
-          <a:solidFill>
-            <a:srgbClr val="095292"/>
-          </a:solidFill>
-          <a:ln>
-            <a:noFill/>
-          </a:ln>
-        </p:spPr>
-        <p:style>
-          <a:lnRef idx="1">
-            <a:schemeClr val="accent1"/>
-          </a:lnRef>
-          <a:fillRef idx="3">
-            <a:schemeClr val="accent1"/>
-          </a:fillRef>
-          <a:effectRef idx="2">
-            <a:schemeClr val="accent1"/>
-          </a:effectRef>
-          <a:fontRef idx="minor">
-            <a:schemeClr val="lt1"/>
-          </a:fontRef>
-        </p:style>
-        <p:txBody>
-          <a:bodyPr rtlCol="0" anchor="ctr"/>
-          <a:lstStyle/>
-          <a:p>
-            <a:pPr algn="ctr"/>
-          </a:p>
-        </p:txBody>
-      </p:sp>
-      <p:sp>
-        <p:nvSpPr>
-          <p:cNvPr id="18" name="Rectangle 17"/>
-          <p:cNvSpPr/>
-          <p:nvPr/>
-        </p:nvSpPr>
-        <p:spPr>
-          <a:xfrm>
-            <a:off x="8109508" y="1655064"/>
-            <a:ext cx="3624986" cy="27432"/>
-          </a:xfrm>
-          <a:prstGeom prst="rect">
-            <a:avLst/>
-          </a:prstGeom>
-          <a:solidFill>
-            <a:srgbClr val="FFD000"/>
-          </a:solidFill>
-          <a:ln>
-            <a:noFill/>
-          </a:ln>
-        </p:spPr>
-        <p:style>
-          <a:lnRef idx="1">
-            <a:schemeClr val="accent1"/>
-          </a:lnRef>
-          <a:fillRef idx="3">
-            <a:schemeClr val="accent1"/>
-          </a:fillRef>
-          <a:effectRef idx="2">
-            <a:schemeClr val="accent1"/>
-          </a:effectRef>
-          <a:fontRef idx="minor">
-            <a:schemeClr val="lt1"/>
-          </a:fontRef>
-        </p:style>
-        <p:txBody>
-          <a:bodyPr rtlCol="0" anchor="ctr"/>
-          <a:lstStyle/>
-          <a:p>
-            <a:pPr algn="ctr"/>
-          </a:p>
-        </p:txBody>
-      </p:sp>
-      <p:pic>
-        <p:nvPicPr>
-          <p:cNvPr id="19" name="Picture 18" descr="mermaid.png"/>
-          <p:cNvPicPr>
-            <a:picLocks noChangeAspect="1"/>
-          </p:cNvPicPr>
-          <p:nvPr/>
-        </p:nvPicPr>
-        <p:blipFill>
-          <a:blip r:embed="rId4"/>
-          <a:stretch>
-            <a:fillRect/>
-          </a:stretch>
-        </p:blipFill>
-        <p:spPr>
-          <a:xfrm>
-            <a:off x="9311640" y="1847087"/>
-            <a:ext cx="1220724" cy="1220724"/>
-          </a:xfrm>
-          <a:prstGeom prst="rect">
-            <a:avLst/>
-          </a:prstGeom>
-        </p:spPr>
-      </p:pic>
-      <p:sp>
-        <p:nvSpPr>
-          <p:cNvPr id="20" name="TextBox 19"/>
-          <p:cNvSpPr txBox="1"/>
-          <p:nvPr/>
-        </p:nvSpPr>
-        <p:spPr>
-          <a:xfrm>
-            <a:off x="8182660" y="3159251"/>
-            <a:ext cx="3478682" cy="621792"/>
-          </a:xfrm>
-          <a:prstGeom prst="rect">
-            <a:avLst/>
-          </a:prstGeom>
-          <a:noFill/>
-        </p:spPr>
-        <p:txBody>
-          <a:bodyPr wrap="square" anchor="t"/>
-          <a:lstStyle/>
-          <a:p>
-            <a:pPr algn="ctr"/>
-            <a:r>
-              <a:rPr sz="1300" b="1" i="0">
-                <a:solidFill>
-                  <a:srgbClr val="095292"/>
-                </a:solidFill>
-                <a:latin typeface="Calibri"/>
-              </a:rPr>
-              <a:t>Mermaid</a:t>
-            </a:r>
-          </a:p>
-          <a:p>
-            <a:pPr algn="ctr">
-              <a:spcBef>
-                <a:spcPts val="200"/>
-              </a:spcBef>
+              <a:rPr sz="2000" b="0" i="0">
+                <a:solidFill>
+                  <a:srgbClr val="333333"/>
+                </a:solidFill>
+                <a:latin typeface="Calibri"/>
+              </a:rPr>
+              <a:t>–   Y el criterio es que el numero este justificado y sea alcanzable con la arquitectura dibujada</a:t>
+            </a:r>
+          </a:p>
+          <a:p>
+            <a:pPr>
+              <a:spcAft>
+                <a:spcPts val="800"/>
+              </a:spcAft>
             </a:pPr>
             <a:r>
-              <a:rPr sz="1000" b="0" i="0">
-                <a:solidFill>
-                  <a:srgbClr val="666666"/>
-                </a:solidFill>
-                <a:latin typeface="Calibri"/>
-              </a:rPr>
-              <a:t>Codigo del diagrama</a:t>
-            </a:r>
-          </a:p>
-        </p:txBody>
-      </p:sp>
-      <p:sp>
-        <p:nvSpPr>
-          <p:cNvPr id="21" name="Rounded Rectangle 20"/>
-          <p:cNvSpPr/>
-          <p:nvPr/>
-        </p:nvSpPr>
-        <p:spPr>
-          <a:xfrm>
-            <a:off x="4283354" y="4055364"/>
-            <a:ext cx="3624986" cy="2299716"/>
-          </a:xfrm>
-          <a:prstGeom prst="roundRect">
-            <a:avLst>
-              <a:gd name="adj" fmla="val 12000"/>
-            </a:avLst>
-          </a:prstGeom>
-          <a:solidFill>
-            <a:srgbClr val="F2F2F2"/>
-          </a:solidFill>
-          <a:ln>
-            <a:noFill/>
-          </a:ln>
-        </p:spPr>
-        <p:style>
-          <a:lnRef idx="1">
-            <a:schemeClr val="accent1"/>
-          </a:lnRef>
-          <a:fillRef idx="3">
-            <a:schemeClr val="accent1"/>
-          </a:fillRef>
-          <a:effectRef idx="2">
-            <a:schemeClr val="accent1"/>
-          </a:effectRef>
-          <a:fontRef idx="minor">
-            <a:schemeClr val="lt1"/>
-          </a:fontRef>
-        </p:style>
-        <p:txBody>
-          <a:bodyPr rtlCol="0" anchor="ctr"/>
-          <a:lstStyle/>
-          <a:p>
-            <a:pPr algn="ctr"/>
-          </a:p>
-        </p:txBody>
-      </p:sp>
-      <p:sp>
-        <p:nvSpPr>
-          <p:cNvPr id="22" name="Rectangle 21"/>
-          <p:cNvSpPr/>
-          <p:nvPr/>
-        </p:nvSpPr>
-        <p:spPr>
-          <a:xfrm>
-            <a:off x="4283354" y="4055364"/>
-            <a:ext cx="3624986" cy="64008"/>
-          </a:xfrm>
-          <a:prstGeom prst="rect">
-            <a:avLst/>
-          </a:prstGeom>
-          <a:solidFill>
-            <a:srgbClr val="095292"/>
-          </a:solidFill>
-          <a:ln>
-            <a:noFill/>
-          </a:ln>
-        </p:spPr>
-        <p:style>
-          <a:lnRef idx="1">
-            <a:schemeClr val="accent1"/>
-          </a:lnRef>
-          <a:fillRef idx="3">
-            <a:schemeClr val="accent1"/>
-          </a:fillRef>
-          <a:effectRef idx="2">
-            <a:schemeClr val="accent1"/>
-          </a:effectRef>
-          <a:fontRef idx="minor">
-            <a:schemeClr val="lt1"/>
-          </a:fontRef>
-        </p:style>
-        <p:txBody>
-          <a:bodyPr rtlCol="0" anchor="ctr"/>
-          <a:lstStyle/>
-          <a:p>
-            <a:pPr algn="ctr"/>
-          </a:p>
-        </p:txBody>
-      </p:sp>
-      <p:sp>
-        <p:nvSpPr>
-          <p:cNvPr id="23" name="Rectangle 22"/>
-          <p:cNvSpPr/>
-          <p:nvPr/>
-        </p:nvSpPr>
-        <p:spPr>
-          <a:xfrm>
-            <a:off x="4283354" y="4119372"/>
-            <a:ext cx="3624986" cy="27432"/>
-          </a:xfrm>
-          <a:prstGeom prst="rect">
-            <a:avLst/>
-          </a:prstGeom>
-          <a:solidFill>
-            <a:srgbClr val="FFD000"/>
-          </a:solidFill>
-          <a:ln>
-            <a:noFill/>
-          </a:ln>
-        </p:spPr>
-        <p:style>
-          <a:lnRef idx="1">
-            <a:schemeClr val="accent1"/>
-          </a:lnRef>
-          <a:fillRef idx="3">
-            <a:schemeClr val="accent1"/>
-          </a:fillRef>
-          <a:effectRef idx="2">
-            <a:schemeClr val="accent1"/>
-          </a:effectRef>
-          <a:fontRef idx="minor">
-            <a:schemeClr val="lt1"/>
-          </a:fontRef>
-        </p:style>
-        <p:txBody>
-          <a:bodyPr rtlCol="0" anchor="ctr"/>
-          <a:lstStyle/>
-          <a:p>
-            <a:pPr algn="ctr"/>
-          </a:p>
-        </p:txBody>
-      </p:sp>
-      <p:pic>
-        <p:nvPicPr>
-          <p:cNvPr id="24" name="Picture 23" descr="examlab.png"/>
-          <p:cNvPicPr>
-            <a:picLocks noChangeAspect="1"/>
-          </p:cNvPicPr>
-          <p:nvPr/>
-        </p:nvPicPr>
-        <p:blipFill>
-          <a:blip r:embed="rId5"/>
-          <a:stretch>
-            <a:fillRect/>
-          </a:stretch>
-        </p:blipFill>
-        <p:spPr>
-          <a:xfrm>
-            <a:off x="5485485" y="4311396"/>
-            <a:ext cx="1220724" cy="1220724"/>
-          </a:xfrm>
-          <a:prstGeom prst="rect">
-            <a:avLst/>
-          </a:prstGeom>
-        </p:spPr>
-      </p:pic>
-      <p:sp>
-        <p:nvSpPr>
-          <p:cNvPr id="25" name="TextBox 24"/>
-          <p:cNvSpPr txBox="1"/>
-          <p:nvPr/>
-        </p:nvSpPr>
-        <p:spPr>
-          <a:xfrm>
-            <a:off x="4356506" y="5623560"/>
-            <a:ext cx="3478682" cy="621792"/>
-          </a:xfrm>
-          <a:prstGeom prst="rect">
-            <a:avLst/>
-          </a:prstGeom>
-          <a:noFill/>
-        </p:spPr>
-        <p:txBody>
-          <a:bodyPr wrap="square" anchor="t"/>
-          <a:lstStyle/>
-          <a:p>
-            <a:pPr algn="ctr"/>
-            <a:r>
-              <a:rPr sz="1300" b="1" i="0">
-                <a:solidFill>
-                  <a:srgbClr val="095292"/>
-                </a:solidFill>
-                <a:latin typeface="Calibri"/>
-              </a:rPr>
-              <a:t>la plataforma del curso</a:t>
-            </a:r>
-          </a:p>
-          <a:p>
-            <a:pPr algn="ctr">
-              <a:spcBef>
-                <a:spcPts val="200"/>
-              </a:spcBef>
+              <a:rPr sz="2000" b="0" i="0">
+                <a:solidFill>
+                  <a:srgbClr val="333333"/>
+                </a:solidFill>
+                <a:latin typeface="Calibri"/>
+              </a:rPr>
+              <a:t>–   Quien promete p95 de 50 milisegundos con una consulta que recorre toda la tabla tiene un objetivo incoherente, y eso es un hallazgo mas grave que tener un objetivo modesto.</a:t>
+            </a:r>
+          </a:p>
+          <a:p>
+            <a:pPr>
+              <a:spcAft>
+                <a:spcPts val="800"/>
+              </a:spcAft>
             </a:pPr>
             <a:r>
-              <a:rPr sz="1000" b="0" i="0">
-                <a:solidFill>
-                  <a:srgbClr val="666666"/>
-                </a:solidFill>
-                <a:latin typeface="Calibri"/>
-              </a:rPr>
-              <a:t>Donde se entrega</a:t>
-            </a:r>
-          </a:p>
-        </p:txBody>
-      </p:sp>
-      <p:sp>
-        <p:nvSpPr>
-          <p:cNvPr id="26" name="TextBox 25"/>
+              <a:rPr sz="2000" b="0" i="0">
+                <a:solidFill>
+                  <a:srgbClr val="333333"/>
+                </a:solidFill>
+                <a:latin typeface="Calibri"/>
+              </a:rPr>
+              <a:t>–   Error tipico del docente que no domina el tema: aceptar "queremos que la app sea rapida" como objetivo de rendimiento.</a:t>
+            </a:r>
+          </a:p>
+          <a:p>
+            <a:pPr>
+              <a:spcAft>
+                <a:spcPts val="800"/>
+              </a:spcAft>
+            </a:pPr>
+            <a:r>
+              <a:rPr sz="2000" b="0" i="0">
+                <a:solidFill>
+                  <a:srgbClr val="333333"/>
+                </a:solidFill>
+                <a:latin typeface="Calibri"/>
+              </a:rPr>
+              <a:t>–   Sin metrica en percentil, sin umbral, sin condicion de carga y sin cuello de botella sospechado, la seccion de rendimiento del informe se convierte en adjetivos</a:t>
+            </a:r>
+          </a:p>
+          <a:p>
+            <a:pPr>
+              <a:spcAft>
+                <a:spcPts val="800"/>
+              </a:spcAft>
+            </a:pPr>
+            <a:r>
+              <a:rPr sz="2000" b="0" i="0">
+                <a:solidFill>
+                  <a:srgbClr val="333333"/>
+                </a:solidFill>
+                <a:latin typeface="Calibri"/>
+              </a:rPr>
+              <a:t>–   Y la consecuencia es inmediata aguas abajo: en la Clase 13 el estudiante no tiene nada sobre lo que basar el trigger del autoescalado y escribe "cuando la CPU suba"</a:t>
+            </a:r>
+          </a:p>
+        </p:txBody>
+      </p:sp>
+      <p:sp>
+        <p:nvSpPr>
+          <p:cNvPr id="6" name="TextBox 5"/>
           <p:cNvSpPr txBox="1"/>
           <p:nvPr/>
         </p:nvSpPr>
@@ -8612,7 +7238,7 @@
         <p:spPr>
           <a:xfrm>
             <a:off x="0" y="0"/>
-            <a:ext cx="12191695" cy="1170432"/>
+            <a:ext cx="12191695" cy="960120"/>
           </a:xfrm>
           <a:prstGeom prst="rect">
             <a:avLst/>
@@ -8654,7 +7280,7 @@
         </p:nvSpPr>
         <p:spPr>
           <a:xfrm>
-            <a:off x="0" y="1170432"/>
+            <a:off x="0" y="960120"/>
             <a:ext cx="12191695" cy="41148"/>
           </a:xfrm>
           <a:prstGeom prst="rect">
@@ -8698,7 +7324,7 @@
         <p:spPr>
           <a:xfrm>
             <a:off x="457200" y="164592"/>
-            <a:ext cx="11277295" cy="384048"/>
+            <a:ext cx="11277295" cy="502920"/>
           </a:xfrm>
           <a:prstGeom prst="rect">
             <a:avLst/>
@@ -8718,7 +7344,7 @@
                 </a:solidFill>
                 <a:latin typeface="Calibri"/>
               </a:rPr>
-              <a:t>Del boceto a la plataforma del curso (diagrama)</a:t>
+              <a:t>Preguntas frecuentes y cierre conceptual () (3/3)</a:t>
             </a:r>
           </a:p>
         </p:txBody>
@@ -8731,8 +7357,8 @@
         </p:nvSpPr>
         <p:spPr>
           <a:xfrm>
-            <a:off x="457200" y="566928"/>
-            <a:ext cx="11277295" cy="411480"/>
+            <a:off x="457200" y="1170432"/>
+            <a:ext cx="11277295" cy="5230368"/>
           </a:xfrm>
           <a:prstGeom prst="rect">
             <a:avLst/>
@@ -8745,705 +7371,74 @@
           </a:bodyPr>
           <a:lstStyle/>
           <a:p>
-            <a:r>
-              <a:rPr sz="1400" b="0" i="0">
-                <a:solidFill>
-                  <a:srgbClr val="B8D8EE"/>
-                </a:solidFill>
-                <a:latin typeface="Calibri"/>
-              </a:rPr>
-              <a:t>El diagrama se entrega como código Mermaid dentro de la plataforma del curso, no como imagen</a:t>
-            </a:r>
-          </a:p>
-        </p:txBody>
-      </p:sp>
-      <p:sp>
-        <p:nvSpPr>
-          <p:cNvPr id="6" name="Rounded Rectangle 5"/>
-          <p:cNvSpPr/>
-          <p:nvPr/>
-        </p:nvSpPr>
-        <p:spPr>
-          <a:xfrm>
-            <a:off x="457200" y="1659636"/>
-            <a:ext cx="11277295" cy="1051560"/>
-          </a:xfrm>
-          <a:prstGeom prst="roundRect">
-            <a:avLst>
-              <a:gd name="adj" fmla="val 12000"/>
-            </a:avLst>
-          </a:prstGeom>
-          <a:solidFill>
-            <a:srgbClr val="F2F2F2"/>
-          </a:solidFill>
-          <a:ln>
-            <a:noFill/>
-          </a:ln>
-        </p:spPr>
-        <p:style>
-          <a:lnRef idx="1">
-            <a:schemeClr val="accent1"/>
-          </a:lnRef>
-          <a:fillRef idx="3">
-            <a:schemeClr val="accent1"/>
-          </a:fillRef>
-          <a:effectRef idx="2">
-            <a:schemeClr val="accent1"/>
-          </a:effectRef>
-          <a:fontRef idx="minor">
-            <a:schemeClr val="lt1"/>
-          </a:fontRef>
-        </p:style>
-        <p:txBody>
-          <a:bodyPr rtlCol="0" anchor="ctr"/>
-          <a:lstStyle/>
-          <a:p>
-            <a:pPr algn="ctr"/>
-          </a:p>
-        </p:txBody>
-      </p:sp>
-      <p:sp>
-        <p:nvSpPr>
-          <p:cNvPr id="7" name="Rounded Rectangle 6"/>
-          <p:cNvSpPr/>
-          <p:nvPr/>
-        </p:nvSpPr>
-        <p:spPr>
-          <a:xfrm>
-            <a:off x="594360" y="1965960"/>
-            <a:ext cx="438912" cy="438912"/>
-          </a:xfrm>
-          <a:prstGeom prst="roundRect">
-            <a:avLst>
-              <a:gd name="adj" fmla="val 12000"/>
-            </a:avLst>
-          </a:prstGeom>
-          <a:solidFill>
-            <a:srgbClr val="095292"/>
-          </a:solidFill>
-          <a:ln>
-            <a:noFill/>
-          </a:ln>
-        </p:spPr>
-        <p:style>
-          <a:lnRef idx="1">
-            <a:schemeClr val="accent1"/>
-          </a:lnRef>
-          <a:fillRef idx="3">
-            <a:schemeClr val="accent1"/>
-          </a:fillRef>
-          <a:effectRef idx="2">
-            <a:schemeClr val="accent1"/>
-          </a:effectRef>
-          <a:fontRef idx="minor">
-            <a:schemeClr val="lt1"/>
-          </a:fontRef>
-        </p:style>
-        <p:txBody>
-          <a:bodyPr rtlCol="0" anchor="ctr"/>
-          <a:lstStyle/>
-          <a:p>
-            <a:pPr algn="ctr"/>
-          </a:p>
-        </p:txBody>
-      </p:sp>
-      <p:sp>
-        <p:nvSpPr>
-          <p:cNvPr id="8" name="TextBox 7"/>
-          <p:cNvSpPr txBox="1"/>
-          <p:nvPr/>
-        </p:nvSpPr>
-        <p:spPr>
-          <a:xfrm>
-            <a:off x="594360" y="1965960"/>
-            <a:ext cx="438912" cy="438912"/>
-          </a:xfrm>
-          <a:prstGeom prst="rect">
-            <a:avLst/>
-          </a:prstGeom>
-          <a:noFill/>
-        </p:spPr>
-        <p:txBody>
-          <a:bodyPr wrap="square" anchor="ctr"/>
-          <a:lstStyle/>
-          <a:p>
-            <a:pPr algn="ctr"/>
-            <a:r>
-              <a:rPr sz="1600" b="1" i="0">
-                <a:solidFill>
-                  <a:srgbClr val="FFFFFF"/>
-                </a:solidFill>
-                <a:latin typeface="Calibri"/>
-              </a:rPr>
-              <a:t>1</a:t>
-            </a:r>
-          </a:p>
-        </p:txBody>
-      </p:sp>
-      <p:sp>
-        <p:nvSpPr>
-          <p:cNvPr id="9" name="TextBox 8"/>
-          <p:cNvSpPr txBox="1"/>
-          <p:nvPr/>
-        </p:nvSpPr>
-        <p:spPr>
-          <a:xfrm>
-            <a:off x="1188720" y="1751076"/>
-            <a:ext cx="10271455" cy="886968"/>
-          </a:xfrm>
-          <a:prstGeom prst="rect">
-            <a:avLst/>
-          </a:prstGeom>
-          <a:noFill/>
-        </p:spPr>
-        <p:txBody>
-          <a:bodyPr wrap="square" anchor="ctr"/>
-          <a:lstStyle/>
-          <a:p>
-            <a:r>
-              <a:rPr sz="1500" b="1" i="0">
-                <a:solidFill>
-                  <a:srgbClr val="095292"/>
-                </a:solidFill>
-                <a:latin typeface="Calibri"/>
-              </a:rPr>
-              <a:t>Disena visual</a:t>
-            </a:r>
-          </a:p>
-          <a:p>
             <a:pPr>
-              <a:spcBef>
-                <a:spcPts val="200"/>
-              </a:spcBef>
+              <a:spcAft>
+                <a:spcPts val="800"/>
+              </a:spcAft>
             </a:pPr>
             <a:r>
-              <a:rPr sz="1300" b="0" i="0">
+              <a:rPr sz="2000" b="0" i="0">
                 <a:solidFill>
                   <a:srgbClr val="333333"/>
                 </a:solidFill>
                 <a:latin typeface="Calibri"/>
               </a:rPr>
-              <a:t>Dibuja el diagrama como quieras en Excalidraw o draw.io: es mas rapido arrastrar cajas que escribir codigo, y ahi es donde piensas el modelo.</a:t>
-            </a:r>
-          </a:p>
-        </p:txBody>
-      </p:sp>
-      <p:sp>
-        <p:nvSpPr>
-          <p:cNvPr id="10" name="Rounded Rectangle 9"/>
-          <p:cNvSpPr/>
-          <p:nvPr/>
-        </p:nvSpPr>
-        <p:spPr>
-          <a:xfrm>
-            <a:off x="457200" y="2802636"/>
-            <a:ext cx="11277295" cy="1051560"/>
-          </a:xfrm>
-          <a:prstGeom prst="roundRect">
-            <a:avLst>
-              <a:gd name="adj" fmla="val 12000"/>
-            </a:avLst>
-          </a:prstGeom>
-          <a:solidFill>
-            <a:srgbClr val="E8F4FA"/>
-          </a:solidFill>
-          <a:ln>
-            <a:noFill/>
-          </a:ln>
-        </p:spPr>
-        <p:style>
-          <a:lnRef idx="1">
-            <a:schemeClr val="accent1"/>
-          </a:lnRef>
-          <a:fillRef idx="3">
-            <a:schemeClr val="accent1"/>
-          </a:fillRef>
-          <a:effectRef idx="2">
-            <a:schemeClr val="accent1"/>
-          </a:effectRef>
-          <a:fontRef idx="minor">
-            <a:schemeClr val="lt1"/>
-          </a:fontRef>
-        </p:style>
-        <p:txBody>
-          <a:bodyPr rtlCol="0" anchor="ctr"/>
-          <a:lstStyle/>
-          <a:p>
-            <a:pPr algn="ctr"/>
-          </a:p>
-        </p:txBody>
-      </p:sp>
-      <p:sp>
-        <p:nvSpPr>
-          <p:cNvPr id="11" name="Rounded Rectangle 10"/>
-          <p:cNvSpPr/>
-          <p:nvPr/>
-        </p:nvSpPr>
-        <p:spPr>
-          <a:xfrm>
-            <a:off x="594360" y="3108960"/>
-            <a:ext cx="438912" cy="438912"/>
-          </a:xfrm>
-          <a:prstGeom prst="roundRect">
-            <a:avLst>
-              <a:gd name="adj" fmla="val 12000"/>
-            </a:avLst>
-          </a:prstGeom>
-          <a:solidFill>
-            <a:srgbClr val="095292"/>
-          </a:solidFill>
-          <a:ln>
-            <a:noFill/>
-          </a:ln>
-        </p:spPr>
-        <p:style>
-          <a:lnRef idx="1">
-            <a:schemeClr val="accent1"/>
-          </a:lnRef>
-          <a:fillRef idx="3">
-            <a:schemeClr val="accent1"/>
-          </a:fillRef>
-          <a:effectRef idx="2">
-            <a:schemeClr val="accent1"/>
-          </a:effectRef>
-          <a:fontRef idx="minor">
-            <a:schemeClr val="lt1"/>
-          </a:fontRef>
-        </p:style>
-        <p:txBody>
-          <a:bodyPr rtlCol="0" anchor="ctr"/>
-          <a:lstStyle/>
-          <a:p>
-            <a:pPr algn="ctr"/>
-          </a:p>
-        </p:txBody>
-      </p:sp>
-      <p:sp>
-        <p:nvSpPr>
-          <p:cNvPr id="12" name="TextBox 11"/>
-          <p:cNvSpPr txBox="1"/>
-          <p:nvPr/>
-        </p:nvSpPr>
-        <p:spPr>
-          <a:xfrm>
-            <a:off x="594360" y="3108960"/>
-            <a:ext cx="438912" cy="438912"/>
-          </a:xfrm>
-          <a:prstGeom prst="rect">
-            <a:avLst/>
-          </a:prstGeom>
-          <a:noFill/>
-        </p:spPr>
-        <p:txBody>
-          <a:bodyPr wrap="square" anchor="ctr"/>
-          <a:lstStyle/>
-          <a:p>
-            <a:pPr algn="ctr"/>
-            <a:r>
-              <a:rPr sz="1600" b="1" i="0">
-                <a:solidFill>
-                  <a:srgbClr val="FFFFFF"/>
-                </a:solidFill>
-                <a:latin typeface="Calibri"/>
-              </a:rPr>
-              <a:t>2</a:t>
-            </a:r>
-          </a:p>
-        </p:txBody>
-      </p:sp>
-      <p:sp>
-        <p:nvSpPr>
-          <p:cNvPr id="13" name="TextBox 12"/>
-          <p:cNvSpPr txBox="1"/>
-          <p:nvPr/>
-        </p:nvSpPr>
-        <p:spPr>
-          <a:xfrm>
-            <a:off x="1188720" y="2894076"/>
-            <a:ext cx="10271455" cy="886968"/>
-          </a:xfrm>
-          <a:prstGeom prst="rect">
-            <a:avLst/>
-          </a:prstGeom>
-          <a:noFill/>
-        </p:spPr>
-        <p:txBody>
-          <a:bodyPr wrap="square" anchor="ctr"/>
-          <a:lstStyle/>
-          <a:p>
-            <a:r>
-              <a:rPr sz="1500" b="1" i="0">
-                <a:solidFill>
-                  <a:srgbClr val="095292"/>
-                </a:solidFill>
-                <a:latin typeface="Calibri"/>
-              </a:rPr>
-              <a:t>Traduce con IA</a:t>
+              <a:t>–   Y en la sustentacion de la Clase 15 no puede responder por que su diseno soporta la carga que dice soportar.</a:t>
             </a:r>
           </a:p>
           <a:p>
             <a:pPr>
-              <a:spcBef>
-                <a:spcPts val="200"/>
-              </a:spcBef>
+              <a:spcAft>
+                <a:spcPts val="800"/>
+              </a:spcAft>
             </a:pPr>
             <a:r>
-              <a:rPr sz="1300" b="0" i="0">
+              <a:rPr sz="2000" b="0" i="0">
                 <a:solidFill>
                   <a:srgbClr val="333333"/>
                 </a:solidFill>
                 <a:latin typeface="Calibri"/>
               </a:rPr>
-              <a:t>Copia o describe tu boceto a una IA y pidele el codigo Mermaid: «convierte este diagrama a Mermaid usando sequenceDiagram». Revisa el resultado: la IA acierta la sintaxis, no tu modelo.</a:t>
-            </a:r>
-          </a:p>
-        </p:txBody>
-      </p:sp>
-      <p:sp>
-        <p:nvSpPr>
-          <p:cNvPr id="14" name="Rounded Rectangle 13"/>
-          <p:cNvSpPr/>
-          <p:nvPr/>
-        </p:nvSpPr>
-        <p:spPr>
-          <a:xfrm>
-            <a:off x="457200" y="3945636"/>
-            <a:ext cx="11277295" cy="1051560"/>
-          </a:xfrm>
-          <a:prstGeom prst="roundRect">
-            <a:avLst>
-              <a:gd name="adj" fmla="val 12000"/>
-            </a:avLst>
-          </a:prstGeom>
-          <a:solidFill>
-            <a:srgbClr val="F2F2F2"/>
-          </a:solidFill>
-          <a:ln>
-            <a:noFill/>
-          </a:ln>
-        </p:spPr>
-        <p:style>
-          <a:lnRef idx="1">
-            <a:schemeClr val="accent1"/>
-          </a:lnRef>
-          <a:fillRef idx="3">
-            <a:schemeClr val="accent1"/>
-          </a:fillRef>
-          <a:effectRef idx="2">
-            <a:schemeClr val="accent1"/>
-          </a:effectRef>
-          <a:fontRef idx="minor">
-            <a:schemeClr val="lt1"/>
-          </a:fontRef>
-        </p:style>
-        <p:txBody>
-          <a:bodyPr rtlCol="0" anchor="ctr"/>
-          <a:lstStyle/>
-          <a:p>
-            <a:pPr algn="ctr"/>
-          </a:p>
-        </p:txBody>
-      </p:sp>
-      <p:sp>
-        <p:nvSpPr>
-          <p:cNvPr id="15" name="Rounded Rectangle 14"/>
-          <p:cNvSpPr/>
-          <p:nvPr/>
-        </p:nvSpPr>
-        <p:spPr>
-          <a:xfrm>
-            <a:off x="594360" y="4251960"/>
-            <a:ext cx="438912" cy="438912"/>
-          </a:xfrm>
-          <a:prstGeom prst="roundRect">
-            <a:avLst>
-              <a:gd name="adj" fmla="val 12000"/>
-            </a:avLst>
-          </a:prstGeom>
-          <a:solidFill>
-            <a:srgbClr val="095292"/>
-          </a:solidFill>
-          <a:ln>
-            <a:noFill/>
-          </a:ln>
-        </p:spPr>
-        <p:style>
-          <a:lnRef idx="1">
-            <a:schemeClr val="accent1"/>
-          </a:lnRef>
-          <a:fillRef idx="3">
-            <a:schemeClr val="accent1"/>
-          </a:fillRef>
-          <a:effectRef idx="2">
-            <a:schemeClr val="accent1"/>
-          </a:effectRef>
-          <a:fontRef idx="minor">
-            <a:schemeClr val="lt1"/>
-          </a:fontRef>
-        </p:style>
-        <p:txBody>
-          <a:bodyPr rtlCol="0" anchor="ctr"/>
-          <a:lstStyle/>
-          <a:p>
-            <a:pPr algn="ctr"/>
-          </a:p>
-        </p:txBody>
-      </p:sp>
-      <p:sp>
-        <p:nvSpPr>
-          <p:cNvPr id="16" name="TextBox 15"/>
-          <p:cNvSpPr txBox="1"/>
-          <p:nvPr/>
-        </p:nvSpPr>
-        <p:spPr>
-          <a:xfrm>
-            <a:off x="594360" y="4251960"/>
-            <a:ext cx="438912" cy="438912"/>
-          </a:xfrm>
-          <a:prstGeom prst="rect">
-            <a:avLst/>
-          </a:prstGeom>
-          <a:noFill/>
-        </p:spPr>
-        <p:txBody>
-          <a:bodyPr wrap="square" anchor="ctr"/>
-          <a:lstStyle/>
-          <a:p>
-            <a:pPr algn="ctr"/>
-            <a:r>
-              <a:rPr sz="1600" b="1" i="0">
-                <a:solidFill>
-                  <a:srgbClr val="FFFFFF"/>
-                </a:solidFill>
-                <a:latin typeface="Calibri"/>
-              </a:rPr>
-              <a:t>3</a:t>
-            </a:r>
-          </a:p>
-        </p:txBody>
-      </p:sp>
-      <p:sp>
-        <p:nvSpPr>
-          <p:cNvPr id="17" name="TextBox 16"/>
-          <p:cNvSpPr txBox="1"/>
-          <p:nvPr/>
-        </p:nvSpPr>
-        <p:spPr>
-          <a:xfrm>
-            <a:off x="1188720" y="4037076"/>
-            <a:ext cx="10271455" cy="886968"/>
-          </a:xfrm>
-          <a:prstGeom prst="rect">
-            <a:avLst/>
-          </a:prstGeom>
-          <a:noFill/>
-        </p:spPr>
-        <p:txBody>
-          <a:bodyPr wrap="square" anchor="ctr"/>
-          <a:lstStyle/>
-          <a:p>
-            <a:r>
-              <a:rPr sz="1500" b="1" i="0">
-                <a:solidFill>
-                  <a:srgbClr val="095292"/>
-                </a:solidFill>
-                <a:latin typeface="Calibri"/>
-              </a:rPr>
-              <a:t>Pega y renderiza en la plataforma del curso</a:t>
+              <a:t>–   El segundo error es dejar que el ensayo del pitch se convierta en un recorrido narrado del diagrama, leido en voz alta y sin una sola justificacion</a:t>
             </a:r>
           </a:p>
           <a:p>
             <a:pPr>
-              <a:spcBef>
-                <a:spcPts val="200"/>
-              </a:spcBef>
+              <a:spcAft>
+                <a:spcPts val="800"/>
+              </a:spcAft>
             </a:pPr>
             <a:r>
-              <a:rPr sz="1300" b="0" i="0">
+              <a:rPr sz="2000" b="0" i="0">
                 <a:solidFill>
                   <a:srgbClr val="333333"/>
                 </a:solidFill>
                 <a:latin typeface="Calibri"/>
               </a:rPr>
-              <a:t>Pega ese codigo en la caja de texto de la pregunta y mira como lo dibuja la plataforma. Si no renderiza, corrige ahi mismo: lo que se califica es el diagrama renderizado dentro de la plataforma del curso.</a:t>
-            </a:r>
-          </a:p>
-        </p:txBody>
-      </p:sp>
-      <p:sp>
-        <p:nvSpPr>
-          <p:cNvPr id="18" name="Rounded Rectangle 17"/>
-          <p:cNvSpPr/>
-          <p:nvPr/>
-        </p:nvSpPr>
-        <p:spPr>
-          <a:xfrm>
-            <a:off x="457200" y="5088636"/>
-            <a:ext cx="11277295" cy="1051560"/>
-          </a:xfrm>
-          <a:prstGeom prst="roundRect">
-            <a:avLst>
-              <a:gd name="adj" fmla="val 12000"/>
-            </a:avLst>
-          </a:prstGeom>
-          <a:solidFill>
-            <a:srgbClr val="E8F4FA"/>
-          </a:solidFill>
-          <a:ln>
-            <a:noFill/>
-          </a:ln>
-        </p:spPr>
-        <p:style>
-          <a:lnRef idx="1">
-            <a:schemeClr val="accent1"/>
-          </a:lnRef>
-          <a:fillRef idx="3">
-            <a:schemeClr val="accent1"/>
-          </a:fillRef>
-          <a:effectRef idx="2">
-            <a:schemeClr val="accent1"/>
-          </a:effectRef>
-          <a:fontRef idx="minor">
-            <a:schemeClr val="lt1"/>
-          </a:fontRef>
-        </p:style>
-        <p:txBody>
-          <a:bodyPr rtlCol="0" anchor="ctr"/>
-          <a:lstStyle/>
-          <a:p>
-            <a:pPr algn="ctr"/>
-          </a:p>
-        </p:txBody>
-      </p:sp>
-      <p:sp>
-        <p:nvSpPr>
-          <p:cNvPr id="19" name="Rounded Rectangle 18"/>
-          <p:cNvSpPr/>
-          <p:nvPr/>
-        </p:nvSpPr>
-        <p:spPr>
-          <a:xfrm>
-            <a:off x="594360" y="5394960"/>
-            <a:ext cx="438912" cy="438912"/>
-          </a:xfrm>
-          <a:prstGeom prst="roundRect">
-            <a:avLst>
-              <a:gd name="adj" fmla="val 12000"/>
-            </a:avLst>
-          </a:prstGeom>
-          <a:solidFill>
-            <a:srgbClr val="095292"/>
-          </a:solidFill>
-          <a:ln>
-            <a:noFill/>
-          </a:ln>
-        </p:spPr>
-        <p:style>
-          <a:lnRef idx="1">
-            <a:schemeClr val="accent1"/>
-          </a:lnRef>
-          <a:fillRef idx="3">
-            <a:schemeClr val="accent1"/>
-          </a:fillRef>
-          <a:effectRef idx="2">
-            <a:schemeClr val="accent1"/>
-          </a:effectRef>
-          <a:fontRef idx="minor">
-            <a:schemeClr val="lt1"/>
-          </a:fontRef>
-        </p:style>
-        <p:txBody>
-          <a:bodyPr rtlCol="0" anchor="ctr"/>
-          <a:lstStyle/>
-          <a:p>
-            <a:pPr algn="ctr"/>
-          </a:p>
-        </p:txBody>
-      </p:sp>
-      <p:sp>
-        <p:nvSpPr>
-          <p:cNvPr id="20" name="TextBox 19"/>
-          <p:cNvSpPr txBox="1"/>
-          <p:nvPr/>
-        </p:nvSpPr>
-        <p:spPr>
-          <a:xfrm>
-            <a:off x="594360" y="5394960"/>
-            <a:ext cx="438912" cy="438912"/>
-          </a:xfrm>
-          <a:prstGeom prst="rect">
-            <a:avLst/>
-          </a:prstGeom>
-          <a:noFill/>
-        </p:spPr>
-        <p:txBody>
-          <a:bodyPr wrap="square" anchor="ctr"/>
-          <a:lstStyle/>
-          <a:p>
-            <a:pPr algn="ctr"/>
-            <a:r>
-              <a:rPr sz="1600" b="1" i="0">
-                <a:solidFill>
-                  <a:srgbClr val="FFFFFF"/>
-                </a:solidFill>
-                <a:latin typeface="Calibri"/>
-              </a:rPr>
-              <a:t>4</a:t>
-            </a:r>
-          </a:p>
-        </p:txBody>
-      </p:sp>
-      <p:sp>
-        <p:nvSpPr>
-          <p:cNvPr id="21" name="TextBox 20"/>
-          <p:cNvSpPr txBox="1"/>
-          <p:nvPr/>
-        </p:nvSpPr>
-        <p:spPr>
-          <a:xfrm>
-            <a:off x="1188720" y="5180076"/>
-            <a:ext cx="10271455" cy="886968"/>
-          </a:xfrm>
-          <a:prstGeom prst="rect">
-            <a:avLst/>
-          </a:prstGeom>
-          <a:noFill/>
-        </p:spPr>
-        <p:txBody>
-          <a:bodyPr wrap="square" anchor="ctr"/>
-          <a:lstStyle/>
-          <a:p>
-            <a:r>
-              <a:rPr sz="1500" b="1" i="0">
-                <a:solidFill>
-                  <a:srgbClr val="095292"/>
-                </a:solidFill>
-                <a:latin typeface="Calibri"/>
-              </a:rPr>
-              <a:t>Guarda el PNG para tu PI</a:t>
+              <a:t>–   Y, en los equipos que el docente haya autorizado, permitir que un solo integrante hable mientras el resto observa.</a:t>
             </a:r>
           </a:p>
           <a:p>
             <a:pPr>
-              <a:spcBef>
-                <a:spcPts val="200"/>
-              </a:spcBef>
+              <a:spcAft>
+                <a:spcPts val="800"/>
+              </a:spcAft>
             </a:pPr>
             <a:r>
-              <a:rPr sz="1300" b="0" i="0">
+              <a:rPr sz="2000" b="0" i="0">
                 <a:solidFill>
                   <a:srgbClr val="333333"/>
                 </a:solidFill>
                 <a:latin typeface="Calibri"/>
               </a:rPr>
-              <a:t>Exporta tambien la imagen a la carpeta de tu Proyecto Integrador. Esa copia es para tu informe; no reemplaza la respuesta en la plataforma.</a:t>
-            </a:r>
-          </a:p>
-        </p:txBody>
-      </p:sp>
-      <p:sp>
-        <p:nvSpPr>
-          <p:cNvPr id="22" name="TextBox 21"/>
+              <a:t>–   Si eso no se corrige hoy, en la Clase 15 la sustentacion llega como un guion memorizado que el Q&amp;A dirigido desarma en dos preguntas, y la nota cae por una razon que era corregible con quince minutos de ensayo bien dirigido.</a:t>
+            </a:r>
+          </a:p>
+        </p:txBody>
+      </p:sp>
+      <p:sp>
+        <p:nvSpPr>
+          <p:cNvPr id="6" name="TextBox 5"/>
           <p:cNvSpPr txBox="1"/>
           <p:nvPr/>
         </p:nvSpPr>
@@ -9617,21 +7612,142 @@
                 </a:solidFill>
                 <a:latin typeface="Calibri"/>
               </a:rPr>
-              <a:t>PI CloudLite — entregable de hoy</a:t>
-            </a:r>
-          </a:p>
-        </p:txBody>
-      </p:sp>
-      <p:sp>
-        <p:nvSpPr>
-          <p:cNvPr id="5" name="TextBox 4"/>
+              <a:t>«Que sea rapido» no es un requisito</a:t>
+            </a:r>
+          </a:p>
+        </p:txBody>
+      </p:sp>
+      <p:sp>
+        <p:nvSpPr>
+          <p:cNvPr id="5" name="Rounded Rectangle 4"/>
+          <p:cNvSpPr/>
+          <p:nvPr/>
+        </p:nvSpPr>
+        <p:spPr>
+          <a:xfrm>
+            <a:off x="457200" y="1261872"/>
+            <a:ext cx="5478627" cy="5093208"/>
+          </a:xfrm>
+          <a:prstGeom prst="roundRect">
+            <a:avLst>
+              <a:gd name="adj" fmla="val 12000"/>
+            </a:avLst>
+          </a:prstGeom>
+          <a:solidFill>
+            <a:srgbClr val="FBE4E4"/>
+          </a:solidFill>
+          <a:ln>
+            <a:noFill/>
+          </a:ln>
+        </p:spPr>
+        <p:style>
+          <a:lnRef idx="1">
+            <a:schemeClr val="accent1"/>
+          </a:lnRef>
+          <a:fillRef idx="3">
+            <a:schemeClr val="accent1"/>
+          </a:fillRef>
+          <a:effectRef idx="2">
+            <a:schemeClr val="accent1"/>
+          </a:effectRef>
+          <a:fontRef idx="minor">
+            <a:schemeClr val="lt1"/>
+          </a:fontRef>
+        </p:style>
+        <p:txBody>
+          <a:bodyPr rtlCol="0" anchor="ctr"/>
+          <a:lstStyle/>
+          <a:p>
+            <a:pPr algn="ctr"/>
+          </a:p>
+        </p:txBody>
+      </p:sp>
+      <p:sp>
+        <p:nvSpPr>
+          <p:cNvPr id="6" name="Rectangle 5"/>
+          <p:cNvSpPr/>
+          <p:nvPr/>
+        </p:nvSpPr>
+        <p:spPr>
+          <a:xfrm>
+            <a:off x="457200" y="1261872"/>
+            <a:ext cx="5478627" cy="502920"/>
+          </a:xfrm>
+          <a:prstGeom prst="rect">
+            <a:avLst/>
+          </a:prstGeom>
+          <a:solidFill>
+            <a:srgbClr val="A02030"/>
+          </a:solidFill>
+          <a:ln>
+            <a:noFill/>
+          </a:ln>
+        </p:spPr>
+        <p:style>
+          <a:lnRef idx="1">
+            <a:schemeClr val="accent1"/>
+          </a:lnRef>
+          <a:fillRef idx="3">
+            <a:schemeClr val="accent1"/>
+          </a:fillRef>
+          <a:effectRef idx="2">
+            <a:schemeClr val="accent1"/>
+          </a:effectRef>
+          <a:fontRef idx="minor">
+            <a:schemeClr val="lt1"/>
+          </a:fontRef>
+        </p:style>
+        <p:txBody>
+          <a:bodyPr rtlCol="0" anchor="ctr"/>
+          <a:lstStyle/>
+          <a:p>
+            <a:pPr algn="ctr"/>
+          </a:p>
+        </p:txBody>
+      </p:sp>
+      <p:sp>
+        <p:nvSpPr>
+          <p:cNvPr id="7" name="TextBox 6"/>
           <p:cNvSpPr txBox="1"/>
           <p:nvPr/>
         </p:nvSpPr>
         <p:spPr>
           <a:xfrm>
-            <a:off x="457200" y="1170432"/>
-            <a:ext cx="11277295" cy="5230368"/>
+            <a:off x="594360" y="1353312"/>
+            <a:ext cx="5204307" cy="365760"/>
+          </a:xfrm>
+          <a:prstGeom prst="rect">
+            <a:avLst/>
+          </a:prstGeom>
+          <a:noFill/>
+        </p:spPr>
+        <p:txBody>
+          <a:bodyPr wrap="square" anchor="ctr"/>
+          <a:lstStyle/>
+          <a:p>
+            <a:pPr algn="ctr"/>
+            <a:r>
+              <a:rPr sz="1600" b="1" i="0">
+                <a:solidFill>
+                  <a:srgbClr val="FFFFFF"/>
+                </a:solidFill>
+                <a:latin typeface="Calibri"/>
+              </a:rPr>
+              <a:t>Enunciado vago</a:t>
+            </a:r>
+          </a:p>
+        </p:txBody>
+      </p:sp>
+      <p:sp>
+        <p:nvSpPr>
+          <p:cNvPr id="8" name="TextBox 7"/>
+          <p:cNvSpPr txBox="1"/>
+          <p:nvPr/>
+        </p:nvSpPr>
+        <p:spPr>
+          <a:xfrm>
+            <a:off x="621792" y="1901952"/>
+            <a:ext cx="5158587" cy="4498848"/>
           </a:xfrm>
           <a:prstGeom prst="rect">
             <a:avLst/>
@@ -9650,31 +7766,13 @@
               </a:spcAft>
             </a:pPr>
             <a:r>
-              <a:rPr sz="2000" b="0" i="0">
+              <a:rPr sz="1500" b="0" i="0">
                 <a:solidFill>
                   <a:srgbClr val="333333"/>
                 </a:solidFill>
                 <a:latin typeface="Calibri"/>
               </a:rPr>
-              <a:t>–   </a:t>
-            </a:r>
-            <a:r>
-              <a:rPr sz="2000" b="1" i="0">
-                <a:solidFill>
-                  <a:srgbClr val="333333"/>
-                </a:solidFill>
-                <a:latin typeface="Calibri"/>
-              </a:rPr>
-              <a:t>Entregable:</a:t>
-            </a:r>
-            <a:r>
-              <a:rPr sz="2000" b="0" i="0">
-                <a:solidFill>
-                  <a:srgbClr val="333333"/>
-                </a:solidFill>
-                <a:latin typeface="Calibri"/>
-              </a:rPr>
-              <a:t> Sección Rendimiento + guion de pitch + paquete casi-final</a:t>
+              <a:t>–   «La app tiene que ser rapida»</a:t>
             </a:r>
           </a:p>
           <a:p>
@@ -9684,22 +7782,13 @@
               </a:spcAft>
             </a:pPr>
             <a:r>
-              <a:rPr sz="2000" b="0" i="0">
+              <a:rPr sz="1500" b="0" i="0">
                 <a:solidFill>
                   <a:srgbClr val="333333"/>
                 </a:solidFill>
                 <a:latin typeface="Calibri"/>
               </a:rPr>
-              <a:t>–   Herramienta: </a:t>
-            </a:r>
-            <a:r>
-              <a:rPr sz="2000" b="1" i="0">
-                <a:solidFill>
-                  <a:srgbClr val="333333"/>
-                </a:solidFill>
-                <a:latin typeface="Calibri"/>
-              </a:rPr>
-              <a:t>Google Docs · draw.io · (opcional) lab contenedor</a:t>
+              <a:t>–   «Aguanta harta gente»</a:t>
             </a:r>
           </a:p>
           <a:p>
@@ -9709,31 +7798,13 @@
               </a:spcAft>
             </a:pPr>
             <a:r>
-              <a:rPr sz="2000" b="0" i="0">
+              <a:rPr sz="1500" b="0" i="0">
                 <a:solidFill>
                   <a:srgbClr val="333333"/>
                 </a:solidFill>
                 <a:latin typeface="Calibri"/>
               </a:rPr>
-              <a:t>–   Todo lo que construyan hoy entra al </a:t>
-            </a:r>
-            <a:r>
-              <a:rPr sz="2000" b="1" i="0">
-                <a:solidFill>
-                  <a:srgbClr val="333333"/>
-                </a:solidFill>
-                <a:latin typeface="Calibri"/>
-              </a:rPr>
-              <a:t>informe/repo del PI</a:t>
-            </a:r>
-            <a:r>
-              <a:rPr sz="2000" b="0" i="0">
-                <a:solidFill>
-                  <a:srgbClr val="333333"/>
-                </a:solidFill>
-                <a:latin typeface="Calibri"/>
-              </a:rPr>
-              <a:t> (no es lab suelto).</a:t>
+              <a:t>–   «Si se pone lenta, le subimos recursos»</a:t>
             </a:r>
           </a:p>
           <a:p>
@@ -9743,20 +7814,273 @@
               </a:spcAft>
             </a:pPr>
             <a:r>
-              <a:rPr sz="2000" b="0" i="0">
+              <a:rPr sz="1500" b="0" i="0">
                 <a:solidFill>
                   <a:srgbClr val="333333"/>
                 </a:solidFill>
                 <a:latin typeface="Calibri"/>
               </a:rPr>
-              <a:t>–   Individual por defecto · el docente puede autorizar equipos de 2–3; la entrega en la plataforma del curso siempre es individual.</a:t>
-            </a:r>
-          </a:p>
-        </p:txBody>
-      </p:sp>
-      <p:sp>
-        <p:nvSpPr>
-          <p:cNvPr id="6" name="TextBox 5"/>
+              <a:t>–   No hay con que comparar despues</a:t>
+            </a:r>
+          </a:p>
+        </p:txBody>
+      </p:sp>
+      <p:sp>
+        <p:nvSpPr>
+          <p:cNvPr id="9" name="Rounded Rectangle 8"/>
+          <p:cNvSpPr/>
+          <p:nvPr/>
+        </p:nvSpPr>
+        <p:spPr>
+          <a:xfrm>
+            <a:off x="6255867" y="1261872"/>
+            <a:ext cx="5478627" cy="5093208"/>
+          </a:xfrm>
+          <a:prstGeom prst="roundRect">
+            <a:avLst>
+              <a:gd name="adj" fmla="val 12000"/>
+            </a:avLst>
+          </a:prstGeom>
+          <a:solidFill>
+            <a:srgbClr val="E8F4FA"/>
+          </a:solidFill>
+          <a:ln>
+            <a:noFill/>
+          </a:ln>
+        </p:spPr>
+        <p:style>
+          <a:lnRef idx="1">
+            <a:schemeClr val="accent1"/>
+          </a:lnRef>
+          <a:fillRef idx="3">
+            <a:schemeClr val="accent1"/>
+          </a:fillRef>
+          <a:effectRef idx="2">
+            <a:schemeClr val="accent1"/>
+          </a:effectRef>
+          <a:fontRef idx="minor">
+            <a:schemeClr val="lt1"/>
+          </a:fontRef>
+        </p:style>
+        <p:txBody>
+          <a:bodyPr rtlCol="0" anchor="ctr"/>
+          <a:lstStyle/>
+          <a:p>
+            <a:pPr algn="ctr"/>
+          </a:p>
+        </p:txBody>
+      </p:sp>
+      <p:sp>
+        <p:nvSpPr>
+          <p:cNvPr id="10" name="Rectangle 9"/>
+          <p:cNvSpPr/>
+          <p:nvPr/>
+        </p:nvSpPr>
+        <p:spPr>
+          <a:xfrm>
+            <a:off x="6255867" y="1261872"/>
+            <a:ext cx="5478627" cy="502920"/>
+          </a:xfrm>
+          <a:prstGeom prst="rect">
+            <a:avLst/>
+          </a:prstGeom>
+          <a:solidFill>
+            <a:srgbClr val="095292"/>
+          </a:solidFill>
+          <a:ln>
+            <a:noFill/>
+          </a:ln>
+        </p:spPr>
+        <p:style>
+          <a:lnRef idx="1">
+            <a:schemeClr val="accent1"/>
+          </a:lnRef>
+          <a:fillRef idx="3">
+            <a:schemeClr val="accent1"/>
+          </a:fillRef>
+          <a:effectRef idx="2">
+            <a:schemeClr val="accent1"/>
+          </a:effectRef>
+          <a:fontRef idx="minor">
+            <a:schemeClr val="lt1"/>
+          </a:fontRef>
+        </p:style>
+        <p:txBody>
+          <a:bodyPr rtlCol="0" anchor="ctr"/>
+          <a:lstStyle/>
+          <a:p>
+            <a:pPr algn="ctr"/>
+          </a:p>
+        </p:txBody>
+      </p:sp>
+      <p:sp>
+        <p:nvSpPr>
+          <p:cNvPr id="11" name="TextBox 10"/>
+          <p:cNvSpPr txBox="1"/>
+          <p:nvPr/>
+        </p:nvSpPr>
+        <p:spPr>
+          <a:xfrm>
+            <a:off x="6393027" y="1353312"/>
+            <a:ext cx="5204307" cy="365760"/>
+          </a:xfrm>
+          <a:prstGeom prst="rect">
+            <a:avLst/>
+          </a:prstGeom>
+          <a:noFill/>
+        </p:spPr>
+        <p:txBody>
+          <a:bodyPr wrap="square" anchor="ctr"/>
+          <a:lstStyle/>
+          <a:p>
+            <a:pPr algn="ctr"/>
+            <a:r>
+              <a:rPr sz="1600" b="1" i="0">
+                <a:solidFill>
+                  <a:srgbClr val="FFFFFF"/>
+                </a:solidFill>
+                <a:latin typeface="Calibri"/>
+              </a:rPr>
+              <a:t>Enunciado medible</a:t>
+            </a:r>
+          </a:p>
+        </p:txBody>
+      </p:sp>
+      <p:sp>
+        <p:nvSpPr>
+          <p:cNvPr id="12" name="TextBox 11"/>
+          <p:cNvSpPr txBox="1"/>
+          <p:nvPr/>
+        </p:nvSpPr>
+        <p:spPr>
+          <a:xfrm>
+            <a:off x="6420459" y="1901952"/>
+            <a:ext cx="5158587" cy="4498848"/>
+          </a:xfrm>
+          <a:prstGeom prst="rect">
+            <a:avLst/>
+          </a:prstGeom>
+          <a:noFill/>
+        </p:spPr>
+        <p:txBody>
+          <a:bodyPr wrap="square">
+            <a:spAutoFit/>
+          </a:bodyPr>
+          <a:lstStyle/>
+          <a:p>
+            <a:pPr>
+              <a:spcAft>
+                <a:spcPts val="800"/>
+              </a:spcAft>
+            </a:pPr>
+            <a:r>
+              <a:rPr sz="1500" b="0" i="0">
+                <a:solidFill>
+                  <a:srgbClr val="333333"/>
+                </a:solidFill>
+                <a:latin typeface="Calibri"/>
+              </a:rPr>
+              <a:t>–   </a:t>
+            </a:r>
+            <a:r>
+              <a:rPr sz="1500" b="1" i="0">
+                <a:solidFill>
+                  <a:srgbClr val="333333"/>
+                </a:solidFill>
+                <a:latin typeface="Calibri"/>
+              </a:rPr>
+              <a:t>p95 &lt; 300 ms</a:t>
+            </a:r>
+            <a:r>
+              <a:rPr sz="1500" b="0" i="0">
+                <a:solidFill>
+                  <a:srgbClr val="333333"/>
+                </a:solidFill>
+                <a:latin typeface="Calibri"/>
+              </a:rPr>
+              <a:t> en el endpoint de reserva</a:t>
+            </a:r>
+          </a:p>
+          <a:p>
+            <a:pPr>
+              <a:spcAft>
+                <a:spcPts val="800"/>
+              </a:spcAft>
+            </a:pPr>
+            <a:r>
+              <a:rPr sz="1500" b="0" i="0">
+                <a:solidFill>
+                  <a:srgbClr val="333333"/>
+                </a:solidFill>
+                <a:latin typeface="Calibri"/>
+              </a:rPr>
+              <a:t>–   Escenario: </a:t>
+            </a:r>
+            <a:r>
+              <a:rPr sz="1500" b="1" i="0">
+                <a:solidFill>
+                  <a:srgbClr val="333333"/>
+                </a:solidFill>
+                <a:latin typeface="Calibri"/>
+              </a:rPr>
+              <a:t>150 RPS</a:t>
+            </a:r>
+            <a:r>
+              <a:rPr sz="1500" b="0" i="0">
+                <a:solidFill>
+                  <a:srgbClr val="333333"/>
+                </a:solidFill>
+                <a:latin typeface="Calibri"/>
+              </a:rPr>
+              <a:t> en el pico de inicio de semestre</a:t>
+            </a:r>
+          </a:p>
+          <a:p>
+            <a:pPr>
+              <a:spcAft>
+                <a:spcPts val="800"/>
+              </a:spcAft>
+            </a:pPr>
+            <a:r>
+              <a:rPr sz="1500" b="0" i="0">
+                <a:solidFill>
+                  <a:srgbClr val="333333"/>
+                </a:solidFill>
+                <a:latin typeface="Calibri"/>
+              </a:rPr>
+              <a:t>–   Bottleneck sospechado: </a:t>
+            </a:r>
+            <a:r>
+              <a:rPr sz="1500" b="1" i="0">
+                <a:solidFill>
+                  <a:srgbClr val="333333"/>
+                </a:solidFill>
+                <a:latin typeface="Calibri"/>
+              </a:rPr>
+              <a:t>consulta a la BD</a:t>
+            </a:r>
+          </a:p>
+          <a:p>
+            <a:pPr>
+              <a:spcAft>
+                <a:spcPts val="800"/>
+              </a:spcAft>
+            </a:pPr>
+            <a:r>
+              <a:rPr sz="1500" b="0" i="0">
+                <a:solidFill>
+                  <a:srgbClr val="333333"/>
+                </a:solidFill>
+                <a:latin typeface="Calibri"/>
+              </a:rPr>
+              <a:t>–   Se puede verificar: pasa o no pasa</a:t>
+            </a:r>
+          </a:p>
+        </p:txBody>
+      </p:sp>
+      <p:sp>
+        <p:nvSpPr>
+          <p:cNvPr id="13" name="TextBox 12"/>
           <p:cNvSpPr txBox="1"/>
           <p:nvPr/>
         </p:nvSpPr>
@@ -9824,7 +8148,7 @@
         <p:spPr>
           <a:xfrm>
             <a:off x="0" y="0"/>
-            <a:ext cx="12191695" cy="960120"/>
+            <a:ext cx="12191695" cy="1170432"/>
           </a:xfrm>
           <a:prstGeom prst="rect">
             <a:avLst/>
@@ -9866,7 +8190,7 @@
         </p:nvSpPr>
         <p:spPr>
           <a:xfrm>
-            <a:off x="0" y="960120"/>
+            <a:off x="0" y="1170432"/>
             <a:ext cx="12191695" cy="41148"/>
           </a:xfrm>
           <a:prstGeom prst="rect">
@@ -9910,7 +8234,7 @@
         <p:spPr>
           <a:xfrm>
             <a:off x="457200" y="164592"/>
-            <a:ext cx="11277295" cy="502920"/>
+            <a:ext cx="11277295" cy="384048"/>
           </a:xfrm>
           <a:prstGeom prst="rect">
             <a:avLst/>
@@ -9930,7 +8254,7 @@
                 </a:solidFill>
                 <a:latin typeface="Calibri"/>
               </a:rPr>
-              <a:t>Manos a la obra (paso a paso)</a:t>
+              <a:t>Herramientas de hoy</a:t>
             </a:r>
           </a:p>
         </p:txBody>
@@ -9943,8 +8267,8 @@
         </p:nvSpPr>
         <p:spPr>
           <a:xfrm>
-            <a:off x="457200" y="1170432"/>
-            <a:ext cx="11277295" cy="5230368"/>
+            <a:off x="457200" y="566928"/>
+            <a:ext cx="11277295" cy="411480"/>
           </a:xfrm>
           <a:prstGeom prst="rect">
             <a:avLst/>
@@ -9957,171 +8281,837 @@
           </a:bodyPr>
           <a:lstStyle/>
           <a:p>
-            <a:pPr>
-              <a:spcAft>
-                <a:spcPts val="800"/>
-              </a:spcAft>
+            <a:r>
+              <a:rPr sz="1400" b="0" i="0">
+                <a:solidFill>
+                  <a:srgbClr val="B8D8EE"/>
+                </a:solidFill>
+                <a:latin typeface="Calibri"/>
+              </a:rPr>
+              <a:t>Gratis · navegador o free tier · sin cuenta de pago</a:t>
+            </a:r>
+          </a:p>
+        </p:txBody>
+      </p:sp>
+      <p:sp>
+        <p:nvSpPr>
+          <p:cNvPr id="6" name="Rounded Rectangle 5"/>
+          <p:cNvSpPr/>
+          <p:nvPr/>
+        </p:nvSpPr>
+        <p:spPr>
+          <a:xfrm>
+            <a:off x="457200" y="1591056"/>
+            <a:ext cx="3624986" cy="2299716"/>
+          </a:xfrm>
+          <a:prstGeom prst="roundRect">
+            <a:avLst>
+              <a:gd name="adj" fmla="val 12000"/>
+            </a:avLst>
+          </a:prstGeom>
+          <a:solidFill>
+            <a:srgbClr val="F2F2F2"/>
+          </a:solidFill>
+          <a:ln>
+            <a:noFill/>
+          </a:ln>
+        </p:spPr>
+        <p:style>
+          <a:lnRef idx="1">
+            <a:schemeClr val="accent1"/>
+          </a:lnRef>
+          <a:fillRef idx="3">
+            <a:schemeClr val="accent1"/>
+          </a:fillRef>
+          <a:effectRef idx="2">
+            <a:schemeClr val="accent1"/>
+          </a:effectRef>
+          <a:fontRef idx="minor">
+            <a:schemeClr val="lt1"/>
+          </a:fontRef>
+        </p:style>
+        <p:txBody>
+          <a:bodyPr rtlCol="0" anchor="ctr"/>
+          <a:lstStyle/>
+          <a:p>
+            <a:pPr algn="ctr"/>
+          </a:p>
+        </p:txBody>
+      </p:sp>
+      <p:sp>
+        <p:nvSpPr>
+          <p:cNvPr id="7" name="Rectangle 6"/>
+          <p:cNvSpPr/>
+          <p:nvPr/>
+        </p:nvSpPr>
+        <p:spPr>
+          <a:xfrm>
+            <a:off x="457200" y="1591056"/>
+            <a:ext cx="3624986" cy="64008"/>
+          </a:xfrm>
+          <a:prstGeom prst="rect">
+            <a:avLst/>
+          </a:prstGeom>
+          <a:solidFill>
+            <a:srgbClr val="095292"/>
+          </a:solidFill>
+          <a:ln>
+            <a:noFill/>
+          </a:ln>
+        </p:spPr>
+        <p:style>
+          <a:lnRef idx="1">
+            <a:schemeClr val="accent1"/>
+          </a:lnRef>
+          <a:fillRef idx="3">
+            <a:schemeClr val="accent1"/>
+          </a:fillRef>
+          <a:effectRef idx="2">
+            <a:schemeClr val="accent1"/>
+          </a:effectRef>
+          <a:fontRef idx="minor">
+            <a:schemeClr val="lt1"/>
+          </a:fontRef>
+        </p:style>
+        <p:txBody>
+          <a:bodyPr rtlCol="0" anchor="ctr"/>
+          <a:lstStyle/>
+          <a:p>
+            <a:pPr algn="ctr"/>
+          </a:p>
+        </p:txBody>
+      </p:sp>
+      <p:sp>
+        <p:nvSpPr>
+          <p:cNvPr id="8" name="Rectangle 7"/>
+          <p:cNvSpPr/>
+          <p:nvPr/>
+        </p:nvSpPr>
+        <p:spPr>
+          <a:xfrm>
+            <a:off x="457200" y="1655064"/>
+            <a:ext cx="3624986" cy="27432"/>
+          </a:xfrm>
+          <a:prstGeom prst="rect">
+            <a:avLst/>
+          </a:prstGeom>
+          <a:solidFill>
+            <a:srgbClr val="FFD000"/>
+          </a:solidFill>
+          <a:ln>
+            <a:noFill/>
+          </a:ln>
+        </p:spPr>
+        <p:style>
+          <a:lnRef idx="1">
+            <a:schemeClr val="accent1"/>
+          </a:lnRef>
+          <a:fillRef idx="3">
+            <a:schemeClr val="accent1"/>
+          </a:fillRef>
+          <a:effectRef idx="2">
+            <a:schemeClr val="accent1"/>
+          </a:effectRef>
+          <a:fontRef idx="minor">
+            <a:schemeClr val="lt1"/>
+          </a:fontRef>
+        </p:style>
+        <p:txBody>
+          <a:bodyPr rtlCol="0" anchor="ctr"/>
+          <a:lstStyle/>
+          <a:p>
+            <a:pPr algn="ctr"/>
+          </a:p>
+        </p:txBody>
+      </p:sp>
+      <p:pic>
+        <p:nvPicPr>
+          <p:cNvPr id="9" name="Picture 8" descr="google_docs.png"/>
+          <p:cNvPicPr>
+            <a:picLocks noChangeAspect="1"/>
+          </p:cNvPicPr>
+          <p:nvPr/>
+        </p:nvPicPr>
+        <p:blipFill>
+          <a:blip r:embed="rId2"/>
+          <a:stretch>
+            <a:fillRect/>
+          </a:stretch>
+        </p:blipFill>
+        <p:spPr>
+          <a:xfrm>
+            <a:off x="1659331" y="1847087"/>
+            <a:ext cx="1220724" cy="1220724"/>
+          </a:xfrm>
+          <a:prstGeom prst="rect">
+            <a:avLst/>
+          </a:prstGeom>
+        </p:spPr>
+      </p:pic>
+      <p:sp>
+        <p:nvSpPr>
+          <p:cNvPr id="10" name="TextBox 9"/>
+          <p:cNvSpPr txBox="1"/>
+          <p:nvPr/>
+        </p:nvSpPr>
+        <p:spPr>
+          <a:xfrm>
+            <a:off x="530352" y="3159251"/>
+            <a:ext cx="3478682" cy="621792"/>
+          </a:xfrm>
+          <a:prstGeom prst="rect">
+            <a:avLst/>
+          </a:prstGeom>
+          <a:noFill/>
+        </p:spPr>
+        <p:txBody>
+          <a:bodyPr wrap="square" anchor="t"/>
+          <a:lstStyle/>
+          <a:p>
+            <a:pPr algn="ctr"/>
+            <a:r>
+              <a:rPr sz="1300" b="1" i="0">
+                <a:solidFill>
+                  <a:srgbClr val="095292"/>
+                </a:solidFill>
+                <a:latin typeface="Calibri"/>
+              </a:rPr>
+              <a:t>Google Docs</a:t>
+            </a:r>
+          </a:p>
+          <a:p>
+            <a:pPr algn="ctr">
+              <a:spcBef>
+                <a:spcPts val="200"/>
+              </a:spcBef>
             </a:pPr>
             <a:r>
-              <a:rPr sz="1600" b="1" i="0">
-                <a:solidFill>
-                  <a:srgbClr val="333333"/>
-                </a:solidFill>
-                <a:latin typeface="Calibri"/>
-              </a:rPr>
-              <a:t>1.</a:t>
-            </a:r>
-            <a:r>
-              <a:rPr sz="1600" b="0" i="0">
-                <a:solidFill>
-                  <a:srgbClr val="333333"/>
-                </a:solidFill>
-                <a:latin typeface="Calibri"/>
-              </a:rPr>
-              <a:t> Paso 1: describan el escenario de carga del pico real de su dominio con los 6 datos obligatorios (evento del pico, usuarios concurrentes, peticiones por segundo, mezcla de operaciones en porcentajes que sumen 100, duracion de la ventana y volumen de datos de partida), verificando que la mezcla sume exactamente 100 por ciento y que el pico corresponda a una fecha real del calendario de su dominio.</a:t>
-            </a:r>
-          </a:p>
-          <a:p>
-            <a:pPr>
-              <a:spcAft>
-                <a:spcPts val="800"/>
-              </a:spcAft>
+              <a:rPr sz="1000" b="0" i="0">
+                <a:solidFill>
+                  <a:srgbClr val="666666"/>
+                </a:solidFill>
+                <a:latin typeface="Calibri"/>
+              </a:rPr>
+              <a:t>Objetivo de rendimiento</a:t>
+            </a:r>
+          </a:p>
+        </p:txBody>
+      </p:sp>
+      <p:sp>
+        <p:nvSpPr>
+          <p:cNvPr id="11" name="Rounded Rectangle 10"/>
+          <p:cNvSpPr/>
+          <p:nvPr/>
+        </p:nvSpPr>
+        <p:spPr>
+          <a:xfrm>
+            <a:off x="4283354" y="1591056"/>
+            <a:ext cx="3624986" cy="2299716"/>
+          </a:xfrm>
+          <a:prstGeom prst="roundRect">
+            <a:avLst>
+              <a:gd name="adj" fmla="val 12000"/>
+            </a:avLst>
+          </a:prstGeom>
+          <a:solidFill>
+            <a:srgbClr val="F2F2F2"/>
+          </a:solidFill>
+          <a:ln>
+            <a:noFill/>
+          </a:ln>
+        </p:spPr>
+        <p:style>
+          <a:lnRef idx="1">
+            <a:schemeClr val="accent1"/>
+          </a:lnRef>
+          <a:fillRef idx="3">
+            <a:schemeClr val="accent1"/>
+          </a:fillRef>
+          <a:effectRef idx="2">
+            <a:schemeClr val="accent1"/>
+          </a:effectRef>
+          <a:fontRef idx="minor">
+            <a:schemeClr val="lt1"/>
+          </a:fontRef>
+        </p:style>
+        <p:txBody>
+          <a:bodyPr rtlCol="0" anchor="ctr"/>
+          <a:lstStyle/>
+          <a:p>
+            <a:pPr algn="ctr"/>
+          </a:p>
+        </p:txBody>
+      </p:sp>
+      <p:sp>
+        <p:nvSpPr>
+          <p:cNvPr id="12" name="Rectangle 11"/>
+          <p:cNvSpPr/>
+          <p:nvPr/>
+        </p:nvSpPr>
+        <p:spPr>
+          <a:xfrm>
+            <a:off x="4283354" y="1591056"/>
+            <a:ext cx="3624986" cy="64008"/>
+          </a:xfrm>
+          <a:prstGeom prst="rect">
+            <a:avLst/>
+          </a:prstGeom>
+          <a:solidFill>
+            <a:srgbClr val="095292"/>
+          </a:solidFill>
+          <a:ln>
+            <a:noFill/>
+          </a:ln>
+        </p:spPr>
+        <p:style>
+          <a:lnRef idx="1">
+            <a:schemeClr val="accent1"/>
+          </a:lnRef>
+          <a:fillRef idx="3">
+            <a:schemeClr val="accent1"/>
+          </a:fillRef>
+          <a:effectRef idx="2">
+            <a:schemeClr val="accent1"/>
+          </a:effectRef>
+          <a:fontRef idx="minor">
+            <a:schemeClr val="lt1"/>
+          </a:fontRef>
+        </p:style>
+        <p:txBody>
+          <a:bodyPr rtlCol="0" anchor="ctr"/>
+          <a:lstStyle/>
+          <a:p>
+            <a:pPr algn="ctr"/>
+          </a:p>
+        </p:txBody>
+      </p:sp>
+      <p:sp>
+        <p:nvSpPr>
+          <p:cNvPr id="13" name="Rectangle 12"/>
+          <p:cNvSpPr/>
+          <p:nvPr/>
+        </p:nvSpPr>
+        <p:spPr>
+          <a:xfrm>
+            <a:off x="4283354" y="1655064"/>
+            <a:ext cx="3624986" cy="27432"/>
+          </a:xfrm>
+          <a:prstGeom prst="rect">
+            <a:avLst/>
+          </a:prstGeom>
+          <a:solidFill>
+            <a:srgbClr val="FFD000"/>
+          </a:solidFill>
+          <a:ln>
+            <a:noFill/>
+          </a:ln>
+        </p:spPr>
+        <p:style>
+          <a:lnRef idx="1">
+            <a:schemeClr val="accent1"/>
+          </a:lnRef>
+          <a:fillRef idx="3">
+            <a:schemeClr val="accent1"/>
+          </a:fillRef>
+          <a:effectRef idx="2">
+            <a:schemeClr val="accent1"/>
+          </a:effectRef>
+          <a:fontRef idx="minor">
+            <a:schemeClr val="lt1"/>
+          </a:fontRef>
+        </p:style>
+        <p:txBody>
+          <a:bodyPr rtlCol="0" anchor="ctr"/>
+          <a:lstStyle/>
+          <a:p>
+            <a:pPr algn="ctr"/>
+          </a:p>
+        </p:txBody>
+      </p:sp>
+      <p:pic>
+        <p:nvPicPr>
+          <p:cNvPr id="14" name="Picture 13" descr="drawio.png"/>
+          <p:cNvPicPr>
+            <a:picLocks noChangeAspect="1"/>
+          </p:cNvPicPr>
+          <p:nvPr/>
+        </p:nvPicPr>
+        <p:blipFill>
+          <a:blip r:embed="rId3"/>
+          <a:stretch>
+            <a:fillRect/>
+          </a:stretch>
+        </p:blipFill>
+        <p:spPr>
+          <a:xfrm>
+            <a:off x="5485485" y="1847087"/>
+            <a:ext cx="1220724" cy="1220724"/>
+          </a:xfrm>
+          <a:prstGeom prst="rect">
+            <a:avLst/>
+          </a:prstGeom>
+        </p:spPr>
+      </p:pic>
+      <p:sp>
+        <p:nvSpPr>
+          <p:cNvPr id="15" name="TextBox 14"/>
+          <p:cNvSpPr txBox="1"/>
+          <p:nvPr/>
+        </p:nvSpPr>
+        <p:spPr>
+          <a:xfrm>
+            <a:off x="4356506" y="3159251"/>
+            <a:ext cx="3478682" cy="621792"/>
+          </a:xfrm>
+          <a:prstGeom prst="rect">
+            <a:avLst/>
+          </a:prstGeom>
+          <a:noFill/>
+        </p:spPr>
+        <p:txBody>
+          <a:bodyPr wrap="square" anchor="t"/>
+          <a:lstStyle/>
+          <a:p>
+            <a:pPr algn="ctr"/>
+            <a:r>
+              <a:rPr sz="1300" b="1" i="0">
+                <a:solidFill>
+                  <a:srgbClr val="095292"/>
+                </a:solidFill>
+                <a:latin typeface="Calibri"/>
+              </a:rPr>
+              <a:t>draw.io</a:t>
+            </a:r>
+          </a:p>
+          <a:p>
+            <a:pPr algn="ctr">
+              <a:spcBef>
+                <a:spcPts val="200"/>
+              </a:spcBef>
             </a:pPr>
             <a:r>
-              <a:rPr sz="1600" b="0" i="0">
-                <a:solidFill>
-                  <a:srgbClr val="333333"/>
-                </a:solidFill>
-                <a:latin typeface="Calibri"/>
-              </a:rPr>
-              <a:t>–   </a:t>
-            </a:r>
-            <a:r>
-              <a:rPr sz="1600" b="1" i="0">
-                <a:solidFill>
-                  <a:srgbClr val="333333"/>
-                </a:solidFill>
-                <a:latin typeface="Calibri"/>
-              </a:rPr>
-              <a:t>2.</a:t>
-            </a:r>
-            <a:r>
-              <a:rPr sz="1600" b="0" i="0">
-                <a:solidFill>
-                  <a:srgbClr val="333333"/>
-                </a:solidFill>
-                <a:latin typeface="Calibri"/>
-              </a:rPr>
-              <a:t> Paso 2: definan las 3 metricas objetivo en una tabla de 4 columnas con numero, ventana de medicion, forma de medirla y consecuencia de incumplirla, verificando que cada objetivo tenga un numero y una ventana (por ejemplo p95 por debajo de 800 ms en 5 minutos) y que ninguna diga rapido o aceptable sin cifra.</a:t>
-            </a:r>
-          </a:p>
-          <a:p>
-            <a:pPr>
-              <a:spcAft>
-                <a:spcPts val="800"/>
-              </a:spcAft>
+              <a:rPr sz="1000" b="0" i="0">
+                <a:solidFill>
+                  <a:srgbClr val="666666"/>
+                </a:solidFill>
+                <a:latin typeface="Calibri"/>
+              </a:rPr>
+              <a:t>Bottleneck</a:t>
+            </a:r>
+          </a:p>
+        </p:txBody>
+      </p:sp>
+      <p:sp>
+        <p:nvSpPr>
+          <p:cNvPr id="16" name="Rounded Rectangle 15"/>
+          <p:cNvSpPr/>
+          <p:nvPr/>
+        </p:nvSpPr>
+        <p:spPr>
+          <a:xfrm>
+            <a:off x="8109508" y="1591056"/>
+            <a:ext cx="3624986" cy="2299716"/>
+          </a:xfrm>
+          <a:prstGeom prst="roundRect">
+            <a:avLst>
+              <a:gd name="adj" fmla="val 12000"/>
+            </a:avLst>
+          </a:prstGeom>
+          <a:solidFill>
+            <a:srgbClr val="F2F2F2"/>
+          </a:solidFill>
+          <a:ln>
+            <a:noFill/>
+          </a:ln>
+        </p:spPr>
+        <p:style>
+          <a:lnRef idx="1">
+            <a:schemeClr val="accent1"/>
+          </a:lnRef>
+          <a:fillRef idx="3">
+            <a:schemeClr val="accent1"/>
+          </a:fillRef>
+          <a:effectRef idx="2">
+            <a:schemeClr val="accent1"/>
+          </a:effectRef>
+          <a:fontRef idx="minor">
+            <a:schemeClr val="lt1"/>
+          </a:fontRef>
+        </p:style>
+        <p:txBody>
+          <a:bodyPr rtlCol="0" anchor="ctr"/>
+          <a:lstStyle/>
+          <a:p>
+            <a:pPr algn="ctr"/>
+          </a:p>
+        </p:txBody>
+      </p:sp>
+      <p:sp>
+        <p:nvSpPr>
+          <p:cNvPr id="17" name="Rectangle 16"/>
+          <p:cNvSpPr/>
+          <p:nvPr/>
+        </p:nvSpPr>
+        <p:spPr>
+          <a:xfrm>
+            <a:off x="8109508" y="1591056"/>
+            <a:ext cx="3624986" cy="64008"/>
+          </a:xfrm>
+          <a:prstGeom prst="rect">
+            <a:avLst/>
+          </a:prstGeom>
+          <a:solidFill>
+            <a:srgbClr val="095292"/>
+          </a:solidFill>
+          <a:ln>
+            <a:noFill/>
+          </a:ln>
+        </p:spPr>
+        <p:style>
+          <a:lnRef idx="1">
+            <a:schemeClr val="accent1"/>
+          </a:lnRef>
+          <a:fillRef idx="3">
+            <a:schemeClr val="accent1"/>
+          </a:fillRef>
+          <a:effectRef idx="2">
+            <a:schemeClr val="accent1"/>
+          </a:effectRef>
+          <a:fontRef idx="minor">
+            <a:schemeClr val="lt1"/>
+          </a:fontRef>
+        </p:style>
+        <p:txBody>
+          <a:bodyPr rtlCol="0" anchor="ctr"/>
+          <a:lstStyle/>
+          <a:p>
+            <a:pPr algn="ctr"/>
+          </a:p>
+        </p:txBody>
+      </p:sp>
+      <p:sp>
+        <p:nvSpPr>
+          <p:cNvPr id="18" name="Rectangle 17"/>
+          <p:cNvSpPr/>
+          <p:nvPr/>
+        </p:nvSpPr>
+        <p:spPr>
+          <a:xfrm>
+            <a:off x="8109508" y="1655064"/>
+            <a:ext cx="3624986" cy="27432"/>
+          </a:xfrm>
+          <a:prstGeom prst="rect">
+            <a:avLst/>
+          </a:prstGeom>
+          <a:solidFill>
+            <a:srgbClr val="FFD000"/>
+          </a:solidFill>
+          <a:ln>
+            <a:noFill/>
+          </a:ln>
+        </p:spPr>
+        <p:style>
+          <a:lnRef idx="1">
+            <a:schemeClr val="accent1"/>
+          </a:lnRef>
+          <a:fillRef idx="3">
+            <a:schemeClr val="accent1"/>
+          </a:fillRef>
+          <a:effectRef idx="2">
+            <a:schemeClr val="accent1"/>
+          </a:effectRef>
+          <a:fontRef idx="minor">
+            <a:schemeClr val="lt1"/>
+          </a:fontRef>
+        </p:style>
+        <p:txBody>
+          <a:bodyPr rtlCol="0" anchor="ctr"/>
+          <a:lstStyle/>
+          <a:p>
+            <a:pPr algn="ctr"/>
+          </a:p>
+        </p:txBody>
+      </p:sp>
+      <p:pic>
+        <p:nvPicPr>
+          <p:cNvPr id="19" name="Picture 18" descr="mermaid.png"/>
+          <p:cNvPicPr>
+            <a:picLocks noChangeAspect="1"/>
+          </p:cNvPicPr>
+          <p:nvPr/>
+        </p:nvPicPr>
+        <p:blipFill>
+          <a:blip r:embed="rId4"/>
+          <a:stretch>
+            <a:fillRect/>
+          </a:stretch>
+        </p:blipFill>
+        <p:spPr>
+          <a:xfrm>
+            <a:off x="9311640" y="1847087"/>
+            <a:ext cx="1220724" cy="1220724"/>
+          </a:xfrm>
+          <a:prstGeom prst="rect">
+            <a:avLst/>
+          </a:prstGeom>
+        </p:spPr>
+      </p:pic>
+      <p:sp>
+        <p:nvSpPr>
+          <p:cNvPr id="20" name="TextBox 19"/>
+          <p:cNvSpPr txBox="1"/>
+          <p:nvPr/>
+        </p:nvSpPr>
+        <p:spPr>
+          <a:xfrm>
+            <a:off x="8182660" y="3159251"/>
+            <a:ext cx="3478682" cy="621792"/>
+          </a:xfrm>
+          <a:prstGeom prst="rect">
+            <a:avLst/>
+          </a:prstGeom>
+          <a:noFill/>
+        </p:spPr>
+        <p:txBody>
+          <a:bodyPr wrap="square" anchor="t"/>
+          <a:lstStyle/>
+          <a:p>
+            <a:pPr algn="ctr"/>
+            <a:r>
+              <a:rPr sz="1300" b="1" i="0">
+                <a:solidFill>
+                  <a:srgbClr val="095292"/>
+                </a:solidFill>
+                <a:latin typeface="Calibri"/>
+              </a:rPr>
+              <a:t>Mermaid</a:t>
+            </a:r>
+          </a:p>
+          <a:p>
+            <a:pPr algn="ctr">
+              <a:spcBef>
+                <a:spcPts val="200"/>
+              </a:spcBef>
             </a:pPr>
             <a:r>
-              <a:rPr sz="1600" b="0" i="0">
-                <a:solidFill>
-                  <a:srgbClr val="333333"/>
-                </a:solidFill>
-                <a:latin typeface="Calibri"/>
-              </a:rPr>
-              <a:t>–   </a:t>
-            </a:r>
-            <a:r>
-              <a:rPr sz="1600" b="1" i="0">
-                <a:solidFill>
-                  <a:srgbClr val="333333"/>
-                </a:solidFill>
-                <a:latin typeface="Calibri"/>
-              </a:rPr>
-              <a:t>3.</a:t>
-            </a:r>
-            <a:r>
-              <a:rPr sz="1600" b="0" i="0">
-                <a:solidFill>
-                  <a:srgbClr val="333333"/>
-                </a:solidFill>
-                <a:latin typeface="Calibri"/>
-              </a:rPr>
-              <a:t> Paso 3: escriban en la plataforma del curso el sequenceDiagram del camino critico con el presupuesto de latencia repartido por salto, verificando que la suma de los tramos sea menor o igual al objetivo de p95 y que la nota final muestre el margen restante en milisegundos.</a:t>
-            </a:r>
-          </a:p>
-          <a:p>
-            <a:pPr>
-              <a:spcAft>
-                <a:spcPts val="800"/>
-              </a:spcAft>
+              <a:rPr sz="1000" b="0" i="0">
+                <a:solidFill>
+                  <a:srgbClr val="666666"/>
+                </a:solidFill>
+                <a:latin typeface="Calibri"/>
+              </a:rPr>
+              <a:t>Codigo del diagrama</a:t>
+            </a:r>
+          </a:p>
+        </p:txBody>
+      </p:sp>
+      <p:sp>
+        <p:nvSpPr>
+          <p:cNvPr id="21" name="Rounded Rectangle 20"/>
+          <p:cNvSpPr/>
+          <p:nvPr/>
+        </p:nvSpPr>
+        <p:spPr>
+          <a:xfrm>
+            <a:off x="4283354" y="4055364"/>
+            <a:ext cx="3624986" cy="2299716"/>
+          </a:xfrm>
+          <a:prstGeom prst="roundRect">
+            <a:avLst>
+              <a:gd name="adj" fmla="val 12000"/>
+            </a:avLst>
+          </a:prstGeom>
+          <a:solidFill>
+            <a:srgbClr val="F2F2F2"/>
+          </a:solidFill>
+          <a:ln>
+            <a:noFill/>
+          </a:ln>
+        </p:spPr>
+        <p:style>
+          <a:lnRef idx="1">
+            <a:schemeClr val="accent1"/>
+          </a:lnRef>
+          <a:fillRef idx="3">
+            <a:schemeClr val="accent1"/>
+          </a:fillRef>
+          <a:effectRef idx="2">
+            <a:schemeClr val="accent1"/>
+          </a:effectRef>
+          <a:fontRef idx="minor">
+            <a:schemeClr val="lt1"/>
+          </a:fontRef>
+        </p:style>
+        <p:txBody>
+          <a:bodyPr rtlCol="0" anchor="ctr"/>
+          <a:lstStyle/>
+          <a:p>
+            <a:pPr algn="ctr"/>
+          </a:p>
+        </p:txBody>
+      </p:sp>
+      <p:sp>
+        <p:nvSpPr>
+          <p:cNvPr id="22" name="Rectangle 21"/>
+          <p:cNvSpPr/>
+          <p:nvPr/>
+        </p:nvSpPr>
+        <p:spPr>
+          <a:xfrm>
+            <a:off x="4283354" y="4055364"/>
+            <a:ext cx="3624986" cy="64008"/>
+          </a:xfrm>
+          <a:prstGeom prst="rect">
+            <a:avLst/>
+          </a:prstGeom>
+          <a:solidFill>
+            <a:srgbClr val="095292"/>
+          </a:solidFill>
+          <a:ln>
+            <a:noFill/>
+          </a:ln>
+        </p:spPr>
+        <p:style>
+          <a:lnRef idx="1">
+            <a:schemeClr val="accent1"/>
+          </a:lnRef>
+          <a:fillRef idx="3">
+            <a:schemeClr val="accent1"/>
+          </a:fillRef>
+          <a:effectRef idx="2">
+            <a:schemeClr val="accent1"/>
+          </a:effectRef>
+          <a:fontRef idx="minor">
+            <a:schemeClr val="lt1"/>
+          </a:fontRef>
+        </p:style>
+        <p:txBody>
+          <a:bodyPr rtlCol="0" anchor="ctr"/>
+          <a:lstStyle/>
+          <a:p>
+            <a:pPr algn="ctr"/>
+          </a:p>
+        </p:txBody>
+      </p:sp>
+      <p:sp>
+        <p:nvSpPr>
+          <p:cNvPr id="23" name="Rectangle 22"/>
+          <p:cNvSpPr/>
+          <p:nvPr/>
+        </p:nvSpPr>
+        <p:spPr>
+          <a:xfrm>
+            <a:off x="4283354" y="4119372"/>
+            <a:ext cx="3624986" cy="27432"/>
+          </a:xfrm>
+          <a:prstGeom prst="rect">
+            <a:avLst/>
+          </a:prstGeom>
+          <a:solidFill>
+            <a:srgbClr val="FFD000"/>
+          </a:solidFill>
+          <a:ln>
+            <a:noFill/>
+          </a:ln>
+        </p:spPr>
+        <p:style>
+          <a:lnRef idx="1">
+            <a:schemeClr val="accent1"/>
+          </a:lnRef>
+          <a:fillRef idx="3">
+            <a:schemeClr val="accent1"/>
+          </a:fillRef>
+          <a:effectRef idx="2">
+            <a:schemeClr val="accent1"/>
+          </a:effectRef>
+          <a:fontRef idx="minor">
+            <a:schemeClr val="lt1"/>
+          </a:fontRef>
+        </p:style>
+        <p:txBody>
+          <a:bodyPr rtlCol="0" anchor="ctr"/>
+          <a:lstStyle/>
+          <a:p>
+            <a:pPr algn="ctr"/>
+          </a:p>
+        </p:txBody>
+      </p:sp>
+      <p:pic>
+        <p:nvPicPr>
+          <p:cNvPr id="24" name="Picture 23" descr="examlab.png"/>
+          <p:cNvPicPr>
+            <a:picLocks noChangeAspect="1"/>
+          </p:cNvPicPr>
+          <p:nvPr/>
+        </p:nvPicPr>
+        <p:blipFill>
+          <a:blip r:embed="rId5"/>
+          <a:stretch>
+            <a:fillRect/>
+          </a:stretch>
+        </p:blipFill>
+        <p:spPr>
+          <a:xfrm>
+            <a:off x="5485485" y="4311396"/>
+            <a:ext cx="1220724" cy="1220724"/>
+          </a:xfrm>
+          <a:prstGeom prst="rect">
+            <a:avLst/>
+          </a:prstGeom>
+        </p:spPr>
+      </p:pic>
+      <p:sp>
+        <p:nvSpPr>
+          <p:cNvPr id="25" name="TextBox 24"/>
+          <p:cNvSpPr txBox="1"/>
+          <p:nvPr/>
+        </p:nvSpPr>
+        <p:spPr>
+          <a:xfrm>
+            <a:off x="4356506" y="5623560"/>
+            <a:ext cx="3478682" cy="621792"/>
+          </a:xfrm>
+          <a:prstGeom prst="rect">
+            <a:avLst/>
+          </a:prstGeom>
+          <a:noFill/>
+        </p:spPr>
+        <p:txBody>
+          <a:bodyPr wrap="square" anchor="t"/>
+          <a:lstStyle/>
+          <a:p>
+            <a:pPr algn="ctr"/>
+            <a:r>
+              <a:rPr sz="1300" b="1" i="0">
+                <a:solidFill>
+                  <a:srgbClr val="095292"/>
+                </a:solidFill>
+                <a:latin typeface="Calibri"/>
+              </a:rPr>
+              <a:t>la plataforma del curso</a:t>
+            </a:r>
+          </a:p>
+          <a:p>
+            <a:pPr algn="ctr">
+              <a:spcBef>
+                <a:spcPts val="200"/>
+              </a:spcBef>
             </a:pPr>
             <a:r>
-              <a:rPr sz="1600" b="0" i="0">
-                <a:solidFill>
-                  <a:srgbClr val="333333"/>
-                </a:solidFill>
-                <a:latin typeface="Calibri"/>
-              </a:rPr>
-              <a:t>–   </a:t>
-            </a:r>
-            <a:r>
-              <a:rPr sz="1600" b="1" i="0">
-                <a:solidFill>
-                  <a:srgbClr val="333333"/>
-                </a:solidFill>
-                <a:latin typeface="Calibri"/>
-              </a:rPr>
-              <a:t>4.</a:t>
-            </a:r>
-            <a:r>
-              <a:rPr sz="1600" b="0" i="0">
-                <a:solidFill>
-                  <a:srgbClr val="333333"/>
-                </a:solidFill>
-                <a:latin typeface="Calibri"/>
-              </a:rPr>
-              <a:t> Paso 4: ensayen el pitch de 5 a 8 minutos con cronometro y llenen la tabla de guion de 6 filas con minuto, seccion, quien habla, mensaje clave y evidencia en pantalla, verificando que la suma de los minutos quede entre 5 y 8, que ninguna seccion pase de 2:00 (y, si el docente autorizo equipo, que todos los integrantes hablen) y que cada seccion tenga una evidencia concreta que se pueda mostrar.</a:t>
-            </a:r>
-          </a:p>
-          <a:p>
-            <a:pPr>
-              <a:spcAft>
-                <a:spcPts val="800"/>
-              </a:spcAft>
-            </a:pPr>
-            <a:r>
-              <a:rPr sz="1600" b="0" i="0">
-                <a:solidFill>
-                  <a:srgbClr val="333333"/>
-                </a:solidFill>
-                <a:latin typeface="Calibri"/>
-              </a:rPr>
-              <a:t>–   </a:t>
-            </a:r>
-            <a:r>
-              <a:rPr sz="1600" b="1" i="0">
-                <a:solidFill>
-                  <a:srgbClr val="333333"/>
-                </a:solidFill>
-                <a:latin typeface="Calibri"/>
-              </a:rPr>
-              <a:t>5.</a:t>
-            </a:r>
-            <a:r>
-              <a:rPr sz="1600" b="0" i="0">
-                <a:solidFill>
-                  <a:srgbClr val="333333"/>
-                </a:solidFill>
-                <a:latin typeface="Calibri"/>
-              </a:rPr>
-              <a:t> Paso 5: cierren los 5 items del backlog de la Clase 11 dejando registro de los residuales, dejen el paquete casi final ordenado en el repositorio o el Drive y suban las 6 preguntas a la plataforma del curso (modulo Talleres) antes del en la fecha que indique el docente, verificando que el cuello de botella declarado en el analisis sea el mismo que muestra el diagrama de secuencia.</a:t>
-            </a:r>
-          </a:p>
-        </p:txBody>
-      </p:sp>
-      <p:sp>
-        <p:nvSpPr>
-          <p:cNvPr id="6" name="TextBox 5"/>
+              <a:rPr sz="1000" b="0" i="0">
+                <a:solidFill>
+                  <a:srgbClr val="666666"/>
+                </a:solidFill>
+                <a:latin typeface="Calibri"/>
+              </a:rPr>
+              <a:t>Donde se entrega</a:t>
+            </a:r>
+          </a:p>
+        </p:txBody>
+      </p:sp>
+      <p:sp>
+        <p:nvSpPr>
+          <p:cNvPr id="26" name="TextBox 25"/>
           <p:cNvSpPr txBox="1"/>
           <p:nvPr/>
         </p:nvSpPr>
@@ -10189,7 +9179,7 @@
         <p:spPr>
           <a:xfrm>
             <a:off x="0" y="0"/>
-            <a:ext cx="12191695" cy="960120"/>
+            <a:ext cx="12191695" cy="1170432"/>
           </a:xfrm>
           <a:prstGeom prst="rect">
             <a:avLst/>
@@ -10231,7 +9221,7 @@
         </p:nvSpPr>
         <p:spPr>
           <a:xfrm>
-            <a:off x="0" y="960120"/>
+            <a:off x="0" y="1170432"/>
             <a:ext cx="12191695" cy="41148"/>
           </a:xfrm>
           <a:prstGeom prst="rect">
@@ -10275,7 +9265,7 @@
         <p:spPr>
           <a:xfrm>
             <a:off x="457200" y="164592"/>
-            <a:ext cx="11277295" cy="502920"/>
+            <a:ext cx="11277295" cy="384048"/>
           </a:xfrm>
           <a:prstGeom prst="rect">
             <a:avLst/>
@@ -10295,20 +9285,225 @@
                 </a:solidFill>
                 <a:latin typeface="Calibri"/>
               </a:rPr>
-              <a:t>Para continuar (PI)</a:t>
-            </a:r>
-          </a:p>
-        </p:txBody>
-      </p:sp>
-      <p:sp>
-        <p:nvSpPr>
-          <p:cNvPr id="5" name="Rounded Rectangle 4"/>
+              <a:t>Del boceto a la plataforma del curso (diagrama)</a:t>
+            </a:r>
+          </a:p>
+        </p:txBody>
+      </p:sp>
+      <p:sp>
+        <p:nvSpPr>
+          <p:cNvPr id="5" name="TextBox 4"/>
+          <p:cNvSpPr txBox="1"/>
+          <p:nvPr/>
+        </p:nvSpPr>
+        <p:spPr>
+          <a:xfrm>
+            <a:off x="457200" y="566928"/>
+            <a:ext cx="11277295" cy="411480"/>
+          </a:xfrm>
+          <a:prstGeom prst="rect">
+            <a:avLst/>
+          </a:prstGeom>
+          <a:noFill/>
+        </p:spPr>
+        <p:txBody>
+          <a:bodyPr wrap="square">
+            <a:spAutoFit/>
+          </a:bodyPr>
+          <a:lstStyle/>
+          <a:p>
+            <a:r>
+              <a:rPr sz="1400" b="0" i="0">
+                <a:solidFill>
+                  <a:srgbClr val="B8D8EE"/>
+                </a:solidFill>
+                <a:latin typeface="Calibri"/>
+              </a:rPr>
+              <a:t>El diagrama se entrega como código Mermaid dentro de la plataforma del curso, no como imagen</a:t>
+            </a:r>
+          </a:p>
+        </p:txBody>
+      </p:sp>
+      <p:sp>
+        <p:nvSpPr>
+          <p:cNvPr id="6" name="Rounded Rectangle 5"/>
           <p:cNvSpPr/>
           <p:nvPr/>
         </p:nvSpPr>
         <p:spPr>
           <a:xfrm>
-            <a:off x="457200" y="1261872"/>
+            <a:off x="457200" y="1659636"/>
+            <a:ext cx="11277295" cy="1051560"/>
+          </a:xfrm>
+          <a:prstGeom prst="roundRect">
+            <a:avLst>
+              <a:gd name="adj" fmla="val 12000"/>
+            </a:avLst>
+          </a:prstGeom>
+          <a:solidFill>
+            <a:srgbClr val="F2F2F2"/>
+          </a:solidFill>
+          <a:ln>
+            <a:noFill/>
+          </a:ln>
+        </p:spPr>
+        <p:style>
+          <a:lnRef idx="1">
+            <a:schemeClr val="accent1"/>
+          </a:lnRef>
+          <a:fillRef idx="3">
+            <a:schemeClr val="accent1"/>
+          </a:fillRef>
+          <a:effectRef idx="2">
+            <a:schemeClr val="accent1"/>
+          </a:effectRef>
+          <a:fontRef idx="minor">
+            <a:schemeClr val="lt1"/>
+          </a:fontRef>
+        </p:style>
+        <p:txBody>
+          <a:bodyPr rtlCol="0" anchor="ctr"/>
+          <a:lstStyle/>
+          <a:p>
+            <a:pPr algn="ctr"/>
+          </a:p>
+        </p:txBody>
+      </p:sp>
+      <p:sp>
+        <p:nvSpPr>
+          <p:cNvPr id="7" name="Rounded Rectangle 6"/>
+          <p:cNvSpPr/>
+          <p:nvPr/>
+        </p:nvSpPr>
+        <p:spPr>
+          <a:xfrm>
+            <a:off x="594360" y="1965960"/>
+            <a:ext cx="438912" cy="438912"/>
+          </a:xfrm>
+          <a:prstGeom prst="roundRect">
+            <a:avLst>
+              <a:gd name="adj" fmla="val 12000"/>
+            </a:avLst>
+          </a:prstGeom>
+          <a:solidFill>
+            <a:srgbClr val="095292"/>
+          </a:solidFill>
+          <a:ln>
+            <a:noFill/>
+          </a:ln>
+        </p:spPr>
+        <p:style>
+          <a:lnRef idx="1">
+            <a:schemeClr val="accent1"/>
+          </a:lnRef>
+          <a:fillRef idx="3">
+            <a:schemeClr val="accent1"/>
+          </a:fillRef>
+          <a:effectRef idx="2">
+            <a:schemeClr val="accent1"/>
+          </a:effectRef>
+          <a:fontRef idx="minor">
+            <a:schemeClr val="lt1"/>
+          </a:fontRef>
+        </p:style>
+        <p:txBody>
+          <a:bodyPr rtlCol="0" anchor="ctr"/>
+          <a:lstStyle/>
+          <a:p>
+            <a:pPr algn="ctr"/>
+          </a:p>
+        </p:txBody>
+      </p:sp>
+      <p:sp>
+        <p:nvSpPr>
+          <p:cNvPr id="8" name="TextBox 7"/>
+          <p:cNvSpPr txBox="1"/>
+          <p:nvPr/>
+        </p:nvSpPr>
+        <p:spPr>
+          <a:xfrm>
+            <a:off x="594360" y="1965960"/>
+            <a:ext cx="438912" cy="438912"/>
+          </a:xfrm>
+          <a:prstGeom prst="rect">
+            <a:avLst/>
+          </a:prstGeom>
+          <a:noFill/>
+        </p:spPr>
+        <p:txBody>
+          <a:bodyPr wrap="square" anchor="ctr"/>
+          <a:lstStyle/>
+          <a:p>
+            <a:pPr algn="ctr"/>
+            <a:r>
+              <a:rPr sz="1600" b="1" i="0">
+                <a:solidFill>
+                  <a:srgbClr val="FFFFFF"/>
+                </a:solidFill>
+                <a:latin typeface="Calibri"/>
+              </a:rPr>
+              <a:t>1</a:t>
+            </a:r>
+          </a:p>
+        </p:txBody>
+      </p:sp>
+      <p:sp>
+        <p:nvSpPr>
+          <p:cNvPr id="9" name="TextBox 8"/>
+          <p:cNvSpPr txBox="1"/>
+          <p:nvPr/>
+        </p:nvSpPr>
+        <p:spPr>
+          <a:xfrm>
+            <a:off x="1188720" y="1751076"/>
+            <a:ext cx="10271455" cy="886968"/>
+          </a:xfrm>
+          <a:prstGeom prst="rect">
+            <a:avLst/>
+          </a:prstGeom>
+          <a:noFill/>
+        </p:spPr>
+        <p:txBody>
+          <a:bodyPr wrap="square" anchor="ctr"/>
+          <a:lstStyle/>
+          <a:p>
+            <a:r>
+              <a:rPr sz="1500" b="1" i="0">
+                <a:solidFill>
+                  <a:srgbClr val="095292"/>
+                </a:solidFill>
+                <a:latin typeface="Calibri"/>
+              </a:rPr>
+              <a:t>Disena visual</a:t>
+            </a:r>
+          </a:p>
+          <a:p>
+            <a:pPr>
+              <a:spcBef>
+                <a:spcPts val="200"/>
+              </a:spcBef>
+            </a:pPr>
+            <a:r>
+              <a:rPr sz="1300" b="0" i="0">
+                <a:solidFill>
+                  <a:srgbClr val="333333"/>
+                </a:solidFill>
+                <a:latin typeface="Calibri"/>
+              </a:rPr>
+              <a:t>Dibuja el diagrama como quieras en Excalidraw o draw.io: es mas rapido arrastrar cajas que escribir codigo, y ahi es donde piensas el modelo.</a:t>
+            </a:r>
+          </a:p>
+        </p:txBody>
+      </p:sp>
+      <p:sp>
+        <p:nvSpPr>
+          <p:cNvPr id="10" name="Rounded Rectangle 9"/>
+          <p:cNvSpPr/>
+          <p:nvPr/>
+        </p:nvSpPr>
+        <p:spPr>
+          <a:xfrm>
+            <a:off x="457200" y="2802636"/>
             <a:ext cx="11277295" cy="1051560"/>
           </a:xfrm>
           <a:prstGeom prst="roundRect">
@@ -10347,20 +9542,22 @@
       </p:sp>
       <p:sp>
         <p:nvSpPr>
-          <p:cNvPr id="6" name="Rectangle 5"/>
+          <p:cNvPr id="11" name="Rounded Rectangle 10"/>
           <p:cNvSpPr/>
           <p:nvPr/>
         </p:nvSpPr>
         <p:spPr>
           <a:xfrm>
-            <a:off x="457200" y="1261872"/>
-            <a:ext cx="128016" cy="1051560"/>
-          </a:xfrm>
-          <a:prstGeom prst="rect">
-            <a:avLst/>
+            <a:off x="594360" y="3108960"/>
+            <a:ext cx="438912" cy="438912"/>
+          </a:xfrm>
+          <a:prstGeom prst="roundRect">
+            <a:avLst>
+              <a:gd name="adj" fmla="val 12000"/>
+            </a:avLst>
           </a:prstGeom>
           <a:solidFill>
-            <a:srgbClr val="269CCB"/>
+            <a:srgbClr val="095292"/>
           </a:solidFill>
           <a:ln>
             <a:noFill/>
@@ -10390,14 +9587,14 @@
       </p:sp>
       <p:sp>
         <p:nvSpPr>
-          <p:cNvPr id="7" name="TextBox 6"/>
+          <p:cNvPr id="12" name="TextBox 11"/>
           <p:cNvSpPr txBox="1"/>
           <p:nvPr/>
         </p:nvSpPr>
         <p:spPr>
           <a:xfrm>
-            <a:off x="777240" y="1399031"/>
-            <a:ext cx="10774375" cy="822959"/>
+            <a:off x="594360" y="3108960"/>
+            <a:ext cx="438912" cy="438912"/>
           </a:xfrm>
           <a:prstGeom prst="rect">
             <a:avLst/>
@@ -10405,48 +9602,79 @@
           <a:noFill/>
         </p:spPr>
         <p:txBody>
-          <a:bodyPr wrap="square">
-            <a:spAutoFit/>
-          </a:bodyPr>
-          <a:lstStyle/>
-          <a:p>
-            <a:r>
-              <a:rPr sz="1200" b="1" i="0">
-                <a:solidFill>
-                  <a:srgbClr val="269CCB"/>
-                </a:solidFill>
-                <a:latin typeface="Calibri"/>
-              </a:rPr>
-              <a:t>Info</a:t>
+          <a:bodyPr wrap="square" anchor="ctr"/>
+          <a:lstStyle/>
+          <a:p>
+            <a:pPr algn="ctr"/>
+            <a:r>
+              <a:rPr sz="1600" b="1" i="0">
+                <a:solidFill>
+                  <a:srgbClr val="FFFFFF"/>
+                </a:solidFill>
+                <a:latin typeface="Calibri"/>
+              </a:rPr>
+              <a:t>2</a:t>
+            </a:r>
+          </a:p>
+        </p:txBody>
+      </p:sp>
+      <p:sp>
+        <p:nvSpPr>
+          <p:cNvPr id="13" name="TextBox 12"/>
+          <p:cNvSpPr txBox="1"/>
+          <p:nvPr/>
+        </p:nvSpPr>
+        <p:spPr>
+          <a:xfrm>
+            <a:off x="1188720" y="2894076"/>
+            <a:ext cx="10271455" cy="886968"/>
+          </a:xfrm>
+          <a:prstGeom prst="rect">
+            <a:avLst/>
+          </a:prstGeom>
+          <a:noFill/>
+        </p:spPr>
+        <p:txBody>
+          <a:bodyPr wrap="square" anchor="ctr"/>
+          <a:lstStyle/>
+          <a:p>
+            <a:r>
+              <a:rPr sz="1500" b="1" i="0">
+                <a:solidFill>
+                  <a:srgbClr val="095292"/>
+                </a:solidFill>
+                <a:latin typeface="Calibri"/>
+              </a:rPr>
+              <a:t>Traduce con IA</a:t>
             </a:r>
           </a:p>
           <a:p>
             <a:pPr>
               <a:spcBef>
-                <a:spcPts val="400"/>
+                <a:spcPts val="200"/>
               </a:spcBef>
             </a:pPr>
             <a:r>
-              <a:rPr sz="1400" b="0" i="0">
+              <a:rPr sz="1300" b="0" i="0">
                 <a:solidFill>
                   <a:srgbClr val="333333"/>
                 </a:solidFill>
                 <a:latin typeface="Calibri"/>
               </a:rPr>
-              <a:t>Entregable: Sección Rendimiento + guion de pitch + paquete casi-final</a:t>
-            </a:r>
-          </a:p>
-        </p:txBody>
-      </p:sp>
-      <p:sp>
-        <p:nvSpPr>
-          <p:cNvPr id="8" name="Rounded Rectangle 7"/>
+              <a:t>Copia o describe tu boceto a una IA y pidele el codigo Mermaid: «convierte este diagrama a Mermaid usando sequenceDiagram». Revisa el resultado: la IA acierta la sintaxis, no tu modelo.</a:t>
+            </a:r>
+          </a:p>
+        </p:txBody>
+      </p:sp>
+      <p:sp>
+        <p:nvSpPr>
+          <p:cNvPr id="14" name="Rounded Rectangle 13"/>
           <p:cNvSpPr/>
           <p:nvPr/>
         </p:nvSpPr>
         <p:spPr>
           <a:xfrm>
-            <a:off x="457200" y="2478024"/>
+            <a:off x="457200" y="3945636"/>
             <a:ext cx="11277295" cy="1051560"/>
           </a:xfrm>
           <a:prstGeom prst="roundRect">
@@ -10455,7 +9683,7 @@
             </a:avLst>
           </a:prstGeom>
           <a:solidFill>
-            <a:srgbClr val="FFF8E1"/>
+            <a:srgbClr val="F2F2F2"/>
           </a:solidFill>
           <a:ln>
             <a:noFill/>
@@ -10485,20 +9713,22 @@
       </p:sp>
       <p:sp>
         <p:nvSpPr>
-          <p:cNvPr id="9" name="Rectangle 8"/>
+          <p:cNvPr id="15" name="Rounded Rectangle 14"/>
           <p:cNvSpPr/>
           <p:nvPr/>
         </p:nvSpPr>
         <p:spPr>
           <a:xfrm>
-            <a:off x="457200" y="2478024"/>
-            <a:ext cx="128016" cy="1051560"/>
-          </a:xfrm>
-          <a:prstGeom prst="rect">
-            <a:avLst/>
+            <a:off x="594360" y="4251960"/>
+            <a:ext cx="438912" cy="438912"/>
+          </a:xfrm>
+          <a:prstGeom prst="roundRect">
+            <a:avLst>
+              <a:gd name="adj" fmla="val 12000"/>
+            </a:avLst>
           </a:prstGeom>
           <a:solidFill>
-            <a:srgbClr val="FFD000"/>
+            <a:srgbClr val="095292"/>
           </a:solidFill>
           <a:ln>
             <a:noFill/>
@@ -10528,14 +9758,14 @@
       </p:sp>
       <p:sp>
         <p:nvSpPr>
-          <p:cNvPr id="10" name="TextBox 9"/>
+          <p:cNvPr id="16" name="TextBox 15"/>
           <p:cNvSpPr txBox="1"/>
           <p:nvPr/>
         </p:nvSpPr>
         <p:spPr>
           <a:xfrm>
-            <a:off x="777240" y="2615184"/>
-            <a:ext cx="10774375" cy="822959"/>
+            <a:off x="594360" y="4251960"/>
+            <a:ext cx="438912" cy="438912"/>
           </a:xfrm>
           <a:prstGeom prst="rect">
             <a:avLst/>
@@ -10543,48 +9773,79 @@
           <a:noFill/>
         </p:spPr>
         <p:txBody>
-          <a:bodyPr wrap="square">
-            <a:spAutoFit/>
-          </a:bodyPr>
-          <a:lstStyle/>
-          <a:p>
-            <a:r>
-              <a:rPr sz="1200" b="1" i="0">
-                <a:solidFill>
-                  <a:srgbClr val="FFD000"/>
-                </a:solidFill>
-                <a:latin typeface="Calibri"/>
-              </a:rPr>
-              <a:t>Aclaración</a:t>
+          <a:bodyPr wrap="square" anchor="ctr"/>
+          <a:lstStyle/>
+          <a:p>
+            <a:pPr algn="ctr"/>
+            <a:r>
+              <a:rPr sz="1600" b="1" i="0">
+                <a:solidFill>
+                  <a:srgbClr val="FFFFFF"/>
+                </a:solidFill>
+                <a:latin typeface="Calibri"/>
+              </a:rPr>
+              <a:t>3</a:t>
+            </a:r>
+          </a:p>
+        </p:txBody>
+      </p:sp>
+      <p:sp>
+        <p:nvSpPr>
+          <p:cNvPr id="17" name="TextBox 16"/>
+          <p:cNvSpPr txBox="1"/>
+          <p:nvPr/>
+        </p:nvSpPr>
+        <p:spPr>
+          <a:xfrm>
+            <a:off x="1188720" y="4037076"/>
+            <a:ext cx="10271455" cy="886968"/>
+          </a:xfrm>
+          <a:prstGeom prst="rect">
+            <a:avLst/>
+          </a:prstGeom>
+          <a:noFill/>
+        </p:spPr>
+        <p:txBody>
+          <a:bodyPr wrap="square" anchor="ctr"/>
+          <a:lstStyle/>
+          <a:p>
+            <a:r>
+              <a:rPr sz="1500" b="1" i="0">
+                <a:solidFill>
+                  <a:srgbClr val="095292"/>
+                </a:solidFill>
+                <a:latin typeface="Calibri"/>
+              </a:rPr>
+              <a:t>Pega y renderiza en la plataforma del curso</a:t>
             </a:r>
           </a:p>
           <a:p>
             <a:pPr>
               <a:spcBef>
-                <a:spcPts val="400"/>
+                <a:spcPts val="200"/>
               </a:spcBef>
             </a:pPr>
             <a:r>
-              <a:rPr sz="1400" b="0" i="0">
+              <a:rPr sz="1300" b="0" i="0">
                 <a:solidFill>
                   <a:srgbClr val="333333"/>
                 </a:solidFill>
                 <a:latin typeface="Calibri"/>
               </a:rPr>
-              <a:t>Subir evidencias al paquete CloudLite (Drive/repo) y a la plataforma del curso en la fecha que indique el docente.</a:t>
-            </a:r>
-          </a:p>
-        </p:txBody>
-      </p:sp>
-      <p:sp>
-        <p:nvSpPr>
-          <p:cNvPr id="11" name="Rounded Rectangle 10"/>
+              <a:t>Pega ese codigo en la caja de texto de la pregunta y mira como lo dibuja la plataforma. Si no renderiza, corrige ahi mismo: lo que se califica es el diagrama renderizado dentro de la plataforma del curso.</a:t>
+            </a:r>
+          </a:p>
+        </p:txBody>
+      </p:sp>
+      <p:sp>
+        <p:nvSpPr>
+          <p:cNvPr id="18" name="Rounded Rectangle 17"/>
           <p:cNvSpPr/>
           <p:nvPr/>
         </p:nvSpPr>
         <p:spPr>
           <a:xfrm>
-            <a:off x="457200" y="3694176"/>
+            <a:off x="457200" y="5088636"/>
             <a:ext cx="11277295" cy="1051560"/>
           </a:xfrm>
           <a:prstGeom prst="roundRect">
@@ -10593,7 +9854,7 @@
             </a:avLst>
           </a:prstGeom>
           <a:solidFill>
-            <a:srgbClr val="FBE4E4"/>
+            <a:srgbClr val="E8F4FA"/>
           </a:solidFill>
           <a:ln>
             <a:noFill/>
@@ -10623,20 +9884,22 @@
       </p:sp>
       <p:sp>
         <p:nvSpPr>
-          <p:cNvPr id="12" name="Rectangle 11"/>
+          <p:cNvPr id="19" name="Rounded Rectangle 18"/>
           <p:cNvSpPr/>
           <p:nvPr/>
         </p:nvSpPr>
         <p:spPr>
           <a:xfrm>
-            <a:off x="457200" y="3694176"/>
-            <a:ext cx="128016" cy="1051560"/>
-          </a:xfrm>
-          <a:prstGeom prst="rect">
-            <a:avLst/>
+            <a:off x="594360" y="5394960"/>
+            <a:ext cx="438912" cy="438912"/>
+          </a:xfrm>
+          <a:prstGeom prst="roundRect">
+            <a:avLst>
+              <a:gd name="adj" fmla="val 12000"/>
+            </a:avLst>
           </a:prstGeom>
           <a:solidFill>
-            <a:srgbClr val="A02030"/>
+            <a:srgbClr val="095292"/>
           </a:solidFill>
           <a:ln>
             <a:noFill/>
@@ -10666,14 +9929,14 @@
       </p:sp>
       <p:sp>
         <p:nvSpPr>
-          <p:cNvPr id="13" name="TextBox 12"/>
+          <p:cNvPr id="20" name="TextBox 19"/>
           <p:cNvSpPr txBox="1"/>
           <p:nvPr/>
         </p:nvSpPr>
         <p:spPr>
           <a:xfrm>
-            <a:off x="777240" y="3831336"/>
-            <a:ext cx="10774375" cy="822959"/>
+            <a:off x="594360" y="5394960"/>
+            <a:ext cx="438912" cy="438912"/>
           </a:xfrm>
           <a:prstGeom prst="rect">
             <a:avLst/>
@@ -10681,42 +9944,73 @@
           <a:noFill/>
         </p:spPr>
         <p:txBody>
-          <a:bodyPr wrap="square">
-            <a:spAutoFit/>
-          </a:bodyPr>
-          <a:lstStyle/>
-          <a:p>
-            <a:r>
-              <a:rPr sz="1200" b="1" i="0">
-                <a:solidFill>
-                  <a:srgbClr val="A02030"/>
-                </a:solidFill>
-                <a:latin typeface="Calibri"/>
-              </a:rPr>
-              <a:t>Atención</a:t>
+          <a:bodyPr wrap="square" anchor="ctr"/>
+          <a:lstStyle/>
+          <a:p>
+            <a:pPr algn="ctr"/>
+            <a:r>
+              <a:rPr sz="1600" b="1" i="0">
+                <a:solidFill>
+                  <a:srgbClr val="FFFFFF"/>
+                </a:solidFill>
+                <a:latin typeface="Calibri"/>
+              </a:rPr>
+              <a:t>4</a:t>
+            </a:r>
+          </a:p>
+        </p:txBody>
+      </p:sp>
+      <p:sp>
+        <p:nvSpPr>
+          <p:cNvPr id="21" name="TextBox 20"/>
+          <p:cNvSpPr txBox="1"/>
+          <p:nvPr/>
+        </p:nvSpPr>
+        <p:spPr>
+          <a:xfrm>
+            <a:off x="1188720" y="5180076"/>
+            <a:ext cx="10271455" cy="886968"/>
+          </a:xfrm>
+          <a:prstGeom prst="rect">
+            <a:avLst/>
+          </a:prstGeom>
+          <a:noFill/>
+        </p:spPr>
+        <p:txBody>
+          <a:bodyPr wrap="square" anchor="ctr"/>
+          <a:lstStyle/>
+          <a:p>
+            <a:r>
+              <a:rPr sz="1500" b="1" i="0">
+                <a:solidFill>
+                  <a:srgbClr val="095292"/>
+                </a:solidFill>
+                <a:latin typeface="Calibri"/>
+              </a:rPr>
+              <a:t>Guarda el PNG para tu PI</a:t>
             </a:r>
           </a:p>
           <a:p>
             <a:pPr>
               <a:spcBef>
-                <a:spcPts val="400"/>
+                <a:spcPts val="200"/>
               </a:spcBef>
             </a:pPr>
             <a:r>
-              <a:rPr sz="1400" b="0" i="0">
+              <a:rPr sz="1300" b="0" i="0">
                 <a:solidFill>
                   <a:srgbClr val="333333"/>
                 </a:solidFill>
                 <a:latin typeface="Calibri"/>
               </a:rPr>
-              <a:t>Sin cloud de pago ni instalaciones obligatorias de hipervisores/Docker Desktop.</a:t>
-            </a:r>
-          </a:p>
-        </p:txBody>
-      </p:sp>
-      <p:sp>
-        <p:nvSpPr>
-          <p:cNvPr id="14" name="TextBox 13"/>
+              <a:t>Exporta tambien la imagen a la carpeta de tu Proyecto Integrador. Esa copia es para tu informe; no reemplaza la respuesta en la plataforma.</a:t>
+            </a:r>
+          </a:p>
+        </p:txBody>
+      </p:sp>
+      <p:sp>
+        <p:nvSpPr>
+          <p:cNvPr id="22" name="TextBox 21"/>
           <p:cNvSpPr txBox="1"/>
           <p:nvPr/>
         </p:nvSpPr>
@@ -10784,7 +10078,850 @@
         <p:spPr>
           <a:xfrm>
             <a:off x="0" y="0"/>
-            <a:ext cx="12191695" cy="164592"/>
+            <a:ext cx="12191695" cy="960120"/>
+          </a:xfrm>
+          <a:prstGeom prst="rect">
+            <a:avLst/>
+          </a:prstGeom>
+          <a:solidFill>
+            <a:srgbClr val="095292"/>
+          </a:solidFill>
+          <a:ln>
+            <a:noFill/>
+          </a:ln>
+        </p:spPr>
+        <p:style>
+          <a:lnRef idx="1">
+            <a:schemeClr val="accent1"/>
+          </a:lnRef>
+          <a:fillRef idx="3">
+            <a:schemeClr val="accent1"/>
+          </a:fillRef>
+          <a:effectRef idx="2">
+            <a:schemeClr val="accent1"/>
+          </a:effectRef>
+          <a:fontRef idx="minor">
+            <a:schemeClr val="lt1"/>
+          </a:fontRef>
+        </p:style>
+        <p:txBody>
+          <a:bodyPr rtlCol="0" anchor="ctr"/>
+          <a:lstStyle/>
+          <a:p>
+            <a:pPr algn="ctr"/>
+          </a:p>
+        </p:txBody>
+      </p:sp>
+      <p:sp>
+        <p:nvSpPr>
+          <p:cNvPr id="3" name="Rectangle 2"/>
+          <p:cNvSpPr/>
+          <p:nvPr/>
+        </p:nvSpPr>
+        <p:spPr>
+          <a:xfrm>
+            <a:off x="0" y="960120"/>
+            <a:ext cx="12191695" cy="41148"/>
+          </a:xfrm>
+          <a:prstGeom prst="rect">
+            <a:avLst/>
+          </a:prstGeom>
+          <a:solidFill>
+            <a:srgbClr val="FFD000"/>
+          </a:solidFill>
+          <a:ln>
+            <a:noFill/>
+          </a:ln>
+        </p:spPr>
+        <p:style>
+          <a:lnRef idx="1">
+            <a:schemeClr val="accent1"/>
+          </a:lnRef>
+          <a:fillRef idx="3">
+            <a:schemeClr val="accent1"/>
+          </a:fillRef>
+          <a:effectRef idx="2">
+            <a:schemeClr val="accent1"/>
+          </a:effectRef>
+          <a:fontRef idx="minor">
+            <a:schemeClr val="lt1"/>
+          </a:fontRef>
+        </p:style>
+        <p:txBody>
+          <a:bodyPr rtlCol="0" anchor="ctr"/>
+          <a:lstStyle/>
+          <a:p>
+            <a:pPr algn="ctr"/>
+          </a:p>
+        </p:txBody>
+      </p:sp>
+      <p:sp>
+        <p:nvSpPr>
+          <p:cNvPr id="4" name="TextBox 3"/>
+          <p:cNvSpPr txBox="1"/>
+          <p:nvPr/>
+        </p:nvSpPr>
+        <p:spPr>
+          <a:xfrm>
+            <a:off x="457200" y="164592"/>
+            <a:ext cx="11277295" cy="502920"/>
+          </a:xfrm>
+          <a:prstGeom prst="rect">
+            <a:avLst/>
+          </a:prstGeom>
+          <a:noFill/>
+        </p:spPr>
+        <p:txBody>
+          <a:bodyPr wrap="square">
+            <a:spAutoFit/>
+          </a:bodyPr>
+          <a:lstStyle/>
+          <a:p>
+            <a:r>
+              <a:rPr sz="2600" b="1" i="0">
+                <a:solidFill>
+                  <a:srgbClr val="FFFFFF"/>
+                </a:solidFill>
+                <a:latin typeface="Calibri"/>
+              </a:rPr>
+              <a:t>PI CloudLite — entregable de hoy</a:t>
+            </a:r>
+          </a:p>
+        </p:txBody>
+      </p:sp>
+      <p:sp>
+        <p:nvSpPr>
+          <p:cNvPr id="5" name="TextBox 4"/>
+          <p:cNvSpPr txBox="1"/>
+          <p:nvPr/>
+        </p:nvSpPr>
+        <p:spPr>
+          <a:xfrm>
+            <a:off x="457200" y="1170432"/>
+            <a:ext cx="11277295" cy="5230368"/>
+          </a:xfrm>
+          <a:prstGeom prst="rect">
+            <a:avLst/>
+          </a:prstGeom>
+          <a:noFill/>
+        </p:spPr>
+        <p:txBody>
+          <a:bodyPr wrap="square">
+            <a:spAutoFit/>
+          </a:bodyPr>
+          <a:lstStyle/>
+          <a:p>
+            <a:pPr>
+              <a:spcAft>
+                <a:spcPts val="800"/>
+              </a:spcAft>
+            </a:pPr>
+            <a:r>
+              <a:rPr sz="2000" b="0" i="0">
+                <a:solidFill>
+                  <a:srgbClr val="333333"/>
+                </a:solidFill>
+                <a:latin typeface="Calibri"/>
+              </a:rPr>
+              <a:t>–   </a:t>
+            </a:r>
+            <a:r>
+              <a:rPr sz="2000" b="1" i="0">
+                <a:solidFill>
+                  <a:srgbClr val="333333"/>
+                </a:solidFill>
+                <a:latin typeface="Calibri"/>
+              </a:rPr>
+              <a:t>Entregable:</a:t>
+            </a:r>
+            <a:r>
+              <a:rPr sz="2000" b="0" i="0">
+                <a:solidFill>
+                  <a:srgbClr val="333333"/>
+                </a:solidFill>
+                <a:latin typeface="Calibri"/>
+              </a:rPr>
+              <a:t> Sección Rendimiento + guion de pitch + paquete casi-final</a:t>
+            </a:r>
+          </a:p>
+          <a:p>
+            <a:pPr>
+              <a:spcAft>
+                <a:spcPts val="800"/>
+              </a:spcAft>
+            </a:pPr>
+            <a:r>
+              <a:rPr sz="2000" b="0" i="0">
+                <a:solidFill>
+                  <a:srgbClr val="333333"/>
+                </a:solidFill>
+                <a:latin typeface="Calibri"/>
+              </a:rPr>
+              <a:t>–   Herramienta: </a:t>
+            </a:r>
+            <a:r>
+              <a:rPr sz="2000" b="1" i="0">
+                <a:solidFill>
+                  <a:srgbClr val="333333"/>
+                </a:solidFill>
+                <a:latin typeface="Calibri"/>
+              </a:rPr>
+              <a:t>Google Docs · draw.io · (opcional) lab contenedor</a:t>
+            </a:r>
+          </a:p>
+          <a:p>
+            <a:pPr>
+              <a:spcAft>
+                <a:spcPts val="800"/>
+              </a:spcAft>
+            </a:pPr>
+            <a:r>
+              <a:rPr sz="2000" b="0" i="0">
+                <a:solidFill>
+                  <a:srgbClr val="333333"/>
+                </a:solidFill>
+                <a:latin typeface="Calibri"/>
+              </a:rPr>
+              <a:t>–   Todo lo que construyan hoy entra al </a:t>
+            </a:r>
+            <a:r>
+              <a:rPr sz="2000" b="1" i="0">
+                <a:solidFill>
+                  <a:srgbClr val="333333"/>
+                </a:solidFill>
+                <a:latin typeface="Calibri"/>
+              </a:rPr>
+              <a:t>informe/repo del PI</a:t>
+            </a:r>
+            <a:r>
+              <a:rPr sz="2000" b="0" i="0">
+                <a:solidFill>
+                  <a:srgbClr val="333333"/>
+                </a:solidFill>
+                <a:latin typeface="Calibri"/>
+              </a:rPr>
+              <a:t> (no es lab suelto).</a:t>
+            </a:r>
+          </a:p>
+          <a:p>
+            <a:pPr>
+              <a:spcAft>
+                <a:spcPts val="800"/>
+              </a:spcAft>
+            </a:pPr>
+            <a:r>
+              <a:rPr sz="2000" b="0" i="0">
+                <a:solidFill>
+                  <a:srgbClr val="333333"/>
+                </a:solidFill>
+                <a:latin typeface="Calibri"/>
+              </a:rPr>
+              <a:t>–   Individual por defecto · el docente puede autorizar equipos de 2–3; la entrega en la plataforma del curso siempre es individual.</a:t>
+            </a:r>
+          </a:p>
+        </p:txBody>
+      </p:sp>
+      <p:sp>
+        <p:nvSpPr>
+          <p:cNvPr id="6" name="TextBox 5"/>
+          <p:cNvSpPr txBox="1"/>
+          <p:nvPr/>
+        </p:nvSpPr>
+        <p:spPr>
+          <a:xfrm>
+            <a:off x="11185855" y="6473952"/>
+            <a:ext cx="640080" cy="274320"/>
+          </a:xfrm>
+          <a:prstGeom prst="rect">
+            <a:avLst/>
+          </a:prstGeom>
+          <a:noFill/>
+        </p:spPr>
+        <p:txBody>
+          <a:bodyPr wrap="square">
+            <a:spAutoFit/>
+          </a:bodyPr>
+          <a:lstStyle/>
+          <a:p>
+            <a:pPr algn="r"/>
+            <a:r>
+              <a:rPr sz="1100" b="0" i="0">
+                <a:solidFill>
+                  <a:srgbClr val="666666"/>
+                </a:solidFill>
+                <a:latin typeface="Calibri"/>
+              </a:rPr>
+              <a:t>27</a:t>
+            </a:r>
+          </a:p>
+        </p:txBody>
+      </p:sp>
+    </p:spTree>
+  </p:cSld>
+  <p:clrMapOvr>
+    <a:masterClrMapping/>
+  </p:clrMapOvr>
+</p:sld>
+</file>
+
+<file path=ppt/slides/slide28.xml><?xml version="1.0" encoding="utf-8"?>
+<p:sld xmlns:a="http://schemas.openxmlformats.org/drawingml/2006/main" xmlns:p="http://schemas.openxmlformats.org/presentationml/2006/main" xmlns:r="http://schemas.openxmlformats.org/officeDocument/2006/relationships">
+  <p:cSld>
+    <p:bg>
+      <p:bgPr>
+        <a:solidFill>
+          <a:srgbClr val="FFFFFF"/>
+        </a:solidFill>
+        <a:effectLst/>
+      </p:bgPr>
+    </p:bg>
+    <p:spTree>
+      <p:nvGrpSpPr>
+        <p:cNvPr id="1" name=""/>
+        <p:cNvGrpSpPr/>
+        <p:nvPr/>
+      </p:nvGrpSpPr>
+      <p:grpSpPr/>
+      <p:sp>
+        <p:nvSpPr>
+          <p:cNvPr id="2" name="Rectangle 1"/>
+          <p:cNvSpPr/>
+          <p:nvPr/>
+        </p:nvSpPr>
+        <p:spPr>
+          <a:xfrm>
+            <a:off x="0" y="0"/>
+            <a:ext cx="12191695" cy="960120"/>
+          </a:xfrm>
+          <a:prstGeom prst="rect">
+            <a:avLst/>
+          </a:prstGeom>
+          <a:solidFill>
+            <a:srgbClr val="095292"/>
+          </a:solidFill>
+          <a:ln>
+            <a:noFill/>
+          </a:ln>
+        </p:spPr>
+        <p:style>
+          <a:lnRef idx="1">
+            <a:schemeClr val="accent1"/>
+          </a:lnRef>
+          <a:fillRef idx="3">
+            <a:schemeClr val="accent1"/>
+          </a:fillRef>
+          <a:effectRef idx="2">
+            <a:schemeClr val="accent1"/>
+          </a:effectRef>
+          <a:fontRef idx="minor">
+            <a:schemeClr val="lt1"/>
+          </a:fontRef>
+        </p:style>
+        <p:txBody>
+          <a:bodyPr rtlCol="0" anchor="ctr"/>
+          <a:lstStyle/>
+          <a:p>
+            <a:pPr algn="ctr"/>
+          </a:p>
+        </p:txBody>
+      </p:sp>
+      <p:sp>
+        <p:nvSpPr>
+          <p:cNvPr id="3" name="Rectangle 2"/>
+          <p:cNvSpPr/>
+          <p:nvPr/>
+        </p:nvSpPr>
+        <p:spPr>
+          <a:xfrm>
+            <a:off x="0" y="960120"/>
+            <a:ext cx="12191695" cy="41148"/>
+          </a:xfrm>
+          <a:prstGeom prst="rect">
+            <a:avLst/>
+          </a:prstGeom>
+          <a:solidFill>
+            <a:srgbClr val="FFD000"/>
+          </a:solidFill>
+          <a:ln>
+            <a:noFill/>
+          </a:ln>
+        </p:spPr>
+        <p:style>
+          <a:lnRef idx="1">
+            <a:schemeClr val="accent1"/>
+          </a:lnRef>
+          <a:fillRef idx="3">
+            <a:schemeClr val="accent1"/>
+          </a:fillRef>
+          <a:effectRef idx="2">
+            <a:schemeClr val="accent1"/>
+          </a:effectRef>
+          <a:fontRef idx="minor">
+            <a:schemeClr val="lt1"/>
+          </a:fontRef>
+        </p:style>
+        <p:txBody>
+          <a:bodyPr rtlCol="0" anchor="ctr"/>
+          <a:lstStyle/>
+          <a:p>
+            <a:pPr algn="ctr"/>
+          </a:p>
+        </p:txBody>
+      </p:sp>
+      <p:sp>
+        <p:nvSpPr>
+          <p:cNvPr id="4" name="TextBox 3"/>
+          <p:cNvSpPr txBox="1"/>
+          <p:nvPr/>
+        </p:nvSpPr>
+        <p:spPr>
+          <a:xfrm>
+            <a:off x="457200" y="164592"/>
+            <a:ext cx="11277295" cy="502920"/>
+          </a:xfrm>
+          <a:prstGeom prst="rect">
+            <a:avLst/>
+          </a:prstGeom>
+          <a:noFill/>
+        </p:spPr>
+        <p:txBody>
+          <a:bodyPr wrap="square">
+            <a:spAutoFit/>
+          </a:bodyPr>
+          <a:lstStyle/>
+          <a:p>
+            <a:r>
+              <a:rPr sz="2600" b="1" i="0">
+                <a:solidFill>
+                  <a:srgbClr val="FFFFFF"/>
+                </a:solidFill>
+                <a:latin typeface="Calibri"/>
+              </a:rPr>
+              <a:t>Manos a la obra (paso a paso)</a:t>
+            </a:r>
+          </a:p>
+        </p:txBody>
+      </p:sp>
+      <p:sp>
+        <p:nvSpPr>
+          <p:cNvPr id="5" name="TextBox 4"/>
+          <p:cNvSpPr txBox="1"/>
+          <p:nvPr/>
+        </p:nvSpPr>
+        <p:spPr>
+          <a:xfrm>
+            <a:off x="457200" y="1170432"/>
+            <a:ext cx="11277295" cy="5230368"/>
+          </a:xfrm>
+          <a:prstGeom prst="rect">
+            <a:avLst/>
+          </a:prstGeom>
+          <a:noFill/>
+        </p:spPr>
+        <p:txBody>
+          <a:bodyPr wrap="square">
+            <a:spAutoFit/>
+          </a:bodyPr>
+          <a:lstStyle/>
+          <a:p>
+            <a:pPr>
+              <a:spcAft>
+                <a:spcPts val="800"/>
+              </a:spcAft>
+            </a:pPr>
+            <a:r>
+              <a:rPr sz="1600" b="1" i="0">
+                <a:solidFill>
+                  <a:srgbClr val="333333"/>
+                </a:solidFill>
+                <a:latin typeface="Calibri"/>
+              </a:rPr>
+              <a:t>1.</a:t>
+            </a:r>
+            <a:r>
+              <a:rPr sz="1600" b="0" i="0">
+                <a:solidFill>
+                  <a:srgbClr val="333333"/>
+                </a:solidFill>
+                <a:latin typeface="Calibri"/>
+              </a:rPr>
+              <a:t> Paso 1: describan el escenario de carga del pico real de su dominio con los 6 datos obligatorios (evento del pico, usuarios concurrentes, peticiones por segundo, mezcla de operaciones en porcentajes que sumen 100, duracion de la ventana y volumen de datos de partida), verificando que la mezcla sume exactamente 100 por ciento y que el pico corresponda a una fecha real del calendario de su dominio.</a:t>
+            </a:r>
+          </a:p>
+          <a:p>
+            <a:pPr>
+              <a:spcAft>
+                <a:spcPts val="800"/>
+              </a:spcAft>
+            </a:pPr>
+            <a:r>
+              <a:rPr sz="1600" b="0" i="0">
+                <a:solidFill>
+                  <a:srgbClr val="333333"/>
+                </a:solidFill>
+                <a:latin typeface="Calibri"/>
+              </a:rPr>
+              <a:t>–   </a:t>
+            </a:r>
+            <a:r>
+              <a:rPr sz="1600" b="1" i="0">
+                <a:solidFill>
+                  <a:srgbClr val="333333"/>
+                </a:solidFill>
+                <a:latin typeface="Calibri"/>
+              </a:rPr>
+              <a:t>2.</a:t>
+            </a:r>
+            <a:r>
+              <a:rPr sz="1600" b="0" i="0">
+                <a:solidFill>
+                  <a:srgbClr val="333333"/>
+                </a:solidFill>
+                <a:latin typeface="Calibri"/>
+              </a:rPr>
+              <a:t> Paso 2: definan las 3 metricas objetivo en una tabla de 4 columnas con numero, ventana de medicion, forma de medirla y consecuencia de incumplirla, verificando que cada objetivo tenga un numero y una ventana (por ejemplo p95 por debajo de 800 ms en 5 minutos) y que ninguna diga rapido o aceptable sin cifra.</a:t>
+            </a:r>
+          </a:p>
+          <a:p>
+            <a:pPr>
+              <a:spcAft>
+                <a:spcPts val="800"/>
+              </a:spcAft>
+            </a:pPr>
+            <a:r>
+              <a:rPr sz="1600" b="0" i="0">
+                <a:solidFill>
+                  <a:srgbClr val="333333"/>
+                </a:solidFill>
+                <a:latin typeface="Calibri"/>
+              </a:rPr>
+              <a:t>–   </a:t>
+            </a:r>
+            <a:r>
+              <a:rPr sz="1600" b="1" i="0">
+                <a:solidFill>
+                  <a:srgbClr val="333333"/>
+                </a:solidFill>
+                <a:latin typeface="Calibri"/>
+              </a:rPr>
+              <a:t>3.</a:t>
+            </a:r>
+            <a:r>
+              <a:rPr sz="1600" b="0" i="0">
+                <a:solidFill>
+                  <a:srgbClr val="333333"/>
+                </a:solidFill>
+                <a:latin typeface="Calibri"/>
+              </a:rPr>
+              <a:t> Paso 3: escriban en la plataforma del curso el sequenceDiagram del camino critico con el presupuesto de latencia repartido por salto, verificando que la suma de los tramos sea menor o igual al objetivo de p95 y que la nota final muestre el margen restante en milisegundos.</a:t>
+            </a:r>
+          </a:p>
+          <a:p>
+            <a:pPr>
+              <a:spcAft>
+                <a:spcPts val="800"/>
+              </a:spcAft>
+            </a:pPr>
+            <a:r>
+              <a:rPr sz="1600" b="0" i="0">
+                <a:solidFill>
+                  <a:srgbClr val="333333"/>
+                </a:solidFill>
+                <a:latin typeface="Calibri"/>
+              </a:rPr>
+              <a:t>–   </a:t>
+            </a:r>
+            <a:r>
+              <a:rPr sz="1600" b="1" i="0">
+                <a:solidFill>
+                  <a:srgbClr val="333333"/>
+                </a:solidFill>
+                <a:latin typeface="Calibri"/>
+              </a:rPr>
+              <a:t>4.</a:t>
+            </a:r>
+            <a:r>
+              <a:rPr sz="1600" b="0" i="0">
+                <a:solidFill>
+                  <a:srgbClr val="333333"/>
+                </a:solidFill>
+                <a:latin typeface="Calibri"/>
+              </a:rPr>
+              <a:t> Paso 4: ensayen el pitch de 5 a 8 minutos con cronometro y llenen la tabla de guion de 6 filas con minuto, seccion, quien habla, mensaje clave y evidencia en pantalla, verificando que la suma de los minutos quede entre 5 y 8, que ninguna seccion pase de 2:00 (y, si el docente autorizo equipo, que todos los integrantes hablen) y que cada seccion tenga una evidencia concreta que se pueda mostrar.</a:t>
+            </a:r>
+          </a:p>
+          <a:p>
+            <a:pPr>
+              <a:spcAft>
+                <a:spcPts val="800"/>
+              </a:spcAft>
+            </a:pPr>
+            <a:r>
+              <a:rPr sz="1600" b="0" i="0">
+                <a:solidFill>
+                  <a:srgbClr val="333333"/>
+                </a:solidFill>
+                <a:latin typeface="Calibri"/>
+              </a:rPr>
+              <a:t>–   </a:t>
+            </a:r>
+            <a:r>
+              <a:rPr sz="1600" b="1" i="0">
+                <a:solidFill>
+                  <a:srgbClr val="333333"/>
+                </a:solidFill>
+                <a:latin typeface="Calibri"/>
+              </a:rPr>
+              <a:t>5.</a:t>
+            </a:r>
+            <a:r>
+              <a:rPr sz="1600" b="0" i="0">
+                <a:solidFill>
+                  <a:srgbClr val="333333"/>
+                </a:solidFill>
+                <a:latin typeface="Calibri"/>
+              </a:rPr>
+              <a:t> Paso 5: cierren los 5 items del backlog de la Clase 11 dejando registro de los residuales, dejen el paquete casi final ordenado en el repositorio o el Drive y suban las 6 preguntas a la plataforma del curso (modulo Talleres) antes del en la fecha que indique el docente, verificando que el cuello de botella declarado en el analisis sea el mismo que muestra el diagrama de secuencia.</a:t>
+            </a:r>
+          </a:p>
+        </p:txBody>
+      </p:sp>
+      <p:sp>
+        <p:nvSpPr>
+          <p:cNvPr id="6" name="TextBox 5"/>
+          <p:cNvSpPr txBox="1"/>
+          <p:nvPr/>
+        </p:nvSpPr>
+        <p:spPr>
+          <a:xfrm>
+            <a:off x="11185855" y="6473952"/>
+            <a:ext cx="640080" cy="274320"/>
+          </a:xfrm>
+          <a:prstGeom prst="rect">
+            <a:avLst/>
+          </a:prstGeom>
+          <a:noFill/>
+        </p:spPr>
+        <p:txBody>
+          <a:bodyPr wrap="square">
+            <a:spAutoFit/>
+          </a:bodyPr>
+          <a:lstStyle/>
+          <a:p>
+            <a:pPr algn="r"/>
+            <a:r>
+              <a:rPr sz="1100" b="0" i="0">
+                <a:solidFill>
+                  <a:srgbClr val="666666"/>
+                </a:solidFill>
+                <a:latin typeface="Calibri"/>
+              </a:rPr>
+              <a:t>28</a:t>
+            </a:r>
+          </a:p>
+        </p:txBody>
+      </p:sp>
+    </p:spTree>
+  </p:cSld>
+  <p:clrMapOvr>
+    <a:masterClrMapping/>
+  </p:clrMapOvr>
+</p:sld>
+</file>
+
+<file path=ppt/slides/slide29.xml><?xml version="1.0" encoding="utf-8"?>
+<p:sld xmlns:a="http://schemas.openxmlformats.org/drawingml/2006/main" xmlns:p="http://schemas.openxmlformats.org/presentationml/2006/main" xmlns:r="http://schemas.openxmlformats.org/officeDocument/2006/relationships">
+  <p:cSld>
+    <p:bg>
+      <p:bgPr>
+        <a:solidFill>
+          <a:srgbClr val="FFFFFF"/>
+        </a:solidFill>
+        <a:effectLst/>
+      </p:bgPr>
+    </p:bg>
+    <p:spTree>
+      <p:nvGrpSpPr>
+        <p:cNvPr id="1" name=""/>
+        <p:cNvGrpSpPr/>
+        <p:nvPr/>
+      </p:nvGrpSpPr>
+      <p:grpSpPr/>
+      <p:sp>
+        <p:nvSpPr>
+          <p:cNvPr id="2" name="Rectangle 1"/>
+          <p:cNvSpPr/>
+          <p:nvPr/>
+        </p:nvSpPr>
+        <p:spPr>
+          <a:xfrm>
+            <a:off x="0" y="0"/>
+            <a:ext cx="12191695" cy="960120"/>
+          </a:xfrm>
+          <a:prstGeom prst="rect">
+            <a:avLst/>
+          </a:prstGeom>
+          <a:solidFill>
+            <a:srgbClr val="095292"/>
+          </a:solidFill>
+          <a:ln>
+            <a:noFill/>
+          </a:ln>
+        </p:spPr>
+        <p:style>
+          <a:lnRef idx="1">
+            <a:schemeClr val="accent1"/>
+          </a:lnRef>
+          <a:fillRef idx="3">
+            <a:schemeClr val="accent1"/>
+          </a:fillRef>
+          <a:effectRef idx="2">
+            <a:schemeClr val="accent1"/>
+          </a:effectRef>
+          <a:fontRef idx="minor">
+            <a:schemeClr val="lt1"/>
+          </a:fontRef>
+        </p:style>
+        <p:txBody>
+          <a:bodyPr rtlCol="0" anchor="ctr"/>
+          <a:lstStyle/>
+          <a:p>
+            <a:pPr algn="ctr"/>
+          </a:p>
+        </p:txBody>
+      </p:sp>
+      <p:sp>
+        <p:nvSpPr>
+          <p:cNvPr id="3" name="Rectangle 2"/>
+          <p:cNvSpPr/>
+          <p:nvPr/>
+        </p:nvSpPr>
+        <p:spPr>
+          <a:xfrm>
+            <a:off x="0" y="960120"/>
+            <a:ext cx="12191695" cy="41148"/>
+          </a:xfrm>
+          <a:prstGeom prst="rect">
+            <a:avLst/>
+          </a:prstGeom>
+          <a:solidFill>
+            <a:srgbClr val="FFD000"/>
+          </a:solidFill>
+          <a:ln>
+            <a:noFill/>
+          </a:ln>
+        </p:spPr>
+        <p:style>
+          <a:lnRef idx="1">
+            <a:schemeClr val="accent1"/>
+          </a:lnRef>
+          <a:fillRef idx="3">
+            <a:schemeClr val="accent1"/>
+          </a:fillRef>
+          <a:effectRef idx="2">
+            <a:schemeClr val="accent1"/>
+          </a:effectRef>
+          <a:fontRef idx="minor">
+            <a:schemeClr val="lt1"/>
+          </a:fontRef>
+        </p:style>
+        <p:txBody>
+          <a:bodyPr rtlCol="0" anchor="ctr"/>
+          <a:lstStyle/>
+          <a:p>
+            <a:pPr algn="ctr"/>
+          </a:p>
+        </p:txBody>
+      </p:sp>
+      <p:sp>
+        <p:nvSpPr>
+          <p:cNvPr id="4" name="TextBox 3"/>
+          <p:cNvSpPr txBox="1"/>
+          <p:nvPr/>
+        </p:nvSpPr>
+        <p:spPr>
+          <a:xfrm>
+            <a:off x="457200" y="164592"/>
+            <a:ext cx="11277295" cy="502920"/>
+          </a:xfrm>
+          <a:prstGeom prst="rect">
+            <a:avLst/>
+          </a:prstGeom>
+          <a:noFill/>
+        </p:spPr>
+        <p:txBody>
+          <a:bodyPr wrap="square">
+            <a:spAutoFit/>
+          </a:bodyPr>
+          <a:lstStyle/>
+          <a:p>
+            <a:r>
+              <a:rPr sz="2600" b="1" i="0">
+                <a:solidFill>
+                  <a:srgbClr val="FFFFFF"/>
+                </a:solidFill>
+                <a:latin typeface="Calibri"/>
+              </a:rPr>
+              <a:t>Para continuar (PI)</a:t>
+            </a:r>
+          </a:p>
+        </p:txBody>
+      </p:sp>
+      <p:sp>
+        <p:nvSpPr>
+          <p:cNvPr id="5" name="Rounded Rectangle 4"/>
+          <p:cNvSpPr/>
+          <p:nvPr/>
+        </p:nvSpPr>
+        <p:spPr>
+          <a:xfrm>
+            <a:off x="457200" y="1261872"/>
+            <a:ext cx="11277295" cy="1051560"/>
+          </a:xfrm>
+          <a:prstGeom prst="roundRect">
+            <a:avLst>
+              <a:gd name="adj" fmla="val 12000"/>
+            </a:avLst>
+          </a:prstGeom>
+          <a:solidFill>
+            <a:srgbClr val="E8F4FA"/>
+          </a:solidFill>
+          <a:ln>
+            <a:noFill/>
+          </a:ln>
+        </p:spPr>
+        <p:style>
+          <a:lnRef idx="1">
+            <a:schemeClr val="accent1"/>
+          </a:lnRef>
+          <a:fillRef idx="3">
+            <a:schemeClr val="accent1"/>
+          </a:fillRef>
+          <a:effectRef idx="2">
+            <a:schemeClr val="accent1"/>
+          </a:effectRef>
+          <a:fontRef idx="minor">
+            <a:schemeClr val="lt1"/>
+          </a:fontRef>
+        </p:style>
+        <p:txBody>
+          <a:bodyPr rtlCol="0" anchor="ctr"/>
+          <a:lstStyle/>
+          <a:p>
+            <a:pPr algn="ctr"/>
+          </a:p>
+        </p:txBody>
+      </p:sp>
+      <p:sp>
+        <p:nvSpPr>
+          <p:cNvPr id="6" name="Rectangle 5"/>
+          <p:cNvSpPr/>
+          <p:nvPr/>
+        </p:nvSpPr>
+        <p:spPr>
+          <a:xfrm>
+            <a:off x="457200" y="1261872"/>
+            <a:ext cx="128016" cy="1051560"/>
           </a:xfrm>
           <a:prstGeom prst="rect">
             <a:avLst/>
@@ -10818,73 +10955,16 @@
           </a:p>
         </p:txBody>
       </p:sp>
-      <p:pic>
-        <p:nvPicPr>
-          <p:cNvPr id="3" name="Picture 2" descr="logo_uniajc_color.png"/>
-          <p:cNvPicPr>
-            <a:picLocks noChangeAspect="1"/>
-          </p:cNvPicPr>
-          <p:nvPr/>
-        </p:nvPicPr>
-        <p:blipFill>
-          <a:blip r:embed="rId2"/>
-          <a:stretch>
-            <a:fillRect/>
-          </a:stretch>
-        </p:blipFill>
-        <p:spPr>
-          <a:xfrm>
-            <a:off x="10271455" y="5998464"/>
-            <a:ext cx="1463040" cy="643233"/>
-          </a:xfrm>
-          <a:prstGeom prst="rect">
-            <a:avLst/>
-          </a:prstGeom>
-        </p:spPr>
-      </p:pic>
-      <p:sp>
-        <p:nvSpPr>
-          <p:cNvPr id="4" name="TextBox 3"/>
+      <p:sp>
+        <p:nvSpPr>
+          <p:cNvPr id="7" name="TextBox 6"/>
           <p:cNvSpPr txBox="1"/>
           <p:nvPr/>
         </p:nvSpPr>
         <p:spPr>
           <a:xfrm>
-            <a:off x="457200" y="1737360"/>
-            <a:ext cx="11277295" cy="1097280"/>
-          </a:xfrm>
-          <a:prstGeom prst="rect">
-            <a:avLst/>
-          </a:prstGeom>
-          <a:noFill/>
-        </p:spPr>
-        <p:txBody>
-          <a:bodyPr wrap="square" anchor="ctr"/>
-          <a:lstStyle/>
-          <a:p>
-            <a:pPr algn="ctr"/>
-            <a:r>
-              <a:rPr sz="3400" b="1" i="0">
-                <a:solidFill>
-                  <a:srgbClr val="095292"/>
-                </a:solidFill>
-                <a:latin typeface="Calibri"/>
-              </a:rPr>
-              <a:t>Clase 12 · PI en movimiento</a:t>
-            </a:r>
-          </a:p>
-        </p:txBody>
-      </p:sp>
-      <p:sp>
-        <p:nvSpPr>
-          <p:cNvPr id="5" name="TextBox 4"/>
-          <p:cNvSpPr txBox="1"/>
-          <p:nvPr/>
-        </p:nvSpPr>
-        <p:spPr>
-          <a:xfrm>
-            <a:off x="457200" y="3017520"/>
-            <a:ext cx="11277295" cy="1645920"/>
+            <a:off x="777240" y="1399031"/>
+            <a:ext cx="10774375" cy="822959"/>
           </a:xfrm>
           <a:prstGeom prst="rect">
             <a:avLst/>
@@ -10897,65 +10977,132 @@
           </a:bodyPr>
           <a:lstStyle/>
           <a:p>
-            <a:pPr algn="ctr">
-              <a:spcAft>
-                <a:spcPts val="600"/>
-              </a:spcAft>
+            <a:r>
+              <a:rPr sz="1200" b="1" i="0">
+                <a:solidFill>
+                  <a:srgbClr val="269CCB"/>
+                </a:solidFill>
+                <a:latin typeface="Calibri"/>
+              </a:rPr>
+              <a:t>Info</a:t>
+            </a:r>
+          </a:p>
+          <a:p>
+            <a:pPr>
+              <a:spcBef>
+                <a:spcPts val="400"/>
+              </a:spcBef>
             </a:pPr>
             <a:r>
-              <a:rPr sz="1600" b="0" i="0">
+              <a:rPr sz="1400" b="0" i="0">
                 <a:solidFill>
                   <a:srgbClr val="333333"/>
                 </a:solidFill>
                 <a:latin typeface="Calibri"/>
               </a:rPr>
-              <a:t>Escenario de rendimiento + ensayo 5–8 min de sustentación</a:t>
-            </a:r>
-          </a:p>
-          <a:p>
-            <a:pPr algn="ctr">
-              <a:spcAft>
-                <a:spcPts val="600"/>
-              </a:spcAft>
-            </a:pPr>
-            <a:r>
-              <a:rPr sz="1600" b="0" i="0">
-                <a:solidFill>
-                  <a:srgbClr val="333333"/>
-                </a:solidFill>
-                <a:latin typeface="Calibri"/>
-              </a:rPr>
-              <a:t>Evidencia: Sección Rendimiento + guion de pitch + paquete casi-final</a:t>
-            </a:r>
-          </a:p>
-          <a:p>
-            <a:pPr algn="ctr">
-              <a:spcAft>
-                <a:spcPts val="600"/>
-              </a:spcAft>
-            </a:pPr>
-            <a:r>
-              <a:rPr sz="1600" b="0" i="0">
-                <a:solidFill>
-                  <a:srgbClr val="333333"/>
-                </a:solidFill>
-                <a:latin typeface="Calibri"/>
-              </a:rPr>
-              <a:t>Siguiente paso = siguiente hito del PI CloudLite</a:t>
-            </a:r>
-          </a:p>
-        </p:txBody>
-      </p:sp>
-      <p:sp>
-        <p:nvSpPr>
-          <p:cNvPr id="6" name="TextBox 5"/>
+              <a:t>Entregable: Sección Rendimiento + guion de pitch + paquete casi-final</a:t>
+            </a:r>
+          </a:p>
+        </p:txBody>
+      </p:sp>
+      <p:sp>
+        <p:nvSpPr>
+          <p:cNvPr id="8" name="Rounded Rectangle 7"/>
+          <p:cNvSpPr/>
+          <p:nvPr/>
+        </p:nvSpPr>
+        <p:spPr>
+          <a:xfrm>
+            <a:off x="457200" y="2478024"/>
+            <a:ext cx="11277295" cy="1051560"/>
+          </a:xfrm>
+          <a:prstGeom prst="roundRect">
+            <a:avLst>
+              <a:gd name="adj" fmla="val 12000"/>
+            </a:avLst>
+          </a:prstGeom>
+          <a:solidFill>
+            <a:srgbClr val="FFF8E1"/>
+          </a:solidFill>
+          <a:ln>
+            <a:noFill/>
+          </a:ln>
+        </p:spPr>
+        <p:style>
+          <a:lnRef idx="1">
+            <a:schemeClr val="accent1"/>
+          </a:lnRef>
+          <a:fillRef idx="3">
+            <a:schemeClr val="accent1"/>
+          </a:fillRef>
+          <a:effectRef idx="2">
+            <a:schemeClr val="accent1"/>
+          </a:effectRef>
+          <a:fontRef idx="minor">
+            <a:schemeClr val="lt1"/>
+          </a:fontRef>
+        </p:style>
+        <p:txBody>
+          <a:bodyPr rtlCol="0" anchor="ctr"/>
+          <a:lstStyle/>
+          <a:p>
+            <a:pPr algn="ctr"/>
+          </a:p>
+        </p:txBody>
+      </p:sp>
+      <p:sp>
+        <p:nvSpPr>
+          <p:cNvPr id="9" name="Rectangle 8"/>
+          <p:cNvSpPr/>
+          <p:nvPr/>
+        </p:nvSpPr>
+        <p:spPr>
+          <a:xfrm>
+            <a:off x="457200" y="2478024"/>
+            <a:ext cx="128016" cy="1051560"/>
+          </a:xfrm>
+          <a:prstGeom prst="rect">
+            <a:avLst/>
+          </a:prstGeom>
+          <a:solidFill>
+            <a:srgbClr val="FFD000"/>
+          </a:solidFill>
+          <a:ln>
+            <a:noFill/>
+          </a:ln>
+        </p:spPr>
+        <p:style>
+          <a:lnRef idx="1">
+            <a:schemeClr val="accent1"/>
+          </a:lnRef>
+          <a:fillRef idx="3">
+            <a:schemeClr val="accent1"/>
+          </a:fillRef>
+          <a:effectRef idx="2">
+            <a:schemeClr val="accent1"/>
+          </a:effectRef>
+          <a:fontRef idx="minor">
+            <a:schemeClr val="lt1"/>
+          </a:fontRef>
+        </p:style>
+        <p:txBody>
+          <a:bodyPr rtlCol="0" anchor="ctr"/>
+          <a:lstStyle/>
+          <a:p>
+            <a:pPr algn="ctr"/>
+          </a:p>
+        </p:txBody>
+      </p:sp>
+      <p:sp>
+        <p:nvSpPr>
+          <p:cNvPr id="10" name="TextBox 9"/>
           <p:cNvSpPr txBox="1"/>
           <p:nvPr/>
         </p:nvSpPr>
         <p:spPr>
           <a:xfrm>
-            <a:off x="457200" y="4754880"/>
-            <a:ext cx="11277295" cy="640080"/>
+            <a:off x="777240" y="2615184"/>
+            <a:ext cx="10774375" cy="822959"/>
           </a:xfrm>
           <a:prstGeom prst="rect">
             <a:avLst/>
@@ -10968,15 +11115,203 @@
           </a:bodyPr>
           <a:lstStyle/>
           <a:p>
+            <a:r>
+              <a:rPr sz="1200" b="1" i="0">
+                <a:solidFill>
+                  <a:srgbClr val="FFD000"/>
+                </a:solidFill>
+                <a:latin typeface="Calibri"/>
+              </a:rPr>
+              <a:t>Aclaración</a:t>
+            </a:r>
+          </a:p>
+          <a:p>
+            <a:pPr>
+              <a:spcBef>
+                <a:spcPts val="400"/>
+              </a:spcBef>
+            </a:pPr>
+            <a:r>
+              <a:rPr sz="1400" b="0" i="0">
+                <a:solidFill>
+                  <a:srgbClr val="333333"/>
+                </a:solidFill>
+                <a:latin typeface="Calibri"/>
+              </a:rPr>
+              <a:t>Subir evidencias al paquete CloudLite (Drive/repo) y a la plataforma del curso en la fecha que indique el docente.</a:t>
+            </a:r>
+          </a:p>
+        </p:txBody>
+      </p:sp>
+      <p:sp>
+        <p:nvSpPr>
+          <p:cNvPr id="11" name="Rounded Rectangle 10"/>
+          <p:cNvSpPr/>
+          <p:nvPr/>
+        </p:nvSpPr>
+        <p:spPr>
+          <a:xfrm>
+            <a:off x="457200" y="3694176"/>
+            <a:ext cx="11277295" cy="1051560"/>
+          </a:xfrm>
+          <a:prstGeom prst="roundRect">
+            <a:avLst>
+              <a:gd name="adj" fmla="val 12000"/>
+            </a:avLst>
+          </a:prstGeom>
+          <a:solidFill>
+            <a:srgbClr val="FBE4E4"/>
+          </a:solidFill>
+          <a:ln>
+            <a:noFill/>
+          </a:ln>
+        </p:spPr>
+        <p:style>
+          <a:lnRef idx="1">
+            <a:schemeClr val="accent1"/>
+          </a:lnRef>
+          <a:fillRef idx="3">
+            <a:schemeClr val="accent1"/>
+          </a:fillRef>
+          <a:effectRef idx="2">
+            <a:schemeClr val="accent1"/>
+          </a:effectRef>
+          <a:fontRef idx="minor">
+            <a:schemeClr val="lt1"/>
+          </a:fontRef>
+        </p:style>
+        <p:txBody>
+          <a:bodyPr rtlCol="0" anchor="ctr"/>
+          <a:lstStyle/>
+          <a:p>
             <a:pPr algn="ctr"/>
-            <a:r>
-              <a:rPr sz="2000" b="1" i="0">
-                <a:solidFill>
-                  <a:srgbClr val="269CCB"/>
-                </a:solidFill>
-                <a:latin typeface="Calibri"/>
-              </a:rPr>
-              <a:t>Teoría al servicio del proyecto</a:t>
+          </a:p>
+        </p:txBody>
+      </p:sp>
+      <p:sp>
+        <p:nvSpPr>
+          <p:cNvPr id="12" name="Rectangle 11"/>
+          <p:cNvSpPr/>
+          <p:nvPr/>
+        </p:nvSpPr>
+        <p:spPr>
+          <a:xfrm>
+            <a:off x="457200" y="3694176"/>
+            <a:ext cx="128016" cy="1051560"/>
+          </a:xfrm>
+          <a:prstGeom prst="rect">
+            <a:avLst/>
+          </a:prstGeom>
+          <a:solidFill>
+            <a:srgbClr val="A02030"/>
+          </a:solidFill>
+          <a:ln>
+            <a:noFill/>
+          </a:ln>
+        </p:spPr>
+        <p:style>
+          <a:lnRef idx="1">
+            <a:schemeClr val="accent1"/>
+          </a:lnRef>
+          <a:fillRef idx="3">
+            <a:schemeClr val="accent1"/>
+          </a:fillRef>
+          <a:effectRef idx="2">
+            <a:schemeClr val="accent1"/>
+          </a:effectRef>
+          <a:fontRef idx="minor">
+            <a:schemeClr val="lt1"/>
+          </a:fontRef>
+        </p:style>
+        <p:txBody>
+          <a:bodyPr rtlCol="0" anchor="ctr"/>
+          <a:lstStyle/>
+          <a:p>
+            <a:pPr algn="ctr"/>
+          </a:p>
+        </p:txBody>
+      </p:sp>
+      <p:sp>
+        <p:nvSpPr>
+          <p:cNvPr id="13" name="TextBox 12"/>
+          <p:cNvSpPr txBox="1"/>
+          <p:nvPr/>
+        </p:nvSpPr>
+        <p:spPr>
+          <a:xfrm>
+            <a:off x="777240" y="3831336"/>
+            <a:ext cx="10774375" cy="822959"/>
+          </a:xfrm>
+          <a:prstGeom prst="rect">
+            <a:avLst/>
+          </a:prstGeom>
+          <a:noFill/>
+        </p:spPr>
+        <p:txBody>
+          <a:bodyPr wrap="square">
+            <a:spAutoFit/>
+          </a:bodyPr>
+          <a:lstStyle/>
+          <a:p>
+            <a:r>
+              <a:rPr sz="1200" b="1" i="0">
+                <a:solidFill>
+                  <a:srgbClr val="A02030"/>
+                </a:solidFill>
+                <a:latin typeface="Calibri"/>
+              </a:rPr>
+              <a:t>Atención</a:t>
+            </a:r>
+          </a:p>
+          <a:p>
+            <a:pPr>
+              <a:spcBef>
+                <a:spcPts val="400"/>
+              </a:spcBef>
+            </a:pPr>
+            <a:r>
+              <a:rPr sz="1400" b="0" i="0">
+                <a:solidFill>
+                  <a:srgbClr val="333333"/>
+                </a:solidFill>
+                <a:latin typeface="Calibri"/>
+              </a:rPr>
+              <a:t>Sin cloud de pago ni instalaciones obligatorias de hipervisores/Docker Desktop.</a:t>
+            </a:r>
+          </a:p>
+        </p:txBody>
+      </p:sp>
+      <p:sp>
+        <p:nvSpPr>
+          <p:cNvPr id="14" name="TextBox 13"/>
+          <p:cNvSpPr txBox="1"/>
+          <p:nvPr/>
+        </p:nvSpPr>
+        <p:spPr>
+          <a:xfrm>
+            <a:off x="11185855" y="6473952"/>
+            <a:ext cx="640080" cy="274320"/>
+          </a:xfrm>
+          <a:prstGeom prst="rect">
+            <a:avLst/>
+          </a:prstGeom>
+          <a:noFill/>
+        </p:spPr>
+        <p:txBody>
+          <a:bodyPr wrap="square">
+            <a:spAutoFit/>
+          </a:bodyPr>
+          <a:lstStyle/>
+          <a:p>
+            <a:pPr algn="r"/>
+            <a:r>
+              <a:rPr sz="1100" b="0" i="0">
+                <a:solidFill>
+                  <a:srgbClr val="666666"/>
+                </a:solidFill>
+                <a:latin typeface="Calibri"/>
+              </a:rPr>
+              <a:t>29</a:t>
             </a:r>
           </a:p>
         </p:txBody>
@@ -11241,6 +11576,238 @@
 </p:sld>
 </file>
 
+<file path=ppt/slides/slide30.xml><?xml version="1.0" encoding="utf-8"?>
+<p:sld xmlns:a="http://schemas.openxmlformats.org/drawingml/2006/main" xmlns:p="http://schemas.openxmlformats.org/presentationml/2006/main" xmlns:r="http://schemas.openxmlformats.org/officeDocument/2006/relationships">
+  <p:cSld>
+    <p:bg>
+      <p:bgPr>
+        <a:solidFill>
+          <a:srgbClr val="FFFFFF"/>
+        </a:solidFill>
+        <a:effectLst/>
+      </p:bgPr>
+    </p:bg>
+    <p:spTree>
+      <p:nvGrpSpPr>
+        <p:cNvPr id="1" name=""/>
+        <p:cNvGrpSpPr/>
+        <p:nvPr/>
+      </p:nvGrpSpPr>
+      <p:grpSpPr/>
+      <p:sp>
+        <p:nvSpPr>
+          <p:cNvPr id="2" name="Rectangle 1"/>
+          <p:cNvSpPr/>
+          <p:nvPr/>
+        </p:nvSpPr>
+        <p:spPr>
+          <a:xfrm>
+            <a:off x="0" y="0"/>
+            <a:ext cx="12191695" cy="164592"/>
+          </a:xfrm>
+          <a:prstGeom prst="rect">
+            <a:avLst/>
+          </a:prstGeom>
+          <a:solidFill>
+            <a:srgbClr val="269CCB"/>
+          </a:solidFill>
+          <a:ln>
+            <a:noFill/>
+          </a:ln>
+        </p:spPr>
+        <p:style>
+          <a:lnRef idx="1">
+            <a:schemeClr val="accent1"/>
+          </a:lnRef>
+          <a:fillRef idx="3">
+            <a:schemeClr val="accent1"/>
+          </a:fillRef>
+          <a:effectRef idx="2">
+            <a:schemeClr val="accent1"/>
+          </a:effectRef>
+          <a:fontRef idx="minor">
+            <a:schemeClr val="lt1"/>
+          </a:fontRef>
+        </p:style>
+        <p:txBody>
+          <a:bodyPr rtlCol="0" anchor="ctr"/>
+          <a:lstStyle/>
+          <a:p>
+            <a:pPr algn="ctr"/>
+          </a:p>
+        </p:txBody>
+      </p:sp>
+      <p:pic>
+        <p:nvPicPr>
+          <p:cNvPr id="3" name="Picture 2" descr="logo_uniajc_color.png"/>
+          <p:cNvPicPr>
+            <a:picLocks noChangeAspect="1"/>
+          </p:cNvPicPr>
+          <p:nvPr/>
+        </p:nvPicPr>
+        <p:blipFill>
+          <a:blip r:embed="rId2"/>
+          <a:stretch>
+            <a:fillRect/>
+          </a:stretch>
+        </p:blipFill>
+        <p:spPr>
+          <a:xfrm>
+            <a:off x="10271455" y="5998464"/>
+            <a:ext cx="1463040" cy="643233"/>
+          </a:xfrm>
+          <a:prstGeom prst="rect">
+            <a:avLst/>
+          </a:prstGeom>
+        </p:spPr>
+      </p:pic>
+      <p:sp>
+        <p:nvSpPr>
+          <p:cNvPr id="4" name="TextBox 3"/>
+          <p:cNvSpPr txBox="1"/>
+          <p:nvPr/>
+        </p:nvSpPr>
+        <p:spPr>
+          <a:xfrm>
+            <a:off x="457200" y="1737360"/>
+            <a:ext cx="11277295" cy="1097280"/>
+          </a:xfrm>
+          <a:prstGeom prst="rect">
+            <a:avLst/>
+          </a:prstGeom>
+          <a:noFill/>
+        </p:spPr>
+        <p:txBody>
+          <a:bodyPr wrap="square" anchor="ctr"/>
+          <a:lstStyle/>
+          <a:p>
+            <a:pPr algn="ctr"/>
+            <a:r>
+              <a:rPr sz="3400" b="1" i="0">
+                <a:solidFill>
+                  <a:srgbClr val="095292"/>
+                </a:solidFill>
+                <a:latin typeface="Calibri"/>
+              </a:rPr>
+              <a:t>Clase 12 · PI en movimiento</a:t>
+            </a:r>
+          </a:p>
+        </p:txBody>
+      </p:sp>
+      <p:sp>
+        <p:nvSpPr>
+          <p:cNvPr id="5" name="TextBox 4"/>
+          <p:cNvSpPr txBox="1"/>
+          <p:nvPr/>
+        </p:nvSpPr>
+        <p:spPr>
+          <a:xfrm>
+            <a:off x="457200" y="3017520"/>
+            <a:ext cx="11277295" cy="1645920"/>
+          </a:xfrm>
+          <a:prstGeom prst="rect">
+            <a:avLst/>
+          </a:prstGeom>
+          <a:noFill/>
+        </p:spPr>
+        <p:txBody>
+          <a:bodyPr wrap="square">
+            <a:spAutoFit/>
+          </a:bodyPr>
+          <a:lstStyle/>
+          <a:p>
+            <a:pPr algn="ctr">
+              <a:spcAft>
+                <a:spcPts val="600"/>
+              </a:spcAft>
+            </a:pPr>
+            <a:r>
+              <a:rPr sz="1600" b="0" i="0">
+                <a:solidFill>
+                  <a:srgbClr val="333333"/>
+                </a:solidFill>
+                <a:latin typeface="Calibri"/>
+              </a:rPr>
+              <a:t>Escenario de rendimiento + ensayo 5–8 min de sustentación</a:t>
+            </a:r>
+          </a:p>
+          <a:p>
+            <a:pPr algn="ctr">
+              <a:spcAft>
+                <a:spcPts val="600"/>
+              </a:spcAft>
+            </a:pPr>
+            <a:r>
+              <a:rPr sz="1600" b="0" i="0">
+                <a:solidFill>
+                  <a:srgbClr val="333333"/>
+                </a:solidFill>
+                <a:latin typeface="Calibri"/>
+              </a:rPr>
+              <a:t>Evidencia: Sección Rendimiento + guion de pitch + paquete casi-final</a:t>
+            </a:r>
+          </a:p>
+          <a:p>
+            <a:pPr algn="ctr">
+              <a:spcAft>
+                <a:spcPts val="600"/>
+              </a:spcAft>
+            </a:pPr>
+            <a:r>
+              <a:rPr sz="1600" b="0" i="0">
+                <a:solidFill>
+                  <a:srgbClr val="333333"/>
+                </a:solidFill>
+                <a:latin typeface="Calibri"/>
+              </a:rPr>
+              <a:t>Siguiente paso = siguiente hito del PI CloudLite</a:t>
+            </a:r>
+          </a:p>
+        </p:txBody>
+      </p:sp>
+      <p:sp>
+        <p:nvSpPr>
+          <p:cNvPr id="6" name="TextBox 5"/>
+          <p:cNvSpPr txBox="1"/>
+          <p:nvPr/>
+        </p:nvSpPr>
+        <p:spPr>
+          <a:xfrm>
+            <a:off x="457200" y="4754880"/>
+            <a:ext cx="11277295" cy="640080"/>
+          </a:xfrm>
+          <a:prstGeom prst="rect">
+            <a:avLst/>
+          </a:prstGeom>
+          <a:noFill/>
+        </p:spPr>
+        <p:txBody>
+          <a:bodyPr wrap="square">
+            <a:spAutoFit/>
+          </a:bodyPr>
+          <a:lstStyle/>
+          <a:p>
+            <a:pPr algn="ctr"/>
+            <a:r>
+              <a:rPr sz="2000" b="1" i="0">
+                <a:solidFill>
+                  <a:srgbClr val="269CCB"/>
+                </a:solidFill>
+                <a:latin typeface="Calibri"/>
+              </a:rPr>
+              <a:t>Teoría al servicio del proyecto</a:t>
+            </a:r>
+          </a:p>
+        </p:txBody>
+      </p:sp>
+    </p:spTree>
+  </p:cSld>
+  <p:clrMapOvr>
+    <a:masterClrMapping/>
+  </p:clrMapOvr>
+</p:sld>
+</file>
+
 <file path=ppt/slides/slide4.xml><?xml version="1.0" encoding="utf-8"?>
 <p:sld xmlns:a="http://schemas.openxmlformats.org/drawingml/2006/main" xmlns:p="http://schemas.openxmlformats.org/presentationml/2006/main" xmlns:r="http://schemas.openxmlformats.org/officeDocument/2006/relationships">
   <p:cSld>
@@ -12114,7 +12681,7 @@
                 </a:solidFill>
                 <a:latin typeface="Calibri"/>
               </a:rPr>
-              <a:t>Latencia, throughput y concurrencia: la identidad que las une</a:t>
+              <a:t>Latencia, throughput y concurrencia: la identidad que las une (1/2)</a:t>
             </a:r>
           </a:p>
         </p:txBody>
@@ -12169,7 +12736,7 @@
                 </a:solidFill>
                 <a:latin typeface="Calibri"/>
               </a:rPr>
-              <a:t>–   Hay dos magnitudes que se confunden todo el tiempo.</a:t>
+              <a:t>–   La latencia, o tiempo de respuesta, es cuanto tarda UNA peticion desde que sale del cliente hasta que llega la respuesta completa; se mide en milisegundos y es lo que siente el usuario.</a:t>
             </a:r>
           </a:p>
           <a:p>
@@ -12185,55 +12752,7 @@
                 </a:solidFill>
                 <a:latin typeface="Calibri"/>
               </a:rPr>
-              <a:t>–   La latencia, o tiempo de respuesta, es cuanto tarda UNA peticion desde que sale del cliente hasta que llega la respuesta completa; se mide en milisegundos y es lo que siente el usuario.</a:t>
-            </a:r>
-          </a:p>
-          <a:p>
-            <a:pPr>
-              <a:spcAft>
-                <a:spcPts val="800"/>
-              </a:spcAft>
-            </a:pPr>
-            <a:r>
-              <a:rPr sz="2000" b="0" i="0">
-                <a:solidFill>
-                  <a:srgbClr val="333333"/>
-                </a:solidFill>
-                <a:latin typeface="Calibri"/>
-              </a:rPr>
               <a:t>–   El throughput, o caudal, es cuantas peticiones atiende el sistema por unidad de tiempo; se mide en peticiones por segundo, abreviado RPS, y es lo que importa para la capacidad.</a:t>
-            </a:r>
-          </a:p>
-          <a:p>
-            <a:pPr>
-              <a:spcAft>
-                <a:spcPts val="800"/>
-              </a:spcAft>
-            </a:pPr>
-            <a:r>
-              <a:rPr sz="2000" b="0" i="0">
-                <a:solidFill>
-                  <a:srgbClr val="333333"/>
-                </a:solidFill>
-                <a:latin typeface="Calibri"/>
-              </a:rPr>
-              <a:t>–   No se mueven juntas: un sistema puede atender 500 RPS con latencia terrible porque todo espera en cola, y otro puede tener latencia excelente con 3 RPS porque nadie lo usa.</a:t>
-            </a:r>
-          </a:p>
-          <a:p>
-            <a:pPr>
-              <a:spcAft>
-                <a:spcPts val="800"/>
-              </a:spcAft>
-            </a:pPr>
-            <a:r>
-              <a:rPr sz="2000" b="0" i="0">
-                <a:solidFill>
-                  <a:srgbClr val="333333"/>
-                </a:solidFill>
-                <a:latin typeface="Calibri"/>
-              </a:rPr>
-              <a:t>–   Si CloudLite atiende 5 RPS con 300 milisegundos, hay en promedio 1.5 peticiones simultaneas dentro del sistema, y ese numero decide cuantos hilos, cuantas conexiones a base de datos y cuantas instancias se necesitan.</a:t>
             </a:r>
           </a:p>
         </p:txBody>
@@ -12414,7 +12933,7 @@
                 </a:solidFill>
                 <a:latin typeface="Calibri"/>
               </a:rPr>
-              <a:t>Por que el promedio miente y el percentil no (1/2)</a:t>
+              <a:t>Latencia, throughput y concurrencia: la identidad que las une (2/2)</a:t>
             </a:r>
           </a:p>
         </p:txBody>
@@ -12453,7 +12972,7 @@
                 </a:solidFill>
                 <a:latin typeface="Calibri"/>
               </a:rPr>
-              <a:t>–   El corazon del tema es entender por que el promedio miente y el percentil no.</a:t>
+              <a:t>–   No se mueven juntas: un sistema puede atender 500 RPS con latencia terrible porque todo espera en cola, y otro puede tener latencia excelente con 3 RPS porque nadie lo usa.</a:t>
             </a:r>
           </a:p>
           <a:p>
@@ -12469,55 +12988,7 @@
                 </a:solidFill>
                 <a:latin typeface="Calibri"/>
               </a:rPr>
-              <a:t>–   Un percentil es el valor por debajo del cual cae un porcentaje dado de las observaciones ordenadas de menor a mayor: el p95 del tiempo de respuesta es el tiempo tal que el 95 por ciento de las peticiones respondieron en ese tiempo o menos, y el 5 por ciento restante tardo mas.</a:t>
-            </a:r>
-          </a:p>
-          <a:p>
-            <a:pPr>
-              <a:spcAft>
-                <a:spcPts val="800"/>
-              </a:spcAft>
-            </a:pPr>
-            <a:r>
-              <a:rPr sz="2000" b="0" i="0">
-                <a:solidFill>
-                  <a:srgbClr val="333333"/>
-                </a:solidFill>
-                <a:latin typeface="Calibri"/>
-              </a:rPr>
-              <a:t>–   El ejemplo numerico es obligatorio porque convence de inmediato.</a:t>
-            </a:r>
-          </a:p>
-          <a:p>
-            <a:pPr>
-              <a:spcAft>
-                <a:spcPts val="800"/>
-              </a:spcAft>
-            </a:pPr>
-            <a:r>
-              <a:rPr sz="2000" b="0" i="0">
-                <a:solidFill>
-                  <a:srgbClr val="333333"/>
-                </a:solidFill>
-                <a:latin typeface="Calibri"/>
-              </a:rPr>
-              <a:t>–   Suponga 100 peticiones a CloudLite: 95 responden en 120 milisegundos y 5 responden en 4000 porque cayeron en una consulta sin indice.</a:t>
-            </a:r>
-          </a:p>
-          <a:p>
-            <a:pPr>
-              <a:spcAft>
-                <a:spcPts val="800"/>
-              </a:spcAft>
-            </a:pPr>
-            <a:r>
-              <a:rPr sz="2000" b="0" i="0">
-                <a:solidFill>
-                  <a:srgbClr val="333333"/>
-                </a:solidFill>
-                <a:latin typeface="Calibri"/>
-              </a:rPr>
-              <a:t>–   El promedio es 314 milisegundos, una cifra que suena aceptable y que no le paso a nadie: ninguna peticion real tardo 314 milisegundos.</a:t>
+              <a:t>–   Si CloudLite atiende 5 RPS con 300 milisegundos, hay en promedio 1.5 peticiones simultaneas dentro del sistema, y ese numero decide cuantos hilos, cuantas conexiones a base de datos y cuantas instancias se necesitan.</a:t>
             </a:r>
           </a:p>
         </p:txBody>
@@ -12698,7 +13169,7 @@
                 </a:solidFill>
                 <a:latin typeface="Calibri"/>
               </a:rPr>
-              <a:t>Por que el promedio miente y el percentil no (2/2)</a:t>
+              <a:t>Por que el promedio miente y el percentil no (1/2)</a:t>
             </a:r>
           </a:p>
         </p:txBody>
@@ -12737,7 +13208,7 @@
                 </a:solidFill>
                 <a:latin typeface="Calibri"/>
               </a:rPr>
-              <a:t>–   El p50, o mediana, es 120; el p99 es 4000.</a:t>
+              <a:t>–   El corazon del tema es entender por que el promedio miente y el percentil no.</a:t>
             </a:r>
           </a:p>
           <a:p>
@@ -12753,7 +13224,7 @@
                 </a:solidFill>
                 <a:latin typeface="Calibri"/>
               </a:rPr>
-              <a:t>–   Reportar el promedio esconde a cinco usuarios de cada cien esperando cuatro segundos; reportar p95 y p99 los hace visibles.</a:t>
+              <a:t>–   Un percentil es el valor por debajo del cual cae un porcentaje dado de las observaciones ordenadas de menor a mayor: el p95 del tiempo de respuesta es el tiempo tal que el 95 por ciento de las peticiones respondieron en ese tiempo o menos, y el 5 por ciento restante tardo mas.</a:t>
             </a:r>
           </a:p>
           <a:p>
@@ -12769,7 +13240,7 @@
                 </a:solidFill>
                 <a:latin typeface="Calibri"/>
               </a:rPr>
-              <a:t>–   Por eso la industria escribe sus objetivos en percentiles, y por eso el entregable de hoy exige un objetivo con la forma "p95 del endpoint de listado menor a 300 milisegundos con 5 RPS", que tiene metrica, umbral y condicion de carga.</a:t>
+              <a:t>–   El ejemplo numerico es obligatorio porque convence de inmediato.</a:t>
             </a:r>
           </a:p>
           <a:p>
@@ -12785,7 +13256,7 @@
                 </a:solidFill>
                 <a:latin typeface="Calibri"/>
               </a:rPr>
-              <a:t>–   Un objetivo sin condicion de carga no significa nada: cualquier sistema es rapido sin usuarios.</a:t>
+              <a:t>–   Suponga 100 peticiones a CloudLite: 95 responden en 120 milisegundos y 5 responden en 4000 porque cayeron en una consulta sin indice.</a:t>
             </a:r>
           </a:p>
         </p:txBody>

--- a/Arquitectura de Sistemas Computacionales/Clases/Clase 12 - Pruebas de rendimiento y preparacion final/Presentacion.pptx
+++ b/Arquitectura de Sistemas Computacionales/Clases/Clase 12 - Pruebas de rendimiento y preparacion final/Presentacion.pptx
@@ -35,6 +35,8 @@
     <p:sldId id="283" r:id="rId34"/>
     <p:sldId id="284" r:id="rId35"/>
     <p:sldId id="285" r:id="rId36"/>
+    <p:sldId id="286" r:id="rId37"/>
+    <p:sldId id="287" r:id="rId38"/>
   </p:sldIdLst>
   <p:sldSz cx="12191695" cy="6858000" type="screen4x3"/>
   <p:notesSz cx="6858000" cy="9144000"/>
@@ -7612,7 +7614,7 @@
                 </a:solidFill>
                 <a:latin typeface="Calibri"/>
               </a:rPr>
-              <a:t>«Que sea rapido» no es un requisito</a:t>
+              <a:t>El presupuesto de latencia del camino critico</a:t>
             </a:r>
           </a:p>
         </p:txBody>
@@ -7626,7 +7628,7 @@
         <p:spPr>
           <a:xfrm>
             <a:off x="457200" y="1261872"/>
-            <a:ext cx="5478627" cy="5093208"/>
+            <a:ext cx="11277295" cy="5093208"/>
           </a:xfrm>
           <a:prstGeom prst="roundRect">
             <a:avLst>
@@ -7634,7 +7636,7 @@
             </a:avLst>
           </a:prstGeom>
           <a:solidFill>
-            <a:srgbClr val="FBE4E4"/>
+            <a:srgbClr val="1E2A38"/>
           </a:solidFill>
           <a:ln>
             <a:noFill/>
@@ -7671,215 +7673,7 @@
         <p:spPr>
           <a:xfrm>
             <a:off x="457200" y="1261872"/>
-            <a:ext cx="5478627" cy="502920"/>
-          </a:xfrm>
-          <a:prstGeom prst="rect">
-            <a:avLst/>
-          </a:prstGeom>
-          <a:solidFill>
-            <a:srgbClr val="A02030"/>
-          </a:solidFill>
-          <a:ln>
-            <a:noFill/>
-          </a:ln>
-        </p:spPr>
-        <p:style>
-          <a:lnRef idx="1">
-            <a:schemeClr val="accent1"/>
-          </a:lnRef>
-          <a:fillRef idx="3">
-            <a:schemeClr val="accent1"/>
-          </a:fillRef>
-          <a:effectRef idx="2">
-            <a:schemeClr val="accent1"/>
-          </a:effectRef>
-          <a:fontRef idx="minor">
-            <a:schemeClr val="lt1"/>
-          </a:fontRef>
-        </p:style>
-        <p:txBody>
-          <a:bodyPr rtlCol="0" anchor="ctr"/>
-          <a:lstStyle/>
-          <a:p>
-            <a:pPr algn="ctr"/>
-          </a:p>
-        </p:txBody>
-      </p:sp>
-      <p:sp>
-        <p:nvSpPr>
-          <p:cNvPr id="7" name="TextBox 6"/>
-          <p:cNvSpPr txBox="1"/>
-          <p:nvPr/>
-        </p:nvSpPr>
-        <p:spPr>
-          <a:xfrm>
-            <a:off x="594360" y="1353312"/>
-            <a:ext cx="5204307" cy="365760"/>
-          </a:xfrm>
-          <a:prstGeom prst="rect">
-            <a:avLst/>
-          </a:prstGeom>
-          <a:noFill/>
-        </p:spPr>
-        <p:txBody>
-          <a:bodyPr wrap="square" anchor="ctr"/>
-          <a:lstStyle/>
-          <a:p>
-            <a:pPr algn="ctr"/>
-            <a:r>
-              <a:rPr sz="1600" b="1" i="0">
-                <a:solidFill>
-                  <a:srgbClr val="FFFFFF"/>
-                </a:solidFill>
-                <a:latin typeface="Calibri"/>
-              </a:rPr>
-              <a:t>Enunciado vago</a:t>
-            </a:r>
-          </a:p>
-        </p:txBody>
-      </p:sp>
-      <p:sp>
-        <p:nvSpPr>
-          <p:cNvPr id="8" name="TextBox 7"/>
-          <p:cNvSpPr txBox="1"/>
-          <p:nvPr/>
-        </p:nvSpPr>
-        <p:spPr>
-          <a:xfrm>
-            <a:off x="621792" y="1901952"/>
-            <a:ext cx="5158587" cy="4498848"/>
-          </a:xfrm>
-          <a:prstGeom prst="rect">
-            <a:avLst/>
-          </a:prstGeom>
-          <a:noFill/>
-        </p:spPr>
-        <p:txBody>
-          <a:bodyPr wrap="square">
-            <a:spAutoFit/>
-          </a:bodyPr>
-          <a:lstStyle/>
-          <a:p>
-            <a:pPr>
-              <a:spcAft>
-                <a:spcPts val="800"/>
-              </a:spcAft>
-            </a:pPr>
-            <a:r>
-              <a:rPr sz="1500" b="0" i="0">
-                <a:solidFill>
-                  <a:srgbClr val="333333"/>
-                </a:solidFill>
-                <a:latin typeface="Calibri"/>
-              </a:rPr>
-              <a:t>–   «La app tiene que ser rapida»</a:t>
-            </a:r>
-          </a:p>
-          <a:p>
-            <a:pPr>
-              <a:spcAft>
-                <a:spcPts val="800"/>
-              </a:spcAft>
-            </a:pPr>
-            <a:r>
-              <a:rPr sz="1500" b="0" i="0">
-                <a:solidFill>
-                  <a:srgbClr val="333333"/>
-                </a:solidFill>
-                <a:latin typeface="Calibri"/>
-              </a:rPr>
-              <a:t>–   «Aguanta harta gente»</a:t>
-            </a:r>
-          </a:p>
-          <a:p>
-            <a:pPr>
-              <a:spcAft>
-                <a:spcPts val="800"/>
-              </a:spcAft>
-            </a:pPr>
-            <a:r>
-              <a:rPr sz="1500" b="0" i="0">
-                <a:solidFill>
-                  <a:srgbClr val="333333"/>
-                </a:solidFill>
-                <a:latin typeface="Calibri"/>
-              </a:rPr>
-              <a:t>–   «Si se pone lenta, le subimos recursos»</a:t>
-            </a:r>
-          </a:p>
-          <a:p>
-            <a:pPr>
-              <a:spcAft>
-                <a:spcPts val="800"/>
-              </a:spcAft>
-            </a:pPr>
-            <a:r>
-              <a:rPr sz="1500" b="0" i="0">
-                <a:solidFill>
-                  <a:srgbClr val="333333"/>
-                </a:solidFill>
-                <a:latin typeface="Calibri"/>
-              </a:rPr>
-              <a:t>–   No hay con que comparar despues</a:t>
-            </a:r>
-          </a:p>
-        </p:txBody>
-      </p:sp>
-      <p:sp>
-        <p:nvSpPr>
-          <p:cNvPr id="9" name="Rounded Rectangle 8"/>
-          <p:cNvSpPr/>
-          <p:nvPr/>
-        </p:nvSpPr>
-        <p:spPr>
-          <a:xfrm>
-            <a:off x="6255867" y="1261872"/>
-            <a:ext cx="5478627" cy="5093208"/>
-          </a:xfrm>
-          <a:prstGeom prst="roundRect">
-            <a:avLst>
-              <a:gd name="adj" fmla="val 12000"/>
-            </a:avLst>
-          </a:prstGeom>
-          <a:solidFill>
-            <a:srgbClr val="E8F4FA"/>
-          </a:solidFill>
-          <a:ln>
-            <a:noFill/>
-          </a:ln>
-        </p:spPr>
-        <p:style>
-          <a:lnRef idx="1">
-            <a:schemeClr val="accent1"/>
-          </a:lnRef>
-          <a:fillRef idx="3">
-            <a:schemeClr val="accent1"/>
-          </a:fillRef>
-          <a:effectRef idx="2">
-            <a:schemeClr val="accent1"/>
-          </a:effectRef>
-          <a:fontRef idx="minor">
-            <a:schemeClr val="lt1"/>
-          </a:fontRef>
-        </p:style>
-        <p:txBody>
-          <a:bodyPr rtlCol="0" anchor="ctr"/>
-          <a:lstStyle/>
-          <a:p>
-            <a:pPr algn="ctr"/>
-          </a:p>
-        </p:txBody>
-      </p:sp>
-      <p:sp>
-        <p:nvSpPr>
-          <p:cNvPr id="10" name="Rectangle 9"/>
-          <p:cNvSpPr/>
-          <p:nvPr/>
-        </p:nvSpPr>
-        <p:spPr>
-          <a:xfrm>
-            <a:off x="6255867" y="1261872"/>
-            <a:ext cx="5478627" cy="502920"/>
+            <a:ext cx="11277295" cy="320040"/>
           </a:xfrm>
           <a:prstGeom prst="rect">
             <a:avLst/>
@@ -7915,14 +7709,14 @@
       </p:sp>
       <p:sp>
         <p:nvSpPr>
-          <p:cNvPr id="11" name="TextBox 10"/>
+          <p:cNvPr id="7" name="TextBox 6"/>
           <p:cNvSpPr txBox="1"/>
           <p:nvPr/>
         </p:nvSpPr>
         <p:spPr>
           <a:xfrm>
-            <a:off x="6393027" y="1353312"/>
-            <a:ext cx="5204307" cy="365760"/>
+            <a:off x="685800" y="1307592"/>
+            <a:ext cx="10820095" cy="256032"/>
           </a:xfrm>
           <a:prstGeom prst="rect">
             <a:avLst/>
@@ -7933,29 +7727,28 @@
           <a:bodyPr wrap="square" anchor="ctr"/>
           <a:lstStyle/>
           <a:p>
-            <a:pPr algn="ctr"/>
-            <a:r>
-              <a:rPr sz="1600" b="1" i="0">
-                <a:solidFill>
-                  <a:srgbClr val="FFFFFF"/>
-                </a:solidFill>
-                <a:latin typeface="Calibri"/>
-              </a:rPr>
-              <a:t>Enunciado medible</a:t>
-            </a:r>
-          </a:p>
-        </p:txBody>
-      </p:sp>
-      <p:sp>
-        <p:nvSpPr>
-          <p:cNvPr id="12" name="TextBox 11"/>
+            <a:r>
+              <a:rPr sz="1000" b="1" i="0">
+                <a:solidFill>
+                  <a:srgbClr val="269CCB"/>
+                </a:solidFill>
+                <a:latin typeface="Calibri"/>
+              </a:rPr>
+              <a:t>● ● ●</a:t>
+            </a:r>
+          </a:p>
+        </p:txBody>
+      </p:sp>
+      <p:sp>
+        <p:nvSpPr>
+          <p:cNvPr id="8" name="TextBox 7"/>
           <p:cNvSpPr txBox="1"/>
           <p:nvPr/>
         </p:nvSpPr>
         <p:spPr>
           <a:xfrm>
-            <a:off x="6420459" y="1901952"/>
-            <a:ext cx="5158587" cy="4498848"/>
+            <a:off x="777240" y="1719072"/>
+            <a:ext cx="10637215" cy="4453128"/>
           </a:xfrm>
           <a:prstGeom prst="rect">
             <a:avLst/>
@@ -7970,117 +7763,264 @@
           <a:p>
             <a:pPr>
               <a:spcAft>
-                <a:spcPts val="800"/>
+                <a:spcPts val="400"/>
               </a:spcAft>
             </a:pPr>
             <a:r>
-              <a:rPr sz="1500" b="0" i="0">
-                <a:solidFill>
-                  <a:srgbClr val="333333"/>
-                </a:solidFill>
-                <a:latin typeface="Calibri"/>
-              </a:rPr>
-              <a:t>–   </a:t>
-            </a:r>
-            <a:r>
-              <a:rPr sz="1500" b="1" i="0">
-                <a:solidFill>
-                  <a:srgbClr val="333333"/>
-                </a:solidFill>
-                <a:latin typeface="Calibri"/>
-              </a:rPr>
-              <a:t>p95 &lt; 300 ms</a:t>
-            </a:r>
-            <a:r>
-              <a:rPr sz="1500" b="0" i="0">
-                <a:solidFill>
-                  <a:srgbClr val="333333"/>
-                </a:solidFill>
-                <a:latin typeface="Calibri"/>
-              </a:rPr>
-              <a:t> en el endpoint de reserva</a:t>
+              <a:rPr sz="1400" b="0" i="0">
+                <a:solidFill>
+                  <a:srgbClr val="FFFFFF"/>
+                </a:solidFill>
+                <a:latin typeface="Calibri"/>
+              </a:rPr>
+              <a:t>sequenceDiagram</a:t>
             </a:r>
           </a:p>
           <a:p>
             <a:pPr>
               <a:spcAft>
-                <a:spcPts val="800"/>
+                <a:spcPts val="400"/>
               </a:spcAft>
             </a:pPr>
             <a:r>
-              <a:rPr sz="1500" b="0" i="0">
-                <a:solidFill>
-                  <a:srgbClr val="333333"/>
-                </a:solidFill>
-                <a:latin typeface="Calibri"/>
-              </a:rPr>
-              <a:t>–   Escenario: </a:t>
-            </a:r>
-            <a:r>
-              <a:rPr sz="1500" b="1" i="0">
-                <a:solidFill>
-                  <a:srgbClr val="333333"/>
-                </a:solidFill>
-                <a:latin typeface="Calibri"/>
-              </a:rPr>
-              <a:t>150 RPS</a:t>
-            </a:r>
-            <a:r>
-              <a:rPr sz="1500" b="0" i="0">
-                <a:solidFill>
-                  <a:srgbClr val="333333"/>
-                </a:solidFill>
-                <a:latin typeface="Calibri"/>
-              </a:rPr>
-              <a:t> en el pico de inicio de semestre</a:t>
+              <a:rPr sz="1400" b="0" i="0">
+                <a:solidFill>
+                  <a:srgbClr val="FFFFFF"/>
+                </a:solidFill>
+                <a:latin typeface="Calibri"/>
+              </a:rPr>
+              <a:t>  autonumber</a:t>
             </a:r>
           </a:p>
           <a:p>
             <a:pPr>
               <a:spcAft>
-                <a:spcPts val="800"/>
+                <a:spcPts val="400"/>
               </a:spcAft>
             </a:pPr>
             <a:r>
-              <a:rPr sz="1500" b="0" i="0">
-                <a:solidFill>
-                  <a:srgbClr val="333333"/>
-                </a:solidFill>
-                <a:latin typeface="Calibri"/>
-              </a:rPr>
-              <a:t>–   Bottleneck sospechado: </a:t>
-            </a:r>
-            <a:r>
-              <a:rPr sz="1500" b="1" i="0">
-                <a:solidFill>
-                  <a:srgbClr val="333333"/>
-                </a:solidFill>
-                <a:latin typeface="Calibri"/>
-              </a:rPr>
-              <a:t>consulta a la BD</a:t>
+              <a:rPr sz="1400" b="0" i="0">
+                <a:solidFill>
+                  <a:srgbClr val="FFFFFF"/>
+                </a:solidFill>
+                <a:latin typeface="Calibri"/>
+              </a:rPr>
+              <a:t>  participant U as Usuario</a:t>
             </a:r>
           </a:p>
           <a:p>
             <a:pPr>
               <a:spcAft>
-                <a:spcPts val="800"/>
+                <a:spcPts val="400"/>
               </a:spcAft>
             </a:pPr>
             <a:r>
-              <a:rPr sz="1500" b="0" i="0">
-                <a:solidFill>
-                  <a:srgbClr val="333333"/>
-                </a:solidFill>
-                <a:latin typeface="Calibri"/>
-              </a:rPr>
-              <a:t>–   Se puede verificar: pasa o no pasa</a:t>
-            </a:r>
-          </a:p>
-        </p:txBody>
-      </p:sp>
-      <p:sp>
-        <p:nvSpPr>
-          <p:cNvPr id="13" name="TextBox 12"/>
+              <a:rPr sz="1400" b="0" i="0">
+                <a:solidFill>
+                  <a:srgbClr val="FFFFFF"/>
+                </a:solidFill>
+                <a:latin typeface="Calibri"/>
+              </a:rPr>
+              <a:t>  participant W as Web SPA</a:t>
+            </a:r>
+          </a:p>
+          <a:p>
+            <a:pPr>
+              <a:spcAft>
+                <a:spcPts val="400"/>
+              </a:spcAft>
+            </a:pPr>
+            <a:r>
+              <a:rPr sz="1400" b="0" i="0">
+                <a:solidFill>
+                  <a:srgbClr val="FFFFFF"/>
+                </a:solidFill>
+                <a:latin typeface="Calibri"/>
+              </a:rPr>
+              <a:t>  participant A as API</a:t>
+            </a:r>
+          </a:p>
+          <a:p>
+            <a:pPr>
+              <a:spcAft>
+                <a:spcPts val="400"/>
+              </a:spcAft>
+            </a:pPr>
+            <a:r>
+              <a:rPr sz="1400" b="0" i="0">
+                <a:solidFill>
+                  <a:srgbClr val="FFFFFF"/>
+                </a:solidFill>
+                <a:latin typeface="Calibri"/>
+              </a:rPr>
+              <a:t>  participant D as PostgreSQL</a:t>
+            </a:r>
+          </a:p>
+          <a:p>
+            <a:pPr>
+              <a:spcAft>
+                <a:spcPts val="400"/>
+              </a:spcAft>
+            </a:pPr>
+            <a:r>
+              <a:rPr sz="1400" b="0" i="0">
+                <a:solidFill>
+                  <a:srgbClr val="FFFFFF"/>
+                </a:solidFill>
+                <a:latin typeface="Calibri"/>
+              </a:rPr>
+              <a:t/>
+            </a:r>
+          </a:p>
+          <a:p>
+            <a:pPr>
+              <a:spcAft>
+                <a:spcPts val="400"/>
+              </a:spcAft>
+            </a:pPr>
+            <a:r>
+              <a:rPr sz="1400" b="0" i="0">
+                <a:solidFill>
+                  <a:srgbClr val="FFFFFF"/>
+                </a:solidFill>
+                <a:latin typeface="Calibri"/>
+              </a:rPr>
+              <a:t>  U-&gt;&gt;W: accion del pico (&lt;su caso&gt;)</a:t>
+            </a:r>
+          </a:p>
+          <a:p>
+            <a:pPr>
+              <a:spcAft>
+                <a:spcPts val="400"/>
+              </a:spcAft>
+            </a:pPr>
+            <a:r>
+              <a:rPr sz="1400" b="0" i="0">
+                <a:solidFill>
+                  <a:srgbClr val="FFFFFF"/>
+                </a:solidFill>
+                <a:latin typeface="Calibri"/>
+              </a:rPr>
+              <a:t>  W-&gt;&gt;A: POST /recurso          %% red: 40 ms</a:t>
+            </a:r>
+          </a:p>
+          <a:p>
+            <a:pPr>
+              <a:spcAft>
+                <a:spcPts val="400"/>
+              </a:spcAft>
+            </a:pPr>
+            <a:r>
+              <a:rPr sz="1400" b="0" i="0">
+                <a:solidFill>
+                  <a:srgbClr val="FFFFFF"/>
+                </a:solidFill>
+                <a:latin typeface="Calibri"/>
+              </a:rPr>
+              <a:t>  A-&gt;&gt;A: validar + autorizar    %% 10 ms</a:t>
+            </a:r>
+          </a:p>
+          <a:p>
+            <a:pPr>
+              <a:spcAft>
+                <a:spcPts val="400"/>
+              </a:spcAft>
+            </a:pPr>
+            <a:r>
+              <a:rPr sz="1400" b="0" i="0">
+                <a:solidFill>
+                  <a:srgbClr val="FFFFFF"/>
+                </a:solidFill>
+                <a:latin typeface="Calibri"/>
+              </a:rPr>
+              <a:t>  A-&gt;&gt;D: SELECT + INSERT        %% 60 ms</a:t>
+            </a:r>
+          </a:p>
+          <a:p>
+            <a:pPr>
+              <a:spcAft>
+                <a:spcPts val="400"/>
+              </a:spcAft>
+            </a:pPr>
+            <a:r>
+              <a:rPr sz="1400" b="0" i="0">
+                <a:solidFill>
+                  <a:srgbClr val="FFFFFF"/>
+                </a:solidFill>
+                <a:latin typeface="Calibri"/>
+              </a:rPr>
+              <a:t>  D--&gt;&gt;A: filas</a:t>
+            </a:r>
+          </a:p>
+          <a:p>
+            <a:pPr>
+              <a:spcAft>
+                <a:spcPts val="400"/>
+              </a:spcAft>
+            </a:pPr>
+            <a:r>
+              <a:rPr sz="1400" b="0" i="0">
+                <a:solidFill>
+                  <a:srgbClr val="FFFFFF"/>
+                </a:solidFill>
+                <a:latin typeface="Calibri"/>
+              </a:rPr>
+              <a:t>  A--&gt;&gt;W: 201 Created           %% red: 40 ms</a:t>
+            </a:r>
+          </a:p>
+          <a:p>
+            <a:pPr>
+              <a:spcAft>
+                <a:spcPts val="400"/>
+              </a:spcAft>
+            </a:pPr>
+            <a:r>
+              <a:rPr sz="1400" b="0" i="0">
+                <a:solidFill>
+                  <a:srgbClr val="FFFFFF"/>
+                </a:solidFill>
+                <a:latin typeface="Calibri"/>
+              </a:rPr>
+              <a:t>  W--&gt;&gt;U: confirmacion          %% render: 50 ms</a:t>
+            </a:r>
+          </a:p>
+          <a:p>
+            <a:pPr>
+              <a:spcAft>
+                <a:spcPts val="400"/>
+              </a:spcAft>
+            </a:pPr>
+            <a:r>
+              <a:rPr sz="1400" b="0" i="0">
+                <a:solidFill>
+                  <a:srgbClr val="FFFFFF"/>
+                </a:solidFill>
+                <a:latin typeface="Calibri"/>
+              </a:rPr>
+              <a:t/>
+            </a:r>
+          </a:p>
+          <a:p>
+            <a:pPr>
+              <a:spcAft>
+                <a:spcPts val="400"/>
+              </a:spcAft>
+            </a:pPr>
+            <a:r>
+              <a:rPr sz="1400" b="0" i="0">
+                <a:solidFill>
+                  <a:srgbClr val="FFFFFF"/>
+                </a:solidFill>
+                <a:latin typeface="Calibri"/>
+              </a:rPr>
+              <a:t>  Note over U,D: presupuesto total 200 ms · medido p95, no promedio</a:t>
+            </a:r>
+          </a:p>
+        </p:txBody>
+      </p:sp>
+      <p:sp>
+        <p:nvSpPr>
+          <p:cNvPr id="9" name="TextBox 8"/>
           <p:cNvSpPr txBox="1"/>
           <p:nvPr/>
         </p:nvSpPr>
@@ -8148,7 +8088,7 @@
         <p:spPr>
           <a:xfrm>
             <a:off x="0" y="0"/>
-            <a:ext cx="12191695" cy="1170432"/>
+            <a:ext cx="12191695" cy="960120"/>
           </a:xfrm>
           <a:prstGeom prst="rect">
             <a:avLst/>
@@ -8190,7 +8130,7 @@
         </p:nvSpPr>
         <p:spPr>
           <a:xfrm>
-            <a:off x="0" y="1170432"/>
+            <a:off x="0" y="960120"/>
             <a:ext cx="12191695" cy="41148"/>
           </a:xfrm>
           <a:prstGeom prst="rect">
@@ -8234,7 +8174,7 @@
         <p:spPr>
           <a:xfrm>
             <a:off x="457200" y="164592"/>
-            <a:ext cx="11277295" cy="384048"/>
+            <a:ext cx="11277295" cy="502920"/>
           </a:xfrm>
           <a:prstGeom prst="rect">
             <a:avLst/>
@@ -8254,55 +8194,21 @@
                 </a:solidFill>
                 <a:latin typeface="Calibri"/>
               </a:rPr>
-              <a:t>Herramientas de hoy</a:t>
-            </a:r>
-          </a:p>
-        </p:txBody>
-      </p:sp>
-      <p:sp>
-        <p:nvSpPr>
-          <p:cNvPr id="5" name="TextBox 4"/>
-          <p:cNvSpPr txBox="1"/>
-          <p:nvPr/>
-        </p:nvSpPr>
-        <p:spPr>
-          <a:xfrm>
-            <a:off x="457200" y="566928"/>
-            <a:ext cx="11277295" cy="411480"/>
-          </a:xfrm>
-          <a:prstGeom prst="rect">
-            <a:avLst/>
-          </a:prstGeom>
-          <a:noFill/>
-        </p:spPr>
-        <p:txBody>
-          <a:bodyPr wrap="square">
-            <a:spAutoFit/>
-          </a:bodyPr>
-          <a:lstStyle/>
-          <a:p>
-            <a:r>
-              <a:rPr sz="1400" b="0" i="0">
-                <a:solidFill>
-                  <a:srgbClr val="B8D8EE"/>
-                </a:solidFill>
-                <a:latin typeface="Calibri"/>
-              </a:rPr>
-              <a:t>Gratis · navegador o free tier · sin cuenta de pago</a:t>
-            </a:r>
-          </a:p>
-        </p:txBody>
-      </p:sp>
-      <p:sp>
-        <p:nvSpPr>
-          <p:cNvPr id="6" name="Rounded Rectangle 5"/>
+              <a:t>Las metricas objetivo, escritas como se verifican</a:t>
+            </a:r>
+          </a:p>
+        </p:txBody>
+      </p:sp>
+      <p:sp>
+        <p:nvSpPr>
+          <p:cNvPr id="5" name="Rounded Rectangle 4"/>
           <p:cNvSpPr/>
           <p:nvPr/>
         </p:nvSpPr>
         <p:spPr>
           <a:xfrm>
-            <a:off x="457200" y="1591056"/>
-            <a:ext cx="3624986" cy="2299716"/>
+            <a:off x="457200" y="1261872"/>
+            <a:ext cx="11277295" cy="5093208"/>
           </a:xfrm>
           <a:prstGeom prst="roundRect">
             <a:avLst>
@@ -8310,7 +8216,7 @@
             </a:avLst>
           </a:prstGeom>
           <a:solidFill>
-            <a:srgbClr val="F2F2F2"/>
+            <a:srgbClr val="1E2A38"/>
           </a:solidFill>
           <a:ln>
             <a:noFill/>
@@ -8340,14 +8246,14 @@
       </p:sp>
       <p:sp>
         <p:nvSpPr>
-          <p:cNvPr id="7" name="Rectangle 6"/>
+          <p:cNvPr id="6" name="Rectangle 5"/>
           <p:cNvSpPr/>
           <p:nvPr/>
         </p:nvSpPr>
         <p:spPr>
           <a:xfrm>
-            <a:off x="457200" y="1591056"/>
-            <a:ext cx="3624986" cy="64008"/>
+            <a:off x="457200" y="1261872"/>
+            <a:ext cx="11277295" cy="320040"/>
           </a:xfrm>
           <a:prstGeom prst="rect">
             <a:avLst/>
@@ -8383,81 +8289,14 @@
       </p:sp>
       <p:sp>
         <p:nvSpPr>
-          <p:cNvPr id="8" name="Rectangle 7"/>
-          <p:cNvSpPr/>
-          <p:nvPr/>
-        </p:nvSpPr>
-        <p:spPr>
-          <a:xfrm>
-            <a:off x="457200" y="1655064"/>
-            <a:ext cx="3624986" cy="27432"/>
-          </a:xfrm>
-          <a:prstGeom prst="rect">
-            <a:avLst/>
-          </a:prstGeom>
-          <a:solidFill>
-            <a:srgbClr val="FFD000"/>
-          </a:solidFill>
-          <a:ln>
-            <a:noFill/>
-          </a:ln>
-        </p:spPr>
-        <p:style>
-          <a:lnRef idx="1">
-            <a:schemeClr val="accent1"/>
-          </a:lnRef>
-          <a:fillRef idx="3">
-            <a:schemeClr val="accent1"/>
-          </a:fillRef>
-          <a:effectRef idx="2">
-            <a:schemeClr val="accent1"/>
-          </a:effectRef>
-          <a:fontRef idx="minor">
-            <a:schemeClr val="lt1"/>
-          </a:fontRef>
-        </p:style>
-        <p:txBody>
-          <a:bodyPr rtlCol="0" anchor="ctr"/>
-          <a:lstStyle/>
-          <a:p>
-            <a:pPr algn="ctr"/>
-          </a:p>
-        </p:txBody>
-      </p:sp>
-      <p:pic>
-        <p:nvPicPr>
-          <p:cNvPr id="9" name="Picture 8" descr="google_docs.png"/>
-          <p:cNvPicPr>
-            <a:picLocks noChangeAspect="1"/>
-          </p:cNvPicPr>
-          <p:nvPr/>
-        </p:nvPicPr>
-        <p:blipFill>
-          <a:blip r:embed="rId2"/>
-          <a:stretch>
-            <a:fillRect/>
-          </a:stretch>
-        </p:blipFill>
-        <p:spPr>
-          <a:xfrm>
-            <a:off x="1659331" y="1847087"/>
-            <a:ext cx="1220724" cy="1220724"/>
-          </a:xfrm>
-          <a:prstGeom prst="rect">
-            <a:avLst/>
-          </a:prstGeom>
-        </p:spPr>
-      </p:pic>
-      <p:sp>
-        <p:nvSpPr>
-          <p:cNvPr id="10" name="TextBox 9"/>
+          <p:cNvPr id="7" name="TextBox 6"/>
           <p:cNvSpPr txBox="1"/>
           <p:nvPr/>
         </p:nvSpPr>
         <p:spPr>
           <a:xfrm>
-            <a:off x="530352" y="3159251"/>
-            <a:ext cx="3478682" cy="621792"/>
+            <a:off x="685800" y="1307592"/>
+            <a:ext cx="10820095" cy="256032"/>
           </a:xfrm>
           <a:prstGeom prst="rect">
             <a:avLst/>
@@ -8465,653 +8304,239 @@
           <a:noFill/>
         </p:spPr>
         <p:txBody>
-          <a:bodyPr wrap="square" anchor="t"/>
-          <a:lstStyle/>
-          <a:p>
-            <a:pPr algn="ctr"/>
-            <a:r>
-              <a:rPr sz="1300" b="1" i="0">
-                <a:solidFill>
-                  <a:srgbClr val="095292"/>
-                </a:solidFill>
-                <a:latin typeface="Calibri"/>
-              </a:rPr>
-              <a:t>Google Docs</a:t>
-            </a:r>
-          </a:p>
-          <a:p>
-            <a:pPr algn="ctr">
-              <a:spcBef>
-                <a:spcPts val="200"/>
-              </a:spcBef>
+          <a:bodyPr wrap="square" anchor="ctr"/>
+          <a:lstStyle/>
+          <a:p>
+            <a:r>
+              <a:rPr sz="1000" b="1" i="0">
+                <a:solidFill>
+                  <a:srgbClr val="269CCB"/>
+                </a:solidFill>
+                <a:latin typeface="Calibri"/>
+              </a:rPr>
+              <a:t>● ● ●</a:t>
+            </a:r>
+          </a:p>
+        </p:txBody>
+      </p:sp>
+      <p:sp>
+        <p:nvSpPr>
+          <p:cNvPr id="8" name="TextBox 7"/>
+          <p:cNvSpPr txBox="1"/>
+          <p:nvPr/>
+        </p:nvSpPr>
+        <p:spPr>
+          <a:xfrm>
+            <a:off x="777240" y="1719072"/>
+            <a:ext cx="10637215" cy="4453128"/>
+          </a:xfrm>
+          <a:prstGeom prst="rect">
+            <a:avLst/>
+          </a:prstGeom>
+          <a:noFill/>
+        </p:spPr>
+        <p:txBody>
+          <a:bodyPr wrap="square">
+            <a:spAutoFit/>
+          </a:bodyPr>
+          <a:lstStyle/>
+          <a:p>
+            <a:pPr>
+              <a:spcAft>
+                <a:spcPts val="400"/>
+              </a:spcAft>
             </a:pPr>
             <a:r>
-              <a:rPr sz="1000" b="0" i="0">
-                <a:solidFill>
-                  <a:srgbClr val="666666"/>
-                </a:solidFill>
-                <a:latin typeface="Calibri"/>
-              </a:rPr>
-              <a:t>Objetivo de rendimiento</a:t>
-            </a:r>
-          </a:p>
-        </p:txBody>
-      </p:sp>
-      <p:sp>
-        <p:nvSpPr>
-          <p:cNvPr id="11" name="Rounded Rectangle 10"/>
-          <p:cNvSpPr/>
-          <p:nvPr/>
-        </p:nvSpPr>
-        <p:spPr>
-          <a:xfrm>
-            <a:off x="4283354" y="1591056"/>
-            <a:ext cx="3624986" cy="2299716"/>
-          </a:xfrm>
-          <a:prstGeom prst="roundRect">
-            <a:avLst>
-              <a:gd name="adj" fmla="val 12000"/>
-            </a:avLst>
-          </a:prstGeom>
-          <a:solidFill>
-            <a:srgbClr val="F2F2F2"/>
-          </a:solidFill>
-          <a:ln>
-            <a:noFill/>
-          </a:ln>
-        </p:spPr>
-        <p:style>
-          <a:lnRef idx="1">
-            <a:schemeClr val="accent1"/>
-          </a:lnRef>
-          <a:fillRef idx="3">
-            <a:schemeClr val="accent1"/>
-          </a:fillRef>
-          <a:effectRef idx="2">
-            <a:schemeClr val="accent1"/>
-          </a:effectRef>
-          <a:fontRef idx="minor">
-            <a:schemeClr val="lt1"/>
-          </a:fontRef>
-        </p:style>
-        <p:txBody>
-          <a:bodyPr rtlCol="0" anchor="ctr"/>
-          <a:lstStyle/>
-          <a:p>
-            <a:pPr algn="ctr"/>
-          </a:p>
-        </p:txBody>
-      </p:sp>
-      <p:sp>
-        <p:nvSpPr>
-          <p:cNvPr id="12" name="Rectangle 11"/>
-          <p:cNvSpPr/>
-          <p:nvPr/>
-        </p:nvSpPr>
-        <p:spPr>
-          <a:xfrm>
-            <a:off x="4283354" y="1591056"/>
-            <a:ext cx="3624986" cy="64008"/>
-          </a:xfrm>
-          <a:prstGeom prst="rect">
-            <a:avLst/>
-          </a:prstGeom>
-          <a:solidFill>
-            <a:srgbClr val="095292"/>
-          </a:solidFill>
-          <a:ln>
-            <a:noFill/>
-          </a:ln>
-        </p:spPr>
-        <p:style>
-          <a:lnRef idx="1">
-            <a:schemeClr val="accent1"/>
-          </a:lnRef>
-          <a:fillRef idx="3">
-            <a:schemeClr val="accent1"/>
-          </a:fillRef>
-          <a:effectRef idx="2">
-            <a:schemeClr val="accent1"/>
-          </a:effectRef>
-          <a:fontRef idx="minor">
-            <a:schemeClr val="lt1"/>
-          </a:fontRef>
-        </p:style>
-        <p:txBody>
-          <a:bodyPr rtlCol="0" anchor="ctr"/>
-          <a:lstStyle/>
-          <a:p>
-            <a:pPr algn="ctr"/>
-          </a:p>
-        </p:txBody>
-      </p:sp>
-      <p:sp>
-        <p:nvSpPr>
-          <p:cNvPr id="13" name="Rectangle 12"/>
-          <p:cNvSpPr/>
-          <p:nvPr/>
-        </p:nvSpPr>
-        <p:spPr>
-          <a:xfrm>
-            <a:off x="4283354" y="1655064"/>
-            <a:ext cx="3624986" cy="27432"/>
-          </a:xfrm>
-          <a:prstGeom prst="rect">
-            <a:avLst/>
-          </a:prstGeom>
-          <a:solidFill>
-            <a:srgbClr val="FFD000"/>
-          </a:solidFill>
-          <a:ln>
-            <a:noFill/>
-          </a:ln>
-        </p:spPr>
-        <p:style>
-          <a:lnRef idx="1">
-            <a:schemeClr val="accent1"/>
-          </a:lnRef>
-          <a:fillRef idx="3">
-            <a:schemeClr val="accent1"/>
-          </a:fillRef>
-          <a:effectRef idx="2">
-            <a:schemeClr val="accent1"/>
-          </a:effectRef>
-          <a:fontRef idx="minor">
-            <a:schemeClr val="lt1"/>
-          </a:fontRef>
-        </p:style>
-        <p:txBody>
-          <a:bodyPr rtlCol="0" anchor="ctr"/>
-          <a:lstStyle/>
-          <a:p>
-            <a:pPr algn="ctr"/>
-          </a:p>
-        </p:txBody>
-      </p:sp>
-      <p:pic>
-        <p:nvPicPr>
-          <p:cNvPr id="14" name="Picture 13" descr="drawio.png"/>
-          <p:cNvPicPr>
-            <a:picLocks noChangeAspect="1"/>
-          </p:cNvPicPr>
-          <p:nvPr/>
-        </p:nvPicPr>
-        <p:blipFill>
-          <a:blip r:embed="rId3"/>
-          <a:stretch>
-            <a:fillRect/>
-          </a:stretch>
-        </p:blipFill>
-        <p:spPr>
-          <a:xfrm>
-            <a:off x="5485485" y="1847087"/>
-            <a:ext cx="1220724" cy="1220724"/>
-          </a:xfrm>
-          <a:prstGeom prst="rect">
-            <a:avLst/>
-          </a:prstGeom>
-        </p:spPr>
-      </p:pic>
-      <p:sp>
-        <p:nvSpPr>
-          <p:cNvPr id="15" name="TextBox 14"/>
-          <p:cNvSpPr txBox="1"/>
-          <p:nvPr/>
-        </p:nvSpPr>
-        <p:spPr>
-          <a:xfrm>
-            <a:off x="4356506" y="3159251"/>
-            <a:ext cx="3478682" cy="621792"/>
-          </a:xfrm>
-          <a:prstGeom prst="rect">
-            <a:avLst/>
-          </a:prstGeom>
-          <a:noFill/>
-        </p:spPr>
-        <p:txBody>
-          <a:bodyPr wrap="square" anchor="t"/>
-          <a:lstStyle/>
-          <a:p>
-            <a:pPr algn="ctr"/>
-            <a:r>
-              <a:rPr sz="1300" b="1" i="0">
-                <a:solidFill>
-                  <a:srgbClr val="095292"/>
-                </a:solidFill>
-                <a:latin typeface="Calibri"/>
-              </a:rPr>
-              <a:t>draw.io</a:t>
-            </a:r>
-          </a:p>
-          <a:p>
-            <a:pPr algn="ctr">
-              <a:spcBef>
-                <a:spcPts val="200"/>
-              </a:spcBef>
+              <a:rPr sz="1400" b="0" i="0">
+                <a:solidFill>
+                  <a:srgbClr val="FFFFFF"/>
+                </a:solidFill>
+                <a:latin typeface="Calibri"/>
+              </a:rPr>
+              <a:t># Cada metrica necesita las cuatro columnas, o no es verificable:</a:t>
+            </a:r>
+          </a:p>
+          <a:p>
+            <a:pPr>
+              <a:spcAft>
+                <a:spcPts val="400"/>
+              </a:spcAft>
             </a:pPr>
             <a:r>
-              <a:rPr sz="1000" b="0" i="0">
-                <a:solidFill>
-                  <a:srgbClr val="666666"/>
-                </a:solidFill>
-                <a:latin typeface="Calibri"/>
-              </a:rPr>
-              <a:t>Bottleneck</a:t>
-            </a:r>
-          </a:p>
-        </p:txBody>
-      </p:sp>
-      <p:sp>
-        <p:nvSpPr>
-          <p:cNvPr id="16" name="Rounded Rectangle 15"/>
-          <p:cNvSpPr/>
-          <p:nvPr/>
-        </p:nvSpPr>
-        <p:spPr>
-          <a:xfrm>
-            <a:off x="8109508" y="1591056"/>
-            <a:ext cx="3624986" cy="2299716"/>
-          </a:xfrm>
-          <a:prstGeom prst="roundRect">
-            <a:avLst>
-              <a:gd name="adj" fmla="val 12000"/>
-            </a:avLst>
-          </a:prstGeom>
-          <a:solidFill>
-            <a:srgbClr val="F2F2F2"/>
-          </a:solidFill>
-          <a:ln>
-            <a:noFill/>
-          </a:ln>
-        </p:spPr>
-        <p:style>
-          <a:lnRef idx="1">
-            <a:schemeClr val="accent1"/>
-          </a:lnRef>
-          <a:fillRef idx="3">
-            <a:schemeClr val="accent1"/>
-          </a:fillRef>
-          <a:effectRef idx="2">
-            <a:schemeClr val="accent1"/>
-          </a:effectRef>
-          <a:fontRef idx="minor">
-            <a:schemeClr val="lt1"/>
-          </a:fontRef>
-        </p:style>
-        <p:txBody>
-          <a:bodyPr rtlCol="0" anchor="ctr"/>
-          <a:lstStyle/>
-          <a:p>
-            <a:pPr algn="ctr"/>
-          </a:p>
-        </p:txBody>
-      </p:sp>
-      <p:sp>
-        <p:nvSpPr>
-          <p:cNvPr id="17" name="Rectangle 16"/>
-          <p:cNvSpPr/>
-          <p:nvPr/>
-        </p:nvSpPr>
-        <p:spPr>
-          <a:xfrm>
-            <a:off x="8109508" y="1591056"/>
-            <a:ext cx="3624986" cy="64008"/>
-          </a:xfrm>
-          <a:prstGeom prst="rect">
-            <a:avLst/>
-          </a:prstGeom>
-          <a:solidFill>
-            <a:srgbClr val="095292"/>
-          </a:solidFill>
-          <a:ln>
-            <a:noFill/>
-          </a:ln>
-        </p:spPr>
-        <p:style>
-          <a:lnRef idx="1">
-            <a:schemeClr val="accent1"/>
-          </a:lnRef>
-          <a:fillRef idx="3">
-            <a:schemeClr val="accent1"/>
-          </a:fillRef>
-          <a:effectRef idx="2">
-            <a:schemeClr val="accent1"/>
-          </a:effectRef>
-          <a:fontRef idx="minor">
-            <a:schemeClr val="lt1"/>
-          </a:fontRef>
-        </p:style>
-        <p:txBody>
-          <a:bodyPr rtlCol="0" anchor="ctr"/>
-          <a:lstStyle/>
-          <a:p>
-            <a:pPr algn="ctr"/>
-          </a:p>
-        </p:txBody>
-      </p:sp>
-      <p:sp>
-        <p:nvSpPr>
-          <p:cNvPr id="18" name="Rectangle 17"/>
-          <p:cNvSpPr/>
-          <p:nvPr/>
-        </p:nvSpPr>
-        <p:spPr>
-          <a:xfrm>
-            <a:off x="8109508" y="1655064"/>
-            <a:ext cx="3624986" cy="27432"/>
-          </a:xfrm>
-          <a:prstGeom prst="rect">
-            <a:avLst/>
-          </a:prstGeom>
-          <a:solidFill>
-            <a:srgbClr val="FFD000"/>
-          </a:solidFill>
-          <a:ln>
-            <a:noFill/>
-          </a:ln>
-        </p:spPr>
-        <p:style>
-          <a:lnRef idx="1">
-            <a:schemeClr val="accent1"/>
-          </a:lnRef>
-          <a:fillRef idx="3">
-            <a:schemeClr val="accent1"/>
-          </a:fillRef>
-          <a:effectRef idx="2">
-            <a:schemeClr val="accent1"/>
-          </a:effectRef>
-          <a:fontRef idx="minor">
-            <a:schemeClr val="lt1"/>
-          </a:fontRef>
-        </p:style>
-        <p:txBody>
-          <a:bodyPr rtlCol="0" anchor="ctr"/>
-          <a:lstStyle/>
-          <a:p>
-            <a:pPr algn="ctr"/>
-          </a:p>
-        </p:txBody>
-      </p:sp>
-      <p:pic>
-        <p:nvPicPr>
-          <p:cNvPr id="19" name="Picture 18" descr="mermaid.png"/>
-          <p:cNvPicPr>
-            <a:picLocks noChangeAspect="1"/>
-          </p:cNvPicPr>
-          <p:nvPr/>
-        </p:nvPicPr>
-        <p:blipFill>
-          <a:blip r:embed="rId4"/>
-          <a:stretch>
-            <a:fillRect/>
-          </a:stretch>
-        </p:blipFill>
-        <p:spPr>
-          <a:xfrm>
-            <a:off x="9311640" y="1847087"/>
-            <a:ext cx="1220724" cy="1220724"/>
-          </a:xfrm>
-          <a:prstGeom prst="rect">
-            <a:avLst/>
-          </a:prstGeom>
-        </p:spPr>
-      </p:pic>
-      <p:sp>
-        <p:nvSpPr>
-          <p:cNvPr id="20" name="TextBox 19"/>
-          <p:cNvSpPr txBox="1"/>
-          <p:nvPr/>
-        </p:nvSpPr>
-        <p:spPr>
-          <a:xfrm>
-            <a:off x="8182660" y="3159251"/>
-            <a:ext cx="3478682" cy="621792"/>
-          </a:xfrm>
-          <a:prstGeom prst="rect">
-            <a:avLst/>
-          </a:prstGeom>
-          <a:noFill/>
-        </p:spPr>
-        <p:txBody>
-          <a:bodyPr wrap="square" anchor="t"/>
-          <a:lstStyle/>
-          <a:p>
-            <a:pPr algn="ctr"/>
-            <a:r>
-              <a:rPr sz="1300" b="1" i="0">
-                <a:solidFill>
-                  <a:srgbClr val="095292"/>
-                </a:solidFill>
-                <a:latin typeface="Calibri"/>
-              </a:rPr>
-              <a:t>Mermaid</a:t>
-            </a:r>
-          </a:p>
-          <a:p>
-            <a:pPr algn="ctr">
-              <a:spcBef>
-                <a:spcPts val="200"/>
-              </a:spcBef>
+              <a:rPr sz="1400" b="0" i="0">
+                <a:solidFill>
+                  <a:srgbClr val="FFFFFF"/>
+                </a:solidFill>
+                <a:latin typeface="Calibri"/>
+              </a:rPr>
+              <a:t>#   metrica | objetivo | como se mide | que se hace si falla</a:t>
+            </a:r>
+          </a:p>
+          <a:p>
+            <a:pPr>
+              <a:spcAft>
+                <a:spcPts val="400"/>
+              </a:spcAft>
             </a:pPr>
             <a:r>
-              <a:rPr sz="1000" b="0" i="0">
-                <a:solidFill>
-                  <a:srgbClr val="666666"/>
-                </a:solidFill>
-                <a:latin typeface="Calibri"/>
-              </a:rPr>
-              <a:t>Codigo del diagrama</a:t>
-            </a:r>
-          </a:p>
-        </p:txBody>
-      </p:sp>
-      <p:sp>
-        <p:nvSpPr>
-          <p:cNvPr id="21" name="Rounded Rectangle 20"/>
-          <p:cNvSpPr/>
-          <p:nvPr/>
-        </p:nvSpPr>
-        <p:spPr>
-          <a:xfrm>
-            <a:off x="4283354" y="4055364"/>
-            <a:ext cx="3624986" cy="2299716"/>
-          </a:xfrm>
-          <a:prstGeom prst="roundRect">
-            <a:avLst>
-              <a:gd name="adj" fmla="val 12000"/>
-            </a:avLst>
-          </a:prstGeom>
-          <a:solidFill>
-            <a:srgbClr val="F2F2F2"/>
-          </a:solidFill>
-          <a:ln>
-            <a:noFill/>
-          </a:ln>
-        </p:spPr>
-        <p:style>
-          <a:lnRef idx="1">
-            <a:schemeClr val="accent1"/>
-          </a:lnRef>
-          <a:fillRef idx="3">
-            <a:schemeClr val="accent1"/>
-          </a:fillRef>
-          <a:effectRef idx="2">
-            <a:schemeClr val="accent1"/>
-          </a:effectRef>
-          <a:fontRef idx="minor">
-            <a:schemeClr val="lt1"/>
-          </a:fontRef>
-        </p:style>
-        <p:txBody>
-          <a:bodyPr rtlCol="0" anchor="ctr"/>
-          <a:lstStyle/>
-          <a:p>
-            <a:pPr algn="ctr"/>
-          </a:p>
-        </p:txBody>
-      </p:sp>
-      <p:sp>
-        <p:nvSpPr>
-          <p:cNvPr id="22" name="Rectangle 21"/>
-          <p:cNvSpPr/>
-          <p:nvPr/>
-        </p:nvSpPr>
-        <p:spPr>
-          <a:xfrm>
-            <a:off x="4283354" y="4055364"/>
-            <a:ext cx="3624986" cy="64008"/>
-          </a:xfrm>
-          <a:prstGeom prst="rect">
-            <a:avLst/>
-          </a:prstGeom>
-          <a:solidFill>
-            <a:srgbClr val="095292"/>
-          </a:solidFill>
-          <a:ln>
-            <a:noFill/>
-          </a:ln>
-        </p:spPr>
-        <p:style>
-          <a:lnRef idx="1">
-            <a:schemeClr val="accent1"/>
-          </a:lnRef>
-          <a:fillRef idx="3">
-            <a:schemeClr val="accent1"/>
-          </a:fillRef>
-          <a:effectRef idx="2">
-            <a:schemeClr val="accent1"/>
-          </a:effectRef>
-          <a:fontRef idx="minor">
-            <a:schemeClr val="lt1"/>
-          </a:fontRef>
-        </p:style>
-        <p:txBody>
-          <a:bodyPr rtlCol="0" anchor="ctr"/>
-          <a:lstStyle/>
-          <a:p>
-            <a:pPr algn="ctr"/>
-          </a:p>
-        </p:txBody>
-      </p:sp>
-      <p:sp>
-        <p:nvSpPr>
-          <p:cNvPr id="23" name="Rectangle 22"/>
-          <p:cNvSpPr/>
-          <p:nvPr/>
-        </p:nvSpPr>
-        <p:spPr>
-          <a:xfrm>
-            <a:off x="4283354" y="4119372"/>
-            <a:ext cx="3624986" cy="27432"/>
-          </a:xfrm>
-          <a:prstGeom prst="rect">
-            <a:avLst/>
-          </a:prstGeom>
-          <a:solidFill>
-            <a:srgbClr val="FFD000"/>
-          </a:solidFill>
-          <a:ln>
-            <a:noFill/>
-          </a:ln>
-        </p:spPr>
-        <p:style>
-          <a:lnRef idx="1">
-            <a:schemeClr val="accent1"/>
-          </a:lnRef>
-          <a:fillRef idx="3">
-            <a:schemeClr val="accent1"/>
-          </a:fillRef>
-          <a:effectRef idx="2">
-            <a:schemeClr val="accent1"/>
-          </a:effectRef>
-          <a:fontRef idx="minor">
-            <a:schemeClr val="lt1"/>
-          </a:fontRef>
-        </p:style>
-        <p:txBody>
-          <a:bodyPr rtlCol="0" anchor="ctr"/>
-          <a:lstStyle/>
-          <a:p>
-            <a:pPr algn="ctr"/>
-          </a:p>
-        </p:txBody>
-      </p:sp>
-      <p:pic>
-        <p:nvPicPr>
-          <p:cNvPr id="24" name="Picture 23" descr="examlab.png"/>
-          <p:cNvPicPr>
-            <a:picLocks noChangeAspect="1"/>
-          </p:cNvPicPr>
-          <p:nvPr/>
-        </p:nvPicPr>
-        <p:blipFill>
-          <a:blip r:embed="rId5"/>
-          <a:stretch>
-            <a:fillRect/>
-          </a:stretch>
-        </p:blipFill>
-        <p:spPr>
-          <a:xfrm>
-            <a:off x="5485485" y="4311396"/>
-            <a:ext cx="1220724" cy="1220724"/>
-          </a:xfrm>
-          <a:prstGeom prst="rect">
-            <a:avLst/>
-          </a:prstGeom>
-        </p:spPr>
-      </p:pic>
-      <p:sp>
-        <p:nvSpPr>
-          <p:cNvPr id="25" name="TextBox 24"/>
-          <p:cNvSpPr txBox="1"/>
-          <p:nvPr/>
-        </p:nvSpPr>
-        <p:spPr>
-          <a:xfrm>
-            <a:off x="4356506" y="5623560"/>
-            <a:ext cx="3478682" cy="621792"/>
-          </a:xfrm>
-          <a:prstGeom prst="rect">
-            <a:avLst/>
-          </a:prstGeom>
-          <a:noFill/>
-        </p:spPr>
-        <p:txBody>
-          <a:bodyPr wrap="square" anchor="t"/>
-          <a:lstStyle/>
-          <a:p>
-            <a:pPr algn="ctr"/>
-            <a:r>
-              <a:rPr sz="1300" b="1" i="0">
-                <a:solidFill>
-                  <a:srgbClr val="095292"/>
-                </a:solidFill>
-                <a:latin typeface="Calibri"/>
-              </a:rPr>
-              <a:t>la plataforma del curso</a:t>
-            </a:r>
-          </a:p>
-          <a:p>
-            <a:pPr algn="ctr">
-              <a:spcBef>
-                <a:spcPts val="200"/>
-              </a:spcBef>
+              <a:rPr sz="1400" b="0" i="0">
+                <a:solidFill>
+                  <a:srgbClr val="FFFFFF"/>
+                </a:solidFill>
+                <a:latin typeface="Calibri"/>
+              </a:rPr>
+              <a:t/>
+            </a:r>
+          </a:p>
+          <a:p>
+            <a:pPr>
+              <a:spcAft>
+                <a:spcPts val="400"/>
+              </a:spcAft>
             </a:pPr>
             <a:r>
-              <a:rPr sz="1000" b="0" i="0">
-                <a:solidFill>
-                  <a:srgbClr val="666666"/>
-                </a:solidFill>
-                <a:latin typeface="Calibri"/>
-              </a:rPr>
-              <a:t>Donde se entrega</a:t>
-            </a:r>
-          </a:p>
-        </p:txBody>
-      </p:sp>
-      <p:sp>
-        <p:nvSpPr>
-          <p:cNvPr id="26" name="TextBox 25"/>
+              <a:rPr sz="1400" b="0" i="0">
+                <a:solidFill>
+                  <a:srgbClr val="FFFFFF"/>
+                </a:solidFill>
+                <a:latin typeface="Calibri"/>
+              </a:rPr>
+              <a:t># p95 de POST /recurso   | &lt; 200 ms | percentil del log de la API</a:t>
+            </a:r>
+          </a:p>
+          <a:p>
+            <a:pPr>
+              <a:spcAft>
+                <a:spcPts val="400"/>
+              </a:spcAft>
+            </a:pPr>
+            <a:r>
+              <a:rPr sz="1400" b="0" i="0">
+                <a:solidFill>
+                  <a:srgbClr val="FFFFFF"/>
+                </a:solidFill>
+                <a:latin typeface="Calibri"/>
+              </a:rPr>
+              <a:t>#                        |          | -&gt; revisar el indice de la consulta</a:t>
+            </a:r>
+          </a:p>
+          <a:p>
+            <a:pPr>
+              <a:spcAft>
+                <a:spcPts val="400"/>
+              </a:spcAft>
+            </a:pPr>
+            <a:r>
+              <a:rPr sz="1400" b="0" i="0">
+                <a:solidFill>
+                  <a:srgbClr val="FFFFFF"/>
+                </a:solidFill>
+                <a:latin typeface="Calibri"/>
+              </a:rPr>
+              <a:t># tasa de error 5xx      | &lt; 1%     | conteo por minuto</a:t>
+            </a:r>
+          </a:p>
+          <a:p>
+            <a:pPr>
+              <a:spcAft>
+                <a:spcPts val="400"/>
+              </a:spcAft>
+            </a:pPr>
+            <a:r>
+              <a:rPr sz="1400" b="0" i="0">
+                <a:solidFill>
+                  <a:srgbClr val="FFFFFF"/>
+                </a:solidFill>
+                <a:latin typeface="Calibri"/>
+              </a:rPr>
+              <a:t>#                        |          | -&gt; abrir el log del paso que falla</a:t>
+            </a:r>
+          </a:p>
+          <a:p>
+            <a:pPr>
+              <a:spcAft>
+                <a:spcPts val="400"/>
+              </a:spcAft>
+            </a:pPr>
+            <a:r>
+              <a:rPr sz="1400" b="0" i="0">
+                <a:solidFill>
+                  <a:srgbClr val="FFFFFF"/>
+                </a:solidFill>
+                <a:latin typeface="Calibri"/>
+              </a:rPr>
+              <a:t># uso de CPU de la API   | &lt; 70%    | metrica del proveedor</a:t>
+            </a:r>
+          </a:p>
+          <a:p>
+            <a:pPr>
+              <a:spcAft>
+                <a:spcPts val="400"/>
+              </a:spcAft>
+            </a:pPr>
+            <a:r>
+              <a:rPr sz="1400" b="0" i="0">
+                <a:solidFill>
+                  <a:srgbClr val="FFFFFF"/>
+                </a:solidFill>
+                <a:latin typeface="Calibri"/>
+              </a:rPr>
+              <a:t>#                        |          | -&gt; escalar horizontal (Clase 13)</a:t>
+            </a:r>
+          </a:p>
+          <a:p>
+            <a:pPr>
+              <a:spcAft>
+                <a:spcPts val="400"/>
+              </a:spcAft>
+            </a:pPr>
+            <a:r>
+              <a:rPr sz="1400" b="0" i="0">
+                <a:solidFill>
+                  <a:srgbClr val="FFFFFF"/>
+                </a:solidFill>
+                <a:latin typeface="Calibri"/>
+              </a:rPr>
+              <a:t/>
+            </a:r>
+          </a:p>
+          <a:p>
+            <a:pPr>
+              <a:spcAft>
+                <a:spcPts val="400"/>
+              </a:spcAft>
+            </a:pPr>
+            <a:r>
+              <a:rPr sz="1400" b="0" i="0">
+                <a:solidFill>
+                  <a:srgbClr val="FFFFFF"/>
+                </a:solidFill>
+                <a:latin typeface="Calibri"/>
+              </a:rPr>
+              <a:t># PROMEDIO no sirve: con 99 respuestas de 10 ms y una de 5 s el promedio</a:t>
+            </a:r>
+          </a:p>
+          <a:p>
+            <a:pPr>
+              <a:spcAft>
+                <a:spcPts val="400"/>
+              </a:spcAft>
+            </a:pPr>
+            <a:r>
+              <a:rPr sz="1400" b="0" i="0">
+                <a:solidFill>
+                  <a:srgbClr val="FFFFFF"/>
+                </a:solidFill>
+                <a:latin typeface="Calibri"/>
+              </a:rPr>
+              <a:t># da 60 ms y el usuario que espero 5 s existe. Por eso p95.</a:t>
+            </a:r>
+          </a:p>
+        </p:txBody>
+      </p:sp>
+      <p:sp>
+        <p:nvSpPr>
+          <p:cNvPr id="9" name="TextBox 8"/>
           <p:cNvSpPr txBox="1"/>
           <p:nvPr/>
         </p:nvSpPr>
@@ -9179,7 +8604,7 @@
         <p:spPr>
           <a:xfrm>
             <a:off x="0" y="0"/>
-            <a:ext cx="12191695" cy="1170432"/>
+            <a:ext cx="12191695" cy="960120"/>
           </a:xfrm>
           <a:prstGeom prst="rect">
             <a:avLst/>
@@ -9221,7 +8646,7 @@
         </p:nvSpPr>
         <p:spPr>
           <a:xfrm>
-            <a:off x="0" y="1170432"/>
+            <a:off x="0" y="960120"/>
             <a:ext cx="12191695" cy="41148"/>
           </a:xfrm>
           <a:prstGeom prst="rect">
@@ -9265,7 +8690,7 @@
         <p:spPr>
           <a:xfrm>
             <a:off x="457200" y="164592"/>
-            <a:ext cx="11277295" cy="384048"/>
+            <a:ext cx="11277295" cy="502920"/>
           </a:xfrm>
           <a:prstGeom prst="rect">
             <a:avLst/>
@@ -9285,55 +8710,21 @@
                 </a:solidFill>
                 <a:latin typeface="Calibri"/>
               </a:rPr>
-              <a:t>Del boceto a la plataforma del curso (diagrama)</a:t>
-            </a:r>
-          </a:p>
-        </p:txBody>
-      </p:sp>
-      <p:sp>
-        <p:nvSpPr>
-          <p:cNvPr id="5" name="TextBox 4"/>
-          <p:cNvSpPr txBox="1"/>
-          <p:nvPr/>
-        </p:nvSpPr>
-        <p:spPr>
-          <a:xfrm>
-            <a:off x="457200" y="566928"/>
-            <a:ext cx="11277295" cy="411480"/>
-          </a:xfrm>
-          <a:prstGeom prst="rect">
-            <a:avLst/>
-          </a:prstGeom>
-          <a:noFill/>
-        </p:spPr>
-        <p:txBody>
-          <a:bodyPr wrap="square">
-            <a:spAutoFit/>
-          </a:bodyPr>
-          <a:lstStyle/>
-          <a:p>
-            <a:r>
-              <a:rPr sz="1400" b="0" i="0">
-                <a:solidFill>
-                  <a:srgbClr val="B8D8EE"/>
-                </a:solidFill>
-                <a:latin typeface="Calibri"/>
-              </a:rPr>
-              <a:t>El diagrama se entrega como código Mermaid dentro de la plataforma del curso, no como imagen</a:t>
-            </a:r>
-          </a:p>
-        </p:txBody>
-      </p:sp>
-      <p:sp>
-        <p:nvSpPr>
-          <p:cNvPr id="6" name="Rounded Rectangle 5"/>
+              <a:t>«Que sea rapido» no es un requisito</a:t>
+            </a:r>
+          </a:p>
+        </p:txBody>
+      </p:sp>
+      <p:sp>
+        <p:nvSpPr>
+          <p:cNvPr id="5" name="Rounded Rectangle 4"/>
           <p:cNvSpPr/>
           <p:nvPr/>
         </p:nvSpPr>
         <p:spPr>
           <a:xfrm>
-            <a:off x="457200" y="1659636"/>
-            <a:ext cx="11277295" cy="1051560"/>
+            <a:off x="457200" y="1261872"/>
+            <a:ext cx="5478627" cy="5093208"/>
           </a:xfrm>
           <a:prstGeom prst="roundRect">
             <a:avLst>
@@ -9341,7 +8732,7 @@
             </a:avLst>
           </a:prstGeom>
           <a:solidFill>
-            <a:srgbClr val="F2F2F2"/>
+            <a:srgbClr val="FBE4E4"/>
           </a:solidFill>
           <a:ln>
             <a:noFill/>
@@ -9371,19 +8762,225 @@
       </p:sp>
       <p:sp>
         <p:nvSpPr>
-          <p:cNvPr id="7" name="Rounded Rectangle 6"/>
+          <p:cNvPr id="6" name="Rectangle 5"/>
           <p:cNvSpPr/>
           <p:nvPr/>
         </p:nvSpPr>
         <p:spPr>
           <a:xfrm>
-            <a:off x="594360" y="1965960"/>
-            <a:ext cx="438912" cy="438912"/>
+            <a:off x="457200" y="1261872"/>
+            <a:ext cx="5478627" cy="502920"/>
+          </a:xfrm>
+          <a:prstGeom prst="rect">
+            <a:avLst/>
+          </a:prstGeom>
+          <a:solidFill>
+            <a:srgbClr val="A02030"/>
+          </a:solidFill>
+          <a:ln>
+            <a:noFill/>
+          </a:ln>
+        </p:spPr>
+        <p:style>
+          <a:lnRef idx="1">
+            <a:schemeClr val="accent1"/>
+          </a:lnRef>
+          <a:fillRef idx="3">
+            <a:schemeClr val="accent1"/>
+          </a:fillRef>
+          <a:effectRef idx="2">
+            <a:schemeClr val="accent1"/>
+          </a:effectRef>
+          <a:fontRef idx="minor">
+            <a:schemeClr val="lt1"/>
+          </a:fontRef>
+        </p:style>
+        <p:txBody>
+          <a:bodyPr rtlCol="0" anchor="ctr"/>
+          <a:lstStyle/>
+          <a:p>
+            <a:pPr algn="ctr"/>
+          </a:p>
+        </p:txBody>
+      </p:sp>
+      <p:sp>
+        <p:nvSpPr>
+          <p:cNvPr id="7" name="TextBox 6"/>
+          <p:cNvSpPr txBox="1"/>
+          <p:nvPr/>
+        </p:nvSpPr>
+        <p:spPr>
+          <a:xfrm>
+            <a:off x="594360" y="1353312"/>
+            <a:ext cx="5204307" cy="365760"/>
+          </a:xfrm>
+          <a:prstGeom prst="rect">
+            <a:avLst/>
+          </a:prstGeom>
+          <a:noFill/>
+        </p:spPr>
+        <p:txBody>
+          <a:bodyPr wrap="square" anchor="ctr"/>
+          <a:lstStyle/>
+          <a:p>
+            <a:pPr algn="ctr"/>
+            <a:r>
+              <a:rPr sz="1600" b="1" i="0">
+                <a:solidFill>
+                  <a:srgbClr val="FFFFFF"/>
+                </a:solidFill>
+                <a:latin typeface="Calibri"/>
+              </a:rPr>
+              <a:t>Enunciado vago</a:t>
+            </a:r>
+          </a:p>
+        </p:txBody>
+      </p:sp>
+      <p:sp>
+        <p:nvSpPr>
+          <p:cNvPr id="8" name="TextBox 7"/>
+          <p:cNvSpPr txBox="1"/>
+          <p:nvPr/>
+        </p:nvSpPr>
+        <p:spPr>
+          <a:xfrm>
+            <a:off x="621792" y="1901952"/>
+            <a:ext cx="5158587" cy="4498848"/>
+          </a:xfrm>
+          <a:prstGeom prst="rect">
+            <a:avLst/>
+          </a:prstGeom>
+          <a:noFill/>
+        </p:spPr>
+        <p:txBody>
+          <a:bodyPr wrap="square">
+            <a:spAutoFit/>
+          </a:bodyPr>
+          <a:lstStyle/>
+          <a:p>
+            <a:pPr>
+              <a:spcAft>
+                <a:spcPts val="800"/>
+              </a:spcAft>
+            </a:pPr>
+            <a:r>
+              <a:rPr sz="1500" b="0" i="0">
+                <a:solidFill>
+                  <a:srgbClr val="333333"/>
+                </a:solidFill>
+                <a:latin typeface="Calibri"/>
+              </a:rPr>
+              <a:t>–   «La app tiene que ser rapida»</a:t>
+            </a:r>
+          </a:p>
+          <a:p>
+            <a:pPr>
+              <a:spcAft>
+                <a:spcPts val="800"/>
+              </a:spcAft>
+            </a:pPr>
+            <a:r>
+              <a:rPr sz="1500" b="0" i="0">
+                <a:solidFill>
+                  <a:srgbClr val="333333"/>
+                </a:solidFill>
+                <a:latin typeface="Calibri"/>
+              </a:rPr>
+              <a:t>–   «Aguanta harta gente»</a:t>
+            </a:r>
+          </a:p>
+          <a:p>
+            <a:pPr>
+              <a:spcAft>
+                <a:spcPts val="800"/>
+              </a:spcAft>
+            </a:pPr>
+            <a:r>
+              <a:rPr sz="1500" b="0" i="0">
+                <a:solidFill>
+                  <a:srgbClr val="333333"/>
+                </a:solidFill>
+                <a:latin typeface="Calibri"/>
+              </a:rPr>
+              <a:t>–   «Si se pone lenta, le subimos recursos»</a:t>
+            </a:r>
+          </a:p>
+          <a:p>
+            <a:pPr>
+              <a:spcAft>
+                <a:spcPts val="800"/>
+              </a:spcAft>
+            </a:pPr>
+            <a:r>
+              <a:rPr sz="1500" b="0" i="0">
+                <a:solidFill>
+                  <a:srgbClr val="333333"/>
+                </a:solidFill>
+                <a:latin typeface="Calibri"/>
+              </a:rPr>
+              <a:t>–   No hay con que comparar despues</a:t>
+            </a:r>
+          </a:p>
+        </p:txBody>
+      </p:sp>
+      <p:sp>
+        <p:nvSpPr>
+          <p:cNvPr id="9" name="Rounded Rectangle 8"/>
+          <p:cNvSpPr/>
+          <p:nvPr/>
+        </p:nvSpPr>
+        <p:spPr>
+          <a:xfrm>
+            <a:off x="6255867" y="1261872"/>
+            <a:ext cx="5478627" cy="5093208"/>
           </a:xfrm>
           <a:prstGeom prst="roundRect">
             <a:avLst>
               <a:gd name="adj" fmla="val 12000"/>
             </a:avLst>
+          </a:prstGeom>
+          <a:solidFill>
+            <a:srgbClr val="E8F4FA"/>
+          </a:solidFill>
+          <a:ln>
+            <a:noFill/>
+          </a:ln>
+        </p:spPr>
+        <p:style>
+          <a:lnRef idx="1">
+            <a:schemeClr val="accent1"/>
+          </a:lnRef>
+          <a:fillRef idx="3">
+            <a:schemeClr val="accent1"/>
+          </a:fillRef>
+          <a:effectRef idx="2">
+            <a:schemeClr val="accent1"/>
+          </a:effectRef>
+          <a:fontRef idx="minor">
+            <a:schemeClr val="lt1"/>
+          </a:fontRef>
+        </p:style>
+        <p:txBody>
+          <a:bodyPr rtlCol="0" anchor="ctr"/>
+          <a:lstStyle/>
+          <a:p>
+            <a:pPr algn="ctr"/>
+          </a:p>
+        </p:txBody>
+      </p:sp>
+      <p:sp>
+        <p:nvSpPr>
+          <p:cNvPr id="10" name="Rectangle 9"/>
+          <p:cNvSpPr/>
+          <p:nvPr/>
+        </p:nvSpPr>
+        <p:spPr>
+          <a:xfrm>
+            <a:off x="6255867" y="1261872"/>
+            <a:ext cx="5478627" cy="502920"/>
+          </a:xfrm>
+          <a:prstGeom prst="rect">
+            <a:avLst/>
           </a:prstGeom>
           <a:solidFill>
             <a:srgbClr val="095292"/>
@@ -9416,14 +9013,14 @@
       </p:sp>
       <p:sp>
         <p:nvSpPr>
-          <p:cNvPr id="8" name="TextBox 7"/>
+          <p:cNvPr id="11" name="TextBox 10"/>
           <p:cNvSpPr txBox="1"/>
           <p:nvPr/>
         </p:nvSpPr>
         <p:spPr>
           <a:xfrm>
-            <a:off x="594360" y="1965960"/>
-            <a:ext cx="438912" cy="438912"/>
+            <a:off x="6393027" y="1353312"/>
+            <a:ext cx="5204307" cy="365760"/>
           </a:xfrm>
           <a:prstGeom prst="rect">
             <a:avLst/>
@@ -9442,146 +9039,8 @@
                 </a:solidFill>
                 <a:latin typeface="Calibri"/>
               </a:rPr>
-              <a:t>1</a:t>
-            </a:r>
-          </a:p>
-        </p:txBody>
-      </p:sp>
-      <p:sp>
-        <p:nvSpPr>
-          <p:cNvPr id="9" name="TextBox 8"/>
-          <p:cNvSpPr txBox="1"/>
-          <p:nvPr/>
-        </p:nvSpPr>
-        <p:spPr>
-          <a:xfrm>
-            <a:off x="1188720" y="1751076"/>
-            <a:ext cx="10271455" cy="886968"/>
-          </a:xfrm>
-          <a:prstGeom prst="rect">
-            <a:avLst/>
-          </a:prstGeom>
-          <a:noFill/>
-        </p:spPr>
-        <p:txBody>
-          <a:bodyPr wrap="square" anchor="ctr"/>
-          <a:lstStyle/>
-          <a:p>
-            <a:r>
-              <a:rPr sz="1500" b="1" i="0">
-                <a:solidFill>
-                  <a:srgbClr val="095292"/>
-                </a:solidFill>
-                <a:latin typeface="Calibri"/>
-              </a:rPr>
-              <a:t>Disena visual</a:t>
-            </a:r>
-          </a:p>
-          <a:p>
-            <a:pPr>
-              <a:spcBef>
-                <a:spcPts val="200"/>
-              </a:spcBef>
-            </a:pPr>
-            <a:r>
-              <a:rPr sz="1300" b="0" i="0">
-                <a:solidFill>
-                  <a:srgbClr val="333333"/>
-                </a:solidFill>
-                <a:latin typeface="Calibri"/>
-              </a:rPr>
-              <a:t>Dibuja el diagrama como quieras en Excalidraw o draw.io: es mas rapido arrastrar cajas que escribir codigo, y ahi es donde piensas el modelo.</a:t>
-            </a:r>
-          </a:p>
-        </p:txBody>
-      </p:sp>
-      <p:sp>
-        <p:nvSpPr>
-          <p:cNvPr id="10" name="Rounded Rectangle 9"/>
-          <p:cNvSpPr/>
-          <p:nvPr/>
-        </p:nvSpPr>
-        <p:spPr>
-          <a:xfrm>
-            <a:off x="457200" y="2802636"/>
-            <a:ext cx="11277295" cy="1051560"/>
-          </a:xfrm>
-          <a:prstGeom prst="roundRect">
-            <a:avLst>
-              <a:gd name="adj" fmla="val 12000"/>
-            </a:avLst>
-          </a:prstGeom>
-          <a:solidFill>
-            <a:srgbClr val="E8F4FA"/>
-          </a:solidFill>
-          <a:ln>
-            <a:noFill/>
-          </a:ln>
-        </p:spPr>
-        <p:style>
-          <a:lnRef idx="1">
-            <a:schemeClr val="accent1"/>
-          </a:lnRef>
-          <a:fillRef idx="3">
-            <a:schemeClr val="accent1"/>
-          </a:fillRef>
-          <a:effectRef idx="2">
-            <a:schemeClr val="accent1"/>
-          </a:effectRef>
-          <a:fontRef idx="minor">
-            <a:schemeClr val="lt1"/>
-          </a:fontRef>
-        </p:style>
-        <p:txBody>
-          <a:bodyPr rtlCol="0" anchor="ctr"/>
-          <a:lstStyle/>
-          <a:p>
-            <a:pPr algn="ctr"/>
-          </a:p>
-        </p:txBody>
-      </p:sp>
-      <p:sp>
-        <p:nvSpPr>
-          <p:cNvPr id="11" name="Rounded Rectangle 10"/>
-          <p:cNvSpPr/>
-          <p:nvPr/>
-        </p:nvSpPr>
-        <p:spPr>
-          <a:xfrm>
-            <a:off x="594360" y="3108960"/>
-            <a:ext cx="438912" cy="438912"/>
-          </a:xfrm>
-          <a:prstGeom prst="roundRect">
-            <a:avLst>
-              <a:gd name="adj" fmla="val 12000"/>
-            </a:avLst>
-          </a:prstGeom>
-          <a:solidFill>
-            <a:srgbClr val="095292"/>
-          </a:solidFill>
-          <a:ln>
-            <a:noFill/>
-          </a:ln>
-        </p:spPr>
-        <p:style>
-          <a:lnRef idx="1">
-            <a:schemeClr val="accent1"/>
-          </a:lnRef>
-          <a:fillRef idx="3">
-            <a:schemeClr val="accent1"/>
-          </a:fillRef>
-          <a:effectRef idx="2">
-            <a:schemeClr val="accent1"/>
-          </a:effectRef>
-          <a:fontRef idx="minor">
-            <a:schemeClr val="lt1"/>
-          </a:fontRef>
-        </p:style>
-        <p:txBody>
-          <a:bodyPr rtlCol="0" anchor="ctr"/>
-          <a:lstStyle/>
-          <a:p>
-            <a:pPr algn="ctr"/>
+              <a:t>Enunciado medible</a:t>
+            </a:r>
           </a:p>
         </p:txBody>
       </p:sp>
@@ -9593,8 +9052,8 @@
         </p:nvSpPr>
         <p:spPr>
           <a:xfrm>
-            <a:off x="594360" y="3108960"/>
-            <a:ext cx="438912" cy="438912"/>
+            <a:off x="6420459" y="1901952"/>
+            <a:ext cx="5158587" cy="4498848"/>
           </a:xfrm>
           <a:prstGeom prst="rect">
             <a:avLst/>
@@ -9602,18 +9061,117 @@
           <a:noFill/>
         </p:spPr>
         <p:txBody>
-          <a:bodyPr wrap="square" anchor="ctr"/>
-          <a:lstStyle/>
-          <a:p>
-            <a:pPr algn="ctr"/>
-            <a:r>
-              <a:rPr sz="1600" b="1" i="0">
-                <a:solidFill>
-                  <a:srgbClr val="FFFFFF"/>
-                </a:solidFill>
-                <a:latin typeface="Calibri"/>
-              </a:rPr>
-              <a:t>2</a:t>
+          <a:bodyPr wrap="square">
+            <a:spAutoFit/>
+          </a:bodyPr>
+          <a:lstStyle/>
+          <a:p>
+            <a:pPr>
+              <a:spcAft>
+                <a:spcPts val="800"/>
+              </a:spcAft>
+            </a:pPr>
+            <a:r>
+              <a:rPr sz="1500" b="0" i="0">
+                <a:solidFill>
+                  <a:srgbClr val="333333"/>
+                </a:solidFill>
+                <a:latin typeface="Calibri"/>
+              </a:rPr>
+              <a:t>–   </a:t>
+            </a:r>
+            <a:r>
+              <a:rPr sz="1500" b="1" i="0">
+                <a:solidFill>
+                  <a:srgbClr val="333333"/>
+                </a:solidFill>
+                <a:latin typeface="Calibri"/>
+              </a:rPr>
+              <a:t>p95 &lt; 300 ms</a:t>
+            </a:r>
+            <a:r>
+              <a:rPr sz="1500" b="0" i="0">
+                <a:solidFill>
+                  <a:srgbClr val="333333"/>
+                </a:solidFill>
+                <a:latin typeface="Calibri"/>
+              </a:rPr>
+              <a:t> en el endpoint de reserva</a:t>
+            </a:r>
+          </a:p>
+          <a:p>
+            <a:pPr>
+              <a:spcAft>
+                <a:spcPts val="800"/>
+              </a:spcAft>
+            </a:pPr>
+            <a:r>
+              <a:rPr sz="1500" b="0" i="0">
+                <a:solidFill>
+                  <a:srgbClr val="333333"/>
+                </a:solidFill>
+                <a:latin typeface="Calibri"/>
+              </a:rPr>
+              <a:t>–   Escenario: </a:t>
+            </a:r>
+            <a:r>
+              <a:rPr sz="1500" b="1" i="0">
+                <a:solidFill>
+                  <a:srgbClr val="333333"/>
+                </a:solidFill>
+                <a:latin typeface="Calibri"/>
+              </a:rPr>
+              <a:t>150 RPS</a:t>
+            </a:r>
+            <a:r>
+              <a:rPr sz="1500" b="0" i="0">
+                <a:solidFill>
+                  <a:srgbClr val="333333"/>
+                </a:solidFill>
+                <a:latin typeface="Calibri"/>
+              </a:rPr>
+              <a:t> en el pico de inicio de semestre</a:t>
+            </a:r>
+          </a:p>
+          <a:p>
+            <a:pPr>
+              <a:spcAft>
+                <a:spcPts val="800"/>
+              </a:spcAft>
+            </a:pPr>
+            <a:r>
+              <a:rPr sz="1500" b="0" i="0">
+                <a:solidFill>
+                  <a:srgbClr val="333333"/>
+                </a:solidFill>
+                <a:latin typeface="Calibri"/>
+              </a:rPr>
+              <a:t>–   Bottleneck sospechado: </a:t>
+            </a:r>
+            <a:r>
+              <a:rPr sz="1500" b="1" i="0">
+                <a:solidFill>
+                  <a:srgbClr val="333333"/>
+                </a:solidFill>
+                <a:latin typeface="Calibri"/>
+              </a:rPr>
+              <a:t>consulta a la BD</a:t>
+            </a:r>
+          </a:p>
+          <a:p>
+            <a:pPr>
+              <a:spcAft>
+                <a:spcPts val="800"/>
+              </a:spcAft>
+            </a:pPr>
+            <a:r>
+              <a:rPr sz="1500" b="0" i="0">
+                <a:solidFill>
+                  <a:srgbClr val="333333"/>
+                </a:solidFill>
+                <a:latin typeface="Calibri"/>
+              </a:rPr>
+              <a:t>–   Se puede verificar: pasa o no pasa</a:t>
             </a:r>
           </a:p>
         </p:txBody>
@@ -9621,396 +9179,6 @@
       <p:sp>
         <p:nvSpPr>
           <p:cNvPr id="13" name="TextBox 12"/>
-          <p:cNvSpPr txBox="1"/>
-          <p:nvPr/>
-        </p:nvSpPr>
-        <p:spPr>
-          <a:xfrm>
-            <a:off x="1188720" y="2894076"/>
-            <a:ext cx="10271455" cy="886968"/>
-          </a:xfrm>
-          <a:prstGeom prst="rect">
-            <a:avLst/>
-          </a:prstGeom>
-          <a:noFill/>
-        </p:spPr>
-        <p:txBody>
-          <a:bodyPr wrap="square" anchor="ctr"/>
-          <a:lstStyle/>
-          <a:p>
-            <a:r>
-              <a:rPr sz="1500" b="1" i="0">
-                <a:solidFill>
-                  <a:srgbClr val="095292"/>
-                </a:solidFill>
-                <a:latin typeface="Calibri"/>
-              </a:rPr>
-              <a:t>Traduce con IA</a:t>
-            </a:r>
-          </a:p>
-          <a:p>
-            <a:pPr>
-              <a:spcBef>
-                <a:spcPts val="200"/>
-              </a:spcBef>
-            </a:pPr>
-            <a:r>
-              <a:rPr sz="1300" b="0" i="0">
-                <a:solidFill>
-                  <a:srgbClr val="333333"/>
-                </a:solidFill>
-                <a:latin typeface="Calibri"/>
-              </a:rPr>
-              <a:t>Copia o describe tu boceto a una IA y pidele el codigo Mermaid: «convierte este diagrama a Mermaid usando sequenceDiagram». Revisa el resultado: la IA acierta la sintaxis, no tu modelo.</a:t>
-            </a:r>
-          </a:p>
-        </p:txBody>
-      </p:sp>
-      <p:sp>
-        <p:nvSpPr>
-          <p:cNvPr id="14" name="Rounded Rectangle 13"/>
-          <p:cNvSpPr/>
-          <p:nvPr/>
-        </p:nvSpPr>
-        <p:spPr>
-          <a:xfrm>
-            <a:off x="457200" y="3945636"/>
-            <a:ext cx="11277295" cy="1051560"/>
-          </a:xfrm>
-          <a:prstGeom prst="roundRect">
-            <a:avLst>
-              <a:gd name="adj" fmla="val 12000"/>
-            </a:avLst>
-          </a:prstGeom>
-          <a:solidFill>
-            <a:srgbClr val="F2F2F2"/>
-          </a:solidFill>
-          <a:ln>
-            <a:noFill/>
-          </a:ln>
-        </p:spPr>
-        <p:style>
-          <a:lnRef idx="1">
-            <a:schemeClr val="accent1"/>
-          </a:lnRef>
-          <a:fillRef idx="3">
-            <a:schemeClr val="accent1"/>
-          </a:fillRef>
-          <a:effectRef idx="2">
-            <a:schemeClr val="accent1"/>
-          </a:effectRef>
-          <a:fontRef idx="minor">
-            <a:schemeClr val="lt1"/>
-          </a:fontRef>
-        </p:style>
-        <p:txBody>
-          <a:bodyPr rtlCol="0" anchor="ctr"/>
-          <a:lstStyle/>
-          <a:p>
-            <a:pPr algn="ctr"/>
-          </a:p>
-        </p:txBody>
-      </p:sp>
-      <p:sp>
-        <p:nvSpPr>
-          <p:cNvPr id="15" name="Rounded Rectangle 14"/>
-          <p:cNvSpPr/>
-          <p:nvPr/>
-        </p:nvSpPr>
-        <p:spPr>
-          <a:xfrm>
-            <a:off x="594360" y="4251960"/>
-            <a:ext cx="438912" cy="438912"/>
-          </a:xfrm>
-          <a:prstGeom prst="roundRect">
-            <a:avLst>
-              <a:gd name="adj" fmla="val 12000"/>
-            </a:avLst>
-          </a:prstGeom>
-          <a:solidFill>
-            <a:srgbClr val="095292"/>
-          </a:solidFill>
-          <a:ln>
-            <a:noFill/>
-          </a:ln>
-        </p:spPr>
-        <p:style>
-          <a:lnRef idx="1">
-            <a:schemeClr val="accent1"/>
-          </a:lnRef>
-          <a:fillRef idx="3">
-            <a:schemeClr val="accent1"/>
-          </a:fillRef>
-          <a:effectRef idx="2">
-            <a:schemeClr val="accent1"/>
-          </a:effectRef>
-          <a:fontRef idx="minor">
-            <a:schemeClr val="lt1"/>
-          </a:fontRef>
-        </p:style>
-        <p:txBody>
-          <a:bodyPr rtlCol="0" anchor="ctr"/>
-          <a:lstStyle/>
-          <a:p>
-            <a:pPr algn="ctr"/>
-          </a:p>
-        </p:txBody>
-      </p:sp>
-      <p:sp>
-        <p:nvSpPr>
-          <p:cNvPr id="16" name="TextBox 15"/>
-          <p:cNvSpPr txBox="1"/>
-          <p:nvPr/>
-        </p:nvSpPr>
-        <p:spPr>
-          <a:xfrm>
-            <a:off x="594360" y="4251960"/>
-            <a:ext cx="438912" cy="438912"/>
-          </a:xfrm>
-          <a:prstGeom prst="rect">
-            <a:avLst/>
-          </a:prstGeom>
-          <a:noFill/>
-        </p:spPr>
-        <p:txBody>
-          <a:bodyPr wrap="square" anchor="ctr"/>
-          <a:lstStyle/>
-          <a:p>
-            <a:pPr algn="ctr"/>
-            <a:r>
-              <a:rPr sz="1600" b="1" i="0">
-                <a:solidFill>
-                  <a:srgbClr val="FFFFFF"/>
-                </a:solidFill>
-                <a:latin typeface="Calibri"/>
-              </a:rPr>
-              <a:t>3</a:t>
-            </a:r>
-          </a:p>
-        </p:txBody>
-      </p:sp>
-      <p:sp>
-        <p:nvSpPr>
-          <p:cNvPr id="17" name="TextBox 16"/>
-          <p:cNvSpPr txBox="1"/>
-          <p:nvPr/>
-        </p:nvSpPr>
-        <p:spPr>
-          <a:xfrm>
-            <a:off x="1188720" y="4037076"/>
-            <a:ext cx="10271455" cy="886968"/>
-          </a:xfrm>
-          <a:prstGeom prst="rect">
-            <a:avLst/>
-          </a:prstGeom>
-          <a:noFill/>
-        </p:spPr>
-        <p:txBody>
-          <a:bodyPr wrap="square" anchor="ctr"/>
-          <a:lstStyle/>
-          <a:p>
-            <a:r>
-              <a:rPr sz="1500" b="1" i="0">
-                <a:solidFill>
-                  <a:srgbClr val="095292"/>
-                </a:solidFill>
-                <a:latin typeface="Calibri"/>
-              </a:rPr>
-              <a:t>Pega y renderiza en la plataforma del curso</a:t>
-            </a:r>
-          </a:p>
-          <a:p>
-            <a:pPr>
-              <a:spcBef>
-                <a:spcPts val="200"/>
-              </a:spcBef>
-            </a:pPr>
-            <a:r>
-              <a:rPr sz="1300" b="0" i="0">
-                <a:solidFill>
-                  <a:srgbClr val="333333"/>
-                </a:solidFill>
-                <a:latin typeface="Calibri"/>
-              </a:rPr>
-              <a:t>Pega ese codigo en la caja de texto de la pregunta y mira como lo dibuja la plataforma. Si no renderiza, corrige ahi mismo: lo que se califica es el diagrama renderizado dentro de la plataforma del curso.</a:t>
-            </a:r>
-          </a:p>
-        </p:txBody>
-      </p:sp>
-      <p:sp>
-        <p:nvSpPr>
-          <p:cNvPr id="18" name="Rounded Rectangle 17"/>
-          <p:cNvSpPr/>
-          <p:nvPr/>
-        </p:nvSpPr>
-        <p:spPr>
-          <a:xfrm>
-            <a:off x="457200" y="5088636"/>
-            <a:ext cx="11277295" cy="1051560"/>
-          </a:xfrm>
-          <a:prstGeom prst="roundRect">
-            <a:avLst>
-              <a:gd name="adj" fmla="val 12000"/>
-            </a:avLst>
-          </a:prstGeom>
-          <a:solidFill>
-            <a:srgbClr val="E8F4FA"/>
-          </a:solidFill>
-          <a:ln>
-            <a:noFill/>
-          </a:ln>
-        </p:spPr>
-        <p:style>
-          <a:lnRef idx="1">
-            <a:schemeClr val="accent1"/>
-          </a:lnRef>
-          <a:fillRef idx="3">
-            <a:schemeClr val="accent1"/>
-          </a:fillRef>
-          <a:effectRef idx="2">
-            <a:schemeClr val="accent1"/>
-          </a:effectRef>
-          <a:fontRef idx="minor">
-            <a:schemeClr val="lt1"/>
-          </a:fontRef>
-        </p:style>
-        <p:txBody>
-          <a:bodyPr rtlCol="0" anchor="ctr"/>
-          <a:lstStyle/>
-          <a:p>
-            <a:pPr algn="ctr"/>
-          </a:p>
-        </p:txBody>
-      </p:sp>
-      <p:sp>
-        <p:nvSpPr>
-          <p:cNvPr id="19" name="Rounded Rectangle 18"/>
-          <p:cNvSpPr/>
-          <p:nvPr/>
-        </p:nvSpPr>
-        <p:spPr>
-          <a:xfrm>
-            <a:off x="594360" y="5394960"/>
-            <a:ext cx="438912" cy="438912"/>
-          </a:xfrm>
-          <a:prstGeom prst="roundRect">
-            <a:avLst>
-              <a:gd name="adj" fmla="val 12000"/>
-            </a:avLst>
-          </a:prstGeom>
-          <a:solidFill>
-            <a:srgbClr val="095292"/>
-          </a:solidFill>
-          <a:ln>
-            <a:noFill/>
-          </a:ln>
-        </p:spPr>
-        <p:style>
-          <a:lnRef idx="1">
-            <a:schemeClr val="accent1"/>
-          </a:lnRef>
-          <a:fillRef idx="3">
-            <a:schemeClr val="accent1"/>
-          </a:fillRef>
-          <a:effectRef idx="2">
-            <a:schemeClr val="accent1"/>
-          </a:effectRef>
-          <a:fontRef idx="minor">
-            <a:schemeClr val="lt1"/>
-          </a:fontRef>
-        </p:style>
-        <p:txBody>
-          <a:bodyPr rtlCol="0" anchor="ctr"/>
-          <a:lstStyle/>
-          <a:p>
-            <a:pPr algn="ctr"/>
-          </a:p>
-        </p:txBody>
-      </p:sp>
-      <p:sp>
-        <p:nvSpPr>
-          <p:cNvPr id="20" name="TextBox 19"/>
-          <p:cNvSpPr txBox="1"/>
-          <p:nvPr/>
-        </p:nvSpPr>
-        <p:spPr>
-          <a:xfrm>
-            <a:off x="594360" y="5394960"/>
-            <a:ext cx="438912" cy="438912"/>
-          </a:xfrm>
-          <a:prstGeom prst="rect">
-            <a:avLst/>
-          </a:prstGeom>
-          <a:noFill/>
-        </p:spPr>
-        <p:txBody>
-          <a:bodyPr wrap="square" anchor="ctr"/>
-          <a:lstStyle/>
-          <a:p>
-            <a:pPr algn="ctr"/>
-            <a:r>
-              <a:rPr sz="1600" b="1" i="0">
-                <a:solidFill>
-                  <a:srgbClr val="FFFFFF"/>
-                </a:solidFill>
-                <a:latin typeface="Calibri"/>
-              </a:rPr>
-              <a:t>4</a:t>
-            </a:r>
-          </a:p>
-        </p:txBody>
-      </p:sp>
-      <p:sp>
-        <p:nvSpPr>
-          <p:cNvPr id="21" name="TextBox 20"/>
-          <p:cNvSpPr txBox="1"/>
-          <p:nvPr/>
-        </p:nvSpPr>
-        <p:spPr>
-          <a:xfrm>
-            <a:off x="1188720" y="5180076"/>
-            <a:ext cx="10271455" cy="886968"/>
-          </a:xfrm>
-          <a:prstGeom prst="rect">
-            <a:avLst/>
-          </a:prstGeom>
-          <a:noFill/>
-        </p:spPr>
-        <p:txBody>
-          <a:bodyPr wrap="square" anchor="ctr"/>
-          <a:lstStyle/>
-          <a:p>
-            <a:r>
-              <a:rPr sz="1500" b="1" i="0">
-                <a:solidFill>
-                  <a:srgbClr val="095292"/>
-                </a:solidFill>
-                <a:latin typeface="Calibri"/>
-              </a:rPr>
-              <a:t>Guarda el PNG para tu PI</a:t>
-            </a:r>
-          </a:p>
-          <a:p>
-            <a:pPr>
-              <a:spcBef>
-                <a:spcPts val="200"/>
-              </a:spcBef>
-            </a:pPr>
-            <a:r>
-              <a:rPr sz="1300" b="0" i="0">
-                <a:solidFill>
-                  <a:srgbClr val="333333"/>
-                </a:solidFill>
-                <a:latin typeface="Calibri"/>
-              </a:rPr>
-              <a:t>Exporta tambien la imagen a la carpeta de tu Proyecto Integrador. Esa copia es para tu informe; no reemplaza la respuesta en la plataforma.</a:t>
-            </a:r>
-          </a:p>
-        </p:txBody>
-      </p:sp>
-      <p:sp>
-        <p:nvSpPr>
-          <p:cNvPr id="22" name="TextBox 21"/>
           <p:cNvSpPr txBox="1"/>
           <p:nvPr/>
         </p:nvSpPr>
@@ -10078,7 +9246,7 @@
         <p:spPr>
           <a:xfrm>
             <a:off x="0" y="0"/>
-            <a:ext cx="12191695" cy="960120"/>
+            <a:ext cx="12191695" cy="1170432"/>
           </a:xfrm>
           <a:prstGeom prst="rect">
             <a:avLst/>
@@ -10120,7 +9288,7 @@
         </p:nvSpPr>
         <p:spPr>
           <a:xfrm>
-            <a:off x="0" y="960120"/>
+            <a:off x="0" y="1170432"/>
             <a:ext cx="12191695" cy="41148"/>
           </a:xfrm>
           <a:prstGeom prst="rect">
@@ -10164,7 +9332,7 @@
         <p:spPr>
           <a:xfrm>
             <a:off x="457200" y="164592"/>
-            <a:ext cx="11277295" cy="502920"/>
+            <a:ext cx="11277295" cy="384048"/>
           </a:xfrm>
           <a:prstGeom prst="rect">
             <a:avLst/>
@@ -10184,7 +9352,7 @@
                 </a:solidFill>
                 <a:latin typeface="Calibri"/>
               </a:rPr>
-              <a:t>PI CloudLite — entregable de hoy</a:t>
+              <a:t>Herramientas de hoy</a:t>
             </a:r>
           </a:p>
         </p:txBody>
@@ -10197,8 +9365,8 @@
         </p:nvSpPr>
         <p:spPr>
           <a:xfrm>
-            <a:off x="457200" y="1170432"/>
-            <a:ext cx="11277295" cy="5230368"/>
+            <a:off x="457200" y="566928"/>
+            <a:ext cx="11277295" cy="411480"/>
           </a:xfrm>
           <a:prstGeom prst="rect">
             <a:avLst/>
@@ -10211,119 +9379,837 @@
           </a:bodyPr>
           <a:lstStyle/>
           <a:p>
-            <a:pPr>
-              <a:spcAft>
-                <a:spcPts val="800"/>
-              </a:spcAft>
+            <a:r>
+              <a:rPr sz="1400" b="0" i="0">
+                <a:solidFill>
+                  <a:srgbClr val="B8D8EE"/>
+                </a:solidFill>
+                <a:latin typeface="Calibri"/>
+              </a:rPr>
+              <a:t>Gratis · navegador o free tier · sin cuenta de pago</a:t>
+            </a:r>
+          </a:p>
+        </p:txBody>
+      </p:sp>
+      <p:sp>
+        <p:nvSpPr>
+          <p:cNvPr id="6" name="Rounded Rectangle 5"/>
+          <p:cNvSpPr/>
+          <p:nvPr/>
+        </p:nvSpPr>
+        <p:spPr>
+          <a:xfrm>
+            <a:off x="457200" y="1591056"/>
+            <a:ext cx="3624986" cy="2299716"/>
+          </a:xfrm>
+          <a:prstGeom prst="roundRect">
+            <a:avLst>
+              <a:gd name="adj" fmla="val 12000"/>
+            </a:avLst>
+          </a:prstGeom>
+          <a:solidFill>
+            <a:srgbClr val="F2F2F2"/>
+          </a:solidFill>
+          <a:ln>
+            <a:noFill/>
+          </a:ln>
+        </p:spPr>
+        <p:style>
+          <a:lnRef idx="1">
+            <a:schemeClr val="accent1"/>
+          </a:lnRef>
+          <a:fillRef idx="3">
+            <a:schemeClr val="accent1"/>
+          </a:fillRef>
+          <a:effectRef idx="2">
+            <a:schemeClr val="accent1"/>
+          </a:effectRef>
+          <a:fontRef idx="minor">
+            <a:schemeClr val="lt1"/>
+          </a:fontRef>
+        </p:style>
+        <p:txBody>
+          <a:bodyPr rtlCol="0" anchor="ctr"/>
+          <a:lstStyle/>
+          <a:p>
+            <a:pPr algn="ctr"/>
+          </a:p>
+        </p:txBody>
+      </p:sp>
+      <p:sp>
+        <p:nvSpPr>
+          <p:cNvPr id="7" name="Rectangle 6"/>
+          <p:cNvSpPr/>
+          <p:nvPr/>
+        </p:nvSpPr>
+        <p:spPr>
+          <a:xfrm>
+            <a:off x="457200" y="1591056"/>
+            <a:ext cx="3624986" cy="64008"/>
+          </a:xfrm>
+          <a:prstGeom prst="rect">
+            <a:avLst/>
+          </a:prstGeom>
+          <a:solidFill>
+            <a:srgbClr val="095292"/>
+          </a:solidFill>
+          <a:ln>
+            <a:noFill/>
+          </a:ln>
+        </p:spPr>
+        <p:style>
+          <a:lnRef idx="1">
+            <a:schemeClr val="accent1"/>
+          </a:lnRef>
+          <a:fillRef idx="3">
+            <a:schemeClr val="accent1"/>
+          </a:fillRef>
+          <a:effectRef idx="2">
+            <a:schemeClr val="accent1"/>
+          </a:effectRef>
+          <a:fontRef idx="minor">
+            <a:schemeClr val="lt1"/>
+          </a:fontRef>
+        </p:style>
+        <p:txBody>
+          <a:bodyPr rtlCol="0" anchor="ctr"/>
+          <a:lstStyle/>
+          <a:p>
+            <a:pPr algn="ctr"/>
+          </a:p>
+        </p:txBody>
+      </p:sp>
+      <p:sp>
+        <p:nvSpPr>
+          <p:cNvPr id="8" name="Rectangle 7"/>
+          <p:cNvSpPr/>
+          <p:nvPr/>
+        </p:nvSpPr>
+        <p:spPr>
+          <a:xfrm>
+            <a:off x="457200" y="1655064"/>
+            <a:ext cx="3624986" cy="27432"/>
+          </a:xfrm>
+          <a:prstGeom prst="rect">
+            <a:avLst/>
+          </a:prstGeom>
+          <a:solidFill>
+            <a:srgbClr val="FFD000"/>
+          </a:solidFill>
+          <a:ln>
+            <a:noFill/>
+          </a:ln>
+        </p:spPr>
+        <p:style>
+          <a:lnRef idx="1">
+            <a:schemeClr val="accent1"/>
+          </a:lnRef>
+          <a:fillRef idx="3">
+            <a:schemeClr val="accent1"/>
+          </a:fillRef>
+          <a:effectRef idx="2">
+            <a:schemeClr val="accent1"/>
+          </a:effectRef>
+          <a:fontRef idx="minor">
+            <a:schemeClr val="lt1"/>
+          </a:fontRef>
+        </p:style>
+        <p:txBody>
+          <a:bodyPr rtlCol="0" anchor="ctr"/>
+          <a:lstStyle/>
+          <a:p>
+            <a:pPr algn="ctr"/>
+          </a:p>
+        </p:txBody>
+      </p:sp>
+      <p:pic>
+        <p:nvPicPr>
+          <p:cNvPr id="9" name="Picture 8" descr="google_docs.png"/>
+          <p:cNvPicPr>
+            <a:picLocks noChangeAspect="1"/>
+          </p:cNvPicPr>
+          <p:nvPr/>
+        </p:nvPicPr>
+        <p:blipFill>
+          <a:blip r:embed="rId2"/>
+          <a:stretch>
+            <a:fillRect/>
+          </a:stretch>
+        </p:blipFill>
+        <p:spPr>
+          <a:xfrm>
+            <a:off x="1659331" y="1847087"/>
+            <a:ext cx="1220724" cy="1220724"/>
+          </a:xfrm>
+          <a:prstGeom prst="rect">
+            <a:avLst/>
+          </a:prstGeom>
+        </p:spPr>
+      </p:pic>
+      <p:sp>
+        <p:nvSpPr>
+          <p:cNvPr id="10" name="TextBox 9"/>
+          <p:cNvSpPr txBox="1"/>
+          <p:nvPr/>
+        </p:nvSpPr>
+        <p:spPr>
+          <a:xfrm>
+            <a:off x="530352" y="3159251"/>
+            <a:ext cx="3478682" cy="621792"/>
+          </a:xfrm>
+          <a:prstGeom prst="rect">
+            <a:avLst/>
+          </a:prstGeom>
+          <a:noFill/>
+        </p:spPr>
+        <p:txBody>
+          <a:bodyPr wrap="square" anchor="t"/>
+          <a:lstStyle/>
+          <a:p>
+            <a:pPr algn="ctr"/>
+            <a:r>
+              <a:rPr sz="1300" b="1" i="0">
+                <a:solidFill>
+                  <a:srgbClr val="095292"/>
+                </a:solidFill>
+                <a:latin typeface="Calibri"/>
+              </a:rPr>
+              <a:t>Google Docs</a:t>
+            </a:r>
+          </a:p>
+          <a:p>
+            <a:pPr algn="ctr">
+              <a:spcBef>
+                <a:spcPts val="200"/>
+              </a:spcBef>
             </a:pPr>
             <a:r>
-              <a:rPr sz="2000" b="0" i="0">
-                <a:solidFill>
-                  <a:srgbClr val="333333"/>
-                </a:solidFill>
-                <a:latin typeface="Calibri"/>
-              </a:rPr>
-              <a:t>–   </a:t>
-            </a:r>
-            <a:r>
-              <a:rPr sz="2000" b="1" i="0">
-                <a:solidFill>
-                  <a:srgbClr val="333333"/>
-                </a:solidFill>
-                <a:latin typeface="Calibri"/>
-              </a:rPr>
-              <a:t>Entregable:</a:t>
-            </a:r>
-            <a:r>
-              <a:rPr sz="2000" b="0" i="0">
-                <a:solidFill>
-                  <a:srgbClr val="333333"/>
-                </a:solidFill>
-                <a:latin typeface="Calibri"/>
-              </a:rPr>
-              <a:t> Sección Rendimiento + guion de pitch + paquete casi-final</a:t>
-            </a:r>
-          </a:p>
-          <a:p>
-            <a:pPr>
-              <a:spcAft>
-                <a:spcPts val="800"/>
-              </a:spcAft>
+              <a:rPr sz="1000" b="0" i="0">
+                <a:solidFill>
+                  <a:srgbClr val="666666"/>
+                </a:solidFill>
+                <a:latin typeface="Calibri"/>
+              </a:rPr>
+              <a:t>Objetivo de rendimiento</a:t>
+            </a:r>
+          </a:p>
+        </p:txBody>
+      </p:sp>
+      <p:sp>
+        <p:nvSpPr>
+          <p:cNvPr id="11" name="Rounded Rectangle 10"/>
+          <p:cNvSpPr/>
+          <p:nvPr/>
+        </p:nvSpPr>
+        <p:spPr>
+          <a:xfrm>
+            <a:off x="4283354" y="1591056"/>
+            <a:ext cx="3624986" cy="2299716"/>
+          </a:xfrm>
+          <a:prstGeom prst="roundRect">
+            <a:avLst>
+              <a:gd name="adj" fmla="val 12000"/>
+            </a:avLst>
+          </a:prstGeom>
+          <a:solidFill>
+            <a:srgbClr val="F2F2F2"/>
+          </a:solidFill>
+          <a:ln>
+            <a:noFill/>
+          </a:ln>
+        </p:spPr>
+        <p:style>
+          <a:lnRef idx="1">
+            <a:schemeClr val="accent1"/>
+          </a:lnRef>
+          <a:fillRef idx="3">
+            <a:schemeClr val="accent1"/>
+          </a:fillRef>
+          <a:effectRef idx="2">
+            <a:schemeClr val="accent1"/>
+          </a:effectRef>
+          <a:fontRef idx="minor">
+            <a:schemeClr val="lt1"/>
+          </a:fontRef>
+        </p:style>
+        <p:txBody>
+          <a:bodyPr rtlCol="0" anchor="ctr"/>
+          <a:lstStyle/>
+          <a:p>
+            <a:pPr algn="ctr"/>
+          </a:p>
+        </p:txBody>
+      </p:sp>
+      <p:sp>
+        <p:nvSpPr>
+          <p:cNvPr id="12" name="Rectangle 11"/>
+          <p:cNvSpPr/>
+          <p:nvPr/>
+        </p:nvSpPr>
+        <p:spPr>
+          <a:xfrm>
+            <a:off x="4283354" y="1591056"/>
+            <a:ext cx="3624986" cy="64008"/>
+          </a:xfrm>
+          <a:prstGeom prst="rect">
+            <a:avLst/>
+          </a:prstGeom>
+          <a:solidFill>
+            <a:srgbClr val="095292"/>
+          </a:solidFill>
+          <a:ln>
+            <a:noFill/>
+          </a:ln>
+        </p:spPr>
+        <p:style>
+          <a:lnRef idx="1">
+            <a:schemeClr val="accent1"/>
+          </a:lnRef>
+          <a:fillRef idx="3">
+            <a:schemeClr val="accent1"/>
+          </a:fillRef>
+          <a:effectRef idx="2">
+            <a:schemeClr val="accent1"/>
+          </a:effectRef>
+          <a:fontRef idx="minor">
+            <a:schemeClr val="lt1"/>
+          </a:fontRef>
+        </p:style>
+        <p:txBody>
+          <a:bodyPr rtlCol="0" anchor="ctr"/>
+          <a:lstStyle/>
+          <a:p>
+            <a:pPr algn="ctr"/>
+          </a:p>
+        </p:txBody>
+      </p:sp>
+      <p:sp>
+        <p:nvSpPr>
+          <p:cNvPr id="13" name="Rectangle 12"/>
+          <p:cNvSpPr/>
+          <p:nvPr/>
+        </p:nvSpPr>
+        <p:spPr>
+          <a:xfrm>
+            <a:off x="4283354" y="1655064"/>
+            <a:ext cx="3624986" cy="27432"/>
+          </a:xfrm>
+          <a:prstGeom prst="rect">
+            <a:avLst/>
+          </a:prstGeom>
+          <a:solidFill>
+            <a:srgbClr val="FFD000"/>
+          </a:solidFill>
+          <a:ln>
+            <a:noFill/>
+          </a:ln>
+        </p:spPr>
+        <p:style>
+          <a:lnRef idx="1">
+            <a:schemeClr val="accent1"/>
+          </a:lnRef>
+          <a:fillRef idx="3">
+            <a:schemeClr val="accent1"/>
+          </a:fillRef>
+          <a:effectRef idx="2">
+            <a:schemeClr val="accent1"/>
+          </a:effectRef>
+          <a:fontRef idx="minor">
+            <a:schemeClr val="lt1"/>
+          </a:fontRef>
+        </p:style>
+        <p:txBody>
+          <a:bodyPr rtlCol="0" anchor="ctr"/>
+          <a:lstStyle/>
+          <a:p>
+            <a:pPr algn="ctr"/>
+          </a:p>
+        </p:txBody>
+      </p:sp>
+      <p:pic>
+        <p:nvPicPr>
+          <p:cNvPr id="14" name="Picture 13" descr="drawio.png"/>
+          <p:cNvPicPr>
+            <a:picLocks noChangeAspect="1"/>
+          </p:cNvPicPr>
+          <p:nvPr/>
+        </p:nvPicPr>
+        <p:blipFill>
+          <a:blip r:embed="rId3"/>
+          <a:stretch>
+            <a:fillRect/>
+          </a:stretch>
+        </p:blipFill>
+        <p:spPr>
+          <a:xfrm>
+            <a:off x="5485485" y="1847087"/>
+            <a:ext cx="1220724" cy="1220724"/>
+          </a:xfrm>
+          <a:prstGeom prst="rect">
+            <a:avLst/>
+          </a:prstGeom>
+        </p:spPr>
+      </p:pic>
+      <p:sp>
+        <p:nvSpPr>
+          <p:cNvPr id="15" name="TextBox 14"/>
+          <p:cNvSpPr txBox="1"/>
+          <p:nvPr/>
+        </p:nvSpPr>
+        <p:spPr>
+          <a:xfrm>
+            <a:off x="4356506" y="3159251"/>
+            <a:ext cx="3478682" cy="621792"/>
+          </a:xfrm>
+          <a:prstGeom prst="rect">
+            <a:avLst/>
+          </a:prstGeom>
+          <a:noFill/>
+        </p:spPr>
+        <p:txBody>
+          <a:bodyPr wrap="square" anchor="t"/>
+          <a:lstStyle/>
+          <a:p>
+            <a:pPr algn="ctr"/>
+            <a:r>
+              <a:rPr sz="1300" b="1" i="0">
+                <a:solidFill>
+                  <a:srgbClr val="095292"/>
+                </a:solidFill>
+                <a:latin typeface="Calibri"/>
+              </a:rPr>
+              <a:t>draw.io</a:t>
+            </a:r>
+          </a:p>
+          <a:p>
+            <a:pPr algn="ctr">
+              <a:spcBef>
+                <a:spcPts val="200"/>
+              </a:spcBef>
             </a:pPr>
             <a:r>
-              <a:rPr sz="2000" b="0" i="0">
-                <a:solidFill>
-                  <a:srgbClr val="333333"/>
-                </a:solidFill>
-                <a:latin typeface="Calibri"/>
-              </a:rPr>
-              <a:t>–   Herramienta: </a:t>
-            </a:r>
-            <a:r>
-              <a:rPr sz="2000" b="1" i="0">
-                <a:solidFill>
-                  <a:srgbClr val="333333"/>
-                </a:solidFill>
-                <a:latin typeface="Calibri"/>
-              </a:rPr>
-              <a:t>Google Docs · draw.io · (opcional) lab contenedor</a:t>
-            </a:r>
-          </a:p>
-          <a:p>
-            <a:pPr>
-              <a:spcAft>
-                <a:spcPts val="800"/>
-              </a:spcAft>
+              <a:rPr sz="1000" b="0" i="0">
+                <a:solidFill>
+                  <a:srgbClr val="666666"/>
+                </a:solidFill>
+                <a:latin typeface="Calibri"/>
+              </a:rPr>
+              <a:t>Bottleneck</a:t>
+            </a:r>
+          </a:p>
+        </p:txBody>
+      </p:sp>
+      <p:sp>
+        <p:nvSpPr>
+          <p:cNvPr id="16" name="Rounded Rectangle 15"/>
+          <p:cNvSpPr/>
+          <p:nvPr/>
+        </p:nvSpPr>
+        <p:spPr>
+          <a:xfrm>
+            <a:off x="8109508" y="1591056"/>
+            <a:ext cx="3624986" cy="2299716"/>
+          </a:xfrm>
+          <a:prstGeom prst="roundRect">
+            <a:avLst>
+              <a:gd name="adj" fmla="val 12000"/>
+            </a:avLst>
+          </a:prstGeom>
+          <a:solidFill>
+            <a:srgbClr val="F2F2F2"/>
+          </a:solidFill>
+          <a:ln>
+            <a:noFill/>
+          </a:ln>
+        </p:spPr>
+        <p:style>
+          <a:lnRef idx="1">
+            <a:schemeClr val="accent1"/>
+          </a:lnRef>
+          <a:fillRef idx="3">
+            <a:schemeClr val="accent1"/>
+          </a:fillRef>
+          <a:effectRef idx="2">
+            <a:schemeClr val="accent1"/>
+          </a:effectRef>
+          <a:fontRef idx="minor">
+            <a:schemeClr val="lt1"/>
+          </a:fontRef>
+        </p:style>
+        <p:txBody>
+          <a:bodyPr rtlCol="0" anchor="ctr"/>
+          <a:lstStyle/>
+          <a:p>
+            <a:pPr algn="ctr"/>
+          </a:p>
+        </p:txBody>
+      </p:sp>
+      <p:sp>
+        <p:nvSpPr>
+          <p:cNvPr id="17" name="Rectangle 16"/>
+          <p:cNvSpPr/>
+          <p:nvPr/>
+        </p:nvSpPr>
+        <p:spPr>
+          <a:xfrm>
+            <a:off x="8109508" y="1591056"/>
+            <a:ext cx="3624986" cy="64008"/>
+          </a:xfrm>
+          <a:prstGeom prst="rect">
+            <a:avLst/>
+          </a:prstGeom>
+          <a:solidFill>
+            <a:srgbClr val="095292"/>
+          </a:solidFill>
+          <a:ln>
+            <a:noFill/>
+          </a:ln>
+        </p:spPr>
+        <p:style>
+          <a:lnRef idx="1">
+            <a:schemeClr val="accent1"/>
+          </a:lnRef>
+          <a:fillRef idx="3">
+            <a:schemeClr val="accent1"/>
+          </a:fillRef>
+          <a:effectRef idx="2">
+            <a:schemeClr val="accent1"/>
+          </a:effectRef>
+          <a:fontRef idx="minor">
+            <a:schemeClr val="lt1"/>
+          </a:fontRef>
+        </p:style>
+        <p:txBody>
+          <a:bodyPr rtlCol="0" anchor="ctr"/>
+          <a:lstStyle/>
+          <a:p>
+            <a:pPr algn="ctr"/>
+          </a:p>
+        </p:txBody>
+      </p:sp>
+      <p:sp>
+        <p:nvSpPr>
+          <p:cNvPr id="18" name="Rectangle 17"/>
+          <p:cNvSpPr/>
+          <p:nvPr/>
+        </p:nvSpPr>
+        <p:spPr>
+          <a:xfrm>
+            <a:off x="8109508" y="1655064"/>
+            <a:ext cx="3624986" cy="27432"/>
+          </a:xfrm>
+          <a:prstGeom prst="rect">
+            <a:avLst/>
+          </a:prstGeom>
+          <a:solidFill>
+            <a:srgbClr val="FFD000"/>
+          </a:solidFill>
+          <a:ln>
+            <a:noFill/>
+          </a:ln>
+        </p:spPr>
+        <p:style>
+          <a:lnRef idx="1">
+            <a:schemeClr val="accent1"/>
+          </a:lnRef>
+          <a:fillRef idx="3">
+            <a:schemeClr val="accent1"/>
+          </a:fillRef>
+          <a:effectRef idx="2">
+            <a:schemeClr val="accent1"/>
+          </a:effectRef>
+          <a:fontRef idx="minor">
+            <a:schemeClr val="lt1"/>
+          </a:fontRef>
+        </p:style>
+        <p:txBody>
+          <a:bodyPr rtlCol="0" anchor="ctr"/>
+          <a:lstStyle/>
+          <a:p>
+            <a:pPr algn="ctr"/>
+          </a:p>
+        </p:txBody>
+      </p:sp>
+      <p:pic>
+        <p:nvPicPr>
+          <p:cNvPr id="19" name="Picture 18" descr="mermaid.png"/>
+          <p:cNvPicPr>
+            <a:picLocks noChangeAspect="1"/>
+          </p:cNvPicPr>
+          <p:nvPr/>
+        </p:nvPicPr>
+        <p:blipFill>
+          <a:blip r:embed="rId4"/>
+          <a:stretch>
+            <a:fillRect/>
+          </a:stretch>
+        </p:blipFill>
+        <p:spPr>
+          <a:xfrm>
+            <a:off x="9311640" y="1847087"/>
+            <a:ext cx="1220724" cy="1220724"/>
+          </a:xfrm>
+          <a:prstGeom prst="rect">
+            <a:avLst/>
+          </a:prstGeom>
+        </p:spPr>
+      </p:pic>
+      <p:sp>
+        <p:nvSpPr>
+          <p:cNvPr id="20" name="TextBox 19"/>
+          <p:cNvSpPr txBox="1"/>
+          <p:nvPr/>
+        </p:nvSpPr>
+        <p:spPr>
+          <a:xfrm>
+            <a:off x="8182660" y="3159251"/>
+            <a:ext cx="3478682" cy="621792"/>
+          </a:xfrm>
+          <a:prstGeom prst="rect">
+            <a:avLst/>
+          </a:prstGeom>
+          <a:noFill/>
+        </p:spPr>
+        <p:txBody>
+          <a:bodyPr wrap="square" anchor="t"/>
+          <a:lstStyle/>
+          <a:p>
+            <a:pPr algn="ctr"/>
+            <a:r>
+              <a:rPr sz="1300" b="1" i="0">
+                <a:solidFill>
+                  <a:srgbClr val="095292"/>
+                </a:solidFill>
+                <a:latin typeface="Calibri"/>
+              </a:rPr>
+              <a:t>Mermaid</a:t>
+            </a:r>
+          </a:p>
+          <a:p>
+            <a:pPr algn="ctr">
+              <a:spcBef>
+                <a:spcPts val="200"/>
+              </a:spcBef>
             </a:pPr>
             <a:r>
-              <a:rPr sz="2000" b="0" i="0">
-                <a:solidFill>
-                  <a:srgbClr val="333333"/>
-                </a:solidFill>
-                <a:latin typeface="Calibri"/>
-              </a:rPr>
-              <a:t>–   Todo lo que construyan hoy entra al </a:t>
-            </a:r>
-            <a:r>
-              <a:rPr sz="2000" b="1" i="0">
-                <a:solidFill>
-                  <a:srgbClr val="333333"/>
-                </a:solidFill>
-                <a:latin typeface="Calibri"/>
-              </a:rPr>
-              <a:t>informe/repo del PI</a:t>
-            </a:r>
-            <a:r>
-              <a:rPr sz="2000" b="0" i="0">
-                <a:solidFill>
-                  <a:srgbClr val="333333"/>
-                </a:solidFill>
-                <a:latin typeface="Calibri"/>
-              </a:rPr>
-              <a:t> (no es lab suelto).</a:t>
-            </a:r>
-          </a:p>
-          <a:p>
-            <a:pPr>
-              <a:spcAft>
-                <a:spcPts val="800"/>
-              </a:spcAft>
+              <a:rPr sz="1000" b="0" i="0">
+                <a:solidFill>
+                  <a:srgbClr val="666666"/>
+                </a:solidFill>
+                <a:latin typeface="Calibri"/>
+              </a:rPr>
+              <a:t>Codigo del diagrama</a:t>
+            </a:r>
+          </a:p>
+        </p:txBody>
+      </p:sp>
+      <p:sp>
+        <p:nvSpPr>
+          <p:cNvPr id="21" name="Rounded Rectangle 20"/>
+          <p:cNvSpPr/>
+          <p:nvPr/>
+        </p:nvSpPr>
+        <p:spPr>
+          <a:xfrm>
+            <a:off x="4283354" y="4055364"/>
+            <a:ext cx="3624986" cy="2299716"/>
+          </a:xfrm>
+          <a:prstGeom prst="roundRect">
+            <a:avLst>
+              <a:gd name="adj" fmla="val 12000"/>
+            </a:avLst>
+          </a:prstGeom>
+          <a:solidFill>
+            <a:srgbClr val="F2F2F2"/>
+          </a:solidFill>
+          <a:ln>
+            <a:noFill/>
+          </a:ln>
+        </p:spPr>
+        <p:style>
+          <a:lnRef idx="1">
+            <a:schemeClr val="accent1"/>
+          </a:lnRef>
+          <a:fillRef idx="3">
+            <a:schemeClr val="accent1"/>
+          </a:fillRef>
+          <a:effectRef idx="2">
+            <a:schemeClr val="accent1"/>
+          </a:effectRef>
+          <a:fontRef idx="minor">
+            <a:schemeClr val="lt1"/>
+          </a:fontRef>
+        </p:style>
+        <p:txBody>
+          <a:bodyPr rtlCol="0" anchor="ctr"/>
+          <a:lstStyle/>
+          <a:p>
+            <a:pPr algn="ctr"/>
+          </a:p>
+        </p:txBody>
+      </p:sp>
+      <p:sp>
+        <p:nvSpPr>
+          <p:cNvPr id="22" name="Rectangle 21"/>
+          <p:cNvSpPr/>
+          <p:nvPr/>
+        </p:nvSpPr>
+        <p:spPr>
+          <a:xfrm>
+            <a:off x="4283354" y="4055364"/>
+            <a:ext cx="3624986" cy="64008"/>
+          </a:xfrm>
+          <a:prstGeom prst="rect">
+            <a:avLst/>
+          </a:prstGeom>
+          <a:solidFill>
+            <a:srgbClr val="095292"/>
+          </a:solidFill>
+          <a:ln>
+            <a:noFill/>
+          </a:ln>
+        </p:spPr>
+        <p:style>
+          <a:lnRef idx="1">
+            <a:schemeClr val="accent1"/>
+          </a:lnRef>
+          <a:fillRef idx="3">
+            <a:schemeClr val="accent1"/>
+          </a:fillRef>
+          <a:effectRef idx="2">
+            <a:schemeClr val="accent1"/>
+          </a:effectRef>
+          <a:fontRef idx="minor">
+            <a:schemeClr val="lt1"/>
+          </a:fontRef>
+        </p:style>
+        <p:txBody>
+          <a:bodyPr rtlCol="0" anchor="ctr"/>
+          <a:lstStyle/>
+          <a:p>
+            <a:pPr algn="ctr"/>
+          </a:p>
+        </p:txBody>
+      </p:sp>
+      <p:sp>
+        <p:nvSpPr>
+          <p:cNvPr id="23" name="Rectangle 22"/>
+          <p:cNvSpPr/>
+          <p:nvPr/>
+        </p:nvSpPr>
+        <p:spPr>
+          <a:xfrm>
+            <a:off x="4283354" y="4119372"/>
+            <a:ext cx="3624986" cy="27432"/>
+          </a:xfrm>
+          <a:prstGeom prst="rect">
+            <a:avLst/>
+          </a:prstGeom>
+          <a:solidFill>
+            <a:srgbClr val="FFD000"/>
+          </a:solidFill>
+          <a:ln>
+            <a:noFill/>
+          </a:ln>
+        </p:spPr>
+        <p:style>
+          <a:lnRef idx="1">
+            <a:schemeClr val="accent1"/>
+          </a:lnRef>
+          <a:fillRef idx="3">
+            <a:schemeClr val="accent1"/>
+          </a:fillRef>
+          <a:effectRef idx="2">
+            <a:schemeClr val="accent1"/>
+          </a:effectRef>
+          <a:fontRef idx="minor">
+            <a:schemeClr val="lt1"/>
+          </a:fontRef>
+        </p:style>
+        <p:txBody>
+          <a:bodyPr rtlCol="0" anchor="ctr"/>
+          <a:lstStyle/>
+          <a:p>
+            <a:pPr algn="ctr"/>
+          </a:p>
+        </p:txBody>
+      </p:sp>
+      <p:pic>
+        <p:nvPicPr>
+          <p:cNvPr id="24" name="Picture 23" descr="examlab.png"/>
+          <p:cNvPicPr>
+            <a:picLocks noChangeAspect="1"/>
+          </p:cNvPicPr>
+          <p:nvPr/>
+        </p:nvPicPr>
+        <p:blipFill>
+          <a:blip r:embed="rId5"/>
+          <a:stretch>
+            <a:fillRect/>
+          </a:stretch>
+        </p:blipFill>
+        <p:spPr>
+          <a:xfrm>
+            <a:off x="5485485" y="4311396"/>
+            <a:ext cx="1220724" cy="1220724"/>
+          </a:xfrm>
+          <a:prstGeom prst="rect">
+            <a:avLst/>
+          </a:prstGeom>
+        </p:spPr>
+      </p:pic>
+      <p:sp>
+        <p:nvSpPr>
+          <p:cNvPr id="25" name="TextBox 24"/>
+          <p:cNvSpPr txBox="1"/>
+          <p:nvPr/>
+        </p:nvSpPr>
+        <p:spPr>
+          <a:xfrm>
+            <a:off x="4356506" y="5623560"/>
+            <a:ext cx="3478682" cy="621792"/>
+          </a:xfrm>
+          <a:prstGeom prst="rect">
+            <a:avLst/>
+          </a:prstGeom>
+          <a:noFill/>
+        </p:spPr>
+        <p:txBody>
+          <a:bodyPr wrap="square" anchor="t"/>
+          <a:lstStyle/>
+          <a:p>
+            <a:pPr algn="ctr"/>
+            <a:r>
+              <a:rPr sz="1300" b="1" i="0">
+                <a:solidFill>
+                  <a:srgbClr val="095292"/>
+                </a:solidFill>
+                <a:latin typeface="Calibri"/>
+              </a:rPr>
+              <a:t>la plataforma del curso</a:t>
+            </a:r>
+          </a:p>
+          <a:p>
+            <a:pPr algn="ctr">
+              <a:spcBef>
+                <a:spcPts val="200"/>
+              </a:spcBef>
             </a:pPr>
             <a:r>
-              <a:rPr sz="2000" b="0" i="0">
-                <a:solidFill>
-                  <a:srgbClr val="333333"/>
-                </a:solidFill>
-                <a:latin typeface="Calibri"/>
-              </a:rPr>
-              <a:t>–   Individual por defecto · el docente puede autorizar equipos de 2–3; la entrega en la plataforma del curso siempre es individual.</a:t>
-            </a:r>
-          </a:p>
-        </p:txBody>
-      </p:sp>
-      <p:sp>
-        <p:nvSpPr>
-          <p:cNvPr id="6" name="TextBox 5"/>
+              <a:rPr sz="1000" b="0" i="0">
+                <a:solidFill>
+                  <a:srgbClr val="666666"/>
+                </a:solidFill>
+                <a:latin typeface="Calibri"/>
+              </a:rPr>
+              <a:t>Donde se entrega</a:t>
+            </a:r>
+          </a:p>
+        </p:txBody>
+      </p:sp>
+      <p:sp>
+        <p:nvSpPr>
+          <p:cNvPr id="26" name="TextBox 25"/>
           <p:cNvSpPr txBox="1"/>
           <p:nvPr/>
         </p:nvSpPr>
@@ -10391,7 +10277,7 @@
         <p:spPr>
           <a:xfrm>
             <a:off x="0" y="0"/>
-            <a:ext cx="12191695" cy="960120"/>
+            <a:ext cx="12191695" cy="1170432"/>
           </a:xfrm>
           <a:prstGeom prst="rect">
             <a:avLst/>
@@ -10433,7 +10319,7 @@
         </p:nvSpPr>
         <p:spPr>
           <a:xfrm>
-            <a:off x="0" y="960120"/>
+            <a:off x="0" y="1170432"/>
             <a:ext cx="12191695" cy="41148"/>
           </a:xfrm>
           <a:prstGeom prst="rect">
@@ -10477,7 +10363,7 @@
         <p:spPr>
           <a:xfrm>
             <a:off x="457200" y="164592"/>
-            <a:ext cx="11277295" cy="502920"/>
+            <a:ext cx="11277295" cy="384048"/>
           </a:xfrm>
           <a:prstGeom prst="rect">
             <a:avLst/>
@@ -10497,7 +10383,7 @@
                 </a:solidFill>
                 <a:latin typeface="Calibri"/>
               </a:rPr>
-              <a:t>Manos a la obra (paso a paso)</a:t>
+              <a:t>Del boceto a la plataforma del curso (diagrama)</a:t>
             </a:r>
           </a:p>
         </p:txBody>
@@ -10510,8 +10396,8 @@
         </p:nvSpPr>
         <p:spPr>
           <a:xfrm>
-            <a:off x="457200" y="1170432"/>
-            <a:ext cx="11277295" cy="5230368"/>
+            <a:off x="457200" y="566928"/>
+            <a:ext cx="11277295" cy="411480"/>
           </a:xfrm>
           <a:prstGeom prst="rect">
             <a:avLst/>
@@ -10524,171 +10410,705 @@
           </a:bodyPr>
           <a:lstStyle/>
           <a:p>
+            <a:r>
+              <a:rPr sz="1400" b="0" i="0">
+                <a:solidFill>
+                  <a:srgbClr val="B8D8EE"/>
+                </a:solidFill>
+                <a:latin typeface="Calibri"/>
+              </a:rPr>
+              <a:t>El diagrama se entrega como código Mermaid dentro de la plataforma del curso, no como imagen</a:t>
+            </a:r>
+          </a:p>
+        </p:txBody>
+      </p:sp>
+      <p:sp>
+        <p:nvSpPr>
+          <p:cNvPr id="6" name="Rounded Rectangle 5"/>
+          <p:cNvSpPr/>
+          <p:nvPr/>
+        </p:nvSpPr>
+        <p:spPr>
+          <a:xfrm>
+            <a:off x="457200" y="1659636"/>
+            <a:ext cx="11277295" cy="1051560"/>
+          </a:xfrm>
+          <a:prstGeom prst="roundRect">
+            <a:avLst>
+              <a:gd name="adj" fmla="val 12000"/>
+            </a:avLst>
+          </a:prstGeom>
+          <a:solidFill>
+            <a:srgbClr val="F2F2F2"/>
+          </a:solidFill>
+          <a:ln>
+            <a:noFill/>
+          </a:ln>
+        </p:spPr>
+        <p:style>
+          <a:lnRef idx="1">
+            <a:schemeClr val="accent1"/>
+          </a:lnRef>
+          <a:fillRef idx="3">
+            <a:schemeClr val="accent1"/>
+          </a:fillRef>
+          <a:effectRef idx="2">
+            <a:schemeClr val="accent1"/>
+          </a:effectRef>
+          <a:fontRef idx="minor">
+            <a:schemeClr val="lt1"/>
+          </a:fontRef>
+        </p:style>
+        <p:txBody>
+          <a:bodyPr rtlCol="0" anchor="ctr"/>
+          <a:lstStyle/>
+          <a:p>
+            <a:pPr algn="ctr"/>
+          </a:p>
+        </p:txBody>
+      </p:sp>
+      <p:sp>
+        <p:nvSpPr>
+          <p:cNvPr id="7" name="Rounded Rectangle 6"/>
+          <p:cNvSpPr/>
+          <p:nvPr/>
+        </p:nvSpPr>
+        <p:spPr>
+          <a:xfrm>
+            <a:off x="594360" y="1965960"/>
+            <a:ext cx="438912" cy="438912"/>
+          </a:xfrm>
+          <a:prstGeom prst="roundRect">
+            <a:avLst>
+              <a:gd name="adj" fmla="val 12000"/>
+            </a:avLst>
+          </a:prstGeom>
+          <a:solidFill>
+            <a:srgbClr val="095292"/>
+          </a:solidFill>
+          <a:ln>
+            <a:noFill/>
+          </a:ln>
+        </p:spPr>
+        <p:style>
+          <a:lnRef idx="1">
+            <a:schemeClr val="accent1"/>
+          </a:lnRef>
+          <a:fillRef idx="3">
+            <a:schemeClr val="accent1"/>
+          </a:fillRef>
+          <a:effectRef idx="2">
+            <a:schemeClr val="accent1"/>
+          </a:effectRef>
+          <a:fontRef idx="minor">
+            <a:schemeClr val="lt1"/>
+          </a:fontRef>
+        </p:style>
+        <p:txBody>
+          <a:bodyPr rtlCol="0" anchor="ctr"/>
+          <a:lstStyle/>
+          <a:p>
+            <a:pPr algn="ctr"/>
+          </a:p>
+        </p:txBody>
+      </p:sp>
+      <p:sp>
+        <p:nvSpPr>
+          <p:cNvPr id="8" name="TextBox 7"/>
+          <p:cNvSpPr txBox="1"/>
+          <p:nvPr/>
+        </p:nvSpPr>
+        <p:spPr>
+          <a:xfrm>
+            <a:off x="594360" y="1965960"/>
+            <a:ext cx="438912" cy="438912"/>
+          </a:xfrm>
+          <a:prstGeom prst="rect">
+            <a:avLst/>
+          </a:prstGeom>
+          <a:noFill/>
+        </p:spPr>
+        <p:txBody>
+          <a:bodyPr wrap="square" anchor="ctr"/>
+          <a:lstStyle/>
+          <a:p>
+            <a:pPr algn="ctr"/>
+            <a:r>
+              <a:rPr sz="1600" b="1" i="0">
+                <a:solidFill>
+                  <a:srgbClr val="FFFFFF"/>
+                </a:solidFill>
+                <a:latin typeface="Calibri"/>
+              </a:rPr>
+              <a:t>1</a:t>
+            </a:r>
+          </a:p>
+        </p:txBody>
+      </p:sp>
+      <p:sp>
+        <p:nvSpPr>
+          <p:cNvPr id="9" name="TextBox 8"/>
+          <p:cNvSpPr txBox="1"/>
+          <p:nvPr/>
+        </p:nvSpPr>
+        <p:spPr>
+          <a:xfrm>
+            <a:off x="1188720" y="1751076"/>
+            <a:ext cx="10271455" cy="886968"/>
+          </a:xfrm>
+          <a:prstGeom prst="rect">
+            <a:avLst/>
+          </a:prstGeom>
+          <a:noFill/>
+        </p:spPr>
+        <p:txBody>
+          <a:bodyPr wrap="square" anchor="ctr"/>
+          <a:lstStyle/>
+          <a:p>
+            <a:r>
+              <a:rPr sz="1500" b="1" i="0">
+                <a:solidFill>
+                  <a:srgbClr val="095292"/>
+                </a:solidFill>
+                <a:latin typeface="Calibri"/>
+              </a:rPr>
+              <a:t>Disena visual</a:t>
+            </a:r>
+          </a:p>
+          <a:p>
             <a:pPr>
-              <a:spcAft>
-                <a:spcPts val="800"/>
-              </a:spcAft>
+              <a:spcBef>
+                <a:spcPts val="200"/>
+              </a:spcBef>
             </a:pPr>
             <a:r>
+              <a:rPr sz="1300" b="0" i="0">
+                <a:solidFill>
+                  <a:srgbClr val="333333"/>
+                </a:solidFill>
+                <a:latin typeface="Calibri"/>
+              </a:rPr>
+              <a:t>Dibuja el diagrama como quieras en Excalidraw o draw.io: es mas rapido arrastrar cajas que escribir codigo, y ahi es donde piensas el modelo.</a:t>
+            </a:r>
+          </a:p>
+        </p:txBody>
+      </p:sp>
+      <p:sp>
+        <p:nvSpPr>
+          <p:cNvPr id="10" name="Rounded Rectangle 9"/>
+          <p:cNvSpPr/>
+          <p:nvPr/>
+        </p:nvSpPr>
+        <p:spPr>
+          <a:xfrm>
+            <a:off x="457200" y="2802636"/>
+            <a:ext cx="11277295" cy="1051560"/>
+          </a:xfrm>
+          <a:prstGeom prst="roundRect">
+            <a:avLst>
+              <a:gd name="adj" fmla="val 12000"/>
+            </a:avLst>
+          </a:prstGeom>
+          <a:solidFill>
+            <a:srgbClr val="E8F4FA"/>
+          </a:solidFill>
+          <a:ln>
+            <a:noFill/>
+          </a:ln>
+        </p:spPr>
+        <p:style>
+          <a:lnRef idx="1">
+            <a:schemeClr val="accent1"/>
+          </a:lnRef>
+          <a:fillRef idx="3">
+            <a:schemeClr val="accent1"/>
+          </a:fillRef>
+          <a:effectRef idx="2">
+            <a:schemeClr val="accent1"/>
+          </a:effectRef>
+          <a:fontRef idx="minor">
+            <a:schemeClr val="lt1"/>
+          </a:fontRef>
+        </p:style>
+        <p:txBody>
+          <a:bodyPr rtlCol="0" anchor="ctr"/>
+          <a:lstStyle/>
+          <a:p>
+            <a:pPr algn="ctr"/>
+          </a:p>
+        </p:txBody>
+      </p:sp>
+      <p:sp>
+        <p:nvSpPr>
+          <p:cNvPr id="11" name="Rounded Rectangle 10"/>
+          <p:cNvSpPr/>
+          <p:nvPr/>
+        </p:nvSpPr>
+        <p:spPr>
+          <a:xfrm>
+            <a:off x="594360" y="3108960"/>
+            <a:ext cx="438912" cy="438912"/>
+          </a:xfrm>
+          <a:prstGeom prst="roundRect">
+            <a:avLst>
+              <a:gd name="adj" fmla="val 12000"/>
+            </a:avLst>
+          </a:prstGeom>
+          <a:solidFill>
+            <a:srgbClr val="095292"/>
+          </a:solidFill>
+          <a:ln>
+            <a:noFill/>
+          </a:ln>
+        </p:spPr>
+        <p:style>
+          <a:lnRef idx="1">
+            <a:schemeClr val="accent1"/>
+          </a:lnRef>
+          <a:fillRef idx="3">
+            <a:schemeClr val="accent1"/>
+          </a:fillRef>
+          <a:effectRef idx="2">
+            <a:schemeClr val="accent1"/>
+          </a:effectRef>
+          <a:fontRef idx="minor">
+            <a:schemeClr val="lt1"/>
+          </a:fontRef>
+        </p:style>
+        <p:txBody>
+          <a:bodyPr rtlCol="0" anchor="ctr"/>
+          <a:lstStyle/>
+          <a:p>
+            <a:pPr algn="ctr"/>
+          </a:p>
+        </p:txBody>
+      </p:sp>
+      <p:sp>
+        <p:nvSpPr>
+          <p:cNvPr id="12" name="TextBox 11"/>
+          <p:cNvSpPr txBox="1"/>
+          <p:nvPr/>
+        </p:nvSpPr>
+        <p:spPr>
+          <a:xfrm>
+            <a:off x="594360" y="3108960"/>
+            <a:ext cx="438912" cy="438912"/>
+          </a:xfrm>
+          <a:prstGeom prst="rect">
+            <a:avLst/>
+          </a:prstGeom>
+          <a:noFill/>
+        </p:spPr>
+        <p:txBody>
+          <a:bodyPr wrap="square" anchor="ctr"/>
+          <a:lstStyle/>
+          <a:p>
+            <a:pPr algn="ctr"/>
+            <a:r>
               <a:rPr sz="1600" b="1" i="0">
                 <a:solidFill>
+                  <a:srgbClr val="FFFFFF"/>
+                </a:solidFill>
+                <a:latin typeface="Calibri"/>
+              </a:rPr>
+              <a:t>2</a:t>
+            </a:r>
+          </a:p>
+        </p:txBody>
+      </p:sp>
+      <p:sp>
+        <p:nvSpPr>
+          <p:cNvPr id="13" name="TextBox 12"/>
+          <p:cNvSpPr txBox="1"/>
+          <p:nvPr/>
+        </p:nvSpPr>
+        <p:spPr>
+          <a:xfrm>
+            <a:off x="1188720" y="2894076"/>
+            <a:ext cx="10271455" cy="886968"/>
+          </a:xfrm>
+          <a:prstGeom prst="rect">
+            <a:avLst/>
+          </a:prstGeom>
+          <a:noFill/>
+        </p:spPr>
+        <p:txBody>
+          <a:bodyPr wrap="square" anchor="ctr"/>
+          <a:lstStyle/>
+          <a:p>
+            <a:r>
+              <a:rPr sz="1500" b="1" i="0">
+                <a:solidFill>
+                  <a:srgbClr val="095292"/>
+                </a:solidFill>
+                <a:latin typeface="Calibri"/>
+              </a:rPr>
+              <a:t>Traduce con IA</a:t>
+            </a:r>
+          </a:p>
+          <a:p>
+            <a:pPr>
+              <a:spcBef>
+                <a:spcPts val="200"/>
+              </a:spcBef>
+            </a:pPr>
+            <a:r>
+              <a:rPr sz="1300" b="0" i="0">
+                <a:solidFill>
                   <a:srgbClr val="333333"/>
                 </a:solidFill>
                 <a:latin typeface="Calibri"/>
               </a:rPr>
-              <a:t>1.</a:t>
-            </a:r>
-            <a:r>
-              <a:rPr sz="1600" b="0" i="0">
+              <a:t>Copia o describe tu boceto a una IA y pidele el codigo Mermaid: «convierte este diagrama a Mermaid usando sequenceDiagram». Revisa el resultado: la IA acierta la sintaxis, no tu modelo.</a:t>
+            </a:r>
+          </a:p>
+        </p:txBody>
+      </p:sp>
+      <p:sp>
+        <p:nvSpPr>
+          <p:cNvPr id="14" name="Rounded Rectangle 13"/>
+          <p:cNvSpPr/>
+          <p:nvPr/>
+        </p:nvSpPr>
+        <p:spPr>
+          <a:xfrm>
+            <a:off x="457200" y="3945636"/>
+            <a:ext cx="11277295" cy="1051560"/>
+          </a:xfrm>
+          <a:prstGeom prst="roundRect">
+            <a:avLst>
+              <a:gd name="adj" fmla="val 12000"/>
+            </a:avLst>
+          </a:prstGeom>
+          <a:solidFill>
+            <a:srgbClr val="F2F2F2"/>
+          </a:solidFill>
+          <a:ln>
+            <a:noFill/>
+          </a:ln>
+        </p:spPr>
+        <p:style>
+          <a:lnRef idx="1">
+            <a:schemeClr val="accent1"/>
+          </a:lnRef>
+          <a:fillRef idx="3">
+            <a:schemeClr val="accent1"/>
+          </a:fillRef>
+          <a:effectRef idx="2">
+            <a:schemeClr val="accent1"/>
+          </a:effectRef>
+          <a:fontRef idx="minor">
+            <a:schemeClr val="lt1"/>
+          </a:fontRef>
+        </p:style>
+        <p:txBody>
+          <a:bodyPr rtlCol="0" anchor="ctr"/>
+          <a:lstStyle/>
+          <a:p>
+            <a:pPr algn="ctr"/>
+          </a:p>
+        </p:txBody>
+      </p:sp>
+      <p:sp>
+        <p:nvSpPr>
+          <p:cNvPr id="15" name="Rounded Rectangle 14"/>
+          <p:cNvSpPr/>
+          <p:nvPr/>
+        </p:nvSpPr>
+        <p:spPr>
+          <a:xfrm>
+            <a:off x="594360" y="4251960"/>
+            <a:ext cx="438912" cy="438912"/>
+          </a:xfrm>
+          <a:prstGeom prst="roundRect">
+            <a:avLst>
+              <a:gd name="adj" fmla="val 12000"/>
+            </a:avLst>
+          </a:prstGeom>
+          <a:solidFill>
+            <a:srgbClr val="095292"/>
+          </a:solidFill>
+          <a:ln>
+            <a:noFill/>
+          </a:ln>
+        </p:spPr>
+        <p:style>
+          <a:lnRef idx="1">
+            <a:schemeClr val="accent1"/>
+          </a:lnRef>
+          <a:fillRef idx="3">
+            <a:schemeClr val="accent1"/>
+          </a:fillRef>
+          <a:effectRef idx="2">
+            <a:schemeClr val="accent1"/>
+          </a:effectRef>
+          <a:fontRef idx="minor">
+            <a:schemeClr val="lt1"/>
+          </a:fontRef>
+        </p:style>
+        <p:txBody>
+          <a:bodyPr rtlCol="0" anchor="ctr"/>
+          <a:lstStyle/>
+          <a:p>
+            <a:pPr algn="ctr"/>
+          </a:p>
+        </p:txBody>
+      </p:sp>
+      <p:sp>
+        <p:nvSpPr>
+          <p:cNvPr id="16" name="TextBox 15"/>
+          <p:cNvSpPr txBox="1"/>
+          <p:nvPr/>
+        </p:nvSpPr>
+        <p:spPr>
+          <a:xfrm>
+            <a:off x="594360" y="4251960"/>
+            <a:ext cx="438912" cy="438912"/>
+          </a:xfrm>
+          <a:prstGeom prst="rect">
+            <a:avLst/>
+          </a:prstGeom>
+          <a:noFill/>
+        </p:spPr>
+        <p:txBody>
+          <a:bodyPr wrap="square" anchor="ctr"/>
+          <a:lstStyle/>
+          <a:p>
+            <a:pPr algn="ctr"/>
+            <a:r>
+              <a:rPr sz="1600" b="1" i="0">
+                <a:solidFill>
+                  <a:srgbClr val="FFFFFF"/>
+                </a:solidFill>
+                <a:latin typeface="Calibri"/>
+              </a:rPr>
+              <a:t>3</a:t>
+            </a:r>
+          </a:p>
+        </p:txBody>
+      </p:sp>
+      <p:sp>
+        <p:nvSpPr>
+          <p:cNvPr id="17" name="TextBox 16"/>
+          <p:cNvSpPr txBox="1"/>
+          <p:nvPr/>
+        </p:nvSpPr>
+        <p:spPr>
+          <a:xfrm>
+            <a:off x="1188720" y="4037076"/>
+            <a:ext cx="10271455" cy="886968"/>
+          </a:xfrm>
+          <a:prstGeom prst="rect">
+            <a:avLst/>
+          </a:prstGeom>
+          <a:noFill/>
+        </p:spPr>
+        <p:txBody>
+          <a:bodyPr wrap="square" anchor="ctr"/>
+          <a:lstStyle/>
+          <a:p>
+            <a:r>
+              <a:rPr sz="1500" b="1" i="0">
+                <a:solidFill>
+                  <a:srgbClr val="095292"/>
+                </a:solidFill>
+                <a:latin typeface="Calibri"/>
+              </a:rPr>
+              <a:t>Pega y renderiza en la plataforma del curso</a:t>
+            </a:r>
+          </a:p>
+          <a:p>
+            <a:pPr>
+              <a:spcBef>
+                <a:spcPts val="200"/>
+              </a:spcBef>
+            </a:pPr>
+            <a:r>
+              <a:rPr sz="1300" b="0" i="0">
                 <a:solidFill>
                   <a:srgbClr val="333333"/>
                 </a:solidFill>
                 <a:latin typeface="Calibri"/>
               </a:rPr>
-              <a:t> Paso 1: describan el escenario de carga del pico real de su dominio con los 6 datos obligatorios (evento del pico, usuarios concurrentes, peticiones por segundo, mezcla de operaciones en porcentajes que sumen 100, duracion de la ventana y volumen de datos de partida), verificando que la mezcla sume exactamente 100 por ciento y que el pico corresponda a una fecha real del calendario de su dominio.</a:t>
+              <a:t>Pega ese codigo en la caja de texto de la pregunta y mira como lo dibuja la plataforma. Si no renderiza, corrige ahi mismo: lo que se califica es el diagrama renderizado dentro de la plataforma del curso.</a:t>
+            </a:r>
+          </a:p>
+        </p:txBody>
+      </p:sp>
+      <p:sp>
+        <p:nvSpPr>
+          <p:cNvPr id="18" name="Rounded Rectangle 17"/>
+          <p:cNvSpPr/>
+          <p:nvPr/>
+        </p:nvSpPr>
+        <p:spPr>
+          <a:xfrm>
+            <a:off x="457200" y="5088636"/>
+            <a:ext cx="11277295" cy="1051560"/>
+          </a:xfrm>
+          <a:prstGeom prst="roundRect">
+            <a:avLst>
+              <a:gd name="adj" fmla="val 12000"/>
+            </a:avLst>
+          </a:prstGeom>
+          <a:solidFill>
+            <a:srgbClr val="E8F4FA"/>
+          </a:solidFill>
+          <a:ln>
+            <a:noFill/>
+          </a:ln>
+        </p:spPr>
+        <p:style>
+          <a:lnRef idx="1">
+            <a:schemeClr val="accent1"/>
+          </a:lnRef>
+          <a:fillRef idx="3">
+            <a:schemeClr val="accent1"/>
+          </a:fillRef>
+          <a:effectRef idx="2">
+            <a:schemeClr val="accent1"/>
+          </a:effectRef>
+          <a:fontRef idx="minor">
+            <a:schemeClr val="lt1"/>
+          </a:fontRef>
+        </p:style>
+        <p:txBody>
+          <a:bodyPr rtlCol="0" anchor="ctr"/>
+          <a:lstStyle/>
+          <a:p>
+            <a:pPr algn="ctr"/>
+          </a:p>
+        </p:txBody>
+      </p:sp>
+      <p:sp>
+        <p:nvSpPr>
+          <p:cNvPr id="19" name="Rounded Rectangle 18"/>
+          <p:cNvSpPr/>
+          <p:nvPr/>
+        </p:nvSpPr>
+        <p:spPr>
+          <a:xfrm>
+            <a:off x="594360" y="5394960"/>
+            <a:ext cx="438912" cy="438912"/>
+          </a:xfrm>
+          <a:prstGeom prst="roundRect">
+            <a:avLst>
+              <a:gd name="adj" fmla="val 12000"/>
+            </a:avLst>
+          </a:prstGeom>
+          <a:solidFill>
+            <a:srgbClr val="095292"/>
+          </a:solidFill>
+          <a:ln>
+            <a:noFill/>
+          </a:ln>
+        </p:spPr>
+        <p:style>
+          <a:lnRef idx="1">
+            <a:schemeClr val="accent1"/>
+          </a:lnRef>
+          <a:fillRef idx="3">
+            <a:schemeClr val="accent1"/>
+          </a:fillRef>
+          <a:effectRef idx="2">
+            <a:schemeClr val="accent1"/>
+          </a:effectRef>
+          <a:fontRef idx="minor">
+            <a:schemeClr val="lt1"/>
+          </a:fontRef>
+        </p:style>
+        <p:txBody>
+          <a:bodyPr rtlCol="0" anchor="ctr"/>
+          <a:lstStyle/>
+          <a:p>
+            <a:pPr algn="ctr"/>
+          </a:p>
+        </p:txBody>
+      </p:sp>
+      <p:sp>
+        <p:nvSpPr>
+          <p:cNvPr id="20" name="TextBox 19"/>
+          <p:cNvSpPr txBox="1"/>
+          <p:nvPr/>
+        </p:nvSpPr>
+        <p:spPr>
+          <a:xfrm>
+            <a:off x="594360" y="5394960"/>
+            <a:ext cx="438912" cy="438912"/>
+          </a:xfrm>
+          <a:prstGeom prst="rect">
+            <a:avLst/>
+          </a:prstGeom>
+          <a:noFill/>
+        </p:spPr>
+        <p:txBody>
+          <a:bodyPr wrap="square" anchor="ctr"/>
+          <a:lstStyle/>
+          <a:p>
+            <a:pPr algn="ctr"/>
+            <a:r>
+              <a:rPr sz="1600" b="1" i="0">
+                <a:solidFill>
+                  <a:srgbClr val="FFFFFF"/>
+                </a:solidFill>
+                <a:latin typeface="Calibri"/>
+              </a:rPr>
+              <a:t>4</a:t>
+            </a:r>
+          </a:p>
+        </p:txBody>
+      </p:sp>
+      <p:sp>
+        <p:nvSpPr>
+          <p:cNvPr id="21" name="TextBox 20"/>
+          <p:cNvSpPr txBox="1"/>
+          <p:nvPr/>
+        </p:nvSpPr>
+        <p:spPr>
+          <a:xfrm>
+            <a:off x="1188720" y="5180076"/>
+            <a:ext cx="10271455" cy="886968"/>
+          </a:xfrm>
+          <a:prstGeom prst="rect">
+            <a:avLst/>
+          </a:prstGeom>
+          <a:noFill/>
+        </p:spPr>
+        <p:txBody>
+          <a:bodyPr wrap="square" anchor="ctr"/>
+          <a:lstStyle/>
+          <a:p>
+            <a:r>
+              <a:rPr sz="1500" b="1" i="0">
+                <a:solidFill>
+                  <a:srgbClr val="095292"/>
+                </a:solidFill>
+                <a:latin typeface="Calibri"/>
+              </a:rPr>
+              <a:t>Guarda el PNG para tu PI</a:t>
             </a:r>
           </a:p>
           <a:p>
             <a:pPr>
-              <a:spcAft>
-                <a:spcPts val="800"/>
-              </a:spcAft>
+              <a:spcBef>
+                <a:spcPts val="200"/>
+              </a:spcBef>
             </a:pPr>
             <a:r>
-              <a:rPr sz="1600" b="0" i="0">
+              <a:rPr sz="1300" b="0" i="0">
                 <a:solidFill>
                   <a:srgbClr val="333333"/>
                 </a:solidFill>
                 <a:latin typeface="Calibri"/>
               </a:rPr>
-              <a:t>–   </a:t>
-            </a:r>
-            <a:r>
-              <a:rPr sz="1600" b="1" i="0">
-                <a:solidFill>
-                  <a:srgbClr val="333333"/>
-                </a:solidFill>
-                <a:latin typeface="Calibri"/>
-              </a:rPr>
-              <a:t>2.</a:t>
-            </a:r>
-            <a:r>
-              <a:rPr sz="1600" b="0" i="0">
-                <a:solidFill>
-                  <a:srgbClr val="333333"/>
-                </a:solidFill>
-                <a:latin typeface="Calibri"/>
-              </a:rPr>
-              <a:t> Paso 2: definan las 3 metricas objetivo en una tabla de 4 columnas con numero, ventana de medicion, forma de medirla y consecuencia de incumplirla, verificando que cada objetivo tenga un numero y una ventana (por ejemplo p95 por debajo de 800 ms en 5 minutos) y que ninguna diga rapido o aceptable sin cifra.</a:t>
-            </a:r>
-          </a:p>
-          <a:p>
-            <a:pPr>
-              <a:spcAft>
-                <a:spcPts val="800"/>
-              </a:spcAft>
-            </a:pPr>
-            <a:r>
-              <a:rPr sz="1600" b="0" i="0">
-                <a:solidFill>
-                  <a:srgbClr val="333333"/>
-                </a:solidFill>
-                <a:latin typeface="Calibri"/>
-              </a:rPr>
-              <a:t>–   </a:t>
-            </a:r>
-            <a:r>
-              <a:rPr sz="1600" b="1" i="0">
-                <a:solidFill>
-                  <a:srgbClr val="333333"/>
-                </a:solidFill>
-                <a:latin typeface="Calibri"/>
-              </a:rPr>
-              <a:t>3.</a:t>
-            </a:r>
-            <a:r>
-              <a:rPr sz="1600" b="0" i="0">
-                <a:solidFill>
-                  <a:srgbClr val="333333"/>
-                </a:solidFill>
-                <a:latin typeface="Calibri"/>
-              </a:rPr>
-              <a:t> Paso 3: escriban en la plataforma del curso el sequenceDiagram del camino critico con el presupuesto de latencia repartido por salto, verificando que la suma de los tramos sea menor o igual al objetivo de p95 y que la nota final muestre el margen restante en milisegundos.</a:t>
-            </a:r>
-          </a:p>
-          <a:p>
-            <a:pPr>
-              <a:spcAft>
-                <a:spcPts val="800"/>
-              </a:spcAft>
-            </a:pPr>
-            <a:r>
-              <a:rPr sz="1600" b="0" i="0">
-                <a:solidFill>
-                  <a:srgbClr val="333333"/>
-                </a:solidFill>
-                <a:latin typeface="Calibri"/>
-              </a:rPr>
-              <a:t>–   </a:t>
-            </a:r>
-            <a:r>
-              <a:rPr sz="1600" b="1" i="0">
-                <a:solidFill>
-                  <a:srgbClr val="333333"/>
-                </a:solidFill>
-                <a:latin typeface="Calibri"/>
-              </a:rPr>
-              <a:t>4.</a:t>
-            </a:r>
-            <a:r>
-              <a:rPr sz="1600" b="0" i="0">
-                <a:solidFill>
-                  <a:srgbClr val="333333"/>
-                </a:solidFill>
-                <a:latin typeface="Calibri"/>
-              </a:rPr>
-              <a:t> Paso 4: ensayen el pitch de 5 a 8 minutos con cronometro y llenen la tabla de guion de 6 filas con minuto, seccion, quien habla, mensaje clave y evidencia en pantalla, verificando que la suma de los minutos quede entre 5 y 8, que ninguna seccion pase de 2:00 (y, si el docente autorizo equipo, que todos los integrantes hablen) y que cada seccion tenga una evidencia concreta que se pueda mostrar.</a:t>
-            </a:r>
-          </a:p>
-          <a:p>
-            <a:pPr>
-              <a:spcAft>
-                <a:spcPts val="800"/>
-              </a:spcAft>
-            </a:pPr>
-            <a:r>
-              <a:rPr sz="1600" b="0" i="0">
-                <a:solidFill>
-                  <a:srgbClr val="333333"/>
-                </a:solidFill>
-                <a:latin typeface="Calibri"/>
-              </a:rPr>
-              <a:t>–   </a:t>
-            </a:r>
-            <a:r>
-              <a:rPr sz="1600" b="1" i="0">
-                <a:solidFill>
-                  <a:srgbClr val="333333"/>
-                </a:solidFill>
-                <a:latin typeface="Calibri"/>
-              </a:rPr>
-              <a:t>5.</a:t>
-            </a:r>
-            <a:r>
-              <a:rPr sz="1600" b="0" i="0">
-                <a:solidFill>
-                  <a:srgbClr val="333333"/>
-                </a:solidFill>
-                <a:latin typeface="Calibri"/>
-              </a:rPr>
-              <a:t> Paso 5: cierren los 5 items del backlog de la Clase 11 dejando registro de los residuales, dejen el paquete casi final ordenado en el repositorio o el Drive y suban las 6 preguntas a la plataforma del curso (modulo Talleres) antes del en la fecha que indique el docente, verificando que el cuello de botella declarado en el analisis sea el mismo que muestra el diagrama de secuencia.</a:t>
-            </a:r>
-          </a:p>
-        </p:txBody>
-      </p:sp>
-      <p:sp>
-        <p:nvSpPr>
-          <p:cNvPr id="6" name="TextBox 5"/>
+              <a:t>Exporta tambien la imagen a la carpeta de tu Proyecto Integrador. Esa copia es para tu informe; no reemplaza la respuesta en la plataforma.</a:t>
+            </a:r>
+          </a:p>
+        </p:txBody>
+      </p:sp>
+      <p:sp>
+        <p:nvSpPr>
+          <p:cNvPr id="22" name="TextBox 21"/>
           <p:cNvSpPr txBox="1"/>
           <p:nvPr/>
         </p:nvSpPr>
@@ -10862,109 +11282,21 @@
                 </a:solidFill>
                 <a:latin typeface="Calibri"/>
               </a:rPr>
-              <a:t>Para continuar (PI)</a:t>
-            </a:r>
-          </a:p>
-        </p:txBody>
-      </p:sp>
-      <p:sp>
-        <p:nvSpPr>
-          <p:cNvPr id="5" name="Rounded Rectangle 4"/>
-          <p:cNvSpPr/>
-          <p:nvPr/>
-        </p:nvSpPr>
-        <p:spPr>
-          <a:xfrm>
-            <a:off x="457200" y="1261872"/>
-            <a:ext cx="11277295" cy="1051560"/>
-          </a:xfrm>
-          <a:prstGeom prst="roundRect">
-            <a:avLst>
-              <a:gd name="adj" fmla="val 12000"/>
-            </a:avLst>
-          </a:prstGeom>
-          <a:solidFill>
-            <a:srgbClr val="E8F4FA"/>
-          </a:solidFill>
-          <a:ln>
-            <a:noFill/>
-          </a:ln>
-        </p:spPr>
-        <p:style>
-          <a:lnRef idx="1">
-            <a:schemeClr val="accent1"/>
-          </a:lnRef>
-          <a:fillRef idx="3">
-            <a:schemeClr val="accent1"/>
-          </a:fillRef>
-          <a:effectRef idx="2">
-            <a:schemeClr val="accent1"/>
-          </a:effectRef>
-          <a:fontRef idx="minor">
-            <a:schemeClr val="lt1"/>
-          </a:fontRef>
-        </p:style>
-        <p:txBody>
-          <a:bodyPr rtlCol="0" anchor="ctr"/>
-          <a:lstStyle/>
-          <a:p>
-            <a:pPr algn="ctr"/>
-          </a:p>
-        </p:txBody>
-      </p:sp>
-      <p:sp>
-        <p:nvSpPr>
-          <p:cNvPr id="6" name="Rectangle 5"/>
-          <p:cNvSpPr/>
-          <p:nvPr/>
-        </p:nvSpPr>
-        <p:spPr>
-          <a:xfrm>
-            <a:off x="457200" y="1261872"/>
-            <a:ext cx="128016" cy="1051560"/>
-          </a:xfrm>
-          <a:prstGeom prst="rect">
-            <a:avLst/>
-          </a:prstGeom>
-          <a:solidFill>
-            <a:srgbClr val="269CCB"/>
-          </a:solidFill>
-          <a:ln>
-            <a:noFill/>
-          </a:ln>
-        </p:spPr>
-        <p:style>
-          <a:lnRef idx="1">
-            <a:schemeClr val="accent1"/>
-          </a:lnRef>
-          <a:fillRef idx="3">
-            <a:schemeClr val="accent1"/>
-          </a:fillRef>
-          <a:effectRef idx="2">
-            <a:schemeClr val="accent1"/>
-          </a:effectRef>
-          <a:fontRef idx="minor">
-            <a:schemeClr val="lt1"/>
-          </a:fontRef>
-        </p:style>
-        <p:txBody>
-          <a:bodyPr rtlCol="0" anchor="ctr"/>
-          <a:lstStyle/>
-          <a:p>
-            <a:pPr algn="ctr"/>
-          </a:p>
-        </p:txBody>
-      </p:sp>
-      <p:sp>
-        <p:nvSpPr>
-          <p:cNvPr id="7" name="TextBox 6"/>
+              <a:t>PI CloudLite — entregable de hoy</a:t>
+            </a:r>
+          </a:p>
+        </p:txBody>
+      </p:sp>
+      <p:sp>
+        <p:nvSpPr>
+          <p:cNvPr id="5" name="TextBox 4"/>
           <p:cNvSpPr txBox="1"/>
           <p:nvPr/>
         </p:nvSpPr>
         <p:spPr>
           <a:xfrm>
-            <a:off x="777240" y="1399031"/>
-            <a:ext cx="10774375" cy="822959"/>
+            <a:off x="457200" y="1170432"/>
+            <a:ext cx="11277295" cy="5230368"/>
           </a:xfrm>
           <a:prstGeom prst="rect">
             <a:avLst/>
@@ -10977,313 +11309,119 @@
           </a:bodyPr>
           <a:lstStyle/>
           <a:p>
-            <a:r>
-              <a:rPr sz="1200" b="1" i="0">
-                <a:solidFill>
-                  <a:srgbClr val="269CCB"/>
-                </a:solidFill>
-                <a:latin typeface="Calibri"/>
-              </a:rPr>
-              <a:t>Info</a:t>
-            </a:r>
-          </a:p>
-          <a:p>
             <a:pPr>
-              <a:spcBef>
-                <a:spcPts val="400"/>
-              </a:spcBef>
+              <a:spcAft>
+                <a:spcPts val="800"/>
+              </a:spcAft>
             </a:pPr>
             <a:r>
-              <a:rPr sz="1400" b="0" i="0">
+              <a:rPr sz="2000" b="0" i="0">
                 <a:solidFill>
                   <a:srgbClr val="333333"/>
                 </a:solidFill>
                 <a:latin typeface="Calibri"/>
               </a:rPr>
-              <a:t>Entregable: Sección Rendimiento + guion de pitch + paquete casi-final</a:t>
-            </a:r>
-          </a:p>
-        </p:txBody>
-      </p:sp>
-      <p:sp>
-        <p:nvSpPr>
-          <p:cNvPr id="8" name="Rounded Rectangle 7"/>
-          <p:cNvSpPr/>
-          <p:nvPr/>
-        </p:nvSpPr>
-        <p:spPr>
-          <a:xfrm>
-            <a:off x="457200" y="2478024"/>
-            <a:ext cx="11277295" cy="1051560"/>
-          </a:xfrm>
-          <a:prstGeom prst="roundRect">
-            <a:avLst>
-              <a:gd name="adj" fmla="val 12000"/>
-            </a:avLst>
-          </a:prstGeom>
-          <a:solidFill>
-            <a:srgbClr val="FFF8E1"/>
-          </a:solidFill>
-          <a:ln>
-            <a:noFill/>
-          </a:ln>
-        </p:spPr>
-        <p:style>
-          <a:lnRef idx="1">
-            <a:schemeClr val="accent1"/>
-          </a:lnRef>
-          <a:fillRef idx="3">
-            <a:schemeClr val="accent1"/>
-          </a:fillRef>
-          <a:effectRef idx="2">
-            <a:schemeClr val="accent1"/>
-          </a:effectRef>
-          <a:fontRef idx="minor">
-            <a:schemeClr val="lt1"/>
-          </a:fontRef>
-        </p:style>
-        <p:txBody>
-          <a:bodyPr rtlCol="0" anchor="ctr"/>
-          <a:lstStyle/>
-          <a:p>
-            <a:pPr algn="ctr"/>
-          </a:p>
-        </p:txBody>
-      </p:sp>
-      <p:sp>
-        <p:nvSpPr>
-          <p:cNvPr id="9" name="Rectangle 8"/>
-          <p:cNvSpPr/>
-          <p:nvPr/>
-        </p:nvSpPr>
-        <p:spPr>
-          <a:xfrm>
-            <a:off x="457200" y="2478024"/>
-            <a:ext cx="128016" cy="1051560"/>
-          </a:xfrm>
-          <a:prstGeom prst="rect">
-            <a:avLst/>
-          </a:prstGeom>
-          <a:solidFill>
-            <a:srgbClr val="FFD000"/>
-          </a:solidFill>
-          <a:ln>
-            <a:noFill/>
-          </a:ln>
-        </p:spPr>
-        <p:style>
-          <a:lnRef idx="1">
-            <a:schemeClr val="accent1"/>
-          </a:lnRef>
-          <a:fillRef idx="3">
-            <a:schemeClr val="accent1"/>
-          </a:fillRef>
-          <a:effectRef idx="2">
-            <a:schemeClr val="accent1"/>
-          </a:effectRef>
-          <a:fontRef idx="minor">
-            <a:schemeClr val="lt1"/>
-          </a:fontRef>
-        </p:style>
-        <p:txBody>
-          <a:bodyPr rtlCol="0" anchor="ctr"/>
-          <a:lstStyle/>
-          <a:p>
-            <a:pPr algn="ctr"/>
-          </a:p>
-        </p:txBody>
-      </p:sp>
-      <p:sp>
-        <p:nvSpPr>
-          <p:cNvPr id="10" name="TextBox 9"/>
-          <p:cNvSpPr txBox="1"/>
-          <p:nvPr/>
-        </p:nvSpPr>
-        <p:spPr>
-          <a:xfrm>
-            <a:off x="777240" y="2615184"/>
-            <a:ext cx="10774375" cy="822959"/>
-          </a:xfrm>
-          <a:prstGeom prst="rect">
-            <a:avLst/>
-          </a:prstGeom>
-          <a:noFill/>
-        </p:spPr>
-        <p:txBody>
-          <a:bodyPr wrap="square">
-            <a:spAutoFit/>
-          </a:bodyPr>
-          <a:lstStyle/>
-          <a:p>
-            <a:r>
-              <a:rPr sz="1200" b="1" i="0">
-                <a:solidFill>
-                  <a:srgbClr val="FFD000"/>
-                </a:solidFill>
-                <a:latin typeface="Calibri"/>
-              </a:rPr>
-              <a:t>Aclaración</a:t>
+              <a:t>–   </a:t>
+            </a:r>
+            <a:r>
+              <a:rPr sz="2000" b="1" i="0">
+                <a:solidFill>
+                  <a:srgbClr val="333333"/>
+                </a:solidFill>
+                <a:latin typeface="Calibri"/>
+              </a:rPr>
+              <a:t>Entregable:</a:t>
+            </a:r>
+            <a:r>
+              <a:rPr sz="2000" b="0" i="0">
+                <a:solidFill>
+                  <a:srgbClr val="333333"/>
+                </a:solidFill>
+                <a:latin typeface="Calibri"/>
+              </a:rPr>
+              <a:t> Sección Rendimiento + guion de pitch + paquete casi-final</a:t>
             </a:r>
           </a:p>
           <a:p>
             <a:pPr>
-              <a:spcBef>
-                <a:spcPts val="400"/>
-              </a:spcBef>
+              <a:spcAft>
+                <a:spcPts val="800"/>
+              </a:spcAft>
             </a:pPr>
             <a:r>
-              <a:rPr sz="1400" b="0" i="0">
+              <a:rPr sz="2000" b="0" i="0">
                 <a:solidFill>
                   <a:srgbClr val="333333"/>
                 </a:solidFill>
                 <a:latin typeface="Calibri"/>
               </a:rPr>
-              <a:t>Subir evidencias al paquete CloudLite (Drive/repo) y a la plataforma del curso en la fecha que indique el docente.</a:t>
-            </a:r>
-          </a:p>
-        </p:txBody>
-      </p:sp>
-      <p:sp>
-        <p:nvSpPr>
-          <p:cNvPr id="11" name="Rounded Rectangle 10"/>
-          <p:cNvSpPr/>
-          <p:nvPr/>
-        </p:nvSpPr>
-        <p:spPr>
-          <a:xfrm>
-            <a:off x="457200" y="3694176"/>
-            <a:ext cx="11277295" cy="1051560"/>
-          </a:xfrm>
-          <a:prstGeom prst="roundRect">
-            <a:avLst>
-              <a:gd name="adj" fmla="val 12000"/>
-            </a:avLst>
-          </a:prstGeom>
-          <a:solidFill>
-            <a:srgbClr val="FBE4E4"/>
-          </a:solidFill>
-          <a:ln>
-            <a:noFill/>
-          </a:ln>
-        </p:spPr>
-        <p:style>
-          <a:lnRef idx="1">
-            <a:schemeClr val="accent1"/>
-          </a:lnRef>
-          <a:fillRef idx="3">
-            <a:schemeClr val="accent1"/>
-          </a:fillRef>
-          <a:effectRef idx="2">
-            <a:schemeClr val="accent1"/>
-          </a:effectRef>
-          <a:fontRef idx="minor">
-            <a:schemeClr val="lt1"/>
-          </a:fontRef>
-        </p:style>
-        <p:txBody>
-          <a:bodyPr rtlCol="0" anchor="ctr"/>
-          <a:lstStyle/>
-          <a:p>
-            <a:pPr algn="ctr"/>
-          </a:p>
-        </p:txBody>
-      </p:sp>
-      <p:sp>
-        <p:nvSpPr>
-          <p:cNvPr id="12" name="Rectangle 11"/>
-          <p:cNvSpPr/>
-          <p:nvPr/>
-        </p:nvSpPr>
-        <p:spPr>
-          <a:xfrm>
-            <a:off x="457200" y="3694176"/>
-            <a:ext cx="128016" cy="1051560"/>
-          </a:xfrm>
-          <a:prstGeom prst="rect">
-            <a:avLst/>
-          </a:prstGeom>
-          <a:solidFill>
-            <a:srgbClr val="A02030"/>
-          </a:solidFill>
-          <a:ln>
-            <a:noFill/>
-          </a:ln>
-        </p:spPr>
-        <p:style>
-          <a:lnRef idx="1">
-            <a:schemeClr val="accent1"/>
-          </a:lnRef>
-          <a:fillRef idx="3">
-            <a:schemeClr val="accent1"/>
-          </a:fillRef>
-          <a:effectRef idx="2">
-            <a:schemeClr val="accent1"/>
-          </a:effectRef>
-          <a:fontRef idx="minor">
-            <a:schemeClr val="lt1"/>
-          </a:fontRef>
-        </p:style>
-        <p:txBody>
-          <a:bodyPr rtlCol="0" anchor="ctr"/>
-          <a:lstStyle/>
-          <a:p>
-            <a:pPr algn="ctr"/>
-          </a:p>
-        </p:txBody>
-      </p:sp>
-      <p:sp>
-        <p:nvSpPr>
-          <p:cNvPr id="13" name="TextBox 12"/>
-          <p:cNvSpPr txBox="1"/>
-          <p:nvPr/>
-        </p:nvSpPr>
-        <p:spPr>
-          <a:xfrm>
-            <a:off x="777240" y="3831336"/>
-            <a:ext cx="10774375" cy="822959"/>
-          </a:xfrm>
-          <a:prstGeom prst="rect">
-            <a:avLst/>
-          </a:prstGeom>
-          <a:noFill/>
-        </p:spPr>
-        <p:txBody>
-          <a:bodyPr wrap="square">
-            <a:spAutoFit/>
-          </a:bodyPr>
-          <a:lstStyle/>
-          <a:p>
-            <a:r>
-              <a:rPr sz="1200" b="1" i="0">
-                <a:solidFill>
-                  <a:srgbClr val="A02030"/>
-                </a:solidFill>
-                <a:latin typeface="Calibri"/>
-              </a:rPr>
-              <a:t>Atención</a:t>
+              <a:t>–   Herramienta: </a:t>
+            </a:r>
+            <a:r>
+              <a:rPr sz="2000" b="1" i="0">
+                <a:solidFill>
+                  <a:srgbClr val="333333"/>
+                </a:solidFill>
+                <a:latin typeface="Calibri"/>
+              </a:rPr>
+              <a:t>Google Docs · draw.io · (opcional) lab contenedor</a:t>
             </a:r>
           </a:p>
           <a:p>
             <a:pPr>
-              <a:spcBef>
-                <a:spcPts val="400"/>
-              </a:spcBef>
+              <a:spcAft>
+                <a:spcPts val="800"/>
+              </a:spcAft>
             </a:pPr>
             <a:r>
-              <a:rPr sz="1400" b="0" i="0">
+              <a:rPr sz="2000" b="0" i="0">
                 <a:solidFill>
                   <a:srgbClr val="333333"/>
                 </a:solidFill>
                 <a:latin typeface="Calibri"/>
               </a:rPr>
-              <a:t>Sin cloud de pago ni instalaciones obligatorias de hipervisores/Docker Desktop.</a:t>
-            </a:r>
-          </a:p>
-        </p:txBody>
-      </p:sp>
-      <p:sp>
-        <p:nvSpPr>
-          <p:cNvPr id="14" name="TextBox 13"/>
+              <a:t>–   Todo lo que construyan hoy entra al </a:t>
+            </a:r>
+            <a:r>
+              <a:rPr sz="2000" b="1" i="0">
+                <a:solidFill>
+                  <a:srgbClr val="333333"/>
+                </a:solidFill>
+                <a:latin typeface="Calibri"/>
+              </a:rPr>
+              <a:t>informe/repo del PI</a:t>
+            </a:r>
+            <a:r>
+              <a:rPr sz="2000" b="0" i="0">
+                <a:solidFill>
+                  <a:srgbClr val="333333"/>
+                </a:solidFill>
+                <a:latin typeface="Calibri"/>
+              </a:rPr>
+              <a:t> (no es lab suelto).</a:t>
+            </a:r>
+          </a:p>
+          <a:p>
+            <a:pPr>
+              <a:spcAft>
+                <a:spcPts val="800"/>
+              </a:spcAft>
+            </a:pPr>
+            <a:r>
+              <a:rPr sz="2000" b="0" i="0">
+                <a:solidFill>
+                  <a:srgbClr val="333333"/>
+                </a:solidFill>
+                <a:latin typeface="Calibri"/>
+              </a:rPr>
+              <a:t>–   Individual por defecto · el docente puede autorizar equipos de 2–3; la entrega en la plataforma del curso siempre es individual.</a:t>
+            </a:r>
+          </a:p>
+        </p:txBody>
+      </p:sp>
+      <p:sp>
+        <p:nvSpPr>
+          <p:cNvPr id="6" name="TextBox 5"/>
           <p:cNvSpPr txBox="1"/>
           <p:nvPr/>
         </p:nvSpPr>
@@ -11577,6 +11715,966 @@
 </file>
 
 <file path=ppt/slides/slide30.xml><?xml version="1.0" encoding="utf-8"?>
+<p:sld xmlns:a="http://schemas.openxmlformats.org/drawingml/2006/main" xmlns:p="http://schemas.openxmlformats.org/presentationml/2006/main" xmlns:r="http://schemas.openxmlformats.org/officeDocument/2006/relationships">
+  <p:cSld>
+    <p:bg>
+      <p:bgPr>
+        <a:solidFill>
+          <a:srgbClr val="FFFFFF"/>
+        </a:solidFill>
+        <a:effectLst/>
+      </p:bgPr>
+    </p:bg>
+    <p:spTree>
+      <p:nvGrpSpPr>
+        <p:cNvPr id="1" name=""/>
+        <p:cNvGrpSpPr/>
+        <p:nvPr/>
+      </p:nvGrpSpPr>
+      <p:grpSpPr/>
+      <p:sp>
+        <p:nvSpPr>
+          <p:cNvPr id="2" name="Rectangle 1"/>
+          <p:cNvSpPr/>
+          <p:nvPr/>
+        </p:nvSpPr>
+        <p:spPr>
+          <a:xfrm>
+            <a:off x="0" y="0"/>
+            <a:ext cx="12191695" cy="960120"/>
+          </a:xfrm>
+          <a:prstGeom prst="rect">
+            <a:avLst/>
+          </a:prstGeom>
+          <a:solidFill>
+            <a:srgbClr val="095292"/>
+          </a:solidFill>
+          <a:ln>
+            <a:noFill/>
+          </a:ln>
+        </p:spPr>
+        <p:style>
+          <a:lnRef idx="1">
+            <a:schemeClr val="accent1"/>
+          </a:lnRef>
+          <a:fillRef idx="3">
+            <a:schemeClr val="accent1"/>
+          </a:fillRef>
+          <a:effectRef idx="2">
+            <a:schemeClr val="accent1"/>
+          </a:effectRef>
+          <a:fontRef idx="minor">
+            <a:schemeClr val="lt1"/>
+          </a:fontRef>
+        </p:style>
+        <p:txBody>
+          <a:bodyPr rtlCol="0" anchor="ctr"/>
+          <a:lstStyle/>
+          <a:p>
+            <a:pPr algn="ctr"/>
+          </a:p>
+        </p:txBody>
+      </p:sp>
+      <p:sp>
+        <p:nvSpPr>
+          <p:cNvPr id="3" name="Rectangle 2"/>
+          <p:cNvSpPr/>
+          <p:nvPr/>
+        </p:nvSpPr>
+        <p:spPr>
+          <a:xfrm>
+            <a:off x="0" y="960120"/>
+            <a:ext cx="12191695" cy="41148"/>
+          </a:xfrm>
+          <a:prstGeom prst="rect">
+            <a:avLst/>
+          </a:prstGeom>
+          <a:solidFill>
+            <a:srgbClr val="FFD000"/>
+          </a:solidFill>
+          <a:ln>
+            <a:noFill/>
+          </a:ln>
+        </p:spPr>
+        <p:style>
+          <a:lnRef idx="1">
+            <a:schemeClr val="accent1"/>
+          </a:lnRef>
+          <a:fillRef idx="3">
+            <a:schemeClr val="accent1"/>
+          </a:fillRef>
+          <a:effectRef idx="2">
+            <a:schemeClr val="accent1"/>
+          </a:effectRef>
+          <a:fontRef idx="minor">
+            <a:schemeClr val="lt1"/>
+          </a:fontRef>
+        </p:style>
+        <p:txBody>
+          <a:bodyPr rtlCol="0" anchor="ctr"/>
+          <a:lstStyle/>
+          <a:p>
+            <a:pPr algn="ctr"/>
+          </a:p>
+        </p:txBody>
+      </p:sp>
+      <p:sp>
+        <p:nvSpPr>
+          <p:cNvPr id="4" name="TextBox 3"/>
+          <p:cNvSpPr txBox="1"/>
+          <p:nvPr/>
+        </p:nvSpPr>
+        <p:spPr>
+          <a:xfrm>
+            <a:off x="457200" y="164592"/>
+            <a:ext cx="11277295" cy="502920"/>
+          </a:xfrm>
+          <a:prstGeom prst="rect">
+            <a:avLst/>
+          </a:prstGeom>
+          <a:noFill/>
+        </p:spPr>
+        <p:txBody>
+          <a:bodyPr wrap="square">
+            <a:spAutoFit/>
+          </a:bodyPr>
+          <a:lstStyle/>
+          <a:p>
+            <a:r>
+              <a:rPr sz="2600" b="1" i="0">
+                <a:solidFill>
+                  <a:srgbClr val="FFFFFF"/>
+                </a:solidFill>
+                <a:latin typeface="Calibri"/>
+              </a:rPr>
+              <a:t>Manos a la obra (paso a paso)</a:t>
+            </a:r>
+          </a:p>
+        </p:txBody>
+      </p:sp>
+      <p:sp>
+        <p:nvSpPr>
+          <p:cNvPr id="5" name="TextBox 4"/>
+          <p:cNvSpPr txBox="1"/>
+          <p:nvPr/>
+        </p:nvSpPr>
+        <p:spPr>
+          <a:xfrm>
+            <a:off x="457200" y="1170432"/>
+            <a:ext cx="11277295" cy="5230368"/>
+          </a:xfrm>
+          <a:prstGeom prst="rect">
+            <a:avLst/>
+          </a:prstGeom>
+          <a:noFill/>
+        </p:spPr>
+        <p:txBody>
+          <a:bodyPr wrap="square">
+            <a:spAutoFit/>
+          </a:bodyPr>
+          <a:lstStyle/>
+          <a:p>
+            <a:pPr>
+              <a:spcAft>
+                <a:spcPts val="800"/>
+              </a:spcAft>
+            </a:pPr>
+            <a:r>
+              <a:rPr sz="1600" b="1" i="0">
+                <a:solidFill>
+                  <a:srgbClr val="333333"/>
+                </a:solidFill>
+                <a:latin typeface="Calibri"/>
+              </a:rPr>
+              <a:t>1.</a:t>
+            </a:r>
+            <a:r>
+              <a:rPr sz="1600" b="0" i="0">
+                <a:solidFill>
+                  <a:srgbClr val="333333"/>
+                </a:solidFill>
+                <a:latin typeface="Calibri"/>
+              </a:rPr>
+              <a:t> Paso 1: describan el escenario de carga del pico real de su dominio con los 6 datos obligatorios (evento del pico, usuarios concurrentes, peticiones por segundo, mezcla de operaciones en porcentajes que sumen 100, duracion de la ventana y volumen de datos de partida), verificando que la mezcla sume exactamente 100 por ciento y que el pico corresponda a una fecha real del calendario de su dominio.</a:t>
+            </a:r>
+          </a:p>
+          <a:p>
+            <a:pPr>
+              <a:spcAft>
+                <a:spcPts val="800"/>
+              </a:spcAft>
+            </a:pPr>
+            <a:r>
+              <a:rPr sz="1600" b="0" i="0">
+                <a:solidFill>
+                  <a:srgbClr val="333333"/>
+                </a:solidFill>
+                <a:latin typeface="Calibri"/>
+              </a:rPr>
+              <a:t>–   </a:t>
+            </a:r>
+            <a:r>
+              <a:rPr sz="1600" b="1" i="0">
+                <a:solidFill>
+                  <a:srgbClr val="333333"/>
+                </a:solidFill>
+                <a:latin typeface="Calibri"/>
+              </a:rPr>
+              <a:t>2.</a:t>
+            </a:r>
+            <a:r>
+              <a:rPr sz="1600" b="0" i="0">
+                <a:solidFill>
+                  <a:srgbClr val="333333"/>
+                </a:solidFill>
+                <a:latin typeface="Calibri"/>
+              </a:rPr>
+              <a:t> Paso 2: definan las 3 metricas objetivo en una tabla de 4 columnas con numero, ventana de medicion, forma de medirla y consecuencia de incumplirla, verificando que cada objetivo tenga un numero y una ventana (por ejemplo p95 por debajo de 800 ms en 5 minutos) y que ninguna diga rapido o aceptable sin cifra.</a:t>
+            </a:r>
+          </a:p>
+          <a:p>
+            <a:pPr>
+              <a:spcAft>
+                <a:spcPts val="800"/>
+              </a:spcAft>
+            </a:pPr>
+            <a:r>
+              <a:rPr sz="1600" b="0" i="0">
+                <a:solidFill>
+                  <a:srgbClr val="333333"/>
+                </a:solidFill>
+                <a:latin typeface="Calibri"/>
+              </a:rPr>
+              <a:t>–   </a:t>
+            </a:r>
+            <a:r>
+              <a:rPr sz="1600" b="1" i="0">
+                <a:solidFill>
+                  <a:srgbClr val="333333"/>
+                </a:solidFill>
+                <a:latin typeface="Calibri"/>
+              </a:rPr>
+              <a:t>3.</a:t>
+            </a:r>
+            <a:r>
+              <a:rPr sz="1600" b="0" i="0">
+                <a:solidFill>
+                  <a:srgbClr val="333333"/>
+                </a:solidFill>
+                <a:latin typeface="Calibri"/>
+              </a:rPr>
+              <a:t> Paso 3: escriban en la plataforma del curso el sequenceDiagram del camino critico con el presupuesto de latencia repartido por salto, verificando que la suma de los tramos sea menor o igual al objetivo de p95 y que la nota final muestre el margen restante en milisegundos.</a:t>
+            </a:r>
+          </a:p>
+          <a:p>
+            <a:pPr>
+              <a:spcAft>
+                <a:spcPts val="800"/>
+              </a:spcAft>
+            </a:pPr>
+            <a:r>
+              <a:rPr sz="1600" b="0" i="0">
+                <a:solidFill>
+                  <a:srgbClr val="333333"/>
+                </a:solidFill>
+                <a:latin typeface="Calibri"/>
+              </a:rPr>
+              <a:t>–   </a:t>
+            </a:r>
+            <a:r>
+              <a:rPr sz="1600" b="1" i="0">
+                <a:solidFill>
+                  <a:srgbClr val="333333"/>
+                </a:solidFill>
+                <a:latin typeface="Calibri"/>
+              </a:rPr>
+              <a:t>4.</a:t>
+            </a:r>
+            <a:r>
+              <a:rPr sz="1600" b="0" i="0">
+                <a:solidFill>
+                  <a:srgbClr val="333333"/>
+                </a:solidFill>
+                <a:latin typeface="Calibri"/>
+              </a:rPr>
+              <a:t> Paso 4: ensayen el pitch de 5 a 8 minutos con cronometro y llenen la tabla de guion de 6 filas con minuto, seccion, quien habla, mensaje clave y evidencia en pantalla, verificando que la suma de los minutos quede entre 5 y 8, que ninguna seccion pase de 2:00 (y, si el docente autorizo equipo, que todos los integrantes hablen) y que cada seccion tenga una evidencia concreta que se pueda mostrar.</a:t>
+            </a:r>
+          </a:p>
+          <a:p>
+            <a:pPr>
+              <a:spcAft>
+                <a:spcPts val="800"/>
+              </a:spcAft>
+            </a:pPr>
+            <a:r>
+              <a:rPr sz="1600" b="0" i="0">
+                <a:solidFill>
+                  <a:srgbClr val="333333"/>
+                </a:solidFill>
+                <a:latin typeface="Calibri"/>
+              </a:rPr>
+              <a:t>–   </a:t>
+            </a:r>
+            <a:r>
+              <a:rPr sz="1600" b="1" i="0">
+                <a:solidFill>
+                  <a:srgbClr val="333333"/>
+                </a:solidFill>
+                <a:latin typeface="Calibri"/>
+              </a:rPr>
+              <a:t>5.</a:t>
+            </a:r>
+            <a:r>
+              <a:rPr sz="1600" b="0" i="0">
+                <a:solidFill>
+                  <a:srgbClr val="333333"/>
+                </a:solidFill>
+                <a:latin typeface="Calibri"/>
+              </a:rPr>
+              <a:t> Paso 5: cierren los 5 items del backlog de la Clase 11 dejando registro de los residuales, dejen el paquete casi final ordenado en el repositorio o el Drive y suban las 6 preguntas a la plataforma del curso (modulo Talleres) antes del en la fecha que indique el docente, verificando que el cuello de botella declarado en el analisis sea el mismo que muestra el diagrama de secuencia.</a:t>
+            </a:r>
+          </a:p>
+        </p:txBody>
+      </p:sp>
+      <p:sp>
+        <p:nvSpPr>
+          <p:cNvPr id="6" name="TextBox 5"/>
+          <p:cNvSpPr txBox="1"/>
+          <p:nvPr/>
+        </p:nvSpPr>
+        <p:spPr>
+          <a:xfrm>
+            <a:off x="11185855" y="6473952"/>
+            <a:ext cx="640080" cy="274320"/>
+          </a:xfrm>
+          <a:prstGeom prst="rect">
+            <a:avLst/>
+          </a:prstGeom>
+          <a:noFill/>
+        </p:spPr>
+        <p:txBody>
+          <a:bodyPr wrap="square">
+            <a:spAutoFit/>
+          </a:bodyPr>
+          <a:lstStyle/>
+          <a:p>
+            <a:pPr algn="r"/>
+            <a:r>
+              <a:rPr sz="1100" b="0" i="0">
+                <a:solidFill>
+                  <a:srgbClr val="666666"/>
+                </a:solidFill>
+                <a:latin typeface="Calibri"/>
+              </a:rPr>
+              <a:t>30</a:t>
+            </a:r>
+          </a:p>
+        </p:txBody>
+      </p:sp>
+    </p:spTree>
+  </p:cSld>
+  <p:clrMapOvr>
+    <a:masterClrMapping/>
+  </p:clrMapOvr>
+</p:sld>
+</file>
+
+<file path=ppt/slides/slide31.xml><?xml version="1.0" encoding="utf-8"?>
+<p:sld xmlns:a="http://schemas.openxmlformats.org/drawingml/2006/main" xmlns:p="http://schemas.openxmlformats.org/presentationml/2006/main" xmlns:r="http://schemas.openxmlformats.org/officeDocument/2006/relationships">
+  <p:cSld>
+    <p:bg>
+      <p:bgPr>
+        <a:solidFill>
+          <a:srgbClr val="FFFFFF"/>
+        </a:solidFill>
+        <a:effectLst/>
+      </p:bgPr>
+    </p:bg>
+    <p:spTree>
+      <p:nvGrpSpPr>
+        <p:cNvPr id="1" name=""/>
+        <p:cNvGrpSpPr/>
+        <p:nvPr/>
+      </p:nvGrpSpPr>
+      <p:grpSpPr/>
+      <p:sp>
+        <p:nvSpPr>
+          <p:cNvPr id="2" name="Rectangle 1"/>
+          <p:cNvSpPr/>
+          <p:nvPr/>
+        </p:nvSpPr>
+        <p:spPr>
+          <a:xfrm>
+            <a:off x="0" y="0"/>
+            <a:ext cx="12191695" cy="960120"/>
+          </a:xfrm>
+          <a:prstGeom prst="rect">
+            <a:avLst/>
+          </a:prstGeom>
+          <a:solidFill>
+            <a:srgbClr val="095292"/>
+          </a:solidFill>
+          <a:ln>
+            <a:noFill/>
+          </a:ln>
+        </p:spPr>
+        <p:style>
+          <a:lnRef idx="1">
+            <a:schemeClr val="accent1"/>
+          </a:lnRef>
+          <a:fillRef idx="3">
+            <a:schemeClr val="accent1"/>
+          </a:fillRef>
+          <a:effectRef idx="2">
+            <a:schemeClr val="accent1"/>
+          </a:effectRef>
+          <a:fontRef idx="minor">
+            <a:schemeClr val="lt1"/>
+          </a:fontRef>
+        </p:style>
+        <p:txBody>
+          <a:bodyPr rtlCol="0" anchor="ctr"/>
+          <a:lstStyle/>
+          <a:p>
+            <a:pPr algn="ctr"/>
+          </a:p>
+        </p:txBody>
+      </p:sp>
+      <p:sp>
+        <p:nvSpPr>
+          <p:cNvPr id="3" name="Rectangle 2"/>
+          <p:cNvSpPr/>
+          <p:nvPr/>
+        </p:nvSpPr>
+        <p:spPr>
+          <a:xfrm>
+            <a:off x="0" y="960120"/>
+            <a:ext cx="12191695" cy="41148"/>
+          </a:xfrm>
+          <a:prstGeom prst="rect">
+            <a:avLst/>
+          </a:prstGeom>
+          <a:solidFill>
+            <a:srgbClr val="FFD000"/>
+          </a:solidFill>
+          <a:ln>
+            <a:noFill/>
+          </a:ln>
+        </p:spPr>
+        <p:style>
+          <a:lnRef idx="1">
+            <a:schemeClr val="accent1"/>
+          </a:lnRef>
+          <a:fillRef idx="3">
+            <a:schemeClr val="accent1"/>
+          </a:fillRef>
+          <a:effectRef idx="2">
+            <a:schemeClr val="accent1"/>
+          </a:effectRef>
+          <a:fontRef idx="minor">
+            <a:schemeClr val="lt1"/>
+          </a:fontRef>
+        </p:style>
+        <p:txBody>
+          <a:bodyPr rtlCol="0" anchor="ctr"/>
+          <a:lstStyle/>
+          <a:p>
+            <a:pPr algn="ctr"/>
+          </a:p>
+        </p:txBody>
+      </p:sp>
+      <p:sp>
+        <p:nvSpPr>
+          <p:cNvPr id="4" name="TextBox 3"/>
+          <p:cNvSpPr txBox="1"/>
+          <p:nvPr/>
+        </p:nvSpPr>
+        <p:spPr>
+          <a:xfrm>
+            <a:off x="457200" y="164592"/>
+            <a:ext cx="11277295" cy="502920"/>
+          </a:xfrm>
+          <a:prstGeom prst="rect">
+            <a:avLst/>
+          </a:prstGeom>
+          <a:noFill/>
+        </p:spPr>
+        <p:txBody>
+          <a:bodyPr wrap="square">
+            <a:spAutoFit/>
+          </a:bodyPr>
+          <a:lstStyle/>
+          <a:p>
+            <a:r>
+              <a:rPr sz="2600" b="1" i="0">
+                <a:solidFill>
+                  <a:srgbClr val="FFFFFF"/>
+                </a:solidFill>
+                <a:latin typeface="Calibri"/>
+              </a:rPr>
+              <a:t>Para continuar (PI)</a:t>
+            </a:r>
+          </a:p>
+        </p:txBody>
+      </p:sp>
+      <p:sp>
+        <p:nvSpPr>
+          <p:cNvPr id="5" name="Rounded Rectangle 4"/>
+          <p:cNvSpPr/>
+          <p:nvPr/>
+        </p:nvSpPr>
+        <p:spPr>
+          <a:xfrm>
+            <a:off x="457200" y="1261872"/>
+            <a:ext cx="11277295" cy="1051560"/>
+          </a:xfrm>
+          <a:prstGeom prst="roundRect">
+            <a:avLst>
+              <a:gd name="adj" fmla="val 12000"/>
+            </a:avLst>
+          </a:prstGeom>
+          <a:solidFill>
+            <a:srgbClr val="E8F4FA"/>
+          </a:solidFill>
+          <a:ln>
+            <a:noFill/>
+          </a:ln>
+        </p:spPr>
+        <p:style>
+          <a:lnRef idx="1">
+            <a:schemeClr val="accent1"/>
+          </a:lnRef>
+          <a:fillRef idx="3">
+            <a:schemeClr val="accent1"/>
+          </a:fillRef>
+          <a:effectRef idx="2">
+            <a:schemeClr val="accent1"/>
+          </a:effectRef>
+          <a:fontRef idx="minor">
+            <a:schemeClr val="lt1"/>
+          </a:fontRef>
+        </p:style>
+        <p:txBody>
+          <a:bodyPr rtlCol="0" anchor="ctr"/>
+          <a:lstStyle/>
+          <a:p>
+            <a:pPr algn="ctr"/>
+          </a:p>
+        </p:txBody>
+      </p:sp>
+      <p:sp>
+        <p:nvSpPr>
+          <p:cNvPr id="6" name="Rectangle 5"/>
+          <p:cNvSpPr/>
+          <p:nvPr/>
+        </p:nvSpPr>
+        <p:spPr>
+          <a:xfrm>
+            <a:off x="457200" y="1261872"/>
+            <a:ext cx="128016" cy="1051560"/>
+          </a:xfrm>
+          <a:prstGeom prst="rect">
+            <a:avLst/>
+          </a:prstGeom>
+          <a:solidFill>
+            <a:srgbClr val="269CCB"/>
+          </a:solidFill>
+          <a:ln>
+            <a:noFill/>
+          </a:ln>
+        </p:spPr>
+        <p:style>
+          <a:lnRef idx="1">
+            <a:schemeClr val="accent1"/>
+          </a:lnRef>
+          <a:fillRef idx="3">
+            <a:schemeClr val="accent1"/>
+          </a:fillRef>
+          <a:effectRef idx="2">
+            <a:schemeClr val="accent1"/>
+          </a:effectRef>
+          <a:fontRef idx="minor">
+            <a:schemeClr val="lt1"/>
+          </a:fontRef>
+        </p:style>
+        <p:txBody>
+          <a:bodyPr rtlCol="0" anchor="ctr"/>
+          <a:lstStyle/>
+          <a:p>
+            <a:pPr algn="ctr"/>
+          </a:p>
+        </p:txBody>
+      </p:sp>
+      <p:sp>
+        <p:nvSpPr>
+          <p:cNvPr id="7" name="TextBox 6"/>
+          <p:cNvSpPr txBox="1"/>
+          <p:nvPr/>
+        </p:nvSpPr>
+        <p:spPr>
+          <a:xfrm>
+            <a:off x="777240" y="1399031"/>
+            <a:ext cx="10774375" cy="822959"/>
+          </a:xfrm>
+          <a:prstGeom prst="rect">
+            <a:avLst/>
+          </a:prstGeom>
+          <a:noFill/>
+        </p:spPr>
+        <p:txBody>
+          <a:bodyPr wrap="square">
+            <a:spAutoFit/>
+          </a:bodyPr>
+          <a:lstStyle/>
+          <a:p>
+            <a:r>
+              <a:rPr sz="1200" b="1" i="0">
+                <a:solidFill>
+                  <a:srgbClr val="269CCB"/>
+                </a:solidFill>
+                <a:latin typeface="Calibri"/>
+              </a:rPr>
+              <a:t>Info</a:t>
+            </a:r>
+          </a:p>
+          <a:p>
+            <a:pPr>
+              <a:spcBef>
+                <a:spcPts val="400"/>
+              </a:spcBef>
+            </a:pPr>
+            <a:r>
+              <a:rPr sz="1400" b="0" i="0">
+                <a:solidFill>
+                  <a:srgbClr val="333333"/>
+                </a:solidFill>
+                <a:latin typeface="Calibri"/>
+              </a:rPr>
+              <a:t>Entregable: Sección Rendimiento + guion de pitch + paquete casi-final</a:t>
+            </a:r>
+          </a:p>
+        </p:txBody>
+      </p:sp>
+      <p:sp>
+        <p:nvSpPr>
+          <p:cNvPr id="8" name="Rounded Rectangle 7"/>
+          <p:cNvSpPr/>
+          <p:nvPr/>
+        </p:nvSpPr>
+        <p:spPr>
+          <a:xfrm>
+            <a:off x="457200" y="2478024"/>
+            <a:ext cx="11277295" cy="1051560"/>
+          </a:xfrm>
+          <a:prstGeom prst="roundRect">
+            <a:avLst>
+              <a:gd name="adj" fmla="val 12000"/>
+            </a:avLst>
+          </a:prstGeom>
+          <a:solidFill>
+            <a:srgbClr val="FFF8E1"/>
+          </a:solidFill>
+          <a:ln>
+            <a:noFill/>
+          </a:ln>
+        </p:spPr>
+        <p:style>
+          <a:lnRef idx="1">
+            <a:schemeClr val="accent1"/>
+          </a:lnRef>
+          <a:fillRef idx="3">
+            <a:schemeClr val="accent1"/>
+          </a:fillRef>
+          <a:effectRef idx="2">
+            <a:schemeClr val="accent1"/>
+          </a:effectRef>
+          <a:fontRef idx="minor">
+            <a:schemeClr val="lt1"/>
+          </a:fontRef>
+        </p:style>
+        <p:txBody>
+          <a:bodyPr rtlCol="0" anchor="ctr"/>
+          <a:lstStyle/>
+          <a:p>
+            <a:pPr algn="ctr"/>
+          </a:p>
+        </p:txBody>
+      </p:sp>
+      <p:sp>
+        <p:nvSpPr>
+          <p:cNvPr id="9" name="Rectangle 8"/>
+          <p:cNvSpPr/>
+          <p:nvPr/>
+        </p:nvSpPr>
+        <p:spPr>
+          <a:xfrm>
+            <a:off x="457200" y="2478024"/>
+            <a:ext cx="128016" cy="1051560"/>
+          </a:xfrm>
+          <a:prstGeom prst="rect">
+            <a:avLst/>
+          </a:prstGeom>
+          <a:solidFill>
+            <a:srgbClr val="FFD000"/>
+          </a:solidFill>
+          <a:ln>
+            <a:noFill/>
+          </a:ln>
+        </p:spPr>
+        <p:style>
+          <a:lnRef idx="1">
+            <a:schemeClr val="accent1"/>
+          </a:lnRef>
+          <a:fillRef idx="3">
+            <a:schemeClr val="accent1"/>
+          </a:fillRef>
+          <a:effectRef idx="2">
+            <a:schemeClr val="accent1"/>
+          </a:effectRef>
+          <a:fontRef idx="minor">
+            <a:schemeClr val="lt1"/>
+          </a:fontRef>
+        </p:style>
+        <p:txBody>
+          <a:bodyPr rtlCol="0" anchor="ctr"/>
+          <a:lstStyle/>
+          <a:p>
+            <a:pPr algn="ctr"/>
+          </a:p>
+        </p:txBody>
+      </p:sp>
+      <p:sp>
+        <p:nvSpPr>
+          <p:cNvPr id="10" name="TextBox 9"/>
+          <p:cNvSpPr txBox="1"/>
+          <p:nvPr/>
+        </p:nvSpPr>
+        <p:spPr>
+          <a:xfrm>
+            <a:off x="777240" y="2615184"/>
+            <a:ext cx="10774375" cy="822959"/>
+          </a:xfrm>
+          <a:prstGeom prst="rect">
+            <a:avLst/>
+          </a:prstGeom>
+          <a:noFill/>
+        </p:spPr>
+        <p:txBody>
+          <a:bodyPr wrap="square">
+            <a:spAutoFit/>
+          </a:bodyPr>
+          <a:lstStyle/>
+          <a:p>
+            <a:r>
+              <a:rPr sz="1200" b="1" i="0">
+                <a:solidFill>
+                  <a:srgbClr val="FFD000"/>
+                </a:solidFill>
+                <a:latin typeface="Calibri"/>
+              </a:rPr>
+              <a:t>Aclaración</a:t>
+            </a:r>
+          </a:p>
+          <a:p>
+            <a:pPr>
+              <a:spcBef>
+                <a:spcPts val="400"/>
+              </a:spcBef>
+            </a:pPr>
+            <a:r>
+              <a:rPr sz="1400" b="0" i="0">
+                <a:solidFill>
+                  <a:srgbClr val="333333"/>
+                </a:solidFill>
+                <a:latin typeface="Calibri"/>
+              </a:rPr>
+              <a:t>Subir evidencias al paquete CloudLite (Drive/repo) y a la plataforma del curso en la fecha que indique el docente.</a:t>
+            </a:r>
+          </a:p>
+        </p:txBody>
+      </p:sp>
+      <p:sp>
+        <p:nvSpPr>
+          <p:cNvPr id="11" name="Rounded Rectangle 10"/>
+          <p:cNvSpPr/>
+          <p:nvPr/>
+        </p:nvSpPr>
+        <p:spPr>
+          <a:xfrm>
+            <a:off x="457200" y="3694176"/>
+            <a:ext cx="11277295" cy="1051560"/>
+          </a:xfrm>
+          <a:prstGeom prst="roundRect">
+            <a:avLst>
+              <a:gd name="adj" fmla="val 12000"/>
+            </a:avLst>
+          </a:prstGeom>
+          <a:solidFill>
+            <a:srgbClr val="FBE4E4"/>
+          </a:solidFill>
+          <a:ln>
+            <a:noFill/>
+          </a:ln>
+        </p:spPr>
+        <p:style>
+          <a:lnRef idx="1">
+            <a:schemeClr val="accent1"/>
+          </a:lnRef>
+          <a:fillRef idx="3">
+            <a:schemeClr val="accent1"/>
+          </a:fillRef>
+          <a:effectRef idx="2">
+            <a:schemeClr val="accent1"/>
+          </a:effectRef>
+          <a:fontRef idx="minor">
+            <a:schemeClr val="lt1"/>
+          </a:fontRef>
+        </p:style>
+        <p:txBody>
+          <a:bodyPr rtlCol="0" anchor="ctr"/>
+          <a:lstStyle/>
+          <a:p>
+            <a:pPr algn="ctr"/>
+          </a:p>
+        </p:txBody>
+      </p:sp>
+      <p:sp>
+        <p:nvSpPr>
+          <p:cNvPr id="12" name="Rectangle 11"/>
+          <p:cNvSpPr/>
+          <p:nvPr/>
+        </p:nvSpPr>
+        <p:spPr>
+          <a:xfrm>
+            <a:off x="457200" y="3694176"/>
+            <a:ext cx="128016" cy="1051560"/>
+          </a:xfrm>
+          <a:prstGeom prst="rect">
+            <a:avLst/>
+          </a:prstGeom>
+          <a:solidFill>
+            <a:srgbClr val="A02030"/>
+          </a:solidFill>
+          <a:ln>
+            <a:noFill/>
+          </a:ln>
+        </p:spPr>
+        <p:style>
+          <a:lnRef idx="1">
+            <a:schemeClr val="accent1"/>
+          </a:lnRef>
+          <a:fillRef idx="3">
+            <a:schemeClr val="accent1"/>
+          </a:fillRef>
+          <a:effectRef idx="2">
+            <a:schemeClr val="accent1"/>
+          </a:effectRef>
+          <a:fontRef idx="minor">
+            <a:schemeClr val="lt1"/>
+          </a:fontRef>
+        </p:style>
+        <p:txBody>
+          <a:bodyPr rtlCol="0" anchor="ctr"/>
+          <a:lstStyle/>
+          <a:p>
+            <a:pPr algn="ctr"/>
+          </a:p>
+        </p:txBody>
+      </p:sp>
+      <p:sp>
+        <p:nvSpPr>
+          <p:cNvPr id="13" name="TextBox 12"/>
+          <p:cNvSpPr txBox="1"/>
+          <p:nvPr/>
+        </p:nvSpPr>
+        <p:spPr>
+          <a:xfrm>
+            <a:off x="777240" y="3831336"/>
+            <a:ext cx="10774375" cy="822959"/>
+          </a:xfrm>
+          <a:prstGeom prst="rect">
+            <a:avLst/>
+          </a:prstGeom>
+          <a:noFill/>
+        </p:spPr>
+        <p:txBody>
+          <a:bodyPr wrap="square">
+            <a:spAutoFit/>
+          </a:bodyPr>
+          <a:lstStyle/>
+          <a:p>
+            <a:r>
+              <a:rPr sz="1200" b="1" i="0">
+                <a:solidFill>
+                  <a:srgbClr val="A02030"/>
+                </a:solidFill>
+                <a:latin typeface="Calibri"/>
+              </a:rPr>
+              <a:t>Atención</a:t>
+            </a:r>
+          </a:p>
+          <a:p>
+            <a:pPr>
+              <a:spcBef>
+                <a:spcPts val="400"/>
+              </a:spcBef>
+            </a:pPr>
+            <a:r>
+              <a:rPr sz="1400" b="0" i="0">
+                <a:solidFill>
+                  <a:srgbClr val="333333"/>
+                </a:solidFill>
+                <a:latin typeface="Calibri"/>
+              </a:rPr>
+              <a:t>Sin cloud de pago ni instalaciones obligatorias de hipervisores/Docker Desktop.</a:t>
+            </a:r>
+          </a:p>
+        </p:txBody>
+      </p:sp>
+      <p:sp>
+        <p:nvSpPr>
+          <p:cNvPr id="14" name="TextBox 13"/>
+          <p:cNvSpPr txBox="1"/>
+          <p:nvPr/>
+        </p:nvSpPr>
+        <p:spPr>
+          <a:xfrm>
+            <a:off x="11185855" y="6473952"/>
+            <a:ext cx="640080" cy="274320"/>
+          </a:xfrm>
+          <a:prstGeom prst="rect">
+            <a:avLst/>
+          </a:prstGeom>
+          <a:noFill/>
+        </p:spPr>
+        <p:txBody>
+          <a:bodyPr wrap="square">
+            <a:spAutoFit/>
+          </a:bodyPr>
+          <a:lstStyle/>
+          <a:p>
+            <a:pPr algn="r"/>
+            <a:r>
+              <a:rPr sz="1100" b="0" i="0">
+                <a:solidFill>
+                  <a:srgbClr val="666666"/>
+                </a:solidFill>
+                <a:latin typeface="Calibri"/>
+              </a:rPr>
+              <a:t>31</a:t>
+            </a:r>
+          </a:p>
+        </p:txBody>
+      </p:sp>
+    </p:spTree>
+  </p:cSld>
+  <p:clrMapOvr>
+    <a:masterClrMapping/>
+  </p:clrMapOvr>
+</p:sld>
+</file>
+
+<file path=ppt/slides/slide32.xml><?xml version="1.0" encoding="utf-8"?>
 <p:sld xmlns:a="http://schemas.openxmlformats.org/drawingml/2006/main" xmlns:p="http://schemas.openxmlformats.org/presentationml/2006/main" xmlns:r="http://schemas.openxmlformats.org/officeDocument/2006/relationships">
   <p:cSld>
     <p:bg>

--- a/Arquitectura de Sistemas Computacionales/Clases/Clase 12 - Pruebas de rendimiento y preparacion final/Presentacion.pptx
+++ b/Arquitectura de Sistemas Computacionales/Clases/Clase 12 - Pruebas de rendimiento y preparacion final/Presentacion.pptx
@@ -10417,7 +10417,7 @@
                 </a:solidFill>
                 <a:latin typeface="Calibri"/>
               </a:rPr>
-              <a:t>El diagrama se entrega como código Mermaid dentro de la plataforma del curso, no como imagen</a:t>
+              <a:t>El diagrama se entrega como código Mermaid en la plataforma del curso, no como imagen</a:t>
             </a:r>
           </a:p>
         </p:txBody>
@@ -11364,7 +11364,7 @@
                 </a:solidFill>
                 <a:latin typeface="Calibri"/>
               </a:rPr>
-              <a:t>Google Docs · draw.io · (opcional) lab contenedor</a:t>
+              <a:t>Navegador · editores de diagramas y de texto del curso</a:t>
             </a:r>
           </a:p>
           <a:p>
@@ -12488,7 +12488,7 @@
                 </a:solidFill>
                 <a:latin typeface="Calibri"/>
               </a:rPr>
-              <a:t>Subir evidencias al paquete CloudLite (Drive/repo) y a la plataforma del curso en la fecha que indique el docente.</a:t>
+              <a:t>Subir evidencias al paquete CloudLite (Drive/repo) y a la plataforma del curso (la plataforma del curso) en la fecha que indique el docente.</a:t>
             </a:r>
           </a:p>
         </p:txBody>

--- a/Arquitectura de Sistemas Computacionales/Clases/Clase 12 - Pruebas de rendimiento y preparacion final/Presentacion.pptx
+++ b/Arquitectura de Sistemas Computacionales/Clases/Clase 12 - Pruebas de rendimiento y preparacion final/Presentacion.pptx
@@ -11,32 +11,26 @@
     <p:sldId id="259" r:id="rId10"/>
     <p:sldId id="260" r:id="rId11"/>
     <p:sldId id="261" r:id="rId12"/>
-    <p:sldId id="262" r:id="rId13"/>
-    <p:sldId id="263" r:id="rId14"/>
-    <p:sldId id="264" r:id="rId15"/>
-    <p:sldId id="265" r:id="rId16"/>
-    <p:sldId id="266" r:id="rId17"/>
-    <p:sldId id="267" r:id="rId18"/>
-    <p:sldId id="268" r:id="rId19"/>
-    <p:sldId id="269" r:id="rId20"/>
-    <p:sldId id="270" r:id="rId21"/>
-    <p:sldId id="271" r:id="rId22"/>
-    <p:sldId id="272" r:id="rId23"/>
-    <p:sldId id="273" r:id="rId24"/>
-    <p:sldId id="274" r:id="rId25"/>
-    <p:sldId id="275" r:id="rId26"/>
-    <p:sldId id="276" r:id="rId27"/>
-    <p:sldId id="277" r:id="rId28"/>
-    <p:sldId id="278" r:id="rId29"/>
-    <p:sldId id="279" r:id="rId30"/>
-    <p:sldId id="280" r:id="rId31"/>
-    <p:sldId id="281" r:id="rId32"/>
-    <p:sldId id="282" r:id="rId33"/>
-    <p:sldId id="283" r:id="rId34"/>
-    <p:sldId id="284" r:id="rId35"/>
-    <p:sldId id="285" r:id="rId36"/>
-    <p:sldId id="286" r:id="rId37"/>
-    <p:sldId id="287" r:id="rId38"/>
+    <p:sldId id="262" r:id="rId14"/>
+    <p:sldId id="263" r:id="rId15"/>
+    <p:sldId id="264" r:id="rId16"/>
+    <p:sldId id="265" r:id="rId17"/>
+    <p:sldId id="266" r:id="rId18"/>
+    <p:sldId id="267" r:id="rId19"/>
+    <p:sldId id="268" r:id="rId20"/>
+    <p:sldId id="269" r:id="rId21"/>
+    <p:sldId id="270" r:id="rId22"/>
+    <p:sldId id="271" r:id="rId23"/>
+    <p:sldId id="272" r:id="rId24"/>
+    <p:sldId id="273" r:id="rId25"/>
+    <p:sldId id="274" r:id="rId26"/>
+    <p:sldId id="275" r:id="rId27"/>
+    <p:sldId id="276" r:id="rId28"/>
+    <p:sldId id="277" r:id="rId29"/>
+    <p:sldId id="278" r:id="rId30"/>
+    <p:sldId id="279" r:id="rId31"/>
+    <p:sldId id="280" r:id="rId32"/>
+    <p:sldId id="281" r:id="rId33"/>
   </p:sldIdLst>
   <p:sldSz cx="12191695" cy="6858000" type="screen4x3"/>
   <p:notesSz cx="6858000" cy="9144000"/>
@@ -136,6 +130,952 @@
     </a:lvl9pPr>
   </p:defaultTextStyle>
 </p:presentation>
+</file>
+
+<file path=ppt/notesMasters/notesMaster1.xml><?xml version="1.0" encoding="utf-8"?>
+<p:notesMaster xmlns:a="http://schemas.openxmlformats.org/drawingml/2006/main" xmlns:p="http://schemas.openxmlformats.org/presentationml/2006/main" xmlns:r="http://schemas.openxmlformats.org/officeDocument/2006/relationships">
+  <p:cSld>
+    <p:bg>
+      <p:bgRef idx="1001">
+        <a:schemeClr val="bg1"/>
+      </p:bgRef>
+    </p:bg>
+    <p:spTree>
+      <p:nvGrpSpPr>
+        <p:cNvPr id="1" name=""/>
+        <p:cNvGrpSpPr/>
+        <p:nvPr/>
+      </p:nvGrpSpPr>
+      <p:grpSpPr>
+        <a:xfrm>
+          <a:off x="0" y="0"/>
+          <a:ext cx="0" cy="0"/>
+          <a:chOff x="0" y="0"/>
+          <a:chExt cx="0" cy="0"/>
+        </a:xfrm>
+      </p:grpSpPr>
+      <p:sp>
+        <p:nvSpPr>
+          <p:cNvPr id="2" name="Header Placeholder 1"/>
+          <p:cNvSpPr>
+            <a:spLocks noGrp="1"/>
+          </p:cNvSpPr>
+          <p:nvPr>
+            <p:ph type="hdr" sz="quarter"/>
+          </p:nvPr>
+        </p:nvSpPr>
+        <p:spPr>
+          <a:xfrm>
+            <a:off x="0" y="0"/>
+            <a:ext cx="2971800" cy="457200"/>
+          </a:xfrm>
+          <a:prstGeom prst="rect">
+            <a:avLst/>
+          </a:prstGeom>
+        </p:spPr>
+        <p:txBody>
+          <a:bodyPr vert="horz" lIns="91440" tIns="45720" rIns="91440" bIns="45720" rtlCol="0"/>
+          <a:lstStyle>
+            <a:lvl1pPr algn="l">
+              <a:defRPr sz="1200"/>
+            </a:lvl1pPr>
+          </a:lstStyle>
+          <a:p>
+            <a:endParaRPr lang="en-US"/>
+          </a:p>
+        </p:txBody>
+      </p:sp>
+      <p:sp>
+        <p:nvSpPr>
+          <p:cNvPr id="3" name="Date Placeholder 2"/>
+          <p:cNvSpPr>
+            <a:spLocks noGrp="1"/>
+          </p:cNvSpPr>
+          <p:nvPr>
+            <p:ph type="dt" idx="1"/>
+          </p:nvPr>
+        </p:nvSpPr>
+        <p:spPr>
+          <a:xfrm>
+            <a:off x="3884613" y="0"/>
+            <a:ext cx="2971800" cy="457200"/>
+          </a:xfrm>
+          <a:prstGeom prst="rect">
+            <a:avLst/>
+          </a:prstGeom>
+        </p:spPr>
+        <p:txBody>
+          <a:bodyPr vert="horz" lIns="91440" tIns="45720" rIns="91440" bIns="45720" rtlCol="0"/>
+          <a:lstStyle>
+            <a:lvl1pPr algn="r">
+              <a:defRPr sz="1200"/>
+            </a:lvl1pPr>
+          </a:lstStyle>
+          <a:p>
+            <a:fld id="{0F89C1C7-3DCD-1040-A9CF-14679D8B5DDD}" type="datetimeFigureOut">
+              <a:rPr lang="en-US" smtClean="0"/>
+              <a:t>10/17/16</a:t>
+            </a:fld>
+            <a:endParaRPr lang="en-US"/>
+          </a:p>
+        </p:txBody>
+      </p:sp>
+      <p:sp>
+        <p:nvSpPr>
+          <p:cNvPr id="4" name="Slide Image Placeholder 3"/>
+          <p:cNvSpPr>
+            <a:spLocks noGrp="1" noRot="1" noChangeAspect="1"/>
+          </p:cNvSpPr>
+          <p:nvPr>
+            <p:ph type="sldImg" idx="2"/>
+          </p:nvPr>
+        </p:nvSpPr>
+        <p:spPr>
+          <a:xfrm>
+            <a:off x="1143000" y="685800"/>
+            <a:ext cx="4572000" cy="3429000"/>
+          </a:xfrm>
+          <a:prstGeom prst="rect">
+            <a:avLst/>
+          </a:prstGeom>
+          <a:noFill/>
+          <a:ln w="12700">
+            <a:solidFill>
+              <a:prstClr val="black"/>
+            </a:solidFill>
+          </a:ln>
+        </p:spPr>
+        <p:txBody>
+          <a:bodyPr vert="horz" lIns="91440" tIns="45720" rIns="91440" bIns="45720" rtlCol="0" anchor="ctr"/>
+          <a:lstStyle/>
+          <a:p>
+            <a:endParaRPr lang="en-US"/>
+          </a:p>
+        </p:txBody>
+      </p:sp>
+      <p:sp>
+        <p:nvSpPr>
+          <p:cNvPr id="5" name="Notes Placeholder 4"/>
+          <p:cNvSpPr>
+            <a:spLocks noGrp="1"/>
+          </p:cNvSpPr>
+          <p:nvPr>
+            <p:ph type="body" sz="quarter" idx="3"/>
+          </p:nvPr>
+        </p:nvSpPr>
+        <p:spPr>
+          <a:xfrm>
+            <a:off x="685800" y="4343400"/>
+            <a:ext cx="5486400" cy="4114800"/>
+          </a:xfrm>
+          <a:prstGeom prst="rect">
+            <a:avLst/>
+          </a:prstGeom>
+        </p:spPr>
+        <p:txBody>
+          <a:bodyPr vert="horz" lIns="91440" tIns="45720" rIns="91440" bIns="45720" rtlCol="0"/>
+          <a:lstStyle/>
+          <a:p>
+            <a:pPr lvl="0"/>
+            <a:r>
+              <a:rPr lang="en-US" smtClean="0"/>
+              <a:t>Click to edit Master text styles</a:t>
+            </a:r>
+          </a:p>
+          <a:p>
+            <a:pPr lvl="1"/>
+            <a:r>
+              <a:rPr lang="en-US" smtClean="0"/>
+              <a:t>Second level</a:t>
+            </a:r>
+          </a:p>
+          <a:p>
+            <a:pPr lvl="2"/>
+            <a:r>
+              <a:rPr lang="en-US" smtClean="0"/>
+              <a:t>Third level</a:t>
+            </a:r>
+          </a:p>
+          <a:p>
+            <a:pPr lvl="3"/>
+            <a:r>
+              <a:rPr lang="en-US" smtClean="0"/>
+              <a:t>Fourth level</a:t>
+            </a:r>
+          </a:p>
+          <a:p>
+            <a:pPr lvl="4"/>
+            <a:r>
+              <a:rPr lang="en-US" smtClean="0"/>
+              <a:t>Fifth level</a:t>
+            </a:r>
+            <a:endParaRPr lang="en-US"/>
+          </a:p>
+        </p:txBody>
+      </p:sp>
+      <p:sp>
+        <p:nvSpPr>
+          <p:cNvPr id="6" name="Footer Placeholder 5"/>
+          <p:cNvSpPr>
+            <a:spLocks noGrp="1"/>
+          </p:cNvSpPr>
+          <p:nvPr>
+            <p:ph type="ftr" sz="quarter" idx="4"/>
+          </p:nvPr>
+        </p:nvSpPr>
+        <p:spPr>
+          <a:xfrm>
+            <a:off x="0" y="8685213"/>
+            <a:ext cx="2971800" cy="457200"/>
+          </a:xfrm>
+          <a:prstGeom prst="rect">
+            <a:avLst/>
+          </a:prstGeom>
+        </p:spPr>
+        <p:txBody>
+          <a:bodyPr vert="horz" lIns="91440" tIns="45720" rIns="91440" bIns="45720" rtlCol="0" anchor="b"/>
+          <a:lstStyle>
+            <a:lvl1pPr algn="l">
+              <a:defRPr sz="1200"/>
+            </a:lvl1pPr>
+          </a:lstStyle>
+          <a:p>
+            <a:endParaRPr lang="en-US"/>
+          </a:p>
+        </p:txBody>
+      </p:sp>
+      <p:sp>
+        <p:nvSpPr>
+          <p:cNvPr id="7" name="Slide Number Placeholder 6"/>
+          <p:cNvSpPr>
+            <a:spLocks noGrp="1"/>
+          </p:cNvSpPr>
+          <p:nvPr>
+            <p:ph type="sldNum" sz="quarter" idx="5"/>
+          </p:nvPr>
+        </p:nvSpPr>
+        <p:spPr>
+          <a:xfrm>
+            <a:off x="3884613" y="8685213"/>
+            <a:ext cx="2971800" cy="457200"/>
+          </a:xfrm>
+          <a:prstGeom prst="rect">
+            <a:avLst/>
+          </a:prstGeom>
+        </p:spPr>
+        <p:txBody>
+          <a:bodyPr vert="horz" lIns="91440" tIns="45720" rIns="91440" bIns="45720" rtlCol="0" anchor="b"/>
+          <a:lstStyle>
+            <a:lvl1pPr algn="r">
+              <a:defRPr sz="1200"/>
+            </a:lvl1pPr>
+          </a:lstStyle>
+          <a:p>
+            <a:fld id="{BB5E49A5-4136-284D-997B-48E1D791AD67}" type="slidenum">
+              <a:rPr lang="en-US" smtClean="0"/>
+              <a:t>‹#›</a:t>
+            </a:fld>
+            <a:endParaRPr lang="en-US"/>
+          </a:p>
+        </p:txBody>
+      </p:sp>
+    </p:spTree>
+    <p:extLst>
+      <p:ext uri="{BB962C8B-B14F-4D97-AF65-F5344CB8AC3E}">
+        <p14:creationId xmlns:p14="http://schemas.microsoft.com/office/powerpoint/2010/main" val="2623252185"/>
+      </p:ext>
+    </p:extLst>
+  </p:cSld>
+  <p:clrMap bg1="lt1" tx1="dk1" bg2="lt2" tx2="dk2" accent1="accent1" accent2="accent2" accent3="accent3" accent4="accent4" accent5="accent5" accent6="accent6" hlink="hlink" folHlink="folHlink"/>
+  <p:notesStyle>
+    <a:lvl1pPr marL="0" algn="l" defTabSz="457200" rtl="0" eaLnBrk="1" latinLnBrk="0" hangingPunct="1">
+      <a:defRPr sz="1200" kern="1200">
+        <a:solidFill>
+          <a:schemeClr val="tx1"/>
+        </a:solidFill>
+        <a:latin typeface="+mn-lt"/>
+        <a:ea typeface="+mn-ea"/>
+        <a:cs typeface="+mn-cs"/>
+      </a:defRPr>
+    </a:lvl1pPr>
+    <a:lvl2pPr marL="457200" algn="l" defTabSz="457200" rtl="0" eaLnBrk="1" latinLnBrk="0" hangingPunct="1">
+      <a:defRPr sz="1200" kern="1200">
+        <a:solidFill>
+          <a:schemeClr val="tx1"/>
+        </a:solidFill>
+        <a:latin typeface="+mn-lt"/>
+        <a:ea typeface="+mn-ea"/>
+        <a:cs typeface="+mn-cs"/>
+      </a:defRPr>
+    </a:lvl2pPr>
+    <a:lvl3pPr marL="914400" algn="l" defTabSz="457200" rtl="0" eaLnBrk="1" latinLnBrk="0" hangingPunct="1">
+      <a:defRPr sz="1200" kern="1200">
+        <a:solidFill>
+          <a:schemeClr val="tx1"/>
+        </a:solidFill>
+        <a:latin typeface="+mn-lt"/>
+        <a:ea typeface="+mn-ea"/>
+        <a:cs typeface="+mn-cs"/>
+      </a:defRPr>
+    </a:lvl3pPr>
+    <a:lvl4pPr marL="1371600" algn="l" defTabSz="457200" rtl="0" eaLnBrk="1" latinLnBrk="0" hangingPunct="1">
+      <a:defRPr sz="1200" kern="1200">
+        <a:solidFill>
+          <a:schemeClr val="tx1"/>
+        </a:solidFill>
+        <a:latin typeface="+mn-lt"/>
+        <a:ea typeface="+mn-ea"/>
+        <a:cs typeface="+mn-cs"/>
+      </a:defRPr>
+    </a:lvl4pPr>
+    <a:lvl5pPr marL="1828800" algn="l" defTabSz="457200" rtl="0" eaLnBrk="1" latinLnBrk="0" hangingPunct="1">
+      <a:defRPr sz="1200" kern="1200">
+        <a:solidFill>
+          <a:schemeClr val="tx1"/>
+        </a:solidFill>
+        <a:latin typeface="+mn-lt"/>
+        <a:ea typeface="+mn-ea"/>
+        <a:cs typeface="+mn-cs"/>
+      </a:defRPr>
+    </a:lvl5pPr>
+    <a:lvl6pPr marL="2286000" algn="l" defTabSz="457200" rtl="0" eaLnBrk="1" latinLnBrk="0" hangingPunct="1">
+      <a:defRPr sz="1200" kern="1200">
+        <a:solidFill>
+          <a:schemeClr val="tx1"/>
+        </a:solidFill>
+        <a:latin typeface="+mn-lt"/>
+        <a:ea typeface="+mn-ea"/>
+        <a:cs typeface="+mn-cs"/>
+      </a:defRPr>
+    </a:lvl6pPr>
+    <a:lvl7pPr marL="2743200" algn="l" defTabSz="457200" rtl="0" eaLnBrk="1" latinLnBrk="0" hangingPunct="1">
+      <a:defRPr sz="1200" kern="1200">
+        <a:solidFill>
+          <a:schemeClr val="tx1"/>
+        </a:solidFill>
+        <a:latin typeface="+mn-lt"/>
+        <a:ea typeface="+mn-ea"/>
+        <a:cs typeface="+mn-cs"/>
+      </a:defRPr>
+    </a:lvl7pPr>
+    <a:lvl8pPr marL="3200400" algn="l" defTabSz="457200" rtl="0" eaLnBrk="1" latinLnBrk="0" hangingPunct="1">
+      <a:defRPr sz="1200" kern="1200">
+        <a:solidFill>
+          <a:schemeClr val="tx1"/>
+        </a:solidFill>
+        <a:latin typeface="+mn-lt"/>
+        <a:ea typeface="+mn-ea"/>
+        <a:cs typeface="+mn-cs"/>
+      </a:defRPr>
+    </a:lvl8pPr>
+    <a:lvl9pPr marL="3657600" algn="l" defTabSz="457200" rtl="0" eaLnBrk="1" latinLnBrk="0" hangingPunct="1">
+      <a:defRPr sz="1200" kern="1200">
+        <a:solidFill>
+          <a:schemeClr val="tx1"/>
+        </a:solidFill>
+        <a:latin typeface="+mn-lt"/>
+        <a:ea typeface="+mn-ea"/>
+        <a:cs typeface="+mn-cs"/>
+      </a:defRPr>
+    </a:lvl9pPr>
+  </p:notesStyle>
+</p:notesMaster>
+</file>
+
+<file path=ppt/notesSlides/notesSlide1.xml><?xml version="1.0" encoding="utf-8"?>
+<p:notes xmlns:a="http://schemas.openxmlformats.org/drawingml/2006/main" xmlns:p="http://schemas.openxmlformats.org/presentationml/2006/main" xmlns:r="http://schemas.openxmlformats.org/officeDocument/2006/relationships">
+  <p:cSld>
+    <p:spTree>
+      <p:nvGrpSpPr>
+        <p:cNvPr id="1" name=""/>
+        <p:cNvGrpSpPr/>
+        <p:nvPr/>
+      </p:nvGrpSpPr>
+      <p:grpSpPr>
+        <a:xfrm>
+          <a:off x="0" y="0"/>
+          <a:ext cx="0" cy="0"/>
+          <a:chOff x="0" y="0"/>
+          <a:chExt cx="0" cy="0"/>
+        </a:xfrm>
+      </p:grpSpPr>
+      <p:sp>
+        <p:nvSpPr>
+          <p:cNvPr id="2" name="Slide Image Placeholder 1"/>
+          <p:cNvSpPr>
+            <a:spLocks noGrp="1"/>
+          </p:cNvSpPr>
+          <p:nvPr>
+            <p:ph type="sldImg" idx="2"/>
+          </p:nvPr>
+        </p:nvSpPr>
+        <p:spPr/>
+      </p:sp>
+      <p:sp>
+        <p:nvSpPr>
+          <p:cNvPr id="3" name="Notes Placeholder 2"/>
+          <p:cNvSpPr>
+            <a:spLocks noGrp="1"/>
+          </p:cNvSpPr>
+          <p:nvPr>
+            <p:ph type="body" idx="3" sz="quarter"/>
+          </p:nvPr>
+        </p:nvSpPr>
+        <p:spPr/>
+        <p:txBody>
+          <a:bodyPr/>
+          <a:lstStyle/>
+          <a:p>
+            <a:r>
+              <a:t>Hay dos magnitudes que se confunden todo el tiempo.</a:t>
+            </a:r>
+          </a:p>
+          <a:p/>
+          <a:p>
+            <a:r>
+              <a:t>La tercera magnitud es la concurrencia, cuantas peticiones estan en vuelo al mismo tiempo, y las tres se relacionan por una identidad que el docente puede escribir en el tablero: concurrencia igual a RPS por latencia.</a:t>
+            </a:r>
+          </a:p>
+        </p:txBody>
+      </p:sp>
+      <p:sp>
+        <p:nvSpPr>
+          <p:cNvPr id="4" name="Slide Number Placeholder 3"/>
+          <p:cNvSpPr>
+            <a:spLocks noGrp="1"/>
+          </p:cNvSpPr>
+          <p:nvPr>
+            <p:ph type="sldNum" idx="5" sz="quarter"/>
+          </p:nvPr>
+        </p:nvSpPr>
+        <p:spPr/>
+      </p:sp>
+    </p:spTree>
+  </p:cSld>
+  <p:clrMapOvr>
+    <a:masterClrMapping/>
+  </p:clrMapOvr>
+</p:notes>
+</file>
+
+<file path=ppt/notesSlides/notesSlide2.xml><?xml version="1.0" encoding="utf-8"?>
+<p:notes xmlns:a="http://schemas.openxmlformats.org/drawingml/2006/main" xmlns:p="http://schemas.openxmlformats.org/presentationml/2006/main" xmlns:r="http://schemas.openxmlformats.org/officeDocument/2006/relationships">
+  <p:cSld>
+    <p:spTree>
+      <p:nvGrpSpPr>
+        <p:cNvPr id="1" name=""/>
+        <p:cNvGrpSpPr/>
+        <p:nvPr/>
+      </p:nvGrpSpPr>
+      <p:grpSpPr>
+        <a:xfrm>
+          <a:off x="0" y="0"/>
+          <a:ext cx="0" cy="0"/>
+          <a:chOff x="0" y="0"/>
+          <a:chExt cx="0" cy="0"/>
+        </a:xfrm>
+      </p:grpSpPr>
+      <p:sp>
+        <p:nvSpPr>
+          <p:cNvPr id="2" name="Slide Image Placeholder 1"/>
+          <p:cNvSpPr>
+            <a:spLocks noGrp="1"/>
+          </p:cNvSpPr>
+          <p:nvPr>
+            <p:ph type="sldImg" idx="2"/>
+          </p:nvPr>
+        </p:nvSpPr>
+        <p:spPr/>
+      </p:sp>
+      <p:sp>
+        <p:nvSpPr>
+          <p:cNvPr id="3" name="Notes Placeholder 2"/>
+          <p:cNvSpPr>
+            <a:spLocks noGrp="1"/>
+          </p:cNvSpPr>
+          <p:nvPr>
+            <p:ph type="body" idx="3" sz="quarter"/>
+          </p:nvPr>
+        </p:nvSpPr>
+        <p:spPr/>
+        <p:txBody>
+          <a:bodyPr/>
+          <a:lstStyle/>
+          <a:p>
+            <a:r>
+              <a:t>Por eso la industria escribe sus objetivos en percentiles, y por eso el entregable de hoy exige un objetivo con la forma "p95 del endpoint de listado menor a 300 milisegundos con 5 RPS", que tiene metrica, umbral y condicion de carga.</a:t>
+            </a:r>
+          </a:p>
+        </p:txBody>
+      </p:sp>
+      <p:sp>
+        <p:nvSpPr>
+          <p:cNvPr id="4" name="Slide Number Placeholder 3"/>
+          <p:cNvSpPr>
+            <a:spLocks noGrp="1"/>
+          </p:cNvSpPr>
+          <p:nvPr>
+            <p:ph type="sldNum" idx="5" sz="quarter"/>
+          </p:nvPr>
+        </p:nvSpPr>
+        <p:spPr/>
+      </p:sp>
+    </p:spTree>
+  </p:cSld>
+  <p:clrMapOvr>
+    <a:masterClrMapping/>
+  </p:clrMapOvr>
+</p:notes>
+</file>
+
+<file path=ppt/notesSlides/notesSlide3.xml><?xml version="1.0" encoding="utf-8"?>
+<p:notes xmlns:a="http://schemas.openxmlformats.org/drawingml/2006/main" xmlns:p="http://schemas.openxmlformats.org/presentationml/2006/main" xmlns:r="http://schemas.openxmlformats.org/officeDocument/2006/relationships">
+  <p:cSld>
+    <p:spTree>
+      <p:nvGrpSpPr>
+        <p:cNvPr id="1" name=""/>
+        <p:cNvGrpSpPr/>
+        <p:nvPr/>
+      </p:nvGrpSpPr>
+      <p:grpSpPr>
+        <a:xfrm>
+          <a:off x="0" y="0"/>
+          <a:ext cx="0" cy="0"/>
+          <a:chOff x="0" y="0"/>
+          <a:chExt cx="0" cy="0"/>
+        </a:xfrm>
+      </p:grpSpPr>
+      <p:sp>
+        <p:nvSpPr>
+          <p:cNvPr id="2" name="Slide Image Placeholder 1"/>
+          <p:cNvSpPr>
+            <a:spLocks noGrp="1"/>
+          </p:cNvSpPr>
+          <p:nvPr>
+            <p:ph type="sldImg" idx="2"/>
+          </p:nvPr>
+        </p:nvSpPr>
+        <p:spPr/>
+      </p:sp>
+      <p:sp>
+        <p:nvSpPr>
+          <p:cNvPr id="3" name="Notes Placeholder 2"/>
+          <p:cNvSpPr>
+            <a:spLocks noGrp="1"/>
+          </p:cNvSpPr>
+          <p:nvPr>
+            <p:ph type="body" idx="3" sz="quarter"/>
+          </p:nvPr>
+        </p:nvSpPr>
+        <p:spPr/>
+        <p:txBody>
+          <a:bodyPr/>
+          <a:lstStyle/>
+          <a:p>
+            <a:r>
+              <a:t>Los umbrales que el docente debe poder citar son convenciones de percepcion humana bien establecidas, no leyes fisicas.</a:t>
+            </a:r>
+          </a:p>
+          <a:p/>
+          <a:p>
+            <a:r>
+              <a:t>De ahi sale la convencion practica para una API interna, que ubica el objetivo de p95 entre 200 y 300 milisegundos dejando presupuesto para que el navegador y la red agreguen lo suyo; para carga de pagina completa la referencia publica de Core Web Vitals considera bueno un renderizado del contenido principal por debajo de 2.5 segundos.</a:t>
+            </a:r>
+          </a:p>
+          <a:p/>
+          <a:p>
+            <a:r>
+              <a:t>Lo que si es regla es que el numero se escribe antes de medir y se justifica con el caso de uso, no se ajusta despues para que la medicion salga bien.</a:t>
+            </a:r>
+          </a:p>
+        </p:txBody>
+      </p:sp>
+      <p:sp>
+        <p:nvSpPr>
+          <p:cNvPr id="4" name="Slide Number Placeholder 3"/>
+          <p:cNvSpPr>
+            <a:spLocks noGrp="1"/>
+          </p:cNvSpPr>
+          <p:nvPr>
+            <p:ph type="sldNum" idx="5" sz="quarter"/>
+          </p:nvPr>
+        </p:nvSpPr>
+        <p:spPr/>
+      </p:sp>
+    </p:spTree>
+  </p:cSld>
+  <p:clrMapOvr>
+    <a:masterClrMapping/>
+  </p:clrMapOvr>
+</p:notes>
+</file>
+
+<file path=ppt/notesSlides/notesSlide4.xml><?xml version="1.0" encoding="utf-8"?>
+<p:notes xmlns:a="http://schemas.openxmlformats.org/drawingml/2006/main" xmlns:p="http://schemas.openxmlformats.org/presentationml/2006/main" xmlns:r="http://schemas.openxmlformats.org/officeDocument/2006/relationships">
+  <p:cSld>
+    <p:spTree>
+      <p:nvGrpSpPr>
+        <p:cNvPr id="1" name=""/>
+        <p:cNvGrpSpPr/>
+        <p:nvPr/>
+      </p:nvGrpSpPr>
+      <p:grpSpPr>
+        <a:xfrm>
+          <a:off x="0" y="0"/>
+          <a:ext cx="0" cy="0"/>
+          <a:chOff x="0" y="0"/>
+          <a:chExt cx="0" cy="0"/>
+        </a:xfrm>
+      </p:grpSpPr>
+      <p:sp>
+        <p:nvSpPr>
+          <p:cNvPr id="2" name="Slide Image Placeholder 1"/>
+          <p:cNvSpPr>
+            <a:spLocks noGrp="1"/>
+          </p:cNvSpPr>
+          <p:nvPr>
+            <p:ph type="sldImg" idx="2"/>
+          </p:nvPr>
+        </p:nvSpPr>
+        <p:spPr/>
+      </p:sp>
+      <p:sp>
+        <p:nvSpPr>
+          <p:cNvPr id="3" name="Notes Placeholder 2"/>
+          <p:cNvSpPr>
+            <a:spLocks noGrp="1"/>
+          </p:cNvSpPr>
+          <p:nvPr>
+            <p:ph type="body" idx="3" sz="quarter"/>
+          </p:nvPr>
+        </p:nvSpPr>
+        <p:spPr/>
+        <p:txBody>
+          <a:bodyPr/>
+          <a:lstStyle/>
+          <a:p>
+            <a:r>
+              <a:t>La forma correcta de estimarlo es aritmetica de servilleta y el docente debe hacerla en vivo con CloudLite.</a:t>
+            </a:r>
+          </a:p>
+        </p:txBody>
+      </p:sp>
+      <p:sp>
+        <p:nvSpPr>
+          <p:cNvPr id="4" name="Slide Number Placeholder 3"/>
+          <p:cNvSpPr>
+            <a:spLocks noGrp="1"/>
+          </p:cNvSpPr>
+          <p:nvPr>
+            <p:ph type="sldNum" idx="5" sz="quarter"/>
+          </p:nvPr>
+        </p:nvSpPr>
+        <p:spPr/>
+      </p:sp>
+    </p:spTree>
+  </p:cSld>
+  <p:clrMapOvr>
+    <a:masterClrMapping/>
+  </p:clrMapOvr>
+</p:notes>
+</file>
+
+<file path=ppt/notesSlides/notesSlide5.xml><?xml version="1.0" encoding="utf-8"?>
+<p:notes xmlns:a="http://schemas.openxmlformats.org/drawingml/2006/main" xmlns:p="http://schemas.openxmlformats.org/presentationml/2006/main" xmlns:r="http://schemas.openxmlformats.org/officeDocument/2006/relationships">
+  <p:cSld>
+    <p:spTree>
+      <p:nvGrpSpPr>
+        <p:cNvPr id="1" name=""/>
+        <p:cNvGrpSpPr/>
+        <p:nvPr/>
+      </p:nvGrpSpPr>
+      <p:grpSpPr>
+        <a:xfrm>
+          <a:off x="0" y="0"/>
+          <a:ext cx="0" cy="0"/>
+          <a:chOff x="0" y="0"/>
+          <a:chExt cx="0" cy="0"/>
+        </a:xfrm>
+      </p:grpSpPr>
+      <p:sp>
+        <p:nvSpPr>
+          <p:cNvPr id="2" name="Slide Image Placeholder 1"/>
+          <p:cNvSpPr>
+            <a:spLocks noGrp="1"/>
+          </p:cNvSpPr>
+          <p:nvPr>
+            <p:ph type="sldImg" idx="2"/>
+          </p:nvPr>
+        </p:nvSpPr>
+        <p:spPr/>
+      </p:sp>
+      <p:sp>
+        <p:nvSpPr>
+          <p:cNvPr id="3" name="Notes Placeholder 2"/>
+          <p:cNvSpPr>
+            <a:spLocks noGrp="1"/>
+          </p:cNvSpPr>
+          <p:nvPr>
+            <p:ph type="body" idx="3" sz="quarter"/>
+          </p:nvPr>
+        </p:nvSpPr>
+        <p:spPr/>
+        <p:txBody>
+          <a:bodyPr/>
+          <a:lstStyle/>
+          <a:p>
+            <a:r>
+              <a:t>Esos tres cubren la mayoria de los casos que los estudiantes van a sospechar.</a:t>
+            </a:r>
+          </a:p>
+        </p:txBody>
+      </p:sp>
+      <p:sp>
+        <p:nvSpPr>
+          <p:cNvPr id="4" name="Slide Number Placeholder 3"/>
+          <p:cNvSpPr>
+            <a:spLocks noGrp="1"/>
+          </p:cNvSpPr>
+          <p:nvPr>
+            <p:ph type="sldNum" idx="5" sz="quarter"/>
+          </p:nvPr>
+        </p:nvSpPr>
+        <p:spPr/>
+      </p:sp>
+    </p:spTree>
+  </p:cSld>
+  <p:clrMapOvr>
+    <a:masterClrMapping/>
+  </p:clrMapOvr>
+</p:notes>
+</file>
+
+<file path=ppt/notesSlides/notesSlide6.xml><?xml version="1.0" encoding="utf-8"?>
+<p:notes xmlns:a="http://schemas.openxmlformats.org/drawingml/2006/main" xmlns:p="http://schemas.openxmlformats.org/presentationml/2006/main" xmlns:r="http://schemas.openxmlformats.org/officeDocument/2006/relationships">
+  <p:cSld>
+    <p:spTree>
+      <p:nvGrpSpPr>
+        <p:cNvPr id="1" name=""/>
+        <p:cNvGrpSpPr/>
+        <p:nvPr/>
+      </p:nvGrpSpPr>
+      <p:grpSpPr>
+        <a:xfrm>
+          <a:off x="0" y="0"/>
+          <a:ext cx="0" cy="0"/>
+          <a:chOff x="0" y="0"/>
+          <a:chExt cx="0" cy="0"/>
+        </a:xfrm>
+      </p:grpSpPr>
+      <p:sp>
+        <p:nvSpPr>
+          <p:cNvPr id="2" name="Slide Image Placeholder 1"/>
+          <p:cNvSpPr>
+            <a:spLocks noGrp="1"/>
+          </p:cNvSpPr>
+          <p:nvPr>
+            <p:ph type="sldImg" idx="2"/>
+          </p:nvPr>
+        </p:nvSpPr>
+        <p:spPr/>
+      </p:sp>
+      <p:sp>
+        <p:nvSpPr>
+          <p:cNvPr id="3" name="Notes Placeholder 2"/>
+          <p:cNvSpPr>
+            <a:spLocks noGrp="1"/>
+          </p:cNvSpPr>
+          <p:nvPr>
+            <p:ph type="body" idx="3" sz="quarter"/>
+          </p:nvPr>
+        </p:nvSpPr>
+        <p:spPr/>
+        <p:txBody>
+          <a:bodyPr/>
+          <a:lstStyle/>
+          <a:p>
+            <a:r>
+              <a:t>Los tipos de prueba se distinguen por la pregunta que responden.</a:t>
+            </a:r>
+          </a:p>
+          <a:p/>
+          <a:p>
+            <a:r>
+              <a:t>La prueba de carga o baseline aplica la carga esperada y responde si el sistema cumple el SLO en condiciones normales.</a:t>
+            </a:r>
+          </a:p>
+          <a:p/>
+          <a:p>
+            <a:r>
+              <a:t>Un escenario bien razonado sin ejecucion vale mas que una ejecucion sin objetivo.</a:t>
+            </a:r>
+          </a:p>
+        </p:txBody>
+      </p:sp>
+      <p:sp>
+        <p:nvSpPr>
+          <p:cNvPr id="4" name="Slide Number Placeholder 3"/>
+          <p:cNvSpPr>
+            <a:spLocks noGrp="1"/>
+          </p:cNvSpPr>
+          <p:nvPr>
+            <p:ph type="sldNum" idx="5" sz="quarter"/>
+          </p:nvPr>
+        </p:nvSpPr>
+        <p:spPr/>
+      </p:sp>
+    </p:spTree>
+  </p:cSld>
+  <p:clrMapOvr>
+    <a:masterClrMapping/>
+  </p:clrMapOvr>
+</p:notes>
+</file>
+
+<file path=ppt/notesSlides/notesSlide7.xml><?xml version="1.0" encoding="utf-8"?>
+<p:notes xmlns:a="http://schemas.openxmlformats.org/drawingml/2006/main" xmlns:p="http://schemas.openxmlformats.org/presentationml/2006/main" xmlns:r="http://schemas.openxmlformats.org/officeDocument/2006/relationships">
+  <p:cSld>
+    <p:spTree>
+      <p:nvGrpSpPr>
+        <p:cNvPr id="1" name=""/>
+        <p:cNvGrpSpPr/>
+        <p:nvPr/>
+      </p:nvGrpSpPr>
+      <p:grpSpPr>
+        <a:xfrm>
+          <a:off x="0" y="0"/>
+          <a:ext cx="0" cy="0"/>
+          <a:chOff x="0" y="0"/>
+          <a:chExt cx="0" cy="0"/>
+        </a:xfrm>
+      </p:grpSpPr>
+      <p:sp>
+        <p:nvSpPr>
+          <p:cNvPr id="2" name="Slide Image Placeholder 1"/>
+          <p:cNvSpPr>
+            <a:spLocks noGrp="1"/>
+          </p:cNvSpPr>
+          <p:nvPr>
+            <p:ph type="sldImg" idx="2"/>
+          </p:nvPr>
+        </p:nvSpPr>
+        <p:spPr/>
+      </p:sp>
+      <p:sp>
+        <p:nvSpPr>
+          <p:cNvPr id="3" name="Notes Placeholder 2"/>
+          <p:cNvSpPr>
+            <a:spLocks noGrp="1"/>
+          </p:cNvSpPr>
+          <p:nvPr>
+            <p:ph type="body" idx="3" sz="quarter"/>
+          </p:nvPr>
+        </p:nvSpPr>
+        <p:spPr/>
+        <p:txBody>
+          <a:bodyPr/>
+          <a:lstStyle/>
+          <a:p>
+            <a:r>
+              <a:t>Hay que decir explicitamente que este ensayo no es la sustentacion, que es la Clase 15, ni el Parcial 3 de la Clase 14, que es evaluacion escrita: son tres cosas distintas y mezclarlas confunde al grupo.</a:t>
+            </a:r>
+          </a:p>
+        </p:txBody>
+      </p:sp>
+      <p:sp>
+        <p:nvSpPr>
+          <p:cNvPr id="4" name="Slide Number Placeholder 3"/>
+          <p:cNvSpPr>
+            <a:spLocks noGrp="1"/>
+          </p:cNvSpPr>
+          <p:nvPr>
+            <p:ph type="sldNum" idx="5" sz="quarter"/>
+          </p:nvPr>
+        </p:nvSpPr>
+        <p:spPr/>
+      </p:sp>
+    </p:spTree>
+  </p:cSld>
+  <p:clrMapOvr>
+    <a:masterClrMapping/>
+  </p:clrMapOvr>
+</p:notes>
+</file>
+
+<file path=ppt/notesSlides/notesSlide8.xml><?xml version="1.0" encoding="utf-8"?>
+<p:notes xmlns:a="http://schemas.openxmlformats.org/drawingml/2006/main" xmlns:p="http://schemas.openxmlformats.org/presentationml/2006/main" xmlns:r="http://schemas.openxmlformats.org/officeDocument/2006/relationships">
+  <p:cSld>
+    <p:spTree>
+      <p:nvGrpSpPr>
+        <p:cNvPr id="1" name=""/>
+        <p:cNvGrpSpPr/>
+        <p:nvPr/>
+      </p:nvGrpSpPr>
+      <p:grpSpPr>
+        <a:xfrm>
+          <a:off x="0" y="0"/>
+          <a:ext cx="0" cy="0"/>
+          <a:chOff x="0" y="0"/>
+          <a:chExt cx="0" cy="0"/>
+        </a:xfrm>
+      </p:grpSpPr>
+      <p:sp>
+        <p:nvSpPr>
+          <p:cNvPr id="2" name="Slide Image Placeholder 1"/>
+          <p:cNvSpPr>
+            <a:spLocks noGrp="1"/>
+          </p:cNvSpPr>
+          <p:nvPr>
+            <p:ph type="sldImg" idx="2"/>
+          </p:nvPr>
+        </p:nvSpPr>
+        <p:spPr/>
+      </p:sp>
+      <p:sp>
+        <p:nvSpPr>
+          <p:cNvPr id="3" name="Notes Placeholder 2"/>
+          <p:cNvSpPr>
+            <a:spLocks noGrp="1"/>
+          </p:cNvSpPr>
+          <p:nvPr>
+            <p:ph type="body" idx="3" sz="quarter"/>
+          </p:nvPr>
+        </p:nvSpPr>
+        <p:spPr/>
+        <p:txBody>
+          <a:bodyPr/>
+          <a:lstStyle/>
+          <a:p>
+            <a:r>
+              <a:t>Tres preguntas llegan siempre.</a:t>
+            </a:r>
+          </a:p>
+          <a:p/>
+          <a:p>
+            <a:r>
+              <a:t>Conviene cerrar recordando que el bottleneck identificado hoy es insumo obligatorio de la Clase 13: no se puede escribir una politica de autoescalado sensata sin saber que recurso se agota primero.</a:t>
+            </a:r>
+          </a:p>
+        </p:txBody>
+      </p:sp>
+      <p:sp>
+        <p:nvSpPr>
+          <p:cNvPr id="4" name="Slide Number Placeholder 3"/>
+          <p:cNvSpPr>
+            <a:spLocks noGrp="1"/>
+          </p:cNvSpPr>
+          <p:nvPr>
+            <p:ph type="sldNum" idx="5" sz="quarter"/>
+          </p:nvPr>
+        </p:nvSpPr>
+        <p:spPr/>
+      </p:sp>
+    </p:spTree>
+  </p:cSld>
+  <p:clrMapOvr>
+    <a:masterClrMapping/>
+  </p:clrMapOvr>
+</p:notes>
 </file>
 
 <file path=ppt/slideLayouts/slideLayout1.xml><?xml version="1.0" encoding="utf-8"?>
@@ -3349,13 +4289,22 @@
               </a:spcAft>
             </a:pPr>
             <a:r>
+              <a:rPr sz="1500" b="0" i="0">
+                <a:solidFill>
+                  <a:srgbClr val="333333"/>
+                </a:solidFill>
+                <a:latin typeface="Calibri"/>
+              </a:rPr>
+              <a:t>Bloque </a:t>
+            </a:r>
+            <a:r>
               <a:rPr sz="1500" b="1" i="0">
                 <a:solidFill>
                   <a:srgbClr val="333333"/>
                 </a:solidFill>
                 <a:latin typeface="Calibri"/>
               </a:rPr>
-              <a:t>Hoy avanzamos el PI en:</a:t>
+              <a:t>120 min</a:t>
             </a:r>
             <a:r>
               <a:rPr sz="1500" b="0" i="0">
@@ -3364,7 +4313,25 @@
                 </a:solidFill>
                 <a:latin typeface="Calibri"/>
               </a:rPr>
-              <a:t> Escenario de rendimiento + ensayo 5–8 min de sustentación</a:t>
+              <a:t> · sesión </a:t>
+            </a:r>
+            <a:r>
+              <a:rPr sz="1500" b="1" i="0">
+                <a:solidFill>
+                  <a:srgbClr val="333333"/>
+                </a:solidFill>
+                <a:latin typeface="Calibri"/>
+              </a:rPr>
+              <a:t>virtual síncrona</a:t>
+            </a:r>
+            <a:r>
+              <a:rPr sz="1500" b="0" i="0">
+                <a:solidFill>
+                  <a:srgbClr val="333333"/>
+                </a:solidFill>
+                <a:latin typeface="Calibri"/>
+              </a:rPr>
+              <a:t> por Google Meet.</a:t>
             </a:r>
           </a:p>
           <a:p>
@@ -3380,41 +4347,7 @@
                 </a:solidFill>
                 <a:latin typeface="Calibri"/>
               </a:rPr>
-              <a:t>Bloque </a:t>
-            </a:r>
-            <a:r>
-              <a:rPr sz="1500" b="1" i="0">
-                <a:solidFill>
-                  <a:srgbClr val="333333"/>
-                </a:solidFill>
-                <a:latin typeface="Calibri"/>
-              </a:rPr>
-              <a:t>120 min</a:t>
-            </a:r>
-            <a:r>
-              <a:rPr sz="1500" b="0" i="0">
-                <a:solidFill>
-                  <a:srgbClr val="333333"/>
-                </a:solidFill>
-                <a:latin typeface="Calibri"/>
-              </a:rPr>
-              <a:t> · Teoría breve · Taller PI · cierre.</a:t>
-            </a:r>
-          </a:p>
-          <a:p>
-            <a:pPr>
-              <a:spcAft>
-                <a:spcPts val="800"/>
-              </a:spcAft>
-            </a:pPr>
-            <a:r>
-              <a:rPr sz="1500" b="0" i="0">
-                <a:solidFill>
-                  <a:srgbClr val="333333"/>
-                </a:solidFill>
-                <a:latin typeface="Calibri"/>
-              </a:rPr>
-              <a:t>Herramientas gratis + navegador · sin AWS/GCP/Oracle Cloud.</a:t>
+              <a:t>Conceptos del tema, ejemplos resueltos sobre CloudLite y cierre conceptual.</a:t>
             </a:r>
           </a:p>
         </p:txBody>
@@ -3595,7 +4528,7 @@
                 </a:solidFill>
                 <a:latin typeface="Calibri"/>
               </a:rPr>
-              <a:t>Por que el promedio miente y el percentil no (2/2)</a:t>
+              <a:t>Los umbrales de percepcion, y por que son convenciones (1/2)</a:t>
             </a:r>
           </a:p>
         </p:txBody>
@@ -3634,7 +4567,7 @@
                 </a:solidFill>
                 <a:latin typeface="Calibri"/>
               </a:rPr>
-              <a:t>–   El promedio es 314 milisegundos, una cifra que suena aceptable y que no le paso a nadie: ninguna peticion real tardo 314 milisegundos.</a:t>
+              <a:t>–   Por debajo de unos 100 milisegundos la respuesta se percibe instantanea; hasta cerca de 1 segundo el usuario mantiene el hilo aunque note la demora; pasados unos 10 segundos pierde la atencion y cambia de tarea o recarga.</a:t>
             </a:r>
           </a:p>
           <a:p>
@@ -3650,7 +4583,7 @@
                 </a:solidFill>
                 <a:latin typeface="Calibri"/>
               </a:rPr>
-              <a:t>–   El p50, o mediana, es 120; el p99 es 4000.</a:t>
+              <a:t>–   Ninguna es regla dura: un reporte pesado puede tener un objetivo legitimo de 3 segundos y un autocompletado necesita estar bajo 100.</a:t>
             </a:r>
           </a:p>
           <a:p>
@@ -3666,23 +4599,7 @@
                 </a:solidFill>
                 <a:latin typeface="Calibri"/>
               </a:rPr>
-              <a:t>–   Reportar el promedio esconde a cinco usuarios de cada cien esperando cuatro segundos; reportar p95 y p99 los hace visibles.</a:t>
-            </a:r>
-          </a:p>
-          <a:p>
-            <a:pPr>
-              <a:spcAft>
-                <a:spcPts val="800"/>
-              </a:spcAft>
-            </a:pPr>
-            <a:r>
-              <a:rPr sz="2000" b="0" i="0">
-                <a:solidFill>
-                  <a:srgbClr val="333333"/>
-                </a:solidFill>
-                <a:latin typeface="Calibri"/>
-              </a:rPr>
-              <a:t>–   Un objetivo sin condicion de carga no significa nada: cualquier sistema es rapido sin usuarios.</a:t>
+              <a:t>–   Junto al tiempo va siempre la tasa de error, el porcentaje de peticiones que fallan, porque un sistema que responde rapido devolviendo errores no cumple.</a:t>
             </a:r>
           </a:p>
         </p:txBody>
@@ -3863,7 +4780,7 @@
                 </a:solidFill>
                 <a:latin typeface="Calibri"/>
               </a:rPr>
-              <a:t>Los umbrales de percepcion, y por que son convenciones (1/2)</a:t>
+              <a:t>Los umbrales de percepcion, y por que son convenciones (2/2)</a:t>
             </a:r>
           </a:p>
         </p:txBody>
@@ -3902,7 +4819,7 @@
                 </a:solidFill>
                 <a:latin typeface="Calibri"/>
               </a:rPr>
-              <a:t>–   Por debajo de unos 100 milisegundos la respuesta se percibe instantanea; hasta cerca de 1 segundo el usuario mantiene el hilo aunque note la demora; pasados unos 10 segundos pierde la atencion y cambia de tarea o recarga.</a:t>
+              <a:t>–   Aqui aparecen tres siglas: el SLI es el indicador que se mide, el SLO es el objetivo interno que el equipo se compromete a cumplir y el SLA es el compromiso contractual con penalidad.</a:t>
             </a:r>
           </a:p>
           <a:p>
@@ -3918,7 +4835,7 @@
                 </a:solidFill>
                 <a:latin typeface="Calibri"/>
               </a:rPr>
-              <a:t>–   Ninguna es regla dura: un reporte pesado puede tener un objetivo legitimo de 3 segundos y un autocompletado necesita estar bajo 100.</a:t>
+              <a:t>–   Un SLO de 99.9 por ciento de disponibilidad, los "tres nueves", admite unos 43 minutos de caida al mes; el 99.99 baja a poco mas de 4 minutos</a:t>
             </a:r>
           </a:p>
           <a:p>
@@ -3934,7 +4851,7 @@
                 </a:solidFill>
                 <a:latin typeface="Calibri"/>
               </a:rPr>
-              <a:t>–   Junto al tiempo va siempre la tasa de error, el porcentaje de peticiones que fallan, porque un sistema que responde rapido devolviendo errores no cumple.</a:t>
+              <a:t>–   Y esa diferencia de un decimal suele multiplicar el costo de la arquitectura, lo que amarra con la tabla de la Clase 10.</a:t>
             </a:r>
           </a:p>
         </p:txBody>
@@ -4115,7 +5032,7 @@
                 </a:solidFill>
                 <a:latin typeface="Calibri"/>
               </a:rPr>
-              <a:t>Los umbrales de percepcion, y por que son convenciones (2/2)</a:t>
+              <a:t>El escenario de carga: aritmetica de servilleta (1/2)</a:t>
             </a:r>
           </a:p>
         </p:txBody>
@@ -4154,7 +5071,7 @@
                 </a:solidFill>
                 <a:latin typeface="Calibri"/>
               </a:rPr>
-              <a:t>–   Aqui aparecen tres siglas: el SLI es el indicador que se mide, el SLO es el objetivo interno que el equipo se compromete a cumplir y el SLA es el compromiso contractual con penalidad.</a:t>
+              <a:t>–   El segundo componente del entregable es el escenario de carga, y el estudiante casi siempre lo inventa exagerado.</a:t>
             </a:r>
           </a:p>
           <a:p>
@@ -4170,7 +5087,7 @@
                 </a:solidFill>
                 <a:latin typeface="Calibri"/>
               </a:rPr>
-              <a:t>–   Un SLO de 99.9 por ciento de disponibilidad, los "tres nueves", admite unos 43 minutos de caida al mes; el 99.99 baja a poco mas de 4 minutos</a:t>
+              <a:t>–   Suponga 1000 usuarios activos al dia, cada uno con unas 20 peticiones en su sesion: son 20000 peticiones diarias.</a:t>
             </a:r>
           </a:p>
           <a:p>
@@ -4186,7 +5103,23 @@
                 </a:solidFill>
                 <a:latin typeface="Calibri"/>
               </a:rPr>
-              <a:t>–   Y esa diferencia de un decimal suele multiplicar el costo de la arquitectura, lo que amarra con la tabla de la Clase 10.</a:t>
+              <a:t>–   Si un 40 por ciento cae en una ventana de dos horas, eso es 8000 peticiones en 7200 segundos, algo mas de 1 RPS promedio en la hora pico.</a:t>
+            </a:r>
+          </a:p>
+          <a:p>
+            <a:pPr>
+              <a:spcAft>
+                <a:spcPts val="800"/>
+              </a:spcAft>
+            </a:pPr>
+            <a:r>
+              <a:rPr sz="2000" b="0" i="0">
+                <a:solidFill>
+                  <a:srgbClr val="333333"/>
+                </a:solidFill>
+                <a:latin typeface="Calibri"/>
+              </a:rPr>
+              <a:t>–   Como el trafico real llega en rafagas, se aplica un factor de pico de 3 a 5 veces y se dimensiona para unos 5 RPS.</a:t>
             </a:r>
           </a:p>
         </p:txBody>
@@ -4367,7 +5300,7 @@
                 </a:solidFill>
                 <a:latin typeface="Calibri"/>
               </a:rPr>
-              <a:t>El escenario de carga: aritmetica de servilleta (1/2)</a:t>
+              <a:t>El escenario de carga: aritmetica de servilleta (2/2)</a:t>
             </a:r>
           </a:p>
         </p:txBody>
@@ -4406,7 +5339,7 @@
                 </a:solidFill>
                 <a:latin typeface="Calibri"/>
               </a:rPr>
-              <a:t>–   El segundo componente del entregable es el escenario de carga, y el estudiante casi siempre lo inventa exagerado.</a:t>
+              <a:t>–   Ese numero es el que debe aparecer en el informe, y es un orden de magnitud tres mil veces menor que los "10000 RPS" que algun estudiante escribira por sonar ambicioso.</a:t>
             </a:r>
           </a:p>
           <a:p>
@@ -4422,39 +5355,7 @@
                 </a:solidFill>
                 <a:latin typeface="Calibri"/>
               </a:rPr>
-              <a:t>–   Suponga 1000 usuarios activos al dia, cada uno con unas 20 peticiones en su sesion: son 20000 peticiones diarias.</a:t>
-            </a:r>
-          </a:p>
-          <a:p>
-            <a:pPr>
-              <a:spcAft>
-                <a:spcPts val="800"/>
-              </a:spcAft>
-            </a:pPr>
-            <a:r>
-              <a:rPr sz="2000" b="0" i="0">
-                <a:solidFill>
-                  <a:srgbClr val="333333"/>
-                </a:solidFill>
-                <a:latin typeface="Calibri"/>
-              </a:rPr>
-              <a:t>–   Si un 40 por ciento cae en una ventana de dos horas, eso es 8000 peticiones en 7200 segundos, algo mas de 1 RPS promedio en la hora pico.</a:t>
-            </a:r>
-          </a:p>
-          <a:p>
-            <a:pPr>
-              <a:spcAft>
-                <a:spcPts val="800"/>
-              </a:spcAft>
-            </a:pPr>
-            <a:r>
-              <a:rPr sz="2000" b="0" i="0">
-                <a:solidFill>
-                  <a:srgbClr val="333333"/>
-                </a:solidFill>
-                <a:latin typeface="Calibri"/>
-              </a:rPr>
-              <a:t>–   Como el trafico real llega en rafagas, se aplica un factor de pico de 3 a 5 veces y se dimensiona para unos 5 RPS.</a:t>
+              <a:t>–   La leccion es doble: un objetivo de rendimiento sin cuenta de sobre es marketing y no ingenieria, y dimensionar para 5 RPS en vez de 10000 es justamente lo que evita el sobreaprovisionamiento que la Clase 10 senalo como desperdicio.</a:t>
             </a:r>
           </a:p>
         </p:txBody>
@@ -4635,7 +5536,7 @@
                 </a:solidFill>
                 <a:latin typeface="Calibri"/>
               </a:rPr>
-              <a:t>El escenario de carga: aritmetica de servilleta (2/2)</a:t>
+              <a:t>El cuello de botella: siempre hay uno (1/2)</a:t>
             </a:r>
           </a:p>
         </p:txBody>
@@ -4674,7 +5575,7 @@
                 </a:solidFill>
                 <a:latin typeface="Calibri"/>
               </a:rPr>
-              <a:t>–   Ese numero es el que debe aparecer en el informe, y es un orden de magnitud tres mil veces menor que los "10000 RPS" que algun estudiante escribira por sonar ambicioso.</a:t>
+              <a:t>–   El tercer componente es el bottleneck, o cuello de botella: el componente que se agota primero y limita el rendimiento de todo el sistema.</a:t>
             </a:r>
           </a:p>
           <a:p>
@@ -4690,7 +5591,55 @@
                 </a:solidFill>
                 <a:latin typeface="Calibri"/>
               </a:rPr>
-              <a:t>–   La leccion es doble: un objetivo de rendimiento sin cuenta de sobre es marketing y no ingenieria, y dimensionar para 5 RPS en vez de 10000 es justamente lo que evita el sobreaprovisionamiento que la Clase 10 senalo como desperdicio.</a:t>
+              <a:t>–   La afirmacion fuerte, que conviene decir tal cual, es que en cualquier instante hay exactamente un cuello de botella; "todo esta lento" nunca es un diagnostico, es la ausencia de uno.</a:t>
+            </a:r>
+          </a:p>
+          <a:p>
+            <a:pPr>
+              <a:spcAft>
+                <a:spcPts val="800"/>
+              </a:spcAft>
+            </a:pPr>
+            <a:r>
+              <a:rPr sz="2000" b="0" i="0">
+                <a:solidFill>
+                  <a:srgbClr val="333333"/>
+                </a:solidFill>
+                <a:latin typeface="Calibri"/>
+              </a:rPr>
+              <a:t>–   Se localiza con las senales doradas de la Clase 8, en particular la saturacion, mirando cual recurso esta cerca de su limite mientras los demas estan holgados.</a:t>
+            </a:r>
+          </a:p>
+          <a:p>
+            <a:pPr>
+              <a:spcAft>
+                <a:spcPts val="800"/>
+              </a:spcAft>
+            </a:pPr>
+            <a:r>
+              <a:rPr sz="2000" b="0" i="0">
+                <a:solidFill>
+                  <a:srgbClr val="333333"/>
+                </a:solidFill>
+                <a:latin typeface="Calibri"/>
+              </a:rPr>
+              <a:t>–   En CloudLite los candidatos son pocos y reconocibles.</a:t>
+            </a:r>
+          </a:p>
+          <a:p>
+            <a:pPr>
+              <a:spcAft>
+                <a:spcPts val="800"/>
+              </a:spcAft>
+            </a:pPr>
+            <a:r>
+              <a:rPr sz="2000" b="0" i="0">
+                <a:solidFill>
+                  <a:srgbClr val="333333"/>
+                </a:solidFill>
+                <a:latin typeface="Calibri"/>
+              </a:rPr>
+              <a:t>–   El primero es el problema N mas 1 en el endpoint de listado: la API pide la lista con una consulta y luego, dentro del ciclo, hace una consulta adicional por cada registro para traer un dato relacionado</a:t>
             </a:r>
           </a:p>
         </p:txBody>
@@ -4871,7 +5820,7 @@
                 </a:solidFill>
                 <a:latin typeface="Calibri"/>
               </a:rPr>
-              <a:t>El cuello de botella: siempre hay uno (1/2)</a:t>
+              <a:t>El cuello de botella: siempre hay uno (2/2)</a:t>
             </a:r>
           </a:p>
         </p:txBody>
@@ -4910,7 +5859,7 @@
                 </a:solidFill>
                 <a:latin typeface="Calibri"/>
               </a:rPr>
-              <a:t>–   El tercer componente es el bottleneck, o cuello de botella: el componente que se agota primero y limita el rendimiento de todo el sistema.</a:t>
+              <a:t>–   Con 50 registros son 51 viajes a la base de datos y el tiempo se va en latencia de red acumulada, no en CPU.</a:t>
             </a:r>
           </a:p>
           <a:p>
@@ -4926,7 +5875,7 @@
                 </a:solidFill>
                 <a:latin typeface="Calibri"/>
               </a:rPr>
-              <a:t>–   La afirmacion fuerte, que conviene decir tal cual, es que en cualquier instante hay exactamente un cuello de botella; "todo esta lento" nunca es un diagnostico, es la ausencia de uno.</a:t>
+              <a:t>–   El segundo es el pool de conexiones: si el pool tiene 10 conexiones y llegan 40 peticiones concurrentes, 30 esperan turno y la latencia se dispara aunque la CPU de la API y la de la base de datos esten al 20 por ciento.</a:t>
             </a:r>
           </a:p>
           <a:p>
@@ -4942,39 +5891,7 @@
                 </a:solidFill>
                 <a:latin typeface="Calibri"/>
               </a:rPr>
-              <a:t>–   Se localiza con las senales doradas de la Clase 8, en particular la saturacion, mirando cual recurso esta cerca de su limite mientras los demas estan holgados.</a:t>
-            </a:r>
-          </a:p>
-          <a:p>
-            <a:pPr>
-              <a:spcAft>
-                <a:spcPts val="800"/>
-              </a:spcAft>
-            </a:pPr>
-            <a:r>
-              <a:rPr sz="2000" b="0" i="0">
-                <a:solidFill>
-                  <a:srgbClr val="333333"/>
-                </a:solidFill>
-                <a:latin typeface="Calibri"/>
-              </a:rPr>
-              <a:t>–   En CloudLite los candidatos son pocos y reconocibles.</a:t>
-            </a:r>
-          </a:p>
-          <a:p>
-            <a:pPr>
-              <a:spcAft>
-                <a:spcPts val="800"/>
-              </a:spcAft>
-            </a:pPr>
-            <a:r>
-              <a:rPr sz="2000" b="0" i="0">
-                <a:solidFill>
-                  <a:srgbClr val="333333"/>
-                </a:solidFill>
-                <a:latin typeface="Calibri"/>
-              </a:rPr>
-              <a:t>–   El primero es el problema N mas 1 en el endpoint de listado: la API pide la lista con una consulta y luego, dentro del ciclo, hace una consulta adicional por cada registro para traer un dato relacionado</a:t>
+              <a:t>–   El tercero, si CloudLite envia notificaciones de forma sincronica dentro de la peticion, es el proveedor externo: el usuario espera a que un tercero responda, y la mitigacion no es mas CPU sino sacar el envio de la ruta critica hacia una cola.</a:t>
             </a:r>
           </a:p>
         </p:txBody>
@@ -5155,7 +6072,7 @@
                 </a:solidFill>
                 <a:latin typeface="Calibri"/>
               </a:rPr>
-              <a:t>El cuello de botella: siempre hay uno (2/2)</a:t>
+              <a:t>Los tipos de prueba, por la pregunta que responden (1/2)</a:t>
             </a:r>
           </a:p>
         </p:txBody>
@@ -5194,7 +6111,7 @@
                 </a:solidFill>
                 <a:latin typeface="Calibri"/>
               </a:rPr>
-              <a:t>–   Con 50 registros son 51 viajes a la base de datos y el tiempo se va en latencia de red acumulada, no en CPU.</a:t>
+              <a:t>–   La prueba de estres sube la carga de forma progresiva hasta que el sistema se degrada o se rompe</a:t>
             </a:r>
           </a:p>
           <a:p>
@@ -5210,7 +6127,7 @@
                 </a:solidFill>
                 <a:latin typeface="Calibri"/>
               </a:rPr>
-              <a:t>–   El segundo es el pool de conexiones: si el pool tiene 10 conexiones y llegan 40 peticiones concurrentes, 30 esperan turno y la latencia se dispara aunque la CPU de la API y la de la base de datos esten al 20 por ciento.</a:t>
+              <a:t>–   Y responde cual es la capacidad maxima y como se comporta al fallar; el dato interesante no es el punto de quiebre sino la forma de la falla, porque degradarse respondiendo lento es aceptable y caerse por completo no.</a:t>
             </a:r>
           </a:p>
           <a:p>
@@ -5226,7 +6143,23 @@
                 </a:solidFill>
                 <a:latin typeface="Calibri"/>
               </a:rPr>
-              <a:t>–   El tercero, si CloudLite envia notificaciones de forma sincronica dentro de la peticion, es el proveedor externo: el usuario espera a que un tercero responda, y la mitigacion no es mas CPU sino sacar el envio de la ruta critica hacia una cola.</a:t>
+              <a:t>–   La prueba de picos, o spike test, aplica una subida subita y grande simulando una promocion o una noticia viral</a:t>
+            </a:r>
+          </a:p>
+          <a:p>
+            <a:pPr>
+              <a:spcAft>
+                <a:spcPts val="800"/>
+              </a:spcAft>
+            </a:pPr>
+            <a:r>
+              <a:rPr sz="2000" b="0" i="0">
+                <a:solidFill>
+                  <a:srgbClr val="333333"/>
+                </a:solidFill>
+                <a:latin typeface="Calibri"/>
+              </a:rPr>
+              <a:t>–   Y responde si el sistema reacciona a tiempo; anticipa el limite del autoescalado de la Clase 13, porque arrancar una instancia toma decenas de segundos y un pico mas rapido golpea antes de que llegue la ayuda.</a:t>
             </a:r>
           </a:p>
         </p:txBody>
@@ -5407,7 +6340,7 @@
                 </a:solidFill>
                 <a:latin typeface="Calibri"/>
               </a:rPr>
-              <a:t>Los tipos de prueba, por la pregunta que responden (1/2)</a:t>
+              <a:t>Los tipos de prueba, por la pregunta que responden (2/2)</a:t>
             </a:r>
           </a:p>
         </p:txBody>
@@ -5446,7 +6379,7 @@
                 </a:solidFill>
                 <a:latin typeface="Calibri"/>
               </a:rPr>
-              <a:t>–   La prueba de estres sube la carga de forma progresiva hasta que el sistema se degrada o se rompe</a:t>
+              <a:t>–   La prueba de resistencia, o soak, mantiene carga moderada durante horas y responde si hay fugas de memoria o conexiones que no se liberan; con menos de una hora no se detecta nada y de 2 a 4 horas es lo tipico.</a:t>
             </a:r>
           </a:p>
           <a:p>
@@ -5462,39 +6395,7 @@
                 </a:solidFill>
                 <a:latin typeface="Calibri"/>
               </a:rPr>
-              <a:t>–   Y responde cual es la capacidad maxima y como se comporta al fallar; el dato interesante no es el punto de quiebre sino la forma de la falla, porque degradarse respondiendo lento es aceptable y caerse por completo no.</a:t>
-            </a:r>
-          </a:p>
-          <a:p>
-            <a:pPr>
-              <a:spcAft>
-                <a:spcPts val="800"/>
-              </a:spcAft>
-            </a:pPr>
-            <a:r>
-              <a:rPr sz="2000" b="0" i="0">
-                <a:solidFill>
-                  <a:srgbClr val="333333"/>
-                </a:solidFill>
-                <a:latin typeface="Calibri"/>
-              </a:rPr>
-              <a:t>–   La prueba de picos, o spike test, aplica una subida subita y grande simulando una promocion o una noticia viral</a:t>
-            </a:r>
-          </a:p>
-          <a:p>
-            <a:pPr>
-              <a:spcAft>
-                <a:spcPts val="800"/>
-              </a:spcAft>
-            </a:pPr>
-            <a:r>
-              <a:rPr sz="2000" b="0" i="0">
-                <a:solidFill>
-                  <a:srgbClr val="333333"/>
-                </a:solidFill>
-                <a:latin typeface="Calibri"/>
-              </a:rPr>
-              <a:t>–   Y responde si el sistema reacciona a tiempo; anticipa el limite del autoescalado de la Clase 13, porque arrancar una instancia toma decenas de segundos y un pico mas rapido golpea antes de que llegue la ayuda.</a:t>
+              <a:t>–   No se necesita ninguna herramienta de pago: en Killercoda se puede lanzar un contenedor con k6, hey o Apache Bench y golpear el stub del servicio, y si el lab no carga, el escenario se documenta en papel con la aritmetica de arriba.</a:t>
             </a:r>
           </a:p>
         </p:txBody>
@@ -5675,7 +6576,7 @@
                 </a:solidFill>
                 <a:latin typeface="Calibri"/>
               </a:rPr>
-              <a:t>Los tipos de prueba, por la pregunta que responden (2/2)</a:t>
+              <a:t>El ensayo del pitch: la segunda mitad tiene su propia teoria (1/2)</a:t>
             </a:r>
           </a:p>
         </p:txBody>
@@ -5714,7 +6615,7 @@
                 </a:solidFill>
                 <a:latin typeface="Calibri"/>
               </a:rPr>
-              <a:t>–   La prueba de resistencia, o soak, mantiene carga moderada durante horas y responde si hay fugas de memoria o conexiones que no se liberan; con menos de una hora no se detecta nada y de 2 a 4 horas es lo tipico.</a:t>
+              <a:t>–   La segunda mitad de la clase es el ensayo del pitch y tiene su propia teoria.</a:t>
             </a:r>
           </a:p>
           <a:p>
@@ -5730,7 +6631,39 @@
                 </a:solidFill>
                 <a:latin typeface="Calibri"/>
               </a:rPr>
-              <a:t>–   No se necesita ninguna herramienta de pago: en Killercoda se puede lanzar un contenedor con k6, hey o Apache Bench y golpear el stub del servicio, y si el lab no carga, el escenario se documenta en papel con la aritmetica de arriba.</a:t>
+              <a:t>–   Cinco a ocho minutos son entre 700 y 1000 palabras habladas, lo que alcanza para siete u ocho ideas y no mas, asi que el guion se escribe por presupuesto de tiempo: unos 45 segundos para el problema y el usuario</a:t>
+            </a:r>
+          </a:p>
+          <a:p>
+            <a:pPr>
+              <a:spcAft>
+                <a:spcPts val="800"/>
+              </a:spcAft>
+            </a:pPr>
+            <a:r>
+              <a:rPr sz="2000" b="0" i="0">
+                <a:solidFill>
+                  <a:srgbClr val="333333"/>
+                </a:solidFill>
+                <a:latin typeface="Calibri"/>
+              </a:rPr>
+              <a:t>–   60 para el diagrama de Contexto, 90 para los Contenedores y las decisiones que los separan, 60 para seguridad y despliegue, 45 para el pipeline y las metricas, 45 para costos y escalabilidad, y 30 de cierre.</a:t>
+            </a:r>
+          </a:p>
+          <a:p>
+            <a:pPr>
+              <a:spcAft>
+                <a:spcPts val="800"/>
+              </a:spcAft>
+            </a:pPr>
+            <a:r>
+              <a:rPr sz="2000" b="0" i="0">
+                <a:solidFill>
+                  <a:srgbClr val="333333"/>
+                </a:solidFill>
+                <a:latin typeface="Calibri"/>
+              </a:rPr>
+              <a:t>–   La regla de oro del pitch de arquitectura es que se presentan decisiones con su trade-off, no un recorrido por las cajas del diagrama: "elegimos base de datos gestionada aunque cuesta el doble</a:t>
             </a:r>
           </a:p>
         </p:txBody>
@@ -5911,7 +6844,7 @@
                 </a:solidFill>
                 <a:latin typeface="Calibri"/>
               </a:rPr>
-              <a:t>El ensayo del pitch: la segunda mitad tiene su propia teoria (1/2)</a:t>
+              <a:t>El ensayo del pitch: la segunda mitad tiene su propia teoria (2/2)</a:t>
             </a:r>
           </a:p>
         </p:txBody>
@@ -5950,7 +6883,7 @@
                 </a:solidFill>
                 <a:latin typeface="Calibri"/>
               </a:rPr>
-              <a:t>–   La segunda mitad de la clase es el ensayo del pitch y tiene su propia teoria.</a:t>
+              <a:t>–   Porque no podemos garantizar respaldos manuales" es una frase de arquitecto; "aqui tenemos una base de datos" es una leyenda de imagen.</a:t>
             </a:r>
           </a:p>
           <a:p>
@@ -5966,7 +6899,7 @@
                 </a:solidFill>
                 <a:latin typeface="Calibri"/>
               </a:rPr>
-              <a:t>–   Cinco a ocho minutos son entre 700 y 1000 palabras habladas, lo que alcanza para siete u ocho ideas y no mas, asi que el guion se escribe por presupuesto de tiempo: unos 45 segundos para el problema y el usuario</a:t>
+              <a:t>–   Se ensaya hoy con cronometro y en voz alta, porque leer mentalmente siempre da la mitad del tiempo real</a:t>
             </a:r>
           </a:p>
           <a:p>
@@ -5982,23 +6915,7 @@
                 </a:solidFill>
                 <a:latin typeface="Calibri"/>
               </a:rPr>
-              <a:t>–   60 para el diagrama de Contexto, 90 para los Contenedores y las decisiones que los separan, 60 para seguridad y despliegue, 45 para el pipeline y las metricas, 45 para costos y escalabilidad, y 30 de cierre.</a:t>
-            </a:r>
-          </a:p>
-          <a:p>
-            <a:pPr>
-              <a:spcAft>
-                <a:spcPts val="800"/>
-              </a:spcAft>
-            </a:pPr>
-            <a:r>
-              <a:rPr sz="2000" b="0" i="0">
-                <a:solidFill>
-                  <a:srgbClr val="333333"/>
-                </a:solidFill>
-                <a:latin typeface="Calibri"/>
-              </a:rPr>
-              <a:t>–   La regla de oro del pitch de arquitectura es que se presentan decisiones con su trade-off, no un recorrido por las cajas del diagrama: "elegimos base de datos gestionada aunque cuesta el doble</a:t>
+              <a:t>–   Y sin leer las diapositivas, ya que en la Clase 15 el criterio es que quien sustenta pueda explicar cualquier parte del sistema; si el docente autorizo equipos, se ensaya ademas con rotacion de expositor, porque alli el criterio aplica a cualquier integrante.</a:t>
             </a:r>
           </a:p>
         </p:txBody>
@@ -6236,7 +7153,7 @@
                 </a:solidFill>
                 <a:latin typeface="Calibri"/>
               </a:rPr>
-              <a:t> Encuadre: hoy avanzamos el PI en… + entregable concreto.</a:t>
+              <a:t> Encuadre del tema y objetivos de la clase.</a:t>
             </a:r>
           </a:p>
           <a:p>
@@ -6252,7 +7169,7 @@
                 </a:solidFill>
                 <a:latin typeface="Calibri"/>
               </a:rPr>
-              <a:t>10–40</a:t>
+              <a:t>10–70</a:t>
             </a:r>
             <a:r>
               <a:rPr sz="2000" b="0" i="0">
@@ -6261,7 +7178,7 @@
                 </a:solidFill>
                 <a:latin typeface="Calibri"/>
               </a:rPr>
-              <a:t> Teoría Core breve (solo lo necesario para el taller PI).</a:t>
+              <a:t> Conceptos del tema, uno por lámina, con ejemplos sobre CloudLite.</a:t>
             </a:r>
           </a:p>
           <a:p>
@@ -6286,7 +7203,7 @@
                 </a:solidFill>
                 <a:latin typeface="Calibri"/>
               </a:rPr>
-              <a:t>40–100</a:t>
+              <a:t>70–100</a:t>
             </a:r>
             <a:r>
               <a:rPr sz="2000" b="0" i="0">
@@ -6295,7 +7212,7 @@
                 </a:solidFill>
                 <a:latin typeface="Calibri"/>
               </a:rPr>
-              <a:t> Trabajo guiado del PI (demo en vivo + avance individual).</a:t>
+              <a:t> Ejemplos resueltos y demo del docente sobre el tema.</a:t>
             </a:r>
           </a:p>
           <a:p>
@@ -6320,7 +7237,7 @@
                 </a:solidFill>
                 <a:latin typeface="Calibri"/>
               </a:rPr>
-              <a:t> Revisión de evidencias del PI.</a:t>
+              <a:t> Práctica (opcional, guía en la carpeta de la clase).</a:t>
             </a:r>
           </a:p>
           <a:p>
@@ -6345,7 +7262,7 @@
                 </a:solidFill>
                 <a:latin typeface="Calibri"/>
               </a:rPr>
-              <a:t> Cierre: criterio de éxito + plazo en la fecha que indique el docente.</a:t>
+              <a:t> Preguntas y cierre conceptual.</a:t>
             </a:r>
           </a:p>
         </p:txBody>
@@ -6526,7 +7443,7 @@
                 </a:solidFill>
                 <a:latin typeface="Calibri"/>
               </a:rPr>
-              <a:t>El ensayo del pitch: la segunda mitad tiene su propia teoria (2/2)</a:t>
+              <a:t>Preguntas frecuentes y cierre conceptual () (1/3)</a:t>
             </a:r>
           </a:p>
         </p:txBody>
@@ -6565,7 +7482,7 @@
                 </a:solidFill>
                 <a:latin typeface="Calibri"/>
               </a:rPr>
-              <a:t>–   Porque no podemos garantizar respaldos manuales" es una frase de arquitecto; "aqui tenemos una base de datos" es una leyenda de imagen.</a:t>
+              <a:t>–   La primera es como se prueba rendimiento sin usuarios reales; la respuesta es que la carga se simula y que lo valioso no es el numero obtenido sino el modelo: si el estudiante puede decir cuantos usuarios, cuantas peticiones por usuario</a:t>
             </a:r>
           </a:p>
           <a:p>
@@ -6581,7 +7498,7 @@
                 </a:solidFill>
                 <a:latin typeface="Calibri"/>
               </a:rPr>
-              <a:t>–   Se ensaya hoy con cronometro y en voz alta, porque leer mentalmente siempre da la mitad del tiempo real</a:t>
+              <a:t>–   Que factor de pico y que componente cree que cede primero, ya esta haciendo ingenieria de rendimiento aunque el sistema sea un stub.</a:t>
             </a:r>
           </a:p>
           <a:p>
@@ -6597,7 +7514,23 @@
                 </a:solidFill>
                 <a:latin typeface="Calibri"/>
               </a:rPr>
-              <a:t>–   Y sin leer las diapositivas, ya que en la Clase 15 el criterio es que quien sustenta pueda explicar cualquier parte del sistema; si el docente autorizo equipos, se ensaya ademas con rotacion de expositor, porque alli el criterio aplica a cualquier integrante.</a:t>
+              <a:t>–   La segunda es si no basta con decir que se usara cache; la respuesta es que una mitigacion sin medicion es una creencia</a:t>
+            </a:r>
+          </a:p>
+          <a:p>
+            <a:pPr>
+              <a:spcAft>
+                <a:spcPts val="800"/>
+              </a:spcAft>
+            </a:pPr>
+            <a:r>
+              <a:rPr sz="2000" b="0" i="0">
+                <a:solidFill>
+                  <a:srgbClr val="333333"/>
+                </a:solidFill>
+                <a:latin typeface="Calibri"/>
+              </a:rPr>
+              <a:t>–   Y que la pregunta correcta es cache de que, con que tiempo de vida, que porcentaje de aciertos se espera y que pasa cuando el dato cambia, porque una cache mal invalidada convierte un problema de lentitud en un problema de datos incorrectos, que es peor.</a:t>
             </a:r>
           </a:p>
         </p:txBody>
@@ -6778,7 +7711,7 @@
                 </a:solidFill>
                 <a:latin typeface="Calibri"/>
               </a:rPr>
-              <a:t>Preguntas frecuentes y cierre conceptual () (1/3)</a:t>
+              <a:t>Preguntas frecuentes y cierre conceptual () (2/3)</a:t>
             </a:r>
           </a:p>
         </p:txBody>
@@ -6817,7 +7750,7 @@
                 </a:solidFill>
                 <a:latin typeface="Calibri"/>
               </a:rPr>
-              <a:t>–   La primera es como se prueba rendimiento sin usuarios reales; la respuesta es que la carga se simula y que lo valioso no es el numero obtenido sino el modelo: si el estudiante puede decir cuantos usuarios, cuantas peticiones por usuario</a:t>
+              <a:t>–   La tercera es cual es un buen p95, y la respuesta debe resistir la tentacion de dar una cifra universal: depende del caso de uso</a:t>
             </a:r>
           </a:p>
           <a:p>
@@ -6833,7 +7766,7 @@
                 </a:solidFill>
                 <a:latin typeface="Calibri"/>
               </a:rPr>
-              <a:t>–   Que factor de pico y que componente cree que cede primero, ya esta haciendo ingenieria de rendimiento aunque el sistema sea un stub.</a:t>
+              <a:t>–   Y el criterio es que el numero este justificado y sea alcanzable con la arquitectura dibujada</a:t>
             </a:r>
           </a:p>
           <a:p>
@@ -6849,7 +7782,7 @@
                 </a:solidFill>
                 <a:latin typeface="Calibri"/>
               </a:rPr>
-              <a:t>–   La segunda es si no basta con decir que se usara cache; la respuesta es que una mitigacion sin medicion es una creencia</a:t>
+              <a:t>–   Quien promete p95 de 50 milisegundos con una consulta que recorre toda la tabla tiene un objetivo incoherente, y eso es un hallazgo mas grave que tener un objetivo modesto.</a:t>
             </a:r>
           </a:p>
           <a:p>
@@ -6865,7 +7798,39 @@
                 </a:solidFill>
                 <a:latin typeface="Calibri"/>
               </a:rPr>
-              <a:t>–   Y que la pregunta correcta es cache de que, con que tiempo de vida, que porcentaje de aciertos se espera y que pasa cuando el dato cambia, porque una cache mal invalidada convierte un problema de lentitud en un problema de datos incorrectos, que es peor.</a:t>
+              <a:t>–   Error tipico del docente que no domina el tema: aceptar "queremos que la app sea rapida" como objetivo de rendimiento.</a:t>
+            </a:r>
+          </a:p>
+          <a:p>
+            <a:pPr>
+              <a:spcAft>
+                <a:spcPts val="800"/>
+              </a:spcAft>
+            </a:pPr>
+            <a:r>
+              <a:rPr sz="2000" b="0" i="0">
+                <a:solidFill>
+                  <a:srgbClr val="333333"/>
+                </a:solidFill>
+                <a:latin typeface="Calibri"/>
+              </a:rPr>
+              <a:t>–   Sin metrica en percentil, sin umbral, sin condicion de carga y sin cuello de botella sospechado, la seccion de rendimiento del informe se convierte en adjetivos</a:t>
+            </a:r>
+          </a:p>
+          <a:p>
+            <a:pPr>
+              <a:spcAft>
+                <a:spcPts val="800"/>
+              </a:spcAft>
+            </a:pPr>
+            <a:r>
+              <a:rPr sz="2000" b="0" i="0">
+                <a:solidFill>
+                  <a:srgbClr val="333333"/>
+                </a:solidFill>
+                <a:latin typeface="Calibri"/>
+              </a:rPr>
+              <a:t>–   Y la consecuencia es inmediata aguas abajo: en la Clase 13 el estudiante no tiene nada sobre lo que basar el trigger del autoescalado y escribe "cuando la CPU suba"</a:t>
             </a:r>
           </a:p>
         </p:txBody>
@@ -7046,7 +8011,7 @@
                 </a:solidFill>
                 <a:latin typeface="Calibri"/>
               </a:rPr>
-              <a:t>Preguntas frecuentes y cierre conceptual () (2/3)</a:t>
+              <a:t>Preguntas frecuentes y cierre conceptual () (3/3)</a:t>
             </a:r>
           </a:p>
         </p:txBody>
@@ -7085,7 +8050,7 @@
                 </a:solidFill>
                 <a:latin typeface="Calibri"/>
               </a:rPr>
-              <a:t>–   La tercera es cual es un buen p95, y la respuesta debe resistir la tentacion de dar una cifra universal: depende del caso de uso</a:t>
+              <a:t>–   Y en la sustentacion de la Clase 15 no puede responder por que su diseno soporta la carga que dice soportar.</a:t>
             </a:r>
           </a:p>
           <a:p>
@@ -7101,7 +8066,7 @@
                 </a:solidFill>
                 <a:latin typeface="Calibri"/>
               </a:rPr>
-              <a:t>–   Y el criterio es que el numero este justificado y sea alcanzable con la arquitectura dibujada</a:t>
+              <a:t>–   El segundo error es dejar que el ensayo del pitch se convierta en un recorrido narrado del diagrama, leido en voz alta y sin una sola justificacion</a:t>
             </a:r>
           </a:p>
           <a:p>
@@ -7117,7 +8082,7 @@
                 </a:solidFill>
                 <a:latin typeface="Calibri"/>
               </a:rPr>
-              <a:t>–   Quien promete p95 de 50 milisegundos con una consulta que recorre toda la tabla tiene un objetivo incoherente, y eso es un hallazgo mas grave que tener un objetivo modesto.</a:t>
+              <a:t>–   Y, en los equipos que el docente haya autorizado, permitir que un solo integrante hable mientras el resto observa.</a:t>
             </a:r>
           </a:p>
           <a:p>
@@ -7133,39 +8098,7 @@
                 </a:solidFill>
                 <a:latin typeface="Calibri"/>
               </a:rPr>
-              <a:t>–   Error tipico del docente que no domina el tema: aceptar "queremos que la app sea rapida" como objetivo de rendimiento.</a:t>
-            </a:r>
-          </a:p>
-          <a:p>
-            <a:pPr>
-              <a:spcAft>
-                <a:spcPts val="800"/>
-              </a:spcAft>
-            </a:pPr>
-            <a:r>
-              <a:rPr sz="2000" b="0" i="0">
-                <a:solidFill>
-                  <a:srgbClr val="333333"/>
-                </a:solidFill>
-                <a:latin typeface="Calibri"/>
-              </a:rPr>
-              <a:t>–   Sin metrica en percentil, sin umbral, sin condicion de carga y sin cuello de botella sospechado, la seccion de rendimiento del informe se convierte en adjetivos</a:t>
-            </a:r>
-          </a:p>
-          <a:p>
-            <a:pPr>
-              <a:spcAft>
-                <a:spcPts val="800"/>
-              </a:spcAft>
-            </a:pPr>
-            <a:r>
-              <a:rPr sz="2000" b="0" i="0">
-                <a:solidFill>
-                  <a:srgbClr val="333333"/>
-                </a:solidFill>
-                <a:latin typeface="Calibri"/>
-              </a:rPr>
-              <a:t>–   Y la consecuencia es inmediata aguas abajo: en la Clase 13 el estudiante no tiene nada sobre lo que basar el trigger del autoescalado y escribe "cuando la CPU suba"</a:t>
+              <a:t>–   Si eso no se corrige hoy, en la Clase 15 la sustentacion llega como un guion memorizado que el Q&amp;A dirigido desarma en dos preguntas, y la nota cae por una razon que era corregible con quince minutos de ensayo bien dirigido.</a:t>
             </a:r>
           </a:p>
         </p:txBody>
@@ -7346,21 +8279,141 @@
                 </a:solidFill>
                 <a:latin typeface="Calibri"/>
               </a:rPr>
-              <a:t>Preguntas frecuentes y cierre conceptual () (3/3)</a:t>
-            </a:r>
-          </a:p>
-        </p:txBody>
-      </p:sp>
-      <p:sp>
-        <p:nvSpPr>
-          <p:cNvPr id="5" name="TextBox 4"/>
+              <a:t>El presupuesto de latencia del camino critico</a:t>
+            </a:r>
+          </a:p>
+        </p:txBody>
+      </p:sp>
+      <p:sp>
+        <p:nvSpPr>
+          <p:cNvPr id="5" name="Rounded Rectangle 4"/>
+          <p:cNvSpPr/>
+          <p:nvPr/>
+        </p:nvSpPr>
+        <p:spPr>
+          <a:xfrm>
+            <a:off x="457200" y="1261872"/>
+            <a:ext cx="11277295" cy="5093208"/>
+          </a:xfrm>
+          <a:prstGeom prst="roundRect">
+            <a:avLst>
+              <a:gd name="adj" fmla="val 12000"/>
+            </a:avLst>
+          </a:prstGeom>
+          <a:solidFill>
+            <a:srgbClr val="1E2A38"/>
+          </a:solidFill>
+          <a:ln>
+            <a:noFill/>
+          </a:ln>
+        </p:spPr>
+        <p:style>
+          <a:lnRef idx="1">
+            <a:schemeClr val="accent1"/>
+          </a:lnRef>
+          <a:fillRef idx="3">
+            <a:schemeClr val="accent1"/>
+          </a:fillRef>
+          <a:effectRef idx="2">
+            <a:schemeClr val="accent1"/>
+          </a:effectRef>
+          <a:fontRef idx="minor">
+            <a:schemeClr val="lt1"/>
+          </a:fontRef>
+        </p:style>
+        <p:txBody>
+          <a:bodyPr rtlCol="0" anchor="ctr"/>
+          <a:lstStyle/>
+          <a:p>
+            <a:pPr algn="ctr"/>
+          </a:p>
+        </p:txBody>
+      </p:sp>
+      <p:sp>
+        <p:nvSpPr>
+          <p:cNvPr id="6" name="Rectangle 5"/>
+          <p:cNvSpPr/>
+          <p:nvPr/>
+        </p:nvSpPr>
+        <p:spPr>
+          <a:xfrm>
+            <a:off x="457200" y="1261872"/>
+            <a:ext cx="11277295" cy="320040"/>
+          </a:xfrm>
+          <a:prstGeom prst="rect">
+            <a:avLst/>
+          </a:prstGeom>
+          <a:solidFill>
+            <a:srgbClr val="095292"/>
+          </a:solidFill>
+          <a:ln>
+            <a:noFill/>
+          </a:ln>
+        </p:spPr>
+        <p:style>
+          <a:lnRef idx="1">
+            <a:schemeClr val="accent1"/>
+          </a:lnRef>
+          <a:fillRef idx="3">
+            <a:schemeClr val="accent1"/>
+          </a:fillRef>
+          <a:effectRef idx="2">
+            <a:schemeClr val="accent1"/>
+          </a:effectRef>
+          <a:fontRef idx="minor">
+            <a:schemeClr val="lt1"/>
+          </a:fontRef>
+        </p:style>
+        <p:txBody>
+          <a:bodyPr rtlCol="0" anchor="ctr"/>
+          <a:lstStyle/>
+          <a:p>
+            <a:pPr algn="ctr"/>
+          </a:p>
+        </p:txBody>
+      </p:sp>
+      <p:sp>
+        <p:nvSpPr>
+          <p:cNvPr id="7" name="TextBox 6"/>
           <p:cNvSpPr txBox="1"/>
           <p:nvPr/>
         </p:nvSpPr>
         <p:spPr>
           <a:xfrm>
-            <a:off x="457200" y="1170432"/>
-            <a:ext cx="11277295" cy="5230368"/>
+            <a:off x="685800" y="1307592"/>
+            <a:ext cx="10820095" cy="256032"/>
+          </a:xfrm>
+          <a:prstGeom prst="rect">
+            <a:avLst/>
+          </a:prstGeom>
+          <a:noFill/>
+        </p:spPr>
+        <p:txBody>
+          <a:bodyPr wrap="square" anchor="ctr"/>
+          <a:lstStyle/>
+          <a:p>
+            <a:r>
+              <a:rPr sz="1000" b="1" i="0">
+                <a:solidFill>
+                  <a:srgbClr val="269CCB"/>
+                </a:solidFill>
+                <a:latin typeface="Calibri"/>
+              </a:rPr>
+              <a:t>● ● ●</a:t>
+            </a:r>
+          </a:p>
+        </p:txBody>
+      </p:sp>
+      <p:sp>
+        <p:nvSpPr>
+          <p:cNvPr id="8" name="TextBox 7"/>
+          <p:cNvSpPr txBox="1"/>
+          <p:nvPr/>
+        </p:nvSpPr>
+        <p:spPr>
+          <a:xfrm>
+            <a:off x="777240" y="1719072"/>
+            <a:ext cx="10637215" cy="4453128"/>
           </a:xfrm>
           <a:prstGeom prst="rect">
             <a:avLst/>
@@ -7375,72 +8428,264 @@
           <a:p>
             <a:pPr>
               <a:spcAft>
-                <a:spcPts val="800"/>
+                <a:spcPts val="400"/>
               </a:spcAft>
             </a:pPr>
             <a:r>
-              <a:rPr sz="2000" b="0" i="0">
-                <a:solidFill>
-                  <a:srgbClr val="333333"/>
-                </a:solidFill>
-                <a:latin typeface="Calibri"/>
-              </a:rPr>
-              <a:t>–   Y en la sustentacion de la Clase 15 no puede responder por que su diseno soporta la carga que dice soportar.</a:t>
+              <a:rPr sz="1400" b="0" i="0">
+                <a:solidFill>
+                  <a:srgbClr val="FFFFFF"/>
+                </a:solidFill>
+                <a:latin typeface="Calibri"/>
+              </a:rPr>
+              <a:t>sequenceDiagram</a:t>
             </a:r>
           </a:p>
           <a:p>
             <a:pPr>
               <a:spcAft>
-                <a:spcPts val="800"/>
+                <a:spcPts val="400"/>
               </a:spcAft>
             </a:pPr>
             <a:r>
-              <a:rPr sz="2000" b="0" i="0">
-                <a:solidFill>
-                  <a:srgbClr val="333333"/>
-                </a:solidFill>
-                <a:latin typeface="Calibri"/>
-              </a:rPr>
-              <a:t>–   El segundo error es dejar que el ensayo del pitch se convierta en un recorrido narrado del diagrama, leido en voz alta y sin una sola justificacion</a:t>
+              <a:rPr sz="1400" b="0" i="0">
+                <a:solidFill>
+                  <a:srgbClr val="FFFFFF"/>
+                </a:solidFill>
+                <a:latin typeface="Calibri"/>
+              </a:rPr>
+              <a:t>  autonumber</a:t>
             </a:r>
           </a:p>
           <a:p>
             <a:pPr>
               <a:spcAft>
-                <a:spcPts val="800"/>
+                <a:spcPts val="400"/>
               </a:spcAft>
             </a:pPr>
             <a:r>
-              <a:rPr sz="2000" b="0" i="0">
-                <a:solidFill>
-                  <a:srgbClr val="333333"/>
-                </a:solidFill>
-                <a:latin typeface="Calibri"/>
-              </a:rPr>
-              <a:t>–   Y, en los equipos que el docente haya autorizado, permitir que un solo integrante hable mientras el resto observa.</a:t>
+              <a:rPr sz="1400" b="0" i="0">
+                <a:solidFill>
+                  <a:srgbClr val="FFFFFF"/>
+                </a:solidFill>
+                <a:latin typeface="Calibri"/>
+              </a:rPr>
+              <a:t>  participant U as Usuario</a:t>
             </a:r>
           </a:p>
           <a:p>
             <a:pPr>
               <a:spcAft>
-                <a:spcPts val="800"/>
+                <a:spcPts val="400"/>
               </a:spcAft>
             </a:pPr>
             <a:r>
-              <a:rPr sz="2000" b="0" i="0">
-                <a:solidFill>
-                  <a:srgbClr val="333333"/>
-                </a:solidFill>
-                <a:latin typeface="Calibri"/>
-              </a:rPr>
-              <a:t>–   Si eso no se corrige hoy, en la Clase 15 la sustentacion llega como un guion memorizado que el Q&amp;A dirigido desarma en dos preguntas, y la nota cae por una razon que era corregible con quince minutos de ensayo bien dirigido.</a:t>
-            </a:r>
-          </a:p>
-        </p:txBody>
-      </p:sp>
-      <p:sp>
-        <p:nvSpPr>
-          <p:cNvPr id="6" name="TextBox 5"/>
+              <a:rPr sz="1400" b="0" i="0">
+                <a:solidFill>
+                  <a:srgbClr val="FFFFFF"/>
+                </a:solidFill>
+                <a:latin typeface="Calibri"/>
+              </a:rPr>
+              <a:t>  participant W as Web SPA</a:t>
+            </a:r>
+          </a:p>
+          <a:p>
+            <a:pPr>
+              <a:spcAft>
+                <a:spcPts val="400"/>
+              </a:spcAft>
+            </a:pPr>
+            <a:r>
+              <a:rPr sz="1400" b="0" i="0">
+                <a:solidFill>
+                  <a:srgbClr val="FFFFFF"/>
+                </a:solidFill>
+                <a:latin typeface="Calibri"/>
+              </a:rPr>
+              <a:t>  participant A as API</a:t>
+            </a:r>
+          </a:p>
+          <a:p>
+            <a:pPr>
+              <a:spcAft>
+                <a:spcPts val="400"/>
+              </a:spcAft>
+            </a:pPr>
+            <a:r>
+              <a:rPr sz="1400" b="0" i="0">
+                <a:solidFill>
+                  <a:srgbClr val="FFFFFF"/>
+                </a:solidFill>
+                <a:latin typeface="Calibri"/>
+              </a:rPr>
+              <a:t>  participant D as PostgreSQL</a:t>
+            </a:r>
+          </a:p>
+          <a:p>
+            <a:pPr>
+              <a:spcAft>
+                <a:spcPts val="400"/>
+              </a:spcAft>
+            </a:pPr>
+            <a:r>
+              <a:rPr sz="1400" b="0" i="0">
+                <a:solidFill>
+                  <a:srgbClr val="FFFFFF"/>
+                </a:solidFill>
+                <a:latin typeface="Calibri"/>
+              </a:rPr>
+              <a:t/>
+            </a:r>
+          </a:p>
+          <a:p>
+            <a:pPr>
+              <a:spcAft>
+                <a:spcPts val="400"/>
+              </a:spcAft>
+            </a:pPr>
+            <a:r>
+              <a:rPr sz="1400" b="0" i="0">
+                <a:solidFill>
+                  <a:srgbClr val="FFFFFF"/>
+                </a:solidFill>
+                <a:latin typeface="Calibri"/>
+              </a:rPr>
+              <a:t>  U-&gt;&gt;W: accion del pico (&lt;su caso&gt;)</a:t>
+            </a:r>
+          </a:p>
+          <a:p>
+            <a:pPr>
+              <a:spcAft>
+                <a:spcPts val="400"/>
+              </a:spcAft>
+            </a:pPr>
+            <a:r>
+              <a:rPr sz="1400" b="0" i="0">
+                <a:solidFill>
+                  <a:srgbClr val="FFFFFF"/>
+                </a:solidFill>
+                <a:latin typeface="Calibri"/>
+              </a:rPr>
+              <a:t>  W-&gt;&gt;A: POST /recurso          %% red: 40 ms</a:t>
+            </a:r>
+          </a:p>
+          <a:p>
+            <a:pPr>
+              <a:spcAft>
+                <a:spcPts val="400"/>
+              </a:spcAft>
+            </a:pPr>
+            <a:r>
+              <a:rPr sz="1400" b="0" i="0">
+                <a:solidFill>
+                  <a:srgbClr val="FFFFFF"/>
+                </a:solidFill>
+                <a:latin typeface="Calibri"/>
+              </a:rPr>
+              <a:t>  A-&gt;&gt;A: validar + autorizar    %% 10 ms</a:t>
+            </a:r>
+          </a:p>
+          <a:p>
+            <a:pPr>
+              <a:spcAft>
+                <a:spcPts val="400"/>
+              </a:spcAft>
+            </a:pPr>
+            <a:r>
+              <a:rPr sz="1400" b="0" i="0">
+                <a:solidFill>
+                  <a:srgbClr val="FFFFFF"/>
+                </a:solidFill>
+                <a:latin typeface="Calibri"/>
+              </a:rPr>
+              <a:t>  A-&gt;&gt;D: SELECT + INSERT        %% 60 ms</a:t>
+            </a:r>
+          </a:p>
+          <a:p>
+            <a:pPr>
+              <a:spcAft>
+                <a:spcPts val="400"/>
+              </a:spcAft>
+            </a:pPr>
+            <a:r>
+              <a:rPr sz="1400" b="0" i="0">
+                <a:solidFill>
+                  <a:srgbClr val="FFFFFF"/>
+                </a:solidFill>
+                <a:latin typeface="Calibri"/>
+              </a:rPr>
+              <a:t>  D--&gt;&gt;A: filas</a:t>
+            </a:r>
+          </a:p>
+          <a:p>
+            <a:pPr>
+              <a:spcAft>
+                <a:spcPts val="400"/>
+              </a:spcAft>
+            </a:pPr>
+            <a:r>
+              <a:rPr sz="1400" b="0" i="0">
+                <a:solidFill>
+                  <a:srgbClr val="FFFFFF"/>
+                </a:solidFill>
+                <a:latin typeface="Calibri"/>
+              </a:rPr>
+              <a:t>  A--&gt;&gt;W: 201 Created           %% red: 40 ms</a:t>
+            </a:r>
+          </a:p>
+          <a:p>
+            <a:pPr>
+              <a:spcAft>
+                <a:spcPts val="400"/>
+              </a:spcAft>
+            </a:pPr>
+            <a:r>
+              <a:rPr sz="1400" b="0" i="0">
+                <a:solidFill>
+                  <a:srgbClr val="FFFFFF"/>
+                </a:solidFill>
+                <a:latin typeface="Calibri"/>
+              </a:rPr>
+              <a:t>  W--&gt;&gt;U: confirmacion          %% render: 50 ms</a:t>
+            </a:r>
+          </a:p>
+          <a:p>
+            <a:pPr>
+              <a:spcAft>
+                <a:spcPts val="400"/>
+              </a:spcAft>
+            </a:pPr>
+            <a:r>
+              <a:rPr sz="1400" b="0" i="0">
+                <a:solidFill>
+                  <a:srgbClr val="FFFFFF"/>
+                </a:solidFill>
+                <a:latin typeface="Calibri"/>
+              </a:rPr>
+              <a:t/>
+            </a:r>
+          </a:p>
+          <a:p>
+            <a:pPr>
+              <a:spcAft>
+                <a:spcPts val="400"/>
+              </a:spcAft>
+            </a:pPr>
+            <a:r>
+              <a:rPr sz="1400" b="0" i="0">
+                <a:solidFill>
+                  <a:srgbClr val="FFFFFF"/>
+                </a:solidFill>
+                <a:latin typeface="Calibri"/>
+              </a:rPr>
+              <a:t>  Note over U,D: presupuesto total 200 ms · medido p95, no promedio</a:t>
+            </a:r>
+          </a:p>
+        </p:txBody>
+      </p:sp>
+      <p:sp>
+        <p:nvSpPr>
+          <p:cNvPr id="9" name="TextBox 8"/>
           <p:cNvSpPr txBox="1"/>
           <p:nvPr/>
         </p:nvSpPr>
@@ -7614,7 +8859,7 @@
                 </a:solidFill>
                 <a:latin typeface="Calibri"/>
               </a:rPr>
-              <a:t>El presupuesto de latencia del camino critico</a:t>
+              <a:t>Las metricas objetivo, escritas como se verifican</a:t>
             </a:r>
           </a:p>
         </p:txBody>
@@ -7773,7 +9018,7 @@
                 </a:solidFill>
                 <a:latin typeface="Calibri"/>
               </a:rPr>
-              <a:t>sequenceDiagram</a:t>
+              <a:t># Cada metrica necesita las cuatro columnas, o no es verificable:</a:t>
             </a:r>
           </a:p>
           <a:p>
@@ -7789,7 +9034,7 @@
                 </a:solidFill>
                 <a:latin typeface="Calibri"/>
               </a:rPr>
-              <a:t>  autonumber</a:t>
+              <a:t>#   metrica | objetivo | como se mide | que se hace si falla</a:t>
             </a:r>
           </a:p>
           <a:p>
@@ -7805,7 +9050,7 @@
                 </a:solidFill>
                 <a:latin typeface="Calibri"/>
               </a:rPr>
-              <a:t>  participant U as Usuario</a:t>
+              <a:t/>
             </a:r>
           </a:p>
           <a:p>
@@ -7821,7 +9066,7 @@
                 </a:solidFill>
                 <a:latin typeface="Calibri"/>
               </a:rPr>
-              <a:t>  participant W as Web SPA</a:t>
+              <a:t># p95 de POST /recurso   | &lt; 200 ms | percentil del log de la API</a:t>
             </a:r>
           </a:p>
           <a:p>
@@ -7837,7 +9082,7 @@
                 </a:solidFill>
                 <a:latin typeface="Calibri"/>
               </a:rPr>
-              <a:t>  participant A as API</a:t>
+              <a:t>#                        |          | -&gt; revisar el indice de la consulta</a:t>
             </a:r>
           </a:p>
           <a:p>
@@ -7853,7 +9098,7 @@
                 </a:solidFill>
                 <a:latin typeface="Calibri"/>
               </a:rPr>
-              <a:t>  participant D as PostgreSQL</a:t>
+              <a:t># tasa de error 5xx      | &lt; 1%     | conteo por minuto</a:t>
             </a:r>
           </a:p>
           <a:p>
@@ -7869,7 +9114,7 @@
                 </a:solidFill>
                 <a:latin typeface="Calibri"/>
               </a:rPr>
-              <a:t/>
+              <a:t>#                        |          | -&gt; abrir el log del paso que falla</a:t>
             </a:r>
           </a:p>
           <a:p>
@@ -7885,7 +9130,7 @@
                 </a:solidFill>
                 <a:latin typeface="Calibri"/>
               </a:rPr>
-              <a:t>  U-&gt;&gt;W: accion del pico (&lt;su caso&gt;)</a:t>
+              <a:t># uso de CPU de la API   | &lt; 70%    | metrica del proveedor</a:t>
             </a:r>
           </a:p>
           <a:p>
@@ -7901,7 +9146,7 @@
                 </a:solidFill>
                 <a:latin typeface="Calibri"/>
               </a:rPr>
-              <a:t>  W-&gt;&gt;A: POST /recurso          %% red: 40 ms</a:t>
+              <a:t>#                        |          | -&gt; escalar horizontal (Clase 13)</a:t>
             </a:r>
           </a:p>
           <a:p>
@@ -7917,7 +9162,7 @@
                 </a:solidFill>
                 <a:latin typeface="Calibri"/>
               </a:rPr>
-              <a:t>  A-&gt;&gt;A: validar + autorizar    %% 10 ms</a:t>
+              <a:t/>
             </a:r>
           </a:p>
           <a:p>
@@ -7933,7 +9178,7 @@
                 </a:solidFill>
                 <a:latin typeface="Calibri"/>
               </a:rPr>
-              <a:t>  A-&gt;&gt;D: SELECT + INSERT        %% 60 ms</a:t>
+              <a:t># PROMEDIO no sirve: con 99 respuestas de 10 ms y una de 5 s el promedio</a:t>
             </a:r>
           </a:p>
           <a:p>
@@ -7949,71 +9194,7 @@
                 </a:solidFill>
                 <a:latin typeface="Calibri"/>
               </a:rPr>
-              <a:t>  D--&gt;&gt;A: filas</a:t>
-            </a:r>
-          </a:p>
-          <a:p>
-            <a:pPr>
-              <a:spcAft>
-                <a:spcPts val="400"/>
-              </a:spcAft>
-            </a:pPr>
-            <a:r>
-              <a:rPr sz="1400" b="0" i="0">
-                <a:solidFill>
-                  <a:srgbClr val="FFFFFF"/>
-                </a:solidFill>
-                <a:latin typeface="Calibri"/>
-              </a:rPr>
-              <a:t>  A--&gt;&gt;W: 201 Created           %% red: 40 ms</a:t>
-            </a:r>
-          </a:p>
-          <a:p>
-            <a:pPr>
-              <a:spcAft>
-                <a:spcPts val="400"/>
-              </a:spcAft>
-            </a:pPr>
-            <a:r>
-              <a:rPr sz="1400" b="0" i="0">
-                <a:solidFill>
-                  <a:srgbClr val="FFFFFF"/>
-                </a:solidFill>
-                <a:latin typeface="Calibri"/>
-              </a:rPr>
-              <a:t>  W--&gt;&gt;U: confirmacion          %% render: 50 ms</a:t>
-            </a:r>
-          </a:p>
-          <a:p>
-            <a:pPr>
-              <a:spcAft>
-                <a:spcPts val="400"/>
-              </a:spcAft>
-            </a:pPr>
-            <a:r>
-              <a:rPr sz="1400" b="0" i="0">
-                <a:solidFill>
-                  <a:srgbClr val="FFFFFF"/>
-                </a:solidFill>
-                <a:latin typeface="Calibri"/>
-              </a:rPr>
-              <a:t/>
-            </a:r>
-          </a:p>
-          <a:p>
-            <a:pPr>
-              <a:spcAft>
-                <a:spcPts val="400"/>
-              </a:spcAft>
-            </a:pPr>
-            <a:r>
-              <a:rPr sz="1400" b="0" i="0">
-                <a:solidFill>
-                  <a:srgbClr val="FFFFFF"/>
-                </a:solidFill>
-                <a:latin typeface="Calibri"/>
-              </a:rPr>
-              <a:t>  Note over U,D: presupuesto total 200 ms · medido p95, no promedio</a:t>
+              <a:t># da 60 ms y el usuario que espero 5 s existe. Por eso p95.</a:t>
             </a:r>
           </a:p>
         </p:txBody>
@@ -8194,7 +9375,7 @@
                 </a:solidFill>
                 <a:latin typeface="Calibri"/>
               </a:rPr>
-              <a:t>Las metricas objetivo, escritas como se verifican</a:t>
+              <a:t>«Que sea rapido» no es un requisito</a:t>
             </a:r>
           </a:p>
         </p:txBody>
@@ -8208,7 +9389,7 @@
         <p:spPr>
           <a:xfrm>
             <a:off x="457200" y="1261872"/>
-            <a:ext cx="11277295" cy="5093208"/>
+            <a:ext cx="5478627" cy="5093208"/>
           </a:xfrm>
           <a:prstGeom prst="roundRect">
             <a:avLst>
@@ -8216,7 +9397,7 @@
             </a:avLst>
           </a:prstGeom>
           <a:solidFill>
-            <a:srgbClr val="1E2A38"/>
+            <a:srgbClr val="FBE4E4"/>
           </a:solidFill>
           <a:ln>
             <a:noFill/>
@@ -8253,7 +9434,215 @@
         <p:spPr>
           <a:xfrm>
             <a:off x="457200" y="1261872"/>
-            <a:ext cx="11277295" cy="320040"/>
+            <a:ext cx="5478627" cy="502920"/>
+          </a:xfrm>
+          <a:prstGeom prst="rect">
+            <a:avLst/>
+          </a:prstGeom>
+          <a:solidFill>
+            <a:srgbClr val="A02030"/>
+          </a:solidFill>
+          <a:ln>
+            <a:noFill/>
+          </a:ln>
+        </p:spPr>
+        <p:style>
+          <a:lnRef idx="1">
+            <a:schemeClr val="accent1"/>
+          </a:lnRef>
+          <a:fillRef idx="3">
+            <a:schemeClr val="accent1"/>
+          </a:fillRef>
+          <a:effectRef idx="2">
+            <a:schemeClr val="accent1"/>
+          </a:effectRef>
+          <a:fontRef idx="minor">
+            <a:schemeClr val="lt1"/>
+          </a:fontRef>
+        </p:style>
+        <p:txBody>
+          <a:bodyPr rtlCol="0" anchor="ctr"/>
+          <a:lstStyle/>
+          <a:p>
+            <a:pPr algn="ctr"/>
+          </a:p>
+        </p:txBody>
+      </p:sp>
+      <p:sp>
+        <p:nvSpPr>
+          <p:cNvPr id="7" name="TextBox 6"/>
+          <p:cNvSpPr txBox="1"/>
+          <p:nvPr/>
+        </p:nvSpPr>
+        <p:spPr>
+          <a:xfrm>
+            <a:off x="594360" y="1353312"/>
+            <a:ext cx="5204307" cy="365760"/>
+          </a:xfrm>
+          <a:prstGeom prst="rect">
+            <a:avLst/>
+          </a:prstGeom>
+          <a:noFill/>
+        </p:spPr>
+        <p:txBody>
+          <a:bodyPr wrap="square" anchor="ctr"/>
+          <a:lstStyle/>
+          <a:p>
+            <a:pPr algn="ctr"/>
+            <a:r>
+              <a:rPr sz="1600" b="1" i="0">
+                <a:solidFill>
+                  <a:srgbClr val="FFFFFF"/>
+                </a:solidFill>
+                <a:latin typeface="Calibri"/>
+              </a:rPr>
+              <a:t>Enunciado vago</a:t>
+            </a:r>
+          </a:p>
+        </p:txBody>
+      </p:sp>
+      <p:sp>
+        <p:nvSpPr>
+          <p:cNvPr id="8" name="TextBox 7"/>
+          <p:cNvSpPr txBox="1"/>
+          <p:nvPr/>
+        </p:nvSpPr>
+        <p:spPr>
+          <a:xfrm>
+            <a:off x="621792" y="1901952"/>
+            <a:ext cx="5158587" cy="4498848"/>
+          </a:xfrm>
+          <a:prstGeom prst="rect">
+            <a:avLst/>
+          </a:prstGeom>
+          <a:noFill/>
+        </p:spPr>
+        <p:txBody>
+          <a:bodyPr wrap="square">
+            <a:spAutoFit/>
+          </a:bodyPr>
+          <a:lstStyle/>
+          <a:p>
+            <a:pPr>
+              <a:spcAft>
+                <a:spcPts val="800"/>
+              </a:spcAft>
+            </a:pPr>
+            <a:r>
+              <a:rPr sz="1500" b="0" i="0">
+                <a:solidFill>
+                  <a:srgbClr val="333333"/>
+                </a:solidFill>
+                <a:latin typeface="Calibri"/>
+              </a:rPr>
+              <a:t>–   «La app tiene que ser rapida»</a:t>
+            </a:r>
+          </a:p>
+          <a:p>
+            <a:pPr>
+              <a:spcAft>
+                <a:spcPts val="800"/>
+              </a:spcAft>
+            </a:pPr>
+            <a:r>
+              <a:rPr sz="1500" b="0" i="0">
+                <a:solidFill>
+                  <a:srgbClr val="333333"/>
+                </a:solidFill>
+                <a:latin typeface="Calibri"/>
+              </a:rPr>
+              <a:t>–   «Aguanta harta gente»</a:t>
+            </a:r>
+          </a:p>
+          <a:p>
+            <a:pPr>
+              <a:spcAft>
+                <a:spcPts val="800"/>
+              </a:spcAft>
+            </a:pPr>
+            <a:r>
+              <a:rPr sz="1500" b="0" i="0">
+                <a:solidFill>
+                  <a:srgbClr val="333333"/>
+                </a:solidFill>
+                <a:latin typeface="Calibri"/>
+              </a:rPr>
+              <a:t>–   «Si se pone lenta, le subimos recursos»</a:t>
+            </a:r>
+          </a:p>
+          <a:p>
+            <a:pPr>
+              <a:spcAft>
+                <a:spcPts val="800"/>
+              </a:spcAft>
+            </a:pPr>
+            <a:r>
+              <a:rPr sz="1500" b="0" i="0">
+                <a:solidFill>
+                  <a:srgbClr val="333333"/>
+                </a:solidFill>
+                <a:latin typeface="Calibri"/>
+              </a:rPr>
+              <a:t>–   No hay con que comparar despues</a:t>
+            </a:r>
+          </a:p>
+        </p:txBody>
+      </p:sp>
+      <p:sp>
+        <p:nvSpPr>
+          <p:cNvPr id="9" name="Rounded Rectangle 8"/>
+          <p:cNvSpPr/>
+          <p:nvPr/>
+        </p:nvSpPr>
+        <p:spPr>
+          <a:xfrm>
+            <a:off x="6255867" y="1261872"/>
+            <a:ext cx="5478627" cy="5093208"/>
+          </a:xfrm>
+          <a:prstGeom prst="roundRect">
+            <a:avLst>
+              <a:gd name="adj" fmla="val 12000"/>
+            </a:avLst>
+          </a:prstGeom>
+          <a:solidFill>
+            <a:srgbClr val="E8F4FA"/>
+          </a:solidFill>
+          <a:ln>
+            <a:noFill/>
+          </a:ln>
+        </p:spPr>
+        <p:style>
+          <a:lnRef idx="1">
+            <a:schemeClr val="accent1"/>
+          </a:lnRef>
+          <a:fillRef idx="3">
+            <a:schemeClr val="accent1"/>
+          </a:fillRef>
+          <a:effectRef idx="2">
+            <a:schemeClr val="accent1"/>
+          </a:effectRef>
+          <a:fontRef idx="minor">
+            <a:schemeClr val="lt1"/>
+          </a:fontRef>
+        </p:style>
+        <p:txBody>
+          <a:bodyPr rtlCol="0" anchor="ctr"/>
+          <a:lstStyle/>
+          <a:p>
+            <a:pPr algn="ctr"/>
+          </a:p>
+        </p:txBody>
+      </p:sp>
+      <p:sp>
+        <p:nvSpPr>
+          <p:cNvPr id="10" name="Rectangle 9"/>
+          <p:cNvSpPr/>
+          <p:nvPr/>
+        </p:nvSpPr>
+        <p:spPr>
+          <a:xfrm>
+            <a:off x="6255867" y="1261872"/>
+            <a:ext cx="5478627" cy="502920"/>
           </a:xfrm>
           <a:prstGeom prst="rect">
             <a:avLst/>
@@ -8289,14 +9678,14 @@
       </p:sp>
       <p:sp>
         <p:nvSpPr>
-          <p:cNvPr id="7" name="TextBox 6"/>
+          <p:cNvPr id="11" name="TextBox 10"/>
           <p:cNvSpPr txBox="1"/>
           <p:nvPr/>
         </p:nvSpPr>
         <p:spPr>
           <a:xfrm>
-            <a:off x="685800" y="1307592"/>
-            <a:ext cx="10820095" cy="256032"/>
+            <a:off x="6393027" y="1353312"/>
+            <a:ext cx="5204307" cy="365760"/>
           </a:xfrm>
           <a:prstGeom prst="rect">
             <a:avLst/>
@@ -8307,28 +9696,29 @@
           <a:bodyPr wrap="square" anchor="ctr"/>
           <a:lstStyle/>
           <a:p>
-            <a:r>
-              <a:rPr sz="1000" b="1" i="0">
-                <a:solidFill>
-                  <a:srgbClr val="269CCB"/>
-                </a:solidFill>
-                <a:latin typeface="Calibri"/>
-              </a:rPr>
-              <a:t>● ● ●</a:t>
-            </a:r>
-          </a:p>
-        </p:txBody>
-      </p:sp>
-      <p:sp>
-        <p:nvSpPr>
-          <p:cNvPr id="8" name="TextBox 7"/>
+            <a:pPr algn="ctr"/>
+            <a:r>
+              <a:rPr sz="1600" b="1" i="0">
+                <a:solidFill>
+                  <a:srgbClr val="FFFFFF"/>
+                </a:solidFill>
+                <a:latin typeface="Calibri"/>
+              </a:rPr>
+              <a:t>Enunciado medible</a:t>
+            </a:r>
+          </a:p>
+        </p:txBody>
+      </p:sp>
+      <p:sp>
+        <p:nvSpPr>
+          <p:cNvPr id="12" name="TextBox 11"/>
           <p:cNvSpPr txBox="1"/>
           <p:nvPr/>
         </p:nvSpPr>
         <p:spPr>
           <a:xfrm>
-            <a:off x="777240" y="1719072"/>
-            <a:ext cx="10637215" cy="4453128"/>
+            <a:off x="6420459" y="1901952"/>
+            <a:ext cx="5158587" cy="4498848"/>
           </a:xfrm>
           <a:prstGeom prst="rect">
             <a:avLst/>
@@ -8343,200 +9733,117 @@
           <a:p>
             <a:pPr>
               <a:spcAft>
-                <a:spcPts val="400"/>
+                <a:spcPts val="800"/>
               </a:spcAft>
             </a:pPr>
             <a:r>
-              <a:rPr sz="1400" b="0" i="0">
-                <a:solidFill>
-                  <a:srgbClr val="FFFFFF"/>
-                </a:solidFill>
-                <a:latin typeface="Calibri"/>
-              </a:rPr>
-              <a:t># Cada metrica necesita las cuatro columnas, o no es verificable:</a:t>
+              <a:rPr sz="1500" b="0" i="0">
+                <a:solidFill>
+                  <a:srgbClr val="333333"/>
+                </a:solidFill>
+                <a:latin typeface="Calibri"/>
+              </a:rPr>
+              <a:t>–   </a:t>
+            </a:r>
+            <a:r>
+              <a:rPr sz="1500" b="1" i="0">
+                <a:solidFill>
+                  <a:srgbClr val="333333"/>
+                </a:solidFill>
+                <a:latin typeface="Calibri"/>
+              </a:rPr>
+              <a:t>p95 &lt; 300 ms</a:t>
+            </a:r>
+            <a:r>
+              <a:rPr sz="1500" b="0" i="0">
+                <a:solidFill>
+                  <a:srgbClr val="333333"/>
+                </a:solidFill>
+                <a:latin typeface="Calibri"/>
+              </a:rPr>
+              <a:t> en el endpoint de reserva</a:t>
             </a:r>
           </a:p>
           <a:p>
             <a:pPr>
               <a:spcAft>
-                <a:spcPts val="400"/>
+                <a:spcPts val="800"/>
               </a:spcAft>
             </a:pPr>
             <a:r>
-              <a:rPr sz="1400" b="0" i="0">
-                <a:solidFill>
-                  <a:srgbClr val="FFFFFF"/>
-                </a:solidFill>
-                <a:latin typeface="Calibri"/>
-              </a:rPr>
-              <a:t>#   metrica | objetivo | como se mide | que se hace si falla</a:t>
+              <a:rPr sz="1500" b="0" i="0">
+                <a:solidFill>
+                  <a:srgbClr val="333333"/>
+                </a:solidFill>
+                <a:latin typeface="Calibri"/>
+              </a:rPr>
+              <a:t>–   Escenario: </a:t>
+            </a:r>
+            <a:r>
+              <a:rPr sz="1500" b="1" i="0">
+                <a:solidFill>
+                  <a:srgbClr val="333333"/>
+                </a:solidFill>
+                <a:latin typeface="Calibri"/>
+              </a:rPr>
+              <a:t>150 RPS</a:t>
+            </a:r>
+            <a:r>
+              <a:rPr sz="1500" b="0" i="0">
+                <a:solidFill>
+                  <a:srgbClr val="333333"/>
+                </a:solidFill>
+                <a:latin typeface="Calibri"/>
+              </a:rPr>
+              <a:t> en el pico de inicio de semestre</a:t>
             </a:r>
           </a:p>
           <a:p>
             <a:pPr>
               <a:spcAft>
-                <a:spcPts val="400"/>
+                <a:spcPts val="800"/>
               </a:spcAft>
             </a:pPr>
             <a:r>
-              <a:rPr sz="1400" b="0" i="0">
-                <a:solidFill>
-                  <a:srgbClr val="FFFFFF"/>
-                </a:solidFill>
-                <a:latin typeface="Calibri"/>
-              </a:rPr>
-              <a:t/>
+              <a:rPr sz="1500" b="0" i="0">
+                <a:solidFill>
+                  <a:srgbClr val="333333"/>
+                </a:solidFill>
+                <a:latin typeface="Calibri"/>
+              </a:rPr>
+              <a:t>–   Bottleneck sospechado: </a:t>
+            </a:r>
+            <a:r>
+              <a:rPr sz="1500" b="1" i="0">
+                <a:solidFill>
+                  <a:srgbClr val="333333"/>
+                </a:solidFill>
+                <a:latin typeface="Calibri"/>
+              </a:rPr>
+              <a:t>consulta a la BD</a:t>
             </a:r>
           </a:p>
           <a:p>
             <a:pPr>
               <a:spcAft>
-                <a:spcPts val="400"/>
+                <a:spcPts val="800"/>
               </a:spcAft>
             </a:pPr>
             <a:r>
-              <a:rPr sz="1400" b="0" i="0">
-                <a:solidFill>
-                  <a:srgbClr val="FFFFFF"/>
-                </a:solidFill>
-                <a:latin typeface="Calibri"/>
-              </a:rPr>
-              <a:t># p95 de POST /recurso   | &lt; 200 ms | percentil del log de la API</a:t>
-            </a:r>
-          </a:p>
-          <a:p>
-            <a:pPr>
-              <a:spcAft>
-                <a:spcPts val="400"/>
-              </a:spcAft>
-            </a:pPr>
-            <a:r>
-              <a:rPr sz="1400" b="0" i="0">
-                <a:solidFill>
-                  <a:srgbClr val="FFFFFF"/>
-                </a:solidFill>
-                <a:latin typeface="Calibri"/>
-              </a:rPr>
-              <a:t>#                        |          | -&gt; revisar el indice de la consulta</a:t>
-            </a:r>
-          </a:p>
-          <a:p>
-            <a:pPr>
-              <a:spcAft>
-                <a:spcPts val="400"/>
-              </a:spcAft>
-            </a:pPr>
-            <a:r>
-              <a:rPr sz="1400" b="0" i="0">
-                <a:solidFill>
-                  <a:srgbClr val="FFFFFF"/>
-                </a:solidFill>
-                <a:latin typeface="Calibri"/>
-              </a:rPr>
-              <a:t># tasa de error 5xx      | &lt; 1%     | conteo por minuto</a:t>
-            </a:r>
-          </a:p>
-          <a:p>
-            <a:pPr>
-              <a:spcAft>
-                <a:spcPts val="400"/>
-              </a:spcAft>
-            </a:pPr>
-            <a:r>
-              <a:rPr sz="1400" b="0" i="0">
-                <a:solidFill>
-                  <a:srgbClr val="FFFFFF"/>
-                </a:solidFill>
-                <a:latin typeface="Calibri"/>
-              </a:rPr>
-              <a:t>#                        |          | -&gt; abrir el log del paso que falla</a:t>
-            </a:r>
-          </a:p>
-          <a:p>
-            <a:pPr>
-              <a:spcAft>
-                <a:spcPts val="400"/>
-              </a:spcAft>
-            </a:pPr>
-            <a:r>
-              <a:rPr sz="1400" b="0" i="0">
-                <a:solidFill>
-                  <a:srgbClr val="FFFFFF"/>
-                </a:solidFill>
-                <a:latin typeface="Calibri"/>
-              </a:rPr>
-              <a:t># uso de CPU de la API   | &lt; 70%    | metrica del proveedor</a:t>
-            </a:r>
-          </a:p>
-          <a:p>
-            <a:pPr>
-              <a:spcAft>
-                <a:spcPts val="400"/>
-              </a:spcAft>
-            </a:pPr>
-            <a:r>
-              <a:rPr sz="1400" b="0" i="0">
-                <a:solidFill>
-                  <a:srgbClr val="FFFFFF"/>
-                </a:solidFill>
-                <a:latin typeface="Calibri"/>
-              </a:rPr>
-              <a:t>#                        |          | -&gt; escalar horizontal (Clase 13)</a:t>
-            </a:r>
-          </a:p>
-          <a:p>
-            <a:pPr>
-              <a:spcAft>
-                <a:spcPts val="400"/>
-              </a:spcAft>
-            </a:pPr>
-            <a:r>
-              <a:rPr sz="1400" b="0" i="0">
-                <a:solidFill>
-                  <a:srgbClr val="FFFFFF"/>
-                </a:solidFill>
-                <a:latin typeface="Calibri"/>
-              </a:rPr>
-              <a:t/>
-            </a:r>
-          </a:p>
-          <a:p>
-            <a:pPr>
-              <a:spcAft>
-                <a:spcPts val="400"/>
-              </a:spcAft>
-            </a:pPr>
-            <a:r>
-              <a:rPr sz="1400" b="0" i="0">
-                <a:solidFill>
-                  <a:srgbClr val="FFFFFF"/>
-                </a:solidFill>
-                <a:latin typeface="Calibri"/>
-              </a:rPr>
-              <a:t># PROMEDIO no sirve: con 99 respuestas de 10 ms y una de 5 s el promedio</a:t>
-            </a:r>
-          </a:p>
-          <a:p>
-            <a:pPr>
-              <a:spcAft>
-                <a:spcPts val="400"/>
-              </a:spcAft>
-            </a:pPr>
-            <a:r>
-              <a:rPr sz="1400" b="0" i="0">
-                <a:solidFill>
-                  <a:srgbClr val="FFFFFF"/>
-                </a:solidFill>
-                <a:latin typeface="Calibri"/>
-              </a:rPr>
-              <a:t># da 60 ms y el usuario que espero 5 s existe. Por eso p95.</a:t>
-            </a:r>
-          </a:p>
-        </p:txBody>
-      </p:sp>
-      <p:sp>
-        <p:nvSpPr>
-          <p:cNvPr id="9" name="TextBox 8"/>
+              <a:rPr sz="1500" b="0" i="0">
+                <a:solidFill>
+                  <a:srgbClr val="333333"/>
+                </a:solidFill>
+                <a:latin typeface="Calibri"/>
+              </a:rPr>
+              <a:t>–   Se puede verificar: pasa o no pasa</a:t>
+            </a:r>
+          </a:p>
+        </p:txBody>
+      </p:sp>
+      <p:sp>
+        <p:nvSpPr>
+          <p:cNvPr id="13" name="TextBox 12"/>
           <p:cNvSpPr txBox="1"/>
           <p:nvPr/>
         </p:nvSpPr>
@@ -8604,13 +9911,13 @@
         <p:spPr>
           <a:xfrm>
             <a:off x="0" y="0"/>
-            <a:ext cx="12191695" cy="960120"/>
+            <a:ext cx="12191695" cy="164592"/>
           </a:xfrm>
           <a:prstGeom prst="rect">
             <a:avLst/>
           </a:prstGeom>
           <a:solidFill>
-            <a:srgbClr val="095292"/>
+            <a:srgbClr val="269CCB"/>
           </a:solidFill>
           <a:ln>
             <a:noFill/>
@@ -8638,893 +9945,9 @@
           </a:p>
         </p:txBody>
       </p:sp>
-      <p:sp>
-        <p:nvSpPr>
-          <p:cNvPr id="3" name="Rectangle 2"/>
-          <p:cNvSpPr/>
-          <p:nvPr/>
-        </p:nvSpPr>
-        <p:spPr>
-          <a:xfrm>
-            <a:off x="0" y="960120"/>
-            <a:ext cx="12191695" cy="41148"/>
-          </a:xfrm>
-          <a:prstGeom prst="rect">
-            <a:avLst/>
-          </a:prstGeom>
-          <a:solidFill>
-            <a:srgbClr val="FFD000"/>
-          </a:solidFill>
-          <a:ln>
-            <a:noFill/>
-          </a:ln>
-        </p:spPr>
-        <p:style>
-          <a:lnRef idx="1">
-            <a:schemeClr val="accent1"/>
-          </a:lnRef>
-          <a:fillRef idx="3">
-            <a:schemeClr val="accent1"/>
-          </a:fillRef>
-          <a:effectRef idx="2">
-            <a:schemeClr val="accent1"/>
-          </a:effectRef>
-          <a:fontRef idx="minor">
-            <a:schemeClr val="lt1"/>
-          </a:fontRef>
-        </p:style>
-        <p:txBody>
-          <a:bodyPr rtlCol="0" anchor="ctr"/>
-          <a:lstStyle/>
-          <a:p>
-            <a:pPr algn="ctr"/>
-          </a:p>
-        </p:txBody>
-      </p:sp>
-      <p:sp>
-        <p:nvSpPr>
-          <p:cNvPr id="4" name="TextBox 3"/>
-          <p:cNvSpPr txBox="1"/>
-          <p:nvPr/>
-        </p:nvSpPr>
-        <p:spPr>
-          <a:xfrm>
-            <a:off x="457200" y="164592"/>
-            <a:ext cx="11277295" cy="502920"/>
-          </a:xfrm>
-          <a:prstGeom prst="rect">
-            <a:avLst/>
-          </a:prstGeom>
-          <a:noFill/>
-        </p:spPr>
-        <p:txBody>
-          <a:bodyPr wrap="square">
-            <a:spAutoFit/>
-          </a:bodyPr>
-          <a:lstStyle/>
-          <a:p>
-            <a:r>
-              <a:rPr sz="2600" b="1" i="0">
-                <a:solidFill>
-                  <a:srgbClr val="FFFFFF"/>
-                </a:solidFill>
-                <a:latin typeface="Calibri"/>
-              </a:rPr>
-              <a:t>«Que sea rapido» no es un requisito</a:t>
-            </a:r>
-          </a:p>
-        </p:txBody>
-      </p:sp>
-      <p:sp>
-        <p:nvSpPr>
-          <p:cNvPr id="5" name="Rounded Rectangle 4"/>
-          <p:cNvSpPr/>
-          <p:nvPr/>
-        </p:nvSpPr>
-        <p:spPr>
-          <a:xfrm>
-            <a:off x="457200" y="1261872"/>
-            <a:ext cx="5478627" cy="5093208"/>
-          </a:xfrm>
-          <a:prstGeom prst="roundRect">
-            <a:avLst>
-              <a:gd name="adj" fmla="val 12000"/>
-            </a:avLst>
-          </a:prstGeom>
-          <a:solidFill>
-            <a:srgbClr val="FBE4E4"/>
-          </a:solidFill>
-          <a:ln>
-            <a:noFill/>
-          </a:ln>
-        </p:spPr>
-        <p:style>
-          <a:lnRef idx="1">
-            <a:schemeClr val="accent1"/>
-          </a:lnRef>
-          <a:fillRef idx="3">
-            <a:schemeClr val="accent1"/>
-          </a:fillRef>
-          <a:effectRef idx="2">
-            <a:schemeClr val="accent1"/>
-          </a:effectRef>
-          <a:fontRef idx="minor">
-            <a:schemeClr val="lt1"/>
-          </a:fontRef>
-        </p:style>
-        <p:txBody>
-          <a:bodyPr rtlCol="0" anchor="ctr"/>
-          <a:lstStyle/>
-          <a:p>
-            <a:pPr algn="ctr"/>
-          </a:p>
-        </p:txBody>
-      </p:sp>
-      <p:sp>
-        <p:nvSpPr>
-          <p:cNvPr id="6" name="Rectangle 5"/>
-          <p:cNvSpPr/>
-          <p:nvPr/>
-        </p:nvSpPr>
-        <p:spPr>
-          <a:xfrm>
-            <a:off x="457200" y="1261872"/>
-            <a:ext cx="5478627" cy="502920"/>
-          </a:xfrm>
-          <a:prstGeom prst="rect">
-            <a:avLst/>
-          </a:prstGeom>
-          <a:solidFill>
-            <a:srgbClr val="A02030"/>
-          </a:solidFill>
-          <a:ln>
-            <a:noFill/>
-          </a:ln>
-        </p:spPr>
-        <p:style>
-          <a:lnRef idx="1">
-            <a:schemeClr val="accent1"/>
-          </a:lnRef>
-          <a:fillRef idx="3">
-            <a:schemeClr val="accent1"/>
-          </a:fillRef>
-          <a:effectRef idx="2">
-            <a:schemeClr val="accent1"/>
-          </a:effectRef>
-          <a:fontRef idx="minor">
-            <a:schemeClr val="lt1"/>
-          </a:fontRef>
-        </p:style>
-        <p:txBody>
-          <a:bodyPr rtlCol="0" anchor="ctr"/>
-          <a:lstStyle/>
-          <a:p>
-            <a:pPr algn="ctr"/>
-          </a:p>
-        </p:txBody>
-      </p:sp>
-      <p:sp>
-        <p:nvSpPr>
-          <p:cNvPr id="7" name="TextBox 6"/>
-          <p:cNvSpPr txBox="1"/>
-          <p:nvPr/>
-        </p:nvSpPr>
-        <p:spPr>
-          <a:xfrm>
-            <a:off x="594360" y="1353312"/>
-            <a:ext cx="5204307" cy="365760"/>
-          </a:xfrm>
-          <a:prstGeom prst="rect">
-            <a:avLst/>
-          </a:prstGeom>
-          <a:noFill/>
-        </p:spPr>
-        <p:txBody>
-          <a:bodyPr wrap="square" anchor="ctr"/>
-          <a:lstStyle/>
-          <a:p>
-            <a:pPr algn="ctr"/>
-            <a:r>
-              <a:rPr sz="1600" b="1" i="0">
-                <a:solidFill>
-                  <a:srgbClr val="FFFFFF"/>
-                </a:solidFill>
-                <a:latin typeface="Calibri"/>
-              </a:rPr>
-              <a:t>Enunciado vago</a:t>
-            </a:r>
-          </a:p>
-        </p:txBody>
-      </p:sp>
-      <p:sp>
-        <p:nvSpPr>
-          <p:cNvPr id="8" name="TextBox 7"/>
-          <p:cNvSpPr txBox="1"/>
-          <p:nvPr/>
-        </p:nvSpPr>
-        <p:spPr>
-          <a:xfrm>
-            <a:off x="621792" y="1901952"/>
-            <a:ext cx="5158587" cy="4498848"/>
-          </a:xfrm>
-          <a:prstGeom prst="rect">
-            <a:avLst/>
-          </a:prstGeom>
-          <a:noFill/>
-        </p:spPr>
-        <p:txBody>
-          <a:bodyPr wrap="square">
-            <a:spAutoFit/>
-          </a:bodyPr>
-          <a:lstStyle/>
-          <a:p>
-            <a:pPr>
-              <a:spcAft>
-                <a:spcPts val="800"/>
-              </a:spcAft>
-            </a:pPr>
-            <a:r>
-              <a:rPr sz="1500" b="0" i="0">
-                <a:solidFill>
-                  <a:srgbClr val="333333"/>
-                </a:solidFill>
-                <a:latin typeface="Calibri"/>
-              </a:rPr>
-              <a:t>–   «La app tiene que ser rapida»</a:t>
-            </a:r>
-          </a:p>
-          <a:p>
-            <a:pPr>
-              <a:spcAft>
-                <a:spcPts val="800"/>
-              </a:spcAft>
-            </a:pPr>
-            <a:r>
-              <a:rPr sz="1500" b="0" i="0">
-                <a:solidFill>
-                  <a:srgbClr val="333333"/>
-                </a:solidFill>
-                <a:latin typeface="Calibri"/>
-              </a:rPr>
-              <a:t>–   «Aguanta harta gente»</a:t>
-            </a:r>
-          </a:p>
-          <a:p>
-            <a:pPr>
-              <a:spcAft>
-                <a:spcPts val="800"/>
-              </a:spcAft>
-            </a:pPr>
-            <a:r>
-              <a:rPr sz="1500" b="0" i="0">
-                <a:solidFill>
-                  <a:srgbClr val="333333"/>
-                </a:solidFill>
-                <a:latin typeface="Calibri"/>
-              </a:rPr>
-              <a:t>–   «Si se pone lenta, le subimos recursos»</a:t>
-            </a:r>
-          </a:p>
-          <a:p>
-            <a:pPr>
-              <a:spcAft>
-                <a:spcPts val="800"/>
-              </a:spcAft>
-            </a:pPr>
-            <a:r>
-              <a:rPr sz="1500" b="0" i="0">
-                <a:solidFill>
-                  <a:srgbClr val="333333"/>
-                </a:solidFill>
-                <a:latin typeface="Calibri"/>
-              </a:rPr>
-              <a:t>–   No hay con que comparar despues</a:t>
-            </a:r>
-          </a:p>
-        </p:txBody>
-      </p:sp>
-      <p:sp>
-        <p:nvSpPr>
-          <p:cNvPr id="9" name="Rounded Rectangle 8"/>
-          <p:cNvSpPr/>
-          <p:nvPr/>
-        </p:nvSpPr>
-        <p:spPr>
-          <a:xfrm>
-            <a:off x="6255867" y="1261872"/>
-            <a:ext cx="5478627" cy="5093208"/>
-          </a:xfrm>
-          <a:prstGeom prst="roundRect">
-            <a:avLst>
-              <a:gd name="adj" fmla="val 12000"/>
-            </a:avLst>
-          </a:prstGeom>
-          <a:solidFill>
-            <a:srgbClr val="E8F4FA"/>
-          </a:solidFill>
-          <a:ln>
-            <a:noFill/>
-          </a:ln>
-        </p:spPr>
-        <p:style>
-          <a:lnRef idx="1">
-            <a:schemeClr val="accent1"/>
-          </a:lnRef>
-          <a:fillRef idx="3">
-            <a:schemeClr val="accent1"/>
-          </a:fillRef>
-          <a:effectRef idx="2">
-            <a:schemeClr val="accent1"/>
-          </a:effectRef>
-          <a:fontRef idx="minor">
-            <a:schemeClr val="lt1"/>
-          </a:fontRef>
-        </p:style>
-        <p:txBody>
-          <a:bodyPr rtlCol="0" anchor="ctr"/>
-          <a:lstStyle/>
-          <a:p>
-            <a:pPr algn="ctr"/>
-          </a:p>
-        </p:txBody>
-      </p:sp>
-      <p:sp>
-        <p:nvSpPr>
-          <p:cNvPr id="10" name="Rectangle 9"/>
-          <p:cNvSpPr/>
-          <p:nvPr/>
-        </p:nvSpPr>
-        <p:spPr>
-          <a:xfrm>
-            <a:off x="6255867" y="1261872"/>
-            <a:ext cx="5478627" cy="502920"/>
-          </a:xfrm>
-          <a:prstGeom prst="rect">
-            <a:avLst/>
-          </a:prstGeom>
-          <a:solidFill>
-            <a:srgbClr val="095292"/>
-          </a:solidFill>
-          <a:ln>
-            <a:noFill/>
-          </a:ln>
-        </p:spPr>
-        <p:style>
-          <a:lnRef idx="1">
-            <a:schemeClr val="accent1"/>
-          </a:lnRef>
-          <a:fillRef idx="3">
-            <a:schemeClr val="accent1"/>
-          </a:fillRef>
-          <a:effectRef idx="2">
-            <a:schemeClr val="accent1"/>
-          </a:effectRef>
-          <a:fontRef idx="minor">
-            <a:schemeClr val="lt1"/>
-          </a:fontRef>
-        </p:style>
-        <p:txBody>
-          <a:bodyPr rtlCol="0" anchor="ctr"/>
-          <a:lstStyle/>
-          <a:p>
-            <a:pPr algn="ctr"/>
-          </a:p>
-        </p:txBody>
-      </p:sp>
-      <p:sp>
-        <p:nvSpPr>
-          <p:cNvPr id="11" name="TextBox 10"/>
-          <p:cNvSpPr txBox="1"/>
-          <p:nvPr/>
-        </p:nvSpPr>
-        <p:spPr>
-          <a:xfrm>
-            <a:off x="6393027" y="1353312"/>
-            <a:ext cx="5204307" cy="365760"/>
-          </a:xfrm>
-          <a:prstGeom prst="rect">
-            <a:avLst/>
-          </a:prstGeom>
-          <a:noFill/>
-        </p:spPr>
-        <p:txBody>
-          <a:bodyPr wrap="square" anchor="ctr"/>
-          <a:lstStyle/>
-          <a:p>
-            <a:pPr algn="ctr"/>
-            <a:r>
-              <a:rPr sz="1600" b="1" i="0">
-                <a:solidFill>
-                  <a:srgbClr val="FFFFFF"/>
-                </a:solidFill>
-                <a:latin typeface="Calibri"/>
-              </a:rPr>
-              <a:t>Enunciado medible</a:t>
-            </a:r>
-          </a:p>
-        </p:txBody>
-      </p:sp>
-      <p:sp>
-        <p:nvSpPr>
-          <p:cNvPr id="12" name="TextBox 11"/>
-          <p:cNvSpPr txBox="1"/>
-          <p:nvPr/>
-        </p:nvSpPr>
-        <p:spPr>
-          <a:xfrm>
-            <a:off x="6420459" y="1901952"/>
-            <a:ext cx="5158587" cy="4498848"/>
-          </a:xfrm>
-          <a:prstGeom prst="rect">
-            <a:avLst/>
-          </a:prstGeom>
-          <a:noFill/>
-        </p:spPr>
-        <p:txBody>
-          <a:bodyPr wrap="square">
-            <a:spAutoFit/>
-          </a:bodyPr>
-          <a:lstStyle/>
-          <a:p>
-            <a:pPr>
-              <a:spcAft>
-                <a:spcPts val="800"/>
-              </a:spcAft>
-            </a:pPr>
-            <a:r>
-              <a:rPr sz="1500" b="0" i="0">
-                <a:solidFill>
-                  <a:srgbClr val="333333"/>
-                </a:solidFill>
-                <a:latin typeface="Calibri"/>
-              </a:rPr>
-              <a:t>–   </a:t>
-            </a:r>
-            <a:r>
-              <a:rPr sz="1500" b="1" i="0">
-                <a:solidFill>
-                  <a:srgbClr val="333333"/>
-                </a:solidFill>
-                <a:latin typeface="Calibri"/>
-              </a:rPr>
-              <a:t>p95 &lt; 300 ms</a:t>
-            </a:r>
-            <a:r>
-              <a:rPr sz="1500" b="0" i="0">
-                <a:solidFill>
-                  <a:srgbClr val="333333"/>
-                </a:solidFill>
-                <a:latin typeface="Calibri"/>
-              </a:rPr>
-              <a:t> en el endpoint de reserva</a:t>
-            </a:r>
-          </a:p>
-          <a:p>
-            <a:pPr>
-              <a:spcAft>
-                <a:spcPts val="800"/>
-              </a:spcAft>
-            </a:pPr>
-            <a:r>
-              <a:rPr sz="1500" b="0" i="0">
-                <a:solidFill>
-                  <a:srgbClr val="333333"/>
-                </a:solidFill>
-                <a:latin typeface="Calibri"/>
-              </a:rPr>
-              <a:t>–   Escenario: </a:t>
-            </a:r>
-            <a:r>
-              <a:rPr sz="1500" b="1" i="0">
-                <a:solidFill>
-                  <a:srgbClr val="333333"/>
-                </a:solidFill>
-                <a:latin typeface="Calibri"/>
-              </a:rPr>
-              <a:t>150 RPS</a:t>
-            </a:r>
-            <a:r>
-              <a:rPr sz="1500" b="0" i="0">
-                <a:solidFill>
-                  <a:srgbClr val="333333"/>
-                </a:solidFill>
-                <a:latin typeface="Calibri"/>
-              </a:rPr>
-              <a:t> en el pico de inicio de semestre</a:t>
-            </a:r>
-          </a:p>
-          <a:p>
-            <a:pPr>
-              <a:spcAft>
-                <a:spcPts val="800"/>
-              </a:spcAft>
-            </a:pPr>
-            <a:r>
-              <a:rPr sz="1500" b="0" i="0">
-                <a:solidFill>
-                  <a:srgbClr val="333333"/>
-                </a:solidFill>
-                <a:latin typeface="Calibri"/>
-              </a:rPr>
-              <a:t>–   Bottleneck sospechado: </a:t>
-            </a:r>
-            <a:r>
-              <a:rPr sz="1500" b="1" i="0">
-                <a:solidFill>
-                  <a:srgbClr val="333333"/>
-                </a:solidFill>
-                <a:latin typeface="Calibri"/>
-              </a:rPr>
-              <a:t>consulta a la BD</a:t>
-            </a:r>
-          </a:p>
-          <a:p>
-            <a:pPr>
-              <a:spcAft>
-                <a:spcPts val="800"/>
-              </a:spcAft>
-            </a:pPr>
-            <a:r>
-              <a:rPr sz="1500" b="0" i="0">
-                <a:solidFill>
-                  <a:srgbClr val="333333"/>
-                </a:solidFill>
-                <a:latin typeface="Calibri"/>
-              </a:rPr>
-              <a:t>–   Se puede verificar: pasa o no pasa</a:t>
-            </a:r>
-          </a:p>
-        </p:txBody>
-      </p:sp>
-      <p:sp>
-        <p:nvSpPr>
-          <p:cNvPr id="13" name="TextBox 12"/>
-          <p:cNvSpPr txBox="1"/>
-          <p:nvPr/>
-        </p:nvSpPr>
-        <p:spPr>
-          <a:xfrm>
-            <a:off x="11185855" y="6473952"/>
-            <a:ext cx="640080" cy="274320"/>
-          </a:xfrm>
-          <a:prstGeom prst="rect">
-            <a:avLst/>
-          </a:prstGeom>
-          <a:noFill/>
-        </p:spPr>
-        <p:txBody>
-          <a:bodyPr wrap="square">
-            <a:spAutoFit/>
-          </a:bodyPr>
-          <a:lstStyle/>
-          <a:p>
-            <a:pPr algn="r"/>
-            <a:r>
-              <a:rPr sz="1100" b="0" i="0">
-                <a:solidFill>
-                  <a:srgbClr val="666666"/>
-                </a:solidFill>
-                <a:latin typeface="Calibri"/>
-              </a:rPr>
-              <a:t>26</a:t>
-            </a:r>
-          </a:p>
-        </p:txBody>
-      </p:sp>
-    </p:spTree>
-  </p:cSld>
-  <p:clrMapOvr>
-    <a:masterClrMapping/>
-  </p:clrMapOvr>
-</p:sld>
-</file>
-
-<file path=ppt/slides/slide27.xml><?xml version="1.0" encoding="utf-8"?>
-<p:sld xmlns:a="http://schemas.openxmlformats.org/drawingml/2006/main" xmlns:p="http://schemas.openxmlformats.org/presentationml/2006/main" xmlns:r="http://schemas.openxmlformats.org/officeDocument/2006/relationships">
-  <p:cSld>
-    <p:bg>
-      <p:bgPr>
-        <a:solidFill>
-          <a:srgbClr val="FFFFFF"/>
-        </a:solidFill>
-        <a:effectLst/>
-      </p:bgPr>
-    </p:bg>
-    <p:spTree>
-      <p:nvGrpSpPr>
-        <p:cNvPr id="1" name=""/>
-        <p:cNvGrpSpPr/>
-        <p:nvPr/>
-      </p:nvGrpSpPr>
-      <p:grpSpPr/>
-      <p:sp>
-        <p:nvSpPr>
-          <p:cNvPr id="2" name="Rectangle 1"/>
-          <p:cNvSpPr/>
-          <p:nvPr/>
-        </p:nvSpPr>
-        <p:spPr>
-          <a:xfrm>
-            <a:off x="0" y="0"/>
-            <a:ext cx="12191695" cy="1170432"/>
-          </a:xfrm>
-          <a:prstGeom prst="rect">
-            <a:avLst/>
-          </a:prstGeom>
-          <a:solidFill>
-            <a:srgbClr val="095292"/>
-          </a:solidFill>
-          <a:ln>
-            <a:noFill/>
-          </a:ln>
-        </p:spPr>
-        <p:style>
-          <a:lnRef idx="1">
-            <a:schemeClr val="accent1"/>
-          </a:lnRef>
-          <a:fillRef idx="3">
-            <a:schemeClr val="accent1"/>
-          </a:fillRef>
-          <a:effectRef idx="2">
-            <a:schemeClr val="accent1"/>
-          </a:effectRef>
-          <a:fontRef idx="minor">
-            <a:schemeClr val="lt1"/>
-          </a:fontRef>
-        </p:style>
-        <p:txBody>
-          <a:bodyPr rtlCol="0" anchor="ctr"/>
-          <a:lstStyle/>
-          <a:p>
-            <a:pPr algn="ctr"/>
-          </a:p>
-        </p:txBody>
-      </p:sp>
-      <p:sp>
-        <p:nvSpPr>
-          <p:cNvPr id="3" name="Rectangle 2"/>
-          <p:cNvSpPr/>
-          <p:nvPr/>
-        </p:nvSpPr>
-        <p:spPr>
-          <a:xfrm>
-            <a:off x="0" y="1170432"/>
-            <a:ext cx="12191695" cy="41148"/>
-          </a:xfrm>
-          <a:prstGeom prst="rect">
-            <a:avLst/>
-          </a:prstGeom>
-          <a:solidFill>
-            <a:srgbClr val="FFD000"/>
-          </a:solidFill>
-          <a:ln>
-            <a:noFill/>
-          </a:ln>
-        </p:spPr>
-        <p:style>
-          <a:lnRef idx="1">
-            <a:schemeClr val="accent1"/>
-          </a:lnRef>
-          <a:fillRef idx="3">
-            <a:schemeClr val="accent1"/>
-          </a:fillRef>
-          <a:effectRef idx="2">
-            <a:schemeClr val="accent1"/>
-          </a:effectRef>
-          <a:fontRef idx="minor">
-            <a:schemeClr val="lt1"/>
-          </a:fontRef>
-        </p:style>
-        <p:txBody>
-          <a:bodyPr rtlCol="0" anchor="ctr"/>
-          <a:lstStyle/>
-          <a:p>
-            <a:pPr algn="ctr"/>
-          </a:p>
-        </p:txBody>
-      </p:sp>
-      <p:sp>
-        <p:nvSpPr>
-          <p:cNvPr id="4" name="TextBox 3"/>
-          <p:cNvSpPr txBox="1"/>
-          <p:nvPr/>
-        </p:nvSpPr>
-        <p:spPr>
-          <a:xfrm>
-            <a:off x="457200" y="164592"/>
-            <a:ext cx="11277295" cy="384048"/>
-          </a:xfrm>
-          <a:prstGeom prst="rect">
-            <a:avLst/>
-          </a:prstGeom>
-          <a:noFill/>
-        </p:spPr>
-        <p:txBody>
-          <a:bodyPr wrap="square">
-            <a:spAutoFit/>
-          </a:bodyPr>
-          <a:lstStyle/>
-          <a:p>
-            <a:r>
-              <a:rPr sz="2600" b="1" i="0">
-                <a:solidFill>
-                  <a:srgbClr val="FFFFFF"/>
-                </a:solidFill>
-                <a:latin typeface="Calibri"/>
-              </a:rPr>
-              <a:t>Herramientas de hoy</a:t>
-            </a:r>
-          </a:p>
-        </p:txBody>
-      </p:sp>
-      <p:sp>
-        <p:nvSpPr>
-          <p:cNvPr id="5" name="TextBox 4"/>
-          <p:cNvSpPr txBox="1"/>
-          <p:nvPr/>
-        </p:nvSpPr>
-        <p:spPr>
-          <a:xfrm>
-            <a:off x="457200" y="566928"/>
-            <a:ext cx="11277295" cy="411480"/>
-          </a:xfrm>
-          <a:prstGeom prst="rect">
-            <a:avLst/>
-          </a:prstGeom>
-          <a:noFill/>
-        </p:spPr>
-        <p:txBody>
-          <a:bodyPr wrap="square">
-            <a:spAutoFit/>
-          </a:bodyPr>
-          <a:lstStyle/>
-          <a:p>
-            <a:r>
-              <a:rPr sz="1400" b="0" i="0">
-                <a:solidFill>
-                  <a:srgbClr val="B8D8EE"/>
-                </a:solidFill>
-                <a:latin typeface="Calibri"/>
-              </a:rPr>
-              <a:t>Gratis · navegador o free tier · sin cuenta de pago</a:t>
-            </a:r>
-          </a:p>
-        </p:txBody>
-      </p:sp>
-      <p:sp>
-        <p:nvSpPr>
-          <p:cNvPr id="6" name="Rounded Rectangle 5"/>
-          <p:cNvSpPr/>
-          <p:nvPr/>
-        </p:nvSpPr>
-        <p:spPr>
-          <a:xfrm>
-            <a:off x="457200" y="1591056"/>
-            <a:ext cx="3624986" cy="2299716"/>
-          </a:xfrm>
-          <a:prstGeom prst="roundRect">
-            <a:avLst>
-              <a:gd name="adj" fmla="val 12000"/>
-            </a:avLst>
-          </a:prstGeom>
-          <a:solidFill>
-            <a:srgbClr val="F2F2F2"/>
-          </a:solidFill>
-          <a:ln>
-            <a:noFill/>
-          </a:ln>
-        </p:spPr>
-        <p:style>
-          <a:lnRef idx="1">
-            <a:schemeClr val="accent1"/>
-          </a:lnRef>
-          <a:fillRef idx="3">
-            <a:schemeClr val="accent1"/>
-          </a:fillRef>
-          <a:effectRef idx="2">
-            <a:schemeClr val="accent1"/>
-          </a:effectRef>
-          <a:fontRef idx="minor">
-            <a:schemeClr val="lt1"/>
-          </a:fontRef>
-        </p:style>
-        <p:txBody>
-          <a:bodyPr rtlCol="0" anchor="ctr"/>
-          <a:lstStyle/>
-          <a:p>
-            <a:pPr algn="ctr"/>
-          </a:p>
-        </p:txBody>
-      </p:sp>
-      <p:sp>
-        <p:nvSpPr>
-          <p:cNvPr id="7" name="Rectangle 6"/>
-          <p:cNvSpPr/>
-          <p:nvPr/>
-        </p:nvSpPr>
-        <p:spPr>
-          <a:xfrm>
-            <a:off x="457200" y="1591056"/>
-            <a:ext cx="3624986" cy="64008"/>
-          </a:xfrm>
-          <a:prstGeom prst="rect">
-            <a:avLst/>
-          </a:prstGeom>
-          <a:solidFill>
-            <a:srgbClr val="095292"/>
-          </a:solidFill>
-          <a:ln>
-            <a:noFill/>
-          </a:ln>
-        </p:spPr>
-        <p:style>
-          <a:lnRef idx="1">
-            <a:schemeClr val="accent1"/>
-          </a:lnRef>
-          <a:fillRef idx="3">
-            <a:schemeClr val="accent1"/>
-          </a:fillRef>
-          <a:effectRef idx="2">
-            <a:schemeClr val="accent1"/>
-          </a:effectRef>
-          <a:fontRef idx="minor">
-            <a:schemeClr val="lt1"/>
-          </a:fontRef>
-        </p:style>
-        <p:txBody>
-          <a:bodyPr rtlCol="0" anchor="ctr"/>
-          <a:lstStyle/>
-          <a:p>
-            <a:pPr algn="ctr"/>
-          </a:p>
-        </p:txBody>
-      </p:sp>
-      <p:sp>
-        <p:nvSpPr>
-          <p:cNvPr id="8" name="Rectangle 7"/>
-          <p:cNvSpPr/>
-          <p:nvPr/>
-        </p:nvSpPr>
-        <p:spPr>
-          <a:xfrm>
-            <a:off x="457200" y="1655064"/>
-            <a:ext cx="3624986" cy="27432"/>
-          </a:xfrm>
-          <a:prstGeom prst="rect">
-            <a:avLst/>
-          </a:prstGeom>
-          <a:solidFill>
-            <a:srgbClr val="FFD000"/>
-          </a:solidFill>
-          <a:ln>
-            <a:noFill/>
-          </a:ln>
-        </p:spPr>
-        <p:style>
-          <a:lnRef idx="1">
-            <a:schemeClr val="accent1"/>
-          </a:lnRef>
-          <a:fillRef idx="3">
-            <a:schemeClr val="accent1"/>
-          </a:fillRef>
-          <a:effectRef idx="2">
-            <a:schemeClr val="accent1"/>
-          </a:effectRef>
-          <a:fontRef idx="minor">
-            <a:schemeClr val="lt1"/>
-          </a:fontRef>
-        </p:style>
-        <p:txBody>
-          <a:bodyPr rtlCol="0" anchor="ctr"/>
-          <a:lstStyle/>
-          <a:p>
-            <a:pPr algn="ctr"/>
-          </a:p>
-        </p:txBody>
-      </p:sp>
       <p:pic>
         <p:nvPicPr>
-          <p:cNvPr id="9" name="Picture 8" descr="google_docs.png"/>
+          <p:cNvPr id="3" name="Picture 2" descr="logo_uniajc_color.png"/>
           <p:cNvPicPr>
             <a:picLocks noChangeAspect="1"/>
           </p:cNvPicPr>
@@ -9538,8 +9961,8 @@
         </p:blipFill>
         <p:spPr>
           <a:xfrm>
-            <a:off x="1659331" y="1847087"/>
-            <a:ext cx="1220724" cy="1220724"/>
+            <a:off x="10271455" y="5998464"/>
+            <a:ext cx="1463040" cy="643233"/>
           </a:xfrm>
           <a:prstGeom prst="rect">
             <a:avLst/>
@@ -9548,14 +9971,14 @@
       </p:pic>
       <p:sp>
         <p:nvSpPr>
-          <p:cNvPr id="10" name="TextBox 9"/>
+          <p:cNvPr id="4" name="TextBox 3"/>
           <p:cNvSpPr txBox="1"/>
           <p:nvPr/>
         </p:nvSpPr>
         <p:spPr>
           <a:xfrm>
-            <a:off x="530352" y="3159251"/>
-            <a:ext cx="3478682" cy="621792"/>
+            <a:off x="457200" y="1737360"/>
+            <a:ext cx="11277295" cy="1097280"/>
           </a:xfrm>
           <a:prstGeom prst="rect">
             <a:avLst/>
@@ -9563,660 +9986,32 @@
           <a:noFill/>
         </p:spPr>
         <p:txBody>
-          <a:bodyPr wrap="square" anchor="t"/>
+          <a:bodyPr wrap="square" anchor="ctr"/>
           <a:lstStyle/>
           <a:p>
             <a:pPr algn="ctr"/>
             <a:r>
-              <a:rPr sz="1300" b="1" i="0">
+              <a:rPr sz="3400" b="1" i="0">
                 <a:solidFill>
                   <a:srgbClr val="095292"/>
                 </a:solidFill>
                 <a:latin typeface="Calibri"/>
               </a:rPr>
-              <a:t>Google Docs</a:t>
-            </a:r>
-          </a:p>
-          <a:p>
-            <a:pPr algn="ctr">
-              <a:spcBef>
-                <a:spcPts val="200"/>
-              </a:spcBef>
-            </a:pPr>
-            <a:r>
-              <a:rPr sz="1000" b="0" i="0">
-                <a:solidFill>
-                  <a:srgbClr val="666666"/>
-                </a:solidFill>
-                <a:latin typeface="Calibri"/>
-              </a:rPr>
-              <a:t>Objetivo de rendimiento</a:t>
-            </a:r>
-          </a:p>
-        </p:txBody>
-      </p:sp>
-      <p:sp>
-        <p:nvSpPr>
-          <p:cNvPr id="11" name="Rounded Rectangle 10"/>
-          <p:cNvSpPr/>
-          <p:nvPr/>
-        </p:nvSpPr>
-        <p:spPr>
-          <a:xfrm>
-            <a:off x="4283354" y="1591056"/>
-            <a:ext cx="3624986" cy="2299716"/>
-          </a:xfrm>
-          <a:prstGeom prst="roundRect">
-            <a:avLst>
-              <a:gd name="adj" fmla="val 12000"/>
-            </a:avLst>
-          </a:prstGeom>
-          <a:solidFill>
-            <a:srgbClr val="F2F2F2"/>
-          </a:solidFill>
-          <a:ln>
-            <a:noFill/>
-          </a:ln>
-        </p:spPr>
-        <p:style>
-          <a:lnRef idx="1">
-            <a:schemeClr val="accent1"/>
-          </a:lnRef>
-          <a:fillRef idx="3">
-            <a:schemeClr val="accent1"/>
-          </a:fillRef>
-          <a:effectRef idx="2">
-            <a:schemeClr val="accent1"/>
-          </a:effectRef>
-          <a:fontRef idx="minor">
-            <a:schemeClr val="lt1"/>
-          </a:fontRef>
-        </p:style>
-        <p:txBody>
-          <a:bodyPr rtlCol="0" anchor="ctr"/>
-          <a:lstStyle/>
-          <a:p>
-            <a:pPr algn="ctr"/>
-          </a:p>
-        </p:txBody>
-      </p:sp>
-      <p:sp>
-        <p:nvSpPr>
-          <p:cNvPr id="12" name="Rectangle 11"/>
-          <p:cNvSpPr/>
-          <p:nvPr/>
-        </p:nvSpPr>
-        <p:spPr>
-          <a:xfrm>
-            <a:off x="4283354" y="1591056"/>
-            <a:ext cx="3624986" cy="64008"/>
-          </a:xfrm>
-          <a:prstGeom prst="rect">
-            <a:avLst/>
-          </a:prstGeom>
-          <a:solidFill>
-            <a:srgbClr val="095292"/>
-          </a:solidFill>
-          <a:ln>
-            <a:noFill/>
-          </a:ln>
-        </p:spPr>
-        <p:style>
-          <a:lnRef idx="1">
-            <a:schemeClr val="accent1"/>
-          </a:lnRef>
-          <a:fillRef idx="3">
-            <a:schemeClr val="accent1"/>
-          </a:fillRef>
-          <a:effectRef idx="2">
-            <a:schemeClr val="accent1"/>
-          </a:effectRef>
-          <a:fontRef idx="minor">
-            <a:schemeClr val="lt1"/>
-          </a:fontRef>
-        </p:style>
-        <p:txBody>
-          <a:bodyPr rtlCol="0" anchor="ctr"/>
-          <a:lstStyle/>
-          <a:p>
-            <a:pPr algn="ctr"/>
-          </a:p>
-        </p:txBody>
-      </p:sp>
-      <p:sp>
-        <p:nvSpPr>
-          <p:cNvPr id="13" name="Rectangle 12"/>
-          <p:cNvSpPr/>
-          <p:nvPr/>
-        </p:nvSpPr>
-        <p:spPr>
-          <a:xfrm>
-            <a:off x="4283354" y="1655064"/>
-            <a:ext cx="3624986" cy="27432"/>
-          </a:xfrm>
-          <a:prstGeom prst="rect">
-            <a:avLst/>
-          </a:prstGeom>
-          <a:solidFill>
-            <a:srgbClr val="FFD000"/>
-          </a:solidFill>
-          <a:ln>
-            <a:noFill/>
-          </a:ln>
-        </p:spPr>
-        <p:style>
-          <a:lnRef idx="1">
-            <a:schemeClr val="accent1"/>
-          </a:lnRef>
-          <a:fillRef idx="3">
-            <a:schemeClr val="accent1"/>
-          </a:fillRef>
-          <a:effectRef idx="2">
-            <a:schemeClr val="accent1"/>
-          </a:effectRef>
-          <a:fontRef idx="minor">
-            <a:schemeClr val="lt1"/>
-          </a:fontRef>
-        </p:style>
-        <p:txBody>
-          <a:bodyPr rtlCol="0" anchor="ctr"/>
-          <a:lstStyle/>
-          <a:p>
-            <a:pPr algn="ctr"/>
-          </a:p>
-        </p:txBody>
-      </p:sp>
-      <p:pic>
-        <p:nvPicPr>
-          <p:cNvPr id="14" name="Picture 13" descr="drawio.png"/>
-          <p:cNvPicPr>
-            <a:picLocks noChangeAspect="1"/>
-          </p:cNvPicPr>
-          <p:nvPr/>
-        </p:nvPicPr>
-        <p:blipFill>
-          <a:blip r:embed="rId3"/>
-          <a:stretch>
-            <a:fillRect/>
-          </a:stretch>
-        </p:blipFill>
-        <p:spPr>
-          <a:xfrm>
-            <a:off x="5485485" y="1847087"/>
-            <a:ext cx="1220724" cy="1220724"/>
-          </a:xfrm>
-          <a:prstGeom prst="rect">
-            <a:avLst/>
-          </a:prstGeom>
-        </p:spPr>
-      </p:pic>
-      <p:sp>
-        <p:nvSpPr>
-          <p:cNvPr id="15" name="TextBox 14"/>
+              <a:t>Clase 12 · cierre conceptual</a:t>
+            </a:r>
+          </a:p>
+        </p:txBody>
+      </p:sp>
+      <p:sp>
+        <p:nvSpPr>
+          <p:cNvPr id="5" name="TextBox 4"/>
           <p:cNvSpPr txBox="1"/>
           <p:nvPr/>
         </p:nvSpPr>
         <p:spPr>
           <a:xfrm>
-            <a:off x="4356506" y="3159251"/>
-            <a:ext cx="3478682" cy="621792"/>
-          </a:xfrm>
-          <a:prstGeom prst="rect">
-            <a:avLst/>
-          </a:prstGeom>
-          <a:noFill/>
-        </p:spPr>
-        <p:txBody>
-          <a:bodyPr wrap="square" anchor="t"/>
-          <a:lstStyle/>
-          <a:p>
-            <a:pPr algn="ctr"/>
-            <a:r>
-              <a:rPr sz="1300" b="1" i="0">
-                <a:solidFill>
-                  <a:srgbClr val="095292"/>
-                </a:solidFill>
-                <a:latin typeface="Calibri"/>
-              </a:rPr>
-              <a:t>draw.io</a:t>
-            </a:r>
-          </a:p>
-          <a:p>
-            <a:pPr algn="ctr">
-              <a:spcBef>
-                <a:spcPts val="200"/>
-              </a:spcBef>
-            </a:pPr>
-            <a:r>
-              <a:rPr sz="1000" b="0" i="0">
-                <a:solidFill>
-                  <a:srgbClr val="666666"/>
-                </a:solidFill>
-                <a:latin typeface="Calibri"/>
-              </a:rPr>
-              <a:t>Bottleneck</a:t>
-            </a:r>
-          </a:p>
-        </p:txBody>
-      </p:sp>
-      <p:sp>
-        <p:nvSpPr>
-          <p:cNvPr id="16" name="Rounded Rectangle 15"/>
-          <p:cNvSpPr/>
-          <p:nvPr/>
-        </p:nvSpPr>
-        <p:spPr>
-          <a:xfrm>
-            <a:off x="8109508" y="1591056"/>
-            <a:ext cx="3624986" cy="2299716"/>
-          </a:xfrm>
-          <a:prstGeom prst="roundRect">
-            <a:avLst>
-              <a:gd name="adj" fmla="val 12000"/>
-            </a:avLst>
-          </a:prstGeom>
-          <a:solidFill>
-            <a:srgbClr val="F2F2F2"/>
-          </a:solidFill>
-          <a:ln>
-            <a:noFill/>
-          </a:ln>
-        </p:spPr>
-        <p:style>
-          <a:lnRef idx="1">
-            <a:schemeClr val="accent1"/>
-          </a:lnRef>
-          <a:fillRef idx="3">
-            <a:schemeClr val="accent1"/>
-          </a:fillRef>
-          <a:effectRef idx="2">
-            <a:schemeClr val="accent1"/>
-          </a:effectRef>
-          <a:fontRef idx="minor">
-            <a:schemeClr val="lt1"/>
-          </a:fontRef>
-        </p:style>
-        <p:txBody>
-          <a:bodyPr rtlCol="0" anchor="ctr"/>
-          <a:lstStyle/>
-          <a:p>
-            <a:pPr algn="ctr"/>
-          </a:p>
-        </p:txBody>
-      </p:sp>
-      <p:sp>
-        <p:nvSpPr>
-          <p:cNvPr id="17" name="Rectangle 16"/>
-          <p:cNvSpPr/>
-          <p:nvPr/>
-        </p:nvSpPr>
-        <p:spPr>
-          <a:xfrm>
-            <a:off x="8109508" y="1591056"/>
-            <a:ext cx="3624986" cy="64008"/>
-          </a:xfrm>
-          <a:prstGeom prst="rect">
-            <a:avLst/>
-          </a:prstGeom>
-          <a:solidFill>
-            <a:srgbClr val="095292"/>
-          </a:solidFill>
-          <a:ln>
-            <a:noFill/>
-          </a:ln>
-        </p:spPr>
-        <p:style>
-          <a:lnRef idx="1">
-            <a:schemeClr val="accent1"/>
-          </a:lnRef>
-          <a:fillRef idx="3">
-            <a:schemeClr val="accent1"/>
-          </a:fillRef>
-          <a:effectRef idx="2">
-            <a:schemeClr val="accent1"/>
-          </a:effectRef>
-          <a:fontRef idx="minor">
-            <a:schemeClr val="lt1"/>
-          </a:fontRef>
-        </p:style>
-        <p:txBody>
-          <a:bodyPr rtlCol="0" anchor="ctr"/>
-          <a:lstStyle/>
-          <a:p>
-            <a:pPr algn="ctr"/>
-          </a:p>
-        </p:txBody>
-      </p:sp>
-      <p:sp>
-        <p:nvSpPr>
-          <p:cNvPr id="18" name="Rectangle 17"/>
-          <p:cNvSpPr/>
-          <p:nvPr/>
-        </p:nvSpPr>
-        <p:spPr>
-          <a:xfrm>
-            <a:off x="8109508" y="1655064"/>
-            <a:ext cx="3624986" cy="27432"/>
-          </a:xfrm>
-          <a:prstGeom prst="rect">
-            <a:avLst/>
-          </a:prstGeom>
-          <a:solidFill>
-            <a:srgbClr val="FFD000"/>
-          </a:solidFill>
-          <a:ln>
-            <a:noFill/>
-          </a:ln>
-        </p:spPr>
-        <p:style>
-          <a:lnRef idx="1">
-            <a:schemeClr val="accent1"/>
-          </a:lnRef>
-          <a:fillRef idx="3">
-            <a:schemeClr val="accent1"/>
-          </a:fillRef>
-          <a:effectRef idx="2">
-            <a:schemeClr val="accent1"/>
-          </a:effectRef>
-          <a:fontRef idx="minor">
-            <a:schemeClr val="lt1"/>
-          </a:fontRef>
-        </p:style>
-        <p:txBody>
-          <a:bodyPr rtlCol="0" anchor="ctr"/>
-          <a:lstStyle/>
-          <a:p>
-            <a:pPr algn="ctr"/>
-          </a:p>
-        </p:txBody>
-      </p:sp>
-      <p:pic>
-        <p:nvPicPr>
-          <p:cNvPr id="19" name="Picture 18" descr="mermaid.png"/>
-          <p:cNvPicPr>
-            <a:picLocks noChangeAspect="1"/>
-          </p:cNvPicPr>
-          <p:nvPr/>
-        </p:nvPicPr>
-        <p:blipFill>
-          <a:blip r:embed="rId4"/>
-          <a:stretch>
-            <a:fillRect/>
-          </a:stretch>
-        </p:blipFill>
-        <p:spPr>
-          <a:xfrm>
-            <a:off x="9311640" y="1847087"/>
-            <a:ext cx="1220724" cy="1220724"/>
-          </a:xfrm>
-          <a:prstGeom prst="rect">
-            <a:avLst/>
-          </a:prstGeom>
-        </p:spPr>
-      </p:pic>
-      <p:sp>
-        <p:nvSpPr>
-          <p:cNvPr id="20" name="TextBox 19"/>
-          <p:cNvSpPr txBox="1"/>
-          <p:nvPr/>
-        </p:nvSpPr>
-        <p:spPr>
-          <a:xfrm>
-            <a:off x="8182660" y="3159251"/>
-            <a:ext cx="3478682" cy="621792"/>
-          </a:xfrm>
-          <a:prstGeom prst="rect">
-            <a:avLst/>
-          </a:prstGeom>
-          <a:noFill/>
-        </p:spPr>
-        <p:txBody>
-          <a:bodyPr wrap="square" anchor="t"/>
-          <a:lstStyle/>
-          <a:p>
-            <a:pPr algn="ctr"/>
-            <a:r>
-              <a:rPr sz="1300" b="1" i="0">
-                <a:solidFill>
-                  <a:srgbClr val="095292"/>
-                </a:solidFill>
-                <a:latin typeface="Calibri"/>
-              </a:rPr>
-              <a:t>Mermaid</a:t>
-            </a:r>
-          </a:p>
-          <a:p>
-            <a:pPr algn="ctr">
-              <a:spcBef>
-                <a:spcPts val="200"/>
-              </a:spcBef>
-            </a:pPr>
-            <a:r>
-              <a:rPr sz="1000" b="0" i="0">
-                <a:solidFill>
-                  <a:srgbClr val="666666"/>
-                </a:solidFill>
-                <a:latin typeface="Calibri"/>
-              </a:rPr>
-              <a:t>Codigo del diagrama</a:t>
-            </a:r>
-          </a:p>
-        </p:txBody>
-      </p:sp>
-      <p:sp>
-        <p:nvSpPr>
-          <p:cNvPr id="21" name="Rounded Rectangle 20"/>
-          <p:cNvSpPr/>
-          <p:nvPr/>
-        </p:nvSpPr>
-        <p:spPr>
-          <a:xfrm>
-            <a:off x="4283354" y="4055364"/>
-            <a:ext cx="3624986" cy="2299716"/>
-          </a:xfrm>
-          <a:prstGeom prst="roundRect">
-            <a:avLst>
-              <a:gd name="adj" fmla="val 12000"/>
-            </a:avLst>
-          </a:prstGeom>
-          <a:solidFill>
-            <a:srgbClr val="F2F2F2"/>
-          </a:solidFill>
-          <a:ln>
-            <a:noFill/>
-          </a:ln>
-        </p:spPr>
-        <p:style>
-          <a:lnRef idx="1">
-            <a:schemeClr val="accent1"/>
-          </a:lnRef>
-          <a:fillRef idx="3">
-            <a:schemeClr val="accent1"/>
-          </a:fillRef>
-          <a:effectRef idx="2">
-            <a:schemeClr val="accent1"/>
-          </a:effectRef>
-          <a:fontRef idx="minor">
-            <a:schemeClr val="lt1"/>
-          </a:fontRef>
-        </p:style>
-        <p:txBody>
-          <a:bodyPr rtlCol="0" anchor="ctr"/>
-          <a:lstStyle/>
-          <a:p>
-            <a:pPr algn="ctr"/>
-          </a:p>
-        </p:txBody>
-      </p:sp>
-      <p:sp>
-        <p:nvSpPr>
-          <p:cNvPr id="22" name="Rectangle 21"/>
-          <p:cNvSpPr/>
-          <p:nvPr/>
-        </p:nvSpPr>
-        <p:spPr>
-          <a:xfrm>
-            <a:off x="4283354" y="4055364"/>
-            <a:ext cx="3624986" cy="64008"/>
-          </a:xfrm>
-          <a:prstGeom prst="rect">
-            <a:avLst/>
-          </a:prstGeom>
-          <a:solidFill>
-            <a:srgbClr val="095292"/>
-          </a:solidFill>
-          <a:ln>
-            <a:noFill/>
-          </a:ln>
-        </p:spPr>
-        <p:style>
-          <a:lnRef idx="1">
-            <a:schemeClr val="accent1"/>
-          </a:lnRef>
-          <a:fillRef idx="3">
-            <a:schemeClr val="accent1"/>
-          </a:fillRef>
-          <a:effectRef idx="2">
-            <a:schemeClr val="accent1"/>
-          </a:effectRef>
-          <a:fontRef idx="minor">
-            <a:schemeClr val="lt1"/>
-          </a:fontRef>
-        </p:style>
-        <p:txBody>
-          <a:bodyPr rtlCol="0" anchor="ctr"/>
-          <a:lstStyle/>
-          <a:p>
-            <a:pPr algn="ctr"/>
-          </a:p>
-        </p:txBody>
-      </p:sp>
-      <p:sp>
-        <p:nvSpPr>
-          <p:cNvPr id="23" name="Rectangle 22"/>
-          <p:cNvSpPr/>
-          <p:nvPr/>
-        </p:nvSpPr>
-        <p:spPr>
-          <a:xfrm>
-            <a:off x="4283354" y="4119372"/>
-            <a:ext cx="3624986" cy="27432"/>
-          </a:xfrm>
-          <a:prstGeom prst="rect">
-            <a:avLst/>
-          </a:prstGeom>
-          <a:solidFill>
-            <a:srgbClr val="FFD000"/>
-          </a:solidFill>
-          <a:ln>
-            <a:noFill/>
-          </a:ln>
-        </p:spPr>
-        <p:style>
-          <a:lnRef idx="1">
-            <a:schemeClr val="accent1"/>
-          </a:lnRef>
-          <a:fillRef idx="3">
-            <a:schemeClr val="accent1"/>
-          </a:fillRef>
-          <a:effectRef idx="2">
-            <a:schemeClr val="accent1"/>
-          </a:effectRef>
-          <a:fontRef idx="minor">
-            <a:schemeClr val="lt1"/>
-          </a:fontRef>
-        </p:style>
-        <p:txBody>
-          <a:bodyPr rtlCol="0" anchor="ctr"/>
-          <a:lstStyle/>
-          <a:p>
-            <a:pPr algn="ctr"/>
-          </a:p>
-        </p:txBody>
-      </p:sp>
-      <p:pic>
-        <p:nvPicPr>
-          <p:cNvPr id="24" name="Picture 23" descr="examlab.png"/>
-          <p:cNvPicPr>
-            <a:picLocks noChangeAspect="1"/>
-          </p:cNvPicPr>
-          <p:nvPr/>
-        </p:nvPicPr>
-        <p:blipFill>
-          <a:blip r:embed="rId5"/>
-          <a:stretch>
-            <a:fillRect/>
-          </a:stretch>
-        </p:blipFill>
-        <p:spPr>
-          <a:xfrm>
-            <a:off x="5485485" y="4311396"/>
-            <a:ext cx="1220724" cy="1220724"/>
-          </a:xfrm>
-          <a:prstGeom prst="rect">
-            <a:avLst/>
-          </a:prstGeom>
-        </p:spPr>
-      </p:pic>
-      <p:sp>
-        <p:nvSpPr>
-          <p:cNvPr id="25" name="TextBox 24"/>
-          <p:cNvSpPr txBox="1"/>
-          <p:nvPr/>
-        </p:nvSpPr>
-        <p:spPr>
-          <a:xfrm>
-            <a:off x="4356506" y="5623560"/>
-            <a:ext cx="3478682" cy="621792"/>
-          </a:xfrm>
-          <a:prstGeom prst="rect">
-            <a:avLst/>
-          </a:prstGeom>
-          <a:noFill/>
-        </p:spPr>
-        <p:txBody>
-          <a:bodyPr wrap="square" anchor="t"/>
-          <a:lstStyle/>
-          <a:p>
-            <a:pPr algn="ctr"/>
-            <a:r>
-              <a:rPr sz="1300" b="1" i="0">
-                <a:solidFill>
-                  <a:srgbClr val="095292"/>
-                </a:solidFill>
-                <a:latin typeface="Calibri"/>
-              </a:rPr>
-              <a:t>la plataforma del curso</a:t>
-            </a:r>
-          </a:p>
-          <a:p>
-            <a:pPr algn="ctr">
-              <a:spcBef>
-                <a:spcPts val="200"/>
-              </a:spcBef>
-            </a:pPr>
-            <a:r>
-              <a:rPr sz="1000" b="0" i="0">
-                <a:solidFill>
-                  <a:srgbClr val="666666"/>
-                </a:solidFill>
-                <a:latin typeface="Calibri"/>
-              </a:rPr>
-              <a:t>Donde se entrega</a:t>
-            </a:r>
-          </a:p>
-        </p:txBody>
-      </p:sp>
-      <p:sp>
-        <p:nvSpPr>
-          <p:cNvPr id="26" name="TextBox 25"/>
-          <p:cNvSpPr txBox="1"/>
-          <p:nvPr/>
-        </p:nvSpPr>
-        <p:spPr>
-          <a:xfrm>
-            <a:off x="11185855" y="6473952"/>
-            <a:ext cx="640080" cy="274320"/>
+            <a:off x="457200" y="3017520"/>
+            <a:ext cx="11277295" cy="1645920"/>
           </a:xfrm>
           <a:prstGeom prst="rect">
             <a:avLst/>
@@ -10229,141 +10024,65 @@
           </a:bodyPr>
           <a:lstStyle/>
           <a:p>
-            <a:pPr algn="r"/>
-            <a:r>
-              <a:rPr sz="1100" b="0" i="0">
-                <a:solidFill>
-                  <a:srgbClr val="666666"/>
-                </a:solidFill>
-                <a:latin typeface="Calibri"/>
-              </a:rPr>
-              <a:t>27</a:t>
-            </a:r>
-          </a:p>
-        </p:txBody>
-      </p:sp>
-    </p:spTree>
-  </p:cSld>
-  <p:clrMapOvr>
-    <a:masterClrMapping/>
-  </p:clrMapOvr>
-</p:sld>
-</file>
-
-<file path=ppt/slides/slide28.xml><?xml version="1.0" encoding="utf-8"?>
-<p:sld xmlns:a="http://schemas.openxmlformats.org/drawingml/2006/main" xmlns:p="http://schemas.openxmlformats.org/presentationml/2006/main" xmlns:r="http://schemas.openxmlformats.org/officeDocument/2006/relationships">
-  <p:cSld>
-    <p:bg>
-      <p:bgPr>
-        <a:solidFill>
-          <a:srgbClr val="FFFFFF"/>
-        </a:solidFill>
-        <a:effectLst/>
-      </p:bgPr>
-    </p:bg>
-    <p:spTree>
-      <p:nvGrpSpPr>
-        <p:cNvPr id="1" name=""/>
-        <p:cNvGrpSpPr/>
-        <p:nvPr/>
-      </p:nvGrpSpPr>
-      <p:grpSpPr/>
-      <p:sp>
-        <p:nvSpPr>
-          <p:cNvPr id="2" name="Rectangle 1"/>
-          <p:cNvSpPr/>
-          <p:nvPr/>
-        </p:nvSpPr>
-        <p:spPr>
-          <a:xfrm>
-            <a:off x="0" y="0"/>
-            <a:ext cx="12191695" cy="1170432"/>
-          </a:xfrm>
-          <a:prstGeom prst="rect">
-            <a:avLst/>
-          </a:prstGeom>
-          <a:solidFill>
-            <a:srgbClr val="095292"/>
-          </a:solidFill>
-          <a:ln>
-            <a:noFill/>
-          </a:ln>
-        </p:spPr>
-        <p:style>
-          <a:lnRef idx="1">
-            <a:schemeClr val="accent1"/>
-          </a:lnRef>
-          <a:fillRef idx="3">
-            <a:schemeClr val="accent1"/>
-          </a:fillRef>
-          <a:effectRef idx="2">
-            <a:schemeClr val="accent1"/>
-          </a:effectRef>
-          <a:fontRef idx="minor">
-            <a:schemeClr val="lt1"/>
-          </a:fontRef>
-        </p:style>
-        <p:txBody>
-          <a:bodyPr rtlCol="0" anchor="ctr"/>
-          <a:lstStyle/>
-          <a:p>
-            <a:pPr algn="ctr"/>
-          </a:p>
-        </p:txBody>
-      </p:sp>
-      <p:sp>
-        <p:nvSpPr>
-          <p:cNvPr id="3" name="Rectangle 2"/>
-          <p:cNvSpPr/>
-          <p:nvPr/>
-        </p:nvSpPr>
-        <p:spPr>
-          <a:xfrm>
-            <a:off x="0" y="1170432"/>
-            <a:ext cx="12191695" cy="41148"/>
-          </a:xfrm>
-          <a:prstGeom prst="rect">
-            <a:avLst/>
-          </a:prstGeom>
-          <a:solidFill>
-            <a:srgbClr val="FFD000"/>
-          </a:solidFill>
-          <a:ln>
-            <a:noFill/>
-          </a:ln>
-        </p:spPr>
-        <p:style>
-          <a:lnRef idx="1">
-            <a:schemeClr val="accent1"/>
-          </a:lnRef>
-          <a:fillRef idx="3">
-            <a:schemeClr val="accent1"/>
-          </a:fillRef>
-          <a:effectRef idx="2">
-            <a:schemeClr val="accent1"/>
-          </a:effectRef>
-          <a:fontRef idx="minor">
-            <a:schemeClr val="lt1"/>
-          </a:fontRef>
-        </p:style>
-        <p:txBody>
-          <a:bodyPr rtlCol="0" anchor="ctr"/>
-          <a:lstStyle/>
-          <a:p>
-            <a:pPr algn="ctr"/>
-          </a:p>
-        </p:txBody>
-      </p:sp>
-      <p:sp>
-        <p:nvSpPr>
-          <p:cNvPr id="4" name="TextBox 3"/>
+            <a:pPr algn="ctr">
+              <a:spcAft>
+                <a:spcPts val="600"/>
+              </a:spcAft>
+            </a:pPr>
+            <a:r>
+              <a:rPr sz="1600" b="0" i="0">
+                <a:solidFill>
+                  <a:srgbClr val="333333"/>
+                </a:solidFill>
+                <a:latin typeface="Calibri"/>
+              </a:rPr>
+              <a:t>Definir métricas/objetivos de rendimiento realistas para CloudLite.</a:t>
+            </a:r>
+          </a:p>
+          <a:p>
+            <a:pPr algn="ctr">
+              <a:spcAft>
+                <a:spcPts val="600"/>
+              </a:spcAft>
+            </a:pPr>
+            <a:r>
+              <a:rPr sz="1600" b="0" i="0">
+                <a:solidFill>
+                  <a:srgbClr val="333333"/>
+                </a:solidFill>
+                <a:latin typeface="Calibri"/>
+              </a:rPr>
+              <a:t>Diseñar un escenario de prueba (aunque sea cualitativo/simulado).</a:t>
+            </a:r>
+          </a:p>
+          <a:p>
+            <a:pPr algn="ctr">
+              <a:spcAft>
+                <a:spcPts val="600"/>
+              </a:spcAft>
+            </a:pPr>
+            <a:r>
+              <a:rPr sz="1600" b="0" i="0">
+                <a:solidFill>
+                  <a:srgbClr val="333333"/>
+                </a:solidFill>
+                <a:latin typeface="Calibri"/>
+              </a:rPr>
+              <a:t>Ensayar el pitch de sustentación (prep PI; Parcial 3 es otro día).</a:t>
+            </a:r>
+          </a:p>
+        </p:txBody>
+      </p:sp>
+      <p:sp>
+        <p:nvSpPr>
+          <p:cNvPr id="6" name="TextBox 5"/>
           <p:cNvSpPr txBox="1"/>
           <p:nvPr/>
         </p:nvSpPr>
         <p:spPr>
           <a:xfrm>
-            <a:off x="457200" y="164592"/>
-            <a:ext cx="11277295" cy="384048"/>
+            <a:off x="457200" y="4754880"/>
+            <a:ext cx="11277295" cy="640080"/>
           </a:xfrm>
           <a:prstGeom prst="rect">
             <a:avLst/>
@@ -10376,1080 +10095,15 @@
           </a:bodyPr>
           <a:lstStyle/>
           <a:p>
-            <a:r>
-              <a:rPr sz="2600" b="1" i="0">
-                <a:solidFill>
-                  <a:srgbClr val="FFFFFF"/>
-                </a:solidFill>
-                <a:latin typeface="Calibri"/>
-              </a:rPr>
-              <a:t>Del boceto a la plataforma del curso (diagrama)</a:t>
-            </a:r>
-          </a:p>
-        </p:txBody>
-      </p:sp>
-      <p:sp>
-        <p:nvSpPr>
-          <p:cNvPr id="5" name="TextBox 4"/>
-          <p:cNvSpPr txBox="1"/>
-          <p:nvPr/>
-        </p:nvSpPr>
-        <p:spPr>
-          <a:xfrm>
-            <a:off x="457200" y="566928"/>
-            <a:ext cx="11277295" cy="411480"/>
-          </a:xfrm>
-          <a:prstGeom prst="rect">
-            <a:avLst/>
-          </a:prstGeom>
-          <a:noFill/>
-        </p:spPr>
-        <p:txBody>
-          <a:bodyPr wrap="square">
-            <a:spAutoFit/>
-          </a:bodyPr>
-          <a:lstStyle/>
-          <a:p>
-            <a:r>
-              <a:rPr sz="1400" b="0" i="0">
-                <a:solidFill>
-                  <a:srgbClr val="B8D8EE"/>
-                </a:solidFill>
-                <a:latin typeface="Calibri"/>
-              </a:rPr>
-              <a:t>El diagrama se entrega como código Mermaid en la plataforma del curso, no como imagen</a:t>
-            </a:r>
-          </a:p>
-        </p:txBody>
-      </p:sp>
-      <p:sp>
-        <p:nvSpPr>
-          <p:cNvPr id="6" name="Rounded Rectangle 5"/>
-          <p:cNvSpPr/>
-          <p:nvPr/>
-        </p:nvSpPr>
-        <p:spPr>
-          <a:xfrm>
-            <a:off x="457200" y="1659636"/>
-            <a:ext cx="11277295" cy="1051560"/>
-          </a:xfrm>
-          <a:prstGeom prst="roundRect">
-            <a:avLst>
-              <a:gd name="adj" fmla="val 12000"/>
-            </a:avLst>
-          </a:prstGeom>
-          <a:solidFill>
-            <a:srgbClr val="F2F2F2"/>
-          </a:solidFill>
-          <a:ln>
-            <a:noFill/>
-          </a:ln>
-        </p:spPr>
-        <p:style>
-          <a:lnRef idx="1">
-            <a:schemeClr val="accent1"/>
-          </a:lnRef>
-          <a:fillRef idx="3">
-            <a:schemeClr val="accent1"/>
-          </a:fillRef>
-          <a:effectRef idx="2">
-            <a:schemeClr val="accent1"/>
-          </a:effectRef>
-          <a:fontRef idx="minor">
-            <a:schemeClr val="lt1"/>
-          </a:fontRef>
-        </p:style>
-        <p:txBody>
-          <a:bodyPr rtlCol="0" anchor="ctr"/>
-          <a:lstStyle/>
-          <a:p>
             <a:pPr algn="ctr"/>
-          </a:p>
-        </p:txBody>
-      </p:sp>
-      <p:sp>
-        <p:nvSpPr>
-          <p:cNvPr id="7" name="Rounded Rectangle 6"/>
-          <p:cNvSpPr/>
-          <p:nvPr/>
-        </p:nvSpPr>
-        <p:spPr>
-          <a:xfrm>
-            <a:off x="594360" y="1965960"/>
-            <a:ext cx="438912" cy="438912"/>
-          </a:xfrm>
-          <a:prstGeom prst="roundRect">
-            <a:avLst>
-              <a:gd name="adj" fmla="val 12000"/>
-            </a:avLst>
-          </a:prstGeom>
-          <a:solidFill>
-            <a:srgbClr val="095292"/>
-          </a:solidFill>
-          <a:ln>
-            <a:noFill/>
-          </a:ln>
-        </p:spPr>
-        <p:style>
-          <a:lnRef idx="1">
-            <a:schemeClr val="accent1"/>
-          </a:lnRef>
-          <a:fillRef idx="3">
-            <a:schemeClr val="accent1"/>
-          </a:fillRef>
-          <a:effectRef idx="2">
-            <a:schemeClr val="accent1"/>
-          </a:effectRef>
-          <a:fontRef idx="minor">
-            <a:schemeClr val="lt1"/>
-          </a:fontRef>
-        </p:style>
-        <p:txBody>
-          <a:bodyPr rtlCol="0" anchor="ctr"/>
-          <a:lstStyle/>
-          <a:p>
-            <a:pPr algn="ctr"/>
-          </a:p>
-        </p:txBody>
-      </p:sp>
-      <p:sp>
-        <p:nvSpPr>
-          <p:cNvPr id="8" name="TextBox 7"/>
-          <p:cNvSpPr txBox="1"/>
-          <p:nvPr/>
-        </p:nvSpPr>
-        <p:spPr>
-          <a:xfrm>
-            <a:off x="594360" y="1965960"/>
-            <a:ext cx="438912" cy="438912"/>
-          </a:xfrm>
-          <a:prstGeom prst="rect">
-            <a:avLst/>
-          </a:prstGeom>
-          <a:noFill/>
-        </p:spPr>
-        <p:txBody>
-          <a:bodyPr wrap="square" anchor="ctr"/>
-          <a:lstStyle/>
-          <a:p>
-            <a:pPr algn="ctr"/>
-            <a:r>
-              <a:rPr sz="1600" b="1" i="0">
-                <a:solidFill>
-                  <a:srgbClr val="FFFFFF"/>
-                </a:solidFill>
-                <a:latin typeface="Calibri"/>
-              </a:rPr>
-              <a:t>1</a:t>
-            </a:r>
-          </a:p>
-        </p:txBody>
-      </p:sp>
-      <p:sp>
-        <p:nvSpPr>
-          <p:cNvPr id="9" name="TextBox 8"/>
-          <p:cNvSpPr txBox="1"/>
-          <p:nvPr/>
-        </p:nvSpPr>
-        <p:spPr>
-          <a:xfrm>
-            <a:off x="1188720" y="1751076"/>
-            <a:ext cx="10271455" cy="886968"/>
-          </a:xfrm>
-          <a:prstGeom prst="rect">
-            <a:avLst/>
-          </a:prstGeom>
-          <a:noFill/>
-        </p:spPr>
-        <p:txBody>
-          <a:bodyPr wrap="square" anchor="ctr"/>
-          <a:lstStyle/>
-          <a:p>
-            <a:r>
-              <a:rPr sz="1500" b="1" i="0">
-                <a:solidFill>
-                  <a:srgbClr val="095292"/>
-                </a:solidFill>
-                <a:latin typeface="Calibri"/>
-              </a:rPr>
-              <a:t>Disena visual</a:t>
-            </a:r>
-          </a:p>
-          <a:p>
-            <a:pPr>
-              <a:spcBef>
-                <a:spcPts val="200"/>
-              </a:spcBef>
-            </a:pPr>
-            <a:r>
-              <a:rPr sz="1300" b="0" i="0">
-                <a:solidFill>
-                  <a:srgbClr val="333333"/>
-                </a:solidFill>
-                <a:latin typeface="Calibri"/>
-              </a:rPr>
-              <a:t>Dibuja el diagrama como quieras en Excalidraw o draw.io: es mas rapido arrastrar cajas que escribir codigo, y ahi es donde piensas el modelo.</a:t>
-            </a:r>
-          </a:p>
-        </p:txBody>
-      </p:sp>
-      <p:sp>
-        <p:nvSpPr>
-          <p:cNvPr id="10" name="Rounded Rectangle 9"/>
-          <p:cNvSpPr/>
-          <p:nvPr/>
-        </p:nvSpPr>
-        <p:spPr>
-          <a:xfrm>
-            <a:off x="457200" y="2802636"/>
-            <a:ext cx="11277295" cy="1051560"/>
-          </a:xfrm>
-          <a:prstGeom prst="roundRect">
-            <a:avLst>
-              <a:gd name="adj" fmla="val 12000"/>
-            </a:avLst>
-          </a:prstGeom>
-          <a:solidFill>
-            <a:srgbClr val="E8F4FA"/>
-          </a:solidFill>
-          <a:ln>
-            <a:noFill/>
-          </a:ln>
-        </p:spPr>
-        <p:style>
-          <a:lnRef idx="1">
-            <a:schemeClr val="accent1"/>
-          </a:lnRef>
-          <a:fillRef idx="3">
-            <a:schemeClr val="accent1"/>
-          </a:fillRef>
-          <a:effectRef idx="2">
-            <a:schemeClr val="accent1"/>
-          </a:effectRef>
-          <a:fontRef idx="minor">
-            <a:schemeClr val="lt1"/>
-          </a:fontRef>
-        </p:style>
-        <p:txBody>
-          <a:bodyPr rtlCol="0" anchor="ctr"/>
-          <a:lstStyle/>
-          <a:p>
-            <a:pPr algn="ctr"/>
-          </a:p>
-        </p:txBody>
-      </p:sp>
-      <p:sp>
-        <p:nvSpPr>
-          <p:cNvPr id="11" name="Rounded Rectangle 10"/>
-          <p:cNvSpPr/>
-          <p:nvPr/>
-        </p:nvSpPr>
-        <p:spPr>
-          <a:xfrm>
-            <a:off x="594360" y="3108960"/>
-            <a:ext cx="438912" cy="438912"/>
-          </a:xfrm>
-          <a:prstGeom prst="roundRect">
-            <a:avLst>
-              <a:gd name="adj" fmla="val 12000"/>
-            </a:avLst>
-          </a:prstGeom>
-          <a:solidFill>
-            <a:srgbClr val="095292"/>
-          </a:solidFill>
-          <a:ln>
-            <a:noFill/>
-          </a:ln>
-        </p:spPr>
-        <p:style>
-          <a:lnRef idx="1">
-            <a:schemeClr val="accent1"/>
-          </a:lnRef>
-          <a:fillRef idx="3">
-            <a:schemeClr val="accent1"/>
-          </a:fillRef>
-          <a:effectRef idx="2">
-            <a:schemeClr val="accent1"/>
-          </a:effectRef>
-          <a:fontRef idx="minor">
-            <a:schemeClr val="lt1"/>
-          </a:fontRef>
-        </p:style>
-        <p:txBody>
-          <a:bodyPr rtlCol="0" anchor="ctr"/>
-          <a:lstStyle/>
-          <a:p>
-            <a:pPr algn="ctr"/>
-          </a:p>
-        </p:txBody>
-      </p:sp>
-      <p:sp>
-        <p:nvSpPr>
-          <p:cNvPr id="12" name="TextBox 11"/>
-          <p:cNvSpPr txBox="1"/>
-          <p:nvPr/>
-        </p:nvSpPr>
-        <p:spPr>
-          <a:xfrm>
-            <a:off x="594360" y="3108960"/>
-            <a:ext cx="438912" cy="438912"/>
-          </a:xfrm>
-          <a:prstGeom prst="rect">
-            <a:avLst/>
-          </a:prstGeom>
-          <a:noFill/>
-        </p:spPr>
-        <p:txBody>
-          <a:bodyPr wrap="square" anchor="ctr"/>
-          <a:lstStyle/>
-          <a:p>
-            <a:pPr algn="ctr"/>
-            <a:r>
-              <a:rPr sz="1600" b="1" i="0">
-                <a:solidFill>
-                  <a:srgbClr val="FFFFFF"/>
-                </a:solidFill>
-                <a:latin typeface="Calibri"/>
-              </a:rPr>
-              <a:t>2</a:t>
-            </a:r>
-          </a:p>
-        </p:txBody>
-      </p:sp>
-      <p:sp>
-        <p:nvSpPr>
-          <p:cNvPr id="13" name="TextBox 12"/>
-          <p:cNvSpPr txBox="1"/>
-          <p:nvPr/>
-        </p:nvSpPr>
-        <p:spPr>
-          <a:xfrm>
-            <a:off x="1188720" y="2894076"/>
-            <a:ext cx="10271455" cy="886968"/>
-          </a:xfrm>
-          <a:prstGeom prst="rect">
-            <a:avLst/>
-          </a:prstGeom>
-          <a:noFill/>
-        </p:spPr>
-        <p:txBody>
-          <a:bodyPr wrap="square" anchor="ctr"/>
-          <a:lstStyle/>
-          <a:p>
-            <a:r>
-              <a:rPr sz="1500" b="1" i="0">
-                <a:solidFill>
-                  <a:srgbClr val="095292"/>
-                </a:solidFill>
-                <a:latin typeface="Calibri"/>
-              </a:rPr>
-              <a:t>Traduce con IA</a:t>
-            </a:r>
-          </a:p>
-          <a:p>
-            <a:pPr>
-              <a:spcBef>
-                <a:spcPts val="200"/>
-              </a:spcBef>
-            </a:pPr>
-            <a:r>
-              <a:rPr sz="1300" b="0" i="0">
-                <a:solidFill>
-                  <a:srgbClr val="333333"/>
-                </a:solidFill>
-                <a:latin typeface="Calibri"/>
-              </a:rPr>
-              <a:t>Copia o describe tu boceto a una IA y pidele el codigo Mermaid: «convierte este diagrama a Mermaid usando sequenceDiagram». Revisa el resultado: la IA acierta la sintaxis, no tu modelo.</a:t>
-            </a:r>
-          </a:p>
-        </p:txBody>
-      </p:sp>
-      <p:sp>
-        <p:nvSpPr>
-          <p:cNvPr id="14" name="Rounded Rectangle 13"/>
-          <p:cNvSpPr/>
-          <p:nvPr/>
-        </p:nvSpPr>
-        <p:spPr>
-          <a:xfrm>
-            <a:off x="457200" y="3945636"/>
-            <a:ext cx="11277295" cy="1051560"/>
-          </a:xfrm>
-          <a:prstGeom prst="roundRect">
-            <a:avLst>
-              <a:gd name="adj" fmla="val 12000"/>
-            </a:avLst>
-          </a:prstGeom>
-          <a:solidFill>
-            <a:srgbClr val="F2F2F2"/>
-          </a:solidFill>
-          <a:ln>
-            <a:noFill/>
-          </a:ln>
-        </p:spPr>
-        <p:style>
-          <a:lnRef idx="1">
-            <a:schemeClr val="accent1"/>
-          </a:lnRef>
-          <a:fillRef idx="3">
-            <a:schemeClr val="accent1"/>
-          </a:fillRef>
-          <a:effectRef idx="2">
-            <a:schemeClr val="accent1"/>
-          </a:effectRef>
-          <a:fontRef idx="minor">
-            <a:schemeClr val="lt1"/>
-          </a:fontRef>
-        </p:style>
-        <p:txBody>
-          <a:bodyPr rtlCol="0" anchor="ctr"/>
-          <a:lstStyle/>
-          <a:p>
-            <a:pPr algn="ctr"/>
-          </a:p>
-        </p:txBody>
-      </p:sp>
-      <p:sp>
-        <p:nvSpPr>
-          <p:cNvPr id="15" name="Rounded Rectangle 14"/>
-          <p:cNvSpPr/>
-          <p:nvPr/>
-        </p:nvSpPr>
-        <p:spPr>
-          <a:xfrm>
-            <a:off x="594360" y="4251960"/>
-            <a:ext cx="438912" cy="438912"/>
-          </a:xfrm>
-          <a:prstGeom prst="roundRect">
-            <a:avLst>
-              <a:gd name="adj" fmla="val 12000"/>
-            </a:avLst>
-          </a:prstGeom>
-          <a:solidFill>
-            <a:srgbClr val="095292"/>
-          </a:solidFill>
-          <a:ln>
-            <a:noFill/>
-          </a:ln>
-        </p:spPr>
-        <p:style>
-          <a:lnRef idx="1">
-            <a:schemeClr val="accent1"/>
-          </a:lnRef>
-          <a:fillRef idx="3">
-            <a:schemeClr val="accent1"/>
-          </a:fillRef>
-          <a:effectRef idx="2">
-            <a:schemeClr val="accent1"/>
-          </a:effectRef>
-          <a:fontRef idx="minor">
-            <a:schemeClr val="lt1"/>
-          </a:fontRef>
-        </p:style>
-        <p:txBody>
-          <a:bodyPr rtlCol="0" anchor="ctr"/>
-          <a:lstStyle/>
-          <a:p>
-            <a:pPr algn="ctr"/>
-          </a:p>
-        </p:txBody>
-      </p:sp>
-      <p:sp>
-        <p:nvSpPr>
-          <p:cNvPr id="16" name="TextBox 15"/>
-          <p:cNvSpPr txBox="1"/>
-          <p:nvPr/>
-        </p:nvSpPr>
-        <p:spPr>
-          <a:xfrm>
-            <a:off x="594360" y="4251960"/>
-            <a:ext cx="438912" cy="438912"/>
-          </a:xfrm>
-          <a:prstGeom prst="rect">
-            <a:avLst/>
-          </a:prstGeom>
-          <a:noFill/>
-        </p:spPr>
-        <p:txBody>
-          <a:bodyPr wrap="square" anchor="ctr"/>
-          <a:lstStyle/>
-          <a:p>
-            <a:pPr algn="ctr"/>
-            <a:r>
-              <a:rPr sz="1600" b="1" i="0">
-                <a:solidFill>
-                  <a:srgbClr val="FFFFFF"/>
-                </a:solidFill>
-                <a:latin typeface="Calibri"/>
-              </a:rPr>
-              <a:t>3</a:t>
-            </a:r>
-          </a:p>
-        </p:txBody>
-      </p:sp>
-      <p:sp>
-        <p:nvSpPr>
-          <p:cNvPr id="17" name="TextBox 16"/>
-          <p:cNvSpPr txBox="1"/>
-          <p:nvPr/>
-        </p:nvSpPr>
-        <p:spPr>
-          <a:xfrm>
-            <a:off x="1188720" y="4037076"/>
-            <a:ext cx="10271455" cy="886968"/>
-          </a:xfrm>
-          <a:prstGeom prst="rect">
-            <a:avLst/>
-          </a:prstGeom>
-          <a:noFill/>
-        </p:spPr>
-        <p:txBody>
-          <a:bodyPr wrap="square" anchor="ctr"/>
-          <a:lstStyle/>
-          <a:p>
-            <a:r>
-              <a:rPr sz="1500" b="1" i="0">
-                <a:solidFill>
-                  <a:srgbClr val="095292"/>
-                </a:solidFill>
-                <a:latin typeface="Calibri"/>
-              </a:rPr>
-              <a:t>Pega y renderiza en la plataforma del curso</a:t>
-            </a:r>
-          </a:p>
-          <a:p>
-            <a:pPr>
-              <a:spcBef>
-                <a:spcPts val="200"/>
-              </a:spcBef>
-            </a:pPr>
-            <a:r>
-              <a:rPr sz="1300" b="0" i="0">
-                <a:solidFill>
-                  <a:srgbClr val="333333"/>
-                </a:solidFill>
-                <a:latin typeface="Calibri"/>
-              </a:rPr>
-              <a:t>Pega ese codigo en la caja de texto de la pregunta y mira como lo dibuja la plataforma. Si no renderiza, corrige ahi mismo: lo que se califica es el diagrama renderizado dentro de la plataforma del curso.</a:t>
-            </a:r>
-          </a:p>
-        </p:txBody>
-      </p:sp>
-      <p:sp>
-        <p:nvSpPr>
-          <p:cNvPr id="18" name="Rounded Rectangle 17"/>
-          <p:cNvSpPr/>
-          <p:nvPr/>
-        </p:nvSpPr>
-        <p:spPr>
-          <a:xfrm>
-            <a:off x="457200" y="5088636"/>
-            <a:ext cx="11277295" cy="1051560"/>
-          </a:xfrm>
-          <a:prstGeom prst="roundRect">
-            <a:avLst>
-              <a:gd name="adj" fmla="val 12000"/>
-            </a:avLst>
-          </a:prstGeom>
-          <a:solidFill>
-            <a:srgbClr val="E8F4FA"/>
-          </a:solidFill>
-          <a:ln>
-            <a:noFill/>
-          </a:ln>
-        </p:spPr>
-        <p:style>
-          <a:lnRef idx="1">
-            <a:schemeClr val="accent1"/>
-          </a:lnRef>
-          <a:fillRef idx="3">
-            <a:schemeClr val="accent1"/>
-          </a:fillRef>
-          <a:effectRef idx="2">
-            <a:schemeClr val="accent1"/>
-          </a:effectRef>
-          <a:fontRef idx="minor">
-            <a:schemeClr val="lt1"/>
-          </a:fontRef>
-        </p:style>
-        <p:txBody>
-          <a:bodyPr rtlCol="0" anchor="ctr"/>
-          <a:lstStyle/>
-          <a:p>
-            <a:pPr algn="ctr"/>
-          </a:p>
-        </p:txBody>
-      </p:sp>
-      <p:sp>
-        <p:nvSpPr>
-          <p:cNvPr id="19" name="Rounded Rectangle 18"/>
-          <p:cNvSpPr/>
-          <p:nvPr/>
-        </p:nvSpPr>
-        <p:spPr>
-          <a:xfrm>
-            <a:off x="594360" y="5394960"/>
-            <a:ext cx="438912" cy="438912"/>
-          </a:xfrm>
-          <a:prstGeom prst="roundRect">
-            <a:avLst>
-              <a:gd name="adj" fmla="val 12000"/>
-            </a:avLst>
-          </a:prstGeom>
-          <a:solidFill>
-            <a:srgbClr val="095292"/>
-          </a:solidFill>
-          <a:ln>
-            <a:noFill/>
-          </a:ln>
-        </p:spPr>
-        <p:style>
-          <a:lnRef idx="1">
-            <a:schemeClr val="accent1"/>
-          </a:lnRef>
-          <a:fillRef idx="3">
-            <a:schemeClr val="accent1"/>
-          </a:fillRef>
-          <a:effectRef idx="2">
-            <a:schemeClr val="accent1"/>
-          </a:effectRef>
-          <a:fontRef idx="minor">
-            <a:schemeClr val="lt1"/>
-          </a:fontRef>
-        </p:style>
-        <p:txBody>
-          <a:bodyPr rtlCol="0" anchor="ctr"/>
-          <a:lstStyle/>
-          <a:p>
-            <a:pPr algn="ctr"/>
-          </a:p>
-        </p:txBody>
-      </p:sp>
-      <p:sp>
-        <p:nvSpPr>
-          <p:cNvPr id="20" name="TextBox 19"/>
-          <p:cNvSpPr txBox="1"/>
-          <p:nvPr/>
-        </p:nvSpPr>
-        <p:spPr>
-          <a:xfrm>
-            <a:off x="594360" y="5394960"/>
-            <a:ext cx="438912" cy="438912"/>
-          </a:xfrm>
-          <a:prstGeom prst="rect">
-            <a:avLst/>
-          </a:prstGeom>
-          <a:noFill/>
-        </p:spPr>
-        <p:txBody>
-          <a:bodyPr wrap="square" anchor="ctr"/>
-          <a:lstStyle/>
-          <a:p>
-            <a:pPr algn="ctr"/>
-            <a:r>
-              <a:rPr sz="1600" b="1" i="0">
-                <a:solidFill>
-                  <a:srgbClr val="FFFFFF"/>
-                </a:solidFill>
-                <a:latin typeface="Calibri"/>
-              </a:rPr>
-              <a:t>4</a:t>
-            </a:r>
-          </a:p>
-        </p:txBody>
-      </p:sp>
-      <p:sp>
-        <p:nvSpPr>
-          <p:cNvPr id="21" name="TextBox 20"/>
-          <p:cNvSpPr txBox="1"/>
-          <p:nvPr/>
-        </p:nvSpPr>
-        <p:spPr>
-          <a:xfrm>
-            <a:off x="1188720" y="5180076"/>
-            <a:ext cx="10271455" cy="886968"/>
-          </a:xfrm>
-          <a:prstGeom prst="rect">
-            <a:avLst/>
-          </a:prstGeom>
-          <a:noFill/>
-        </p:spPr>
-        <p:txBody>
-          <a:bodyPr wrap="square" anchor="ctr"/>
-          <a:lstStyle/>
-          <a:p>
-            <a:r>
-              <a:rPr sz="1500" b="1" i="0">
-                <a:solidFill>
-                  <a:srgbClr val="095292"/>
-                </a:solidFill>
-                <a:latin typeface="Calibri"/>
-              </a:rPr>
-              <a:t>Guarda el PNG para tu PI</a:t>
-            </a:r>
-          </a:p>
-          <a:p>
-            <a:pPr>
-              <a:spcBef>
-                <a:spcPts val="200"/>
-              </a:spcBef>
-            </a:pPr>
-            <a:r>
-              <a:rPr sz="1300" b="0" i="0">
-                <a:solidFill>
-                  <a:srgbClr val="333333"/>
-                </a:solidFill>
-                <a:latin typeface="Calibri"/>
-              </a:rPr>
-              <a:t>Exporta tambien la imagen a la carpeta de tu Proyecto Integrador. Esa copia es para tu informe; no reemplaza la respuesta en la plataforma.</a:t>
-            </a:r>
-          </a:p>
-        </p:txBody>
-      </p:sp>
-      <p:sp>
-        <p:nvSpPr>
-          <p:cNvPr id="22" name="TextBox 21"/>
-          <p:cNvSpPr txBox="1"/>
-          <p:nvPr/>
-        </p:nvSpPr>
-        <p:spPr>
-          <a:xfrm>
-            <a:off x="11185855" y="6473952"/>
-            <a:ext cx="640080" cy="274320"/>
-          </a:xfrm>
-          <a:prstGeom prst="rect">
-            <a:avLst/>
-          </a:prstGeom>
-          <a:noFill/>
-        </p:spPr>
-        <p:txBody>
-          <a:bodyPr wrap="square">
-            <a:spAutoFit/>
-          </a:bodyPr>
-          <a:lstStyle/>
-          <a:p>
-            <a:pPr algn="r"/>
-            <a:r>
-              <a:rPr sz="1100" b="0" i="0">
-                <a:solidFill>
-                  <a:srgbClr val="666666"/>
-                </a:solidFill>
-                <a:latin typeface="Calibri"/>
-              </a:rPr>
-              <a:t>28</a:t>
-            </a:r>
-          </a:p>
-        </p:txBody>
-      </p:sp>
-    </p:spTree>
-  </p:cSld>
-  <p:clrMapOvr>
-    <a:masterClrMapping/>
-  </p:clrMapOvr>
-</p:sld>
-</file>
-
-<file path=ppt/slides/slide29.xml><?xml version="1.0" encoding="utf-8"?>
-<p:sld xmlns:a="http://schemas.openxmlformats.org/drawingml/2006/main" xmlns:p="http://schemas.openxmlformats.org/presentationml/2006/main" xmlns:r="http://schemas.openxmlformats.org/officeDocument/2006/relationships">
-  <p:cSld>
-    <p:bg>
-      <p:bgPr>
-        <a:solidFill>
-          <a:srgbClr val="FFFFFF"/>
-        </a:solidFill>
-        <a:effectLst/>
-      </p:bgPr>
-    </p:bg>
-    <p:spTree>
-      <p:nvGrpSpPr>
-        <p:cNvPr id="1" name=""/>
-        <p:cNvGrpSpPr/>
-        <p:nvPr/>
-      </p:nvGrpSpPr>
-      <p:grpSpPr/>
-      <p:sp>
-        <p:nvSpPr>
-          <p:cNvPr id="2" name="Rectangle 1"/>
-          <p:cNvSpPr/>
-          <p:nvPr/>
-        </p:nvSpPr>
-        <p:spPr>
-          <a:xfrm>
-            <a:off x="0" y="0"/>
-            <a:ext cx="12191695" cy="960120"/>
-          </a:xfrm>
-          <a:prstGeom prst="rect">
-            <a:avLst/>
-          </a:prstGeom>
-          <a:solidFill>
-            <a:srgbClr val="095292"/>
-          </a:solidFill>
-          <a:ln>
-            <a:noFill/>
-          </a:ln>
-        </p:spPr>
-        <p:style>
-          <a:lnRef idx="1">
-            <a:schemeClr val="accent1"/>
-          </a:lnRef>
-          <a:fillRef idx="3">
-            <a:schemeClr val="accent1"/>
-          </a:fillRef>
-          <a:effectRef idx="2">
-            <a:schemeClr val="accent1"/>
-          </a:effectRef>
-          <a:fontRef idx="minor">
-            <a:schemeClr val="lt1"/>
-          </a:fontRef>
-        </p:style>
-        <p:txBody>
-          <a:bodyPr rtlCol="0" anchor="ctr"/>
-          <a:lstStyle/>
-          <a:p>
-            <a:pPr algn="ctr"/>
-          </a:p>
-        </p:txBody>
-      </p:sp>
-      <p:sp>
-        <p:nvSpPr>
-          <p:cNvPr id="3" name="Rectangle 2"/>
-          <p:cNvSpPr/>
-          <p:nvPr/>
-        </p:nvSpPr>
-        <p:spPr>
-          <a:xfrm>
-            <a:off x="0" y="960120"/>
-            <a:ext cx="12191695" cy="41148"/>
-          </a:xfrm>
-          <a:prstGeom prst="rect">
-            <a:avLst/>
-          </a:prstGeom>
-          <a:solidFill>
-            <a:srgbClr val="FFD000"/>
-          </a:solidFill>
-          <a:ln>
-            <a:noFill/>
-          </a:ln>
-        </p:spPr>
-        <p:style>
-          <a:lnRef idx="1">
-            <a:schemeClr val="accent1"/>
-          </a:lnRef>
-          <a:fillRef idx="3">
-            <a:schemeClr val="accent1"/>
-          </a:fillRef>
-          <a:effectRef idx="2">
-            <a:schemeClr val="accent1"/>
-          </a:effectRef>
-          <a:fontRef idx="minor">
-            <a:schemeClr val="lt1"/>
-          </a:fontRef>
-        </p:style>
-        <p:txBody>
-          <a:bodyPr rtlCol="0" anchor="ctr"/>
-          <a:lstStyle/>
-          <a:p>
-            <a:pPr algn="ctr"/>
-          </a:p>
-        </p:txBody>
-      </p:sp>
-      <p:sp>
-        <p:nvSpPr>
-          <p:cNvPr id="4" name="TextBox 3"/>
-          <p:cNvSpPr txBox="1"/>
-          <p:nvPr/>
-        </p:nvSpPr>
-        <p:spPr>
-          <a:xfrm>
-            <a:off x="457200" y="164592"/>
-            <a:ext cx="11277295" cy="502920"/>
-          </a:xfrm>
-          <a:prstGeom prst="rect">
-            <a:avLst/>
-          </a:prstGeom>
-          <a:noFill/>
-        </p:spPr>
-        <p:txBody>
-          <a:bodyPr wrap="square">
-            <a:spAutoFit/>
-          </a:bodyPr>
-          <a:lstStyle/>
-          <a:p>
-            <a:r>
-              <a:rPr sz="2600" b="1" i="0">
-                <a:solidFill>
-                  <a:srgbClr val="FFFFFF"/>
-                </a:solidFill>
-                <a:latin typeface="Calibri"/>
-              </a:rPr>
-              <a:t>PI CloudLite — entregable de hoy</a:t>
-            </a:r>
-          </a:p>
-        </p:txBody>
-      </p:sp>
-      <p:sp>
-        <p:nvSpPr>
-          <p:cNvPr id="5" name="TextBox 4"/>
-          <p:cNvSpPr txBox="1"/>
-          <p:nvPr/>
-        </p:nvSpPr>
-        <p:spPr>
-          <a:xfrm>
-            <a:off x="457200" y="1170432"/>
-            <a:ext cx="11277295" cy="5230368"/>
-          </a:xfrm>
-          <a:prstGeom prst="rect">
-            <a:avLst/>
-          </a:prstGeom>
-          <a:noFill/>
-        </p:spPr>
-        <p:txBody>
-          <a:bodyPr wrap="square">
-            <a:spAutoFit/>
-          </a:bodyPr>
-          <a:lstStyle/>
-          <a:p>
-            <a:pPr>
-              <a:spcAft>
-                <a:spcPts val="800"/>
-              </a:spcAft>
-            </a:pPr>
-            <a:r>
-              <a:rPr sz="2000" b="0" i="0">
-                <a:solidFill>
-                  <a:srgbClr val="333333"/>
-                </a:solidFill>
-                <a:latin typeface="Calibri"/>
-              </a:rPr>
-              <a:t>–   </a:t>
-            </a:r>
             <a:r>
               <a:rPr sz="2000" b="1" i="0">
                 <a:solidFill>
-                  <a:srgbClr val="333333"/>
-                </a:solidFill>
-                <a:latin typeface="Calibri"/>
-              </a:rPr>
-              <a:t>Entregable:</a:t>
-            </a:r>
-            <a:r>
-              <a:rPr sz="2000" b="0" i="0">
-                <a:solidFill>
-                  <a:srgbClr val="333333"/>
-                </a:solidFill>
-                <a:latin typeface="Calibri"/>
-              </a:rPr>
-              <a:t> Sección Rendimiento + guion de pitch + paquete casi-final</a:t>
-            </a:r>
-          </a:p>
-          <a:p>
-            <a:pPr>
-              <a:spcAft>
-                <a:spcPts val="800"/>
-              </a:spcAft>
-            </a:pPr>
-            <a:r>
-              <a:rPr sz="2000" b="0" i="0">
-                <a:solidFill>
-                  <a:srgbClr val="333333"/>
-                </a:solidFill>
-                <a:latin typeface="Calibri"/>
-              </a:rPr>
-              <a:t>–   Herramienta: </a:t>
-            </a:r>
-            <a:r>
-              <a:rPr sz="2000" b="1" i="0">
-                <a:solidFill>
-                  <a:srgbClr val="333333"/>
-                </a:solidFill>
-                <a:latin typeface="Calibri"/>
-              </a:rPr>
-              <a:t>Navegador · editores de diagramas y de texto del curso</a:t>
-            </a:r>
-          </a:p>
-          <a:p>
-            <a:pPr>
-              <a:spcAft>
-                <a:spcPts val="800"/>
-              </a:spcAft>
-            </a:pPr>
-            <a:r>
-              <a:rPr sz="2000" b="0" i="0">
-                <a:solidFill>
-                  <a:srgbClr val="333333"/>
-                </a:solidFill>
-                <a:latin typeface="Calibri"/>
-              </a:rPr>
-              <a:t>–   Todo lo que construyan hoy entra al </a:t>
-            </a:r>
-            <a:r>
-              <a:rPr sz="2000" b="1" i="0">
-                <a:solidFill>
-                  <a:srgbClr val="333333"/>
-                </a:solidFill>
-                <a:latin typeface="Calibri"/>
-              </a:rPr>
-              <a:t>informe/repo del PI</a:t>
-            </a:r>
-            <a:r>
-              <a:rPr sz="2000" b="0" i="0">
-                <a:solidFill>
-                  <a:srgbClr val="333333"/>
-                </a:solidFill>
-                <a:latin typeface="Calibri"/>
-              </a:rPr>
-              <a:t> (no es lab suelto).</a:t>
-            </a:r>
-          </a:p>
-          <a:p>
-            <a:pPr>
-              <a:spcAft>
-                <a:spcPts val="800"/>
-              </a:spcAft>
-            </a:pPr>
-            <a:r>
-              <a:rPr sz="2000" b="0" i="0">
-                <a:solidFill>
-                  <a:srgbClr val="333333"/>
-                </a:solidFill>
-                <a:latin typeface="Calibri"/>
-              </a:rPr>
-              <a:t>–   Individual por defecto · el docente puede autorizar equipos de 2–3; la entrega en la plataforma del curso siempre es individual.</a:t>
-            </a:r>
-          </a:p>
-        </p:txBody>
-      </p:sp>
-      <p:sp>
-        <p:nvSpPr>
-          <p:cNvPr id="6" name="TextBox 5"/>
-          <p:cNvSpPr txBox="1"/>
-          <p:nvPr/>
-        </p:nvSpPr>
-        <p:spPr>
-          <a:xfrm>
-            <a:off x="11185855" y="6473952"/>
-            <a:ext cx="640080" cy="274320"/>
-          </a:xfrm>
-          <a:prstGeom prst="rect">
-            <a:avLst/>
-          </a:prstGeom>
-          <a:noFill/>
-        </p:spPr>
-        <p:txBody>
-          <a:bodyPr wrap="square">
-            <a:spAutoFit/>
-          </a:bodyPr>
-          <a:lstStyle/>
-          <a:p>
-            <a:pPr algn="r"/>
-            <a:r>
-              <a:rPr sz="1100" b="0" i="0">
-                <a:solidFill>
-                  <a:srgbClr val="666666"/>
-                </a:solidFill>
-                <a:latin typeface="Calibri"/>
-              </a:rPr>
-              <a:t>29</a:t>
+                  <a:srgbClr val="269CCB"/>
+                </a:solidFill>
+                <a:latin typeface="Calibri"/>
+              </a:rPr>
+              <a:t>Teoría al servicio del diseño</a:t>
             </a:r>
           </a:p>
         </p:txBody>
@@ -11714,1198 +10368,6 @@
 </p:sld>
 </file>
 
-<file path=ppt/slides/slide30.xml><?xml version="1.0" encoding="utf-8"?>
-<p:sld xmlns:a="http://schemas.openxmlformats.org/drawingml/2006/main" xmlns:p="http://schemas.openxmlformats.org/presentationml/2006/main" xmlns:r="http://schemas.openxmlformats.org/officeDocument/2006/relationships">
-  <p:cSld>
-    <p:bg>
-      <p:bgPr>
-        <a:solidFill>
-          <a:srgbClr val="FFFFFF"/>
-        </a:solidFill>
-        <a:effectLst/>
-      </p:bgPr>
-    </p:bg>
-    <p:spTree>
-      <p:nvGrpSpPr>
-        <p:cNvPr id="1" name=""/>
-        <p:cNvGrpSpPr/>
-        <p:nvPr/>
-      </p:nvGrpSpPr>
-      <p:grpSpPr/>
-      <p:sp>
-        <p:nvSpPr>
-          <p:cNvPr id="2" name="Rectangle 1"/>
-          <p:cNvSpPr/>
-          <p:nvPr/>
-        </p:nvSpPr>
-        <p:spPr>
-          <a:xfrm>
-            <a:off x="0" y="0"/>
-            <a:ext cx="12191695" cy="960120"/>
-          </a:xfrm>
-          <a:prstGeom prst="rect">
-            <a:avLst/>
-          </a:prstGeom>
-          <a:solidFill>
-            <a:srgbClr val="095292"/>
-          </a:solidFill>
-          <a:ln>
-            <a:noFill/>
-          </a:ln>
-        </p:spPr>
-        <p:style>
-          <a:lnRef idx="1">
-            <a:schemeClr val="accent1"/>
-          </a:lnRef>
-          <a:fillRef idx="3">
-            <a:schemeClr val="accent1"/>
-          </a:fillRef>
-          <a:effectRef idx="2">
-            <a:schemeClr val="accent1"/>
-          </a:effectRef>
-          <a:fontRef idx="minor">
-            <a:schemeClr val="lt1"/>
-          </a:fontRef>
-        </p:style>
-        <p:txBody>
-          <a:bodyPr rtlCol="0" anchor="ctr"/>
-          <a:lstStyle/>
-          <a:p>
-            <a:pPr algn="ctr"/>
-          </a:p>
-        </p:txBody>
-      </p:sp>
-      <p:sp>
-        <p:nvSpPr>
-          <p:cNvPr id="3" name="Rectangle 2"/>
-          <p:cNvSpPr/>
-          <p:nvPr/>
-        </p:nvSpPr>
-        <p:spPr>
-          <a:xfrm>
-            <a:off x="0" y="960120"/>
-            <a:ext cx="12191695" cy="41148"/>
-          </a:xfrm>
-          <a:prstGeom prst="rect">
-            <a:avLst/>
-          </a:prstGeom>
-          <a:solidFill>
-            <a:srgbClr val="FFD000"/>
-          </a:solidFill>
-          <a:ln>
-            <a:noFill/>
-          </a:ln>
-        </p:spPr>
-        <p:style>
-          <a:lnRef idx="1">
-            <a:schemeClr val="accent1"/>
-          </a:lnRef>
-          <a:fillRef idx="3">
-            <a:schemeClr val="accent1"/>
-          </a:fillRef>
-          <a:effectRef idx="2">
-            <a:schemeClr val="accent1"/>
-          </a:effectRef>
-          <a:fontRef idx="minor">
-            <a:schemeClr val="lt1"/>
-          </a:fontRef>
-        </p:style>
-        <p:txBody>
-          <a:bodyPr rtlCol="0" anchor="ctr"/>
-          <a:lstStyle/>
-          <a:p>
-            <a:pPr algn="ctr"/>
-          </a:p>
-        </p:txBody>
-      </p:sp>
-      <p:sp>
-        <p:nvSpPr>
-          <p:cNvPr id="4" name="TextBox 3"/>
-          <p:cNvSpPr txBox="1"/>
-          <p:nvPr/>
-        </p:nvSpPr>
-        <p:spPr>
-          <a:xfrm>
-            <a:off x="457200" y="164592"/>
-            <a:ext cx="11277295" cy="502920"/>
-          </a:xfrm>
-          <a:prstGeom prst="rect">
-            <a:avLst/>
-          </a:prstGeom>
-          <a:noFill/>
-        </p:spPr>
-        <p:txBody>
-          <a:bodyPr wrap="square">
-            <a:spAutoFit/>
-          </a:bodyPr>
-          <a:lstStyle/>
-          <a:p>
-            <a:r>
-              <a:rPr sz="2600" b="1" i="0">
-                <a:solidFill>
-                  <a:srgbClr val="FFFFFF"/>
-                </a:solidFill>
-                <a:latin typeface="Calibri"/>
-              </a:rPr>
-              <a:t>Manos a la obra (paso a paso)</a:t>
-            </a:r>
-          </a:p>
-        </p:txBody>
-      </p:sp>
-      <p:sp>
-        <p:nvSpPr>
-          <p:cNvPr id="5" name="TextBox 4"/>
-          <p:cNvSpPr txBox="1"/>
-          <p:nvPr/>
-        </p:nvSpPr>
-        <p:spPr>
-          <a:xfrm>
-            <a:off x="457200" y="1170432"/>
-            <a:ext cx="11277295" cy="5230368"/>
-          </a:xfrm>
-          <a:prstGeom prst="rect">
-            <a:avLst/>
-          </a:prstGeom>
-          <a:noFill/>
-        </p:spPr>
-        <p:txBody>
-          <a:bodyPr wrap="square">
-            <a:spAutoFit/>
-          </a:bodyPr>
-          <a:lstStyle/>
-          <a:p>
-            <a:pPr>
-              <a:spcAft>
-                <a:spcPts val="800"/>
-              </a:spcAft>
-            </a:pPr>
-            <a:r>
-              <a:rPr sz="1600" b="1" i="0">
-                <a:solidFill>
-                  <a:srgbClr val="333333"/>
-                </a:solidFill>
-                <a:latin typeface="Calibri"/>
-              </a:rPr>
-              <a:t>1.</a:t>
-            </a:r>
-            <a:r>
-              <a:rPr sz="1600" b="0" i="0">
-                <a:solidFill>
-                  <a:srgbClr val="333333"/>
-                </a:solidFill>
-                <a:latin typeface="Calibri"/>
-              </a:rPr>
-              <a:t> Paso 1: describan el escenario de carga del pico real de su dominio con los 6 datos obligatorios (evento del pico, usuarios concurrentes, peticiones por segundo, mezcla de operaciones en porcentajes que sumen 100, duracion de la ventana y volumen de datos de partida), verificando que la mezcla sume exactamente 100 por ciento y que el pico corresponda a una fecha real del calendario de su dominio.</a:t>
-            </a:r>
-          </a:p>
-          <a:p>
-            <a:pPr>
-              <a:spcAft>
-                <a:spcPts val="800"/>
-              </a:spcAft>
-            </a:pPr>
-            <a:r>
-              <a:rPr sz="1600" b="0" i="0">
-                <a:solidFill>
-                  <a:srgbClr val="333333"/>
-                </a:solidFill>
-                <a:latin typeface="Calibri"/>
-              </a:rPr>
-              <a:t>–   </a:t>
-            </a:r>
-            <a:r>
-              <a:rPr sz="1600" b="1" i="0">
-                <a:solidFill>
-                  <a:srgbClr val="333333"/>
-                </a:solidFill>
-                <a:latin typeface="Calibri"/>
-              </a:rPr>
-              <a:t>2.</a:t>
-            </a:r>
-            <a:r>
-              <a:rPr sz="1600" b="0" i="0">
-                <a:solidFill>
-                  <a:srgbClr val="333333"/>
-                </a:solidFill>
-                <a:latin typeface="Calibri"/>
-              </a:rPr>
-              <a:t> Paso 2: definan las 3 metricas objetivo en una tabla de 4 columnas con numero, ventana de medicion, forma de medirla y consecuencia de incumplirla, verificando que cada objetivo tenga un numero y una ventana (por ejemplo p95 por debajo de 800 ms en 5 minutos) y que ninguna diga rapido o aceptable sin cifra.</a:t>
-            </a:r>
-          </a:p>
-          <a:p>
-            <a:pPr>
-              <a:spcAft>
-                <a:spcPts val="800"/>
-              </a:spcAft>
-            </a:pPr>
-            <a:r>
-              <a:rPr sz="1600" b="0" i="0">
-                <a:solidFill>
-                  <a:srgbClr val="333333"/>
-                </a:solidFill>
-                <a:latin typeface="Calibri"/>
-              </a:rPr>
-              <a:t>–   </a:t>
-            </a:r>
-            <a:r>
-              <a:rPr sz="1600" b="1" i="0">
-                <a:solidFill>
-                  <a:srgbClr val="333333"/>
-                </a:solidFill>
-                <a:latin typeface="Calibri"/>
-              </a:rPr>
-              <a:t>3.</a:t>
-            </a:r>
-            <a:r>
-              <a:rPr sz="1600" b="0" i="0">
-                <a:solidFill>
-                  <a:srgbClr val="333333"/>
-                </a:solidFill>
-                <a:latin typeface="Calibri"/>
-              </a:rPr>
-              <a:t> Paso 3: escriban en la plataforma del curso el sequenceDiagram del camino critico con el presupuesto de latencia repartido por salto, verificando que la suma de los tramos sea menor o igual al objetivo de p95 y que la nota final muestre el margen restante en milisegundos.</a:t>
-            </a:r>
-          </a:p>
-          <a:p>
-            <a:pPr>
-              <a:spcAft>
-                <a:spcPts val="800"/>
-              </a:spcAft>
-            </a:pPr>
-            <a:r>
-              <a:rPr sz="1600" b="0" i="0">
-                <a:solidFill>
-                  <a:srgbClr val="333333"/>
-                </a:solidFill>
-                <a:latin typeface="Calibri"/>
-              </a:rPr>
-              <a:t>–   </a:t>
-            </a:r>
-            <a:r>
-              <a:rPr sz="1600" b="1" i="0">
-                <a:solidFill>
-                  <a:srgbClr val="333333"/>
-                </a:solidFill>
-                <a:latin typeface="Calibri"/>
-              </a:rPr>
-              <a:t>4.</a:t>
-            </a:r>
-            <a:r>
-              <a:rPr sz="1600" b="0" i="0">
-                <a:solidFill>
-                  <a:srgbClr val="333333"/>
-                </a:solidFill>
-                <a:latin typeface="Calibri"/>
-              </a:rPr>
-              <a:t> Paso 4: ensayen el pitch de 5 a 8 minutos con cronometro y llenen la tabla de guion de 6 filas con minuto, seccion, quien habla, mensaje clave y evidencia en pantalla, verificando que la suma de los minutos quede entre 5 y 8, que ninguna seccion pase de 2:00 (y, si el docente autorizo equipo, que todos los integrantes hablen) y que cada seccion tenga una evidencia concreta que se pueda mostrar.</a:t>
-            </a:r>
-          </a:p>
-          <a:p>
-            <a:pPr>
-              <a:spcAft>
-                <a:spcPts val="800"/>
-              </a:spcAft>
-            </a:pPr>
-            <a:r>
-              <a:rPr sz="1600" b="0" i="0">
-                <a:solidFill>
-                  <a:srgbClr val="333333"/>
-                </a:solidFill>
-                <a:latin typeface="Calibri"/>
-              </a:rPr>
-              <a:t>–   </a:t>
-            </a:r>
-            <a:r>
-              <a:rPr sz="1600" b="1" i="0">
-                <a:solidFill>
-                  <a:srgbClr val="333333"/>
-                </a:solidFill>
-                <a:latin typeface="Calibri"/>
-              </a:rPr>
-              <a:t>5.</a:t>
-            </a:r>
-            <a:r>
-              <a:rPr sz="1600" b="0" i="0">
-                <a:solidFill>
-                  <a:srgbClr val="333333"/>
-                </a:solidFill>
-                <a:latin typeface="Calibri"/>
-              </a:rPr>
-              <a:t> Paso 5: cierren los 5 items del backlog de la Clase 11 dejando registro de los residuales, dejen el paquete casi final ordenado en el repositorio o el Drive y suban las 6 preguntas a la plataforma del curso (modulo Talleres) antes del en la fecha que indique el docente, verificando que el cuello de botella declarado en el analisis sea el mismo que muestra el diagrama de secuencia.</a:t>
-            </a:r>
-          </a:p>
-        </p:txBody>
-      </p:sp>
-      <p:sp>
-        <p:nvSpPr>
-          <p:cNvPr id="6" name="TextBox 5"/>
-          <p:cNvSpPr txBox="1"/>
-          <p:nvPr/>
-        </p:nvSpPr>
-        <p:spPr>
-          <a:xfrm>
-            <a:off x="11185855" y="6473952"/>
-            <a:ext cx="640080" cy="274320"/>
-          </a:xfrm>
-          <a:prstGeom prst="rect">
-            <a:avLst/>
-          </a:prstGeom>
-          <a:noFill/>
-        </p:spPr>
-        <p:txBody>
-          <a:bodyPr wrap="square">
-            <a:spAutoFit/>
-          </a:bodyPr>
-          <a:lstStyle/>
-          <a:p>
-            <a:pPr algn="r"/>
-            <a:r>
-              <a:rPr sz="1100" b="0" i="0">
-                <a:solidFill>
-                  <a:srgbClr val="666666"/>
-                </a:solidFill>
-                <a:latin typeface="Calibri"/>
-              </a:rPr>
-              <a:t>30</a:t>
-            </a:r>
-          </a:p>
-        </p:txBody>
-      </p:sp>
-    </p:spTree>
-  </p:cSld>
-  <p:clrMapOvr>
-    <a:masterClrMapping/>
-  </p:clrMapOvr>
-</p:sld>
-</file>
-
-<file path=ppt/slides/slide31.xml><?xml version="1.0" encoding="utf-8"?>
-<p:sld xmlns:a="http://schemas.openxmlformats.org/drawingml/2006/main" xmlns:p="http://schemas.openxmlformats.org/presentationml/2006/main" xmlns:r="http://schemas.openxmlformats.org/officeDocument/2006/relationships">
-  <p:cSld>
-    <p:bg>
-      <p:bgPr>
-        <a:solidFill>
-          <a:srgbClr val="FFFFFF"/>
-        </a:solidFill>
-        <a:effectLst/>
-      </p:bgPr>
-    </p:bg>
-    <p:spTree>
-      <p:nvGrpSpPr>
-        <p:cNvPr id="1" name=""/>
-        <p:cNvGrpSpPr/>
-        <p:nvPr/>
-      </p:nvGrpSpPr>
-      <p:grpSpPr/>
-      <p:sp>
-        <p:nvSpPr>
-          <p:cNvPr id="2" name="Rectangle 1"/>
-          <p:cNvSpPr/>
-          <p:nvPr/>
-        </p:nvSpPr>
-        <p:spPr>
-          <a:xfrm>
-            <a:off x="0" y="0"/>
-            <a:ext cx="12191695" cy="960120"/>
-          </a:xfrm>
-          <a:prstGeom prst="rect">
-            <a:avLst/>
-          </a:prstGeom>
-          <a:solidFill>
-            <a:srgbClr val="095292"/>
-          </a:solidFill>
-          <a:ln>
-            <a:noFill/>
-          </a:ln>
-        </p:spPr>
-        <p:style>
-          <a:lnRef idx="1">
-            <a:schemeClr val="accent1"/>
-          </a:lnRef>
-          <a:fillRef idx="3">
-            <a:schemeClr val="accent1"/>
-          </a:fillRef>
-          <a:effectRef idx="2">
-            <a:schemeClr val="accent1"/>
-          </a:effectRef>
-          <a:fontRef idx="minor">
-            <a:schemeClr val="lt1"/>
-          </a:fontRef>
-        </p:style>
-        <p:txBody>
-          <a:bodyPr rtlCol="0" anchor="ctr"/>
-          <a:lstStyle/>
-          <a:p>
-            <a:pPr algn="ctr"/>
-          </a:p>
-        </p:txBody>
-      </p:sp>
-      <p:sp>
-        <p:nvSpPr>
-          <p:cNvPr id="3" name="Rectangle 2"/>
-          <p:cNvSpPr/>
-          <p:nvPr/>
-        </p:nvSpPr>
-        <p:spPr>
-          <a:xfrm>
-            <a:off x="0" y="960120"/>
-            <a:ext cx="12191695" cy="41148"/>
-          </a:xfrm>
-          <a:prstGeom prst="rect">
-            <a:avLst/>
-          </a:prstGeom>
-          <a:solidFill>
-            <a:srgbClr val="FFD000"/>
-          </a:solidFill>
-          <a:ln>
-            <a:noFill/>
-          </a:ln>
-        </p:spPr>
-        <p:style>
-          <a:lnRef idx="1">
-            <a:schemeClr val="accent1"/>
-          </a:lnRef>
-          <a:fillRef idx="3">
-            <a:schemeClr val="accent1"/>
-          </a:fillRef>
-          <a:effectRef idx="2">
-            <a:schemeClr val="accent1"/>
-          </a:effectRef>
-          <a:fontRef idx="minor">
-            <a:schemeClr val="lt1"/>
-          </a:fontRef>
-        </p:style>
-        <p:txBody>
-          <a:bodyPr rtlCol="0" anchor="ctr"/>
-          <a:lstStyle/>
-          <a:p>
-            <a:pPr algn="ctr"/>
-          </a:p>
-        </p:txBody>
-      </p:sp>
-      <p:sp>
-        <p:nvSpPr>
-          <p:cNvPr id="4" name="TextBox 3"/>
-          <p:cNvSpPr txBox="1"/>
-          <p:nvPr/>
-        </p:nvSpPr>
-        <p:spPr>
-          <a:xfrm>
-            <a:off x="457200" y="164592"/>
-            <a:ext cx="11277295" cy="502920"/>
-          </a:xfrm>
-          <a:prstGeom prst="rect">
-            <a:avLst/>
-          </a:prstGeom>
-          <a:noFill/>
-        </p:spPr>
-        <p:txBody>
-          <a:bodyPr wrap="square">
-            <a:spAutoFit/>
-          </a:bodyPr>
-          <a:lstStyle/>
-          <a:p>
-            <a:r>
-              <a:rPr sz="2600" b="1" i="0">
-                <a:solidFill>
-                  <a:srgbClr val="FFFFFF"/>
-                </a:solidFill>
-                <a:latin typeface="Calibri"/>
-              </a:rPr>
-              <a:t>Para continuar (PI)</a:t>
-            </a:r>
-          </a:p>
-        </p:txBody>
-      </p:sp>
-      <p:sp>
-        <p:nvSpPr>
-          <p:cNvPr id="5" name="Rounded Rectangle 4"/>
-          <p:cNvSpPr/>
-          <p:nvPr/>
-        </p:nvSpPr>
-        <p:spPr>
-          <a:xfrm>
-            <a:off x="457200" y="1261872"/>
-            <a:ext cx="11277295" cy="1051560"/>
-          </a:xfrm>
-          <a:prstGeom prst="roundRect">
-            <a:avLst>
-              <a:gd name="adj" fmla="val 12000"/>
-            </a:avLst>
-          </a:prstGeom>
-          <a:solidFill>
-            <a:srgbClr val="E8F4FA"/>
-          </a:solidFill>
-          <a:ln>
-            <a:noFill/>
-          </a:ln>
-        </p:spPr>
-        <p:style>
-          <a:lnRef idx="1">
-            <a:schemeClr val="accent1"/>
-          </a:lnRef>
-          <a:fillRef idx="3">
-            <a:schemeClr val="accent1"/>
-          </a:fillRef>
-          <a:effectRef idx="2">
-            <a:schemeClr val="accent1"/>
-          </a:effectRef>
-          <a:fontRef idx="minor">
-            <a:schemeClr val="lt1"/>
-          </a:fontRef>
-        </p:style>
-        <p:txBody>
-          <a:bodyPr rtlCol="0" anchor="ctr"/>
-          <a:lstStyle/>
-          <a:p>
-            <a:pPr algn="ctr"/>
-          </a:p>
-        </p:txBody>
-      </p:sp>
-      <p:sp>
-        <p:nvSpPr>
-          <p:cNvPr id="6" name="Rectangle 5"/>
-          <p:cNvSpPr/>
-          <p:nvPr/>
-        </p:nvSpPr>
-        <p:spPr>
-          <a:xfrm>
-            <a:off x="457200" y="1261872"/>
-            <a:ext cx="128016" cy="1051560"/>
-          </a:xfrm>
-          <a:prstGeom prst="rect">
-            <a:avLst/>
-          </a:prstGeom>
-          <a:solidFill>
-            <a:srgbClr val="269CCB"/>
-          </a:solidFill>
-          <a:ln>
-            <a:noFill/>
-          </a:ln>
-        </p:spPr>
-        <p:style>
-          <a:lnRef idx="1">
-            <a:schemeClr val="accent1"/>
-          </a:lnRef>
-          <a:fillRef idx="3">
-            <a:schemeClr val="accent1"/>
-          </a:fillRef>
-          <a:effectRef idx="2">
-            <a:schemeClr val="accent1"/>
-          </a:effectRef>
-          <a:fontRef idx="minor">
-            <a:schemeClr val="lt1"/>
-          </a:fontRef>
-        </p:style>
-        <p:txBody>
-          <a:bodyPr rtlCol="0" anchor="ctr"/>
-          <a:lstStyle/>
-          <a:p>
-            <a:pPr algn="ctr"/>
-          </a:p>
-        </p:txBody>
-      </p:sp>
-      <p:sp>
-        <p:nvSpPr>
-          <p:cNvPr id="7" name="TextBox 6"/>
-          <p:cNvSpPr txBox="1"/>
-          <p:nvPr/>
-        </p:nvSpPr>
-        <p:spPr>
-          <a:xfrm>
-            <a:off x="777240" y="1399031"/>
-            <a:ext cx="10774375" cy="822959"/>
-          </a:xfrm>
-          <a:prstGeom prst="rect">
-            <a:avLst/>
-          </a:prstGeom>
-          <a:noFill/>
-        </p:spPr>
-        <p:txBody>
-          <a:bodyPr wrap="square">
-            <a:spAutoFit/>
-          </a:bodyPr>
-          <a:lstStyle/>
-          <a:p>
-            <a:r>
-              <a:rPr sz="1200" b="1" i="0">
-                <a:solidFill>
-                  <a:srgbClr val="269CCB"/>
-                </a:solidFill>
-                <a:latin typeface="Calibri"/>
-              </a:rPr>
-              <a:t>Info</a:t>
-            </a:r>
-          </a:p>
-          <a:p>
-            <a:pPr>
-              <a:spcBef>
-                <a:spcPts val="400"/>
-              </a:spcBef>
-            </a:pPr>
-            <a:r>
-              <a:rPr sz="1400" b="0" i="0">
-                <a:solidFill>
-                  <a:srgbClr val="333333"/>
-                </a:solidFill>
-                <a:latin typeface="Calibri"/>
-              </a:rPr>
-              <a:t>Entregable: Sección Rendimiento + guion de pitch + paquete casi-final</a:t>
-            </a:r>
-          </a:p>
-        </p:txBody>
-      </p:sp>
-      <p:sp>
-        <p:nvSpPr>
-          <p:cNvPr id="8" name="Rounded Rectangle 7"/>
-          <p:cNvSpPr/>
-          <p:nvPr/>
-        </p:nvSpPr>
-        <p:spPr>
-          <a:xfrm>
-            <a:off x="457200" y="2478024"/>
-            <a:ext cx="11277295" cy="1051560"/>
-          </a:xfrm>
-          <a:prstGeom prst="roundRect">
-            <a:avLst>
-              <a:gd name="adj" fmla="val 12000"/>
-            </a:avLst>
-          </a:prstGeom>
-          <a:solidFill>
-            <a:srgbClr val="FFF8E1"/>
-          </a:solidFill>
-          <a:ln>
-            <a:noFill/>
-          </a:ln>
-        </p:spPr>
-        <p:style>
-          <a:lnRef idx="1">
-            <a:schemeClr val="accent1"/>
-          </a:lnRef>
-          <a:fillRef idx="3">
-            <a:schemeClr val="accent1"/>
-          </a:fillRef>
-          <a:effectRef idx="2">
-            <a:schemeClr val="accent1"/>
-          </a:effectRef>
-          <a:fontRef idx="minor">
-            <a:schemeClr val="lt1"/>
-          </a:fontRef>
-        </p:style>
-        <p:txBody>
-          <a:bodyPr rtlCol="0" anchor="ctr"/>
-          <a:lstStyle/>
-          <a:p>
-            <a:pPr algn="ctr"/>
-          </a:p>
-        </p:txBody>
-      </p:sp>
-      <p:sp>
-        <p:nvSpPr>
-          <p:cNvPr id="9" name="Rectangle 8"/>
-          <p:cNvSpPr/>
-          <p:nvPr/>
-        </p:nvSpPr>
-        <p:spPr>
-          <a:xfrm>
-            <a:off x="457200" y="2478024"/>
-            <a:ext cx="128016" cy="1051560"/>
-          </a:xfrm>
-          <a:prstGeom prst="rect">
-            <a:avLst/>
-          </a:prstGeom>
-          <a:solidFill>
-            <a:srgbClr val="FFD000"/>
-          </a:solidFill>
-          <a:ln>
-            <a:noFill/>
-          </a:ln>
-        </p:spPr>
-        <p:style>
-          <a:lnRef idx="1">
-            <a:schemeClr val="accent1"/>
-          </a:lnRef>
-          <a:fillRef idx="3">
-            <a:schemeClr val="accent1"/>
-          </a:fillRef>
-          <a:effectRef idx="2">
-            <a:schemeClr val="accent1"/>
-          </a:effectRef>
-          <a:fontRef idx="minor">
-            <a:schemeClr val="lt1"/>
-          </a:fontRef>
-        </p:style>
-        <p:txBody>
-          <a:bodyPr rtlCol="0" anchor="ctr"/>
-          <a:lstStyle/>
-          <a:p>
-            <a:pPr algn="ctr"/>
-          </a:p>
-        </p:txBody>
-      </p:sp>
-      <p:sp>
-        <p:nvSpPr>
-          <p:cNvPr id="10" name="TextBox 9"/>
-          <p:cNvSpPr txBox="1"/>
-          <p:nvPr/>
-        </p:nvSpPr>
-        <p:spPr>
-          <a:xfrm>
-            <a:off x="777240" y="2615184"/>
-            <a:ext cx="10774375" cy="822959"/>
-          </a:xfrm>
-          <a:prstGeom prst="rect">
-            <a:avLst/>
-          </a:prstGeom>
-          <a:noFill/>
-        </p:spPr>
-        <p:txBody>
-          <a:bodyPr wrap="square">
-            <a:spAutoFit/>
-          </a:bodyPr>
-          <a:lstStyle/>
-          <a:p>
-            <a:r>
-              <a:rPr sz="1200" b="1" i="0">
-                <a:solidFill>
-                  <a:srgbClr val="FFD000"/>
-                </a:solidFill>
-                <a:latin typeface="Calibri"/>
-              </a:rPr>
-              <a:t>Aclaración</a:t>
-            </a:r>
-          </a:p>
-          <a:p>
-            <a:pPr>
-              <a:spcBef>
-                <a:spcPts val="400"/>
-              </a:spcBef>
-            </a:pPr>
-            <a:r>
-              <a:rPr sz="1400" b="0" i="0">
-                <a:solidFill>
-                  <a:srgbClr val="333333"/>
-                </a:solidFill>
-                <a:latin typeface="Calibri"/>
-              </a:rPr>
-              <a:t>Subir evidencias al paquete CloudLite (Drive/repo) y a la plataforma del curso (la plataforma del curso) en la fecha que indique el docente.</a:t>
-            </a:r>
-          </a:p>
-        </p:txBody>
-      </p:sp>
-      <p:sp>
-        <p:nvSpPr>
-          <p:cNvPr id="11" name="Rounded Rectangle 10"/>
-          <p:cNvSpPr/>
-          <p:nvPr/>
-        </p:nvSpPr>
-        <p:spPr>
-          <a:xfrm>
-            <a:off x="457200" y="3694176"/>
-            <a:ext cx="11277295" cy="1051560"/>
-          </a:xfrm>
-          <a:prstGeom prst="roundRect">
-            <a:avLst>
-              <a:gd name="adj" fmla="val 12000"/>
-            </a:avLst>
-          </a:prstGeom>
-          <a:solidFill>
-            <a:srgbClr val="FBE4E4"/>
-          </a:solidFill>
-          <a:ln>
-            <a:noFill/>
-          </a:ln>
-        </p:spPr>
-        <p:style>
-          <a:lnRef idx="1">
-            <a:schemeClr val="accent1"/>
-          </a:lnRef>
-          <a:fillRef idx="3">
-            <a:schemeClr val="accent1"/>
-          </a:fillRef>
-          <a:effectRef idx="2">
-            <a:schemeClr val="accent1"/>
-          </a:effectRef>
-          <a:fontRef idx="minor">
-            <a:schemeClr val="lt1"/>
-          </a:fontRef>
-        </p:style>
-        <p:txBody>
-          <a:bodyPr rtlCol="0" anchor="ctr"/>
-          <a:lstStyle/>
-          <a:p>
-            <a:pPr algn="ctr"/>
-          </a:p>
-        </p:txBody>
-      </p:sp>
-      <p:sp>
-        <p:nvSpPr>
-          <p:cNvPr id="12" name="Rectangle 11"/>
-          <p:cNvSpPr/>
-          <p:nvPr/>
-        </p:nvSpPr>
-        <p:spPr>
-          <a:xfrm>
-            <a:off x="457200" y="3694176"/>
-            <a:ext cx="128016" cy="1051560"/>
-          </a:xfrm>
-          <a:prstGeom prst="rect">
-            <a:avLst/>
-          </a:prstGeom>
-          <a:solidFill>
-            <a:srgbClr val="A02030"/>
-          </a:solidFill>
-          <a:ln>
-            <a:noFill/>
-          </a:ln>
-        </p:spPr>
-        <p:style>
-          <a:lnRef idx="1">
-            <a:schemeClr val="accent1"/>
-          </a:lnRef>
-          <a:fillRef idx="3">
-            <a:schemeClr val="accent1"/>
-          </a:fillRef>
-          <a:effectRef idx="2">
-            <a:schemeClr val="accent1"/>
-          </a:effectRef>
-          <a:fontRef idx="minor">
-            <a:schemeClr val="lt1"/>
-          </a:fontRef>
-        </p:style>
-        <p:txBody>
-          <a:bodyPr rtlCol="0" anchor="ctr"/>
-          <a:lstStyle/>
-          <a:p>
-            <a:pPr algn="ctr"/>
-          </a:p>
-        </p:txBody>
-      </p:sp>
-      <p:sp>
-        <p:nvSpPr>
-          <p:cNvPr id="13" name="TextBox 12"/>
-          <p:cNvSpPr txBox="1"/>
-          <p:nvPr/>
-        </p:nvSpPr>
-        <p:spPr>
-          <a:xfrm>
-            <a:off x="777240" y="3831336"/>
-            <a:ext cx="10774375" cy="822959"/>
-          </a:xfrm>
-          <a:prstGeom prst="rect">
-            <a:avLst/>
-          </a:prstGeom>
-          <a:noFill/>
-        </p:spPr>
-        <p:txBody>
-          <a:bodyPr wrap="square">
-            <a:spAutoFit/>
-          </a:bodyPr>
-          <a:lstStyle/>
-          <a:p>
-            <a:r>
-              <a:rPr sz="1200" b="1" i="0">
-                <a:solidFill>
-                  <a:srgbClr val="A02030"/>
-                </a:solidFill>
-                <a:latin typeface="Calibri"/>
-              </a:rPr>
-              <a:t>Atención</a:t>
-            </a:r>
-          </a:p>
-          <a:p>
-            <a:pPr>
-              <a:spcBef>
-                <a:spcPts val="400"/>
-              </a:spcBef>
-            </a:pPr>
-            <a:r>
-              <a:rPr sz="1400" b="0" i="0">
-                <a:solidFill>
-                  <a:srgbClr val="333333"/>
-                </a:solidFill>
-                <a:latin typeface="Calibri"/>
-              </a:rPr>
-              <a:t>Sin cloud de pago ni instalaciones obligatorias de hipervisores/Docker Desktop.</a:t>
-            </a:r>
-          </a:p>
-        </p:txBody>
-      </p:sp>
-      <p:sp>
-        <p:nvSpPr>
-          <p:cNvPr id="14" name="TextBox 13"/>
-          <p:cNvSpPr txBox="1"/>
-          <p:nvPr/>
-        </p:nvSpPr>
-        <p:spPr>
-          <a:xfrm>
-            <a:off x="11185855" y="6473952"/>
-            <a:ext cx="640080" cy="274320"/>
-          </a:xfrm>
-          <a:prstGeom prst="rect">
-            <a:avLst/>
-          </a:prstGeom>
-          <a:noFill/>
-        </p:spPr>
-        <p:txBody>
-          <a:bodyPr wrap="square">
-            <a:spAutoFit/>
-          </a:bodyPr>
-          <a:lstStyle/>
-          <a:p>
-            <a:pPr algn="r"/>
-            <a:r>
-              <a:rPr sz="1100" b="0" i="0">
-                <a:solidFill>
-                  <a:srgbClr val="666666"/>
-                </a:solidFill>
-                <a:latin typeface="Calibri"/>
-              </a:rPr>
-              <a:t>31</a:t>
-            </a:r>
-          </a:p>
-        </p:txBody>
-      </p:sp>
-    </p:spTree>
-  </p:cSld>
-  <p:clrMapOvr>
-    <a:masterClrMapping/>
-  </p:clrMapOvr>
-</p:sld>
-</file>
-
-<file path=ppt/slides/slide32.xml><?xml version="1.0" encoding="utf-8"?>
-<p:sld xmlns:a="http://schemas.openxmlformats.org/drawingml/2006/main" xmlns:p="http://schemas.openxmlformats.org/presentationml/2006/main" xmlns:r="http://schemas.openxmlformats.org/officeDocument/2006/relationships">
-  <p:cSld>
-    <p:bg>
-      <p:bgPr>
-        <a:solidFill>
-          <a:srgbClr val="FFFFFF"/>
-        </a:solidFill>
-        <a:effectLst/>
-      </p:bgPr>
-    </p:bg>
-    <p:spTree>
-      <p:nvGrpSpPr>
-        <p:cNvPr id="1" name=""/>
-        <p:cNvGrpSpPr/>
-        <p:nvPr/>
-      </p:nvGrpSpPr>
-      <p:grpSpPr/>
-      <p:sp>
-        <p:nvSpPr>
-          <p:cNvPr id="2" name="Rectangle 1"/>
-          <p:cNvSpPr/>
-          <p:nvPr/>
-        </p:nvSpPr>
-        <p:spPr>
-          <a:xfrm>
-            <a:off x="0" y="0"/>
-            <a:ext cx="12191695" cy="164592"/>
-          </a:xfrm>
-          <a:prstGeom prst="rect">
-            <a:avLst/>
-          </a:prstGeom>
-          <a:solidFill>
-            <a:srgbClr val="269CCB"/>
-          </a:solidFill>
-          <a:ln>
-            <a:noFill/>
-          </a:ln>
-        </p:spPr>
-        <p:style>
-          <a:lnRef idx="1">
-            <a:schemeClr val="accent1"/>
-          </a:lnRef>
-          <a:fillRef idx="3">
-            <a:schemeClr val="accent1"/>
-          </a:fillRef>
-          <a:effectRef idx="2">
-            <a:schemeClr val="accent1"/>
-          </a:effectRef>
-          <a:fontRef idx="minor">
-            <a:schemeClr val="lt1"/>
-          </a:fontRef>
-        </p:style>
-        <p:txBody>
-          <a:bodyPr rtlCol="0" anchor="ctr"/>
-          <a:lstStyle/>
-          <a:p>
-            <a:pPr algn="ctr"/>
-          </a:p>
-        </p:txBody>
-      </p:sp>
-      <p:pic>
-        <p:nvPicPr>
-          <p:cNvPr id="3" name="Picture 2" descr="logo_uniajc_color.png"/>
-          <p:cNvPicPr>
-            <a:picLocks noChangeAspect="1"/>
-          </p:cNvPicPr>
-          <p:nvPr/>
-        </p:nvPicPr>
-        <p:blipFill>
-          <a:blip r:embed="rId2"/>
-          <a:stretch>
-            <a:fillRect/>
-          </a:stretch>
-        </p:blipFill>
-        <p:spPr>
-          <a:xfrm>
-            <a:off x="10271455" y="5998464"/>
-            <a:ext cx="1463040" cy="643233"/>
-          </a:xfrm>
-          <a:prstGeom prst="rect">
-            <a:avLst/>
-          </a:prstGeom>
-        </p:spPr>
-      </p:pic>
-      <p:sp>
-        <p:nvSpPr>
-          <p:cNvPr id="4" name="TextBox 3"/>
-          <p:cNvSpPr txBox="1"/>
-          <p:nvPr/>
-        </p:nvSpPr>
-        <p:spPr>
-          <a:xfrm>
-            <a:off x="457200" y="1737360"/>
-            <a:ext cx="11277295" cy="1097280"/>
-          </a:xfrm>
-          <a:prstGeom prst="rect">
-            <a:avLst/>
-          </a:prstGeom>
-          <a:noFill/>
-        </p:spPr>
-        <p:txBody>
-          <a:bodyPr wrap="square" anchor="ctr"/>
-          <a:lstStyle/>
-          <a:p>
-            <a:pPr algn="ctr"/>
-            <a:r>
-              <a:rPr sz="3400" b="1" i="0">
-                <a:solidFill>
-                  <a:srgbClr val="095292"/>
-                </a:solidFill>
-                <a:latin typeface="Calibri"/>
-              </a:rPr>
-              <a:t>Clase 12 · PI en movimiento</a:t>
-            </a:r>
-          </a:p>
-        </p:txBody>
-      </p:sp>
-      <p:sp>
-        <p:nvSpPr>
-          <p:cNvPr id="5" name="TextBox 4"/>
-          <p:cNvSpPr txBox="1"/>
-          <p:nvPr/>
-        </p:nvSpPr>
-        <p:spPr>
-          <a:xfrm>
-            <a:off x="457200" y="3017520"/>
-            <a:ext cx="11277295" cy="1645920"/>
-          </a:xfrm>
-          <a:prstGeom prst="rect">
-            <a:avLst/>
-          </a:prstGeom>
-          <a:noFill/>
-        </p:spPr>
-        <p:txBody>
-          <a:bodyPr wrap="square">
-            <a:spAutoFit/>
-          </a:bodyPr>
-          <a:lstStyle/>
-          <a:p>
-            <a:pPr algn="ctr">
-              <a:spcAft>
-                <a:spcPts val="600"/>
-              </a:spcAft>
-            </a:pPr>
-            <a:r>
-              <a:rPr sz="1600" b="0" i="0">
-                <a:solidFill>
-                  <a:srgbClr val="333333"/>
-                </a:solidFill>
-                <a:latin typeface="Calibri"/>
-              </a:rPr>
-              <a:t>Escenario de rendimiento + ensayo 5–8 min de sustentación</a:t>
-            </a:r>
-          </a:p>
-          <a:p>
-            <a:pPr algn="ctr">
-              <a:spcAft>
-                <a:spcPts val="600"/>
-              </a:spcAft>
-            </a:pPr>
-            <a:r>
-              <a:rPr sz="1600" b="0" i="0">
-                <a:solidFill>
-                  <a:srgbClr val="333333"/>
-                </a:solidFill>
-                <a:latin typeface="Calibri"/>
-              </a:rPr>
-              <a:t>Evidencia: Sección Rendimiento + guion de pitch + paquete casi-final</a:t>
-            </a:r>
-          </a:p>
-          <a:p>
-            <a:pPr algn="ctr">
-              <a:spcAft>
-                <a:spcPts val="600"/>
-              </a:spcAft>
-            </a:pPr>
-            <a:r>
-              <a:rPr sz="1600" b="0" i="0">
-                <a:solidFill>
-                  <a:srgbClr val="333333"/>
-                </a:solidFill>
-                <a:latin typeface="Calibri"/>
-              </a:rPr>
-              <a:t>Siguiente paso = siguiente hito del PI CloudLite</a:t>
-            </a:r>
-          </a:p>
-        </p:txBody>
-      </p:sp>
-      <p:sp>
-        <p:nvSpPr>
-          <p:cNvPr id="6" name="TextBox 5"/>
-          <p:cNvSpPr txBox="1"/>
-          <p:nvPr/>
-        </p:nvSpPr>
-        <p:spPr>
-          <a:xfrm>
-            <a:off x="457200" y="4754880"/>
-            <a:ext cx="11277295" cy="640080"/>
-          </a:xfrm>
-          <a:prstGeom prst="rect">
-            <a:avLst/>
-          </a:prstGeom>
-          <a:noFill/>
-        </p:spPr>
-        <p:txBody>
-          <a:bodyPr wrap="square">
-            <a:spAutoFit/>
-          </a:bodyPr>
-          <a:lstStyle/>
-          <a:p>
-            <a:pPr algn="ctr"/>
-            <a:r>
-              <a:rPr sz="2000" b="1" i="0">
-                <a:solidFill>
-                  <a:srgbClr val="269CCB"/>
-                </a:solidFill>
-                <a:latin typeface="Calibri"/>
-              </a:rPr>
-              <a:t>Teoría al servicio del proyecto</a:t>
-            </a:r>
-          </a:p>
-        </p:txBody>
-      </p:sp>
-    </p:spTree>
-  </p:cSld>
-  <p:clrMapOvr>
-    <a:masterClrMapping/>
-  </p:clrMapOvr>
-</p:sld>
-</file>
-
 <file path=ppt/slides/slide4.xml><?xml version="1.0" encoding="utf-8"?>
 <p:sld xmlns:a="http://schemas.openxmlformats.org/drawingml/2006/main" xmlns:p="http://schemas.openxmlformats.org/presentationml/2006/main" xmlns:r="http://schemas.openxmlformats.org/officeDocument/2006/relationships">
   <p:cSld>
@@ -13543,7 +11005,7 @@
                 </a:solidFill>
                 <a:latin typeface="Calibri"/>
               </a:rPr>
-              <a:t>Paquete de entrega</a:t>
+              <a:t>Latencia, throughput y concurrencia: la identidad que las une (1/2)</a:t>
             </a:r>
           </a:p>
         </p:txBody>
@@ -13582,7 +11044,7 @@
                 </a:solidFill>
                 <a:latin typeface="Calibri"/>
               </a:rPr>
-              <a:t>–   Informe + diagramas + Dockerfile + YAML + capturas.</a:t>
+              <a:t>–   Rendimiento es la unica parte del curso donde el estudiante puede pasar de opinar a medir, y por eso conviene empezar por el vocabulario exacto.</a:t>
             </a:r>
           </a:p>
           <a:p>
@@ -13598,7 +11060,23 @@
                 </a:solidFill>
                 <a:latin typeface="Calibri"/>
               </a:rPr>
-              <a:t>–   Fecha/canal: coordinación del periodo.</a:t>
+              <a:t>–   La latencia, o tiempo de respuesta, es cuanto tarda UNA peticion desde que sale del cliente hasta que llega la respuesta completa; se mide en milisegundos y es lo que siente el usuario.</a:t>
+            </a:r>
+          </a:p>
+          <a:p>
+            <a:pPr>
+              <a:spcAft>
+                <a:spcPts val="800"/>
+              </a:spcAft>
+            </a:pPr>
+            <a:r>
+              <a:rPr sz="2000" b="0" i="0">
+                <a:solidFill>
+                  <a:srgbClr val="333333"/>
+                </a:solidFill>
+                <a:latin typeface="Calibri"/>
+              </a:rPr>
+              <a:t>–   El throughput, o caudal, es cuantas peticiones atiende el sistema por unidad de tiempo; se mide en peticiones por segundo, abreviado RPS, y es lo que importa para la capacidad.</a:t>
             </a:r>
           </a:p>
         </p:txBody>
@@ -13779,7 +11257,7 @@
                 </a:solidFill>
                 <a:latin typeface="Calibri"/>
               </a:rPr>
-              <a:t>Latencia, throughput y concurrencia: la identidad que las une (1/2)</a:t>
+              <a:t>Latencia, throughput y concurrencia: la identidad que las une (2/2)</a:t>
             </a:r>
           </a:p>
         </p:txBody>
@@ -13818,7 +11296,7 @@
                 </a:solidFill>
                 <a:latin typeface="Calibri"/>
               </a:rPr>
-              <a:t>–   Rendimiento es la unica parte del curso donde el estudiante puede pasar de opinar a medir, y por eso conviene empezar por el vocabulario exacto.</a:t>
+              <a:t>–   No se mueven juntas: un sistema puede atender 500 RPS con latencia terrible porque todo espera en cola, y otro puede tener latencia excelente con 3 RPS porque nadie lo usa.</a:t>
             </a:r>
           </a:p>
           <a:p>
@@ -13834,23 +11312,7 @@
                 </a:solidFill>
                 <a:latin typeface="Calibri"/>
               </a:rPr>
-              <a:t>–   La latencia, o tiempo de respuesta, es cuanto tarda UNA peticion desde que sale del cliente hasta que llega la respuesta completa; se mide en milisegundos y es lo que siente el usuario.</a:t>
-            </a:r>
-          </a:p>
-          <a:p>
-            <a:pPr>
-              <a:spcAft>
-                <a:spcPts val="800"/>
-              </a:spcAft>
-            </a:pPr>
-            <a:r>
-              <a:rPr sz="2000" b="0" i="0">
-                <a:solidFill>
-                  <a:srgbClr val="333333"/>
-                </a:solidFill>
-                <a:latin typeface="Calibri"/>
-              </a:rPr>
-              <a:t>–   El throughput, o caudal, es cuantas peticiones atiende el sistema por unidad de tiempo; se mide en peticiones por segundo, abreviado RPS, y es lo que importa para la capacidad.</a:t>
+              <a:t>–   Si CloudLite atiende 5 RPS con 300 milisegundos, hay en promedio 1.5 peticiones simultaneas dentro del sistema, y ese numero decide cuantos hilos, cuantas conexiones a base de datos y cuantas instancias se necesitan.</a:t>
             </a:r>
           </a:p>
         </p:txBody>
@@ -14031,7 +11493,7 @@
                 </a:solidFill>
                 <a:latin typeface="Calibri"/>
               </a:rPr>
-              <a:t>Latencia, throughput y concurrencia: la identidad que las une (2/2)</a:t>
+              <a:t>Por que el promedio miente y el percentil no (1/2)</a:t>
             </a:r>
           </a:p>
         </p:txBody>
@@ -14070,7 +11532,7 @@
                 </a:solidFill>
                 <a:latin typeface="Calibri"/>
               </a:rPr>
-              <a:t>–   No se mueven juntas: un sistema puede atender 500 RPS con latencia terrible porque todo espera en cola, y otro puede tener latencia excelente con 3 RPS porque nadie lo usa.</a:t>
+              <a:t>–   El corazon del tema es entender por que el promedio miente y el percentil no.</a:t>
             </a:r>
           </a:p>
           <a:p>
@@ -14086,7 +11548,39 @@
                 </a:solidFill>
                 <a:latin typeface="Calibri"/>
               </a:rPr>
-              <a:t>–   Si CloudLite atiende 5 RPS con 300 milisegundos, hay en promedio 1.5 peticiones simultaneas dentro del sistema, y ese numero decide cuantos hilos, cuantas conexiones a base de datos y cuantas instancias se necesitan.</a:t>
+              <a:t>–   Un percentil es el valor por debajo del cual cae un porcentaje dado de las observaciones ordenadas de menor a mayor: el p95 del tiempo de respuesta es el tiempo tal que el 95 por ciento de las peticiones respondieron en ese tiempo o menos, y el 5 por ciento restante tardo mas.</a:t>
+            </a:r>
+          </a:p>
+          <a:p>
+            <a:pPr>
+              <a:spcAft>
+                <a:spcPts val="800"/>
+              </a:spcAft>
+            </a:pPr>
+            <a:r>
+              <a:rPr sz="2000" b="0" i="0">
+                <a:solidFill>
+                  <a:srgbClr val="333333"/>
+                </a:solidFill>
+                <a:latin typeface="Calibri"/>
+              </a:rPr>
+              <a:t>–   El ejemplo numerico es obligatorio porque convence de inmediato.</a:t>
+            </a:r>
+          </a:p>
+          <a:p>
+            <a:pPr>
+              <a:spcAft>
+                <a:spcPts val="800"/>
+              </a:spcAft>
+            </a:pPr>
+            <a:r>
+              <a:rPr sz="2000" b="0" i="0">
+                <a:solidFill>
+                  <a:srgbClr val="333333"/>
+                </a:solidFill>
+                <a:latin typeface="Calibri"/>
+              </a:rPr>
+              <a:t>–   Suponga 100 peticiones a CloudLite: 95 responden en 120 milisegundos y 5 responden en 4000 porque cayeron en una consulta sin indice.</a:t>
             </a:r>
           </a:p>
         </p:txBody>
@@ -14267,7 +11761,7 @@
                 </a:solidFill>
                 <a:latin typeface="Calibri"/>
               </a:rPr>
-              <a:t>Por que el promedio miente y el percentil no (1/2)</a:t>
+              <a:t>Por que el promedio miente y el percentil no (2/2)</a:t>
             </a:r>
           </a:p>
         </p:txBody>
@@ -14306,7 +11800,7 @@
                 </a:solidFill>
                 <a:latin typeface="Calibri"/>
               </a:rPr>
-              <a:t>–   El corazon del tema es entender por que el promedio miente y el percentil no.</a:t>
+              <a:t>–   El promedio es 314 milisegundos, una cifra que suena aceptable y que no le paso a nadie: ninguna peticion real tardo 314 milisegundos.</a:t>
             </a:r>
           </a:p>
           <a:p>
@@ -14322,7 +11816,7 @@
                 </a:solidFill>
                 <a:latin typeface="Calibri"/>
               </a:rPr>
-              <a:t>–   Un percentil es el valor por debajo del cual cae un porcentaje dado de las observaciones ordenadas de menor a mayor: el p95 del tiempo de respuesta es el tiempo tal que el 95 por ciento de las peticiones respondieron en ese tiempo o menos, y el 5 por ciento restante tardo mas.</a:t>
+              <a:t>–   El p50, o mediana, es 120; el p99 es 4000.</a:t>
             </a:r>
           </a:p>
           <a:p>
@@ -14338,7 +11832,7 @@
                 </a:solidFill>
                 <a:latin typeface="Calibri"/>
               </a:rPr>
-              <a:t>–   El ejemplo numerico es obligatorio porque convence de inmediato.</a:t>
+              <a:t>–   Reportar el promedio esconde a cinco usuarios de cada cien esperando cuatro segundos; reportar p95 y p99 los hace visibles.</a:t>
             </a:r>
           </a:p>
           <a:p>
@@ -14354,7 +11848,7 @@
                 </a:solidFill>
                 <a:latin typeface="Calibri"/>
               </a:rPr>
-              <a:t>–   Suponga 100 peticiones a CloudLite: 95 responden en 120 milisegundos y 5 responden en 4000 porque cayeron en una consulta sin indice.</a:t>
+              <a:t>–   Un objetivo sin condicion de carga no significa nada: cualquier sistema es rapido sin usuarios.</a:t>
             </a:r>
           </a:p>
         </p:txBody>
@@ -14720,4 +12214,324 @@
   </a:objectDefaults>
   <a:extraClrSchemeLst/>
 </a:theme>
+</file>
+
+<file path=ppt/theme/theme2.xml><?xml version="1.0" encoding="utf-8"?>
+<a:theme xmlns:a="http://schemas.openxmlformats.org/drawingml/2006/main" name="Office Theme">
+  <a:themeElements>
+    <a:clrScheme name="Office">
+      <a:dk1>
+        <a:sysClr val="windowText" lastClr="000000"/>
+      </a:dk1>
+      <a:lt1>
+        <a:sysClr val="window" lastClr="FFFFFF"/>
+      </a:lt1>
+      <a:dk2>
+        <a:srgbClr val="1F497D"/>
+      </a:dk2>
+      <a:lt2>
+        <a:srgbClr val="EEECE1"/>
+      </a:lt2>
+      <a:accent1>
+        <a:srgbClr val="4F81BD"/>
+      </a:accent1>
+      <a:accent2>
+        <a:srgbClr val="C0504D"/>
+      </a:accent2>
+      <a:accent3>
+        <a:srgbClr val="9BBB59"/>
+      </a:accent3>
+      <a:accent4>
+        <a:srgbClr val="8064A2"/>
+      </a:accent4>
+      <a:accent5>
+        <a:srgbClr val="4BACC6"/>
+      </a:accent5>
+      <a:accent6>
+        <a:srgbClr val="F79646"/>
+      </a:accent6>
+      <a:hlink>
+        <a:srgbClr val="0000FF"/>
+      </a:hlink>
+      <a:folHlink>
+        <a:srgbClr val="800080"/>
+      </a:folHlink>
+    </a:clrScheme>
+    <a:fontScheme name="Office">
+      <a:majorFont>
+        <a:latin typeface="Calibri"/>
+        <a:ea typeface=""/>
+        <a:cs typeface=""/>
+        <a:font script="Jpan" typeface="ＭＳ Ｐゴシック"/>
+        <a:font script="Hang" typeface="맑은 고딕"/>
+        <a:font script="Hans" typeface="宋体"/>
+        <a:font script="Hant" typeface="新細明體"/>
+        <a:font script="Arab" typeface="Times New Roman"/>
+        <a:font script="Hebr" typeface="Times New Roman"/>
+        <a:font script="Thai" typeface="Angsana New"/>
+        <a:font script="Ethi" typeface="Nyala"/>
+        <a:font script="Beng" typeface="Vrinda"/>
+        <a:font script="Gujr" typeface="Shruti"/>
+        <a:font script="Khmr" typeface="MoolBoran"/>
+        <a:font script="Knda" typeface="Tunga"/>
+        <a:font script="Guru" typeface="Raavi"/>
+        <a:font script="Cans" typeface="Euphemia"/>
+        <a:font script="Cher" typeface="Plantagenet Cherokee"/>
+        <a:font script="Yiii" typeface="Microsoft Yi Baiti"/>
+        <a:font script="Tibt" typeface="Microsoft Himalaya"/>
+        <a:font script="Thaa" typeface="MV Boli"/>
+        <a:font script="Deva" typeface="Mangal"/>
+        <a:font script="Telu" typeface="Gautami"/>
+        <a:font script="Taml" typeface="Latha"/>
+        <a:font script="Syrc" typeface="Estrangelo Edessa"/>
+        <a:font script="Orya" typeface="Kalinga"/>
+        <a:font script="Mlym" typeface="Kartika"/>
+        <a:font script="Laoo" typeface="DokChampa"/>
+        <a:font script="Sinh" typeface="Iskoola Pota"/>
+        <a:font script="Mong" typeface="Mongolian Baiti"/>
+        <a:font script="Viet" typeface="Times New Roman"/>
+        <a:font script="Uigh" typeface="Microsoft Uighur"/>
+        <a:font script="Geor" typeface="Sylfaen"/>
+      </a:majorFont>
+      <a:minorFont>
+        <a:latin typeface="Calibri"/>
+        <a:ea typeface=""/>
+        <a:cs typeface=""/>
+        <a:font script="Jpan" typeface="ＭＳ Ｐゴシック"/>
+        <a:font script="Hang" typeface="맑은 고딕"/>
+        <a:font script="Hans" typeface="宋体"/>
+        <a:font script="Hant" typeface="新細明體"/>
+        <a:font script="Arab" typeface="Arial"/>
+        <a:font script="Hebr" typeface="Arial"/>
+        <a:font script="Thai" typeface="Cordia New"/>
+        <a:font script="Ethi" typeface="Nyala"/>
+        <a:font script="Beng" typeface="Vrinda"/>
+        <a:font script="Gujr" typeface="Shruti"/>
+        <a:font script="Khmr" typeface="DaunPenh"/>
+        <a:font script="Knda" typeface="Tunga"/>
+        <a:font script="Guru" typeface="Raavi"/>
+        <a:font script="Cans" typeface="Euphemia"/>
+        <a:font script="Cher" typeface="Plantagenet Cherokee"/>
+        <a:font script="Yiii" typeface="Microsoft Yi Baiti"/>
+        <a:font script="Tibt" typeface="Microsoft Himalaya"/>
+        <a:font script="Thaa" typeface="MV Boli"/>
+        <a:font script="Deva" typeface="Mangal"/>
+        <a:font script="Telu" typeface="Gautami"/>
+        <a:font script="Taml" typeface="Latha"/>
+        <a:font script="Syrc" typeface="Estrangelo Edessa"/>
+        <a:font script="Orya" typeface="Kalinga"/>
+        <a:font script="Mlym" typeface="Kartika"/>
+        <a:font script="Laoo" typeface="DokChampa"/>
+        <a:font script="Sinh" typeface="Iskoola Pota"/>
+        <a:font script="Mong" typeface="Mongolian Baiti"/>
+        <a:font script="Viet" typeface="Arial"/>
+        <a:font script="Uigh" typeface="Microsoft Uighur"/>
+        <a:font script="Geor" typeface="Sylfaen"/>
+      </a:minorFont>
+    </a:fontScheme>
+    <a:fmtScheme name="Office">
+      <a:fillStyleLst>
+        <a:solidFill>
+          <a:schemeClr val="phClr"/>
+        </a:solidFill>
+        <a:gradFill rotWithShape="1">
+          <a:gsLst>
+            <a:gs pos="0">
+              <a:schemeClr val="phClr">
+                <a:tint val="50000"/>
+                <a:satMod val="300000"/>
+              </a:schemeClr>
+            </a:gs>
+            <a:gs pos="35000">
+              <a:schemeClr val="phClr">
+                <a:tint val="37000"/>
+                <a:satMod val="300000"/>
+              </a:schemeClr>
+            </a:gs>
+            <a:gs pos="100000">
+              <a:schemeClr val="phClr">
+                <a:tint val="15000"/>
+                <a:satMod val="350000"/>
+              </a:schemeClr>
+            </a:gs>
+          </a:gsLst>
+          <a:lin ang="16200000" scaled="1"/>
+        </a:gradFill>
+        <a:gradFill rotWithShape="1">
+          <a:gsLst>
+            <a:gs pos="0">
+              <a:schemeClr val="phClr">
+                <a:tint val="100000"/>
+                <a:shade val="100000"/>
+                <a:satMod val="130000"/>
+              </a:schemeClr>
+            </a:gs>
+            <a:gs pos="100000">
+              <a:schemeClr val="phClr">
+                <a:tint val="50000"/>
+                <a:shade val="100000"/>
+                <a:satMod val="350000"/>
+              </a:schemeClr>
+            </a:gs>
+          </a:gsLst>
+          <a:lin ang="16200000" scaled="0"/>
+        </a:gradFill>
+      </a:fillStyleLst>
+      <a:lnStyleLst>
+        <a:ln w="9525" cap="flat" cmpd="sng" algn="ctr">
+          <a:solidFill>
+            <a:schemeClr val="phClr">
+              <a:shade val="95000"/>
+              <a:satMod val="105000"/>
+            </a:schemeClr>
+          </a:solidFill>
+          <a:prstDash val="solid"/>
+        </a:ln>
+        <a:ln w="25400" cap="flat" cmpd="sng" algn="ctr">
+          <a:solidFill>
+            <a:schemeClr val="phClr"/>
+          </a:solidFill>
+          <a:prstDash val="solid"/>
+        </a:ln>
+        <a:ln w="38100" cap="flat" cmpd="sng" algn="ctr">
+          <a:solidFill>
+            <a:schemeClr val="phClr"/>
+          </a:solidFill>
+          <a:prstDash val="solid"/>
+        </a:ln>
+      </a:lnStyleLst>
+      <a:effectStyleLst>
+        <a:effectStyle>
+          <a:effectLst>
+            <a:outerShdw blurRad="40000" dist="20000" dir="5400000" rotWithShape="0">
+              <a:srgbClr val="000000">
+                <a:alpha val="38000"/>
+              </a:srgbClr>
+            </a:outerShdw>
+          </a:effectLst>
+        </a:effectStyle>
+        <a:effectStyle>
+          <a:effectLst>
+            <a:outerShdw blurRad="40000" dist="23000" dir="5400000" rotWithShape="0">
+              <a:srgbClr val="000000">
+                <a:alpha val="35000"/>
+              </a:srgbClr>
+            </a:outerShdw>
+          </a:effectLst>
+        </a:effectStyle>
+        <a:effectStyle>
+          <a:effectLst>
+            <a:outerShdw blurRad="40000" dist="23000" dir="5400000" rotWithShape="0">
+              <a:srgbClr val="000000">
+                <a:alpha val="35000"/>
+              </a:srgbClr>
+            </a:outerShdw>
+          </a:effectLst>
+          <a:scene3d>
+            <a:camera prst="orthographicFront">
+              <a:rot lat="0" lon="0" rev="0"/>
+            </a:camera>
+            <a:lightRig rig="threePt" dir="t">
+              <a:rot lat="0" lon="0" rev="1200000"/>
+            </a:lightRig>
+          </a:scene3d>
+          <a:sp3d>
+            <a:bevelT w="63500" h="25400"/>
+          </a:sp3d>
+        </a:effectStyle>
+      </a:effectStyleLst>
+      <a:bgFillStyleLst>
+        <a:solidFill>
+          <a:schemeClr val="phClr"/>
+        </a:solidFill>
+        <a:gradFill rotWithShape="1">
+          <a:gsLst>
+            <a:gs pos="0">
+              <a:schemeClr val="phClr">
+                <a:tint val="40000"/>
+                <a:satMod val="350000"/>
+              </a:schemeClr>
+            </a:gs>
+            <a:gs pos="40000">
+              <a:schemeClr val="phClr">
+                <a:tint val="45000"/>
+                <a:shade val="99000"/>
+                <a:satMod val="350000"/>
+              </a:schemeClr>
+            </a:gs>
+            <a:gs pos="100000">
+              <a:schemeClr val="phClr">
+                <a:shade val="20000"/>
+                <a:satMod val="255000"/>
+              </a:schemeClr>
+            </a:gs>
+          </a:gsLst>
+          <a:path path="circle">
+            <a:fillToRect l="50000" t="-80000" r="50000" b="180000"/>
+          </a:path>
+        </a:gradFill>
+        <a:gradFill rotWithShape="1">
+          <a:gsLst>
+            <a:gs pos="0">
+              <a:schemeClr val="phClr">
+                <a:tint val="80000"/>
+                <a:satMod val="300000"/>
+              </a:schemeClr>
+            </a:gs>
+            <a:gs pos="100000">
+              <a:schemeClr val="phClr">
+                <a:shade val="30000"/>
+                <a:satMod val="200000"/>
+              </a:schemeClr>
+            </a:gs>
+          </a:gsLst>
+          <a:path path="circle">
+            <a:fillToRect l="50000" t="50000" r="50000" b="50000"/>
+          </a:path>
+        </a:gradFill>
+      </a:bgFillStyleLst>
+    </a:fmtScheme>
+  </a:themeElements>
+  <a:objectDefaults>
+    <a:spDef>
+      <a:spPr/>
+      <a:bodyPr/>
+      <a:lstStyle/>
+      <a:style>
+        <a:lnRef idx="1">
+          <a:schemeClr val="accent1"/>
+        </a:lnRef>
+        <a:fillRef idx="3">
+          <a:schemeClr val="accent1"/>
+        </a:fillRef>
+        <a:effectRef idx="2">
+          <a:schemeClr val="accent1"/>
+        </a:effectRef>
+        <a:fontRef idx="minor">
+          <a:schemeClr val="lt1"/>
+        </a:fontRef>
+      </a:style>
+    </a:spDef>
+    <a:lnDef>
+      <a:spPr/>
+      <a:bodyPr/>
+      <a:lstStyle/>
+      <a:style>
+        <a:lnRef idx="2">
+          <a:schemeClr val="accent1"/>
+        </a:lnRef>
+        <a:fillRef idx="0">
+          <a:schemeClr val="accent1"/>
+        </a:fillRef>
+        <a:effectRef idx="1">
+          <a:schemeClr val="accent1"/>
+        </a:effectRef>
+        <a:fontRef idx="minor">
+          <a:schemeClr val="tx1"/>
+        </a:fontRef>
+      </a:style>
+    </a:lnDef>
+  </a:objectDefaults>
+  <a:extraClrSchemeLst/>
+</a:theme>
 </file>
--- a/Arquitectura de Sistemas Computacionales/Clases/Clase 12 - Pruebas de rendimiento y preparacion final/Presentacion.pptx
+++ b/Arquitectura de Sistemas Computacionales/Clases/Clase 12 - Pruebas de rendimiento y preparacion final/Presentacion.pptx
@@ -31,6 +31,7 @@
     <p:sldId id="279" r:id="rId31"/>
     <p:sldId id="280" r:id="rId32"/>
     <p:sldId id="281" r:id="rId33"/>
+    <p:sldId id="282" r:id="rId34"/>
   </p:sldIdLst>
   <p:sldSz cx="12191695" cy="6858000" type="screen4x3"/>
   <p:notesSz cx="6858000" cy="9144000"/>
@@ -603,7 +604,7 @@
           <a:lstStyle/>
           <a:p>
             <a:r>
-              <a:t>Por eso la industria escribe sus objetivos en percentiles, y por eso el entregable de hoy exige un objetivo con la forma "p95 del endpoint de listado menor a 300 milisegundos con 5 RPS", que tiene metrica, umbral y condicion de carga.</a:t>
+              <a:t>Por eso la industria escribe sus objetivos en percentiles, y por eso un objetivo bien escrito tiene la forma "p95 del endpoint de listado menor a 300 milisegundos con 5 RPS", que tiene metrica, umbral y condicion de carga.</a:t>
             </a:r>
           </a:p>
         </p:txBody>
@@ -5071,7 +5072,7 @@
                 </a:solidFill>
                 <a:latin typeface="Calibri"/>
               </a:rPr>
-              <a:t>–   El segundo componente del entregable es el escenario de carga, y el estudiante casi siempre lo inventa exagerado.</a:t>
+              <a:t>–   El segundo componente es el escenario de carga, y el estudiante casi siempre lo inventa exagerado.</a:t>
             </a:r>
           </a:p>
           <a:p>
@@ -9885,6 +9886,905 @@
 </file>
 
 <file path=ppt/slides/slide26.xml><?xml version="1.0" encoding="utf-8"?>
+<p:sld xmlns:a="http://schemas.openxmlformats.org/drawingml/2006/main" xmlns:p="http://schemas.openxmlformats.org/presentationml/2006/main" xmlns:r="http://schemas.openxmlformats.org/officeDocument/2006/relationships">
+  <p:cSld>
+    <p:bg>
+      <p:bgPr>
+        <a:solidFill>
+          <a:srgbClr val="FFFFFF"/>
+        </a:solidFill>
+        <a:effectLst/>
+      </p:bgPr>
+    </p:bg>
+    <p:spTree>
+      <p:nvGrpSpPr>
+        <p:cNvPr id="1" name=""/>
+        <p:cNvGrpSpPr/>
+        <p:nvPr/>
+      </p:nvGrpSpPr>
+      <p:grpSpPr/>
+      <p:sp>
+        <p:nvSpPr>
+          <p:cNvPr id="2" name="Rectangle 1"/>
+          <p:cNvSpPr/>
+          <p:nvPr/>
+        </p:nvSpPr>
+        <p:spPr>
+          <a:xfrm>
+            <a:off x="0" y="0"/>
+            <a:ext cx="12191695" cy="1170432"/>
+          </a:xfrm>
+          <a:prstGeom prst="rect">
+            <a:avLst/>
+          </a:prstGeom>
+          <a:solidFill>
+            <a:srgbClr val="095292"/>
+          </a:solidFill>
+          <a:ln>
+            <a:noFill/>
+          </a:ln>
+        </p:spPr>
+        <p:style>
+          <a:lnRef idx="1">
+            <a:schemeClr val="accent1"/>
+          </a:lnRef>
+          <a:fillRef idx="3">
+            <a:schemeClr val="accent1"/>
+          </a:fillRef>
+          <a:effectRef idx="2">
+            <a:schemeClr val="accent1"/>
+          </a:effectRef>
+          <a:fontRef idx="minor">
+            <a:schemeClr val="lt1"/>
+          </a:fontRef>
+        </p:style>
+        <p:txBody>
+          <a:bodyPr rtlCol="0" anchor="ctr"/>
+          <a:lstStyle/>
+          <a:p>
+            <a:pPr algn="ctr"/>
+          </a:p>
+        </p:txBody>
+      </p:sp>
+      <p:sp>
+        <p:nvSpPr>
+          <p:cNvPr id="3" name="Rectangle 2"/>
+          <p:cNvSpPr/>
+          <p:nvPr/>
+        </p:nvSpPr>
+        <p:spPr>
+          <a:xfrm>
+            <a:off x="0" y="1170432"/>
+            <a:ext cx="12191695" cy="41148"/>
+          </a:xfrm>
+          <a:prstGeom prst="rect">
+            <a:avLst/>
+          </a:prstGeom>
+          <a:solidFill>
+            <a:srgbClr val="FFD000"/>
+          </a:solidFill>
+          <a:ln>
+            <a:noFill/>
+          </a:ln>
+        </p:spPr>
+        <p:style>
+          <a:lnRef idx="1">
+            <a:schemeClr val="accent1"/>
+          </a:lnRef>
+          <a:fillRef idx="3">
+            <a:schemeClr val="accent1"/>
+          </a:fillRef>
+          <a:effectRef idx="2">
+            <a:schemeClr val="accent1"/>
+          </a:effectRef>
+          <a:fontRef idx="minor">
+            <a:schemeClr val="lt1"/>
+          </a:fontRef>
+        </p:style>
+        <p:txBody>
+          <a:bodyPr rtlCol="0" anchor="ctr"/>
+          <a:lstStyle/>
+          <a:p>
+            <a:pPr algn="ctr"/>
+          </a:p>
+        </p:txBody>
+      </p:sp>
+      <p:sp>
+        <p:nvSpPr>
+          <p:cNvPr id="4" name="TextBox 3"/>
+          <p:cNvSpPr txBox="1"/>
+          <p:nvPr/>
+        </p:nvSpPr>
+        <p:spPr>
+          <a:xfrm>
+            <a:off x="457200" y="164592"/>
+            <a:ext cx="11277295" cy="384048"/>
+          </a:xfrm>
+          <a:prstGeom prst="rect">
+            <a:avLst/>
+          </a:prstGeom>
+          <a:noFill/>
+        </p:spPr>
+        <p:txBody>
+          <a:bodyPr wrap="square">
+            <a:spAutoFit/>
+          </a:bodyPr>
+          <a:lstStyle/>
+          <a:p>
+            <a:r>
+              <a:rPr sz="2600" b="1" i="0">
+                <a:solidFill>
+                  <a:srgbClr val="FFFFFF"/>
+                </a:solidFill>
+                <a:latin typeface="Calibri"/>
+              </a:rPr>
+              <a:t>Del boceto al código Mermaid</a:t>
+            </a:r>
+          </a:p>
+        </p:txBody>
+      </p:sp>
+      <p:sp>
+        <p:nvSpPr>
+          <p:cNvPr id="5" name="TextBox 4"/>
+          <p:cNvSpPr txBox="1"/>
+          <p:nvPr/>
+        </p:nvSpPr>
+        <p:spPr>
+          <a:xfrm>
+            <a:off x="457200" y="566928"/>
+            <a:ext cx="11277295" cy="411480"/>
+          </a:xfrm>
+          <a:prstGeom prst="rect">
+            <a:avLst/>
+          </a:prstGeom>
+          <a:noFill/>
+        </p:spPr>
+        <p:txBody>
+          <a:bodyPr wrap="square">
+            <a:spAutoFit/>
+          </a:bodyPr>
+          <a:lstStyle/>
+          <a:p>
+            <a:r>
+              <a:rPr sz="1400" b="0" i="0">
+                <a:solidFill>
+                  <a:srgbClr val="B8D8EE"/>
+                </a:solidFill>
+                <a:latin typeface="Calibri"/>
+              </a:rPr>
+              <a:t>El diagrama se escribe como código: se versiona, se compara y se corrige</a:t>
+            </a:r>
+          </a:p>
+        </p:txBody>
+      </p:sp>
+      <p:sp>
+        <p:nvSpPr>
+          <p:cNvPr id="6" name="Rounded Rectangle 5"/>
+          <p:cNvSpPr/>
+          <p:nvPr/>
+        </p:nvSpPr>
+        <p:spPr>
+          <a:xfrm>
+            <a:off x="457200" y="1659636"/>
+            <a:ext cx="11277295" cy="1051560"/>
+          </a:xfrm>
+          <a:prstGeom prst="roundRect">
+            <a:avLst>
+              <a:gd name="adj" fmla="val 12000"/>
+            </a:avLst>
+          </a:prstGeom>
+          <a:solidFill>
+            <a:srgbClr val="F2F2F2"/>
+          </a:solidFill>
+          <a:ln>
+            <a:noFill/>
+          </a:ln>
+        </p:spPr>
+        <p:style>
+          <a:lnRef idx="1">
+            <a:schemeClr val="accent1"/>
+          </a:lnRef>
+          <a:fillRef idx="3">
+            <a:schemeClr val="accent1"/>
+          </a:fillRef>
+          <a:effectRef idx="2">
+            <a:schemeClr val="accent1"/>
+          </a:effectRef>
+          <a:fontRef idx="minor">
+            <a:schemeClr val="lt1"/>
+          </a:fontRef>
+        </p:style>
+        <p:txBody>
+          <a:bodyPr rtlCol="0" anchor="ctr"/>
+          <a:lstStyle/>
+          <a:p>
+            <a:pPr algn="ctr"/>
+          </a:p>
+        </p:txBody>
+      </p:sp>
+      <p:sp>
+        <p:nvSpPr>
+          <p:cNvPr id="7" name="Rounded Rectangle 6"/>
+          <p:cNvSpPr/>
+          <p:nvPr/>
+        </p:nvSpPr>
+        <p:spPr>
+          <a:xfrm>
+            <a:off x="594360" y="1965960"/>
+            <a:ext cx="438912" cy="438912"/>
+          </a:xfrm>
+          <a:prstGeom prst="roundRect">
+            <a:avLst>
+              <a:gd name="adj" fmla="val 12000"/>
+            </a:avLst>
+          </a:prstGeom>
+          <a:solidFill>
+            <a:srgbClr val="095292"/>
+          </a:solidFill>
+          <a:ln>
+            <a:noFill/>
+          </a:ln>
+        </p:spPr>
+        <p:style>
+          <a:lnRef idx="1">
+            <a:schemeClr val="accent1"/>
+          </a:lnRef>
+          <a:fillRef idx="3">
+            <a:schemeClr val="accent1"/>
+          </a:fillRef>
+          <a:effectRef idx="2">
+            <a:schemeClr val="accent1"/>
+          </a:effectRef>
+          <a:fontRef idx="minor">
+            <a:schemeClr val="lt1"/>
+          </a:fontRef>
+        </p:style>
+        <p:txBody>
+          <a:bodyPr rtlCol="0" anchor="ctr"/>
+          <a:lstStyle/>
+          <a:p>
+            <a:pPr algn="ctr"/>
+          </a:p>
+        </p:txBody>
+      </p:sp>
+      <p:sp>
+        <p:nvSpPr>
+          <p:cNvPr id="8" name="TextBox 7"/>
+          <p:cNvSpPr txBox="1"/>
+          <p:nvPr/>
+        </p:nvSpPr>
+        <p:spPr>
+          <a:xfrm>
+            <a:off x="594360" y="1965960"/>
+            <a:ext cx="438912" cy="438912"/>
+          </a:xfrm>
+          <a:prstGeom prst="rect">
+            <a:avLst/>
+          </a:prstGeom>
+          <a:noFill/>
+        </p:spPr>
+        <p:txBody>
+          <a:bodyPr wrap="square" anchor="ctr"/>
+          <a:lstStyle/>
+          <a:p>
+            <a:pPr algn="ctr"/>
+            <a:r>
+              <a:rPr sz="1600" b="1" i="0">
+                <a:solidFill>
+                  <a:srgbClr val="FFFFFF"/>
+                </a:solidFill>
+                <a:latin typeface="Calibri"/>
+              </a:rPr>
+              <a:t>1</a:t>
+            </a:r>
+          </a:p>
+        </p:txBody>
+      </p:sp>
+      <p:sp>
+        <p:nvSpPr>
+          <p:cNvPr id="9" name="TextBox 8"/>
+          <p:cNvSpPr txBox="1"/>
+          <p:nvPr/>
+        </p:nvSpPr>
+        <p:spPr>
+          <a:xfrm>
+            <a:off x="1188720" y="1751076"/>
+            <a:ext cx="10271455" cy="886968"/>
+          </a:xfrm>
+          <a:prstGeom prst="rect">
+            <a:avLst/>
+          </a:prstGeom>
+          <a:noFill/>
+        </p:spPr>
+        <p:txBody>
+          <a:bodyPr wrap="square" anchor="ctr"/>
+          <a:lstStyle/>
+          <a:p>
+            <a:r>
+              <a:rPr sz="1500" b="1" i="0">
+                <a:solidFill>
+                  <a:srgbClr val="095292"/>
+                </a:solidFill>
+                <a:latin typeface="Calibri"/>
+              </a:rPr>
+              <a:t>Diseña visual</a:t>
+            </a:r>
+          </a:p>
+          <a:p>
+            <a:pPr>
+              <a:spcBef>
+                <a:spcPts val="200"/>
+              </a:spcBef>
+            </a:pPr>
+            <a:r>
+              <a:rPr sz="1300" b="0" i="0">
+                <a:solidFill>
+                  <a:srgbClr val="333333"/>
+                </a:solidFill>
+                <a:latin typeface="Calibri"/>
+              </a:rPr>
+              <a:t>Dibuja el diagrama como quieras en Excalidraw o draw.io: es más rápido arrastrar cajas que escribir código, y ahí es donde se piensa el modelo.</a:t>
+            </a:r>
+          </a:p>
+        </p:txBody>
+      </p:sp>
+      <p:sp>
+        <p:nvSpPr>
+          <p:cNvPr id="10" name="Rounded Rectangle 9"/>
+          <p:cNvSpPr/>
+          <p:nvPr/>
+        </p:nvSpPr>
+        <p:spPr>
+          <a:xfrm>
+            <a:off x="457200" y="2802636"/>
+            <a:ext cx="11277295" cy="1051560"/>
+          </a:xfrm>
+          <a:prstGeom prst="roundRect">
+            <a:avLst>
+              <a:gd name="adj" fmla="val 12000"/>
+            </a:avLst>
+          </a:prstGeom>
+          <a:solidFill>
+            <a:srgbClr val="E8F4FA"/>
+          </a:solidFill>
+          <a:ln>
+            <a:noFill/>
+          </a:ln>
+        </p:spPr>
+        <p:style>
+          <a:lnRef idx="1">
+            <a:schemeClr val="accent1"/>
+          </a:lnRef>
+          <a:fillRef idx="3">
+            <a:schemeClr val="accent1"/>
+          </a:fillRef>
+          <a:effectRef idx="2">
+            <a:schemeClr val="accent1"/>
+          </a:effectRef>
+          <a:fontRef idx="minor">
+            <a:schemeClr val="lt1"/>
+          </a:fontRef>
+        </p:style>
+        <p:txBody>
+          <a:bodyPr rtlCol="0" anchor="ctr"/>
+          <a:lstStyle/>
+          <a:p>
+            <a:pPr algn="ctr"/>
+          </a:p>
+        </p:txBody>
+      </p:sp>
+      <p:sp>
+        <p:nvSpPr>
+          <p:cNvPr id="11" name="Rounded Rectangle 10"/>
+          <p:cNvSpPr/>
+          <p:nvPr/>
+        </p:nvSpPr>
+        <p:spPr>
+          <a:xfrm>
+            <a:off x="594360" y="3108960"/>
+            <a:ext cx="438912" cy="438912"/>
+          </a:xfrm>
+          <a:prstGeom prst="roundRect">
+            <a:avLst>
+              <a:gd name="adj" fmla="val 12000"/>
+            </a:avLst>
+          </a:prstGeom>
+          <a:solidFill>
+            <a:srgbClr val="095292"/>
+          </a:solidFill>
+          <a:ln>
+            <a:noFill/>
+          </a:ln>
+        </p:spPr>
+        <p:style>
+          <a:lnRef idx="1">
+            <a:schemeClr val="accent1"/>
+          </a:lnRef>
+          <a:fillRef idx="3">
+            <a:schemeClr val="accent1"/>
+          </a:fillRef>
+          <a:effectRef idx="2">
+            <a:schemeClr val="accent1"/>
+          </a:effectRef>
+          <a:fontRef idx="minor">
+            <a:schemeClr val="lt1"/>
+          </a:fontRef>
+        </p:style>
+        <p:txBody>
+          <a:bodyPr rtlCol="0" anchor="ctr"/>
+          <a:lstStyle/>
+          <a:p>
+            <a:pPr algn="ctr"/>
+          </a:p>
+        </p:txBody>
+      </p:sp>
+      <p:sp>
+        <p:nvSpPr>
+          <p:cNvPr id="12" name="TextBox 11"/>
+          <p:cNvSpPr txBox="1"/>
+          <p:nvPr/>
+        </p:nvSpPr>
+        <p:spPr>
+          <a:xfrm>
+            <a:off x="594360" y="3108960"/>
+            <a:ext cx="438912" cy="438912"/>
+          </a:xfrm>
+          <a:prstGeom prst="rect">
+            <a:avLst/>
+          </a:prstGeom>
+          <a:noFill/>
+        </p:spPr>
+        <p:txBody>
+          <a:bodyPr wrap="square" anchor="ctr"/>
+          <a:lstStyle/>
+          <a:p>
+            <a:pPr algn="ctr"/>
+            <a:r>
+              <a:rPr sz="1600" b="1" i="0">
+                <a:solidFill>
+                  <a:srgbClr val="FFFFFF"/>
+                </a:solidFill>
+                <a:latin typeface="Calibri"/>
+              </a:rPr>
+              <a:t>2</a:t>
+            </a:r>
+          </a:p>
+        </p:txBody>
+      </p:sp>
+      <p:sp>
+        <p:nvSpPr>
+          <p:cNvPr id="13" name="TextBox 12"/>
+          <p:cNvSpPr txBox="1"/>
+          <p:nvPr/>
+        </p:nvSpPr>
+        <p:spPr>
+          <a:xfrm>
+            <a:off x="1188720" y="2894076"/>
+            <a:ext cx="10271455" cy="886968"/>
+          </a:xfrm>
+          <a:prstGeom prst="rect">
+            <a:avLst/>
+          </a:prstGeom>
+          <a:noFill/>
+        </p:spPr>
+        <p:txBody>
+          <a:bodyPr wrap="square" anchor="ctr"/>
+          <a:lstStyle/>
+          <a:p>
+            <a:r>
+              <a:rPr sz="1500" b="1" i="0">
+                <a:solidFill>
+                  <a:srgbClr val="095292"/>
+                </a:solidFill>
+                <a:latin typeface="Calibri"/>
+              </a:rPr>
+              <a:t>Traduce con IA</a:t>
+            </a:r>
+          </a:p>
+          <a:p>
+            <a:pPr>
+              <a:spcBef>
+                <a:spcPts val="200"/>
+              </a:spcBef>
+            </a:pPr>
+            <a:r>
+              <a:rPr sz="1300" b="0" i="0">
+                <a:solidFill>
+                  <a:srgbClr val="333333"/>
+                </a:solidFill>
+                <a:latin typeface="Calibri"/>
+              </a:rPr>
+              <a:t>Describe tu boceto a una IA y pídele el código Mermaid usando sequenceDiagram. Revisa el resultado: la IA acierta la sintaxis, no tu modelo.</a:t>
+            </a:r>
+          </a:p>
+        </p:txBody>
+      </p:sp>
+      <p:sp>
+        <p:nvSpPr>
+          <p:cNvPr id="14" name="Rounded Rectangle 13"/>
+          <p:cNvSpPr/>
+          <p:nvPr/>
+        </p:nvSpPr>
+        <p:spPr>
+          <a:xfrm>
+            <a:off x="457200" y="3945636"/>
+            <a:ext cx="11277295" cy="1051560"/>
+          </a:xfrm>
+          <a:prstGeom prst="roundRect">
+            <a:avLst>
+              <a:gd name="adj" fmla="val 12000"/>
+            </a:avLst>
+          </a:prstGeom>
+          <a:solidFill>
+            <a:srgbClr val="F2F2F2"/>
+          </a:solidFill>
+          <a:ln>
+            <a:noFill/>
+          </a:ln>
+        </p:spPr>
+        <p:style>
+          <a:lnRef idx="1">
+            <a:schemeClr val="accent1"/>
+          </a:lnRef>
+          <a:fillRef idx="3">
+            <a:schemeClr val="accent1"/>
+          </a:fillRef>
+          <a:effectRef idx="2">
+            <a:schemeClr val="accent1"/>
+          </a:effectRef>
+          <a:fontRef idx="minor">
+            <a:schemeClr val="lt1"/>
+          </a:fontRef>
+        </p:style>
+        <p:txBody>
+          <a:bodyPr rtlCol="0" anchor="ctr"/>
+          <a:lstStyle/>
+          <a:p>
+            <a:pPr algn="ctr"/>
+          </a:p>
+        </p:txBody>
+      </p:sp>
+      <p:sp>
+        <p:nvSpPr>
+          <p:cNvPr id="15" name="Rounded Rectangle 14"/>
+          <p:cNvSpPr/>
+          <p:nvPr/>
+        </p:nvSpPr>
+        <p:spPr>
+          <a:xfrm>
+            <a:off x="594360" y="4251960"/>
+            <a:ext cx="438912" cy="438912"/>
+          </a:xfrm>
+          <a:prstGeom prst="roundRect">
+            <a:avLst>
+              <a:gd name="adj" fmla="val 12000"/>
+            </a:avLst>
+          </a:prstGeom>
+          <a:solidFill>
+            <a:srgbClr val="095292"/>
+          </a:solidFill>
+          <a:ln>
+            <a:noFill/>
+          </a:ln>
+        </p:spPr>
+        <p:style>
+          <a:lnRef idx="1">
+            <a:schemeClr val="accent1"/>
+          </a:lnRef>
+          <a:fillRef idx="3">
+            <a:schemeClr val="accent1"/>
+          </a:fillRef>
+          <a:effectRef idx="2">
+            <a:schemeClr val="accent1"/>
+          </a:effectRef>
+          <a:fontRef idx="minor">
+            <a:schemeClr val="lt1"/>
+          </a:fontRef>
+        </p:style>
+        <p:txBody>
+          <a:bodyPr rtlCol="0" anchor="ctr"/>
+          <a:lstStyle/>
+          <a:p>
+            <a:pPr algn="ctr"/>
+          </a:p>
+        </p:txBody>
+      </p:sp>
+      <p:sp>
+        <p:nvSpPr>
+          <p:cNvPr id="16" name="TextBox 15"/>
+          <p:cNvSpPr txBox="1"/>
+          <p:nvPr/>
+        </p:nvSpPr>
+        <p:spPr>
+          <a:xfrm>
+            <a:off x="594360" y="4251960"/>
+            <a:ext cx="438912" cy="438912"/>
+          </a:xfrm>
+          <a:prstGeom prst="rect">
+            <a:avLst/>
+          </a:prstGeom>
+          <a:noFill/>
+        </p:spPr>
+        <p:txBody>
+          <a:bodyPr wrap="square" anchor="ctr"/>
+          <a:lstStyle/>
+          <a:p>
+            <a:pPr algn="ctr"/>
+            <a:r>
+              <a:rPr sz="1600" b="1" i="0">
+                <a:solidFill>
+                  <a:srgbClr val="FFFFFF"/>
+                </a:solidFill>
+                <a:latin typeface="Calibri"/>
+              </a:rPr>
+              <a:t>3</a:t>
+            </a:r>
+          </a:p>
+        </p:txBody>
+      </p:sp>
+      <p:sp>
+        <p:nvSpPr>
+          <p:cNvPr id="17" name="TextBox 16"/>
+          <p:cNvSpPr txBox="1"/>
+          <p:nvPr/>
+        </p:nvSpPr>
+        <p:spPr>
+          <a:xfrm>
+            <a:off x="1188720" y="4037076"/>
+            <a:ext cx="10271455" cy="886968"/>
+          </a:xfrm>
+          <a:prstGeom prst="rect">
+            <a:avLst/>
+          </a:prstGeom>
+          <a:noFill/>
+        </p:spPr>
+        <p:txBody>
+          <a:bodyPr wrap="square" anchor="ctr"/>
+          <a:lstStyle/>
+          <a:p>
+            <a:r>
+              <a:rPr sz="1500" b="1" i="0">
+                <a:solidFill>
+                  <a:srgbClr val="095292"/>
+                </a:solidFill>
+                <a:latin typeface="Calibri"/>
+              </a:rPr>
+              <a:t>Renderiza en un visor</a:t>
+            </a:r>
+          </a:p>
+          <a:p>
+            <a:pPr>
+              <a:spcBef>
+                <a:spcPts val="200"/>
+              </a:spcBef>
+            </a:pPr>
+            <a:r>
+              <a:rPr sz="1300" b="0" i="0">
+                <a:solidFill>
+                  <a:srgbClr val="333333"/>
+                </a:solidFill>
+                <a:latin typeface="Calibri"/>
+              </a:rPr>
+              <a:t>Pega el código en un visor Mermaid (mermaid.live o la vista previa de tu editor) y míralo dibujado. Si no renderiza, corrige ahí: un end faltante o un rótulo sin comillas.</a:t>
+            </a:r>
+          </a:p>
+        </p:txBody>
+      </p:sp>
+      <p:sp>
+        <p:nvSpPr>
+          <p:cNvPr id="18" name="Rounded Rectangle 17"/>
+          <p:cNvSpPr/>
+          <p:nvPr/>
+        </p:nvSpPr>
+        <p:spPr>
+          <a:xfrm>
+            <a:off x="457200" y="5088636"/>
+            <a:ext cx="11277295" cy="1051560"/>
+          </a:xfrm>
+          <a:prstGeom prst="roundRect">
+            <a:avLst>
+              <a:gd name="adj" fmla="val 12000"/>
+            </a:avLst>
+          </a:prstGeom>
+          <a:solidFill>
+            <a:srgbClr val="E8F4FA"/>
+          </a:solidFill>
+          <a:ln>
+            <a:noFill/>
+          </a:ln>
+        </p:spPr>
+        <p:style>
+          <a:lnRef idx="1">
+            <a:schemeClr val="accent1"/>
+          </a:lnRef>
+          <a:fillRef idx="3">
+            <a:schemeClr val="accent1"/>
+          </a:fillRef>
+          <a:effectRef idx="2">
+            <a:schemeClr val="accent1"/>
+          </a:effectRef>
+          <a:fontRef idx="minor">
+            <a:schemeClr val="lt1"/>
+          </a:fontRef>
+        </p:style>
+        <p:txBody>
+          <a:bodyPr rtlCol="0" anchor="ctr"/>
+          <a:lstStyle/>
+          <a:p>
+            <a:pPr algn="ctr"/>
+          </a:p>
+        </p:txBody>
+      </p:sp>
+      <p:sp>
+        <p:nvSpPr>
+          <p:cNvPr id="19" name="Rounded Rectangle 18"/>
+          <p:cNvSpPr/>
+          <p:nvPr/>
+        </p:nvSpPr>
+        <p:spPr>
+          <a:xfrm>
+            <a:off x="594360" y="5394960"/>
+            <a:ext cx="438912" cy="438912"/>
+          </a:xfrm>
+          <a:prstGeom prst="roundRect">
+            <a:avLst>
+              <a:gd name="adj" fmla="val 12000"/>
+            </a:avLst>
+          </a:prstGeom>
+          <a:solidFill>
+            <a:srgbClr val="095292"/>
+          </a:solidFill>
+          <a:ln>
+            <a:noFill/>
+          </a:ln>
+        </p:spPr>
+        <p:style>
+          <a:lnRef idx="1">
+            <a:schemeClr val="accent1"/>
+          </a:lnRef>
+          <a:fillRef idx="3">
+            <a:schemeClr val="accent1"/>
+          </a:fillRef>
+          <a:effectRef idx="2">
+            <a:schemeClr val="accent1"/>
+          </a:effectRef>
+          <a:fontRef idx="minor">
+            <a:schemeClr val="lt1"/>
+          </a:fontRef>
+        </p:style>
+        <p:txBody>
+          <a:bodyPr rtlCol="0" anchor="ctr"/>
+          <a:lstStyle/>
+          <a:p>
+            <a:pPr algn="ctr"/>
+          </a:p>
+        </p:txBody>
+      </p:sp>
+      <p:sp>
+        <p:nvSpPr>
+          <p:cNvPr id="20" name="TextBox 19"/>
+          <p:cNvSpPr txBox="1"/>
+          <p:nvPr/>
+        </p:nvSpPr>
+        <p:spPr>
+          <a:xfrm>
+            <a:off x="594360" y="5394960"/>
+            <a:ext cx="438912" cy="438912"/>
+          </a:xfrm>
+          <a:prstGeom prst="rect">
+            <a:avLst/>
+          </a:prstGeom>
+          <a:noFill/>
+        </p:spPr>
+        <p:txBody>
+          <a:bodyPr wrap="square" anchor="ctr"/>
+          <a:lstStyle/>
+          <a:p>
+            <a:pPr algn="ctr"/>
+            <a:r>
+              <a:rPr sz="1600" b="1" i="0">
+                <a:solidFill>
+                  <a:srgbClr val="FFFFFF"/>
+                </a:solidFill>
+                <a:latin typeface="Calibri"/>
+              </a:rPr>
+              <a:t>4</a:t>
+            </a:r>
+          </a:p>
+        </p:txBody>
+      </p:sp>
+      <p:sp>
+        <p:nvSpPr>
+          <p:cNvPr id="21" name="TextBox 20"/>
+          <p:cNvSpPr txBox="1"/>
+          <p:nvPr/>
+        </p:nvSpPr>
+        <p:spPr>
+          <a:xfrm>
+            <a:off x="1188720" y="5180076"/>
+            <a:ext cx="10271455" cy="886968"/>
+          </a:xfrm>
+          <a:prstGeom prst="rect">
+            <a:avLst/>
+          </a:prstGeom>
+          <a:noFill/>
+        </p:spPr>
+        <p:txBody>
+          <a:bodyPr wrap="square" anchor="ctr"/>
+          <a:lstStyle/>
+          <a:p>
+            <a:r>
+              <a:rPr sz="1500" b="1" i="0">
+                <a:solidFill>
+                  <a:srgbClr val="095292"/>
+                </a:solidFill>
+                <a:latin typeface="Calibri"/>
+              </a:rPr>
+              <a:t>Guarda código e imagen</a:t>
+            </a:r>
+          </a:p>
+          <a:p>
+            <a:pPr>
+              <a:spcBef>
+                <a:spcPts val="200"/>
+              </a:spcBef>
+            </a:pPr>
+            <a:r>
+              <a:rPr sz="1300" b="0" i="0">
+                <a:solidFill>
+                  <a:srgbClr val="333333"/>
+                </a:solidFill>
+                <a:latin typeface="Calibri"/>
+              </a:rPr>
+              <a:t>El código es la fuente del diagrama: guárdalo con tu proyecto junto con el PNG exportado.</a:t>
+            </a:r>
+          </a:p>
+        </p:txBody>
+      </p:sp>
+      <p:sp>
+        <p:nvSpPr>
+          <p:cNvPr id="22" name="TextBox 21"/>
+          <p:cNvSpPr txBox="1"/>
+          <p:nvPr/>
+        </p:nvSpPr>
+        <p:spPr>
+          <a:xfrm>
+            <a:off x="11185855" y="6473952"/>
+            <a:ext cx="640080" cy="274320"/>
+          </a:xfrm>
+          <a:prstGeom prst="rect">
+            <a:avLst/>
+          </a:prstGeom>
+          <a:noFill/>
+        </p:spPr>
+        <p:txBody>
+          <a:bodyPr wrap="square">
+            <a:spAutoFit/>
+          </a:bodyPr>
+          <a:lstStyle/>
+          <a:p>
+            <a:pPr algn="r"/>
+            <a:r>
+              <a:rPr sz="1100" b="0" i="0">
+                <a:solidFill>
+                  <a:srgbClr val="666666"/>
+                </a:solidFill>
+                <a:latin typeface="Calibri"/>
+              </a:rPr>
+              <a:t>26</a:t>
+            </a:r>
+          </a:p>
+        </p:txBody>
+      </p:sp>
+    </p:spTree>
+  </p:cSld>
+  <p:clrMapOvr>
+    <a:masterClrMapping/>
+  </p:clrMapOvr>
+</p:sld>
+</file>
+
+<file path=ppt/slides/slide27.xml><?xml version="1.0" encoding="utf-8"?>
 <p:sld xmlns:a="http://schemas.openxmlformats.org/drawingml/2006/main" xmlns:p="http://schemas.openxmlformats.org/presentationml/2006/main" xmlns:r="http://schemas.openxmlformats.org/officeDocument/2006/relationships">
   <p:cSld>
     <p:bg>

--- a/Arquitectura de Sistemas Computacionales/Clases/Clase 12 - Pruebas de rendimiento y preparacion final/Presentacion.pptx
+++ b/Arquitectura de Sistemas Computacionales/Clases/Clase 12 - Pruebas de rendimiento y preparacion final/Presentacion.pptx
@@ -9587,6 +9587,22 @@
               <a:t>–   No hay con que comparar despues</a:t>
             </a:r>
           </a:p>
+          <a:p>
+            <a:pPr>
+              <a:spcAft>
+                <a:spcPts val="800"/>
+              </a:spcAft>
+            </a:pPr>
+            <a:r>
+              <a:rPr sz="1500" b="0" i="0">
+                <a:solidFill>
+                  <a:srgbClr val="333333"/>
+                </a:solidFill>
+                <a:latin typeface="Calibri"/>
+              </a:rPr>
+              <a:t>–   Nadie puede decir si se cumplio</a:t>
+            </a:r>
+          </a:p>
         </p:txBody>
       </p:sp>
       <p:sp>
@@ -9838,6 +9854,40 @@
                 <a:latin typeface="Calibri"/>
               </a:rPr>
               <a:t>–   Se puede verificar: pasa o no pasa</a:t>
+            </a:r>
+          </a:p>
+          <a:p>
+            <a:pPr>
+              <a:spcAft>
+                <a:spcPts val="800"/>
+              </a:spcAft>
+            </a:pPr>
+            <a:r>
+              <a:rPr sz="1500" b="0" i="0">
+                <a:solidFill>
+                  <a:srgbClr val="333333"/>
+                </a:solidFill>
+                <a:latin typeface="Calibri"/>
+              </a:rPr>
+              <a:t>–   Errores: </a:t>
+            </a:r>
+            <a:r>
+              <a:rPr sz="1500" b="1" i="0">
+                <a:solidFill>
+                  <a:srgbClr val="333333"/>
+                </a:solidFill>
+                <a:latin typeface="Calibri"/>
+              </a:rPr>
+              <a:t>&lt; 1 %</a:t>
+            </a:r>
+            <a:r>
+              <a:rPr sz="1500" b="0" i="0">
+                <a:solidFill>
+                  <a:srgbClr val="333333"/>
+                </a:solidFill>
+                <a:latin typeface="Calibri"/>
+              </a:rPr>
+              <a:t> de respuestas 5xx</a:t>
             </a:r>
           </a:p>
         </p:txBody>
@@ -11475,6 +11525,72 @@
               <a:t>–   Bottlenecks probables: DB, auth, I/O de objetos.</a:t>
             </a:r>
           </a:p>
+          <a:p>
+            <a:pPr>
+              <a:spcAft>
+                <a:spcPts val="800"/>
+              </a:spcAft>
+            </a:pPr>
+            <a:r>
+              <a:rPr sz="2000" b="0" i="0">
+                <a:solidFill>
+                  <a:srgbClr val="333333"/>
+                </a:solidFill>
+                <a:latin typeface="Calibri"/>
+              </a:rPr>
+              <a:t>–   </a:t>
+            </a:r>
+            <a:r>
+              <a:rPr sz="2000" b="1" i="0">
+                <a:solidFill>
+                  <a:srgbClr val="333333"/>
+                </a:solidFill>
+                <a:latin typeface="Calibri"/>
+              </a:rPr>
+              <a:t>p95</a:t>
+            </a:r>
+            <a:r>
+              <a:rPr sz="2000" b="0" i="0">
+                <a:solidFill>
+                  <a:srgbClr val="333333"/>
+                </a:solidFill>
+                <a:latin typeface="Calibri"/>
+              </a:rPr>
+              <a:t> = el 95 % de las peticiones responde en ese tiempo o menos; el 5 % restante tarda más.</a:t>
+            </a:r>
+          </a:p>
+          <a:p>
+            <a:pPr>
+              <a:spcAft>
+                <a:spcPts val="800"/>
+              </a:spcAft>
+            </a:pPr>
+            <a:r>
+              <a:rPr sz="2000" b="0" i="0">
+                <a:solidFill>
+                  <a:srgbClr val="333333"/>
+                </a:solidFill>
+                <a:latin typeface="Calibri"/>
+              </a:rPr>
+              <a:t>–   Ejemplo: 150 RPS en la hora pico de reservas · p95 &lt; 300 ms · errores &lt; 1 %.</a:t>
+            </a:r>
+          </a:p>
+          <a:p>
+            <a:pPr>
+              <a:spcAft>
+                <a:spcPts val="800"/>
+              </a:spcAft>
+            </a:pPr>
+            <a:r>
+              <a:rPr sz="2000" b="0" i="0">
+                <a:solidFill>
+                  <a:srgbClr val="333333"/>
+                </a:solidFill>
+                <a:latin typeface="Calibri"/>
+              </a:rPr>
+              <a:t>–   Error común: medir con un solo usuario; el sistema se ve rápido hasta que llega la concurrencia.</a:t>
+            </a:r>
+          </a:p>
         </p:txBody>
       </p:sp>
       <p:sp>
@@ -11727,6 +11843,38 @@
               <a:t>–   Sustentas tú los 5 bloques; si hay equipo autorizado, hablan todos.</a:t>
             </a:r>
           </a:p>
+          <a:p>
+            <a:pPr>
+              <a:spcAft>
+                <a:spcPts val="800"/>
+              </a:spcAft>
+            </a:pPr>
+            <a:r>
+              <a:rPr sz="2000" b="0" i="0">
+                <a:solidFill>
+                  <a:srgbClr val="333333"/>
+                </a:solidFill>
+                <a:latin typeface="Calibri"/>
+              </a:rPr>
+              <a:t>–   Una idea por diapositiva: el diagrama en pantalla y la decisión dicha en voz alta.</a:t>
+            </a:r>
+          </a:p>
+          <a:p>
+            <a:pPr>
+              <a:spcAft>
+                <a:spcPts val="800"/>
+              </a:spcAft>
+            </a:pPr>
+            <a:r>
+              <a:rPr sz="2000" b="0" i="0">
+                <a:solidFill>
+                  <a:srgbClr val="333333"/>
+                </a:solidFill>
+                <a:latin typeface="Calibri"/>
+              </a:rPr>
+              <a:t>–   Cerrar con el punto débil declarado: lo que no escala o lo que no se midió.</a:t>
+            </a:r>
+          </a:p>
         </p:txBody>
       </p:sp>
       <p:sp>
@@ -11979,6 +12127,22 @@
               <a:t>–   El throughput, o caudal, es cuantas peticiones atiende el sistema por unidad de tiempo; se mide en peticiones por segundo, abreviado RPS, y es lo que importa para la capacidad.</a:t>
             </a:r>
           </a:p>
+          <a:p>
+            <a:pPr>
+              <a:spcAft>
+                <a:spcPts val="800"/>
+              </a:spcAft>
+            </a:pPr>
+            <a:r>
+              <a:rPr sz="2000" b="0" i="0">
+                <a:solidFill>
+                  <a:srgbClr val="333333"/>
+                </a:solidFill>
+                <a:latin typeface="Calibri"/>
+              </a:rPr>
+              <a:t>–   No se mueven juntas: un sistema puede atender 500 RPS con latencia terrible porque todo espera en cola, y otro puede tener latencia excelente con 3 RPS porque nadie lo usa.</a:t>
+            </a:r>
+          </a:p>
         </p:txBody>
       </p:sp>
       <p:sp>
@@ -12196,7 +12360,7 @@
                 </a:solidFill>
                 <a:latin typeface="Calibri"/>
               </a:rPr>
-              <a:t>–   No se mueven juntas: un sistema puede atender 500 RPS con latencia terrible porque todo espera en cola, y otro puede tener latencia excelente con 3 RPS porque nadie lo usa.</a:t>
+              <a:t>–   Si CloudLite atiende 5 RPS con 300 milisegundos, hay en promedio 1.5 peticiones simultaneas dentro del sistema, y ese numero decide cuantos hilos, cuantas conexiones a base de datos y cuantas instancias se necesitan.</a:t>
             </a:r>
           </a:p>
           <a:p>
@@ -12212,7 +12376,39 @@
                 </a:solidFill>
                 <a:latin typeface="Calibri"/>
               </a:rPr>
-              <a:t>–   Si CloudLite atiende 5 RPS con 300 milisegundos, hay en promedio 1.5 peticiones simultaneas dentro del sistema, y ese numero decide cuantos hilos, cuantas conexiones a base de datos y cuantas instancias se necesitan.</a:t>
+              <a:t>–   La identidad que las une se llama ley de Little: concurrencia = throughput × latencia.</a:t>
+            </a:r>
+          </a:p>
+          <a:p>
+            <a:pPr>
+              <a:spcAft>
+                <a:spcPts val="800"/>
+              </a:spcAft>
+            </a:pPr>
+            <a:r>
+              <a:rPr sz="2000" b="0" i="0">
+                <a:solidFill>
+                  <a:srgbClr val="333333"/>
+                </a:solidFill>
+                <a:latin typeface="Calibri"/>
+              </a:rPr>
+              <a:t>–   Con 5 RPS y 0.3 segundos, 5 × 0.3 = 1.5 peticiones dentro del sistema en promedio.</a:t>
+            </a:r>
+          </a:p>
+          <a:p>
+            <a:pPr>
+              <a:spcAft>
+                <a:spcPts val="800"/>
+              </a:spcAft>
+            </a:pPr>
+            <a:r>
+              <a:rPr sz="2000" b="0" i="0">
+                <a:solidFill>
+                  <a:srgbClr val="333333"/>
+                </a:solidFill>
+                <a:latin typeface="Calibri"/>
+              </a:rPr>
+              <a:t>–   Si la latencia sube a 3 segundos con el mismo trafico, la concurrencia sube a 15, y el pool de conexiones que antes alcanzaba deja de alcanzar.</a:t>
             </a:r>
           </a:p>
         </p:txBody>

--- a/Arquitectura de Sistemas Computacionales/Clases/Clase 12 - Pruebas de rendimiento y preparacion final/Presentacion.pptx
+++ b/Arquitectura de Sistemas Computacionales/Clases/Clase 12 - Pruebas de rendimiento y preparacion final/Presentacion.pptx
@@ -4257,7 +4257,7 @@
                 </a:solidFill>
                 <a:latin typeface="Calibri"/>
               </a:rPr>
-              <a:t>Métricas objetivo + ensayo de pitch PI</a:t>
+              <a:t>Métricas objetivo + ensayo de pitch</a:t>
             </a:r>
           </a:p>
         </p:txBody>
@@ -4348,7 +4348,7 @@
                 </a:solidFill>
                 <a:latin typeface="Calibri"/>
               </a:rPr>
-              <a:t>Conceptos del tema, ejemplos resueltos sobre CloudLite y cierre conceptual.</a:t>
+              <a:t>Conceptos del tema, ejemplos resueltos sobre la app y cierre conceptual.</a:t>
             </a:r>
           </a:p>
         </p:txBody>
@@ -5624,7 +5624,7 @@
                 </a:solidFill>
                 <a:latin typeface="Calibri"/>
               </a:rPr>
-              <a:t>–   En CloudLite los candidatos son pocos y reconocibles.</a:t>
+              <a:t>–   En la app los candidatos son pocos y reconocibles.</a:t>
             </a:r>
           </a:p>
           <a:p>
@@ -5892,7 +5892,7 @@
                 </a:solidFill>
                 <a:latin typeface="Calibri"/>
               </a:rPr>
-              <a:t>–   El tercero, si CloudLite envia notificaciones de forma sincronica dentro de la peticion, es el proveedor externo: el usuario espera a que un tercero responda, y la mitigacion no es mas CPU sino sacar el envio de la ruta critica hacia una cola.</a:t>
+              <a:t>–   El tercero, si la app envia notificaciones de forma sincronica dentro de la peticion, es el proveedor externo: el usuario espera a que un tercero responda, y la mitigacion no es mas CPU sino sacar el envio de la ruta critica hacia una cola.</a:t>
             </a:r>
           </a:p>
         </p:txBody>
@@ -7179,7 +7179,7 @@
                 </a:solidFill>
                 <a:latin typeface="Calibri"/>
               </a:rPr>
-              <a:t> Conceptos del tema, uno por lámina, con ejemplos sobre CloudLite.</a:t>
+              <a:t> Conceptos del tema, uno por lámina, con ejemplos sobre la app.</a:t>
             </a:r>
           </a:p>
           <a:p>
@@ -10986,7 +10986,7 @@
                 </a:solidFill>
                 <a:latin typeface="Calibri"/>
               </a:rPr>
-              <a:t>Definir métricas/objetivos de rendimiento realistas para CloudLite.</a:t>
+              <a:t>Definir métricas/objetivos de rendimiento realistas para la app.</a:t>
             </a:r>
           </a:p>
           <a:p>
@@ -11018,7 +11018,7 @@
                 </a:solidFill>
                 <a:latin typeface="Calibri"/>
               </a:rPr>
-              <a:t>Ensayar el pitch de sustentación (prep PI; Parcial 3 es otro día).</a:t>
+              <a:t>Ensayar el pitch de sustentación (preparación; Parcial 3 es otro día).</a:t>
             </a:r>
           </a:p>
         </p:txBody>
@@ -11238,7 +11238,7 @@
                 </a:solidFill>
                 <a:latin typeface="Calibri"/>
               </a:rPr>
-              <a:t>–   Definir métricas/objetivos de rendimiento realistas para CloudLite.</a:t>
+              <a:t>–   Definir métricas/objetivos de rendimiento realistas para la app.</a:t>
             </a:r>
           </a:p>
           <a:p>
@@ -11270,7 +11270,7 @@
                 </a:solidFill>
                 <a:latin typeface="Calibri"/>
               </a:rPr>
-              <a:t>–   Ensayar el pitch de sustentación (prep PI; Parcial 3 es otro día).</a:t>
+              <a:t>–   Ensayar el pitch de sustentación (preparación; Parcial 3 es otro día).</a:t>
             </a:r>
           </a:p>
         </p:txBody>
@@ -12360,7 +12360,7 @@
                 </a:solidFill>
                 <a:latin typeface="Calibri"/>
               </a:rPr>
-              <a:t>–   Si CloudLite atiende 5 RPS con 300 milisegundos, hay en promedio 1.5 peticiones simultaneas dentro del sistema, y ese numero decide cuantos hilos, cuantas conexiones a base de datos y cuantas instancias se necesitan.</a:t>
+              <a:t>–   Si la app atiende 5 RPS con 300 milisegundos, hay en promedio 1.5 peticiones simultaneas dentro del sistema, y ese numero decide cuantos hilos, cuantas conexiones a base de datos y cuantas instancias se necesitan.</a:t>
             </a:r>
           </a:p>
           <a:p>
@@ -12676,7 +12676,7 @@
                 </a:solidFill>
                 <a:latin typeface="Calibri"/>
               </a:rPr>
-              <a:t>–   Suponga 100 peticiones a CloudLite: 95 responden en 120 milisegundos y 5 responden en 4000 porque cayeron en una consulta sin indice.</a:t>
+              <a:t>–   Suponga 100 peticiones a la app: 95 responden en 120 milisegundos y 5 responden en 4000 porque cayeron en una consulta sin indice.</a:t>
             </a:r>
           </a:p>
         </p:txBody>

--- a/Arquitectura de Sistemas Computacionales/Clases/Clase 12 - Pruebas de rendimiento y preparacion final/Presentacion.pptx
+++ b/Arquitectura de Sistemas Computacionales/Clases/Clase 12 - Pruebas de rendimiento y preparacion final/Presentacion.pptx
@@ -26,12 +26,6 @@
     <p:sldId id="274" r:id="rId26"/>
     <p:sldId id="275" r:id="rId27"/>
     <p:sldId id="276" r:id="rId28"/>
-    <p:sldId id="277" r:id="rId29"/>
-    <p:sldId id="278" r:id="rId30"/>
-    <p:sldId id="279" r:id="rId31"/>
-    <p:sldId id="280" r:id="rId32"/>
-    <p:sldId id="281" r:id="rId33"/>
-    <p:sldId id="282" r:id="rId34"/>
   </p:sldIdLst>
   <p:sldSz cx="12191695" cy="6858000" type="screen4x3"/>
   <p:notesSz cx="6858000" cy="9144000"/>
@@ -534,7 +528,13 @@
           <a:p/>
           <a:p>
             <a:r>
-              <a:t>La tercera magnitud es la concurrencia, cuantas peticiones estan en vuelo al mismo tiempo, y las tres se relacionan por una identidad que el docente puede escribir en el tablero: concurrencia igual a RPS por latencia.</a:t>
+              <a:t>(No se proyecta) Rendimiento es la unica parte del curso donde el estudiante puede pasar de opinar a medir, y por eso conviene empezar por el vocabulario exacto.</a:t>
+            </a:r>
+          </a:p>
+          <a:p/>
+          <a:p>
+            <a:r>
+              <a:t>(No se proyecta) La tercera magnitud es la concurrencia, cuantas peticiones estan en vuelo al mismo tiempo, y las tres se relacionan por una identidad que el docente puede escribir en el tablero: concurrencia igual a RPS por latencia.</a:t>
             </a:r>
           </a:p>
         </p:txBody>
@@ -674,19 +674,25 @@
           <a:lstStyle/>
           <a:p>
             <a:r>
-              <a:t>Los umbrales que el docente debe poder citar son convenciones de percepcion humana bien establecidas, no leyes fisicas.</a:t>
+              <a:t>De ahi sale la convencion practica para una API interna, que ubica el objetivo de p95 entre 200 y 300 milisegundos dejando presupuesto para que el navegador y la red agreguen lo suyo; para carga de pagina completa la referencia publica de Core Web Vitals considera bueno un renderizado del contenido principal por debajo de 2.5 segundos.</a:t>
             </a:r>
           </a:p>
           <a:p/>
           <a:p>
             <a:r>
-              <a:t>De ahi sale la convencion practica para una API interna, que ubica el objetivo de p95 entre 200 y 300 milisegundos dejando presupuesto para que el navegador y la red agreguen lo suyo; para carga de pagina completa la referencia publica de Core Web Vitals considera bueno un renderizado del contenido principal por debajo de 2.5 segundos.</a:t>
+              <a:t>Lo que si es regla es que el numero se escribe antes de medir y se justifica con el caso de uso, no se ajusta despues para que la medicion salga bien.</a:t>
             </a:r>
           </a:p>
           <a:p/>
           <a:p>
             <a:r>
-              <a:t>Lo que si es regla es que el numero se escribe antes de medir y se justifica con el caso de uso, no se ajusta despues para que la medicion salga bien.</a:t>
+              <a:t>(No se proyecta) Los umbrales que el docente debe poder citar son convenciones de percepcion humana bien establecidas, no leyes fisicas.</a:t>
+            </a:r>
+          </a:p>
+          <a:p/>
+          <a:p>
+            <a:r>
+              <a:t>(No se proyecta) Un SLO de 99.9 por ciento de disponibilidad, los "tres nueves", admite unos 43 minutos de caida al mes; el 99.99 baja a poco mas de 4 minutos, y esa diferencia de un decimal suele multiplicar el costo de la arquitectura, lo que amarra con la tabla de la Clase 10.</a:t>
             </a:r>
           </a:p>
         </p:txBody>
@@ -756,7 +762,19 @@
           <a:lstStyle/>
           <a:p>
             <a:r>
-              <a:t>La forma correcta de estimarlo es aritmetica de servilleta y el docente debe hacerla en vivo con CloudLite.</a:t>
+              <a:t>(No se proyecta) El segundo componente es el escenario de carga, y el estudiante casi siempre lo inventa exagerado.</a:t>
+            </a:r>
+          </a:p>
+          <a:p/>
+          <a:p>
+            <a:r>
+              <a:t>(No se proyecta) La forma correcta de estimarlo es aritmetica de servilleta y el docente debe hacerla en vivo con CloudLite.</a:t>
+            </a:r>
+          </a:p>
+          <a:p/>
+          <a:p>
+            <a:r>
+              <a:t>(No se proyecta) La leccion es doble: un objetivo de rendimiento sin cuenta de sobre es marketing y no ingenieria, y dimensionar para 5 RPS en vez de 10000 es justamente lo que evita el sobreaprovisionamiento que la Clase 10 senalo como desperdicio.</a:t>
             </a:r>
           </a:p>
         </p:txBody>
@@ -826,7 +844,19 @@
           <a:lstStyle/>
           <a:p>
             <a:r>
-              <a:t>Esos tres cubren la mayoria de los casos que los estudiantes van a sospechar.</a:t>
+              <a:t>(No se proyecta) La afirmacion fuerte, que conviene decir tal cual, es que en cualquier instante hay exactamente un cuello de botella; "todo esta lento" nunca es un diagnostico, es la ausencia de uno.</a:t>
+            </a:r>
+          </a:p>
+          <a:p/>
+          <a:p>
+            <a:r>
+              <a:t>(No se proyecta) Se localiza con las senales doradas de la Clase 8, en particular la saturacion, mirando cual recurso esta cerca de su limite mientras los demas estan holgados.</a:t>
+            </a:r>
+          </a:p>
+          <a:p/>
+          <a:p>
+            <a:r>
+              <a:t>(No se proyecta) Esos tres cubren la mayoria de los casos que los estudiantes van a sospechar.</a:t>
             </a:r>
           </a:p>
         </p:txBody>
@@ -911,6 +941,12 @@
               <a:t>Un escenario bien razonado sin ejecucion vale mas que una ejecucion sin objetivo.</a:t>
             </a:r>
           </a:p>
+          <a:p/>
+          <a:p>
+            <a:r>
+              <a:t>(No se proyecta) La prueba de picos, o spike test, aplica una subida subita y grande simulando una promocion o una noticia viral, y responde si el sistema reacciona a tiempo; anticipa el limite del autoescalado de la Clase 13, porque arrancar una instancia toma decenas de segundos y un pico mas rapido golpea antes de que llegue la ayuda.</a:t>
+            </a:r>
+          </a:p>
         </p:txBody>
       </p:sp>
       <p:sp>
@@ -978,7 +1014,19 @@
           <a:lstStyle/>
           <a:p>
             <a:r>
-              <a:t>Hay que decir explicitamente que este ensayo no es la sustentacion, que es la Clase 15, ni el Parcial 3 de la Clase 14, que es evaluacion escrita: son tres cosas distintas y mezclarlas confunde al grupo.</a:t>
+              <a:t>(No se proyecta) La segunda mitad de la clase es el ensayo del pitch y tiene su propia teoria.</a:t>
+            </a:r>
+          </a:p>
+          <a:p/>
+          <a:p>
+            <a:r>
+              <a:t>(No se proyecta) Se ensaya hoy con cronometro y en voz alta, porque leer mentalmente siempre da la mitad del tiempo real, y sin leer las diapositivas, ya que en la Clase 15 el criterio es que quien sustenta pueda explicar cualquier parte del sistema; si el docente autorizo equipos, se ensaya ademas con rotacion de expositor, porque alli el criterio aplica a cualquier integrante.</a:t>
+            </a:r>
+          </a:p>
+          <a:p/>
+          <a:p>
+            <a:r>
+              <a:t>(No se proyecta) Hay que decir explicitamente que este ensayo no es la sustentacion, que es la Clase 15, ni el Parcial 3 de la Clase 14, que es evaluacion escrita: son tres cosas distintas y mezclarlas confunde al grupo.</a:t>
             </a:r>
           </a:p>
         </p:txBody>
@@ -1049,12 +1097,6 @@
           <a:p>
             <a:r>
               <a:t>Tres preguntas llegan siempre.</a:t>
-            </a:r>
-          </a:p>
-          <a:p/>
-          <a:p>
-            <a:r>
-              <a:t>Conviene cerrar recordando que el bottleneck identificado hoy es insumo obligatorio de la Clase 13: no se puede escribir una politica de autoescalado sensata sin saber que recurso se agota primero.</a:t>
             </a:r>
           </a:p>
         </p:txBody>
@@ -4529,7 +4571,7 @@
                 </a:solidFill>
                 <a:latin typeface="Calibri"/>
               </a:rPr>
-              <a:t>Los umbrales de percepcion, y por que son convenciones (1/2)</a:t>
+              <a:t>Los umbrales de percepcion, y por que son convenciones</a:t>
             </a:r>
           </a:p>
         </p:txBody>
@@ -4601,6 +4643,22 @@
                 <a:latin typeface="Calibri"/>
               </a:rPr>
               <a:t>–   Junto al tiempo va siempre la tasa de error, el porcentaje de peticiones que fallan, porque un sistema que responde rapido devolviendo errores no cumple.</a:t>
+            </a:r>
+          </a:p>
+          <a:p>
+            <a:pPr>
+              <a:spcAft>
+                <a:spcPts val="800"/>
+              </a:spcAft>
+            </a:pPr>
+            <a:r>
+              <a:rPr sz="2000" b="0" i="0">
+                <a:solidFill>
+                  <a:srgbClr val="333333"/>
+                </a:solidFill>
+                <a:latin typeface="Calibri"/>
+              </a:rPr>
+              <a:t>–   Aqui aparecen tres siglas: el SLI es el indicador que se mide, el SLO es el objetivo interno que el equipo se compromete a cumplir y el SLA es el compromiso contractual con penalidad.</a:t>
             </a:r>
           </a:p>
         </p:txBody>
@@ -4781,7 +4839,7 @@
                 </a:solidFill>
                 <a:latin typeface="Calibri"/>
               </a:rPr>
-              <a:t>Los umbrales de percepcion, y por que son convenciones (2/2)</a:t>
+              <a:t>El escenario de carga: aritmetica de servilleta</a:t>
             </a:r>
           </a:p>
         </p:txBody>
@@ -4820,7 +4878,7 @@
                 </a:solidFill>
                 <a:latin typeface="Calibri"/>
               </a:rPr>
-              <a:t>–   Aqui aparecen tres siglas: el SLI es el indicador que se mide, el SLO es el objetivo interno que el equipo se compromete a cumplir y el SLA es el compromiso contractual con penalidad.</a:t>
+              <a:t>–   Suponga 1000 usuarios activos al dia, cada uno con unas 20 peticiones en su sesion: son 20000 peticiones diarias.</a:t>
             </a:r>
           </a:p>
           <a:p>
@@ -4836,7 +4894,7 @@
                 </a:solidFill>
                 <a:latin typeface="Calibri"/>
               </a:rPr>
-              <a:t>–   Un SLO de 99.9 por ciento de disponibilidad, los "tres nueves", admite unos 43 minutos de caida al mes; el 99.99 baja a poco mas de 4 minutos</a:t>
+              <a:t>–   Si un 40 por ciento cae en una ventana de dos horas, eso es 8000 peticiones en 7200 segundos, algo mas de 1 RPS promedio en la hora pico.</a:t>
             </a:r>
           </a:p>
           <a:p>
@@ -4852,7 +4910,23 @@
                 </a:solidFill>
                 <a:latin typeface="Calibri"/>
               </a:rPr>
-              <a:t>–   Y esa diferencia de un decimal suele multiplicar el costo de la arquitectura, lo que amarra con la tabla de la Clase 10.</a:t>
+              <a:t>–   Como el trafico real llega en rafagas, se aplica un factor de pico de 3 a 5 veces y se dimensiona para unos 5 RPS.</a:t>
+            </a:r>
+          </a:p>
+          <a:p>
+            <a:pPr>
+              <a:spcAft>
+                <a:spcPts val="800"/>
+              </a:spcAft>
+            </a:pPr>
+            <a:r>
+              <a:rPr sz="2000" b="0" i="0">
+                <a:solidFill>
+                  <a:srgbClr val="333333"/>
+                </a:solidFill>
+                <a:latin typeface="Calibri"/>
+              </a:rPr>
+              <a:t>–   Ese numero es el que debe aparecer en el informe, y es un orden de magnitud tres mil veces menor que los "10000 RPS" que algun estudiante escribira por sonar ambicioso.</a:t>
             </a:r>
           </a:p>
         </p:txBody>
@@ -5033,7 +5107,7 @@
                 </a:solidFill>
                 <a:latin typeface="Calibri"/>
               </a:rPr>
-              <a:t>El escenario de carga: aritmetica de servilleta (1/2)</a:t>
+              <a:t>El cuello de botella: siempre hay uno (1/2)</a:t>
             </a:r>
           </a:p>
         </p:txBody>
@@ -5072,7 +5146,7 @@
                 </a:solidFill>
                 <a:latin typeface="Calibri"/>
               </a:rPr>
-              <a:t>–   El segundo componente es el escenario de carga, y el estudiante casi siempre lo inventa exagerado.</a:t>
+              <a:t>–   El tercer componente es el bottleneck, o cuello de botella: el componente que se agota primero y limita el rendimiento de todo el sistema.</a:t>
             </a:r>
           </a:p>
           <a:p>
@@ -5088,7 +5162,7 @@
                 </a:solidFill>
                 <a:latin typeface="Calibri"/>
               </a:rPr>
-              <a:t>–   Suponga 1000 usuarios activos al dia, cada uno con unas 20 peticiones en su sesion: son 20000 peticiones diarias.</a:t>
+              <a:t>–   En la app los candidatos son pocos y reconocibles.</a:t>
             </a:r>
           </a:p>
           <a:p>
@@ -5104,7 +5178,7 @@
                 </a:solidFill>
                 <a:latin typeface="Calibri"/>
               </a:rPr>
-              <a:t>–   Si un 40 por ciento cae en una ventana de dos horas, eso es 8000 peticiones en 7200 segundos, algo mas de 1 RPS promedio en la hora pico.</a:t>
+              <a:t>–   El primero es el problema N mas 1 en el endpoint de listado: la API pide la lista con una consulta y luego, dentro del ciclo, hace una consulta adicional por cada registro para traer un dato relacionado</a:t>
             </a:r>
           </a:p>
           <a:p>
@@ -5120,7 +5194,7 @@
                 </a:solidFill>
                 <a:latin typeface="Calibri"/>
               </a:rPr>
-              <a:t>–   Como el trafico real llega en rafagas, se aplica un factor de pico de 3 a 5 veces y se dimensiona para unos 5 RPS.</a:t>
+              <a:t>–   Con 50 registros son 51 viajes a la base de datos y el tiempo se va en latencia de red acumulada, no en CPU.</a:t>
             </a:r>
           </a:p>
         </p:txBody>
@@ -5301,7 +5375,7 @@
                 </a:solidFill>
                 <a:latin typeface="Calibri"/>
               </a:rPr>
-              <a:t>El escenario de carga: aritmetica de servilleta (2/2)</a:t>
+              <a:t>El cuello de botella: siempre hay uno (2/2)</a:t>
             </a:r>
           </a:p>
         </p:txBody>
@@ -5340,7 +5414,7 @@
                 </a:solidFill>
                 <a:latin typeface="Calibri"/>
               </a:rPr>
-              <a:t>–   Ese numero es el que debe aparecer en el informe, y es un orden de magnitud tres mil veces menor que los "10000 RPS" que algun estudiante escribira por sonar ambicioso.</a:t>
+              <a:t>–   El segundo es el pool de conexiones: si el pool tiene 10 conexiones y llegan 40 peticiones concurrentes, 30 esperan turno y la latencia se dispara aunque la CPU de la API y la de la base de datos esten al 20 por ciento.</a:t>
             </a:r>
           </a:p>
           <a:p>
@@ -5356,7 +5430,7 @@
                 </a:solidFill>
                 <a:latin typeface="Calibri"/>
               </a:rPr>
-              <a:t>–   La leccion es doble: un objetivo de rendimiento sin cuenta de sobre es marketing y no ingenieria, y dimensionar para 5 RPS en vez de 10000 es justamente lo que evita el sobreaprovisionamiento que la Clase 10 senalo como desperdicio.</a:t>
+              <a:t>–   El tercero, si la app envia notificaciones de forma sincronica dentro de la peticion, es el proveedor externo: el usuario espera a que un tercero responda, y la mitigacion no es mas CPU sino sacar el envio de la ruta critica hacia una cola.</a:t>
             </a:r>
           </a:p>
         </p:txBody>
@@ -5537,7 +5611,7 @@
                 </a:solidFill>
                 <a:latin typeface="Calibri"/>
               </a:rPr>
-              <a:t>El cuello de botella: siempre hay uno (1/2)</a:t>
+              <a:t>Los tipos de prueba, por la pregunta que responden</a:t>
             </a:r>
           </a:p>
         </p:txBody>
@@ -5576,7 +5650,7 @@
                 </a:solidFill>
                 <a:latin typeface="Calibri"/>
               </a:rPr>
-              <a:t>–   El tercer componente es el bottleneck, o cuello de botella: el componente que se agota primero y limita el rendimiento de todo el sistema.</a:t>
+              <a:t>–   La prueba de estres sube la carga de forma progresiva hasta que el sistema se degrada o se rompe</a:t>
             </a:r>
           </a:p>
           <a:p>
@@ -5592,7 +5666,7 @@
                 </a:solidFill>
                 <a:latin typeface="Calibri"/>
               </a:rPr>
-              <a:t>–   La afirmacion fuerte, que conviene decir tal cual, es que en cualquier instante hay exactamente un cuello de botella; "todo esta lento" nunca es un diagnostico, es la ausencia de uno.</a:t>
+              <a:t>–   Y responde cual es la capacidad maxima y como se comporta al fallar; el dato interesante no es el punto de quiebre sino la forma de la falla, porque degradarse respondiendo lento es aceptable y caerse por completo no.</a:t>
             </a:r>
           </a:p>
           <a:p>
@@ -5608,7 +5682,7 @@
                 </a:solidFill>
                 <a:latin typeface="Calibri"/>
               </a:rPr>
-              <a:t>–   Se localiza con las senales doradas de la Clase 8, en particular la saturacion, mirando cual recurso esta cerca de su limite mientras los demas estan holgados.</a:t>
+              <a:t>–   La prueba de resistencia, o soak, mantiene carga moderada durante horas y responde si hay fugas de memoria o conexiones que no se liberan; con menos de una hora no se detecta nada y de 2 a 4 horas es lo tipico.</a:t>
             </a:r>
           </a:p>
           <a:p>
@@ -5624,23 +5698,7 @@
                 </a:solidFill>
                 <a:latin typeface="Calibri"/>
               </a:rPr>
-              <a:t>–   En la app los candidatos son pocos y reconocibles.</a:t>
-            </a:r>
-          </a:p>
-          <a:p>
-            <a:pPr>
-              <a:spcAft>
-                <a:spcPts val="800"/>
-              </a:spcAft>
-            </a:pPr>
-            <a:r>
-              <a:rPr sz="2000" b="0" i="0">
-                <a:solidFill>
-                  <a:srgbClr val="333333"/>
-                </a:solidFill>
-                <a:latin typeface="Calibri"/>
-              </a:rPr>
-              <a:t>–   El primero es el problema N mas 1 en el endpoint de listado: la API pide la lista con una consulta y luego, dentro del ciclo, hace una consulta adicional por cada registro para traer un dato relacionado</a:t>
+              <a:t>–   No se necesita ninguna herramienta de pago: en Killercoda se puede lanzar un contenedor con k6, hey o Apache Bench y golpear el stub del servicio, y si el lab no carga, el escenario se documenta en papel con la aritmetica de arriba.</a:t>
             </a:r>
           </a:p>
         </p:txBody>
@@ -5821,7 +5879,7 @@
                 </a:solidFill>
                 <a:latin typeface="Calibri"/>
               </a:rPr>
-              <a:t>El cuello de botella: siempre hay uno (2/2)</a:t>
+              <a:t>El ensayo del pitch: la segunda mitad tiene su propia teoria</a:t>
             </a:r>
           </a:p>
         </p:txBody>
@@ -5860,7 +5918,7 @@
                 </a:solidFill>
                 <a:latin typeface="Calibri"/>
               </a:rPr>
-              <a:t>–   Con 50 registros son 51 viajes a la base de datos y el tiempo se va en latencia de red acumulada, no en CPU.</a:t>
+              <a:t>–   Cinco a ocho minutos son entre 700 y 1000 palabras habladas, lo que alcanza para siete u ocho ideas y no mas, asi que el guion se escribe por presupuesto de tiempo: unos 45 segundos para el problema y el usuario</a:t>
             </a:r>
           </a:p>
           <a:p>
@@ -5876,7 +5934,7 @@
                 </a:solidFill>
                 <a:latin typeface="Calibri"/>
               </a:rPr>
-              <a:t>–   El segundo es el pool de conexiones: si el pool tiene 10 conexiones y llegan 40 peticiones concurrentes, 30 esperan turno y la latencia se dispara aunque la CPU de la API y la de la base de datos esten al 20 por ciento.</a:t>
+              <a:t>–   60 para el diagrama de Contexto, 90 para los Contenedores y las decisiones que los separan, 60 para seguridad y despliegue, 45 para el pipeline y las metricas, 45 para costos y escalabilidad, y 30 de cierre.</a:t>
             </a:r>
           </a:p>
           <a:p>
@@ -5892,7 +5950,23 @@
                 </a:solidFill>
                 <a:latin typeface="Calibri"/>
               </a:rPr>
-              <a:t>–   El tercero, si la app envia notificaciones de forma sincronica dentro de la peticion, es el proveedor externo: el usuario espera a que un tercero responda, y la mitigacion no es mas CPU sino sacar el envio de la ruta critica hacia una cola.</a:t>
+              <a:t>–   La regla de oro del pitch de arquitectura es que se presentan decisiones con su trade-off, no un recorrido por las cajas del diagrama: "elegimos base de datos gestionada aunque cuesta el doble</a:t>
+            </a:r>
+          </a:p>
+          <a:p>
+            <a:pPr>
+              <a:spcAft>
+                <a:spcPts val="800"/>
+              </a:spcAft>
+            </a:pPr>
+            <a:r>
+              <a:rPr sz="2000" b="0" i="0">
+                <a:solidFill>
+                  <a:srgbClr val="333333"/>
+                </a:solidFill>
+                <a:latin typeface="Calibri"/>
+              </a:rPr>
+              <a:t>–   Porque no podemos garantizar respaldos manuales" es una frase de arquitecto; "aqui tenemos una base de datos" es una leyenda de imagen.</a:t>
             </a:r>
           </a:p>
         </p:txBody>
@@ -6073,7 +6147,7 @@
                 </a:solidFill>
                 <a:latin typeface="Calibri"/>
               </a:rPr>
-              <a:t>Los tipos de prueba, por la pregunta que responden (1/2)</a:t>
+              <a:t>Preguntas frecuentes y cierre conceptual</a:t>
             </a:r>
           </a:p>
         </p:txBody>
@@ -6112,7 +6186,7 @@
                 </a:solidFill>
                 <a:latin typeface="Calibri"/>
               </a:rPr>
-              <a:t>–   La prueba de estres sube la carga de forma progresiva hasta que el sistema se degrada o se rompe</a:t>
+              <a:t>–   La segunda es si no basta con decir que se usara cache; la respuesta es que una mitigacion sin medicion es una creencia</a:t>
             </a:r>
           </a:p>
           <a:p>
@@ -6128,7 +6202,7 @@
                 </a:solidFill>
                 <a:latin typeface="Calibri"/>
               </a:rPr>
-              <a:t>–   Y responde cual es la capacidad maxima y como se comporta al fallar; el dato interesante no es el punto de quiebre sino la forma de la falla, porque degradarse respondiendo lento es aceptable y caerse por completo no.</a:t>
+              <a:t>–   Y que la pregunta correcta es cache de que, con que tiempo de vida, que porcentaje de aciertos se espera y que pasa cuando el dato cambia, porque una cache mal invalidada convierte un problema de lentitud en un problema de datos incorrectos, que es peor.</a:t>
             </a:r>
           </a:p>
           <a:p>
@@ -6144,7 +6218,7 @@
                 </a:solidFill>
                 <a:latin typeface="Calibri"/>
               </a:rPr>
-              <a:t>–   La prueba de picos, o spike test, aplica una subida subita y grande simulando una promocion o una noticia viral</a:t>
+              <a:t>–   La tercera es cual es un buen p95, y la respuesta debe resistir la tentacion de dar una cifra universal: depende del caso de uso</a:t>
             </a:r>
           </a:p>
           <a:p>
@@ -6160,7 +6234,23 @@
                 </a:solidFill>
                 <a:latin typeface="Calibri"/>
               </a:rPr>
-              <a:t>–   Y responde si el sistema reacciona a tiempo; anticipa el limite del autoescalado de la Clase 13, porque arrancar una instancia toma decenas de segundos y un pico mas rapido golpea antes de que llegue la ayuda.</a:t>
+              <a:t>–   Y el criterio es que el numero este justificado y sea alcanzable con la arquitectura dibujada</a:t>
+            </a:r>
+          </a:p>
+          <a:p>
+            <a:pPr>
+              <a:spcAft>
+                <a:spcPts val="800"/>
+              </a:spcAft>
+            </a:pPr>
+            <a:r>
+              <a:rPr sz="2000" b="0" i="0">
+                <a:solidFill>
+                  <a:srgbClr val="333333"/>
+                </a:solidFill>
+                <a:latin typeface="Calibri"/>
+              </a:rPr>
+              <a:t>–   Quien promete p95 de 50 milisegundos con una consulta que recorre toda la tabla tiene un objetivo incoherente, y eso es un hallazgo mas grave que tener un objetivo modesto.</a:t>
             </a:r>
           </a:p>
         </p:txBody>
@@ -6341,21 +6431,141 @@
                 </a:solidFill>
                 <a:latin typeface="Calibri"/>
               </a:rPr>
-              <a:t>Los tipos de prueba, por la pregunta que responden (2/2)</a:t>
-            </a:r>
-          </a:p>
-        </p:txBody>
-      </p:sp>
-      <p:sp>
-        <p:nvSpPr>
-          <p:cNvPr id="5" name="TextBox 4"/>
+              <a:t>El presupuesto de latencia del camino critico</a:t>
+            </a:r>
+          </a:p>
+        </p:txBody>
+      </p:sp>
+      <p:sp>
+        <p:nvSpPr>
+          <p:cNvPr id="5" name="Rounded Rectangle 4"/>
+          <p:cNvSpPr/>
+          <p:nvPr/>
+        </p:nvSpPr>
+        <p:spPr>
+          <a:xfrm>
+            <a:off x="457200" y="1261872"/>
+            <a:ext cx="11277295" cy="5093208"/>
+          </a:xfrm>
+          <a:prstGeom prst="roundRect">
+            <a:avLst>
+              <a:gd name="adj" fmla="val 12000"/>
+            </a:avLst>
+          </a:prstGeom>
+          <a:solidFill>
+            <a:srgbClr val="1E2A38"/>
+          </a:solidFill>
+          <a:ln>
+            <a:noFill/>
+          </a:ln>
+        </p:spPr>
+        <p:style>
+          <a:lnRef idx="1">
+            <a:schemeClr val="accent1"/>
+          </a:lnRef>
+          <a:fillRef idx="3">
+            <a:schemeClr val="accent1"/>
+          </a:fillRef>
+          <a:effectRef idx="2">
+            <a:schemeClr val="accent1"/>
+          </a:effectRef>
+          <a:fontRef idx="minor">
+            <a:schemeClr val="lt1"/>
+          </a:fontRef>
+        </p:style>
+        <p:txBody>
+          <a:bodyPr rtlCol="0" anchor="ctr"/>
+          <a:lstStyle/>
+          <a:p>
+            <a:pPr algn="ctr"/>
+          </a:p>
+        </p:txBody>
+      </p:sp>
+      <p:sp>
+        <p:nvSpPr>
+          <p:cNvPr id="6" name="Rectangle 5"/>
+          <p:cNvSpPr/>
+          <p:nvPr/>
+        </p:nvSpPr>
+        <p:spPr>
+          <a:xfrm>
+            <a:off x="457200" y="1261872"/>
+            <a:ext cx="11277295" cy="320040"/>
+          </a:xfrm>
+          <a:prstGeom prst="rect">
+            <a:avLst/>
+          </a:prstGeom>
+          <a:solidFill>
+            <a:srgbClr val="095292"/>
+          </a:solidFill>
+          <a:ln>
+            <a:noFill/>
+          </a:ln>
+        </p:spPr>
+        <p:style>
+          <a:lnRef idx="1">
+            <a:schemeClr val="accent1"/>
+          </a:lnRef>
+          <a:fillRef idx="3">
+            <a:schemeClr val="accent1"/>
+          </a:fillRef>
+          <a:effectRef idx="2">
+            <a:schemeClr val="accent1"/>
+          </a:effectRef>
+          <a:fontRef idx="minor">
+            <a:schemeClr val="lt1"/>
+          </a:fontRef>
+        </p:style>
+        <p:txBody>
+          <a:bodyPr rtlCol="0" anchor="ctr"/>
+          <a:lstStyle/>
+          <a:p>
+            <a:pPr algn="ctr"/>
+          </a:p>
+        </p:txBody>
+      </p:sp>
+      <p:sp>
+        <p:nvSpPr>
+          <p:cNvPr id="7" name="TextBox 6"/>
           <p:cNvSpPr txBox="1"/>
           <p:nvPr/>
         </p:nvSpPr>
         <p:spPr>
           <a:xfrm>
-            <a:off x="457200" y="1170432"/>
-            <a:ext cx="11277295" cy="5230368"/>
+            <a:off x="685800" y="1307592"/>
+            <a:ext cx="10820095" cy="256032"/>
+          </a:xfrm>
+          <a:prstGeom prst="rect">
+            <a:avLst/>
+          </a:prstGeom>
+          <a:noFill/>
+        </p:spPr>
+        <p:txBody>
+          <a:bodyPr wrap="square" anchor="ctr"/>
+          <a:lstStyle/>
+          <a:p>
+            <a:r>
+              <a:rPr sz="1000" b="1" i="0">
+                <a:solidFill>
+                  <a:srgbClr val="269CCB"/>
+                </a:solidFill>
+                <a:latin typeface="Calibri"/>
+              </a:rPr>
+              <a:t>● ● ●</a:t>
+            </a:r>
+          </a:p>
+        </p:txBody>
+      </p:sp>
+      <p:sp>
+        <p:nvSpPr>
+          <p:cNvPr id="8" name="TextBox 7"/>
+          <p:cNvSpPr txBox="1"/>
+          <p:nvPr/>
+        </p:nvSpPr>
+        <p:spPr>
+          <a:xfrm>
+            <a:off x="777240" y="1719072"/>
+            <a:ext cx="10637215" cy="4453128"/>
           </a:xfrm>
           <a:prstGeom prst="rect">
             <a:avLst/>
@@ -6370,40 +6580,264 @@
           <a:p>
             <a:pPr>
               <a:spcAft>
-                <a:spcPts val="800"/>
+                <a:spcPts val="400"/>
               </a:spcAft>
             </a:pPr>
             <a:r>
-              <a:rPr sz="2000" b="0" i="0">
-                <a:solidFill>
-                  <a:srgbClr val="333333"/>
-                </a:solidFill>
-                <a:latin typeface="Calibri"/>
-              </a:rPr>
-              <a:t>–   La prueba de resistencia, o soak, mantiene carga moderada durante horas y responde si hay fugas de memoria o conexiones que no se liberan; con menos de una hora no se detecta nada y de 2 a 4 horas es lo tipico.</a:t>
+              <a:rPr sz="1400" b="0" i="0">
+                <a:solidFill>
+                  <a:srgbClr val="FFFFFF"/>
+                </a:solidFill>
+                <a:latin typeface="Calibri"/>
+              </a:rPr>
+              <a:t>sequenceDiagram</a:t>
             </a:r>
           </a:p>
           <a:p>
             <a:pPr>
               <a:spcAft>
-                <a:spcPts val="800"/>
+                <a:spcPts val="400"/>
               </a:spcAft>
             </a:pPr>
             <a:r>
-              <a:rPr sz="2000" b="0" i="0">
-                <a:solidFill>
-                  <a:srgbClr val="333333"/>
-                </a:solidFill>
-                <a:latin typeface="Calibri"/>
-              </a:rPr>
-              <a:t>–   No se necesita ninguna herramienta de pago: en Killercoda se puede lanzar un contenedor con k6, hey o Apache Bench y golpear el stub del servicio, y si el lab no carga, el escenario se documenta en papel con la aritmetica de arriba.</a:t>
-            </a:r>
-          </a:p>
-        </p:txBody>
-      </p:sp>
-      <p:sp>
-        <p:nvSpPr>
-          <p:cNvPr id="6" name="TextBox 5"/>
+              <a:rPr sz="1400" b="0" i="0">
+                <a:solidFill>
+                  <a:srgbClr val="FFFFFF"/>
+                </a:solidFill>
+                <a:latin typeface="Calibri"/>
+              </a:rPr>
+              <a:t>  autonumber</a:t>
+            </a:r>
+          </a:p>
+          <a:p>
+            <a:pPr>
+              <a:spcAft>
+                <a:spcPts val="400"/>
+              </a:spcAft>
+            </a:pPr>
+            <a:r>
+              <a:rPr sz="1400" b="0" i="0">
+                <a:solidFill>
+                  <a:srgbClr val="FFFFFF"/>
+                </a:solidFill>
+                <a:latin typeface="Calibri"/>
+              </a:rPr>
+              <a:t>  participant U as Usuario</a:t>
+            </a:r>
+          </a:p>
+          <a:p>
+            <a:pPr>
+              <a:spcAft>
+                <a:spcPts val="400"/>
+              </a:spcAft>
+            </a:pPr>
+            <a:r>
+              <a:rPr sz="1400" b="0" i="0">
+                <a:solidFill>
+                  <a:srgbClr val="FFFFFF"/>
+                </a:solidFill>
+                <a:latin typeface="Calibri"/>
+              </a:rPr>
+              <a:t>  participant W as Web SPA</a:t>
+            </a:r>
+          </a:p>
+          <a:p>
+            <a:pPr>
+              <a:spcAft>
+                <a:spcPts val="400"/>
+              </a:spcAft>
+            </a:pPr>
+            <a:r>
+              <a:rPr sz="1400" b="0" i="0">
+                <a:solidFill>
+                  <a:srgbClr val="FFFFFF"/>
+                </a:solidFill>
+                <a:latin typeface="Calibri"/>
+              </a:rPr>
+              <a:t>  participant A as API</a:t>
+            </a:r>
+          </a:p>
+          <a:p>
+            <a:pPr>
+              <a:spcAft>
+                <a:spcPts val="400"/>
+              </a:spcAft>
+            </a:pPr>
+            <a:r>
+              <a:rPr sz="1400" b="0" i="0">
+                <a:solidFill>
+                  <a:srgbClr val="FFFFFF"/>
+                </a:solidFill>
+                <a:latin typeface="Calibri"/>
+              </a:rPr>
+              <a:t>  participant D as PostgreSQL</a:t>
+            </a:r>
+          </a:p>
+          <a:p>
+            <a:pPr>
+              <a:spcAft>
+                <a:spcPts val="400"/>
+              </a:spcAft>
+            </a:pPr>
+            <a:r>
+              <a:rPr sz="1400" b="0" i="0">
+                <a:solidFill>
+                  <a:srgbClr val="FFFFFF"/>
+                </a:solidFill>
+                <a:latin typeface="Calibri"/>
+              </a:rPr>
+              <a:t/>
+            </a:r>
+          </a:p>
+          <a:p>
+            <a:pPr>
+              <a:spcAft>
+                <a:spcPts val="400"/>
+              </a:spcAft>
+            </a:pPr>
+            <a:r>
+              <a:rPr sz="1400" b="0" i="0">
+                <a:solidFill>
+                  <a:srgbClr val="FFFFFF"/>
+                </a:solidFill>
+                <a:latin typeface="Calibri"/>
+              </a:rPr>
+              <a:t>  U-&gt;&gt;W: accion del pico (&lt;su caso&gt;)</a:t>
+            </a:r>
+          </a:p>
+          <a:p>
+            <a:pPr>
+              <a:spcAft>
+                <a:spcPts val="400"/>
+              </a:spcAft>
+            </a:pPr>
+            <a:r>
+              <a:rPr sz="1400" b="0" i="0">
+                <a:solidFill>
+                  <a:srgbClr val="FFFFFF"/>
+                </a:solidFill>
+                <a:latin typeface="Calibri"/>
+              </a:rPr>
+              <a:t>  W-&gt;&gt;A: POST /recurso          %% red: 40 ms</a:t>
+            </a:r>
+          </a:p>
+          <a:p>
+            <a:pPr>
+              <a:spcAft>
+                <a:spcPts val="400"/>
+              </a:spcAft>
+            </a:pPr>
+            <a:r>
+              <a:rPr sz="1400" b="0" i="0">
+                <a:solidFill>
+                  <a:srgbClr val="FFFFFF"/>
+                </a:solidFill>
+                <a:latin typeface="Calibri"/>
+              </a:rPr>
+              <a:t>  A-&gt;&gt;A: validar + autorizar    %% 10 ms</a:t>
+            </a:r>
+          </a:p>
+          <a:p>
+            <a:pPr>
+              <a:spcAft>
+                <a:spcPts val="400"/>
+              </a:spcAft>
+            </a:pPr>
+            <a:r>
+              <a:rPr sz="1400" b="0" i="0">
+                <a:solidFill>
+                  <a:srgbClr val="FFFFFF"/>
+                </a:solidFill>
+                <a:latin typeface="Calibri"/>
+              </a:rPr>
+              <a:t>  A-&gt;&gt;D: SELECT + INSERT        %% 60 ms</a:t>
+            </a:r>
+          </a:p>
+          <a:p>
+            <a:pPr>
+              <a:spcAft>
+                <a:spcPts val="400"/>
+              </a:spcAft>
+            </a:pPr>
+            <a:r>
+              <a:rPr sz="1400" b="0" i="0">
+                <a:solidFill>
+                  <a:srgbClr val="FFFFFF"/>
+                </a:solidFill>
+                <a:latin typeface="Calibri"/>
+              </a:rPr>
+              <a:t>  D--&gt;&gt;A: filas</a:t>
+            </a:r>
+          </a:p>
+          <a:p>
+            <a:pPr>
+              <a:spcAft>
+                <a:spcPts val="400"/>
+              </a:spcAft>
+            </a:pPr>
+            <a:r>
+              <a:rPr sz="1400" b="0" i="0">
+                <a:solidFill>
+                  <a:srgbClr val="FFFFFF"/>
+                </a:solidFill>
+                <a:latin typeface="Calibri"/>
+              </a:rPr>
+              <a:t>  A--&gt;&gt;W: 201 Created           %% red: 40 ms</a:t>
+            </a:r>
+          </a:p>
+          <a:p>
+            <a:pPr>
+              <a:spcAft>
+                <a:spcPts val="400"/>
+              </a:spcAft>
+            </a:pPr>
+            <a:r>
+              <a:rPr sz="1400" b="0" i="0">
+                <a:solidFill>
+                  <a:srgbClr val="FFFFFF"/>
+                </a:solidFill>
+                <a:latin typeface="Calibri"/>
+              </a:rPr>
+              <a:t>  W--&gt;&gt;U: confirmacion          %% render: 50 ms</a:t>
+            </a:r>
+          </a:p>
+          <a:p>
+            <a:pPr>
+              <a:spcAft>
+                <a:spcPts val="400"/>
+              </a:spcAft>
+            </a:pPr>
+            <a:r>
+              <a:rPr sz="1400" b="0" i="0">
+                <a:solidFill>
+                  <a:srgbClr val="FFFFFF"/>
+                </a:solidFill>
+                <a:latin typeface="Calibri"/>
+              </a:rPr>
+              <a:t/>
+            </a:r>
+          </a:p>
+          <a:p>
+            <a:pPr>
+              <a:spcAft>
+                <a:spcPts val="400"/>
+              </a:spcAft>
+            </a:pPr>
+            <a:r>
+              <a:rPr sz="1400" b="0" i="0">
+                <a:solidFill>
+                  <a:srgbClr val="FFFFFF"/>
+                </a:solidFill>
+                <a:latin typeface="Calibri"/>
+              </a:rPr>
+              <a:t>  Note over U,D: presupuesto total 200 ms · medido p95, no promedio</a:t>
+            </a:r>
+          </a:p>
+        </p:txBody>
+      </p:sp>
+      <p:sp>
+        <p:nvSpPr>
+          <p:cNvPr id="9" name="TextBox 8"/>
           <p:cNvSpPr txBox="1"/>
           <p:nvPr/>
         </p:nvSpPr>
@@ -6577,21 +7011,141 @@
                 </a:solidFill>
                 <a:latin typeface="Calibri"/>
               </a:rPr>
-              <a:t>El ensayo del pitch: la segunda mitad tiene su propia teoria (1/2)</a:t>
-            </a:r>
-          </a:p>
-        </p:txBody>
-      </p:sp>
-      <p:sp>
-        <p:nvSpPr>
-          <p:cNvPr id="5" name="TextBox 4"/>
+              <a:t>Las metricas objetivo, escritas como se verifican</a:t>
+            </a:r>
+          </a:p>
+        </p:txBody>
+      </p:sp>
+      <p:sp>
+        <p:nvSpPr>
+          <p:cNvPr id="5" name="Rounded Rectangle 4"/>
+          <p:cNvSpPr/>
+          <p:nvPr/>
+        </p:nvSpPr>
+        <p:spPr>
+          <a:xfrm>
+            <a:off x="457200" y="1261872"/>
+            <a:ext cx="11277295" cy="5093208"/>
+          </a:xfrm>
+          <a:prstGeom prst="roundRect">
+            <a:avLst>
+              <a:gd name="adj" fmla="val 12000"/>
+            </a:avLst>
+          </a:prstGeom>
+          <a:solidFill>
+            <a:srgbClr val="1E2A38"/>
+          </a:solidFill>
+          <a:ln>
+            <a:noFill/>
+          </a:ln>
+        </p:spPr>
+        <p:style>
+          <a:lnRef idx="1">
+            <a:schemeClr val="accent1"/>
+          </a:lnRef>
+          <a:fillRef idx="3">
+            <a:schemeClr val="accent1"/>
+          </a:fillRef>
+          <a:effectRef idx="2">
+            <a:schemeClr val="accent1"/>
+          </a:effectRef>
+          <a:fontRef idx="minor">
+            <a:schemeClr val="lt1"/>
+          </a:fontRef>
+        </p:style>
+        <p:txBody>
+          <a:bodyPr rtlCol="0" anchor="ctr"/>
+          <a:lstStyle/>
+          <a:p>
+            <a:pPr algn="ctr"/>
+          </a:p>
+        </p:txBody>
+      </p:sp>
+      <p:sp>
+        <p:nvSpPr>
+          <p:cNvPr id="6" name="Rectangle 5"/>
+          <p:cNvSpPr/>
+          <p:nvPr/>
+        </p:nvSpPr>
+        <p:spPr>
+          <a:xfrm>
+            <a:off x="457200" y="1261872"/>
+            <a:ext cx="11277295" cy="320040"/>
+          </a:xfrm>
+          <a:prstGeom prst="rect">
+            <a:avLst/>
+          </a:prstGeom>
+          <a:solidFill>
+            <a:srgbClr val="095292"/>
+          </a:solidFill>
+          <a:ln>
+            <a:noFill/>
+          </a:ln>
+        </p:spPr>
+        <p:style>
+          <a:lnRef idx="1">
+            <a:schemeClr val="accent1"/>
+          </a:lnRef>
+          <a:fillRef idx="3">
+            <a:schemeClr val="accent1"/>
+          </a:fillRef>
+          <a:effectRef idx="2">
+            <a:schemeClr val="accent1"/>
+          </a:effectRef>
+          <a:fontRef idx="minor">
+            <a:schemeClr val="lt1"/>
+          </a:fontRef>
+        </p:style>
+        <p:txBody>
+          <a:bodyPr rtlCol="0" anchor="ctr"/>
+          <a:lstStyle/>
+          <a:p>
+            <a:pPr algn="ctr"/>
+          </a:p>
+        </p:txBody>
+      </p:sp>
+      <p:sp>
+        <p:nvSpPr>
+          <p:cNvPr id="7" name="TextBox 6"/>
           <p:cNvSpPr txBox="1"/>
           <p:nvPr/>
         </p:nvSpPr>
         <p:spPr>
           <a:xfrm>
-            <a:off x="457200" y="1170432"/>
-            <a:ext cx="11277295" cy="5230368"/>
+            <a:off x="685800" y="1307592"/>
+            <a:ext cx="10820095" cy="256032"/>
+          </a:xfrm>
+          <a:prstGeom prst="rect">
+            <a:avLst/>
+          </a:prstGeom>
+          <a:noFill/>
+        </p:spPr>
+        <p:txBody>
+          <a:bodyPr wrap="square" anchor="ctr"/>
+          <a:lstStyle/>
+          <a:p>
+            <a:r>
+              <a:rPr sz="1000" b="1" i="0">
+                <a:solidFill>
+                  <a:srgbClr val="269CCB"/>
+                </a:solidFill>
+                <a:latin typeface="Calibri"/>
+              </a:rPr>
+              <a:t>● ● ●</a:t>
+            </a:r>
+          </a:p>
+        </p:txBody>
+      </p:sp>
+      <p:sp>
+        <p:nvSpPr>
+          <p:cNvPr id="8" name="TextBox 7"/>
+          <p:cNvSpPr txBox="1"/>
+          <p:nvPr/>
+        </p:nvSpPr>
+        <p:spPr>
+          <a:xfrm>
+            <a:off x="777240" y="1719072"/>
+            <a:ext cx="10637215" cy="4453128"/>
           </a:xfrm>
           <a:prstGeom prst="rect">
             <a:avLst/>
@@ -6606,72 +7160,200 @@
           <a:p>
             <a:pPr>
               <a:spcAft>
-                <a:spcPts val="800"/>
+                <a:spcPts val="400"/>
               </a:spcAft>
             </a:pPr>
             <a:r>
-              <a:rPr sz="2000" b="0" i="0">
-                <a:solidFill>
-                  <a:srgbClr val="333333"/>
-                </a:solidFill>
-                <a:latin typeface="Calibri"/>
-              </a:rPr>
-              <a:t>–   La segunda mitad de la clase es el ensayo del pitch y tiene su propia teoria.</a:t>
+              <a:rPr sz="1400" b="0" i="0">
+                <a:solidFill>
+                  <a:srgbClr val="FFFFFF"/>
+                </a:solidFill>
+                <a:latin typeface="Calibri"/>
+              </a:rPr>
+              <a:t># Cada metrica necesita las cuatro columnas, o no es verificable:</a:t>
             </a:r>
           </a:p>
           <a:p>
             <a:pPr>
               <a:spcAft>
-                <a:spcPts val="800"/>
+                <a:spcPts val="400"/>
               </a:spcAft>
             </a:pPr>
             <a:r>
-              <a:rPr sz="2000" b="0" i="0">
-                <a:solidFill>
-                  <a:srgbClr val="333333"/>
-                </a:solidFill>
-                <a:latin typeface="Calibri"/>
-              </a:rPr>
-              <a:t>–   Cinco a ocho minutos son entre 700 y 1000 palabras habladas, lo que alcanza para siete u ocho ideas y no mas, asi que el guion se escribe por presupuesto de tiempo: unos 45 segundos para el problema y el usuario</a:t>
+              <a:rPr sz="1400" b="0" i="0">
+                <a:solidFill>
+                  <a:srgbClr val="FFFFFF"/>
+                </a:solidFill>
+                <a:latin typeface="Calibri"/>
+              </a:rPr>
+              <a:t>#   metrica | objetivo | como se mide | que se hace si falla</a:t>
             </a:r>
           </a:p>
           <a:p>
             <a:pPr>
               <a:spcAft>
-                <a:spcPts val="800"/>
+                <a:spcPts val="400"/>
               </a:spcAft>
             </a:pPr>
             <a:r>
-              <a:rPr sz="2000" b="0" i="0">
-                <a:solidFill>
-                  <a:srgbClr val="333333"/>
-                </a:solidFill>
-                <a:latin typeface="Calibri"/>
-              </a:rPr>
-              <a:t>–   60 para el diagrama de Contexto, 90 para los Contenedores y las decisiones que los separan, 60 para seguridad y despliegue, 45 para el pipeline y las metricas, 45 para costos y escalabilidad, y 30 de cierre.</a:t>
+              <a:rPr sz="1400" b="0" i="0">
+                <a:solidFill>
+                  <a:srgbClr val="FFFFFF"/>
+                </a:solidFill>
+                <a:latin typeface="Calibri"/>
+              </a:rPr>
+              <a:t/>
             </a:r>
           </a:p>
           <a:p>
             <a:pPr>
               <a:spcAft>
-                <a:spcPts val="800"/>
+                <a:spcPts val="400"/>
               </a:spcAft>
             </a:pPr>
             <a:r>
-              <a:rPr sz="2000" b="0" i="0">
-                <a:solidFill>
-                  <a:srgbClr val="333333"/>
-                </a:solidFill>
-                <a:latin typeface="Calibri"/>
-              </a:rPr>
-              <a:t>–   La regla de oro del pitch de arquitectura es que se presentan decisiones con su trade-off, no un recorrido por las cajas del diagrama: "elegimos base de datos gestionada aunque cuesta el doble</a:t>
-            </a:r>
-          </a:p>
-        </p:txBody>
-      </p:sp>
-      <p:sp>
-        <p:nvSpPr>
-          <p:cNvPr id="6" name="TextBox 5"/>
+              <a:rPr sz="1400" b="0" i="0">
+                <a:solidFill>
+                  <a:srgbClr val="FFFFFF"/>
+                </a:solidFill>
+                <a:latin typeface="Calibri"/>
+              </a:rPr>
+              <a:t># p95 de POST /recurso   | &lt; 200 ms | percentil del log de la API</a:t>
+            </a:r>
+          </a:p>
+          <a:p>
+            <a:pPr>
+              <a:spcAft>
+                <a:spcPts val="400"/>
+              </a:spcAft>
+            </a:pPr>
+            <a:r>
+              <a:rPr sz="1400" b="0" i="0">
+                <a:solidFill>
+                  <a:srgbClr val="FFFFFF"/>
+                </a:solidFill>
+                <a:latin typeface="Calibri"/>
+              </a:rPr>
+              <a:t>#                        |          | -&gt; revisar el indice de la consulta</a:t>
+            </a:r>
+          </a:p>
+          <a:p>
+            <a:pPr>
+              <a:spcAft>
+                <a:spcPts val="400"/>
+              </a:spcAft>
+            </a:pPr>
+            <a:r>
+              <a:rPr sz="1400" b="0" i="0">
+                <a:solidFill>
+                  <a:srgbClr val="FFFFFF"/>
+                </a:solidFill>
+                <a:latin typeface="Calibri"/>
+              </a:rPr>
+              <a:t># tasa de error 5xx      | &lt; 1%     | conteo por minuto</a:t>
+            </a:r>
+          </a:p>
+          <a:p>
+            <a:pPr>
+              <a:spcAft>
+                <a:spcPts val="400"/>
+              </a:spcAft>
+            </a:pPr>
+            <a:r>
+              <a:rPr sz="1400" b="0" i="0">
+                <a:solidFill>
+                  <a:srgbClr val="FFFFFF"/>
+                </a:solidFill>
+                <a:latin typeface="Calibri"/>
+              </a:rPr>
+              <a:t>#                        |          | -&gt; abrir el log del paso que falla</a:t>
+            </a:r>
+          </a:p>
+          <a:p>
+            <a:pPr>
+              <a:spcAft>
+                <a:spcPts val="400"/>
+              </a:spcAft>
+            </a:pPr>
+            <a:r>
+              <a:rPr sz="1400" b="0" i="0">
+                <a:solidFill>
+                  <a:srgbClr val="FFFFFF"/>
+                </a:solidFill>
+                <a:latin typeface="Calibri"/>
+              </a:rPr>
+              <a:t># uso de CPU de la API   | &lt; 70%    | metrica del proveedor</a:t>
+            </a:r>
+          </a:p>
+          <a:p>
+            <a:pPr>
+              <a:spcAft>
+                <a:spcPts val="400"/>
+              </a:spcAft>
+            </a:pPr>
+            <a:r>
+              <a:rPr sz="1400" b="0" i="0">
+                <a:solidFill>
+                  <a:srgbClr val="FFFFFF"/>
+                </a:solidFill>
+                <a:latin typeface="Calibri"/>
+              </a:rPr>
+              <a:t>#                        |          | -&gt; escalar horizontal (Clase 13)</a:t>
+            </a:r>
+          </a:p>
+          <a:p>
+            <a:pPr>
+              <a:spcAft>
+                <a:spcPts val="400"/>
+              </a:spcAft>
+            </a:pPr>
+            <a:r>
+              <a:rPr sz="1400" b="0" i="0">
+                <a:solidFill>
+                  <a:srgbClr val="FFFFFF"/>
+                </a:solidFill>
+                <a:latin typeface="Calibri"/>
+              </a:rPr>
+              <a:t/>
+            </a:r>
+          </a:p>
+          <a:p>
+            <a:pPr>
+              <a:spcAft>
+                <a:spcPts val="400"/>
+              </a:spcAft>
+            </a:pPr>
+            <a:r>
+              <a:rPr sz="1400" b="0" i="0">
+                <a:solidFill>
+                  <a:srgbClr val="FFFFFF"/>
+                </a:solidFill>
+                <a:latin typeface="Calibri"/>
+              </a:rPr>
+              <a:t># PROMEDIO no sirve: con 99 respuestas de 10 ms y una de 5 s el promedio</a:t>
+            </a:r>
+          </a:p>
+          <a:p>
+            <a:pPr>
+              <a:spcAft>
+                <a:spcPts val="400"/>
+              </a:spcAft>
+            </a:pPr>
+            <a:r>
+              <a:rPr sz="1400" b="0" i="0">
+                <a:solidFill>
+                  <a:srgbClr val="FFFFFF"/>
+                </a:solidFill>
+                <a:latin typeface="Calibri"/>
+              </a:rPr>
+              <a:t># da 60 ms y el usuario que espero 5 s existe. Por eso p95.</a:t>
+            </a:r>
+          </a:p>
+        </p:txBody>
+      </p:sp>
+      <p:sp>
+        <p:nvSpPr>
+          <p:cNvPr id="9" name="TextBox 8"/>
           <p:cNvSpPr txBox="1"/>
           <p:nvPr/>
         </p:nvSpPr>
@@ -6845,21 +7527,142 @@
                 </a:solidFill>
                 <a:latin typeface="Calibri"/>
               </a:rPr>
-              <a:t>El ensayo del pitch: la segunda mitad tiene su propia teoria (2/2)</a:t>
-            </a:r>
-          </a:p>
-        </p:txBody>
-      </p:sp>
-      <p:sp>
-        <p:nvSpPr>
-          <p:cNvPr id="5" name="TextBox 4"/>
+              <a:t>«Que sea rapido» no es un requisito</a:t>
+            </a:r>
+          </a:p>
+        </p:txBody>
+      </p:sp>
+      <p:sp>
+        <p:nvSpPr>
+          <p:cNvPr id="5" name="Rounded Rectangle 4"/>
+          <p:cNvSpPr/>
+          <p:nvPr/>
+        </p:nvSpPr>
+        <p:spPr>
+          <a:xfrm>
+            <a:off x="457200" y="1261872"/>
+            <a:ext cx="5478627" cy="5093208"/>
+          </a:xfrm>
+          <a:prstGeom prst="roundRect">
+            <a:avLst>
+              <a:gd name="adj" fmla="val 12000"/>
+            </a:avLst>
+          </a:prstGeom>
+          <a:solidFill>
+            <a:srgbClr val="FBE4E4"/>
+          </a:solidFill>
+          <a:ln>
+            <a:noFill/>
+          </a:ln>
+        </p:spPr>
+        <p:style>
+          <a:lnRef idx="1">
+            <a:schemeClr val="accent1"/>
+          </a:lnRef>
+          <a:fillRef idx="3">
+            <a:schemeClr val="accent1"/>
+          </a:fillRef>
+          <a:effectRef idx="2">
+            <a:schemeClr val="accent1"/>
+          </a:effectRef>
+          <a:fontRef idx="minor">
+            <a:schemeClr val="lt1"/>
+          </a:fontRef>
+        </p:style>
+        <p:txBody>
+          <a:bodyPr rtlCol="0" anchor="ctr"/>
+          <a:lstStyle/>
+          <a:p>
+            <a:pPr algn="ctr"/>
+          </a:p>
+        </p:txBody>
+      </p:sp>
+      <p:sp>
+        <p:nvSpPr>
+          <p:cNvPr id="6" name="Rectangle 5"/>
+          <p:cNvSpPr/>
+          <p:nvPr/>
+        </p:nvSpPr>
+        <p:spPr>
+          <a:xfrm>
+            <a:off x="457200" y="1261872"/>
+            <a:ext cx="5478627" cy="502920"/>
+          </a:xfrm>
+          <a:prstGeom prst="rect">
+            <a:avLst/>
+          </a:prstGeom>
+          <a:solidFill>
+            <a:srgbClr val="A02030"/>
+          </a:solidFill>
+          <a:ln>
+            <a:noFill/>
+          </a:ln>
+        </p:spPr>
+        <p:style>
+          <a:lnRef idx="1">
+            <a:schemeClr val="accent1"/>
+          </a:lnRef>
+          <a:fillRef idx="3">
+            <a:schemeClr val="accent1"/>
+          </a:fillRef>
+          <a:effectRef idx="2">
+            <a:schemeClr val="accent1"/>
+          </a:effectRef>
+          <a:fontRef idx="minor">
+            <a:schemeClr val="lt1"/>
+          </a:fontRef>
+        </p:style>
+        <p:txBody>
+          <a:bodyPr rtlCol="0" anchor="ctr"/>
+          <a:lstStyle/>
+          <a:p>
+            <a:pPr algn="ctr"/>
+          </a:p>
+        </p:txBody>
+      </p:sp>
+      <p:sp>
+        <p:nvSpPr>
+          <p:cNvPr id="7" name="TextBox 6"/>
           <p:cNvSpPr txBox="1"/>
           <p:nvPr/>
         </p:nvSpPr>
         <p:spPr>
           <a:xfrm>
-            <a:off x="457200" y="1170432"/>
-            <a:ext cx="11277295" cy="5230368"/>
+            <a:off x="594360" y="1353312"/>
+            <a:ext cx="5204307" cy="365760"/>
+          </a:xfrm>
+          <a:prstGeom prst="rect">
+            <a:avLst/>
+          </a:prstGeom>
+          <a:noFill/>
+        </p:spPr>
+        <p:txBody>
+          <a:bodyPr wrap="square" anchor="ctr"/>
+          <a:lstStyle/>
+          <a:p>
+            <a:pPr algn="ctr"/>
+            <a:r>
+              <a:rPr sz="1600" b="1" i="0">
+                <a:solidFill>
+                  <a:srgbClr val="FFFFFF"/>
+                </a:solidFill>
+                <a:latin typeface="Calibri"/>
+              </a:rPr>
+              <a:t>Enunciado vago</a:t>
+            </a:r>
+          </a:p>
+        </p:txBody>
+      </p:sp>
+      <p:sp>
+        <p:nvSpPr>
+          <p:cNvPr id="8" name="TextBox 7"/>
+          <p:cNvSpPr txBox="1"/>
+          <p:nvPr/>
+        </p:nvSpPr>
+        <p:spPr>
+          <a:xfrm>
+            <a:off x="621792" y="1901952"/>
+            <a:ext cx="5158587" cy="4498848"/>
           </a:xfrm>
           <a:prstGeom prst="rect">
             <a:avLst/>
@@ -6878,13 +7681,13 @@
               </a:spcAft>
             </a:pPr>
             <a:r>
-              <a:rPr sz="2000" b="0" i="0">
+              <a:rPr sz="1500" b="0" i="0">
                 <a:solidFill>
                   <a:srgbClr val="333333"/>
                 </a:solidFill>
                 <a:latin typeface="Calibri"/>
               </a:rPr>
-              <a:t>–   Porque no podemos garantizar respaldos manuales" es una frase de arquitecto; "aqui tenemos una base de datos" es una leyenda de imagen.</a:t>
+              <a:t>–   «La app tiene que ser rapida»</a:t>
             </a:r>
           </a:p>
           <a:p>
@@ -6894,13 +7697,13 @@
               </a:spcAft>
             </a:pPr>
             <a:r>
-              <a:rPr sz="2000" b="0" i="0">
+              <a:rPr sz="1500" b="0" i="0">
                 <a:solidFill>
                   <a:srgbClr val="333333"/>
                 </a:solidFill>
                 <a:latin typeface="Calibri"/>
               </a:rPr>
-              <a:t>–   Se ensaya hoy con cronometro y en voz alta, porque leer mentalmente siempre da la mitad del tiempo real</a:t>
+              <a:t>–   «Aguanta harta gente»</a:t>
             </a:r>
           </a:p>
           <a:p>
@@ -6910,20 +7713,339 @@
               </a:spcAft>
             </a:pPr>
             <a:r>
-              <a:rPr sz="2000" b="0" i="0">
+              <a:rPr sz="1500" b="0" i="0">
                 <a:solidFill>
                   <a:srgbClr val="333333"/>
                 </a:solidFill>
                 <a:latin typeface="Calibri"/>
               </a:rPr>
-              <a:t>–   Y sin leer las diapositivas, ya que en la Clase 15 el criterio es que quien sustenta pueda explicar cualquier parte del sistema; si el docente autorizo equipos, se ensaya ademas con rotacion de expositor, porque alli el criterio aplica a cualquier integrante.</a:t>
-            </a:r>
-          </a:p>
-        </p:txBody>
-      </p:sp>
-      <p:sp>
-        <p:nvSpPr>
-          <p:cNvPr id="6" name="TextBox 5"/>
+              <a:t>–   «Si se pone lenta, le subimos recursos»</a:t>
+            </a:r>
+          </a:p>
+          <a:p>
+            <a:pPr>
+              <a:spcAft>
+                <a:spcPts val="800"/>
+              </a:spcAft>
+            </a:pPr>
+            <a:r>
+              <a:rPr sz="1500" b="0" i="0">
+                <a:solidFill>
+                  <a:srgbClr val="333333"/>
+                </a:solidFill>
+                <a:latin typeface="Calibri"/>
+              </a:rPr>
+              <a:t>–   No hay con que comparar despues</a:t>
+            </a:r>
+          </a:p>
+          <a:p>
+            <a:pPr>
+              <a:spcAft>
+                <a:spcPts val="800"/>
+              </a:spcAft>
+            </a:pPr>
+            <a:r>
+              <a:rPr sz="1500" b="0" i="0">
+                <a:solidFill>
+                  <a:srgbClr val="333333"/>
+                </a:solidFill>
+                <a:latin typeface="Calibri"/>
+              </a:rPr>
+              <a:t>–   Nadie puede decir si se cumplio</a:t>
+            </a:r>
+          </a:p>
+        </p:txBody>
+      </p:sp>
+      <p:sp>
+        <p:nvSpPr>
+          <p:cNvPr id="9" name="Rounded Rectangle 8"/>
+          <p:cNvSpPr/>
+          <p:nvPr/>
+        </p:nvSpPr>
+        <p:spPr>
+          <a:xfrm>
+            <a:off x="6255867" y="1261872"/>
+            <a:ext cx="5478627" cy="5093208"/>
+          </a:xfrm>
+          <a:prstGeom prst="roundRect">
+            <a:avLst>
+              <a:gd name="adj" fmla="val 12000"/>
+            </a:avLst>
+          </a:prstGeom>
+          <a:solidFill>
+            <a:srgbClr val="E8F4FA"/>
+          </a:solidFill>
+          <a:ln>
+            <a:noFill/>
+          </a:ln>
+        </p:spPr>
+        <p:style>
+          <a:lnRef idx="1">
+            <a:schemeClr val="accent1"/>
+          </a:lnRef>
+          <a:fillRef idx="3">
+            <a:schemeClr val="accent1"/>
+          </a:fillRef>
+          <a:effectRef idx="2">
+            <a:schemeClr val="accent1"/>
+          </a:effectRef>
+          <a:fontRef idx="minor">
+            <a:schemeClr val="lt1"/>
+          </a:fontRef>
+        </p:style>
+        <p:txBody>
+          <a:bodyPr rtlCol="0" anchor="ctr"/>
+          <a:lstStyle/>
+          <a:p>
+            <a:pPr algn="ctr"/>
+          </a:p>
+        </p:txBody>
+      </p:sp>
+      <p:sp>
+        <p:nvSpPr>
+          <p:cNvPr id="10" name="Rectangle 9"/>
+          <p:cNvSpPr/>
+          <p:nvPr/>
+        </p:nvSpPr>
+        <p:spPr>
+          <a:xfrm>
+            <a:off x="6255867" y="1261872"/>
+            <a:ext cx="5478627" cy="502920"/>
+          </a:xfrm>
+          <a:prstGeom prst="rect">
+            <a:avLst/>
+          </a:prstGeom>
+          <a:solidFill>
+            <a:srgbClr val="095292"/>
+          </a:solidFill>
+          <a:ln>
+            <a:noFill/>
+          </a:ln>
+        </p:spPr>
+        <p:style>
+          <a:lnRef idx="1">
+            <a:schemeClr val="accent1"/>
+          </a:lnRef>
+          <a:fillRef idx="3">
+            <a:schemeClr val="accent1"/>
+          </a:fillRef>
+          <a:effectRef idx="2">
+            <a:schemeClr val="accent1"/>
+          </a:effectRef>
+          <a:fontRef idx="minor">
+            <a:schemeClr val="lt1"/>
+          </a:fontRef>
+        </p:style>
+        <p:txBody>
+          <a:bodyPr rtlCol="0" anchor="ctr"/>
+          <a:lstStyle/>
+          <a:p>
+            <a:pPr algn="ctr"/>
+          </a:p>
+        </p:txBody>
+      </p:sp>
+      <p:sp>
+        <p:nvSpPr>
+          <p:cNvPr id="11" name="TextBox 10"/>
+          <p:cNvSpPr txBox="1"/>
+          <p:nvPr/>
+        </p:nvSpPr>
+        <p:spPr>
+          <a:xfrm>
+            <a:off x="6393027" y="1353312"/>
+            <a:ext cx="5204307" cy="365760"/>
+          </a:xfrm>
+          <a:prstGeom prst="rect">
+            <a:avLst/>
+          </a:prstGeom>
+          <a:noFill/>
+        </p:spPr>
+        <p:txBody>
+          <a:bodyPr wrap="square" anchor="ctr"/>
+          <a:lstStyle/>
+          <a:p>
+            <a:pPr algn="ctr"/>
+            <a:r>
+              <a:rPr sz="1600" b="1" i="0">
+                <a:solidFill>
+                  <a:srgbClr val="FFFFFF"/>
+                </a:solidFill>
+                <a:latin typeface="Calibri"/>
+              </a:rPr>
+              <a:t>Enunciado medible</a:t>
+            </a:r>
+          </a:p>
+        </p:txBody>
+      </p:sp>
+      <p:sp>
+        <p:nvSpPr>
+          <p:cNvPr id="12" name="TextBox 11"/>
+          <p:cNvSpPr txBox="1"/>
+          <p:nvPr/>
+        </p:nvSpPr>
+        <p:spPr>
+          <a:xfrm>
+            <a:off x="6420459" y="1901952"/>
+            <a:ext cx="5158587" cy="4498848"/>
+          </a:xfrm>
+          <a:prstGeom prst="rect">
+            <a:avLst/>
+          </a:prstGeom>
+          <a:noFill/>
+        </p:spPr>
+        <p:txBody>
+          <a:bodyPr wrap="square">
+            <a:spAutoFit/>
+          </a:bodyPr>
+          <a:lstStyle/>
+          <a:p>
+            <a:pPr>
+              <a:spcAft>
+                <a:spcPts val="800"/>
+              </a:spcAft>
+            </a:pPr>
+            <a:r>
+              <a:rPr sz="1500" b="0" i="0">
+                <a:solidFill>
+                  <a:srgbClr val="333333"/>
+                </a:solidFill>
+                <a:latin typeface="Calibri"/>
+              </a:rPr>
+              <a:t>–   </a:t>
+            </a:r>
+            <a:r>
+              <a:rPr sz="1500" b="1" i="0">
+                <a:solidFill>
+                  <a:srgbClr val="333333"/>
+                </a:solidFill>
+                <a:latin typeface="Calibri"/>
+              </a:rPr>
+              <a:t>p95 &lt; 300 ms</a:t>
+            </a:r>
+            <a:r>
+              <a:rPr sz="1500" b="0" i="0">
+                <a:solidFill>
+                  <a:srgbClr val="333333"/>
+                </a:solidFill>
+                <a:latin typeface="Calibri"/>
+              </a:rPr>
+              <a:t> en el endpoint de reserva</a:t>
+            </a:r>
+          </a:p>
+          <a:p>
+            <a:pPr>
+              <a:spcAft>
+                <a:spcPts val="800"/>
+              </a:spcAft>
+            </a:pPr>
+            <a:r>
+              <a:rPr sz="1500" b="0" i="0">
+                <a:solidFill>
+                  <a:srgbClr val="333333"/>
+                </a:solidFill>
+                <a:latin typeface="Calibri"/>
+              </a:rPr>
+              <a:t>–   Escenario: </a:t>
+            </a:r>
+            <a:r>
+              <a:rPr sz="1500" b="1" i="0">
+                <a:solidFill>
+                  <a:srgbClr val="333333"/>
+                </a:solidFill>
+                <a:latin typeface="Calibri"/>
+              </a:rPr>
+              <a:t>150 RPS</a:t>
+            </a:r>
+            <a:r>
+              <a:rPr sz="1500" b="0" i="0">
+                <a:solidFill>
+                  <a:srgbClr val="333333"/>
+                </a:solidFill>
+                <a:latin typeface="Calibri"/>
+              </a:rPr>
+              <a:t> en el pico de inicio de semestre</a:t>
+            </a:r>
+          </a:p>
+          <a:p>
+            <a:pPr>
+              <a:spcAft>
+                <a:spcPts val="800"/>
+              </a:spcAft>
+            </a:pPr>
+            <a:r>
+              <a:rPr sz="1500" b="0" i="0">
+                <a:solidFill>
+                  <a:srgbClr val="333333"/>
+                </a:solidFill>
+                <a:latin typeface="Calibri"/>
+              </a:rPr>
+              <a:t>–   Bottleneck sospechado: </a:t>
+            </a:r>
+            <a:r>
+              <a:rPr sz="1500" b="1" i="0">
+                <a:solidFill>
+                  <a:srgbClr val="333333"/>
+                </a:solidFill>
+                <a:latin typeface="Calibri"/>
+              </a:rPr>
+              <a:t>consulta a la BD</a:t>
+            </a:r>
+          </a:p>
+          <a:p>
+            <a:pPr>
+              <a:spcAft>
+                <a:spcPts val="800"/>
+              </a:spcAft>
+            </a:pPr>
+            <a:r>
+              <a:rPr sz="1500" b="0" i="0">
+                <a:solidFill>
+                  <a:srgbClr val="333333"/>
+                </a:solidFill>
+                <a:latin typeface="Calibri"/>
+              </a:rPr>
+              <a:t>–   Se puede verificar: pasa o no pasa</a:t>
+            </a:r>
+          </a:p>
+          <a:p>
+            <a:pPr>
+              <a:spcAft>
+                <a:spcPts val="800"/>
+              </a:spcAft>
+            </a:pPr>
+            <a:r>
+              <a:rPr sz="1500" b="0" i="0">
+                <a:solidFill>
+                  <a:srgbClr val="333333"/>
+                </a:solidFill>
+                <a:latin typeface="Calibri"/>
+              </a:rPr>
+              <a:t>–   Errores: </a:t>
+            </a:r>
+            <a:r>
+              <a:rPr sz="1500" b="1" i="0">
+                <a:solidFill>
+                  <a:srgbClr val="333333"/>
+                </a:solidFill>
+                <a:latin typeface="Calibri"/>
+              </a:rPr>
+              <a:t>&lt; 1 %</a:t>
+            </a:r>
+            <a:r>
+              <a:rPr sz="1500" b="0" i="0">
+                <a:solidFill>
+                  <a:srgbClr val="333333"/>
+                </a:solidFill>
+                <a:latin typeface="Calibri"/>
+              </a:rPr>
+              <a:t> de respuestas 5xx</a:t>
+            </a:r>
+          </a:p>
+        </p:txBody>
+      </p:sp>
+      <p:sp>
+        <p:nvSpPr>
+          <p:cNvPr id="13" name="TextBox 12"/>
           <p:cNvSpPr txBox="1"/>
           <p:nvPr/>
         </p:nvSpPr>
@@ -7213,7 +8335,7 @@
                 </a:solidFill>
                 <a:latin typeface="Calibri"/>
               </a:rPr>
-              <a:t> Ejemplos resueltos y demo del docente sobre el tema.</a:t>
+              <a:t> Ejemplos resueltos y demostración sobre el tema.</a:t>
             </a:r>
           </a:p>
           <a:p>
@@ -7338,7 +8460,7 @@
         <p:spPr>
           <a:xfrm>
             <a:off x="0" y="0"/>
-            <a:ext cx="12191695" cy="960120"/>
+            <a:ext cx="12191695" cy="1170432"/>
           </a:xfrm>
           <a:prstGeom prst="rect">
             <a:avLst/>
@@ -7380,7 +8502,7 @@
         </p:nvSpPr>
         <p:spPr>
           <a:xfrm>
-            <a:off x="0" y="960120"/>
+            <a:off x="0" y="1170432"/>
             <a:ext cx="12191695" cy="41148"/>
           </a:xfrm>
           <a:prstGeom prst="rect">
@@ -7424,7 +8546,7 @@
         <p:spPr>
           <a:xfrm>
             <a:off x="457200" y="164592"/>
-            <a:ext cx="11277295" cy="502920"/>
+            <a:ext cx="11277295" cy="384048"/>
           </a:xfrm>
           <a:prstGeom prst="rect">
             <a:avLst/>
@@ -7444,7 +8566,7 @@
                 </a:solidFill>
                 <a:latin typeface="Calibri"/>
               </a:rPr>
-              <a:t>Preguntas frecuentes y cierre conceptual () (1/3)</a:t>
+              <a:t>Del boceto al código Mermaid</a:t>
             </a:r>
           </a:p>
         </p:txBody>
@@ -7457,8 +8579,8 @@
         </p:nvSpPr>
         <p:spPr>
           <a:xfrm>
-            <a:off x="457200" y="1170432"/>
-            <a:ext cx="11277295" cy="5230368"/>
+            <a:off x="457200" y="566928"/>
+            <a:ext cx="11277295" cy="411480"/>
           </a:xfrm>
           <a:prstGeom prst="rect">
             <a:avLst/>
@@ -7471,74 +8593,705 @@
           </a:bodyPr>
           <a:lstStyle/>
           <a:p>
+            <a:r>
+              <a:rPr sz="1400" b="0" i="0">
+                <a:solidFill>
+                  <a:srgbClr val="B8D8EE"/>
+                </a:solidFill>
+                <a:latin typeface="Calibri"/>
+              </a:rPr>
+              <a:t>El diagrama se escribe como código: se versiona, se compara y se corrige</a:t>
+            </a:r>
+          </a:p>
+        </p:txBody>
+      </p:sp>
+      <p:sp>
+        <p:nvSpPr>
+          <p:cNvPr id="6" name="Rounded Rectangle 5"/>
+          <p:cNvSpPr/>
+          <p:nvPr/>
+        </p:nvSpPr>
+        <p:spPr>
+          <a:xfrm>
+            <a:off x="457200" y="1659636"/>
+            <a:ext cx="11277295" cy="1051560"/>
+          </a:xfrm>
+          <a:prstGeom prst="roundRect">
+            <a:avLst>
+              <a:gd name="adj" fmla="val 12000"/>
+            </a:avLst>
+          </a:prstGeom>
+          <a:solidFill>
+            <a:srgbClr val="F2F2F2"/>
+          </a:solidFill>
+          <a:ln>
+            <a:noFill/>
+          </a:ln>
+        </p:spPr>
+        <p:style>
+          <a:lnRef idx="1">
+            <a:schemeClr val="accent1"/>
+          </a:lnRef>
+          <a:fillRef idx="3">
+            <a:schemeClr val="accent1"/>
+          </a:fillRef>
+          <a:effectRef idx="2">
+            <a:schemeClr val="accent1"/>
+          </a:effectRef>
+          <a:fontRef idx="minor">
+            <a:schemeClr val="lt1"/>
+          </a:fontRef>
+        </p:style>
+        <p:txBody>
+          <a:bodyPr rtlCol="0" anchor="ctr"/>
+          <a:lstStyle/>
+          <a:p>
+            <a:pPr algn="ctr"/>
+          </a:p>
+        </p:txBody>
+      </p:sp>
+      <p:sp>
+        <p:nvSpPr>
+          <p:cNvPr id="7" name="Rounded Rectangle 6"/>
+          <p:cNvSpPr/>
+          <p:nvPr/>
+        </p:nvSpPr>
+        <p:spPr>
+          <a:xfrm>
+            <a:off x="594360" y="1965960"/>
+            <a:ext cx="438912" cy="438912"/>
+          </a:xfrm>
+          <a:prstGeom prst="roundRect">
+            <a:avLst>
+              <a:gd name="adj" fmla="val 12000"/>
+            </a:avLst>
+          </a:prstGeom>
+          <a:solidFill>
+            <a:srgbClr val="095292"/>
+          </a:solidFill>
+          <a:ln>
+            <a:noFill/>
+          </a:ln>
+        </p:spPr>
+        <p:style>
+          <a:lnRef idx="1">
+            <a:schemeClr val="accent1"/>
+          </a:lnRef>
+          <a:fillRef idx="3">
+            <a:schemeClr val="accent1"/>
+          </a:fillRef>
+          <a:effectRef idx="2">
+            <a:schemeClr val="accent1"/>
+          </a:effectRef>
+          <a:fontRef idx="minor">
+            <a:schemeClr val="lt1"/>
+          </a:fontRef>
+        </p:style>
+        <p:txBody>
+          <a:bodyPr rtlCol="0" anchor="ctr"/>
+          <a:lstStyle/>
+          <a:p>
+            <a:pPr algn="ctr"/>
+          </a:p>
+        </p:txBody>
+      </p:sp>
+      <p:sp>
+        <p:nvSpPr>
+          <p:cNvPr id="8" name="TextBox 7"/>
+          <p:cNvSpPr txBox="1"/>
+          <p:nvPr/>
+        </p:nvSpPr>
+        <p:spPr>
+          <a:xfrm>
+            <a:off x="594360" y="1965960"/>
+            <a:ext cx="438912" cy="438912"/>
+          </a:xfrm>
+          <a:prstGeom prst="rect">
+            <a:avLst/>
+          </a:prstGeom>
+          <a:noFill/>
+        </p:spPr>
+        <p:txBody>
+          <a:bodyPr wrap="square" anchor="ctr"/>
+          <a:lstStyle/>
+          <a:p>
+            <a:pPr algn="ctr"/>
+            <a:r>
+              <a:rPr sz="1600" b="1" i="0">
+                <a:solidFill>
+                  <a:srgbClr val="FFFFFF"/>
+                </a:solidFill>
+                <a:latin typeface="Calibri"/>
+              </a:rPr>
+              <a:t>1</a:t>
+            </a:r>
+          </a:p>
+        </p:txBody>
+      </p:sp>
+      <p:sp>
+        <p:nvSpPr>
+          <p:cNvPr id="9" name="TextBox 8"/>
+          <p:cNvSpPr txBox="1"/>
+          <p:nvPr/>
+        </p:nvSpPr>
+        <p:spPr>
+          <a:xfrm>
+            <a:off x="1188720" y="1751076"/>
+            <a:ext cx="10271455" cy="886968"/>
+          </a:xfrm>
+          <a:prstGeom prst="rect">
+            <a:avLst/>
+          </a:prstGeom>
+          <a:noFill/>
+        </p:spPr>
+        <p:txBody>
+          <a:bodyPr wrap="square" anchor="ctr"/>
+          <a:lstStyle/>
+          <a:p>
+            <a:r>
+              <a:rPr sz="1500" b="1" i="0">
+                <a:solidFill>
+                  <a:srgbClr val="095292"/>
+                </a:solidFill>
+                <a:latin typeface="Calibri"/>
+              </a:rPr>
+              <a:t>Diseña visual</a:t>
+            </a:r>
+          </a:p>
+          <a:p>
             <a:pPr>
-              <a:spcAft>
-                <a:spcPts val="800"/>
-              </a:spcAft>
+              <a:spcBef>
+                <a:spcPts val="200"/>
+              </a:spcBef>
             </a:pPr>
             <a:r>
-              <a:rPr sz="2000" b="0" i="0">
+              <a:rPr sz="1300" b="0" i="0">
                 <a:solidFill>
                   <a:srgbClr val="333333"/>
                 </a:solidFill>
                 <a:latin typeface="Calibri"/>
               </a:rPr>
-              <a:t>–   La primera es como se prueba rendimiento sin usuarios reales; la respuesta es que la carga se simula y que lo valioso no es el numero obtenido sino el modelo: si el estudiante puede decir cuantos usuarios, cuantas peticiones por usuario</a:t>
+              <a:t>Dibuja el diagrama como quieras en Excalidraw o draw.io: es más rápido arrastrar cajas que escribir código, y ahí es donde se piensa el modelo.</a:t>
+            </a:r>
+          </a:p>
+        </p:txBody>
+      </p:sp>
+      <p:sp>
+        <p:nvSpPr>
+          <p:cNvPr id="10" name="Rounded Rectangle 9"/>
+          <p:cNvSpPr/>
+          <p:nvPr/>
+        </p:nvSpPr>
+        <p:spPr>
+          <a:xfrm>
+            <a:off x="457200" y="2802636"/>
+            <a:ext cx="11277295" cy="1051560"/>
+          </a:xfrm>
+          <a:prstGeom prst="roundRect">
+            <a:avLst>
+              <a:gd name="adj" fmla="val 12000"/>
+            </a:avLst>
+          </a:prstGeom>
+          <a:solidFill>
+            <a:srgbClr val="E8F4FA"/>
+          </a:solidFill>
+          <a:ln>
+            <a:noFill/>
+          </a:ln>
+        </p:spPr>
+        <p:style>
+          <a:lnRef idx="1">
+            <a:schemeClr val="accent1"/>
+          </a:lnRef>
+          <a:fillRef idx="3">
+            <a:schemeClr val="accent1"/>
+          </a:fillRef>
+          <a:effectRef idx="2">
+            <a:schemeClr val="accent1"/>
+          </a:effectRef>
+          <a:fontRef idx="minor">
+            <a:schemeClr val="lt1"/>
+          </a:fontRef>
+        </p:style>
+        <p:txBody>
+          <a:bodyPr rtlCol="0" anchor="ctr"/>
+          <a:lstStyle/>
+          <a:p>
+            <a:pPr algn="ctr"/>
+          </a:p>
+        </p:txBody>
+      </p:sp>
+      <p:sp>
+        <p:nvSpPr>
+          <p:cNvPr id="11" name="Rounded Rectangle 10"/>
+          <p:cNvSpPr/>
+          <p:nvPr/>
+        </p:nvSpPr>
+        <p:spPr>
+          <a:xfrm>
+            <a:off x="594360" y="3108960"/>
+            <a:ext cx="438912" cy="438912"/>
+          </a:xfrm>
+          <a:prstGeom prst="roundRect">
+            <a:avLst>
+              <a:gd name="adj" fmla="val 12000"/>
+            </a:avLst>
+          </a:prstGeom>
+          <a:solidFill>
+            <a:srgbClr val="095292"/>
+          </a:solidFill>
+          <a:ln>
+            <a:noFill/>
+          </a:ln>
+        </p:spPr>
+        <p:style>
+          <a:lnRef idx="1">
+            <a:schemeClr val="accent1"/>
+          </a:lnRef>
+          <a:fillRef idx="3">
+            <a:schemeClr val="accent1"/>
+          </a:fillRef>
+          <a:effectRef idx="2">
+            <a:schemeClr val="accent1"/>
+          </a:effectRef>
+          <a:fontRef idx="minor">
+            <a:schemeClr val="lt1"/>
+          </a:fontRef>
+        </p:style>
+        <p:txBody>
+          <a:bodyPr rtlCol="0" anchor="ctr"/>
+          <a:lstStyle/>
+          <a:p>
+            <a:pPr algn="ctr"/>
+          </a:p>
+        </p:txBody>
+      </p:sp>
+      <p:sp>
+        <p:nvSpPr>
+          <p:cNvPr id="12" name="TextBox 11"/>
+          <p:cNvSpPr txBox="1"/>
+          <p:nvPr/>
+        </p:nvSpPr>
+        <p:spPr>
+          <a:xfrm>
+            <a:off x="594360" y="3108960"/>
+            <a:ext cx="438912" cy="438912"/>
+          </a:xfrm>
+          <a:prstGeom prst="rect">
+            <a:avLst/>
+          </a:prstGeom>
+          <a:noFill/>
+        </p:spPr>
+        <p:txBody>
+          <a:bodyPr wrap="square" anchor="ctr"/>
+          <a:lstStyle/>
+          <a:p>
+            <a:pPr algn="ctr"/>
+            <a:r>
+              <a:rPr sz="1600" b="1" i="0">
+                <a:solidFill>
+                  <a:srgbClr val="FFFFFF"/>
+                </a:solidFill>
+                <a:latin typeface="Calibri"/>
+              </a:rPr>
+              <a:t>2</a:t>
+            </a:r>
+          </a:p>
+        </p:txBody>
+      </p:sp>
+      <p:sp>
+        <p:nvSpPr>
+          <p:cNvPr id="13" name="TextBox 12"/>
+          <p:cNvSpPr txBox="1"/>
+          <p:nvPr/>
+        </p:nvSpPr>
+        <p:spPr>
+          <a:xfrm>
+            <a:off x="1188720" y="2894076"/>
+            <a:ext cx="10271455" cy="886968"/>
+          </a:xfrm>
+          <a:prstGeom prst="rect">
+            <a:avLst/>
+          </a:prstGeom>
+          <a:noFill/>
+        </p:spPr>
+        <p:txBody>
+          <a:bodyPr wrap="square" anchor="ctr"/>
+          <a:lstStyle/>
+          <a:p>
+            <a:r>
+              <a:rPr sz="1500" b="1" i="0">
+                <a:solidFill>
+                  <a:srgbClr val="095292"/>
+                </a:solidFill>
+                <a:latin typeface="Calibri"/>
+              </a:rPr>
+              <a:t>Traduce con IA</a:t>
             </a:r>
           </a:p>
           <a:p>
             <a:pPr>
-              <a:spcAft>
-                <a:spcPts val="800"/>
-              </a:spcAft>
+              <a:spcBef>
+                <a:spcPts val="200"/>
+              </a:spcBef>
             </a:pPr>
             <a:r>
-              <a:rPr sz="2000" b="0" i="0">
+              <a:rPr sz="1300" b="0" i="0">
                 <a:solidFill>
                   <a:srgbClr val="333333"/>
                 </a:solidFill>
                 <a:latin typeface="Calibri"/>
               </a:rPr>
-              <a:t>–   Que factor de pico y que componente cree que cede primero, ya esta haciendo ingenieria de rendimiento aunque el sistema sea un stub.</a:t>
+              <a:t>Describe tu boceto a una IA y pídele el código Mermaid usando sequenceDiagram. Revisa el resultado: la IA acierta la sintaxis, no tu modelo.</a:t>
+            </a:r>
+          </a:p>
+        </p:txBody>
+      </p:sp>
+      <p:sp>
+        <p:nvSpPr>
+          <p:cNvPr id="14" name="Rounded Rectangle 13"/>
+          <p:cNvSpPr/>
+          <p:nvPr/>
+        </p:nvSpPr>
+        <p:spPr>
+          <a:xfrm>
+            <a:off x="457200" y="3945636"/>
+            <a:ext cx="11277295" cy="1051560"/>
+          </a:xfrm>
+          <a:prstGeom prst="roundRect">
+            <a:avLst>
+              <a:gd name="adj" fmla="val 12000"/>
+            </a:avLst>
+          </a:prstGeom>
+          <a:solidFill>
+            <a:srgbClr val="F2F2F2"/>
+          </a:solidFill>
+          <a:ln>
+            <a:noFill/>
+          </a:ln>
+        </p:spPr>
+        <p:style>
+          <a:lnRef idx="1">
+            <a:schemeClr val="accent1"/>
+          </a:lnRef>
+          <a:fillRef idx="3">
+            <a:schemeClr val="accent1"/>
+          </a:fillRef>
+          <a:effectRef idx="2">
+            <a:schemeClr val="accent1"/>
+          </a:effectRef>
+          <a:fontRef idx="minor">
+            <a:schemeClr val="lt1"/>
+          </a:fontRef>
+        </p:style>
+        <p:txBody>
+          <a:bodyPr rtlCol="0" anchor="ctr"/>
+          <a:lstStyle/>
+          <a:p>
+            <a:pPr algn="ctr"/>
+          </a:p>
+        </p:txBody>
+      </p:sp>
+      <p:sp>
+        <p:nvSpPr>
+          <p:cNvPr id="15" name="Rounded Rectangle 14"/>
+          <p:cNvSpPr/>
+          <p:nvPr/>
+        </p:nvSpPr>
+        <p:spPr>
+          <a:xfrm>
+            <a:off x="594360" y="4251960"/>
+            <a:ext cx="438912" cy="438912"/>
+          </a:xfrm>
+          <a:prstGeom prst="roundRect">
+            <a:avLst>
+              <a:gd name="adj" fmla="val 12000"/>
+            </a:avLst>
+          </a:prstGeom>
+          <a:solidFill>
+            <a:srgbClr val="095292"/>
+          </a:solidFill>
+          <a:ln>
+            <a:noFill/>
+          </a:ln>
+        </p:spPr>
+        <p:style>
+          <a:lnRef idx="1">
+            <a:schemeClr val="accent1"/>
+          </a:lnRef>
+          <a:fillRef idx="3">
+            <a:schemeClr val="accent1"/>
+          </a:fillRef>
+          <a:effectRef idx="2">
+            <a:schemeClr val="accent1"/>
+          </a:effectRef>
+          <a:fontRef idx="minor">
+            <a:schemeClr val="lt1"/>
+          </a:fontRef>
+        </p:style>
+        <p:txBody>
+          <a:bodyPr rtlCol="0" anchor="ctr"/>
+          <a:lstStyle/>
+          <a:p>
+            <a:pPr algn="ctr"/>
+          </a:p>
+        </p:txBody>
+      </p:sp>
+      <p:sp>
+        <p:nvSpPr>
+          <p:cNvPr id="16" name="TextBox 15"/>
+          <p:cNvSpPr txBox="1"/>
+          <p:nvPr/>
+        </p:nvSpPr>
+        <p:spPr>
+          <a:xfrm>
+            <a:off x="594360" y="4251960"/>
+            <a:ext cx="438912" cy="438912"/>
+          </a:xfrm>
+          <a:prstGeom prst="rect">
+            <a:avLst/>
+          </a:prstGeom>
+          <a:noFill/>
+        </p:spPr>
+        <p:txBody>
+          <a:bodyPr wrap="square" anchor="ctr"/>
+          <a:lstStyle/>
+          <a:p>
+            <a:pPr algn="ctr"/>
+            <a:r>
+              <a:rPr sz="1600" b="1" i="0">
+                <a:solidFill>
+                  <a:srgbClr val="FFFFFF"/>
+                </a:solidFill>
+                <a:latin typeface="Calibri"/>
+              </a:rPr>
+              <a:t>3</a:t>
+            </a:r>
+          </a:p>
+        </p:txBody>
+      </p:sp>
+      <p:sp>
+        <p:nvSpPr>
+          <p:cNvPr id="17" name="TextBox 16"/>
+          <p:cNvSpPr txBox="1"/>
+          <p:nvPr/>
+        </p:nvSpPr>
+        <p:spPr>
+          <a:xfrm>
+            <a:off x="1188720" y="4037076"/>
+            <a:ext cx="10271455" cy="886968"/>
+          </a:xfrm>
+          <a:prstGeom prst="rect">
+            <a:avLst/>
+          </a:prstGeom>
+          <a:noFill/>
+        </p:spPr>
+        <p:txBody>
+          <a:bodyPr wrap="square" anchor="ctr"/>
+          <a:lstStyle/>
+          <a:p>
+            <a:r>
+              <a:rPr sz="1500" b="1" i="0">
+                <a:solidFill>
+                  <a:srgbClr val="095292"/>
+                </a:solidFill>
+                <a:latin typeface="Calibri"/>
+              </a:rPr>
+              <a:t>Renderiza en un visor</a:t>
             </a:r>
           </a:p>
           <a:p>
             <a:pPr>
-              <a:spcAft>
-                <a:spcPts val="800"/>
-              </a:spcAft>
+              <a:spcBef>
+                <a:spcPts val="200"/>
+              </a:spcBef>
             </a:pPr>
             <a:r>
-              <a:rPr sz="2000" b="0" i="0">
+              <a:rPr sz="1300" b="0" i="0">
                 <a:solidFill>
                   <a:srgbClr val="333333"/>
                 </a:solidFill>
                 <a:latin typeface="Calibri"/>
               </a:rPr>
-              <a:t>–   La segunda es si no basta con decir que se usara cache; la respuesta es que una mitigacion sin medicion es una creencia</a:t>
+              <a:t>Pega el código en un visor Mermaid (mermaid.live o la vista previa de tu editor) y míralo dibujado. Si no renderiza, corrige ahí: un end faltante o un rótulo sin comillas.</a:t>
+            </a:r>
+          </a:p>
+        </p:txBody>
+      </p:sp>
+      <p:sp>
+        <p:nvSpPr>
+          <p:cNvPr id="18" name="Rounded Rectangle 17"/>
+          <p:cNvSpPr/>
+          <p:nvPr/>
+        </p:nvSpPr>
+        <p:spPr>
+          <a:xfrm>
+            <a:off x="457200" y="5088636"/>
+            <a:ext cx="11277295" cy="1051560"/>
+          </a:xfrm>
+          <a:prstGeom prst="roundRect">
+            <a:avLst>
+              <a:gd name="adj" fmla="val 12000"/>
+            </a:avLst>
+          </a:prstGeom>
+          <a:solidFill>
+            <a:srgbClr val="E8F4FA"/>
+          </a:solidFill>
+          <a:ln>
+            <a:noFill/>
+          </a:ln>
+        </p:spPr>
+        <p:style>
+          <a:lnRef idx="1">
+            <a:schemeClr val="accent1"/>
+          </a:lnRef>
+          <a:fillRef idx="3">
+            <a:schemeClr val="accent1"/>
+          </a:fillRef>
+          <a:effectRef idx="2">
+            <a:schemeClr val="accent1"/>
+          </a:effectRef>
+          <a:fontRef idx="minor">
+            <a:schemeClr val="lt1"/>
+          </a:fontRef>
+        </p:style>
+        <p:txBody>
+          <a:bodyPr rtlCol="0" anchor="ctr"/>
+          <a:lstStyle/>
+          <a:p>
+            <a:pPr algn="ctr"/>
+          </a:p>
+        </p:txBody>
+      </p:sp>
+      <p:sp>
+        <p:nvSpPr>
+          <p:cNvPr id="19" name="Rounded Rectangle 18"/>
+          <p:cNvSpPr/>
+          <p:nvPr/>
+        </p:nvSpPr>
+        <p:spPr>
+          <a:xfrm>
+            <a:off x="594360" y="5394960"/>
+            <a:ext cx="438912" cy="438912"/>
+          </a:xfrm>
+          <a:prstGeom prst="roundRect">
+            <a:avLst>
+              <a:gd name="adj" fmla="val 12000"/>
+            </a:avLst>
+          </a:prstGeom>
+          <a:solidFill>
+            <a:srgbClr val="095292"/>
+          </a:solidFill>
+          <a:ln>
+            <a:noFill/>
+          </a:ln>
+        </p:spPr>
+        <p:style>
+          <a:lnRef idx="1">
+            <a:schemeClr val="accent1"/>
+          </a:lnRef>
+          <a:fillRef idx="3">
+            <a:schemeClr val="accent1"/>
+          </a:fillRef>
+          <a:effectRef idx="2">
+            <a:schemeClr val="accent1"/>
+          </a:effectRef>
+          <a:fontRef idx="minor">
+            <a:schemeClr val="lt1"/>
+          </a:fontRef>
+        </p:style>
+        <p:txBody>
+          <a:bodyPr rtlCol="0" anchor="ctr"/>
+          <a:lstStyle/>
+          <a:p>
+            <a:pPr algn="ctr"/>
+          </a:p>
+        </p:txBody>
+      </p:sp>
+      <p:sp>
+        <p:nvSpPr>
+          <p:cNvPr id="20" name="TextBox 19"/>
+          <p:cNvSpPr txBox="1"/>
+          <p:nvPr/>
+        </p:nvSpPr>
+        <p:spPr>
+          <a:xfrm>
+            <a:off x="594360" y="5394960"/>
+            <a:ext cx="438912" cy="438912"/>
+          </a:xfrm>
+          <a:prstGeom prst="rect">
+            <a:avLst/>
+          </a:prstGeom>
+          <a:noFill/>
+        </p:spPr>
+        <p:txBody>
+          <a:bodyPr wrap="square" anchor="ctr"/>
+          <a:lstStyle/>
+          <a:p>
+            <a:pPr algn="ctr"/>
+            <a:r>
+              <a:rPr sz="1600" b="1" i="0">
+                <a:solidFill>
+                  <a:srgbClr val="FFFFFF"/>
+                </a:solidFill>
+                <a:latin typeface="Calibri"/>
+              </a:rPr>
+              <a:t>4</a:t>
+            </a:r>
+          </a:p>
+        </p:txBody>
+      </p:sp>
+      <p:sp>
+        <p:nvSpPr>
+          <p:cNvPr id="21" name="TextBox 20"/>
+          <p:cNvSpPr txBox="1"/>
+          <p:nvPr/>
+        </p:nvSpPr>
+        <p:spPr>
+          <a:xfrm>
+            <a:off x="1188720" y="5180076"/>
+            <a:ext cx="10271455" cy="886968"/>
+          </a:xfrm>
+          <a:prstGeom prst="rect">
+            <a:avLst/>
+          </a:prstGeom>
+          <a:noFill/>
+        </p:spPr>
+        <p:txBody>
+          <a:bodyPr wrap="square" anchor="ctr"/>
+          <a:lstStyle/>
+          <a:p>
+            <a:r>
+              <a:rPr sz="1500" b="1" i="0">
+                <a:solidFill>
+                  <a:srgbClr val="095292"/>
+                </a:solidFill>
+                <a:latin typeface="Calibri"/>
+              </a:rPr>
+              <a:t>Guarda código e imagen</a:t>
             </a:r>
           </a:p>
           <a:p>
             <a:pPr>
-              <a:spcAft>
-                <a:spcPts val="800"/>
-              </a:spcAft>
+              <a:spcBef>
+                <a:spcPts val="200"/>
+              </a:spcBef>
             </a:pPr>
             <a:r>
-              <a:rPr sz="2000" b="0" i="0">
+              <a:rPr sz="1300" b="0" i="0">
                 <a:solidFill>
                   <a:srgbClr val="333333"/>
                 </a:solidFill>
                 <a:latin typeface="Calibri"/>
               </a:rPr>
-              <a:t>–   Y que la pregunta correcta es cache de que, con que tiempo de vida, que porcentaje de aciertos se espera y que pasa cuando el dato cambia, porque una cache mal invalidada convierte un problema de lentitud en un problema de datos incorrectos, que es peor.</a:t>
-            </a:r>
-          </a:p>
-        </p:txBody>
-      </p:sp>
-      <p:sp>
-        <p:nvSpPr>
-          <p:cNvPr id="6" name="TextBox 5"/>
+              <a:t>El código es la fuente del diagrama: guárdalo con tu proyecto junto con el PNG exportado.</a:t>
+            </a:r>
+          </a:p>
+        </p:txBody>
+      </p:sp>
+      <p:sp>
+        <p:nvSpPr>
+          <p:cNvPr id="22" name="TextBox 21"/>
           <p:cNvSpPr txBox="1"/>
           <p:nvPr/>
         </p:nvSpPr>
@@ -7606,3261 +9359,6 @@
         <p:spPr>
           <a:xfrm>
             <a:off x="0" y="0"/>
-            <a:ext cx="12191695" cy="960120"/>
-          </a:xfrm>
-          <a:prstGeom prst="rect">
-            <a:avLst/>
-          </a:prstGeom>
-          <a:solidFill>
-            <a:srgbClr val="095292"/>
-          </a:solidFill>
-          <a:ln>
-            <a:noFill/>
-          </a:ln>
-        </p:spPr>
-        <p:style>
-          <a:lnRef idx="1">
-            <a:schemeClr val="accent1"/>
-          </a:lnRef>
-          <a:fillRef idx="3">
-            <a:schemeClr val="accent1"/>
-          </a:fillRef>
-          <a:effectRef idx="2">
-            <a:schemeClr val="accent1"/>
-          </a:effectRef>
-          <a:fontRef idx="minor">
-            <a:schemeClr val="lt1"/>
-          </a:fontRef>
-        </p:style>
-        <p:txBody>
-          <a:bodyPr rtlCol="0" anchor="ctr"/>
-          <a:lstStyle/>
-          <a:p>
-            <a:pPr algn="ctr"/>
-          </a:p>
-        </p:txBody>
-      </p:sp>
-      <p:sp>
-        <p:nvSpPr>
-          <p:cNvPr id="3" name="Rectangle 2"/>
-          <p:cNvSpPr/>
-          <p:nvPr/>
-        </p:nvSpPr>
-        <p:spPr>
-          <a:xfrm>
-            <a:off x="0" y="960120"/>
-            <a:ext cx="12191695" cy="41148"/>
-          </a:xfrm>
-          <a:prstGeom prst="rect">
-            <a:avLst/>
-          </a:prstGeom>
-          <a:solidFill>
-            <a:srgbClr val="FFD000"/>
-          </a:solidFill>
-          <a:ln>
-            <a:noFill/>
-          </a:ln>
-        </p:spPr>
-        <p:style>
-          <a:lnRef idx="1">
-            <a:schemeClr val="accent1"/>
-          </a:lnRef>
-          <a:fillRef idx="3">
-            <a:schemeClr val="accent1"/>
-          </a:fillRef>
-          <a:effectRef idx="2">
-            <a:schemeClr val="accent1"/>
-          </a:effectRef>
-          <a:fontRef idx="minor">
-            <a:schemeClr val="lt1"/>
-          </a:fontRef>
-        </p:style>
-        <p:txBody>
-          <a:bodyPr rtlCol="0" anchor="ctr"/>
-          <a:lstStyle/>
-          <a:p>
-            <a:pPr algn="ctr"/>
-          </a:p>
-        </p:txBody>
-      </p:sp>
-      <p:sp>
-        <p:nvSpPr>
-          <p:cNvPr id="4" name="TextBox 3"/>
-          <p:cNvSpPr txBox="1"/>
-          <p:nvPr/>
-        </p:nvSpPr>
-        <p:spPr>
-          <a:xfrm>
-            <a:off x="457200" y="164592"/>
-            <a:ext cx="11277295" cy="502920"/>
-          </a:xfrm>
-          <a:prstGeom prst="rect">
-            <a:avLst/>
-          </a:prstGeom>
-          <a:noFill/>
-        </p:spPr>
-        <p:txBody>
-          <a:bodyPr wrap="square">
-            <a:spAutoFit/>
-          </a:bodyPr>
-          <a:lstStyle/>
-          <a:p>
-            <a:r>
-              <a:rPr sz="2600" b="1" i="0">
-                <a:solidFill>
-                  <a:srgbClr val="FFFFFF"/>
-                </a:solidFill>
-                <a:latin typeface="Calibri"/>
-              </a:rPr>
-              <a:t>Preguntas frecuentes y cierre conceptual () (2/3)</a:t>
-            </a:r>
-          </a:p>
-        </p:txBody>
-      </p:sp>
-      <p:sp>
-        <p:nvSpPr>
-          <p:cNvPr id="5" name="TextBox 4"/>
-          <p:cNvSpPr txBox="1"/>
-          <p:nvPr/>
-        </p:nvSpPr>
-        <p:spPr>
-          <a:xfrm>
-            <a:off x="457200" y="1170432"/>
-            <a:ext cx="11277295" cy="5230368"/>
-          </a:xfrm>
-          <a:prstGeom prst="rect">
-            <a:avLst/>
-          </a:prstGeom>
-          <a:noFill/>
-        </p:spPr>
-        <p:txBody>
-          <a:bodyPr wrap="square">
-            <a:spAutoFit/>
-          </a:bodyPr>
-          <a:lstStyle/>
-          <a:p>
-            <a:pPr>
-              <a:spcAft>
-                <a:spcPts val="800"/>
-              </a:spcAft>
-            </a:pPr>
-            <a:r>
-              <a:rPr sz="2000" b="0" i="0">
-                <a:solidFill>
-                  <a:srgbClr val="333333"/>
-                </a:solidFill>
-                <a:latin typeface="Calibri"/>
-              </a:rPr>
-              <a:t>–   La tercera es cual es un buen p95, y la respuesta debe resistir la tentacion de dar una cifra universal: depende del caso de uso</a:t>
-            </a:r>
-          </a:p>
-          <a:p>
-            <a:pPr>
-              <a:spcAft>
-                <a:spcPts val="800"/>
-              </a:spcAft>
-            </a:pPr>
-            <a:r>
-              <a:rPr sz="2000" b="0" i="0">
-                <a:solidFill>
-                  <a:srgbClr val="333333"/>
-                </a:solidFill>
-                <a:latin typeface="Calibri"/>
-              </a:rPr>
-              <a:t>–   Y el criterio es que el numero este justificado y sea alcanzable con la arquitectura dibujada</a:t>
-            </a:r>
-          </a:p>
-          <a:p>
-            <a:pPr>
-              <a:spcAft>
-                <a:spcPts val="800"/>
-              </a:spcAft>
-            </a:pPr>
-            <a:r>
-              <a:rPr sz="2000" b="0" i="0">
-                <a:solidFill>
-                  <a:srgbClr val="333333"/>
-                </a:solidFill>
-                <a:latin typeface="Calibri"/>
-              </a:rPr>
-              <a:t>–   Quien promete p95 de 50 milisegundos con una consulta que recorre toda la tabla tiene un objetivo incoherente, y eso es un hallazgo mas grave que tener un objetivo modesto.</a:t>
-            </a:r>
-          </a:p>
-          <a:p>
-            <a:pPr>
-              <a:spcAft>
-                <a:spcPts val="800"/>
-              </a:spcAft>
-            </a:pPr>
-            <a:r>
-              <a:rPr sz="2000" b="0" i="0">
-                <a:solidFill>
-                  <a:srgbClr val="333333"/>
-                </a:solidFill>
-                <a:latin typeface="Calibri"/>
-              </a:rPr>
-              <a:t>–   Error tipico del docente que no domina el tema: aceptar "queremos que la app sea rapida" como objetivo de rendimiento.</a:t>
-            </a:r>
-          </a:p>
-          <a:p>
-            <a:pPr>
-              <a:spcAft>
-                <a:spcPts val="800"/>
-              </a:spcAft>
-            </a:pPr>
-            <a:r>
-              <a:rPr sz="2000" b="0" i="0">
-                <a:solidFill>
-                  <a:srgbClr val="333333"/>
-                </a:solidFill>
-                <a:latin typeface="Calibri"/>
-              </a:rPr>
-              <a:t>–   Sin metrica en percentil, sin umbral, sin condicion de carga y sin cuello de botella sospechado, la seccion de rendimiento del informe se convierte en adjetivos</a:t>
-            </a:r>
-          </a:p>
-          <a:p>
-            <a:pPr>
-              <a:spcAft>
-                <a:spcPts val="800"/>
-              </a:spcAft>
-            </a:pPr>
-            <a:r>
-              <a:rPr sz="2000" b="0" i="0">
-                <a:solidFill>
-                  <a:srgbClr val="333333"/>
-                </a:solidFill>
-                <a:latin typeface="Calibri"/>
-              </a:rPr>
-              <a:t>–   Y la consecuencia es inmediata aguas abajo: en la Clase 13 el estudiante no tiene nada sobre lo que basar el trigger del autoescalado y escribe "cuando la CPU suba"</a:t>
-            </a:r>
-          </a:p>
-        </p:txBody>
-      </p:sp>
-      <p:sp>
-        <p:nvSpPr>
-          <p:cNvPr id="6" name="TextBox 5"/>
-          <p:cNvSpPr txBox="1"/>
-          <p:nvPr/>
-        </p:nvSpPr>
-        <p:spPr>
-          <a:xfrm>
-            <a:off x="11185855" y="6473952"/>
-            <a:ext cx="640080" cy="274320"/>
-          </a:xfrm>
-          <a:prstGeom prst="rect">
-            <a:avLst/>
-          </a:prstGeom>
-          <a:noFill/>
-        </p:spPr>
-        <p:txBody>
-          <a:bodyPr wrap="square">
-            <a:spAutoFit/>
-          </a:bodyPr>
-          <a:lstStyle/>
-          <a:p>
-            <a:pPr algn="r"/>
-            <a:r>
-              <a:rPr sz="1100" b="0" i="0">
-                <a:solidFill>
-                  <a:srgbClr val="666666"/>
-                </a:solidFill>
-                <a:latin typeface="Calibri"/>
-              </a:rPr>
-              <a:t>21</a:t>
-            </a:r>
-          </a:p>
-        </p:txBody>
-      </p:sp>
-    </p:spTree>
-  </p:cSld>
-  <p:clrMapOvr>
-    <a:masterClrMapping/>
-  </p:clrMapOvr>
-</p:sld>
-</file>
-
-<file path=ppt/slides/slide22.xml><?xml version="1.0" encoding="utf-8"?>
-<p:sld xmlns:a="http://schemas.openxmlformats.org/drawingml/2006/main" xmlns:p="http://schemas.openxmlformats.org/presentationml/2006/main" xmlns:r="http://schemas.openxmlformats.org/officeDocument/2006/relationships">
-  <p:cSld>
-    <p:bg>
-      <p:bgPr>
-        <a:solidFill>
-          <a:srgbClr val="FFFFFF"/>
-        </a:solidFill>
-        <a:effectLst/>
-      </p:bgPr>
-    </p:bg>
-    <p:spTree>
-      <p:nvGrpSpPr>
-        <p:cNvPr id="1" name=""/>
-        <p:cNvGrpSpPr/>
-        <p:nvPr/>
-      </p:nvGrpSpPr>
-      <p:grpSpPr/>
-      <p:sp>
-        <p:nvSpPr>
-          <p:cNvPr id="2" name="Rectangle 1"/>
-          <p:cNvSpPr/>
-          <p:nvPr/>
-        </p:nvSpPr>
-        <p:spPr>
-          <a:xfrm>
-            <a:off x="0" y="0"/>
-            <a:ext cx="12191695" cy="960120"/>
-          </a:xfrm>
-          <a:prstGeom prst="rect">
-            <a:avLst/>
-          </a:prstGeom>
-          <a:solidFill>
-            <a:srgbClr val="095292"/>
-          </a:solidFill>
-          <a:ln>
-            <a:noFill/>
-          </a:ln>
-        </p:spPr>
-        <p:style>
-          <a:lnRef idx="1">
-            <a:schemeClr val="accent1"/>
-          </a:lnRef>
-          <a:fillRef idx="3">
-            <a:schemeClr val="accent1"/>
-          </a:fillRef>
-          <a:effectRef idx="2">
-            <a:schemeClr val="accent1"/>
-          </a:effectRef>
-          <a:fontRef idx="minor">
-            <a:schemeClr val="lt1"/>
-          </a:fontRef>
-        </p:style>
-        <p:txBody>
-          <a:bodyPr rtlCol="0" anchor="ctr"/>
-          <a:lstStyle/>
-          <a:p>
-            <a:pPr algn="ctr"/>
-          </a:p>
-        </p:txBody>
-      </p:sp>
-      <p:sp>
-        <p:nvSpPr>
-          <p:cNvPr id="3" name="Rectangle 2"/>
-          <p:cNvSpPr/>
-          <p:nvPr/>
-        </p:nvSpPr>
-        <p:spPr>
-          <a:xfrm>
-            <a:off x="0" y="960120"/>
-            <a:ext cx="12191695" cy="41148"/>
-          </a:xfrm>
-          <a:prstGeom prst="rect">
-            <a:avLst/>
-          </a:prstGeom>
-          <a:solidFill>
-            <a:srgbClr val="FFD000"/>
-          </a:solidFill>
-          <a:ln>
-            <a:noFill/>
-          </a:ln>
-        </p:spPr>
-        <p:style>
-          <a:lnRef idx="1">
-            <a:schemeClr val="accent1"/>
-          </a:lnRef>
-          <a:fillRef idx="3">
-            <a:schemeClr val="accent1"/>
-          </a:fillRef>
-          <a:effectRef idx="2">
-            <a:schemeClr val="accent1"/>
-          </a:effectRef>
-          <a:fontRef idx="minor">
-            <a:schemeClr val="lt1"/>
-          </a:fontRef>
-        </p:style>
-        <p:txBody>
-          <a:bodyPr rtlCol="0" anchor="ctr"/>
-          <a:lstStyle/>
-          <a:p>
-            <a:pPr algn="ctr"/>
-          </a:p>
-        </p:txBody>
-      </p:sp>
-      <p:sp>
-        <p:nvSpPr>
-          <p:cNvPr id="4" name="TextBox 3"/>
-          <p:cNvSpPr txBox="1"/>
-          <p:nvPr/>
-        </p:nvSpPr>
-        <p:spPr>
-          <a:xfrm>
-            <a:off x="457200" y="164592"/>
-            <a:ext cx="11277295" cy="502920"/>
-          </a:xfrm>
-          <a:prstGeom prst="rect">
-            <a:avLst/>
-          </a:prstGeom>
-          <a:noFill/>
-        </p:spPr>
-        <p:txBody>
-          <a:bodyPr wrap="square">
-            <a:spAutoFit/>
-          </a:bodyPr>
-          <a:lstStyle/>
-          <a:p>
-            <a:r>
-              <a:rPr sz="2600" b="1" i="0">
-                <a:solidFill>
-                  <a:srgbClr val="FFFFFF"/>
-                </a:solidFill>
-                <a:latin typeface="Calibri"/>
-              </a:rPr>
-              <a:t>Preguntas frecuentes y cierre conceptual () (3/3)</a:t>
-            </a:r>
-          </a:p>
-        </p:txBody>
-      </p:sp>
-      <p:sp>
-        <p:nvSpPr>
-          <p:cNvPr id="5" name="TextBox 4"/>
-          <p:cNvSpPr txBox="1"/>
-          <p:nvPr/>
-        </p:nvSpPr>
-        <p:spPr>
-          <a:xfrm>
-            <a:off x="457200" y="1170432"/>
-            <a:ext cx="11277295" cy="5230368"/>
-          </a:xfrm>
-          <a:prstGeom prst="rect">
-            <a:avLst/>
-          </a:prstGeom>
-          <a:noFill/>
-        </p:spPr>
-        <p:txBody>
-          <a:bodyPr wrap="square">
-            <a:spAutoFit/>
-          </a:bodyPr>
-          <a:lstStyle/>
-          <a:p>
-            <a:pPr>
-              <a:spcAft>
-                <a:spcPts val="800"/>
-              </a:spcAft>
-            </a:pPr>
-            <a:r>
-              <a:rPr sz="2000" b="0" i="0">
-                <a:solidFill>
-                  <a:srgbClr val="333333"/>
-                </a:solidFill>
-                <a:latin typeface="Calibri"/>
-              </a:rPr>
-              <a:t>–   Y en la sustentacion de la Clase 15 no puede responder por que su diseno soporta la carga que dice soportar.</a:t>
-            </a:r>
-          </a:p>
-          <a:p>
-            <a:pPr>
-              <a:spcAft>
-                <a:spcPts val="800"/>
-              </a:spcAft>
-            </a:pPr>
-            <a:r>
-              <a:rPr sz="2000" b="0" i="0">
-                <a:solidFill>
-                  <a:srgbClr val="333333"/>
-                </a:solidFill>
-                <a:latin typeface="Calibri"/>
-              </a:rPr>
-              <a:t>–   El segundo error es dejar que el ensayo del pitch se convierta en un recorrido narrado del diagrama, leido en voz alta y sin una sola justificacion</a:t>
-            </a:r>
-          </a:p>
-          <a:p>
-            <a:pPr>
-              <a:spcAft>
-                <a:spcPts val="800"/>
-              </a:spcAft>
-            </a:pPr>
-            <a:r>
-              <a:rPr sz="2000" b="0" i="0">
-                <a:solidFill>
-                  <a:srgbClr val="333333"/>
-                </a:solidFill>
-                <a:latin typeface="Calibri"/>
-              </a:rPr>
-              <a:t>–   Y, en los equipos que el docente haya autorizado, permitir que un solo integrante hable mientras el resto observa.</a:t>
-            </a:r>
-          </a:p>
-          <a:p>
-            <a:pPr>
-              <a:spcAft>
-                <a:spcPts val="800"/>
-              </a:spcAft>
-            </a:pPr>
-            <a:r>
-              <a:rPr sz="2000" b="0" i="0">
-                <a:solidFill>
-                  <a:srgbClr val="333333"/>
-                </a:solidFill>
-                <a:latin typeface="Calibri"/>
-              </a:rPr>
-              <a:t>–   Si eso no se corrige hoy, en la Clase 15 la sustentacion llega como un guion memorizado que el Q&amp;A dirigido desarma en dos preguntas, y la nota cae por una razon que era corregible con quince minutos de ensayo bien dirigido.</a:t>
-            </a:r>
-          </a:p>
-        </p:txBody>
-      </p:sp>
-      <p:sp>
-        <p:nvSpPr>
-          <p:cNvPr id="6" name="TextBox 5"/>
-          <p:cNvSpPr txBox="1"/>
-          <p:nvPr/>
-        </p:nvSpPr>
-        <p:spPr>
-          <a:xfrm>
-            <a:off x="11185855" y="6473952"/>
-            <a:ext cx="640080" cy="274320"/>
-          </a:xfrm>
-          <a:prstGeom prst="rect">
-            <a:avLst/>
-          </a:prstGeom>
-          <a:noFill/>
-        </p:spPr>
-        <p:txBody>
-          <a:bodyPr wrap="square">
-            <a:spAutoFit/>
-          </a:bodyPr>
-          <a:lstStyle/>
-          <a:p>
-            <a:pPr algn="r"/>
-            <a:r>
-              <a:rPr sz="1100" b="0" i="0">
-                <a:solidFill>
-                  <a:srgbClr val="666666"/>
-                </a:solidFill>
-                <a:latin typeface="Calibri"/>
-              </a:rPr>
-              <a:t>22</a:t>
-            </a:r>
-          </a:p>
-        </p:txBody>
-      </p:sp>
-    </p:spTree>
-  </p:cSld>
-  <p:clrMapOvr>
-    <a:masterClrMapping/>
-  </p:clrMapOvr>
-</p:sld>
-</file>
-
-<file path=ppt/slides/slide23.xml><?xml version="1.0" encoding="utf-8"?>
-<p:sld xmlns:a="http://schemas.openxmlformats.org/drawingml/2006/main" xmlns:p="http://schemas.openxmlformats.org/presentationml/2006/main" xmlns:r="http://schemas.openxmlformats.org/officeDocument/2006/relationships">
-  <p:cSld>
-    <p:bg>
-      <p:bgPr>
-        <a:solidFill>
-          <a:srgbClr val="FFFFFF"/>
-        </a:solidFill>
-        <a:effectLst/>
-      </p:bgPr>
-    </p:bg>
-    <p:spTree>
-      <p:nvGrpSpPr>
-        <p:cNvPr id="1" name=""/>
-        <p:cNvGrpSpPr/>
-        <p:nvPr/>
-      </p:nvGrpSpPr>
-      <p:grpSpPr/>
-      <p:sp>
-        <p:nvSpPr>
-          <p:cNvPr id="2" name="Rectangle 1"/>
-          <p:cNvSpPr/>
-          <p:nvPr/>
-        </p:nvSpPr>
-        <p:spPr>
-          <a:xfrm>
-            <a:off x="0" y="0"/>
-            <a:ext cx="12191695" cy="960120"/>
-          </a:xfrm>
-          <a:prstGeom prst="rect">
-            <a:avLst/>
-          </a:prstGeom>
-          <a:solidFill>
-            <a:srgbClr val="095292"/>
-          </a:solidFill>
-          <a:ln>
-            <a:noFill/>
-          </a:ln>
-        </p:spPr>
-        <p:style>
-          <a:lnRef idx="1">
-            <a:schemeClr val="accent1"/>
-          </a:lnRef>
-          <a:fillRef idx="3">
-            <a:schemeClr val="accent1"/>
-          </a:fillRef>
-          <a:effectRef idx="2">
-            <a:schemeClr val="accent1"/>
-          </a:effectRef>
-          <a:fontRef idx="minor">
-            <a:schemeClr val="lt1"/>
-          </a:fontRef>
-        </p:style>
-        <p:txBody>
-          <a:bodyPr rtlCol="0" anchor="ctr"/>
-          <a:lstStyle/>
-          <a:p>
-            <a:pPr algn="ctr"/>
-          </a:p>
-        </p:txBody>
-      </p:sp>
-      <p:sp>
-        <p:nvSpPr>
-          <p:cNvPr id="3" name="Rectangle 2"/>
-          <p:cNvSpPr/>
-          <p:nvPr/>
-        </p:nvSpPr>
-        <p:spPr>
-          <a:xfrm>
-            <a:off x="0" y="960120"/>
-            <a:ext cx="12191695" cy="41148"/>
-          </a:xfrm>
-          <a:prstGeom prst="rect">
-            <a:avLst/>
-          </a:prstGeom>
-          <a:solidFill>
-            <a:srgbClr val="FFD000"/>
-          </a:solidFill>
-          <a:ln>
-            <a:noFill/>
-          </a:ln>
-        </p:spPr>
-        <p:style>
-          <a:lnRef idx="1">
-            <a:schemeClr val="accent1"/>
-          </a:lnRef>
-          <a:fillRef idx="3">
-            <a:schemeClr val="accent1"/>
-          </a:fillRef>
-          <a:effectRef idx="2">
-            <a:schemeClr val="accent1"/>
-          </a:effectRef>
-          <a:fontRef idx="minor">
-            <a:schemeClr val="lt1"/>
-          </a:fontRef>
-        </p:style>
-        <p:txBody>
-          <a:bodyPr rtlCol="0" anchor="ctr"/>
-          <a:lstStyle/>
-          <a:p>
-            <a:pPr algn="ctr"/>
-          </a:p>
-        </p:txBody>
-      </p:sp>
-      <p:sp>
-        <p:nvSpPr>
-          <p:cNvPr id="4" name="TextBox 3"/>
-          <p:cNvSpPr txBox="1"/>
-          <p:nvPr/>
-        </p:nvSpPr>
-        <p:spPr>
-          <a:xfrm>
-            <a:off x="457200" y="164592"/>
-            <a:ext cx="11277295" cy="502920"/>
-          </a:xfrm>
-          <a:prstGeom prst="rect">
-            <a:avLst/>
-          </a:prstGeom>
-          <a:noFill/>
-        </p:spPr>
-        <p:txBody>
-          <a:bodyPr wrap="square">
-            <a:spAutoFit/>
-          </a:bodyPr>
-          <a:lstStyle/>
-          <a:p>
-            <a:r>
-              <a:rPr sz="2600" b="1" i="0">
-                <a:solidFill>
-                  <a:srgbClr val="FFFFFF"/>
-                </a:solidFill>
-                <a:latin typeface="Calibri"/>
-              </a:rPr>
-              <a:t>El presupuesto de latencia del camino critico</a:t>
-            </a:r>
-          </a:p>
-        </p:txBody>
-      </p:sp>
-      <p:sp>
-        <p:nvSpPr>
-          <p:cNvPr id="5" name="Rounded Rectangle 4"/>
-          <p:cNvSpPr/>
-          <p:nvPr/>
-        </p:nvSpPr>
-        <p:spPr>
-          <a:xfrm>
-            <a:off x="457200" y="1261872"/>
-            <a:ext cx="11277295" cy="5093208"/>
-          </a:xfrm>
-          <a:prstGeom prst="roundRect">
-            <a:avLst>
-              <a:gd name="adj" fmla="val 12000"/>
-            </a:avLst>
-          </a:prstGeom>
-          <a:solidFill>
-            <a:srgbClr val="1E2A38"/>
-          </a:solidFill>
-          <a:ln>
-            <a:noFill/>
-          </a:ln>
-        </p:spPr>
-        <p:style>
-          <a:lnRef idx="1">
-            <a:schemeClr val="accent1"/>
-          </a:lnRef>
-          <a:fillRef idx="3">
-            <a:schemeClr val="accent1"/>
-          </a:fillRef>
-          <a:effectRef idx="2">
-            <a:schemeClr val="accent1"/>
-          </a:effectRef>
-          <a:fontRef idx="minor">
-            <a:schemeClr val="lt1"/>
-          </a:fontRef>
-        </p:style>
-        <p:txBody>
-          <a:bodyPr rtlCol="0" anchor="ctr"/>
-          <a:lstStyle/>
-          <a:p>
-            <a:pPr algn="ctr"/>
-          </a:p>
-        </p:txBody>
-      </p:sp>
-      <p:sp>
-        <p:nvSpPr>
-          <p:cNvPr id="6" name="Rectangle 5"/>
-          <p:cNvSpPr/>
-          <p:nvPr/>
-        </p:nvSpPr>
-        <p:spPr>
-          <a:xfrm>
-            <a:off x="457200" y="1261872"/>
-            <a:ext cx="11277295" cy="320040"/>
-          </a:xfrm>
-          <a:prstGeom prst="rect">
-            <a:avLst/>
-          </a:prstGeom>
-          <a:solidFill>
-            <a:srgbClr val="095292"/>
-          </a:solidFill>
-          <a:ln>
-            <a:noFill/>
-          </a:ln>
-        </p:spPr>
-        <p:style>
-          <a:lnRef idx="1">
-            <a:schemeClr val="accent1"/>
-          </a:lnRef>
-          <a:fillRef idx="3">
-            <a:schemeClr val="accent1"/>
-          </a:fillRef>
-          <a:effectRef idx="2">
-            <a:schemeClr val="accent1"/>
-          </a:effectRef>
-          <a:fontRef idx="minor">
-            <a:schemeClr val="lt1"/>
-          </a:fontRef>
-        </p:style>
-        <p:txBody>
-          <a:bodyPr rtlCol="0" anchor="ctr"/>
-          <a:lstStyle/>
-          <a:p>
-            <a:pPr algn="ctr"/>
-          </a:p>
-        </p:txBody>
-      </p:sp>
-      <p:sp>
-        <p:nvSpPr>
-          <p:cNvPr id="7" name="TextBox 6"/>
-          <p:cNvSpPr txBox="1"/>
-          <p:nvPr/>
-        </p:nvSpPr>
-        <p:spPr>
-          <a:xfrm>
-            <a:off x="685800" y="1307592"/>
-            <a:ext cx="10820095" cy="256032"/>
-          </a:xfrm>
-          <a:prstGeom prst="rect">
-            <a:avLst/>
-          </a:prstGeom>
-          <a:noFill/>
-        </p:spPr>
-        <p:txBody>
-          <a:bodyPr wrap="square" anchor="ctr"/>
-          <a:lstStyle/>
-          <a:p>
-            <a:r>
-              <a:rPr sz="1000" b="1" i="0">
-                <a:solidFill>
-                  <a:srgbClr val="269CCB"/>
-                </a:solidFill>
-                <a:latin typeface="Calibri"/>
-              </a:rPr>
-              <a:t>● ● ●</a:t>
-            </a:r>
-          </a:p>
-        </p:txBody>
-      </p:sp>
-      <p:sp>
-        <p:nvSpPr>
-          <p:cNvPr id="8" name="TextBox 7"/>
-          <p:cNvSpPr txBox="1"/>
-          <p:nvPr/>
-        </p:nvSpPr>
-        <p:spPr>
-          <a:xfrm>
-            <a:off x="777240" y="1719072"/>
-            <a:ext cx="10637215" cy="4453128"/>
-          </a:xfrm>
-          <a:prstGeom prst="rect">
-            <a:avLst/>
-          </a:prstGeom>
-          <a:noFill/>
-        </p:spPr>
-        <p:txBody>
-          <a:bodyPr wrap="square">
-            <a:spAutoFit/>
-          </a:bodyPr>
-          <a:lstStyle/>
-          <a:p>
-            <a:pPr>
-              <a:spcAft>
-                <a:spcPts val="400"/>
-              </a:spcAft>
-            </a:pPr>
-            <a:r>
-              <a:rPr sz="1400" b="0" i="0">
-                <a:solidFill>
-                  <a:srgbClr val="FFFFFF"/>
-                </a:solidFill>
-                <a:latin typeface="Calibri"/>
-              </a:rPr>
-              <a:t>sequenceDiagram</a:t>
-            </a:r>
-          </a:p>
-          <a:p>
-            <a:pPr>
-              <a:spcAft>
-                <a:spcPts val="400"/>
-              </a:spcAft>
-            </a:pPr>
-            <a:r>
-              <a:rPr sz="1400" b="0" i="0">
-                <a:solidFill>
-                  <a:srgbClr val="FFFFFF"/>
-                </a:solidFill>
-                <a:latin typeface="Calibri"/>
-              </a:rPr>
-              <a:t>  autonumber</a:t>
-            </a:r>
-          </a:p>
-          <a:p>
-            <a:pPr>
-              <a:spcAft>
-                <a:spcPts val="400"/>
-              </a:spcAft>
-            </a:pPr>
-            <a:r>
-              <a:rPr sz="1400" b="0" i="0">
-                <a:solidFill>
-                  <a:srgbClr val="FFFFFF"/>
-                </a:solidFill>
-                <a:latin typeface="Calibri"/>
-              </a:rPr>
-              <a:t>  participant U as Usuario</a:t>
-            </a:r>
-          </a:p>
-          <a:p>
-            <a:pPr>
-              <a:spcAft>
-                <a:spcPts val="400"/>
-              </a:spcAft>
-            </a:pPr>
-            <a:r>
-              <a:rPr sz="1400" b="0" i="0">
-                <a:solidFill>
-                  <a:srgbClr val="FFFFFF"/>
-                </a:solidFill>
-                <a:latin typeface="Calibri"/>
-              </a:rPr>
-              <a:t>  participant W as Web SPA</a:t>
-            </a:r>
-          </a:p>
-          <a:p>
-            <a:pPr>
-              <a:spcAft>
-                <a:spcPts val="400"/>
-              </a:spcAft>
-            </a:pPr>
-            <a:r>
-              <a:rPr sz="1400" b="0" i="0">
-                <a:solidFill>
-                  <a:srgbClr val="FFFFFF"/>
-                </a:solidFill>
-                <a:latin typeface="Calibri"/>
-              </a:rPr>
-              <a:t>  participant A as API</a:t>
-            </a:r>
-          </a:p>
-          <a:p>
-            <a:pPr>
-              <a:spcAft>
-                <a:spcPts val="400"/>
-              </a:spcAft>
-            </a:pPr>
-            <a:r>
-              <a:rPr sz="1400" b="0" i="0">
-                <a:solidFill>
-                  <a:srgbClr val="FFFFFF"/>
-                </a:solidFill>
-                <a:latin typeface="Calibri"/>
-              </a:rPr>
-              <a:t>  participant D as PostgreSQL</a:t>
-            </a:r>
-          </a:p>
-          <a:p>
-            <a:pPr>
-              <a:spcAft>
-                <a:spcPts val="400"/>
-              </a:spcAft>
-            </a:pPr>
-            <a:r>
-              <a:rPr sz="1400" b="0" i="0">
-                <a:solidFill>
-                  <a:srgbClr val="FFFFFF"/>
-                </a:solidFill>
-                <a:latin typeface="Calibri"/>
-              </a:rPr>
-              <a:t/>
-            </a:r>
-          </a:p>
-          <a:p>
-            <a:pPr>
-              <a:spcAft>
-                <a:spcPts val="400"/>
-              </a:spcAft>
-            </a:pPr>
-            <a:r>
-              <a:rPr sz="1400" b="0" i="0">
-                <a:solidFill>
-                  <a:srgbClr val="FFFFFF"/>
-                </a:solidFill>
-                <a:latin typeface="Calibri"/>
-              </a:rPr>
-              <a:t>  U-&gt;&gt;W: accion del pico (&lt;su caso&gt;)</a:t>
-            </a:r>
-          </a:p>
-          <a:p>
-            <a:pPr>
-              <a:spcAft>
-                <a:spcPts val="400"/>
-              </a:spcAft>
-            </a:pPr>
-            <a:r>
-              <a:rPr sz="1400" b="0" i="0">
-                <a:solidFill>
-                  <a:srgbClr val="FFFFFF"/>
-                </a:solidFill>
-                <a:latin typeface="Calibri"/>
-              </a:rPr>
-              <a:t>  W-&gt;&gt;A: POST /recurso          %% red: 40 ms</a:t>
-            </a:r>
-          </a:p>
-          <a:p>
-            <a:pPr>
-              <a:spcAft>
-                <a:spcPts val="400"/>
-              </a:spcAft>
-            </a:pPr>
-            <a:r>
-              <a:rPr sz="1400" b="0" i="0">
-                <a:solidFill>
-                  <a:srgbClr val="FFFFFF"/>
-                </a:solidFill>
-                <a:latin typeface="Calibri"/>
-              </a:rPr>
-              <a:t>  A-&gt;&gt;A: validar + autorizar    %% 10 ms</a:t>
-            </a:r>
-          </a:p>
-          <a:p>
-            <a:pPr>
-              <a:spcAft>
-                <a:spcPts val="400"/>
-              </a:spcAft>
-            </a:pPr>
-            <a:r>
-              <a:rPr sz="1400" b="0" i="0">
-                <a:solidFill>
-                  <a:srgbClr val="FFFFFF"/>
-                </a:solidFill>
-                <a:latin typeface="Calibri"/>
-              </a:rPr>
-              <a:t>  A-&gt;&gt;D: SELECT + INSERT        %% 60 ms</a:t>
-            </a:r>
-          </a:p>
-          <a:p>
-            <a:pPr>
-              <a:spcAft>
-                <a:spcPts val="400"/>
-              </a:spcAft>
-            </a:pPr>
-            <a:r>
-              <a:rPr sz="1400" b="0" i="0">
-                <a:solidFill>
-                  <a:srgbClr val="FFFFFF"/>
-                </a:solidFill>
-                <a:latin typeface="Calibri"/>
-              </a:rPr>
-              <a:t>  D--&gt;&gt;A: filas</a:t>
-            </a:r>
-          </a:p>
-          <a:p>
-            <a:pPr>
-              <a:spcAft>
-                <a:spcPts val="400"/>
-              </a:spcAft>
-            </a:pPr>
-            <a:r>
-              <a:rPr sz="1400" b="0" i="0">
-                <a:solidFill>
-                  <a:srgbClr val="FFFFFF"/>
-                </a:solidFill>
-                <a:latin typeface="Calibri"/>
-              </a:rPr>
-              <a:t>  A--&gt;&gt;W: 201 Created           %% red: 40 ms</a:t>
-            </a:r>
-          </a:p>
-          <a:p>
-            <a:pPr>
-              <a:spcAft>
-                <a:spcPts val="400"/>
-              </a:spcAft>
-            </a:pPr>
-            <a:r>
-              <a:rPr sz="1400" b="0" i="0">
-                <a:solidFill>
-                  <a:srgbClr val="FFFFFF"/>
-                </a:solidFill>
-                <a:latin typeface="Calibri"/>
-              </a:rPr>
-              <a:t>  W--&gt;&gt;U: confirmacion          %% render: 50 ms</a:t>
-            </a:r>
-          </a:p>
-          <a:p>
-            <a:pPr>
-              <a:spcAft>
-                <a:spcPts val="400"/>
-              </a:spcAft>
-            </a:pPr>
-            <a:r>
-              <a:rPr sz="1400" b="0" i="0">
-                <a:solidFill>
-                  <a:srgbClr val="FFFFFF"/>
-                </a:solidFill>
-                <a:latin typeface="Calibri"/>
-              </a:rPr>
-              <a:t/>
-            </a:r>
-          </a:p>
-          <a:p>
-            <a:pPr>
-              <a:spcAft>
-                <a:spcPts val="400"/>
-              </a:spcAft>
-            </a:pPr>
-            <a:r>
-              <a:rPr sz="1400" b="0" i="0">
-                <a:solidFill>
-                  <a:srgbClr val="FFFFFF"/>
-                </a:solidFill>
-                <a:latin typeface="Calibri"/>
-              </a:rPr>
-              <a:t>  Note over U,D: presupuesto total 200 ms · medido p95, no promedio</a:t>
-            </a:r>
-          </a:p>
-        </p:txBody>
-      </p:sp>
-      <p:sp>
-        <p:nvSpPr>
-          <p:cNvPr id="9" name="TextBox 8"/>
-          <p:cNvSpPr txBox="1"/>
-          <p:nvPr/>
-        </p:nvSpPr>
-        <p:spPr>
-          <a:xfrm>
-            <a:off x="11185855" y="6473952"/>
-            <a:ext cx="640080" cy="274320"/>
-          </a:xfrm>
-          <a:prstGeom prst="rect">
-            <a:avLst/>
-          </a:prstGeom>
-          <a:noFill/>
-        </p:spPr>
-        <p:txBody>
-          <a:bodyPr wrap="square">
-            <a:spAutoFit/>
-          </a:bodyPr>
-          <a:lstStyle/>
-          <a:p>
-            <a:pPr algn="r"/>
-            <a:r>
-              <a:rPr sz="1100" b="0" i="0">
-                <a:solidFill>
-                  <a:srgbClr val="666666"/>
-                </a:solidFill>
-                <a:latin typeface="Calibri"/>
-              </a:rPr>
-              <a:t>23</a:t>
-            </a:r>
-          </a:p>
-        </p:txBody>
-      </p:sp>
-    </p:spTree>
-  </p:cSld>
-  <p:clrMapOvr>
-    <a:masterClrMapping/>
-  </p:clrMapOvr>
-</p:sld>
-</file>
-
-<file path=ppt/slides/slide24.xml><?xml version="1.0" encoding="utf-8"?>
-<p:sld xmlns:a="http://schemas.openxmlformats.org/drawingml/2006/main" xmlns:p="http://schemas.openxmlformats.org/presentationml/2006/main" xmlns:r="http://schemas.openxmlformats.org/officeDocument/2006/relationships">
-  <p:cSld>
-    <p:bg>
-      <p:bgPr>
-        <a:solidFill>
-          <a:srgbClr val="FFFFFF"/>
-        </a:solidFill>
-        <a:effectLst/>
-      </p:bgPr>
-    </p:bg>
-    <p:spTree>
-      <p:nvGrpSpPr>
-        <p:cNvPr id="1" name=""/>
-        <p:cNvGrpSpPr/>
-        <p:nvPr/>
-      </p:nvGrpSpPr>
-      <p:grpSpPr/>
-      <p:sp>
-        <p:nvSpPr>
-          <p:cNvPr id="2" name="Rectangle 1"/>
-          <p:cNvSpPr/>
-          <p:nvPr/>
-        </p:nvSpPr>
-        <p:spPr>
-          <a:xfrm>
-            <a:off x="0" y="0"/>
-            <a:ext cx="12191695" cy="960120"/>
-          </a:xfrm>
-          <a:prstGeom prst="rect">
-            <a:avLst/>
-          </a:prstGeom>
-          <a:solidFill>
-            <a:srgbClr val="095292"/>
-          </a:solidFill>
-          <a:ln>
-            <a:noFill/>
-          </a:ln>
-        </p:spPr>
-        <p:style>
-          <a:lnRef idx="1">
-            <a:schemeClr val="accent1"/>
-          </a:lnRef>
-          <a:fillRef idx="3">
-            <a:schemeClr val="accent1"/>
-          </a:fillRef>
-          <a:effectRef idx="2">
-            <a:schemeClr val="accent1"/>
-          </a:effectRef>
-          <a:fontRef idx="minor">
-            <a:schemeClr val="lt1"/>
-          </a:fontRef>
-        </p:style>
-        <p:txBody>
-          <a:bodyPr rtlCol="0" anchor="ctr"/>
-          <a:lstStyle/>
-          <a:p>
-            <a:pPr algn="ctr"/>
-          </a:p>
-        </p:txBody>
-      </p:sp>
-      <p:sp>
-        <p:nvSpPr>
-          <p:cNvPr id="3" name="Rectangle 2"/>
-          <p:cNvSpPr/>
-          <p:nvPr/>
-        </p:nvSpPr>
-        <p:spPr>
-          <a:xfrm>
-            <a:off x="0" y="960120"/>
-            <a:ext cx="12191695" cy="41148"/>
-          </a:xfrm>
-          <a:prstGeom prst="rect">
-            <a:avLst/>
-          </a:prstGeom>
-          <a:solidFill>
-            <a:srgbClr val="FFD000"/>
-          </a:solidFill>
-          <a:ln>
-            <a:noFill/>
-          </a:ln>
-        </p:spPr>
-        <p:style>
-          <a:lnRef idx="1">
-            <a:schemeClr val="accent1"/>
-          </a:lnRef>
-          <a:fillRef idx="3">
-            <a:schemeClr val="accent1"/>
-          </a:fillRef>
-          <a:effectRef idx="2">
-            <a:schemeClr val="accent1"/>
-          </a:effectRef>
-          <a:fontRef idx="minor">
-            <a:schemeClr val="lt1"/>
-          </a:fontRef>
-        </p:style>
-        <p:txBody>
-          <a:bodyPr rtlCol="0" anchor="ctr"/>
-          <a:lstStyle/>
-          <a:p>
-            <a:pPr algn="ctr"/>
-          </a:p>
-        </p:txBody>
-      </p:sp>
-      <p:sp>
-        <p:nvSpPr>
-          <p:cNvPr id="4" name="TextBox 3"/>
-          <p:cNvSpPr txBox="1"/>
-          <p:nvPr/>
-        </p:nvSpPr>
-        <p:spPr>
-          <a:xfrm>
-            <a:off x="457200" y="164592"/>
-            <a:ext cx="11277295" cy="502920"/>
-          </a:xfrm>
-          <a:prstGeom prst="rect">
-            <a:avLst/>
-          </a:prstGeom>
-          <a:noFill/>
-        </p:spPr>
-        <p:txBody>
-          <a:bodyPr wrap="square">
-            <a:spAutoFit/>
-          </a:bodyPr>
-          <a:lstStyle/>
-          <a:p>
-            <a:r>
-              <a:rPr sz="2600" b="1" i="0">
-                <a:solidFill>
-                  <a:srgbClr val="FFFFFF"/>
-                </a:solidFill>
-                <a:latin typeface="Calibri"/>
-              </a:rPr>
-              <a:t>Las metricas objetivo, escritas como se verifican</a:t>
-            </a:r>
-          </a:p>
-        </p:txBody>
-      </p:sp>
-      <p:sp>
-        <p:nvSpPr>
-          <p:cNvPr id="5" name="Rounded Rectangle 4"/>
-          <p:cNvSpPr/>
-          <p:nvPr/>
-        </p:nvSpPr>
-        <p:spPr>
-          <a:xfrm>
-            <a:off x="457200" y="1261872"/>
-            <a:ext cx="11277295" cy="5093208"/>
-          </a:xfrm>
-          <a:prstGeom prst="roundRect">
-            <a:avLst>
-              <a:gd name="adj" fmla="val 12000"/>
-            </a:avLst>
-          </a:prstGeom>
-          <a:solidFill>
-            <a:srgbClr val="1E2A38"/>
-          </a:solidFill>
-          <a:ln>
-            <a:noFill/>
-          </a:ln>
-        </p:spPr>
-        <p:style>
-          <a:lnRef idx="1">
-            <a:schemeClr val="accent1"/>
-          </a:lnRef>
-          <a:fillRef idx="3">
-            <a:schemeClr val="accent1"/>
-          </a:fillRef>
-          <a:effectRef idx="2">
-            <a:schemeClr val="accent1"/>
-          </a:effectRef>
-          <a:fontRef idx="minor">
-            <a:schemeClr val="lt1"/>
-          </a:fontRef>
-        </p:style>
-        <p:txBody>
-          <a:bodyPr rtlCol="0" anchor="ctr"/>
-          <a:lstStyle/>
-          <a:p>
-            <a:pPr algn="ctr"/>
-          </a:p>
-        </p:txBody>
-      </p:sp>
-      <p:sp>
-        <p:nvSpPr>
-          <p:cNvPr id="6" name="Rectangle 5"/>
-          <p:cNvSpPr/>
-          <p:nvPr/>
-        </p:nvSpPr>
-        <p:spPr>
-          <a:xfrm>
-            <a:off x="457200" y="1261872"/>
-            <a:ext cx="11277295" cy="320040"/>
-          </a:xfrm>
-          <a:prstGeom prst="rect">
-            <a:avLst/>
-          </a:prstGeom>
-          <a:solidFill>
-            <a:srgbClr val="095292"/>
-          </a:solidFill>
-          <a:ln>
-            <a:noFill/>
-          </a:ln>
-        </p:spPr>
-        <p:style>
-          <a:lnRef idx="1">
-            <a:schemeClr val="accent1"/>
-          </a:lnRef>
-          <a:fillRef idx="3">
-            <a:schemeClr val="accent1"/>
-          </a:fillRef>
-          <a:effectRef idx="2">
-            <a:schemeClr val="accent1"/>
-          </a:effectRef>
-          <a:fontRef idx="minor">
-            <a:schemeClr val="lt1"/>
-          </a:fontRef>
-        </p:style>
-        <p:txBody>
-          <a:bodyPr rtlCol="0" anchor="ctr"/>
-          <a:lstStyle/>
-          <a:p>
-            <a:pPr algn="ctr"/>
-          </a:p>
-        </p:txBody>
-      </p:sp>
-      <p:sp>
-        <p:nvSpPr>
-          <p:cNvPr id="7" name="TextBox 6"/>
-          <p:cNvSpPr txBox="1"/>
-          <p:nvPr/>
-        </p:nvSpPr>
-        <p:spPr>
-          <a:xfrm>
-            <a:off x="685800" y="1307592"/>
-            <a:ext cx="10820095" cy="256032"/>
-          </a:xfrm>
-          <a:prstGeom prst="rect">
-            <a:avLst/>
-          </a:prstGeom>
-          <a:noFill/>
-        </p:spPr>
-        <p:txBody>
-          <a:bodyPr wrap="square" anchor="ctr"/>
-          <a:lstStyle/>
-          <a:p>
-            <a:r>
-              <a:rPr sz="1000" b="1" i="0">
-                <a:solidFill>
-                  <a:srgbClr val="269CCB"/>
-                </a:solidFill>
-                <a:latin typeface="Calibri"/>
-              </a:rPr>
-              <a:t>● ● ●</a:t>
-            </a:r>
-          </a:p>
-        </p:txBody>
-      </p:sp>
-      <p:sp>
-        <p:nvSpPr>
-          <p:cNvPr id="8" name="TextBox 7"/>
-          <p:cNvSpPr txBox="1"/>
-          <p:nvPr/>
-        </p:nvSpPr>
-        <p:spPr>
-          <a:xfrm>
-            <a:off x="777240" y="1719072"/>
-            <a:ext cx="10637215" cy="4453128"/>
-          </a:xfrm>
-          <a:prstGeom prst="rect">
-            <a:avLst/>
-          </a:prstGeom>
-          <a:noFill/>
-        </p:spPr>
-        <p:txBody>
-          <a:bodyPr wrap="square">
-            <a:spAutoFit/>
-          </a:bodyPr>
-          <a:lstStyle/>
-          <a:p>
-            <a:pPr>
-              <a:spcAft>
-                <a:spcPts val="400"/>
-              </a:spcAft>
-            </a:pPr>
-            <a:r>
-              <a:rPr sz="1400" b="0" i="0">
-                <a:solidFill>
-                  <a:srgbClr val="FFFFFF"/>
-                </a:solidFill>
-                <a:latin typeface="Calibri"/>
-              </a:rPr>
-              <a:t># Cada metrica necesita las cuatro columnas, o no es verificable:</a:t>
-            </a:r>
-          </a:p>
-          <a:p>
-            <a:pPr>
-              <a:spcAft>
-                <a:spcPts val="400"/>
-              </a:spcAft>
-            </a:pPr>
-            <a:r>
-              <a:rPr sz="1400" b="0" i="0">
-                <a:solidFill>
-                  <a:srgbClr val="FFFFFF"/>
-                </a:solidFill>
-                <a:latin typeface="Calibri"/>
-              </a:rPr>
-              <a:t>#   metrica | objetivo | como se mide | que se hace si falla</a:t>
-            </a:r>
-          </a:p>
-          <a:p>
-            <a:pPr>
-              <a:spcAft>
-                <a:spcPts val="400"/>
-              </a:spcAft>
-            </a:pPr>
-            <a:r>
-              <a:rPr sz="1400" b="0" i="0">
-                <a:solidFill>
-                  <a:srgbClr val="FFFFFF"/>
-                </a:solidFill>
-                <a:latin typeface="Calibri"/>
-              </a:rPr>
-              <a:t/>
-            </a:r>
-          </a:p>
-          <a:p>
-            <a:pPr>
-              <a:spcAft>
-                <a:spcPts val="400"/>
-              </a:spcAft>
-            </a:pPr>
-            <a:r>
-              <a:rPr sz="1400" b="0" i="0">
-                <a:solidFill>
-                  <a:srgbClr val="FFFFFF"/>
-                </a:solidFill>
-                <a:latin typeface="Calibri"/>
-              </a:rPr>
-              <a:t># p95 de POST /recurso   | &lt; 200 ms | percentil del log de la API</a:t>
-            </a:r>
-          </a:p>
-          <a:p>
-            <a:pPr>
-              <a:spcAft>
-                <a:spcPts val="400"/>
-              </a:spcAft>
-            </a:pPr>
-            <a:r>
-              <a:rPr sz="1400" b="0" i="0">
-                <a:solidFill>
-                  <a:srgbClr val="FFFFFF"/>
-                </a:solidFill>
-                <a:latin typeface="Calibri"/>
-              </a:rPr>
-              <a:t>#                        |          | -&gt; revisar el indice de la consulta</a:t>
-            </a:r>
-          </a:p>
-          <a:p>
-            <a:pPr>
-              <a:spcAft>
-                <a:spcPts val="400"/>
-              </a:spcAft>
-            </a:pPr>
-            <a:r>
-              <a:rPr sz="1400" b="0" i="0">
-                <a:solidFill>
-                  <a:srgbClr val="FFFFFF"/>
-                </a:solidFill>
-                <a:latin typeface="Calibri"/>
-              </a:rPr>
-              <a:t># tasa de error 5xx      | &lt; 1%     | conteo por minuto</a:t>
-            </a:r>
-          </a:p>
-          <a:p>
-            <a:pPr>
-              <a:spcAft>
-                <a:spcPts val="400"/>
-              </a:spcAft>
-            </a:pPr>
-            <a:r>
-              <a:rPr sz="1400" b="0" i="0">
-                <a:solidFill>
-                  <a:srgbClr val="FFFFFF"/>
-                </a:solidFill>
-                <a:latin typeface="Calibri"/>
-              </a:rPr>
-              <a:t>#                        |          | -&gt; abrir el log del paso que falla</a:t>
-            </a:r>
-          </a:p>
-          <a:p>
-            <a:pPr>
-              <a:spcAft>
-                <a:spcPts val="400"/>
-              </a:spcAft>
-            </a:pPr>
-            <a:r>
-              <a:rPr sz="1400" b="0" i="0">
-                <a:solidFill>
-                  <a:srgbClr val="FFFFFF"/>
-                </a:solidFill>
-                <a:latin typeface="Calibri"/>
-              </a:rPr>
-              <a:t># uso de CPU de la API   | &lt; 70%    | metrica del proveedor</a:t>
-            </a:r>
-          </a:p>
-          <a:p>
-            <a:pPr>
-              <a:spcAft>
-                <a:spcPts val="400"/>
-              </a:spcAft>
-            </a:pPr>
-            <a:r>
-              <a:rPr sz="1400" b="0" i="0">
-                <a:solidFill>
-                  <a:srgbClr val="FFFFFF"/>
-                </a:solidFill>
-                <a:latin typeface="Calibri"/>
-              </a:rPr>
-              <a:t>#                        |          | -&gt; escalar horizontal (Clase 13)</a:t>
-            </a:r>
-          </a:p>
-          <a:p>
-            <a:pPr>
-              <a:spcAft>
-                <a:spcPts val="400"/>
-              </a:spcAft>
-            </a:pPr>
-            <a:r>
-              <a:rPr sz="1400" b="0" i="0">
-                <a:solidFill>
-                  <a:srgbClr val="FFFFFF"/>
-                </a:solidFill>
-                <a:latin typeface="Calibri"/>
-              </a:rPr>
-              <a:t/>
-            </a:r>
-          </a:p>
-          <a:p>
-            <a:pPr>
-              <a:spcAft>
-                <a:spcPts val="400"/>
-              </a:spcAft>
-            </a:pPr>
-            <a:r>
-              <a:rPr sz="1400" b="0" i="0">
-                <a:solidFill>
-                  <a:srgbClr val="FFFFFF"/>
-                </a:solidFill>
-                <a:latin typeface="Calibri"/>
-              </a:rPr>
-              <a:t># PROMEDIO no sirve: con 99 respuestas de 10 ms y una de 5 s el promedio</a:t>
-            </a:r>
-          </a:p>
-          <a:p>
-            <a:pPr>
-              <a:spcAft>
-                <a:spcPts val="400"/>
-              </a:spcAft>
-            </a:pPr>
-            <a:r>
-              <a:rPr sz="1400" b="0" i="0">
-                <a:solidFill>
-                  <a:srgbClr val="FFFFFF"/>
-                </a:solidFill>
-                <a:latin typeface="Calibri"/>
-              </a:rPr>
-              <a:t># da 60 ms y el usuario que espero 5 s existe. Por eso p95.</a:t>
-            </a:r>
-          </a:p>
-        </p:txBody>
-      </p:sp>
-      <p:sp>
-        <p:nvSpPr>
-          <p:cNvPr id="9" name="TextBox 8"/>
-          <p:cNvSpPr txBox="1"/>
-          <p:nvPr/>
-        </p:nvSpPr>
-        <p:spPr>
-          <a:xfrm>
-            <a:off x="11185855" y="6473952"/>
-            <a:ext cx="640080" cy="274320"/>
-          </a:xfrm>
-          <a:prstGeom prst="rect">
-            <a:avLst/>
-          </a:prstGeom>
-          <a:noFill/>
-        </p:spPr>
-        <p:txBody>
-          <a:bodyPr wrap="square">
-            <a:spAutoFit/>
-          </a:bodyPr>
-          <a:lstStyle/>
-          <a:p>
-            <a:pPr algn="r"/>
-            <a:r>
-              <a:rPr sz="1100" b="0" i="0">
-                <a:solidFill>
-                  <a:srgbClr val="666666"/>
-                </a:solidFill>
-                <a:latin typeface="Calibri"/>
-              </a:rPr>
-              <a:t>24</a:t>
-            </a:r>
-          </a:p>
-        </p:txBody>
-      </p:sp>
-    </p:spTree>
-  </p:cSld>
-  <p:clrMapOvr>
-    <a:masterClrMapping/>
-  </p:clrMapOvr>
-</p:sld>
-</file>
-
-<file path=ppt/slides/slide25.xml><?xml version="1.0" encoding="utf-8"?>
-<p:sld xmlns:a="http://schemas.openxmlformats.org/drawingml/2006/main" xmlns:p="http://schemas.openxmlformats.org/presentationml/2006/main" xmlns:r="http://schemas.openxmlformats.org/officeDocument/2006/relationships">
-  <p:cSld>
-    <p:bg>
-      <p:bgPr>
-        <a:solidFill>
-          <a:srgbClr val="FFFFFF"/>
-        </a:solidFill>
-        <a:effectLst/>
-      </p:bgPr>
-    </p:bg>
-    <p:spTree>
-      <p:nvGrpSpPr>
-        <p:cNvPr id="1" name=""/>
-        <p:cNvGrpSpPr/>
-        <p:nvPr/>
-      </p:nvGrpSpPr>
-      <p:grpSpPr/>
-      <p:sp>
-        <p:nvSpPr>
-          <p:cNvPr id="2" name="Rectangle 1"/>
-          <p:cNvSpPr/>
-          <p:nvPr/>
-        </p:nvSpPr>
-        <p:spPr>
-          <a:xfrm>
-            <a:off x="0" y="0"/>
-            <a:ext cx="12191695" cy="960120"/>
-          </a:xfrm>
-          <a:prstGeom prst="rect">
-            <a:avLst/>
-          </a:prstGeom>
-          <a:solidFill>
-            <a:srgbClr val="095292"/>
-          </a:solidFill>
-          <a:ln>
-            <a:noFill/>
-          </a:ln>
-        </p:spPr>
-        <p:style>
-          <a:lnRef idx="1">
-            <a:schemeClr val="accent1"/>
-          </a:lnRef>
-          <a:fillRef idx="3">
-            <a:schemeClr val="accent1"/>
-          </a:fillRef>
-          <a:effectRef idx="2">
-            <a:schemeClr val="accent1"/>
-          </a:effectRef>
-          <a:fontRef idx="minor">
-            <a:schemeClr val="lt1"/>
-          </a:fontRef>
-        </p:style>
-        <p:txBody>
-          <a:bodyPr rtlCol="0" anchor="ctr"/>
-          <a:lstStyle/>
-          <a:p>
-            <a:pPr algn="ctr"/>
-          </a:p>
-        </p:txBody>
-      </p:sp>
-      <p:sp>
-        <p:nvSpPr>
-          <p:cNvPr id="3" name="Rectangle 2"/>
-          <p:cNvSpPr/>
-          <p:nvPr/>
-        </p:nvSpPr>
-        <p:spPr>
-          <a:xfrm>
-            <a:off x="0" y="960120"/>
-            <a:ext cx="12191695" cy="41148"/>
-          </a:xfrm>
-          <a:prstGeom prst="rect">
-            <a:avLst/>
-          </a:prstGeom>
-          <a:solidFill>
-            <a:srgbClr val="FFD000"/>
-          </a:solidFill>
-          <a:ln>
-            <a:noFill/>
-          </a:ln>
-        </p:spPr>
-        <p:style>
-          <a:lnRef idx="1">
-            <a:schemeClr val="accent1"/>
-          </a:lnRef>
-          <a:fillRef idx="3">
-            <a:schemeClr val="accent1"/>
-          </a:fillRef>
-          <a:effectRef idx="2">
-            <a:schemeClr val="accent1"/>
-          </a:effectRef>
-          <a:fontRef idx="minor">
-            <a:schemeClr val="lt1"/>
-          </a:fontRef>
-        </p:style>
-        <p:txBody>
-          <a:bodyPr rtlCol="0" anchor="ctr"/>
-          <a:lstStyle/>
-          <a:p>
-            <a:pPr algn="ctr"/>
-          </a:p>
-        </p:txBody>
-      </p:sp>
-      <p:sp>
-        <p:nvSpPr>
-          <p:cNvPr id="4" name="TextBox 3"/>
-          <p:cNvSpPr txBox="1"/>
-          <p:nvPr/>
-        </p:nvSpPr>
-        <p:spPr>
-          <a:xfrm>
-            <a:off x="457200" y="164592"/>
-            <a:ext cx="11277295" cy="502920"/>
-          </a:xfrm>
-          <a:prstGeom prst="rect">
-            <a:avLst/>
-          </a:prstGeom>
-          <a:noFill/>
-        </p:spPr>
-        <p:txBody>
-          <a:bodyPr wrap="square">
-            <a:spAutoFit/>
-          </a:bodyPr>
-          <a:lstStyle/>
-          <a:p>
-            <a:r>
-              <a:rPr sz="2600" b="1" i="0">
-                <a:solidFill>
-                  <a:srgbClr val="FFFFFF"/>
-                </a:solidFill>
-                <a:latin typeface="Calibri"/>
-              </a:rPr>
-              <a:t>«Que sea rapido» no es un requisito</a:t>
-            </a:r>
-          </a:p>
-        </p:txBody>
-      </p:sp>
-      <p:sp>
-        <p:nvSpPr>
-          <p:cNvPr id="5" name="Rounded Rectangle 4"/>
-          <p:cNvSpPr/>
-          <p:nvPr/>
-        </p:nvSpPr>
-        <p:spPr>
-          <a:xfrm>
-            <a:off x="457200" y="1261872"/>
-            <a:ext cx="5478627" cy="5093208"/>
-          </a:xfrm>
-          <a:prstGeom prst="roundRect">
-            <a:avLst>
-              <a:gd name="adj" fmla="val 12000"/>
-            </a:avLst>
-          </a:prstGeom>
-          <a:solidFill>
-            <a:srgbClr val="FBE4E4"/>
-          </a:solidFill>
-          <a:ln>
-            <a:noFill/>
-          </a:ln>
-        </p:spPr>
-        <p:style>
-          <a:lnRef idx="1">
-            <a:schemeClr val="accent1"/>
-          </a:lnRef>
-          <a:fillRef idx="3">
-            <a:schemeClr val="accent1"/>
-          </a:fillRef>
-          <a:effectRef idx="2">
-            <a:schemeClr val="accent1"/>
-          </a:effectRef>
-          <a:fontRef idx="minor">
-            <a:schemeClr val="lt1"/>
-          </a:fontRef>
-        </p:style>
-        <p:txBody>
-          <a:bodyPr rtlCol="0" anchor="ctr"/>
-          <a:lstStyle/>
-          <a:p>
-            <a:pPr algn="ctr"/>
-          </a:p>
-        </p:txBody>
-      </p:sp>
-      <p:sp>
-        <p:nvSpPr>
-          <p:cNvPr id="6" name="Rectangle 5"/>
-          <p:cNvSpPr/>
-          <p:nvPr/>
-        </p:nvSpPr>
-        <p:spPr>
-          <a:xfrm>
-            <a:off x="457200" y="1261872"/>
-            <a:ext cx="5478627" cy="502920"/>
-          </a:xfrm>
-          <a:prstGeom prst="rect">
-            <a:avLst/>
-          </a:prstGeom>
-          <a:solidFill>
-            <a:srgbClr val="A02030"/>
-          </a:solidFill>
-          <a:ln>
-            <a:noFill/>
-          </a:ln>
-        </p:spPr>
-        <p:style>
-          <a:lnRef idx="1">
-            <a:schemeClr val="accent1"/>
-          </a:lnRef>
-          <a:fillRef idx="3">
-            <a:schemeClr val="accent1"/>
-          </a:fillRef>
-          <a:effectRef idx="2">
-            <a:schemeClr val="accent1"/>
-          </a:effectRef>
-          <a:fontRef idx="minor">
-            <a:schemeClr val="lt1"/>
-          </a:fontRef>
-        </p:style>
-        <p:txBody>
-          <a:bodyPr rtlCol="0" anchor="ctr"/>
-          <a:lstStyle/>
-          <a:p>
-            <a:pPr algn="ctr"/>
-          </a:p>
-        </p:txBody>
-      </p:sp>
-      <p:sp>
-        <p:nvSpPr>
-          <p:cNvPr id="7" name="TextBox 6"/>
-          <p:cNvSpPr txBox="1"/>
-          <p:nvPr/>
-        </p:nvSpPr>
-        <p:spPr>
-          <a:xfrm>
-            <a:off x="594360" y="1353312"/>
-            <a:ext cx="5204307" cy="365760"/>
-          </a:xfrm>
-          <a:prstGeom prst="rect">
-            <a:avLst/>
-          </a:prstGeom>
-          <a:noFill/>
-        </p:spPr>
-        <p:txBody>
-          <a:bodyPr wrap="square" anchor="ctr"/>
-          <a:lstStyle/>
-          <a:p>
-            <a:pPr algn="ctr"/>
-            <a:r>
-              <a:rPr sz="1600" b="1" i="0">
-                <a:solidFill>
-                  <a:srgbClr val="FFFFFF"/>
-                </a:solidFill>
-                <a:latin typeface="Calibri"/>
-              </a:rPr>
-              <a:t>Enunciado vago</a:t>
-            </a:r>
-          </a:p>
-        </p:txBody>
-      </p:sp>
-      <p:sp>
-        <p:nvSpPr>
-          <p:cNvPr id="8" name="TextBox 7"/>
-          <p:cNvSpPr txBox="1"/>
-          <p:nvPr/>
-        </p:nvSpPr>
-        <p:spPr>
-          <a:xfrm>
-            <a:off x="621792" y="1901952"/>
-            <a:ext cx="5158587" cy="4498848"/>
-          </a:xfrm>
-          <a:prstGeom prst="rect">
-            <a:avLst/>
-          </a:prstGeom>
-          <a:noFill/>
-        </p:spPr>
-        <p:txBody>
-          <a:bodyPr wrap="square">
-            <a:spAutoFit/>
-          </a:bodyPr>
-          <a:lstStyle/>
-          <a:p>
-            <a:pPr>
-              <a:spcAft>
-                <a:spcPts val="800"/>
-              </a:spcAft>
-            </a:pPr>
-            <a:r>
-              <a:rPr sz="1500" b="0" i="0">
-                <a:solidFill>
-                  <a:srgbClr val="333333"/>
-                </a:solidFill>
-                <a:latin typeface="Calibri"/>
-              </a:rPr>
-              <a:t>–   «La app tiene que ser rapida»</a:t>
-            </a:r>
-          </a:p>
-          <a:p>
-            <a:pPr>
-              <a:spcAft>
-                <a:spcPts val="800"/>
-              </a:spcAft>
-            </a:pPr>
-            <a:r>
-              <a:rPr sz="1500" b="0" i="0">
-                <a:solidFill>
-                  <a:srgbClr val="333333"/>
-                </a:solidFill>
-                <a:latin typeface="Calibri"/>
-              </a:rPr>
-              <a:t>–   «Aguanta harta gente»</a:t>
-            </a:r>
-          </a:p>
-          <a:p>
-            <a:pPr>
-              <a:spcAft>
-                <a:spcPts val="800"/>
-              </a:spcAft>
-            </a:pPr>
-            <a:r>
-              <a:rPr sz="1500" b="0" i="0">
-                <a:solidFill>
-                  <a:srgbClr val="333333"/>
-                </a:solidFill>
-                <a:latin typeface="Calibri"/>
-              </a:rPr>
-              <a:t>–   «Si se pone lenta, le subimos recursos»</a:t>
-            </a:r>
-          </a:p>
-          <a:p>
-            <a:pPr>
-              <a:spcAft>
-                <a:spcPts val="800"/>
-              </a:spcAft>
-            </a:pPr>
-            <a:r>
-              <a:rPr sz="1500" b="0" i="0">
-                <a:solidFill>
-                  <a:srgbClr val="333333"/>
-                </a:solidFill>
-                <a:latin typeface="Calibri"/>
-              </a:rPr>
-              <a:t>–   No hay con que comparar despues</a:t>
-            </a:r>
-          </a:p>
-          <a:p>
-            <a:pPr>
-              <a:spcAft>
-                <a:spcPts val="800"/>
-              </a:spcAft>
-            </a:pPr>
-            <a:r>
-              <a:rPr sz="1500" b="0" i="0">
-                <a:solidFill>
-                  <a:srgbClr val="333333"/>
-                </a:solidFill>
-                <a:latin typeface="Calibri"/>
-              </a:rPr>
-              <a:t>–   Nadie puede decir si se cumplio</a:t>
-            </a:r>
-          </a:p>
-        </p:txBody>
-      </p:sp>
-      <p:sp>
-        <p:nvSpPr>
-          <p:cNvPr id="9" name="Rounded Rectangle 8"/>
-          <p:cNvSpPr/>
-          <p:nvPr/>
-        </p:nvSpPr>
-        <p:spPr>
-          <a:xfrm>
-            <a:off x="6255867" y="1261872"/>
-            <a:ext cx="5478627" cy="5093208"/>
-          </a:xfrm>
-          <a:prstGeom prst="roundRect">
-            <a:avLst>
-              <a:gd name="adj" fmla="val 12000"/>
-            </a:avLst>
-          </a:prstGeom>
-          <a:solidFill>
-            <a:srgbClr val="E8F4FA"/>
-          </a:solidFill>
-          <a:ln>
-            <a:noFill/>
-          </a:ln>
-        </p:spPr>
-        <p:style>
-          <a:lnRef idx="1">
-            <a:schemeClr val="accent1"/>
-          </a:lnRef>
-          <a:fillRef idx="3">
-            <a:schemeClr val="accent1"/>
-          </a:fillRef>
-          <a:effectRef idx="2">
-            <a:schemeClr val="accent1"/>
-          </a:effectRef>
-          <a:fontRef idx="minor">
-            <a:schemeClr val="lt1"/>
-          </a:fontRef>
-        </p:style>
-        <p:txBody>
-          <a:bodyPr rtlCol="0" anchor="ctr"/>
-          <a:lstStyle/>
-          <a:p>
-            <a:pPr algn="ctr"/>
-          </a:p>
-        </p:txBody>
-      </p:sp>
-      <p:sp>
-        <p:nvSpPr>
-          <p:cNvPr id="10" name="Rectangle 9"/>
-          <p:cNvSpPr/>
-          <p:nvPr/>
-        </p:nvSpPr>
-        <p:spPr>
-          <a:xfrm>
-            <a:off x="6255867" y="1261872"/>
-            <a:ext cx="5478627" cy="502920"/>
-          </a:xfrm>
-          <a:prstGeom prst="rect">
-            <a:avLst/>
-          </a:prstGeom>
-          <a:solidFill>
-            <a:srgbClr val="095292"/>
-          </a:solidFill>
-          <a:ln>
-            <a:noFill/>
-          </a:ln>
-        </p:spPr>
-        <p:style>
-          <a:lnRef idx="1">
-            <a:schemeClr val="accent1"/>
-          </a:lnRef>
-          <a:fillRef idx="3">
-            <a:schemeClr val="accent1"/>
-          </a:fillRef>
-          <a:effectRef idx="2">
-            <a:schemeClr val="accent1"/>
-          </a:effectRef>
-          <a:fontRef idx="minor">
-            <a:schemeClr val="lt1"/>
-          </a:fontRef>
-        </p:style>
-        <p:txBody>
-          <a:bodyPr rtlCol="0" anchor="ctr"/>
-          <a:lstStyle/>
-          <a:p>
-            <a:pPr algn="ctr"/>
-          </a:p>
-        </p:txBody>
-      </p:sp>
-      <p:sp>
-        <p:nvSpPr>
-          <p:cNvPr id="11" name="TextBox 10"/>
-          <p:cNvSpPr txBox="1"/>
-          <p:nvPr/>
-        </p:nvSpPr>
-        <p:spPr>
-          <a:xfrm>
-            <a:off x="6393027" y="1353312"/>
-            <a:ext cx="5204307" cy="365760"/>
-          </a:xfrm>
-          <a:prstGeom prst="rect">
-            <a:avLst/>
-          </a:prstGeom>
-          <a:noFill/>
-        </p:spPr>
-        <p:txBody>
-          <a:bodyPr wrap="square" anchor="ctr"/>
-          <a:lstStyle/>
-          <a:p>
-            <a:pPr algn="ctr"/>
-            <a:r>
-              <a:rPr sz="1600" b="1" i="0">
-                <a:solidFill>
-                  <a:srgbClr val="FFFFFF"/>
-                </a:solidFill>
-                <a:latin typeface="Calibri"/>
-              </a:rPr>
-              <a:t>Enunciado medible</a:t>
-            </a:r>
-          </a:p>
-        </p:txBody>
-      </p:sp>
-      <p:sp>
-        <p:nvSpPr>
-          <p:cNvPr id="12" name="TextBox 11"/>
-          <p:cNvSpPr txBox="1"/>
-          <p:nvPr/>
-        </p:nvSpPr>
-        <p:spPr>
-          <a:xfrm>
-            <a:off x="6420459" y="1901952"/>
-            <a:ext cx="5158587" cy="4498848"/>
-          </a:xfrm>
-          <a:prstGeom prst="rect">
-            <a:avLst/>
-          </a:prstGeom>
-          <a:noFill/>
-        </p:spPr>
-        <p:txBody>
-          <a:bodyPr wrap="square">
-            <a:spAutoFit/>
-          </a:bodyPr>
-          <a:lstStyle/>
-          <a:p>
-            <a:pPr>
-              <a:spcAft>
-                <a:spcPts val="800"/>
-              </a:spcAft>
-            </a:pPr>
-            <a:r>
-              <a:rPr sz="1500" b="0" i="0">
-                <a:solidFill>
-                  <a:srgbClr val="333333"/>
-                </a:solidFill>
-                <a:latin typeface="Calibri"/>
-              </a:rPr>
-              <a:t>–   </a:t>
-            </a:r>
-            <a:r>
-              <a:rPr sz="1500" b="1" i="0">
-                <a:solidFill>
-                  <a:srgbClr val="333333"/>
-                </a:solidFill>
-                <a:latin typeface="Calibri"/>
-              </a:rPr>
-              <a:t>p95 &lt; 300 ms</a:t>
-            </a:r>
-            <a:r>
-              <a:rPr sz="1500" b="0" i="0">
-                <a:solidFill>
-                  <a:srgbClr val="333333"/>
-                </a:solidFill>
-                <a:latin typeface="Calibri"/>
-              </a:rPr>
-              <a:t> en el endpoint de reserva</a:t>
-            </a:r>
-          </a:p>
-          <a:p>
-            <a:pPr>
-              <a:spcAft>
-                <a:spcPts val="800"/>
-              </a:spcAft>
-            </a:pPr>
-            <a:r>
-              <a:rPr sz="1500" b="0" i="0">
-                <a:solidFill>
-                  <a:srgbClr val="333333"/>
-                </a:solidFill>
-                <a:latin typeface="Calibri"/>
-              </a:rPr>
-              <a:t>–   Escenario: </a:t>
-            </a:r>
-            <a:r>
-              <a:rPr sz="1500" b="1" i="0">
-                <a:solidFill>
-                  <a:srgbClr val="333333"/>
-                </a:solidFill>
-                <a:latin typeface="Calibri"/>
-              </a:rPr>
-              <a:t>150 RPS</a:t>
-            </a:r>
-            <a:r>
-              <a:rPr sz="1500" b="0" i="0">
-                <a:solidFill>
-                  <a:srgbClr val="333333"/>
-                </a:solidFill>
-                <a:latin typeface="Calibri"/>
-              </a:rPr>
-              <a:t> en el pico de inicio de semestre</a:t>
-            </a:r>
-          </a:p>
-          <a:p>
-            <a:pPr>
-              <a:spcAft>
-                <a:spcPts val="800"/>
-              </a:spcAft>
-            </a:pPr>
-            <a:r>
-              <a:rPr sz="1500" b="0" i="0">
-                <a:solidFill>
-                  <a:srgbClr val="333333"/>
-                </a:solidFill>
-                <a:latin typeface="Calibri"/>
-              </a:rPr>
-              <a:t>–   Bottleneck sospechado: </a:t>
-            </a:r>
-            <a:r>
-              <a:rPr sz="1500" b="1" i="0">
-                <a:solidFill>
-                  <a:srgbClr val="333333"/>
-                </a:solidFill>
-                <a:latin typeface="Calibri"/>
-              </a:rPr>
-              <a:t>consulta a la BD</a:t>
-            </a:r>
-          </a:p>
-          <a:p>
-            <a:pPr>
-              <a:spcAft>
-                <a:spcPts val="800"/>
-              </a:spcAft>
-            </a:pPr>
-            <a:r>
-              <a:rPr sz="1500" b="0" i="0">
-                <a:solidFill>
-                  <a:srgbClr val="333333"/>
-                </a:solidFill>
-                <a:latin typeface="Calibri"/>
-              </a:rPr>
-              <a:t>–   Se puede verificar: pasa o no pasa</a:t>
-            </a:r>
-          </a:p>
-          <a:p>
-            <a:pPr>
-              <a:spcAft>
-                <a:spcPts val="800"/>
-              </a:spcAft>
-            </a:pPr>
-            <a:r>
-              <a:rPr sz="1500" b="0" i="0">
-                <a:solidFill>
-                  <a:srgbClr val="333333"/>
-                </a:solidFill>
-                <a:latin typeface="Calibri"/>
-              </a:rPr>
-              <a:t>–   Errores: </a:t>
-            </a:r>
-            <a:r>
-              <a:rPr sz="1500" b="1" i="0">
-                <a:solidFill>
-                  <a:srgbClr val="333333"/>
-                </a:solidFill>
-                <a:latin typeface="Calibri"/>
-              </a:rPr>
-              <a:t>&lt; 1 %</a:t>
-            </a:r>
-            <a:r>
-              <a:rPr sz="1500" b="0" i="0">
-                <a:solidFill>
-                  <a:srgbClr val="333333"/>
-                </a:solidFill>
-                <a:latin typeface="Calibri"/>
-              </a:rPr>
-              <a:t> de respuestas 5xx</a:t>
-            </a:r>
-          </a:p>
-        </p:txBody>
-      </p:sp>
-      <p:sp>
-        <p:nvSpPr>
-          <p:cNvPr id="13" name="TextBox 12"/>
-          <p:cNvSpPr txBox="1"/>
-          <p:nvPr/>
-        </p:nvSpPr>
-        <p:spPr>
-          <a:xfrm>
-            <a:off x="11185855" y="6473952"/>
-            <a:ext cx="640080" cy="274320"/>
-          </a:xfrm>
-          <a:prstGeom prst="rect">
-            <a:avLst/>
-          </a:prstGeom>
-          <a:noFill/>
-        </p:spPr>
-        <p:txBody>
-          <a:bodyPr wrap="square">
-            <a:spAutoFit/>
-          </a:bodyPr>
-          <a:lstStyle/>
-          <a:p>
-            <a:pPr algn="r"/>
-            <a:r>
-              <a:rPr sz="1100" b="0" i="0">
-                <a:solidFill>
-                  <a:srgbClr val="666666"/>
-                </a:solidFill>
-                <a:latin typeface="Calibri"/>
-              </a:rPr>
-              <a:t>25</a:t>
-            </a:r>
-          </a:p>
-        </p:txBody>
-      </p:sp>
-    </p:spTree>
-  </p:cSld>
-  <p:clrMapOvr>
-    <a:masterClrMapping/>
-  </p:clrMapOvr>
-</p:sld>
-</file>
-
-<file path=ppt/slides/slide26.xml><?xml version="1.0" encoding="utf-8"?>
-<p:sld xmlns:a="http://schemas.openxmlformats.org/drawingml/2006/main" xmlns:p="http://schemas.openxmlformats.org/presentationml/2006/main" xmlns:r="http://schemas.openxmlformats.org/officeDocument/2006/relationships">
-  <p:cSld>
-    <p:bg>
-      <p:bgPr>
-        <a:solidFill>
-          <a:srgbClr val="FFFFFF"/>
-        </a:solidFill>
-        <a:effectLst/>
-      </p:bgPr>
-    </p:bg>
-    <p:spTree>
-      <p:nvGrpSpPr>
-        <p:cNvPr id="1" name=""/>
-        <p:cNvGrpSpPr/>
-        <p:nvPr/>
-      </p:nvGrpSpPr>
-      <p:grpSpPr/>
-      <p:sp>
-        <p:nvSpPr>
-          <p:cNvPr id="2" name="Rectangle 1"/>
-          <p:cNvSpPr/>
-          <p:nvPr/>
-        </p:nvSpPr>
-        <p:spPr>
-          <a:xfrm>
-            <a:off x="0" y="0"/>
-            <a:ext cx="12191695" cy="1170432"/>
-          </a:xfrm>
-          <a:prstGeom prst="rect">
-            <a:avLst/>
-          </a:prstGeom>
-          <a:solidFill>
-            <a:srgbClr val="095292"/>
-          </a:solidFill>
-          <a:ln>
-            <a:noFill/>
-          </a:ln>
-        </p:spPr>
-        <p:style>
-          <a:lnRef idx="1">
-            <a:schemeClr val="accent1"/>
-          </a:lnRef>
-          <a:fillRef idx="3">
-            <a:schemeClr val="accent1"/>
-          </a:fillRef>
-          <a:effectRef idx="2">
-            <a:schemeClr val="accent1"/>
-          </a:effectRef>
-          <a:fontRef idx="minor">
-            <a:schemeClr val="lt1"/>
-          </a:fontRef>
-        </p:style>
-        <p:txBody>
-          <a:bodyPr rtlCol="0" anchor="ctr"/>
-          <a:lstStyle/>
-          <a:p>
-            <a:pPr algn="ctr"/>
-          </a:p>
-        </p:txBody>
-      </p:sp>
-      <p:sp>
-        <p:nvSpPr>
-          <p:cNvPr id="3" name="Rectangle 2"/>
-          <p:cNvSpPr/>
-          <p:nvPr/>
-        </p:nvSpPr>
-        <p:spPr>
-          <a:xfrm>
-            <a:off x="0" y="1170432"/>
-            <a:ext cx="12191695" cy="41148"/>
-          </a:xfrm>
-          <a:prstGeom prst="rect">
-            <a:avLst/>
-          </a:prstGeom>
-          <a:solidFill>
-            <a:srgbClr val="FFD000"/>
-          </a:solidFill>
-          <a:ln>
-            <a:noFill/>
-          </a:ln>
-        </p:spPr>
-        <p:style>
-          <a:lnRef idx="1">
-            <a:schemeClr val="accent1"/>
-          </a:lnRef>
-          <a:fillRef idx="3">
-            <a:schemeClr val="accent1"/>
-          </a:fillRef>
-          <a:effectRef idx="2">
-            <a:schemeClr val="accent1"/>
-          </a:effectRef>
-          <a:fontRef idx="minor">
-            <a:schemeClr val="lt1"/>
-          </a:fontRef>
-        </p:style>
-        <p:txBody>
-          <a:bodyPr rtlCol="0" anchor="ctr"/>
-          <a:lstStyle/>
-          <a:p>
-            <a:pPr algn="ctr"/>
-          </a:p>
-        </p:txBody>
-      </p:sp>
-      <p:sp>
-        <p:nvSpPr>
-          <p:cNvPr id="4" name="TextBox 3"/>
-          <p:cNvSpPr txBox="1"/>
-          <p:nvPr/>
-        </p:nvSpPr>
-        <p:spPr>
-          <a:xfrm>
-            <a:off x="457200" y="164592"/>
-            <a:ext cx="11277295" cy="384048"/>
-          </a:xfrm>
-          <a:prstGeom prst="rect">
-            <a:avLst/>
-          </a:prstGeom>
-          <a:noFill/>
-        </p:spPr>
-        <p:txBody>
-          <a:bodyPr wrap="square">
-            <a:spAutoFit/>
-          </a:bodyPr>
-          <a:lstStyle/>
-          <a:p>
-            <a:r>
-              <a:rPr sz="2600" b="1" i="0">
-                <a:solidFill>
-                  <a:srgbClr val="FFFFFF"/>
-                </a:solidFill>
-                <a:latin typeface="Calibri"/>
-              </a:rPr>
-              <a:t>Del boceto al código Mermaid</a:t>
-            </a:r>
-          </a:p>
-        </p:txBody>
-      </p:sp>
-      <p:sp>
-        <p:nvSpPr>
-          <p:cNvPr id="5" name="TextBox 4"/>
-          <p:cNvSpPr txBox="1"/>
-          <p:nvPr/>
-        </p:nvSpPr>
-        <p:spPr>
-          <a:xfrm>
-            <a:off x="457200" y="566928"/>
-            <a:ext cx="11277295" cy="411480"/>
-          </a:xfrm>
-          <a:prstGeom prst="rect">
-            <a:avLst/>
-          </a:prstGeom>
-          <a:noFill/>
-        </p:spPr>
-        <p:txBody>
-          <a:bodyPr wrap="square">
-            <a:spAutoFit/>
-          </a:bodyPr>
-          <a:lstStyle/>
-          <a:p>
-            <a:r>
-              <a:rPr sz="1400" b="0" i="0">
-                <a:solidFill>
-                  <a:srgbClr val="B8D8EE"/>
-                </a:solidFill>
-                <a:latin typeface="Calibri"/>
-              </a:rPr>
-              <a:t>El diagrama se escribe como código: se versiona, se compara y se corrige</a:t>
-            </a:r>
-          </a:p>
-        </p:txBody>
-      </p:sp>
-      <p:sp>
-        <p:nvSpPr>
-          <p:cNvPr id="6" name="Rounded Rectangle 5"/>
-          <p:cNvSpPr/>
-          <p:nvPr/>
-        </p:nvSpPr>
-        <p:spPr>
-          <a:xfrm>
-            <a:off x="457200" y="1659636"/>
-            <a:ext cx="11277295" cy="1051560"/>
-          </a:xfrm>
-          <a:prstGeom prst="roundRect">
-            <a:avLst>
-              <a:gd name="adj" fmla="val 12000"/>
-            </a:avLst>
-          </a:prstGeom>
-          <a:solidFill>
-            <a:srgbClr val="F2F2F2"/>
-          </a:solidFill>
-          <a:ln>
-            <a:noFill/>
-          </a:ln>
-        </p:spPr>
-        <p:style>
-          <a:lnRef idx="1">
-            <a:schemeClr val="accent1"/>
-          </a:lnRef>
-          <a:fillRef idx="3">
-            <a:schemeClr val="accent1"/>
-          </a:fillRef>
-          <a:effectRef idx="2">
-            <a:schemeClr val="accent1"/>
-          </a:effectRef>
-          <a:fontRef idx="minor">
-            <a:schemeClr val="lt1"/>
-          </a:fontRef>
-        </p:style>
-        <p:txBody>
-          <a:bodyPr rtlCol="0" anchor="ctr"/>
-          <a:lstStyle/>
-          <a:p>
-            <a:pPr algn="ctr"/>
-          </a:p>
-        </p:txBody>
-      </p:sp>
-      <p:sp>
-        <p:nvSpPr>
-          <p:cNvPr id="7" name="Rounded Rectangle 6"/>
-          <p:cNvSpPr/>
-          <p:nvPr/>
-        </p:nvSpPr>
-        <p:spPr>
-          <a:xfrm>
-            <a:off x="594360" y="1965960"/>
-            <a:ext cx="438912" cy="438912"/>
-          </a:xfrm>
-          <a:prstGeom prst="roundRect">
-            <a:avLst>
-              <a:gd name="adj" fmla="val 12000"/>
-            </a:avLst>
-          </a:prstGeom>
-          <a:solidFill>
-            <a:srgbClr val="095292"/>
-          </a:solidFill>
-          <a:ln>
-            <a:noFill/>
-          </a:ln>
-        </p:spPr>
-        <p:style>
-          <a:lnRef idx="1">
-            <a:schemeClr val="accent1"/>
-          </a:lnRef>
-          <a:fillRef idx="3">
-            <a:schemeClr val="accent1"/>
-          </a:fillRef>
-          <a:effectRef idx="2">
-            <a:schemeClr val="accent1"/>
-          </a:effectRef>
-          <a:fontRef idx="minor">
-            <a:schemeClr val="lt1"/>
-          </a:fontRef>
-        </p:style>
-        <p:txBody>
-          <a:bodyPr rtlCol="0" anchor="ctr"/>
-          <a:lstStyle/>
-          <a:p>
-            <a:pPr algn="ctr"/>
-          </a:p>
-        </p:txBody>
-      </p:sp>
-      <p:sp>
-        <p:nvSpPr>
-          <p:cNvPr id="8" name="TextBox 7"/>
-          <p:cNvSpPr txBox="1"/>
-          <p:nvPr/>
-        </p:nvSpPr>
-        <p:spPr>
-          <a:xfrm>
-            <a:off x="594360" y="1965960"/>
-            <a:ext cx="438912" cy="438912"/>
-          </a:xfrm>
-          <a:prstGeom prst="rect">
-            <a:avLst/>
-          </a:prstGeom>
-          <a:noFill/>
-        </p:spPr>
-        <p:txBody>
-          <a:bodyPr wrap="square" anchor="ctr"/>
-          <a:lstStyle/>
-          <a:p>
-            <a:pPr algn="ctr"/>
-            <a:r>
-              <a:rPr sz="1600" b="1" i="0">
-                <a:solidFill>
-                  <a:srgbClr val="FFFFFF"/>
-                </a:solidFill>
-                <a:latin typeface="Calibri"/>
-              </a:rPr>
-              <a:t>1</a:t>
-            </a:r>
-          </a:p>
-        </p:txBody>
-      </p:sp>
-      <p:sp>
-        <p:nvSpPr>
-          <p:cNvPr id="9" name="TextBox 8"/>
-          <p:cNvSpPr txBox="1"/>
-          <p:nvPr/>
-        </p:nvSpPr>
-        <p:spPr>
-          <a:xfrm>
-            <a:off x="1188720" y="1751076"/>
-            <a:ext cx="10271455" cy="886968"/>
-          </a:xfrm>
-          <a:prstGeom prst="rect">
-            <a:avLst/>
-          </a:prstGeom>
-          <a:noFill/>
-        </p:spPr>
-        <p:txBody>
-          <a:bodyPr wrap="square" anchor="ctr"/>
-          <a:lstStyle/>
-          <a:p>
-            <a:r>
-              <a:rPr sz="1500" b="1" i="0">
-                <a:solidFill>
-                  <a:srgbClr val="095292"/>
-                </a:solidFill>
-                <a:latin typeface="Calibri"/>
-              </a:rPr>
-              <a:t>Diseña visual</a:t>
-            </a:r>
-          </a:p>
-          <a:p>
-            <a:pPr>
-              <a:spcBef>
-                <a:spcPts val="200"/>
-              </a:spcBef>
-            </a:pPr>
-            <a:r>
-              <a:rPr sz="1300" b="0" i="0">
-                <a:solidFill>
-                  <a:srgbClr val="333333"/>
-                </a:solidFill>
-                <a:latin typeface="Calibri"/>
-              </a:rPr>
-              <a:t>Dibuja el diagrama como quieras en Excalidraw o draw.io: es más rápido arrastrar cajas que escribir código, y ahí es donde se piensa el modelo.</a:t>
-            </a:r>
-          </a:p>
-        </p:txBody>
-      </p:sp>
-      <p:sp>
-        <p:nvSpPr>
-          <p:cNvPr id="10" name="Rounded Rectangle 9"/>
-          <p:cNvSpPr/>
-          <p:nvPr/>
-        </p:nvSpPr>
-        <p:spPr>
-          <a:xfrm>
-            <a:off x="457200" y="2802636"/>
-            <a:ext cx="11277295" cy="1051560"/>
-          </a:xfrm>
-          <a:prstGeom prst="roundRect">
-            <a:avLst>
-              <a:gd name="adj" fmla="val 12000"/>
-            </a:avLst>
-          </a:prstGeom>
-          <a:solidFill>
-            <a:srgbClr val="E8F4FA"/>
-          </a:solidFill>
-          <a:ln>
-            <a:noFill/>
-          </a:ln>
-        </p:spPr>
-        <p:style>
-          <a:lnRef idx="1">
-            <a:schemeClr val="accent1"/>
-          </a:lnRef>
-          <a:fillRef idx="3">
-            <a:schemeClr val="accent1"/>
-          </a:fillRef>
-          <a:effectRef idx="2">
-            <a:schemeClr val="accent1"/>
-          </a:effectRef>
-          <a:fontRef idx="minor">
-            <a:schemeClr val="lt1"/>
-          </a:fontRef>
-        </p:style>
-        <p:txBody>
-          <a:bodyPr rtlCol="0" anchor="ctr"/>
-          <a:lstStyle/>
-          <a:p>
-            <a:pPr algn="ctr"/>
-          </a:p>
-        </p:txBody>
-      </p:sp>
-      <p:sp>
-        <p:nvSpPr>
-          <p:cNvPr id="11" name="Rounded Rectangle 10"/>
-          <p:cNvSpPr/>
-          <p:nvPr/>
-        </p:nvSpPr>
-        <p:spPr>
-          <a:xfrm>
-            <a:off x="594360" y="3108960"/>
-            <a:ext cx="438912" cy="438912"/>
-          </a:xfrm>
-          <a:prstGeom prst="roundRect">
-            <a:avLst>
-              <a:gd name="adj" fmla="val 12000"/>
-            </a:avLst>
-          </a:prstGeom>
-          <a:solidFill>
-            <a:srgbClr val="095292"/>
-          </a:solidFill>
-          <a:ln>
-            <a:noFill/>
-          </a:ln>
-        </p:spPr>
-        <p:style>
-          <a:lnRef idx="1">
-            <a:schemeClr val="accent1"/>
-          </a:lnRef>
-          <a:fillRef idx="3">
-            <a:schemeClr val="accent1"/>
-          </a:fillRef>
-          <a:effectRef idx="2">
-            <a:schemeClr val="accent1"/>
-          </a:effectRef>
-          <a:fontRef idx="minor">
-            <a:schemeClr val="lt1"/>
-          </a:fontRef>
-        </p:style>
-        <p:txBody>
-          <a:bodyPr rtlCol="0" anchor="ctr"/>
-          <a:lstStyle/>
-          <a:p>
-            <a:pPr algn="ctr"/>
-          </a:p>
-        </p:txBody>
-      </p:sp>
-      <p:sp>
-        <p:nvSpPr>
-          <p:cNvPr id="12" name="TextBox 11"/>
-          <p:cNvSpPr txBox="1"/>
-          <p:nvPr/>
-        </p:nvSpPr>
-        <p:spPr>
-          <a:xfrm>
-            <a:off x="594360" y="3108960"/>
-            <a:ext cx="438912" cy="438912"/>
-          </a:xfrm>
-          <a:prstGeom prst="rect">
-            <a:avLst/>
-          </a:prstGeom>
-          <a:noFill/>
-        </p:spPr>
-        <p:txBody>
-          <a:bodyPr wrap="square" anchor="ctr"/>
-          <a:lstStyle/>
-          <a:p>
-            <a:pPr algn="ctr"/>
-            <a:r>
-              <a:rPr sz="1600" b="1" i="0">
-                <a:solidFill>
-                  <a:srgbClr val="FFFFFF"/>
-                </a:solidFill>
-                <a:latin typeface="Calibri"/>
-              </a:rPr>
-              <a:t>2</a:t>
-            </a:r>
-          </a:p>
-        </p:txBody>
-      </p:sp>
-      <p:sp>
-        <p:nvSpPr>
-          <p:cNvPr id="13" name="TextBox 12"/>
-          <p:cNvSpPr txBox="1"/>
-          <p:nvPr/>
-        </p:nvSpPr>
-        <p:spPr>
-          <a:xfrm>
-            <a:off x="1188720" y="2894076"/>
-            <a:ext cx="10271455" cy="886968"/>
-          </a:xfrm>
-          <a:prstGeom prst="rect">
-            <a:avLst/>
-          </a:prstGeom>
-          <a:noFill/>
-        </p:spPr>
-        <p:txBody>
-          <a:bodyPr wrap="square" anchor="ctr"/>
-          <a:lstStyle/>
-          <a:p>
-            <a:r>
-              <a:rPr sz="1500" b="1" i="0">
-                <a:solidFill>
-                  <a:srgbClr val="095292"/>
-                </a:solidFill>
-                <a:latin typeface="Calibri"/>
-              </a:rPr>
-              <a:t>Traduce con IA</a:t>
-            </a:r>
-          </a:p>
-          <a:p>
-            <a:pPr>
-              <a:spcBef>
-                <a:spcPts val="200"/>
-              </a:spcBef>
-            </a:pPr>
-            <a:r>
-              <a:rPr sz="1300" b="0" i="0">
-                <a:solidFill>
-                  <a:srgbClr val="333333"/>
-                </a:solidFill>
-                <a:latin typeface="Calibri"/>
-              </a:rPr>
-              <a:t>Describe tu boceto a una IA y pídele el código Mermaid usando sequenceDiagram. Revisa el resultado: la IA acierta la sintaxis, no tu modelo.</a:t>
-            </a:r>
-          </a:p>
-        </p:txBody>
-      </p:sp>
-      <p:sp>
-        <p:nvSpPr>
-          <p:cNvPr id="14" name="Rounded Rectangle 13"/>
-          <p:cNvSpPr/>
-          <p:nvPr/>
-        </p:nvSpPr>
-        <p:spPr>
-          <a:xfrm>
-            <a:off x="457200" y="3945636"/>
-            <a:ext cx="11277295" cy="1051560"/>
-          </a:xfrm>
-          <a:prstGeom prst="roundRect">
-            <a:avLst>
-              <a:gd name="adj" fmla="val 12000"/>
-            </a:avLst>
-          </a:prstGeom>
-          <a:solidFill>
-            <a:srgbClr val="F2F2F2"/>
-          </a:solidFill>
-          <a:ln>
-            <a:noFill/>
-          </a:ln>
-        </p:spPr>
-        <p:style>
-          <a:lnRef idx="1">
-            <a:schemeClr val="accent1"/>
-          </a:lnRef>
-          <a:fillRef idx="3">
-            <a:schemeClr val="accent1"/>
-          </a:fillRef>
-          <a:effectRef idx="2">
-            <a:schemeClr val="accent1"/>
-          </a:effectRef>
-          <a:fontRef idx="minor">
-            <a:schemeClr val="lt1"/>
-          </a:fontRef>
-        </p:style>
-        <p:txBody>
-          <a:bodyPr rtlCol="0" anchor="ctr"/>
-          <a:lstStyle/>
-          <a:p>
-            <a:pPr algn="ctr"/>
-          </a:p>
-        </p:txBody>
-      </p:sp>
-      <p:sp>
-        <p:nvSpPr>
-          <p:cNvPr id="15" name="Rounded Rectangle 14"/>
-          <p:cNvSpPr/>
-          <p:nvPr/>
-        </p:nvSpPr>
-        <p:spPr>
-          <a:xfrm>
-            <a:off x="594360" y="4251960"/>
-            <a:ext cx="438912" cy="438912"/>
-          </a:xfrm>
-          <a:prstGeom prst="roundRect">
-            <a:avLst>
-              <a:gd name="adj" fmla="val 12000"/>
-            </a:avLst>
-          </a:prstGeom>
-          <a:solidFill>
-            <a:srgbClr val="095292"/>
-          </a:solidFill>
-          <a:ln>
-            <a:noFill/>
-          </a:ln>
-        </p:spPr>
-        <p:style>
-          <a:lnRef idx="1">
-            <a:schemeClr val="accent1"/>
-          </a:lnRef>
-          <a:fillRef idx="3">
-            <a:schemeClr val="accent1"/>
-          </a:fillRef>
-          <a:effectRef idx="2">
-            <a:schemeClr val="accent1"/>
-          </a:effectRef>
-          <a:fontRef idx="minor">
-            <a:schemeClr val="lt1"/>
-          </a:fontRef>
-        </p:style>
-        <p:txBody>
-          <a:bodyPr rtlCol="0" anchor="ctr"/>
-          <a:lstStyle/>
-          <a:p>
-            <a:pPr algn="ctr"/>
-          </a:p>
-        </p:txBody>
-      </p:sp>
-      <p:sp>
-        <p:nvSpPr>
-          <p:cNvPr id="16" name="TextBox 15"/>
-          <p:cNvSpPr txBox="1"/>
-          <p:nvPr/>
-        </p:nvSpPr>
-        <p:spPr>
-          <a:xfrm>
-            <a:off x="594360" y="4251960"/>
-            <a:ext cx="438912" cy="438912"/>
-          </a:xfrm>
-          <a:prstGeom prst="rect">
-            <a:avLst/>
-          </a:prstGeom>
-          <a:noFill/>
-        </p:spPr>
-        <p:txBody>
-          <a:bodyPr wrap="square" anchor="ctr"/>
-          <a:lstStyle/>
-          <a:p>
-            <a:pPr algn="ctr"/>
-            <a:r>
-              <a:rPr sz="1600" b="1" i="0">
-                <a:solidFill>
-                  <a:srgbClr val="FFFFFF"/>
-                </a:solidFill>
-                <a:latin typeface="Calibri"/>
-              </a:rPr>
-              <a:t>3</a:t>
-            </a:r>
-          </a:p>
-        </p:txBody>
-      </p:sp>
-      <p:sp>
-        <p:nvSpPr>
-          <p:cNvPr id="17" name="TextBox 16"/>
-          <p:cNvSpPr txBox="1"/>
-          <p:nvPr/>
-        </p:nvSpPr>
-        <p:spPr>
-          <a:xfrm>
-            <a:off x="1188720" y="4037076"/>
-            <a:ext cx="10271455" cy="886968"/>
-          </a:xfrm>
-          <a:prstGeom prst="rect">
-            <a:avLst/>
-          </a:prstGeom>
-          <a:noFill/>
-        </p:spPr>
-        <p:txBody>
-          <a:bodyPr wrap="square" anchor="ctr"/>
-          <a:lstStyle/>
-          <a:p>
-            <a:r>
-              <a:rPr sz="1500" b="1" i="0">
-                <a:solidFill>
-                  <a:srgbClr val="095292"/>
-                </a:solidFill>
-                <a:latin typeface="Calibri"/>
-              </a:rPr>
-              <a:t>Renderiza en un visor</a:t>
-            </a:r>
-          </a:p>
-          <a:p>
-            <a:pPr>
-              <a:spcBef>
-                <a:spcPts val="200"/>
-              </a:spcBef>
-            </a:pPr>
-            <a:r>
-              <a:rPr sz="1300" b="0" i="0">
-                <a:solidFill>
-                  <a:srgbClr val="333333"/>
-                </a:solidFill>
-                <a:latin typeface="Calibri"/>
-              </a:rPr>
-              <a:t>Pega el código en un visor Mermaid (mermaid.live o la vista previa de tu editor) y míralo dibujado. Si no renderiza, corrige ahí: un end faltante o un rótulo sin comillas.</a:t>
-            </a:r>
-          </a:p>
-        </p:txBody>
-      </p:sp>
-      <p:sp>
-        <p:nvSpPr>
-          <p:cNvPr id="18" name="Rounded Rectangle 17"/>
-          <p:cNvSpPr/>
-          <p:nvPr/>
-        </p:nvSpPr>
-        <p:spPr>
-          <a:xfrm>
-            <a:off x="457200" y="5088636"/>
-            <a:ext cx="11277295" cy="1051560"/>
-          </a:xfrm>
-          <a:prstGeom prst="roundRect">
-            <a:avLst>
-              <a:gd name="adj" fmla="val 12000"/>
-            </a:avLst>
-          </a:prstGeom>
-          <a:solidFill>
-            <a:srgbClr val="E8F4FA"/>
-          </a:solidFill>
-          <a:ln>
-            <a:noFill/>
-          </a:ln>
-        </p:spPr>
-        <p:style>
-          <a:lnRef idx="1">
-            <a:schemeClr val="accent1"/>
-          </a:lnRef>
-          <a:fillRef idx="3">
-            <a:schemeClr val="accent1"/>
-          </a:fillRef>
-          <a:effectRef idx="2">
-            <a:schemeClr val="accent1"/>
-          </a:effectRef>
-          <a:fontRef idx="minor">
-            <a:schemeClr val="lt1"/>
-          </a:fontRef>
-        </p:style>
-        <p:txBody>
-          <a:bodyPr rtlCol="0" anchor="ctr"/>
-          <a:lstStyle/>
-          <a:p>
-            <a:pPr algn="ctr"/>
-          </a:p>
-        </p:txBody>
-      </p:sp>
-      <p:sp>
-        <p:nvSpPr>
-          <p:cNvPr id="19" name="Rounded Rectangle 18"/>
-          <p:cNvSpPr/>
-          <p:nvPr/>
-        </p:nvSpPr>
-        <p:spPr>
-          <a:xfrm>
-            <a:off x="594360" y="5394960"/>
-            <a:ext cx="438912" cy="438912"/>
-          </a:xfrm>
-          <a:prstGeom prst="roundRect">
-            <a:avLst>
-              <a:gd name="adj" fmla="val 12000"/>
-            </a:avLst>
-          </a:prstGeom>
-          <a:solidFill>
-            <a:srgbClr val="095292"/>
-          </a:solidFill>
-          <a:ln>
-            <a:noFill/>
-          </a:ln>
-        </p:spPr>
-        <p:style>
-          <a:lnRef idx="1">
-            <a:schemeClr val="accent1"/>
-          </a:lnRef>
-          <a:fillRef idx="3">
-            <a:schemeClr val="accent1"/>
-          </a:fillRef>
-          <a:effectRef idx="2">
-            <a:schemeClr val="accent1"/>
-          </a:effectRef>
-          <a:fontRef idx="minor">
-            <a:schemeClr val="lt1"/>
-          </a:fontRef>
-        </p:style>
-        <p:txBody>
-          <a:bodyPr rtlCol="0" anchor="ctr"/>
-          <a:lstStyle/>
-          <a:p>
-            <a:pPr algn="ctr"/>
-          </a:p>
-        </p:txBody>
-      </p:sp>
-      <p:sp>
-        <p:nvSpPr>
-          <p:cNvPr id="20" name="TextBox 19"/>
-          <p:cNvSpPr txBox="1"/>
-          <p:nvPr/>
-        </p:nvSpPr>
-        <p:spPr>
-          <a:xfrm>
-            <a:off x="594360" y="5394960"/>
-            <a:ext cx="438912" cy="438912"/>
-          </a:xfrm>
-          <a:prstGeom prst="rect">
-            <a:avLst/>
-          </a:prstGeom>
-          <a:noFill/>
-        </p:spPr>
-        <p:txBody>
-          <a:bodyPr wrap="square" anchor="ctr"/>
-          <a:lstStyle/>
-          <a:p>
-            <a:pPr algn="ctr"/>
-            <a:r>
-              <a:rPr sz="1600" b="1" i="0">
-                <a:solidFill>
-                  <a:srgbClr val="FFFFFF"/>
-                </a:solidFill>
-                <a:latin typeface="Calibri"/>
-              </a:rPr>
-              <a:t>4</a:t>
-            </a:r>
-          </a:p>
-        </p:txBody>
-      </p:sp>
-      <p:sp>
-        <p:nvSpPr>
-          <p:cNvPr id="21" name="TextBox 20"/>
-          <p:cNvSpPr txBox="1"/>
-          <p:nvPr/>
-        </p:nvSpPr>
-        <p:spPr>
-          <a:xfrm>
-            <a:off x="1188720" y="5180076"/>
-            <a:ext cx="10271455" cy="886968"/>
-          </a:xfrm>
-          <a:prstGeom prst="rect">
-            <a:avLst/>
-          </a:prstGeom>
-          <a:noFill/>
-        </p:spPr>
-        <p:txBody>
-          <a:bodyPr wrap="square" anchor="ctr"/>
-          <a:lstStyle/>
-          <a:p>
-            <a:r>
-              <a:rPr sz="1500" b="1" i="0">
-                <a:solidFill>
-                  <a:srgbClr val="095292"/>
-                </a:solidFill>
-                <a:latin typeface="Calibri"/>
-              </a:rPr>
-              <a:t>Guarda código e imagen</a:t>
-            </a:r>
-          </a:p>
-          <a:p>
-            <a:pPr>
-              <a:spcBef>
-                <a:spcPts val="200"/>
-              </a:spcBef>
-            </a:pPr>
-            <a:r>
-              <a:rPr sz="1300" b="0" i="0">
-                <a:solidFill>
-                  <a:srgbClr val="333333"/>
-                </a:solidFill>
-                <a:latin typeface="Calibri"/>
-              </a:rPr>
-              <a:t>El código es la fuente del diagrama: guárdalo con tu proyecto junto con el PNG exportado.</a:t>
-            </a:r>
-          </a:p>
-        </p:txBody>
-      </p:sp>
-      <p:sp>
-        <p:nvSpPr>
-          <p:cNvPr id="22" name="TextBox 21"/>
-          <p:cNvSpPr txBox="1"/>
-          <p:nvPr/>
-        </p:nvSpPr>
-        <p:spPr>
-          <a:xfrm>
-            <a:off x="11185855" y="6473952"/>
-            <a:ext cx="640080" cy="274320"/>
-          </a:xfrm>
-          <a:prstGeom prst="rect">
-            <a:avLst/>
-          </a:prstGeom>
-          <a:noFill/>
-        </p:spPr>
-        <p:txBody>
-          <a:bodyPr wrap="square">
-            <a:spAutoFit/>
-          </a:bodyPr>
-          <a:lstStyle/>
-          <a:p>
-            <a:pPr algn="r"/>
-            <a:r>
-              <a:rPr sz="1100" b="0" i="0">
-                <a:solidFill>
-                  <a:srgbClr val="666666"/>
-                </a:solidFill>
-                <a:latin typeface="Calibri"/>
-              </a:rPr>
-              <a:t>26</a:t>
-            </a:r>
-          </a:p>
-        </p:txBody>
-      </p:sp>
-    </p:spTree>
-  </p:cSld>
-  <p:clrMapOvr>
-    <a:masterClrMapping/>
-  </p:clrMapOvr>
-</p:sld>
-</file>
-
-<file path=ppt/slides/slide27.xml><?xml version="1.0" encoding="utf-8"?>
-<p:sld xmlns:a="http://schemas.openxmlformats.org/drawingml/2006/main" xmlns:p="http://schemas.openxmlformats.org/presentationml/2006/main" xmlns:r="http://schemas.openxmlformats.org/officeDocument/2006/relationships">
-  <p:cSld>
-    <p:bg>
-      <p:bgPr>
-        <a:solidFill>
-          <a:srgbClr val="FFFFFF"/>
-        </a:solidFill>
-        <a:effectLst/>
-      </p:bgPr>
-    </p:bg>
-    <p:spTree>
-      <p:nvGrpSpPr>
-        <p:cNvPr id="1" name=""/>
-        <p:cNvGrpSpPr/>
-        <p:nvPr/>
-      </p:nvGrpSpPr>
-      <p:grpSpPr/>
-      <p:sp>
-        <p:nvSpPr>
-          <p:cNvPr id="2" name="Rectangle 1"/>
-          <p:cNvSpPr/>
-          <p:nvPr/>
-        </p:nvSpPr>
-        <p:spPr>
-          <a:xfrm>
-            <a:off x="0" y="0"/>
             <a:ext cx="12191695" cy="164592"/>
           </a:xfrm>
           <a:prstGeom prst="rect">
@@ -11856,7 +10354,7 @@
                 </a:solidFill>
                 <a:latin typeface="Calibri"/>
               </a:rPr>
-              <a:t>–   Una idea por diapositiva: el diagrama en pantalla y la decisión dicha en voz alta.</a:t>
+              <a:t>–   Una idea por diapositiva: el diagrama en pantalla y la decisión explicada por quien presenta.</a:t>
             </a:r>
           </a:p>
           <a:p>
@@ -12079,22 +10577,6 @@
             <a:spAutoFit/>
           </a:bodyPr>
           <a:lstStyle/>
-          <a:p>
-            <a:pPr>
-              <a:spcAft>
-                <a:spcPts val="800"/>
-              </a:spcAft>
-            </a:pPr>
-            <a:r>
-              <a:rPr sz="2000" b="0" i="0">
-                <a:solidFill>
-                  <a:srgbClr val="333333"/>
-                </a:solidFill>
-                <a:latin typeface="Calibri"/>
-              </a:rPr>
-              <a:t>–   Rendimiento es la unica parte del curso donde el estudiante puede pasar de opinar a medir, y por eso conviene empezar por el vocabulario exacto.</a:t>
-            </a:r>
-          </a:p>
           <a:p>
             <a:pPr>
               <a:spcAft>

--- a/Arquitectura de Sistemas Computacionales/Clases/Clase 12 - Pruebas de rendimiento y preparacion final/Presentacion.pptx
+++ b/Arquitectura de Sistemas Computacionales/Clases/Clase 12 - Pruebas de rendimiento y preparacion final/Presentacion.pptx
@@ -1268,297 +1268,91 @@
           <a:lstStyle/>
           <a:p>
             <a:r>
-              <a:t>TEXTO COMPLETO DE LA LÁMINA (se proyecta resumido):</a:t>
+              <a:t>DESARROLLO (para explicarlo, no se proyecta):</a:t>
             </a:r>
           </a:p>
           <a:p/>
           <a:p>
             <a:r>
-              <a:t>Definan: RPS/usuarios concurrentes objetivo · p95 latencia · error rate.</a:t>
+              <a:t>Cinco a ocho minutos son entre 700 y 1000 palabras habladas, lo que alcanza para siete u ocho ideas y no mas, asi que el guion se escribe por presupuesto de tiempo: unos 45 segundos para el problema y el usuario</a:t>
             </a:r>
           </a:p>
           <a:p/>
           <a:p>
             <a:r>
-              <a:t>Escenario: pico de matrícula / hora pico de citas — narren carga.</a:t>
+              <a:t>60 para el diagrama de Contexto, 90 para los Contenedores y las decisiones que los separan, 60 para seguridad y despliegue, 45 para el pipeline y las metricas, 45 para costos y escalabilidad, y 30 de cierre.</a:t>
             </a:r>
           </a:p>
           <a:p/>
           <a:p>
             <a:r>
-              <a:t>Bottlenecks probables: DB, auth, I/O de objetos.</a:t>
+              <a:t>La regla de oro del pitch de arquitectura es que se presentan decisiones con su trade-off, no un recorrido por las cajas del diagrama: "elegimos base de datos gestionada aunque cuesta el doble</a:t>
             </a:r>
           </a:p>
           <a:p/>
           <a:p>
             <a:r>
-              <a:t>p95 = el 95 % de las peticiones responde en ese tiempo o menos; el 5 % restante tarda más.</a:t>
+              <a:t>Porque no podemos garantizar respaldos manuales" es una frase de arquitecto; "aqui tenemos una base de datos" es una leyenda de imagen.</a:t>
             </a:r>
           </a:p>
           <a:p/>
           <a:p>
             <a:r>
-              <a:t>Ejemplo: 150 RPS en la hora pico de reservas · p95 &lt; 300 ms · errores &lt; 1 %.</a:t>
+              <a:t>PREGUNTAS FRECUENTES Y CIERRE CONCEPTUAL ()</a:t>
             </a:r>
           </a:p>
           <a:p/>
           <a:p>
             <a:r>
-              <a:t>Error común: medir con un solo usuario; el sistema se ve rápido hasta que llega la concurrencia.</a:t>
-            </a:r>
-          </a:p>
-        </p:txBody>
-      </p:sp>
-      <p:sp>
-        <p:nvSpPr>
-          <p:cNvPr id="4" name="Slide Number Placeholder 3"/>
-          <p:cNvSpPr>
-            <a:spLocks noGrp="1"/>
-          </p:cNvSpPr>
-          <p:nvPr>
-            <p:ph type="sldNum" idx="5" sz="quarter"/>
-          </p:nvPr>
-        </p:nvSpPr>
-        <p:spPr/>
-      </p:sp>
-    </p:spTree>
-  </p:cSld>
-  <p:clrMapOvr>
-    <a:masterClrMapping/>
-  </p:clrMapOvr>
-</p:notes>
-</file>
-
-<file path=ppt/notesSlides/notesSlide8.xml><?xml version="1.0" encoding="utf-8"?>
-<p:notes xmlns:a="http://schemas.openxmlformats.org/drawingml/2006/main" xmlns:p="http://schemas.openxmlformats.org/presentationml/2006/main" xmlns:r="http://schemas.openxmlformats.org/officeDocument/2006/relationships">
-  <p:cSld>
-    <p:spTree>
-      <p:nvGrpSpPr>
-        <p:cNvPr id="1" name=""/>
-        <p:cNvGrpSpPr/>
-        <p:nvPr/>
-      </p:nvGrpSpPr>
-      <p:grpSpPr>
-        <a:xfrm>
-          <a:off x="0" y="0"/>
-          <a:ext cx="0" cy="0"/>
-          <a:chOff x="0" y="0"/>
-          <a:chExt cx="0" cy="0"/>
-        </a:xfrm>
-      </p:grpSpPr>
-      <p:sp>
-        <p:nvSpPr>
-          <p:cNvPr id="2" name="Slide Image Placeholder 1"/>
-          <p:cNvSpPr>
-            <a:spLocks noGrp="1"/>
-          </p:cNvSpPr>
-          <p:nvPr>
-            <p:ph type="sldImg" idx="2"/>
-          </p:nvPr>
-        </p:nvSpPr>
-        <p:spPr/>
-      </p:sp>
-      <p:sp>
-        <p:nvSpPr>
-          <p:cNvPr id="3" name="Notes Placeholder 2"/>
-          <p:cNvSpPr>
-            <a:spLocks noGrp="1"/>
-          </p:cNvSpPr>
-          <p:nvPr>
-            <p:ph type="body" idx="3" sz="quarter"/>
-          </p:nvPr>
-        </p:nvSpPr>
-        <p:spPr/>
-        <p:txBody>
-          <a:bodyPr/>
-          <a:lstStyle/>
-          <a:p>
-            <a:r>
-              <a:t>DESARROLLO (para explicarlo, no se proyecta):</a:t>
+              <a:t>La segunda es si no basta con decir que se usara cache; la respuesta es que una mitigacion sin medicion es una creencia</a:t>
             </a:r>
           </a:p>
           <a:p/>
           <a:p>
             <a:r>
-              <a:t>Cinco a ocho minutos son entre 700 y 1000 palabras habladas, lo que alcanza para siete u ocho ideas y no mas, asi que el guion se escribe por presupuesto de tiempo: unos 45 segundos para el problema y el usuario</a:t>
+              <a:t>Y que la pregunta correcta es cache de que, con que tiempo de vida, que porcentaje de aciertos se espera y que pasa cuando el dato cambia, porque una cache mal invalidada convierte un problema de lentitud en un problema de datos incorrectos, que es peor.</a:t>
             </a:r>
           </a:p>
           <a:p/>
           <a:p>
             <a:r>
-              <a:t>60 para el diagrama de Contexto, 90 para los Contenedores y las decisiones que los separan, 60 para seguridad y despliegue, 45 para el pipeline y las metricas, 45 para costos y escalabilidad, y 30 de cierre.</a:t>
+              <a:t>La tercera es cual es un buen p95, y la respuesta debe resistir la tentacion de dar una cifra universal: depende del caso de uso</a:t>
             </a:r>
           </a:p>
           <a:p/>
           <a:p>
             <a:r>
-              <a:t>La regla de oro del pitch de arquitectura es que se presentan decisiones con su trade-off, no un recorrido por las cajas del diagrama: "elegimos base de datos gestionada aunque cuesta el doble</a:t>
+              <a:t>Y el criterio es que el numero este justificado y sea alcanzable con la arquitectura dibujada</a:t>
             </a:r>
           </a:p>
           <a:p/>
           <a:p>
             <a:r>
-              <a:t>Porque no podemos garantizar respaldos manuales" es una frase de arquitecto; "aqui tenemos una base de datos" es una leyenda de imagen.</a:t>
+              <a:t>Quien promete p95 de 50 milisegundos con una consulta que recorre toda la tabla tiene un objetivo incoherente, y eso es un hallazgo mas grave que tener un objetivo modesto.</a:t>
             </a:r>
           </a:p>
           <a:p/>
           <a:p>
             <a:r>
-              <a:t>PREGUNTAS FRECUENTES Y CIERRE CONCEPTUAL ()</a:t>
+              <a:t>Tres preguntas llegan siempre.</a:t>
             </a:r>
           </a:p>
           <a:p/>
           <a:p>
             <a:r>
-              <a:t>La segunda es si no basta con decir que se usara cache; la respuesta es que una mitigacion sin medicion es una creencia</a:t>
+              <a:t>(No se proyecta) La segunda mitad de la clase es el ensayo del pitch y tiene su propia teoria.</a:t>
             </a:r>
           </a:p>
           <a:p/>
           <a:p>
             <a:r>
-              <a:t>Y que la pregunta correcta es cache de que, con que tiempo de vida, que porcentaje de aciertos se espera y que pasa cuando el dato cambia, porque una cache mal invalidada convierte un problema de lentitud en un problema de datos incorrectos, que es peor.</a:t>
+              <a:t>(No se proyecta) Se ensaya hoy con cronometro y en voz alta, porque leer mentalmente siempre da la mitad del tiempo real, y sin leer las diapositivas, ya que en la Clase 15 el criterio es que quien sustenta pueda explicar cualquier parte del sistema; si el docente autorizo equipos, se ensaya ademas con rotacion de expositor, porque alli el criterio aplica a cualquier integrante.</a:t>
             </a:r>
           </a:p>
           <a:p/>
           <a:p>
             <a:r>
-              <a:t>La tercera es cual es un buen p95, y la respuesta debe resistir la tentacion de dar una cifra universal: depende del caso de uso</a:t>
-            </a:r>
-          </a:p>
-          <a:p/>
-          <a:p>
-            <a:r>
-              <a:t>Y el criterio es que el numero este justificado y sea alcanzable con la arquitectura dibujada</a:t>
-            </a:r>
-          </a:p>
-          <a:p/>
-          <a:p>
-            <a:r>
-              <a:t>Quien promete p95 de 50 milisegundos con una consulta que recorre toda la tabla tiene un objetivo incoherente, y eso es un hallazgo mas grave que tener un objetivo modesto.</a:t>
-            </a:r>
-          </a:p>
-          <a:p/>
-          <a:p>
-            <a:r>
-              <a:t>Tres preguntas llegan siempre.</a:t>
-            </a:r>
-          </a:p>
-          <a:p/>
-          <a:p>
-            <a:r>
-              <a:t>(No se proyecta) La segunda mitad de la clase es el ensayo del pitch y tiene su propia teoria.</a:t>
-            </a:r>
-          </a:p>
-          <a:p/>
-          <a:p>
-            <a:r>
-              <a:t>(No se proyecta) Se ensaya hoy con cronometro y en voz alta, porque leer mentalmente siempre da la mitad del tiempo real, y sin leer las diapositivas, ya que en la Clase 15 el criterio es que quien sustenta pueda explicar cualquier parte del sistema; si el docente autorizo equipos, se ensaya ademas con rotacion de expositor, porque alli el criterio aplica a cualquier integrante.</a:t>
-            </a:r>
-          </a:p>
-          <a:p/>
-          <a:p>
-            <a:r>
               <a:t>(No se proyecta) Hay que decir explicitamente que este ensayo no es la sustentacion, que es la Clase 15, ni el Parcial 3 de la Clase 14, que es evaluacion escrita: son tres cosas distintas y mezclarlas confunde al grupo.</a:t>
-            </a:r>
-          </a:p>
-        </p:txBody>
-      </p:sp>
-      <p:sp>
-        <p:nvSpPr>
-          <p:cNvPr id="4" name="Slide Number Placeholder 3"/>
-          <p:cNvSpPr>
-            <a:spLocks noGrp="1"/>
-          </p:cNvSpPr>
-          <p:nvPr>
-            <p:ph type="sldNum" idx="5" sz="quarter"/>
-          </p:nvPr>
-        </p:nvSpPr>
-        <p:spPr/>
-      </p:sp>
-    </p:spTree>
-  </p:cSld>
-  <p:clrMapOvr>
-    <a:masterClrMapping/>
-  </p:clrMapOvr>
-</p:notes>
-</file>
-
-<file path=ppt/notesSlides/notesSlide9.xml><?xml version="1.0" encoding="utf-8"?>
-<p:notes xmlns:a="http://schemas.openxmlformats.org/drawingml/2006/main" xmlns:p="http://schemas.openxmlformats.org/presentationml/2006/main" xmlns:r="http://schemas.openxmlformats.org/officeDocument/2006/relationships">
-  <p:cSld>
-    <p:spTree>
-      <p:nvGrpSpPr>
-        <p:cNvPr id="1" name=""/>
-        <p:cNvGrpSpPr/>
-        <p:nvPr/>
-      </p:nvGrpSpPr>
-      <p:grpSpPr>
-        <a:xfrm>
-          <a:off x="0" y="0"/>
-          <a:ext cx="0" cy="0"/>
-          <a:chOff x="0" y="0"/>
-          <a:chExt cx="0" cy="0"/>
-        </a:xfrm>
-      </p:grpSpPr>
-      <p:sp>
-        <p:nvSpPr>
-          <p:cNvPr id="2" name="Slide Image Placeholder 1"/>
-          <p:cNvSpPr>
-            <a:spLocks noGrp="1"/>
-          </p:cNvSpPr>
-          <p:nvPr>
-            <p:ph type="sldImg" idx="2"/>
-          </p:nvPr>
-        </p:nvSpPr>
-        <p:spPr/>
-      </p:sp>
-      <p:sp>
-        <p:nvSpPr>
-          <p:cNvPr id="3" name="Notes Placeholder 2"/>
-          <p:cNvSpPr>
-            <a:spLocks noGrp="1"/>
-          </p:cNvSpPr>
-          <p:nvPr>
-            <p:ph type="body" idx="3" sz="quarter"/>
-          </p:nvPr>
-        </p:nvSpPr>
-        <p:spPr/>
-        <p:txBody>
-          <a:bodyPr/>
-          <a:lstStyle/>
-          <a:p>
-            <a:r>
-              <a:t>TEXTO COMPLETO DE LA LÁMINA (se proyecta resumido):</a:t>
-            </a:r>
-          </a:p>
-          <a:p/>
-          <a:p>
-            <a:r>
-              <a:t>1 min problema · 2 min arquitectura · 1 min contenedor · 1 min CI · 1 min seguridad/costos · Q&amp;A.</a:t>
-            </a:r>
-          </a:p>
-          <a:p/>
-          <a:p>
-            <a:r>
-              <a:t>Demo: diagrama + captura lab/Actions (no improvisar login cloud).</a:t>
-            </a:r>
-          </a:p>
-          <a:p/>
-          <a:p>
-            <a:r>
-              <a:t>Sustentas tú los 5 bloques; si hay equipo autorizado, hablan todos.</a:t>
-            </a:r>
-          </a:p>
-          <a:p/>
-          <a:p>
-            <a:r>
-              <a:t>Una idea por diapositiva: el diagrama en pantalla y la decisión explicada por quien presenta.</a:t>
-            </a:r>
-          </a:p>
-          <a:p/>
-          <a:p>
-            <a:r>
-              <a:t>Cerrar con el punto débil declarado: lo que no escala o lo que no se midió.</a:t>
             </a:r>
           </a:p>
         </p:txBody>
@@ -9121,118 +8915,14 @@
       </p:sp>
       <p:sp>
         <p:nvSpPr>
-          <p:cNvPr id="5" name="Rounded Rectangle 4"/>
-          <p:cNvSpPr/>
-          <p:nvPr/>
-        </p:nvSpPr>
-        <p:spPr>
-          <a:xfrm>
-            <a:off x="5797149" y="1573813"/>
-            <a:ext cx="6010497" cy="4057845"/>
-          </a:xfrm>
-          <a:prstGeom prst="roundRect">
-            <a:avLst>
-              <a:gd name="adj" fmla="val 4000"/>
-            </a:avLst>
-          </a:prstGeom>
-          <a:solidFill>
-            <a:srgbClr val="E8EEF4"/>
-          </a:solidFill>
-          <a:ln>
-            <a:noFill/>
-          </a:ln>
-        </p:spPr>
-        <p:style>
-          <a:lnRef idx="1">
-            <a:schemeClr val="accent1"/>
-          </a:lnRef>
-          <a:fillRef idx="3">
-            <a:schemeClr val="accent1"/>
-          </a:fillRef>
-          <a:effectRef idx="2">
-            <a:schemeClr val="accent1"/>
-          </a:effectRef>
-          <a:fontRef idx="minor">
-            <a:schemeClr val="lt1"/>
-          </a:fontRef>
-        </p:style>
-        <p:txBody>
-          <a:bodyPr rtlCol="0" anchor="ctr"/>
-          <a:lstStyle/>
-          <a:p>
-            <a:pPr algn="ctr"/>
-          </a:p>
-        </p:txBody>
-      </p:sp>
-      <p:pic>
-        <p:nvPicPr>
-          <p:cNvPr id="6" name="Picture 5" descr="speedometer-performance.jpg"/>
-          <p:cNvPicPr>
-            <a:picLocks noChangeAspect="1"/>
-          </p:cNvPicPr>
-          <p:nvPr/>
-        </p:nvPicPr>
-        <p:blipFill>
-          <a:blip r:embed="rId2"/>
-          <a:stretch>
-            <a:fillRect/>
-          </a:stretch>
-        </p:blipFill>
-        <p:spPr>
-          <a:xfrm>
-            <a:off x="5870301" y="1646965"/>
-            <a:ext cx="5864193" cy="3911541"/>
-          </a:xfrm>
-          <a:prstGeom prst="rect">
-            <a:avLst/>
-          </a:prstGeom>
-        </p:spPr>
-      </p:pic>
-      <p:sp>
-        <p:nvSpPr>
-          <p:cNvPr id="7" name="TextBox 6"/>
+          <p:cNvPr id="5" name="TextBox 4"/>
           <p:cNvSpPr txBox="1"/>
           <p:nvPr/>
         </p:nvSpPr>
         <p:spPr>
           <a:xfrm>
-            <a:off x="5870301" y="5961888"/>
-            <a:ext cx="5864193" cy="320040"/>
-          </a:xfrm>
-          <a:prstGeom prst="rect">
-            <a:avLst/>
-          </a:prstGeom>
-          <a:noFill/>
-        </p:spPr>
-        <p:txBody>
-          <a:bodyPr wrap="square">
-            <a:spAutoFit/>
-          </a:bodyPr>
-          <a:lstStyle/>
-          <a:p>
-            <a:pPr algn="ctr"/>
-            <a:r>
-              <a:rPr sz="1100" b="0" i="1">
-                <a:solidFill>
-                  <a:srgbClr val="666666"/>
-                </a:solidFill>
-                <a:latin typeface="Calibri"/>
-              </a:rPr>
-              <a:t>Foto: Pixabay · Pexels</a:t>
-            </a:r>
-          </a:p>
-        </p:txBody>
-      </p:sp>
-      <p:sp>
-        <p:nvSpPr>
-          <p:cNvPr id="8" name="TextBox 7"/>
-          <p:cNvSpPr txBox="1"/>
-          <p:nvPr/>
-        </p:nvSpPr>
-        <p:spPr>
-          <a:xfrm>
-            <a:off x="457200" y="1353312"/>
-            <a:ext cx="5093061" cy="5047488"/>
+            <a:off x="457200" y="1170432"/>
+            <a:ext cx="11277295" cy="5230368"/>
           </a:xfrm>
           <a:prstGeom prst="rect">
             <a:avLst/>
@@ -9323,14 +9013,46 @@
                 </a:solidFill>
                 <a:latin typeface="Calibri"/>
               </a:rPr>
-              <a:t> = el 95 % de las peticiones responde en ese tiempo o menos;</a:t>
-            </a:r>
-          </a:p>
-        </p:txBody>
-      </p:sp>
-      <p:sp>
-        <p:nvSpPr>
-          <p:cNvPr id="9" name="TextBox 8"/>
+              <a:t> = el 95 % de las peticiones responde en ese tiempo o menos; el 5 % restante tarda más.</a:t>
+            </a:r>
+          </a:p>
+          <a:p>
+            <a:pPr>
+              <a:spcAft>
+                <a:spcPts val="800"/>
+              </a:spcAft>
+            </a:pPr>
+            <a:r>
+              <a:rPr sz="2000" b="0" i="0">
+                <a:solidFill>
+                  <a:srgbClr val="333333"/>
+                </a:solidFill>
+                <a:latin typeface="Calibri"/>
+              </a:rPr>
+              <a:t>–   Ejemplo: 150 RPS en la hora pico de reservas · p95 &lt; 300 ms · errores &lt; 1 %.</a:t>
+            </a:r>
+          </a:p>
+          <a:p>
+            <a:pPr>
+              <a:spcAft>
+                <a:spcPts val="800"/>
+              </a:spcAft>
+            </a:pPr>
+            <a:r>
+              <a:rPr sz="2000" b="0" i="0">
+                <a:solidFill>
+                  <a:srgbClr val="333333"/>
+                </a:solidFill>
+                <a:latin typeface="Calibri"/>
+              </a:rPr>
+              <a:t>–   Error común: medir con un solo usuario; el sistema se ve rápido hasta que llega la concurrencia.</a:t>
+            </a:r>
+          </a:p>
+        </p:txBody>
+      </p:sp>
+      <p:sp>
+        <p:nvSpPr>
+          <p:cNvPr id="6" name="TextBox 5"/>
           <p:cNvSpPr txBox="1"/>
           <p:nvPr/>
         </p:nvSpPr>
@@ -10730,118 +10452,14 @@
       </p:sp>
       <p:sp>
         <p:nvSpPr>
-          <p:cNvPr id="5" name="Rounded Rectangle 4"/>
-          <p:cNvSpPr/>
-          <p:nvPr/>
-        </p:nvSpPr>
-        <p:spPr>
-          <a:xfrm>
-            <a:off x="5797149" y="1573813"/>
-            <a:ext cx="6010497" cy="4057845"/>
-          </a:xfrm>
-          <a:prstGeom prst="roundRect">
-            <a:avLst>
-              <a:gd name="adj" fmla="val 4000"/>
-            </a:avLst>
-          </a:prstGeom>
-          <a:solidFill>
-            <a:srgbClr val="E8EEF4"/>
-          </a:solidFill>
-          <a:ln>
-            <a:noFill/>
-          </a:ln>
-        </p:spPr>
-        <p:style>
-          <a:lnRef idx="1">
-            <a:schemeClr val="accent1"/>
-          </a:lnRef>
-          <a:fillRef idx="3">
-            <a:schemeClr val="accent1"/>
-          </a:fillRef>
-          <a:effectRef idx="2">
-            <a:schemeClr val="accent1"/>
-          </a:effectRef>
-          <a:fontRef idx="minor">
-            <a:schemeClr val="lt1"/>
-          </a:fontRef>
-        </p:style>
-        <p:txBody>
-          <a:bodyPr rtlCol="0" anchor="ctr"/>
-          <a:lstStyle/>
-          <a:p>
-            <a:pPr algn="ctr"/>
-          </a:p>
-        </p:txBody>
-      </p:sp>
-      <p:pic>
-        <p:nvPicPr>
-          <p:cNvPr id="6" name="Picture 5" descr="presenter-speaking-audience.jpg"/>
-          <p:cNvPicPr>
-            <a:picLocks noChangeAspect="1"/>
-          </p:cNvPicPr>
-          <p:nvPr/>
-        </p:nvPicPr>
-        <p:blipFill>
-          <a:blip r:embed="rId2"/>
-          <a:stretch>
-            <a:fillRect/>
-          </a:stretch>
-        </p:blipFill>
-        <p:spPr>
-          <a:xfrm>
-            <a:off x="5870301" y="1646965"/>
-            <a:ext cx="5864193" cy="3911541"/>
-          </a:xfrm>
-          <a:prstGeom prst="rect">
-            <a:avLst/>
-          </a:prstGeom>
-        </p:spPr>
-      </p:pic>
-      <p:sp>
-        <p:nvSpPr>
-          <p:cNvPr id="7" name="TextBox 6"/>
+          <p:cNvPr id="5" name="TextBox 4"/>
           <p:cNvSpPr txBox="1"/>
           <p:nvPr/>
         </p:nvSpPr>
         <p:spPr>
           <a:xfrm>
-            <a:off x="5870301" y="5961888"/>
-            <a:ext cx="5864193" cy="320040"/>
-          </a:xfrm>
-          <a:prstGeom prst="rect">
-            <a:avLst/>
-          </a:prstGeom>
-          <a:noFill/>
-        </p:spPr>
-        <p:txBody>
-          <a:bodyPr wrap="square">
-            <a:spAutoFit/>
-          </a:bodyPr>
-          <a:lstStyle/>
-          <a:p>
-            <a:pPr algn="ctr"/>
-            <a:r>
-              <a:rPr sz="1100" b="0" i="1">
-                <a:solidFill>
-                  <a:srgbClr val="666666"/>
-                </a:solidFill>
-                <a:latin typeface="Calibri"/>
-              </a:rPr>
-              <a:t>Foto: Atlantic Ambience · Pexels</a:t>
-            </a:r>
-          </a:p>
-        </p:txBody>
-      </p:sp>
-      <p:sp>
-        <p:nvSpPr>
-          <p:cNvPr id="8" name="TextBox 7"/>
-          <p:cNvSpPr txBox="1"/>
-          <p:nvPr/>
-        </p:nvSpPr>
-        <p:spPr>
-          <a:xfrm>
-            <a:off x="457200" y="1353312"/>
-            <a:ext cx="5093061" cy="5047488"/>
+            <a:off x="457200" y="1170432"/>
+            <a:ext cx="11277295" cy="5230368"/>
           </a:xfrm>
           <a:prstGeom prst="rect">
             <a:avLst/>
@@ -10917,11 +10535,27 @@
               <a:t>–   Una idea por diapositiva: el diagrama en pantalla y la decisión explicada por quien presenta.</a:t>
             </a:r>
           </a:p>
-        </p:txBody>
-      </p:sp>
-      <p:sp>
-        <p:nvSpPr>
-          <p:cNvPr id="9" name="TextBox 8"/>
+          <a:p>
+            <a:pPr>
+              <a:spcAft>
+                <a:spcPts val="800"/>
+              </a:spcAft>
+            </a:pPr>
+            <a:r>
+              <a:rPr sz="2000" b="0" i="0">
+                <a:solidFill>
+                  <a:srgbClr val="333333"/>
+                </a:solidFill>
+                <a:latin typeface="Calibri"/>
+              </a:rPr>
+              <a:t>–   Cerrar con el punto débil declarado: lo que no escala o lo que no se midió.</a:t>
+            </a:r>
+          </a:p>
+        </p:txBody>
+      </p:sp>
+      <p:sp>
+        <p:nvSpPr>
+          <p:cNvPr id="6" name="TextBox 5"/>
           <p:cNvSpPr txBox="1"/>
           <p:nvPr/>
         </p:nvSpPr>
@@ -12580,118 +12214,14 @@
       </p:sp>
       <p:sp>
         <p:nvSpPr>
-          <p:cNvPr id="5" name="Rounded Rectangle 4"/>
-          <p:cNvSpPr/>
-          <p:nvPr/>
-        </p:nvSpPr>
-        <p:spPr>
-          <a:xfrm>
-            <a:off x="5797149" y="1573813"/>
-            <a:ext cx="6010497" cy="4057845"/>
-          </a:xfrm>
-          <a:prstGeom prst="roundRect">
-            <a:avLst>
-              <a:gd name="adj" fmla="val 4000"/>
-            </a:avLst>
-          </a:prstGeom>
-          <a:solidFill>
-            <a:srgbClr val="E8EEF4"/>
-          </a:solidFill>
-          <a:ln>
-            <a:noFill/>
-          </a:ln>
-        </p:spPr>
-        <p:style>
-          <a:lnRef idx="1">
-            <a:schemeClr val="accent1"/>
-          </a:lnRef>
-          <a:fillRef idx="3">
-            <a:schemeClr val="accent1"/>
-          </a:fillRef>
-          <a:effectRef idx="2">
-            <a:schemeClr val="accent1"/>
-          </a:effectRef>
-          <a:fontRef idx="minor">
-            <a:schemeClr val="lt1"/>
-          </a:fontRef>
-        </p:style>
-        <p:txBody>
-          <a:bodyPr rtlCol="0" anchor="ctr"/>
-          <a:lstStyle/>
-          <a:p>
-            <a:pPr algn="ctr"/>
-          </a:p>
-        </p:txBody>
-      </p:sp>
-      <p:pic>
-        <p:nvPicPr>
-          <p:cNvPr id="6" name="Picture 5" descr="students-learning-laptops-classroom.jpg"/>
-          <p:cNvPicPr>
-            <a:picLocks noChangeAspect="1"/>
-          </p:cNvPicPr>
-          <p:nvPr/>
-        </p:nvPicPr>
-        <p:blipFill>
-          <a:blip r:embed="rId2"/>
-          <a:stretch>
-            <a:fillRect/>
-          </a:stretch>
-        </p:blipFill>
-        <p:spPr>
-          <a:xfrm>
-            <a:off x="5870301" y="1646965"/>
-            <a:ext cx="5864193" cy="3911541"/>
-          </a:xfrm>
-          <a:prstGeom prst="rect">
-            <a:avLst/>
-          </a:prstGeom>
-        </p:spPr>
-      </p:pic>
-      <p:sp>
-        <p:nvSpPr>
-          <p:cNvPr id="7" name="TextBox 6"/>
+          <p:cNvPr id="5" name="TextBox 4"/>
           <p:cNvSpPr txBox="1"/>
           <p:nvPr/>
         </p:nvSpPr>
         <p:spPr>
           <a:xfrm>
-            <a:off x="5870301" y="5961888"/>
-            <a:ext cx="5864193" cy="320040"/>
-          </a:xfrm>
-          <a:prstGeom prst="rect">
-            <a:avLst/>
-          </a:prstGeom>
-          <a:noFill/>
-        </p:spPr>
-        <p:txBody>
-          <a:bodyPr wrap="square">
-            <a:spAutoFit/>
-          </a:bodyPr>
-          <a:lstStyle/>
-          <a:p>
-            <a:pPr algn="ctr"/>
-            <a:r>
-              <a:rPr sz="1100" b="0" i="1">
-                <a:solidFill>
-                  <a:srgbClr val="666666"/>
-                </a:solidFill>
-                <a:latin typeface="Calibri"/>
-              </a:rPr>
-              <a:t>Foto: Mikhail Nilov · Pexels</a:t>
-            </a:r>
-          </a:p>
-        </p:txBody>
-      </p:sp>
-      <p:sp>
-        <p:nvSpPr>
-          <p:cNvPr id="8" name="TextBox 7"/>
-          <p:cNvSpPr txBox="1"/>
-          <p:nvPr/>
-        </p:nvSpPr>
-        <p:spPr>
-          <a:xfrm>
-            <a:off x="457200" y="1353312"/>
-            <a:ext cx="5093061" cy="5047488"/>
+            <a:off x="457200" y="1170432"/>
+            <a:ext cx="11277295" cy="5230368"/>
           </a:xfrm>
           <a:prstGeom prst="rect">
             <a:avLst/>
@@ -12755,7 +12285,7 @@
       </p:sp>
       <p:sp>
         <p:nvSpPr>
-          <p:cNvPr id="9" name="TextBox 8"/>
+          <p:cNvPr id="6" name="TextBox 5"/>
           <p:cNvSpPr txBox="1"/>
           <p:nvPr/>
         </p:nvSpPr>

--- a/Arquitectura de Sistemas Computacionales/Clases/Clase 12 - Pruebas de rendimiento y preparacion final/Presentacion.pptx
+++ b/Arquitectura de Sistemas Computacionales/Clases/Clase 12 - Pruebas de rendimiento y preparacion final/Presentacion.pptx
@@ -1268,6 +1268,112 @@
           <a:lstStyle/>
           <a:p>
             <a:r>
+              <a:t>TEXTO COMPLETO DE LA LÁMINA (se proyecta resumido):</a:t>
+            </a:r>
+          </a:p>
+          <a:p/>
+          <a:p>
+            <a:r>
+              <a:t>Definan: RPS/usuarios concurrentes objetivo · p95 latencia · error rate.</a:t>
+            </a:r>
+          </a:p>
+          <a:p/>
+          <a:p>
+            <a:r>
+              <a:t>Escenario: pico de matrícula / hora pico de citas — narren carga.</a:t>
+            </a:r>
+          </a:p>
+          <a:p/>
+          <a:p>
+            <a:r>
+              <a:t>Bottlenecks probables: DB, auth, I/O de objetos.</a:t>
+            </a:r>
+          </a:p>
+          <a:p/>
+          <a:p>
+            <a:r>
+              <a:t>p95 = el 95 % de las peticiones responde en ese tiempo o menos; el 5 % restante tarda más.</a:t>
+            </a:r>
+          </a:p>
+          <a:p/>
+          <a:p>
+            <a:r>
+              <a:t>Ejemplo: 150 RPS en la hora pico de reservas · p95 &lt; 300 ms · errores &lt; 1 %.</a:t>
+            </a:r>
+          </a:p>
+          <a:p/>
+          <a:p>
+            <a:r>
+              <a:t>Error común: medir con un solo usuario; el sistema se ve rápido hasta que llega la concurrencia.</a:t>
+            </a:r>
+          </a:p>
+        </p:txBody>
+      </p:sp>
+      <p:sp>
+        <p:nvSpPr>
+          <p:cNvPr id="4" name="Slide Number Placeholder 3"/>
+          <p:cNvSpPr>
+            <a:spLocks noGrp="1"/>
+          </p:cNvSpPr>
+          <p:nvPr>
+            <p:ph type="sldNum" idx="5" sz="quarter"/>
+          </p:nvPr>
+        </p:nvSpPr>
+        <p:spPr/>
+      </p:sp>
+    </p:spTree>
+  </p:cSld>
+  <p:clrMapOvr>
+    <a:masterClrMapping/>
+  </p:clrMapOvr>
+</p:notes>
+</file>
+
+<file path=ppt/notesSlides/notesSlide8.xml><?xml version="1.0" encoding="utf-8"?>
+<p:notes xmlns:a="http://schemas.openxmlformats.org/drawingml/2006/main" xmlns:p="http://schemas.openxmlformats.org/presentationml/2006/main" xmlns:r="http://schemas.openxmlformats.org/officeDocument/2006/relationships">
+  <p:cSld>
+    <p:spTree>
+      <p:nvGrpSpPr>
+        <p:cNvPr id="1" name=""/>
+        <p:cNvGrpSpPr/>
+        <p:nvPr/>
+      </p:nvGrpSpPr>
+      <p:grpSpPr>
+        <a:xfrm>
+          <a:off x="0" y="0"/>
+          <a:ext cx="0" cy="0"/>
+          <a:chOff x="0" y="0"/>
+          <a:chExt cx="0" cy="0"/>
+        </a:xfrm>
+      </p:grpSpPr>
+      <p:sp>
+        <p:nvSpPr>
+          <p:cNvPr id="2" name="Slide Image Placeholder 1"/>
+          <p:cNvSpPr>
+            <a:spLocks noGrp="1"/>
+          </p:cNvSpPr>
+          <p:nvPr>
+            <p:ph type="sldImg" idx="2"/>
+          </p:nvPr>
+        </p:nvSpPr>
+        <p:spPr/>
+      </p:sp>
+      <p:sp>
+        <p:nvSpPr>
+          <p:cNvPr id="3" name="Notes Placeholder 2"/>
+          <p:cNvSpPr>
+            <a:spLocks noGrp="1"/>
+          </p:cNvSpPr>
+          <p:nvPr>
+            <p:ph type="body" idx="3" sz="quarter"/>
+          </p:nvPr>
+        </p:nvSpPr>
+        <p:spPr/>
+        <p:txBody>
+          <a:bodyPr/>
+          <a:lstStyle/>
+          <a:p>
+            <a:r>
               <a:t>DESARROLLO (para explicarlo, no se proyecta):</a:t>
             </a:r>
           </a:p>
@@ -1353,6 +1459,106 @@
           <a:p>
             <a:r>
               <a:t>(No se proyecta) Hay que decir explicitamente que este ensayo no es la sustentacion, que es la Clase 15, ni el Parcial 3 de la Clase 14, que es evaluacion escrita: son tres cosas distintas y mezclarlas confunde al grupo.</a:t>
+            </a:r>
+          </a:p>
+        </p:txBody>
+      </p:sp>
+      <p:sp>
+        <p:nvSpPr>
+          <p:cNvPr id="4" name="Slide Number Placeholder 3"/>
+          <p:cNvSpPr>
+            <a:spLocks noGrp="1"/>
+          </p:cNvSpPr>
+          <p:nvPr>
+            <p:ph type="sldNum" idx="5" sz="quarter"/>
+          </p:nvPr>
+        </p:nvSpPr>
+        <p:spPr/>
+      </p:sp>
+    </p:spTree>
+  </p:cSld>
+  <p:clrMapOvr>
+    <a:masterClrMapping/>
+  </p:clrMapOvr>
+</p:notes>
+</file>
+
+<file path=ppt/notesSlides/notesSlide9.xml><?xml version="1.0" encoding="utf-8"?>
+<p:notes xmlns:a="http://schemas.openxmlformats.org/drawingml/2006/main" xmlns:p="http://schemas.openxmlformats.org/presentationml/2006/main" xmlns:r="http://schemas.openxmlformats.org/officeDocument/2006/relationships">
+  <p:cSld>
+    <p:spTree>
+      <p:nvGrpSpPr>
+        <p:cNvPr id="1" name=""/>
+        <p:cNvGrpSpPr/>
+        <p:nvPr/>
+      </p:nvGrpSpPr>
+      <p:grpSpPr>
+        <a:xfrm>
+          <a:off x="0" y="0"/>
+          <a:ext cx="0" cy="0"/>
+          <a:chOff x="0" y="0"/>
+          <a:chExt cx="0" cy="0"/>
+        </a:xfrm>
+      </p:grpSpPr>
+      <p:sp>
+        <p:nvSpPr>
+          <p:cNvPr id="2" name="Slide Image Placeholder 1"/>
+          <p:cNvSpPr>
+            <a:spLocks noGrp="1"/>
+          </p:cNvSpPr>
+          <p:nvPr>
+            <p:ph type="sldImg" idx="2"/>
+          </p:nvPr>
+        </p:nvSpPr>
+        <p:spPr/>
+      </p:sp>
+      <p:sp>
+        <p:nvSpPr>
+          <p:cNvPr id="3" name="Notes Placeholder 2"/>
+          <p:cNvSpPr>
+            <a:spLocks noGrp="1"/>
+          </p:cNvSpPr>
+          <p:nvPr>
+            <p:ph type="body" idx="3" sz="quarter"/>
+          </p:nvPr>
+        </p:nvSpPr>
+        <p:spPr/>
+        <p:txBody>
+          <a:bodyPr/>
+          <a:lstStyle/>
+          <a:p>
+            <a:r>
+              <a:t>TEXTO COMPLETO DE LA LÁMINA (se proyecta resumido):</a:t>
+            </a:r>
+          </a:p>
+          <a:p/>
+          <a:p>
+            <a:r>
+              <a:t>1 min problema · 2 min arquitectura · 1 min contenedor · 1 min CI · 1 min seguridad/costos · Q&amp;A.</a:t>
+            </a:r>
+          </a:p>
+          <a:p/>
+          <a:p>
+            <a:r>
+              <a:t>Demo: diagrama + captura lab/Actions (no improvisar login cloud).</a:t>
+            </a:r>
+          </a:p>
+          <a:p/>
+          <a:p>
+            <a:r>
+              <a:t>Sustentas tú los 5 bloques; si hay equipo autorizado, hablan todos.</a:t>
+            </a:r>
+          </a:p>
+          <a:p/>
+          <a:p>
+            <a:r>
+              <a:t>Una idea por diapositiva: el diagrama en pantalla y la decisión explicada por quien presenta.</a:t>
+            </a:r>
+          </a:p>
+          <a:p/>
+          <a:p>
+            <a:r>
+              <a:t>Cerrar con el punto débil declarado: lo que no escala o lo que no se midió.</a:t>
             </a:r>
           </a:p>
         </p:txBody>
@@ -8915,14 +9121,83 @@
       </p:sp>
       <p:sp>
         <p:nvSpPr>
-          <p:cNvPr id="5" name="TextBox 4"/>
+          <p:cNvPr id="5" name="Rounded Rectangle 4"/>
+          <p:cNvSpPr/>
+          <p:nvPr/>
+        </p:nvSpPr>
+        <p:spPr>
+          <a:xfrm>
+            <a:off x="5797149" y="1343926"/>
+            <a:ext cx="6010497" cy="4837658"/>
+          </a:xfrm>
+          <a:prstGeom prst="roundRect">
+            <a:avLst>
+              <a:gd name="adj" fmla="val 4000"/>
+            </a:avLst>
+          </a:prstGeom>
+          <a:solidFill>
+            <a:srgbClr val="E8EEF4"/>
+          </a:solidFill>
+          <a:ln>
+            <a:noFill/>
+          </a:ln>
+        </p:spPr>
+        <p:style>
+          <a:lnRef idx="1">
+            <a:schemeClr val="accent1"/>
+          </a:lnRef>
+          <a:fillRef idx="3">
+            <a:schemeClr val="accent1"/>
+          </a:fillRef>
+          <a:effectRef idx="2">
+            <a:schemeClr val="accent1"/>
+          </a:effectRef>
+          <a:fontRef idx="minor">
+            <a:schemeClr val="lt1"/>
+          </a:fontRef>
+        </p:style>
+        <p:txBody>
+          <a:bodyPr rtlCol="0" anchor="ctr"/>
+          <a:lstStyle/>
+          <a:p>
+            <a:pPr algn="ctr"/>
+          </a:p>
+        </p:txBody>
+      </p:sp>
+      <p:pic>
+        <p:nvPicPr>
+          <p:cNvPr id="6" name="Picture 5" descr="ilus-metas-rendimiento-paso1.png"/>
+          <p:cNvPicPr>
+            <a:picLocks noChangeAspect="1"/>
+          </p:cNvPicPr>
+          <p:nvPr/>
+        </p:nvPicPr>
+        <p:blipFill>
+          <a:blip r:embed="rId2"/>
+          <a:stretch>
+            <a:fillRect/>
+          </a:stretch>
+        </p:blipFill>
+        <p:spPr>
+          <a:xfrm>
+            <a:off x="5870301" y="1417078"/>
+            <a:ext cx="5864193" cy="4691354"/>
+          </a:xfrm>
+          <a:prstGeom prst="rect">
+            <a:avLst/>
+          </a:prstGeom>
+        </p:spPr>
+      </p:pic>
+      <p:sp>
+        <p:nvSpPr>
+          <p:cNvPr id="7" name="TextBox 6"/>
           <p:cNvSpPr txBox="1"/>
           <p:nvPr/>
         </p:nvSpPr>
         <p:spPr>
           <a:xfrm>
-            <a:off x="457200" y="1170432"/>
-            <a:ext cx="11277295" cy="5230368"/>
+            <a:off x="457200" y="1353312"/>
+            <a:ext cx="5093061" cy="5047488"/>
           </a:xfrm>
           <a:prstGeom prst="rect">
             <a:avLst/>
@@ -9016,43 +9291,11 @@
               <a:t> = el 95 % de las peticiones responde en ese tiempo o menos; el 5 % restante tarda más.</a:t>
             </a:r>
           </a:p>
-          <a:p>
-            <a:pPr>
-              <a:spcAft>
-                <a:spcPts val="800"/>
-              </a:spcAft>
-            </a:pPr>
-            <a:r>
-              <a:rPr sz="2000" b="0" i="0">
-                <a:solidFill>
-                  <a:srgbClr val="333333"/>
-                </a:solidFill>
-                <a:latin typeface="Calibri"/>
-              </a:rPr>
-              <a:t>–   Ejemplo: 150 RPS en la hora pico de reservas · p95 &lt; 300 ms · errores &lt; 1 %.</a:t>
-            </a:r>
-          </a:p>
-          <a:p>
-            <a:pPr>
-              <a:spcAft>
-                <a:spcPts val="800"/>
-              </a:spcAft>
-            </a:pPr>
-            <a:r>
-              <a:rPr sz="2000" b="0" i="0">
-                <a:solidFill>
-                  <a:srgbClr val="333333"/>
-                </a:solidFill>
-                <a:latin typeface="Calibri"/>
-              </a:rPr>
-              <a:t>–   Error común: medir con un solo usuario; el sistema se ve rápido hasta que llega la concurrencia.</a:t>
-            </a:r>
-          </a:p>
-        </p:txBody>
-      </p:sp>
-      <p:sp>
-        <p:nvSpPr>
-          <p:cNvPr id="6" name="TextBox 5"/>
+        </p:txBody>
+      </p:sp>
+      <p:sp>
+        <p:nvSpPr>
+          <p:cNvPr id="8" name="TextBox 7"/>
           <p:cNvSpPr txBox="1"/>
           <p:nvPr/>
         </p:nvSpPr>
@@ -10452,14 +10695,83 @@
       </p:sp>
       <p:sp>
         <p:nvSpPr>
-          <p:cNvPr id="5" name="TextBox 4"/>
+          <p:cNvPr id="5" name="Rounded Rectangle 4"/>
+          <p:cNvSpPr/>
+          <p:nvPr/>
+        </p:nvSpPr>
+        <p:spPr>
+          <a:xfrm>
+            <a:off x="5797149" y="1343926"/>
+            <a:ext cx="6010497" cy="4837658"/>
+          </a:xfrm>
+          <a:prstGeom prst="roundRect">
+            <a:avLst>
+              <a:gd name="adj" fmla="val 4000"/>
+            </a:avLst>
+          </a:prstGeom>
+          <a:solidFill>
+            <a:srgbClr val="E8EEF4"/>
+          </a:solidFill>
+          <a:ln>
+            <a:noFill/>
+          </a:ln>
+        </p:spPr>
+        <p:style>
+          <a:lnRef idx="1">
+            <a:schemeClr val="accent1"/>
+          </a:lnRef>
+          <a:fillRef idx="3">
+            <a:schemeClr val="accent1"/>
+          </a:fillRef>
+          <a:effectRef idx="2">
+            <a:schemeClr val="accent1"/>
+          </a:effectRef>
+          <a:fontRef idx="minor">
+            <a:schemeClr val="lt1"/>
+          </a:fontRef>
+        </p:style>
+        <p:txBody>
+          <a:bodyPr rtlCol="0" anchor="ctr"/>
+          <a:lstStyle/>
+          <a:p>
+            <a:pPr algn="ctr"/>
+          </a:p>
+        </p:txBody>
+      </p:sp>
+      <p:pic>
+        <p:nvPicPr>
+          <p:cNvPr id="6" name="Picture 5" descr="ilus-pitch-minutos-paso1.png"/>
+          <p:cNvPicPr>
+            <a:picLocks noChangeAspect="1"/>
+          </p:cNvPicPr>
+          <p:nvPr/>
+        </p:nvPicPr>
+        <p:blipFill>
+          <a:blip r:embed="rId2"/>
+          <a:stretch>
+            <a:fillRect/>
+          </a:stretch>
+        </p:blipFill>
+        <p:spPr>
+          <a:xfrm>
+            <a:off x="5870301" y="1417078"/>
+            <a:ext cx="5864193" cy="4691354"/>
+          </a:xfrm>
+          <a:prstGeom prst="rect">
+            <a:avLst/>
+          </a:prstGeom>
+        </p:spPr>
+      </p:pic>
+      <p:sp>
+        <p:nvSpPr>
+          <p:cNvPr id="7" name="TextBox 6"/>
           <p:cNvSpPr txBox="1"/>
           <p:nvPr/>
         </p:nvSpPr>
         <p:spPr>
           <a:xfrm>
-            <a:off x="457200" y="1170432"/>
-            <a:ext cx="11277295" cy="5230368"/>
+            <a:off x="457200" y="1353312"/>
+            <a:ext cx="5093061" cy="5047488"/>
           </a:xfrm>
           <a:prstGeom prst="rect">
             <a:avLst/>
@@ -10535,27 +10847,11 @@
               <a:t>–   Una idea por diapositiva: el diagrama en pantalla y la decisión explicada por quien presenta.</a:t>
             </a:r>
           </a:p>
-          <a:p>
-            <a:pPr>
-              <a:spcAft>
-                <a:spcPts val="800"/>
-              </a:spcAft>
-            </a:pPr>
-            <a:r>
-              <a:rPr sz="2000" b="0" i="0">
-                <a:solidFill>
-                  <a:srgbClr val="333333"/>
-                </a:solidFill>
-                <a:latin typeface="Calibri"/>
-              </a:rPr>
-              <a:t>–   Cerrar con el punto débil declarado: lo que no escala o lo que no se midió.</a:t>
-            </a:r>
-          </a:p>
-        </p:txBody>
-      </p:sp>
-      <p:sp>
-        <p:nvSpPr>
-          <p:cNvPr id="6" name="TextBox 5"/>
+        </p:txBody>
+      </p:sp>
+      <p:sp>
+        <p:nvSpPr>
+          <p:cNvPr id="8" name="TextBox 7"/>
           <p:cNvSpPr txBox="1"/>
           <p:nvPr/>
         </p:nvSpPr>
@@ -12581,9 +12877,33 @@
           </a:prstGeom>
         </p:spPr>
       </p:pic>
-      <p:sp>
-        <p:nvSpPr>
-          <p:cNvPr id="13" name="TextBox 12"/>
+      <p:pic>
+        <p:nvPicPr>
+          <p:cNvPr id="9" name="Picture 8" descr="latencia-throughput-paso4.png"/>
+          <p:cNvPicPr>
+            <a:picLocks noChangeAspect="1"/>
+          </p:cNvPicPr>
+          <p:nvPr/>
+        </p:nvPicPr>
+        <p:blipFill>
+          <a:blip r:embed="rId5"/>
+          <a:stretch>
+            <a:fillRect/>
+          </a:stretch>
+        </p:blipFill>
+        <p:spPr>
+          <a:xfrm>
+            <a:off x="5876318" y="1261872"/>
+            <a:ext cx="5852160" cy="4681728"/>
+          </a:xfrm>
+          <a:prstGeom prst="rect">
+            <a:avLst/>
+          </a:prstGeom>
+        </p:spPr>
+      </p:pic>
+      <p:sp>
+        <p:nvSpPr>
+          <p:cNvPr id="18" name="TextBox 17"/>
           <p:cNvSpPr txBox="1"/>
           <p:nvPr/>
         </p:nvSpPr>
@@ -12618,7 +12938,7 @@
       </p:sp>
       <p:sp>
         <p:nvSpPr>
-          <p:cNvPr id="14" name="TextBox 13"/>
+          <p:cNvPr id="19" name="TextBox 18"/>
           <p:cNvSpPr txBox="1"/>
           <p:nvPr/>
         </p:nvSpPr>
@@ -12673,7 +12993,7 @@
       </p:sp>
       <p:sp>
         <p:nvSpPr>
-          <p:cNvPr id="15" name="TextBox 14"/>
+          <p:cNvPr id="20" name="TextBox 19"/>
           <p:cNvSpPr txBox="1"/>
           <p:nvPr/>
         </p:nvSpPr>
@@ -12813,6 +13133,59 @@
                                         <p:cTn id="12" dur="450"/>
                                         <p:tgtEl>
                                           <p:spTgt spid="8"/>
+                                        </p:tgtEl>
+                                      </p:cBhvr>
+                                    </p:animEffect>
+                                  </p:childTnLst>
+                                </p:cTn>
+                              </p:par>
+                            </p:childTnLst>
+                          </p:cTn>
+                        </p:par>
+                      </p:childTnLst>
+                    </p:cTn>
+                  </p:par>
+                  <p:par>
+                    <p:cTn id="13" fill="hold">
+                      <p:stCondLst>
+                        <p:cond delay="indefinite"/>
+                      </p:stCondLst>
+                      <p:childTnLst>
+                        <p:par>
+                          <p:cTn id="14" fill="hold">
+                            <p:stCondLst>
+                              <p:cond delay="0"/>
+                            </p:stCondLst>
+                            <p:childTnLst>
+                              <p:par>
+                                <p:cTn id="15" presetID="10" presetClass="entr" presetSubtype="0" fill="hold" nodeType="clickEffect">
+                                  <p:stCondLst>
+                                    <p:cond delay="0"/>
+                                  </p:stCondLst>
+                                  <p:childTnLst>
+                                    <p:set>
+                                      <p:cBhvr>
+                                        <p:cTn id="16" dur="1" fill="hold">
+                                          <p:stCondLst>
+                                            <p:cond delay="0"/>
+                                          </p:stCondLst>
+                                        </p:cTn>
+                                        <p:tgtEl>
+                                          <p:spTgt spid="9"/>
+                                        </p:tgtEl>
+                                        <p:attrNameLst>
+                                          <p:attrName>style.visibility</p:attrName>
+                                        </p:attrNameLst>
+                                      </p:cBhvr>
+                                      <p:to>
+                                        <p:strVal val="visible"/>
+                                      </p:to>
+                                    </p:set>
+                                    <p:animEffect transition="in" filter="fade">
+                                      <p:cBhvr>
+                                        <p:cTn id="17" dur="450"/>
+                                        <p:tgtEl>
+                                          <p:spTgt spid="9"/>
                                         </p:tgtEl>
                                       </p:cBhvr>
                                     </p:animEffect>

--- a/Arquitectura de Sistemas Computacionales/Clases/Clase 12 - Pruebas de rendimiento y preparacion final/Presentacion.pptx
+++ b/Arquitectura de Sistemas Computacionales/Clases/Clase 12 - Pruebas de rendimiento y preparacion final/Presentacion.pptx
@@ -5047,7 +5047,7 @@
         <p:spPr>
           <a:xfrm>
             <a:off x="457200" y="1261872"/>
-            <a:ext cx="11277295" cy="4911784"/>
+            <a:ext cx="6991923" cy="4911784"/>
           </a:xfrm>
           <a:prstGeom prst="roundRect">
             <a:avLst>
@@ -5092,7 +5092,7 @@
         <p:spPr>
           <a:xfrm>
             <a:off x="457200" y="1261872"/>
-            <a:ext cx="11277295" cy="365760"/>
+            <a:ext cx="6991923" cy="365760"/>
           </a:xfrm>
           <a:prstGeom prst="rect">
             <a:avLst/>
@@ -5264,7 +5264,7 @@
         <p:spPr>
           <a:xfrm>
             <a:off x="1371600" y="1298448"/>
-            <a:ext cx="10180015" cy="292608"/>
+            <a:ext cx="5894643" cy="292608"/>
           </a:xfrm>
           <a:prstGeom prst="rect">
             <a:avLst/>
@@ -5640,7 +5640,7 @@
         <p:spPr>
           <a:xfrm>
             <a:off x="1188720" y="1719072"/>
-            <a:ext cx="10271455" cy="4317424"/>
+            <a:ext cx="5986083" cy="4317424"/>
           </a:xfrm>
           <a:prstGeom prst="rect">
             <a:avLst/>
@@ -6394,11 +6394,11 @@
             <a:r>
               <a:rPr sz="1100" i="0" b="0">
                 <a:solidFill>
-                  <a:srgbClr val="D4D4D4"/>
-                </a:solidFill>
-                <a:latin typeface="Consolas"/>
-              </a:rPr>
-              <a:t>igual</a:t>
+                  <a:srgbClr val="B5CEA8"/>
+                </a:solidFill>
+                <a:latin typeface="Consolas"/>
+              </a:rPr>
+              <a:t>300</a:t>
             </a:r>
             <a:r>
               <a:rPr sz="1100" i="0" b="0">
@@ -6416,97 +6416,7 @@
                 </a:solidFill>
                 <a:latin typeface="Consolas"/>
               </a:rPr>
-              <a:t>a</a:t>
-            </a:r>
-            <a:r>
-              <a:rPr sz="1100" i="0" b="0">
-                <a:solidFill>
-                  <a:srgbClr val="D4D4D4"/>
-                </a:solidFill>
-                <a:latin typeface="Consolas"/>
-              </a:rPr>
-              <a:t> </a:t>
-            </a:r>
-            <a:r>
-              <a:rPr sz="1100" i="0" b="0">
-                <a:solidFill>
-                  <a:srgbClr val="B5CEA8"/>
-                </a:solidFill>
-                <a:latin typeface="Consolas"/>
-              </a:rPr>
-              <a:t>300</a:t>
-            </a:r>
-            <a:r>
-              <a:rPr sz="1100" i="0" b="0">
-                <a:solidFill>
-                  <a:srgbClr val="D4D4D4"/>
-                </a:solidFill>
-                <a:latin typeface="Consolas"/>
-              </a:rPr>
-              <a:t> </a:t>
-            </a:r>
-            <a:r>
-              <a:rPr sz="1100" i="0" b="0">
-                <a:solidFill>
-                  <a:srgbClr val="D4D4D4"/>
-                </a:solidFill>
-                <a:latin typeface="Consolas"/>
-              </a:rPr>
               <a:t>ms</a:t>
-            </a:r>
-            <a:r>
-              <a:rPr sz="1100" i="0" b="0">
-                <a:solidFill>
-                  <a:srgbClr val="D4D4D4"/>
-                </a:solidFill>
-                <a:latin typeface="Consolas"/>
-              </a:rPr>
-              <a:t> </a:t>
-            </a:r>
-            <a:r>
-              <a:rPr sz="1100" i="0" b="0">
-                <a:solidFill>
-                  <a:srgbClr val="D4D4D4"/>
-                </a:solidFill>
-                <a:latin typeface="Consolas"/>
-              </a:rPr>
-              <a:t>en</a:t>
-            </a:r>
-            <a:r>
-              <a:rPr sz="1100" i="0" b="0">
-                <a:solidFill>
-                  <a:srgbClr val="D4D4D4"/>
-                </a:solidFill>
-                <a:latin typeface="Consolas"/>
-              </a:rPr>
-              <a:t> </a:t>
-            </a:r>
-            <a:r>
-              <a:rPr sz="1100" i="0" b="0">
-                <a:solidFill>
-                  <a:srgbClr val="D4D4D4"/>
-                </a:solidFill>
-                <a:latin typeface="Consolas"/>
-              </a:rPr>
-              <a:t>el</a:t>
-            </a:r>
-            <a:r>
-              <a:rPr sz="1100" i="0" b="0">
-                <a:solidFill>
-                  <a:srgbClr val="D4D4D4"/>
-                </a:solidFill>
-                <a:latin typeface="Consolas"/>
-              </a:rPr>
-              <a:t> </a:t>
-            </a:r>
-            <a:r>
-              <a:rPr sz="1100" i="0" b="0">
-                <a:solidFill>
-                  <a:srgbClr val="D4D4D4"/>
-                </a:solidFill>
-                <a:latin typeface="Consolas"/>
-              </a:rPr>
-              <a:t>pico</a:t>
             </a:r>
           </a:p>
           <a:p>
@@ -6984,25 +6894,7 @@
                 </a:solidFill>
                 <a:latin typeface="Consolas"/>
               </a:rPr>
-              <a:t>Validar</a:t>
-            </a:r>
-            <a:r>
-              <a:rPr sz="1100" i="0" b="0">
-                <a:solidFill>
-                  <a:srgbClr val="D4D4D4"/>
-                </a:solidFill>
-                <a:latin typeface="Consolas"/>
-              </a:rPr>
-              <a:t> </a:t>
-            </a:r>
-            <a:r>
-              <a:rPr sz="1100" i="0" b="0">
-                <a:solidFill>
-                  <a:srgbClr val="D4D4D4"/>
-                </a:solidFill>
-                <a:latin typeface="Consolas"/>
-              </a:rPr>
-              <a:t>token</a:t>
+              <a:t>Token</a:t>
             </a:r>
             <a:r>
               <a:rPr sz="1100" i="0" b="0">
@@ -7662,60 +7554,6 @@
               </a:rPr>
               <a:t>ms</a:t>
             </a:r>
-            <a:r>
-              <a:rPr sz="1100" i="0" b="0">
-                <a:solidFill>
-                  <a:srgbClr val="D4D4D4"/>
-                </a:solidFill>
-                <a:latin typeface="Consolas"/>
-              </a:rPr>
-              <a:t> - </a:t>
-            </a:r>
-            <a:r>
-              <a:rPr sz="1100" i="0" b="0">
-                <a:solidFill>
-                  <a:srgbClr val="D4D4D4"/>
-                </a:solidFill>
-                <a:latin typeface="Consolas"/>
-              </a:rPr>
-              <a:t>cuello</a:t>
-            </a:r>
-            <a:r>
-              <a:rPr sz="1100" i="0" b="0">
-                <a:solidFill>
-                  <a:srgbClr val="D4D4D4"/>
-                </a:solidFill>
-                <a:latin typeface="Consolas"/>
-              </a:rPr>
-              <a:t> </a:t>
-            </a:r>
-            <a:r>
-              <a:rPr sz="1100" i="0" b="0">
-                <a:solidFill>
-                  <a:srgbClr val="D4D4D4"/>
-                </a:solidFill>
-                <a:latin typeface="Consolas"/>
-              </a:rPr>
-              <a:t>de</a:t>
-            </a:r>
-            <a:r>
-              <a:rPr sz="1100" i="0" b="0">
-                <a:solidFill>
-                  <a:srgbClr val="D4D4D4"/>
-                </a:solidFill>
-                <a:latin typeface="Consolas"/>
-              </a:rPr>
-              <a:t> </a:t>
-            </a:r>
-            <a:r>
-              <a:rPr sz="1100" i="0" b="0">
-                <a:solidFill>
-                  <a:srgbClr val="D4D4D4"/>
-                </a:solidFill>
-                <a:latin typeface="Consolas"/>
-              </a:rPr>
-              <a:t>botella</a:t>
-            </a:r>
           </a:p>
           <a:p>
             <a:pPr>
@@ -7935,24 +7773,6 @@
                 </a:solidFill>
                 <a:latin typeface="Consolas"/>
               </a:rPr>
-              <a:t> </a:t>
-            </a:r>
-            <a:r>
-              <a:rPr sz="1100" i="0" b="0">
-                <a:solidFill>
-                  <a:srgbClr val="D4D4D4"/>
-                </a:solidFill>
-                <a:latin typeface="Consolas"/>
-              </a:rPr>
-              <a:t>asincrona</a:t>
-            </a:r>
-            <a:r>
-              <a:rPr sz="1100" i="0" b="0">
-                <a:solidFill>
-                  <a:srgbClr val="D4D4D4"/>
-                </a:solidFill>
-                <a:latin typeface="Consolas"/>
-              </a:rPr>
               <a:t> - </a:t>
             </a:r>
             <a:r>
@@ -8248,66 +8068,116 @@
               </a:rPr>
               <a:t>ms</a:t>
             </a:r>
-            <a:r>
-              <a:rPr sz="1100" i="0" b="0">
-                <a:solidFill>
-                  <a:srgbClr val="D4D4D4"/>
-                </a:solidFill>
-                <a:latin typeface="Consolas"/>
-              </a:rPr>
-              <a:t> </a:t>
-            </a:r>
-            <a:r>
-              <a:rPr sz="1100" i="0" b="0">
-                <a:solidFill>
-                  <a:srgbClr val="D4D4D4"/>
-                </a:solidFill>
-                <a:latin typeface="Consolas"/>
-              </a:rPr>
-              <a:t>frente</a:t>
-            </a:r>
-            <a:r>
-              <a:rPr sz="1100" i="0" b="0">
-                <a:solidFill>
-                  <a:srgbClr val="D4D4D4"/>
-                </a:solidFill>
-                <a:latin typeface="Consolas"/>
-              </a:rPr>
-              <a:t> </a:t>
-            </a:r>
-            <a:r>
-              <a:rPr sz="1100" i="0" b="0">
-                <a:solidFill>
-                  <a:srgbClr val="D4D4D4"/>
-                </a:solidFill>
-                <a:latin typeface="Consolas"/>
-              </a:rPr>
-              <a:t>al</a:t>
-            </a:r>
-            <a:r>
-              <a:rPr sz="1100" i="0" b="0">
-                <a:solidFill>
-                  <a:srgbClr val="D4D4D4"/>
-                </a:solidFill>
-                <a:latin typeface="Consolas"/>
-              </a:rPr>
-              <a:t> </a:t>
-            </a:r>
-            <a:r>
-              <a:rPr sz="1100" i="0" b="0">
-                <a:solidFill>
-                  <a:srgbClr val="D4D4D4"/>
-                </a:solidFill>
-                <a:latin typeface="Consolas"/>
-              </a:rPr>
-              <a:t>objetivo</a:t>
-            </a:r>
-          </a:p>
-        </p:txBody>
-      </p:sp>
-      <p:sp>
-        <p:nvSpPr>
-          <p:cNvPr id="13" name="TextBox 12"/>
+          </a:p>
+        </p:txBody>
+      </p:sp>
+      <p:sp>
+        <p:nvSpPr>
+          <p:cNvPr id="13" name="Rounded Rectangle 12"/>
+          <p:cNvSpPr/>
+          <p:nvPr/>
+        </p:nvSpPr>
+        <p:spPr>
+          <a:xfrm>
+            <a:off x="7668579" y="1261872"/>
+            <a:ext cx="4120780" cy="3318569"/>
+          </a:xfrm>
+          <a:prstGeom prst="roundRect">
+            <a:avLst>
+              <a:gd name="adj" fmla="val 4000"/>
+            </a:avLst>
+          </a:prstGeom>
+          <a:solidFill>
+            <a:srgbClr val="E8EEF4"/>
+          </a:solidFill>
+          <a:ln>
+            <a:noFill/>
+          </a:ln>
+        </p:spPr>
+        <p:style>
+          <a:lnRef idx="1">
+            <a:schemeClr val="accent1"/>
+          </a:lnRef>
+          <a:fillRef idx="3">
+            <a:schemeClr val="accent1"/>
+          </a:fillRef>
+          <a:effectRef idx="2">
+            <a:schemeClr val="accent1"/>
+          </a:effectRef>
+          <a:fontRef idx="minor">
+            <a:schemeClr val="lt1"/>
+          </a:fontRef>
+        </p:style>
+        <p:txBody>
+          <a:bodyPr rtlCol="0" anchor="ctr"/>
+          <a:lstStyle/>
+          <a:p>
+            <a:pPr algn="ctr"/>
+          </a:p>
+        </p:txBody>
+      </p:sp>
+      <p:pic>
+        <p:nvPicPr>
+          <p:cNvPr id="14" name="Picture 13" descr="dg-latencia-paso1.png"/>
+          <p:cNvPicPr>
+            <a:picLocks noChangeAspect="1"/>
+          </p:cNvPicPr>
+          <p:nvPr/>
+        </p:nvPicPr>
+        <p:blipFill>
+          <a:blip r:embed="rId2"/>
+          <a:stretch>
+            <a:fillRect/>
+          </a:stretch>
+        </p:blipFill>
+        <p:spPr>
+          <a:xfrm>
+            <a:off x="7723443" y="1316736"/>
+            <a:ext cx="4011052" cy="3208841"/>
+          </a:xfrm>
+          <a:prstGeom prst="rect">
+            <a:avLst/>
+          </a:prstGeom>
+        </p:spPr>
+      </p:pic>
+      <p:sp>
+        <p:nvSpPr>
+          <p:cNvPr id="15" name="TextBox 14"/>
+          <p:cNvSpPr txBox="1"/>
+          <p:nvPr/>
+        </p:nvSpPr>
+        <p:spPr>
+          <a:xfrm>
+            <a:off x="7723443" y="4580441"/>
+            <a:ext cx="4011052" cy="320040"/>
+          </a:xfrm>
+          <a:prstGeom prst="rect">
+            <a:avLst/>
+          </a:prstGeom>
+          <a:noFill/>
+        </p:spPr>
+        <p:txBody>
+          <a:bodyPr wrap="square">
+            <a:spAutoFit/>
+          </a:bodyPr>
+          <a:lstStyle/>
+          <a:p>
+            <a:pPr algn="ctr"/>
+            <a:r>
+              <a:rPr sz="1200" b="0" i="1">
+                <a:solidFill>
+                  <a:srgbClr val="666666"/>
+                </a:solidFill>
+                <a:latin typeface="Calibri"/>
+              </a:rPr>
+              <a:t>Lo que dibuja este código</a:t>
+            </a:r>
+          </a:p>
+        </p:txBody>
+      </p:sp>
+      <p:sp>
+        <p:nvSpPr>
+          <p:cNvPr id="16" name="TextBox 15"/>
           <p:cNvSpPr txBox="1"/>
           <p:nvPr/>
         </p:nvSpPr>
@@ -13926,7 +13796,7 @@
         <p:spPr>
           <a:xfrm>
             <a:off x="457200" y="1261872"/>
-            <a:ext cx="11277295" cy="4454584"/>
+            <a:ext cx="11277295" cy="3028315"/>
           </a:xfrm>
           <a:prstGeom prst="roundRect">
             <a:avLst>
@@ -14175,8 +14045,8 @@
         </p:nvSpPr>
         <p:spPr>
           <a:xfrm>
-            <a:off x="1188720" y="1719072"/>
-            <a:ext cx="10271455" cy="3860224"/>
+            <a:off x="685800" y="1719072"/>
+            <a:ext cx="502920" cy="2433955"/>
           </a:xfrm>
           <a:prstGeom prst="rect">
             <a:avLst/>
@@ -14189,13 +14059,164 @@
           </a:bodyPr>
           <a:lstStyle/>
           <a:p>
+            <a:pPr algn="r">
+              <a:spcAft>
+                <a:spcPts val="342"/>
+              </a:spcAft>
+            </a:pPr>
+            <a:r>
+              <a:rPr sz="1600" i="0" b="0">
+                <a:solidFill>
+                  <a:srgbClr val="858585"/>
+                </a:solidFill>
+                <a:latin typeface="Consolas"/>
+              </a:rPr>
+              <a:t>1</a:t>
+            </a:r>
+          </a:p>
+          <a:p>
+            <a:pPr algn="r">
+              <a:spcAft>
+                <a:spcPts val="342"/>
+              </a:spcAft>
+            </a:pPr>
+            <a:r>
+              <a:rPr sz="1600" i="0" b="0">
+                <a:solidFill>
+                  <a:srgbClr val="858585"/>
+                </a:solidFill>
+                <a:latin typeface="Consolas"/>
+              </a:rPr>
+              <a:t>2</a:t>
+            </a:r>
+          </a:p>
+          <a:p>
+            <a:pPr algn="r">
+              <a:spcAft>
+                <a:spcPts val="342"/>
+              </a:spcAft>
+            </a:pPr>
+            <a:r>
+              <a:rPr sz="1600" i="0" b="0">
+                <a:solidFill>
+                  <a:srgbClr val="858585"/>
+                </a:solidFill>
+                <a:latin typeface="Consolas"/>
+              </a:rPr>
+              <a:t>3</a:t>
+            </a:r>
+          </a:p>
+          <a:p>
+            <a:pPr algn="r">
+              <a:spcAft>
+                <a:spcPts val="342"/>
+              </a:spcAft>
+            </a:pPr>
+            <a:r>
+              <a:rPr sz="1600" i="0" b="0">
+                <a:solidFill>
+                  <a:srgbClr val="858585"/>
+                </a:solidFill>
+                <a:latin typeface="Consolas"/>
+              </a:rPr>
+              <a:t>4</a:t>
+            </a:r>
+          </a:p>
+          <a:p>
+            <a:pPr algn="r">
+              <a:spcAft>
+                <a:spcPts val="342"/>
+              </a:spcAft>
+            </a:pPr>
+            <a:r>
+              <a:rPr sz="1600" i="0" b="0">
+                <a:solidFill>
+                  <a:srgbClr val="858585"/>
+                </a:solidFill>
+                <a:latin typeface="Consolas"/>
+              </a:rPr>
+              <a:t>5</a:t>
+            </a:r>
+          </a:p>
+          <a:p>
+            <a:pPr algn="r">
+              <a:spcAft>
+                <a:spcPts val="342"/>
+              </a:spcAft>
+            </a:pPr>
+            <a:r>
+              <a:rPr sz="1600" i="0" b="0">
+                <a:solidFill>
+                  <a:srgbClr val="858585"/>
+                </a:solidFill>
+                <a:latin typeface="Consolas"/>
+              </a:rPr>
+              <a:t>6</a:t>
+            </a:r>
+          </a:p>
+          <a:p>
+            <a:pPr algn="r">
+              <a:spcAft>
+                <a:spcPts val="342"/>
+              </a:spcAft>
+            </a:pPr>
+            <a:r>
+              <a:rPr sz="1600" i="0" b="0">
+                <a:solidFill>
+                  <a:srgbClr val="858585"/>
+                </a:solidFill>
+                <a:latin typeface="Consolas"/>
+              </a:rPr>
+              <a:t>7</a:t>
+            </a:r>
+          </a:p>
+          <a:p>
+            <a:pPr algn="r">
+              <a:spcAft>
+                <a:spcPts val="342"/>
+              </a:spcAft>
+            </a:pPr>
+            <a:r>
+              <a:rPr sz="1600" i="0" b="0">
+                <a:solidFill>
+                  <a:srgbClr val="858585"/>
+                </a:solidFill>
+                <a:latin typeface="Consolas"/>
+              </a:rPr>
+              <a:t>8</a:t>
+            </a:r>
+          </a:p>
+        </p:txBody>
+      </p:sp>
+      <p:sp>
+        <p:nvSpPr>
+          <p:cNvPr id="12" name="TextBox 11"/>
+          <p:cNvSpPr txBox="1"/>
+          <p:nvPr/>
+        </p:nvSpPr>
+        <p:spPr>
+          <a:xfrm>
+            <a:off x="1188720" y="1719072"/>
+            <a:ext cx="10271455" cy="2433955"/>
+          </a:xfrm>
+          <a:prstGeom prst="rect">
+            <a:avLst/>
+          </a:prstGeom>
+          <a:noFill/>
+        </p:spPr>
+        <p:txBody>
+          <a:bodyPr wrap="square">
+            <a:spAutoFit/>
+          </a:bodyPr>
+          <a:lstStyle/>
+          <a:p>
             <a:pPr>
               <a:spcAft>
-                <a:spcPts val="428"/>
+                <a:spcPts val="342"/>
               </a:spcAft>
             </a:pPr>
             <a:r>
-              <a:rPr sz="2000" i="0" b="0">
+              <a:rPr sz="1600" i="0" b="0">
                 <a:solidFill>
                   <a:srgbClr val="D4D4D4"/>
                 </a:solidFill>
@@ -14204,7 +14225,7 @@
               <a:t>| </a:t>
             </a:r>
             <a:r>
-              <a:rPr sz="2000" i="0" b="0">
+              <a:rPr sz="1600" i="0" b="0">
                 <a:solidFill>
                   <a:srgbClr val="D4D4D4"/>
                 </a:solidFill>
@@ -14213,7 +14234,7 @@
               <a:t>Metrica</a:t>
             </a:r>
             <a:r>
-              <a:rPr sz="2000" i="0" b="0">
+              <a:rPr sz="1600" i="0" b="0">
                 <a:solidFill>
                   <a:srgbClr val="D4D4D4"/>
                 </a:solidFill>
@@ -14222,7 +14243,7 @@
               <a:t>                | </a:t>
             </a:r>
             <a:r>
-              <a:rPr sz="2000" i="0" b="0">
+              <a:rPr sz="1600" i="0" b="0">
                 <a:solidFill>
                   <a:srgbClr val="D4D4D4"/>
                 </a:solidFill>
@@ -14231,7 +14252,7 @@
               <a:t>Objetivo</a:t>
             </a:r>
             <a:r>
-              <a:rPr sz="2000" i="0" b="0">
+              <a:rPr sz="1600" i="0" b="0">
                 <a:solidFill>
                   <a:srgbClr val="D4D4D4"/>
                 </a:solidFill>
@@ -14240,7 +14261,7 @@
               <a:t> | </a:t>
             </a:r>
             <a:r>
-              <a:rPr sz="2000" i="0" b="0">
+              <a:rPr sz="1600" i="0" b="0">
                 <a:solidFill>
                   <a:srgbClr val="D4D4D4"/>
                 </a:solidFill>
@@ -14249,7 +14270,7 @@
               <a:t>Como</a:t>
             </a:r>
             <a:r>
-              <a:rPr sz="2000" i="0" b="0">
+              <a:rPr sz="1600" i="0" b="0">
                 <a:solidFill>
                   <a:srgbClr val="D4D4D4"/>
                 </a:solidFill>
@@ -14258,7 +14279,7 @@
               <a:t> </a:t>
             </a:r>
             <a:r>
-              <a:rPr sz="2000" i="0" b="0">
+              <a:rPr sz="1600" i="0" b="0">
                 <a:solidFill>
                   <a:srgbClr val="D4D4D4"/>
                 </a:solidFill>
@@ -14267,7 +14288,7 @@
               <a:t>se</a:t>
             </a:r>
             <a:r>
-              <a:rPr sz="2000" i="0" b="0">
+              <a:rPr sz="1600" i="0" b="0">
                 <a:solidFill>
                   <a:srgbClr val="D4D4D4"/>
                 </a:solidFill>
@@ -14276,7 +14297,7 @@
               <a:t> </a:t>
             </a:r>
             <a:r>
-              <a:rPr sz="2000" i="0" b="0">
+              <a:rPr sz="1600" i="0" b="0">
                 <a:solidFill>
                   <a:srgbClr val="D4D4D4"/>
                 </a:solidFill>
@@ -14285,7 +14306,7 @@
               <a:t>mide</a:t>
             </a:r>
             <a:r>
-              <a:rPr sz="2000" i="0" b="0">
+              <a:rPr sz="1600" i="0" b="0">
                 <a:solidFill>
                   <a:srgbClr val="D4D4D4"/>
                 </a:solidFill>
@@ -14294,7 +14315,7 @@
               <a:t>              | </a:t>
             </a:r>
             <a:r>
-              <a:rPr sz="2000" i="0" b="0">
+              <a:rPr sz="1600" i="0" b="0">
                 <a:solidFill>
                   <a:srgbClr val="D4D4D4"/>
                 </a:solidFill>
@@ -14303,7 +14324,7 @@
               <a:t>Si</a:t>
             </a:r>
             <a:r>
-              <a:rPr sz="2000" i="0" b="0">
+              <a:rPr sz="1600" i="0" b="0">
                 <a:solidFill>
                   <a:srgbClr val="D4D4D4"/>
                 </a:solidFill>
@@ -14312,7 +14333,7 @@
               <a:t> </a:t>
             </a:r>
             <a:r>
-              <a:rPr sz="2000" i="0" b="0">
+              <a:rPr sz="1600" i="0" b="0">
                 <a:solidFill>
                   <a:srgbClr val="D4D4D4"/>
                 </a:solidFill>
@@ -14321,7 +14342,7 @@
               <a:t>falla</a:t>
             </a:r>
             <a:r>
-              <a:rPr sz="2000" i="0" b="0">
+              <a:rPr sz="1600" i="0" b="0">
                 <a:solidFill>
                   <a:srgbClr val="D4D4D4"/>
                 </a:solidFill>
@@ -14333,11 +14354,11 @@
           <a:p>
             <a:pPr>
               <a:spcAft>
-                <a:spcPts val="428"/>
+                <a:spcPts val="342"/>
               </a:spcAft>
             </a:pPr>
             <a:r>
-              <a:rPr sz="2000" i="0" b="0">
+              <a:rPr sz="1600" i="0" b="0">
                 <a:solidFill>
                   <a:srgbClr val="D4D4D4"/>
                 </a:solidFill>
@@ -14346,7 +14367,7 @@
               <a:t>|----------------------</a:t>
             </a:r>
             <a:r>
-              <a:rPr sz="2000" i="0" b="0">
+              <a:rPr sz="1600" i="0" b="0">
                 <a:solidFill>
                   <a:srgbClr val="D4D4D4"/>
                 </a:solidFill>
@@ -14358,11 +14379,11 @@
           <a:p>
             <a:pPr>
               <a:spcAft>
-                <a:spcPts val="428"/>
+                <a:spcPts val="342"/>
               </a:spcAft>
             </a:pPr>
             <a:r>
-              <a:rPr sz="2000" i="0" b="0">
+              <a:rPr sz="1600" i="0" b="0">
                 <a:solidFill>
                   <a:srgbClr val="D4D4D4"/>
                 </a:solidFill>
@@ -14371,7 +14392,7 @@
               <a:t>| </a:t>
             </a:r>
             <a:r>
-              <a:rPr sz="2000" i="0" b="0">
+              <a:rPr sz="1600" i="0" b="0">
                 <a:solidFill>
                   <a:srgbClr val="D4D4D4"/>
                 </a:solidFill>
@@ -14380,7 +14401,7 @@
               <a:t>p95</a:t>
             </a:r>
             <a:r>
-              <a:rPr sz="2000" i="0" b="0">
+              <a:rPr sz="1600" i="0" b="0">
                 <a:solidFill>
                   <a:srgbClr val="D4D4D4"/>
                 </a:solidFill>
@@ -14389,7 +14410,7 @@
               <a:t> </a:t>
             </a:r>
             <a:r>
-              <a:rPr sz="2000" i="0" b="0">
+              <a:rPr sz="1600" i="0" b="0">
                 <a:solidFill>
                   <a:srgbClr val="D4D4D4"/>
                 </a:solidFill>
@@ -14398,7 +14419,7 @@
               <a:t>de</a:t>
             </a:r>
             <a:r>
-              <a:rPr sz="2000" i="0" b="0">
+              <a:rPr sz="1600" i="0" b="0">
                 <a:solidFill>
                   <a:srgbClr val="D4D4D4"/>
                 </a:solidFill>
@@ -14407,7 +14428,7 @@
               <a:t> </a:t>
             </a:r>
             <a:r>
-              <a:rPr sz="2000" i="0" b="0">
+              <a:rPr sz="1600" i="0" b="0">
                 <a:solidFill>
                   <a:srgbClr val="D4D4D4"/>
                 </a:solidFill>
@@ -14416,7 +14437,7 @@
               <a:t>POST</a:t>
             </a:r>
             <a:r>
-              <a:rPr sz="2000" i="0" b="0">
+              <a:rPr sz="1600" i="0" b="0">
                 <a:solidFill>
                   <a:srgbClr val="D4D4D4"/>
                 </a:solidFill>
@@ -14425,7 +14446,7 @@
               <a:t> /</a:t>
             </a:r>
             <a:r>
-              <a:rPr sz="2000" i="0" b="0">
+              <a:rPr sz="1600" i="0" b="0">
                 <a:solidFill>
                   <a:srgbClr val="D4D4D4"/>
                 </a:solidFill>
@@ -14434,7 +14455,7 @@
               <a:t>turnos</a:t>
             </a:r>
             <a:r>
-              <a:rPr sz="2000" i="0" b="0">
+              <a:rPr sz="1600" i="0" b="0">
                 <a:solidFill>
                   <a:srgbClr val="D4D4D4"/>
                 </a:solidFill>
@@ -14443,7 +14464,7 @@
               <a:t>    | &lt; </a:t>
             </a:r>
             <a:r>
-              <a:rPr sz="2000" i="0" b="0">
+              <a:rPr sz="1600" i="0" b="0">
                 <a:solidFill>
                   <a:srgbClr val="B5CEA8"/>
                 </a:solidFill>
@@ -14452,7 +14473,7 @@
               <a:t>300</a:t>
             </a:r>
             <a:r>
-              <a:rPr sz="2000" i="0" b="0">
+              <a:rPr sz="1600" i="0" b="0">
                 <a:solidFill>
                   <a:srgbClr val="D4D4D4"/>
                 </a:solidFill>
@@ -14461,7 +14482,7 @@
               <a:t> </a:t>
             </a:r>
             <a:r>
-              <a:rPr sz="2000" i="0" b="0">
+              <a:rPr sz="1600" i="0" b="0">
                 <a:solidFill>
                   <a:srgbClr val="D4D4D4"/>
                 </a:solidFill>
@@ -14470,7 +14491,7 @@
               <a:t>ms</a:t>
             </a:r>
             <a:r>
-              <a:rPr sz="2000" i="0" b="0">
+              <a:rPr sz="1600" i="0" b="0">
                 <a:solidFill>
                   <a:srgbClr val="D4D4D4"/>
                 </a:solidFill>
@@ -14479,7 +14500,7 @@
               <a:t> | </a:t>
             </a:r>
             <a:r>
-              <a:rPr sz="2000" i="0" b="0">
+              <a:rPr sz="1600" i="0" b="0">
                 <a:solidFill>
                   <a:srgbClr val="D4D4D4"/>
                 </a:solidFill>
@@ -14488,7 +14509,7 @@
               <a:t>percentil</a:t>
             </a:r>
             <a:r>
-              <a:rPr sz="2000" i="0" b="0">
+              <a:rPr sz="1600" i="0" b="0">
                 <a:solidFill>
                   <a:srgbClr val="D4D4D4"/>
                 </a:solidFill>
@@ -14497,7 +14518,7 @@
               <a:t> </a:t>
             </a:r>
             <a:r>
-              <a:rPr sz="2000" i="0" b="0">
+              <a:rPr sz="1600" i="0" b="0">
                 <a:solidFill>
                   <a:srgbClr val="D4D4D4"/>
                 </a:solidFill>
@@ -14506,7 +14527,7 @@
               <a:t>del</a:t>
             </a:r>
             <a:r>
-              <a:rPr sz="2000" i="0" b="0">
+              <a:rPr sz="1600" i="0" b="0">
                 <a:solidFill>
                   <a:srgbClr val="D4D4D4"/>
                 </a:solidFill>
@@ -14515,7 +14536,7 @@
               <a:t> </a:t>
             </a:r>
             <a:r>
-              <a:rPr sz="2000" i="0" b="0">
+              <a:rPr sz="1600" i="0" b="0">
                 <a:solidFill>
                   <a:srgbClr val="D4D4D4"/>
                 </a:solidFill>
@@ -14524,7 +14545,7 @@
               <a:t>log</a:t>
             </a:r>
             <a:r>
-              <a:rPr sz="2000" i="0" b="0">
+              <a:rPr sz="1600" i="0" b="0">
                 <a:solidFill>
                   <a:srgbClr val="D4D4D4"/>
                 </a:solidFill>
@@ -14533,7 +14554,7 @@
               <a:t> </a:t>
             </a:r>
             <a:r>
-              <a:rPr sz="2000" i="0" b="0">
+              <a:rPr sz="1600" i="0" b="0">
                 <a:solidFill>
                   <a:srgbClr val="D4D4D4"/>
                 </a:solidFill>
@@ -14542,7 +14563,7 @@
               <a:t>del</a:t>
             </a:r>
             <a:r>
-              <a:rPr sz="2000" i="0" b="0">
+              <a:rPr sz="1600" i="0" b="0">
                 <a:solidFill>
                   <a:srgbClr val="D4D4D4"/>
                 </a:solidFill>
@@ -14551,7 +14572,7 @@
               <a:t> </a:t>
             </a:r>
             <a:r>
-              <a:rPr sz="2000" i="0" b="0">
+              <a:rPr sz="1600" i="0" b="0">
                 <a:solidFill>
                   <a:srgbClr val="D4D4D4"/>
                 </a:solidFill>
@@ -14560,7 +14581,7 @@
               <a:t>API</a:t>
             </a:r>
             <a:r>
-              <a:rPr sz="2000" i="0" b="0">
+              <a:rPr sz="1600" i="0" b="0">
                 <a:solidFill>
                   <a:srgbClr val="D4D4D4"/>
                 </a:solidFill>
@@ -14569,7 +14590,7 @@
               <a:t> | </a:t>
             </a:r>
             <a:r>
-              <a:rPr sz="2000" i="0" b="0">
+              <a:rPr sz="1600" i="0" b="0">
                 <a:solidFill>
                   <a:srgbClr val="D4D4D4"/>
                 </a:solidFill>
@@ -14578,7 +14599,7 @@
               <a:t>revisar</a:t>
             </a:r>
             <a:r>
-              <a:rPr sz="2000" i="0" b="0">
+              <a:rPr sz="1600" i="0" b="0">
                 <a:solidFill>
                   <a:srgbClr val="D4D4D4"/>
                 </a:solidFill>
@@ -14587,7 +14608,7 @@
               <a:t> </a:t>
             </a:r>
             <a:r>
-              <a:rPr sz="2000" i="0" b="0">
+              <a:rPr sz="1600" i="0" b="0">
                 <a:solidFill>
                   <a:srgbClr val="D4D4D4"/>
                 </a:solidFill>
@@ -14596,7 +14617,7 @@
               <a:t>el</a:t>
             </a:r>
             <a:r>
-              <a:rPr sz="2000" i="0" b="0">
+              <a:rPr sz="1600" i="0" b="0">
                 <a:solidFill>
                   <a:srgbClr val="D4D4D4"/>
                 </a:solidFill>
@@ -14605,7 +14626,7 @@
               <a:t> </a:t>
             </a:r>
             <a:r>
-              <a:rPr sz="2000" i="0" b="0">
+              <a:rPr sz="1600" i="0" b="0">
                 <a:solidFill>
                   <a:srgbClr val="D4D4D4"/>
                 </a:solidFill>
@@ -14614,7 +14635,7 @@
               <a:t>indice</a:t>
             </a:r>
             <a:r>
-              <a:rPr sz="2000" i="0" b="0">
+              <a:rPr sz="1600" i="0" b="0">
                 <a:solidFill>
                   <a:srgbClr val="D4D4D4"/>
                 </a:solidFill>
@@ -14626,11 +14647,11 @@
           <a:p>
             <a:pPr>
               <a:spcAft>
-                <a:spcPts val="428"/>
+                <a:spcPts val="342"/>
               </a:spcAft>
             </a:pPr>
             <a:r>
-              <a:rPr sz="2000" i="0" b="0">
+              <a:rPr sz="1600" i="0" b="0">
                 <a:solidFill>
                   <a:srgbClr val="D4D4D4"/>
                 </a:solidFill>
@@ -14639,7 +14660,7 @@
               <a:t>| </a:t>
             </a:r>
             <a:r>
-              <a:rPr sz="2000" i="0" b="0">
+              <a:rPr sz="1600" i="0" b="0">
                 <a:solidFill>
                   <a:srgbClr val="D4D4D4"/>
                 </a:solidFill>
@@ -14648,7 +14669,7 @@
               <a:t>tasa</a:t>
             </a:r>
             <a:r>
-              <a:rPr sz="2000" i="0" b="0">
+              <a:rPr sz="1600" i="0" b="0">
                 <a:solidFill>
                   <a:srgbClr val="D4D4D4"/>
                 </a:solidFill>
@@ -14657,7 +14678,7 @@
               <a:t> </a:t>
             </a:r>
             <a:r>
-              <a:rPr sz="2000" i="0" b="0">
+              <a:rPr sz="1600" i="0" b="0">
                 <a:solidFill>
                   <a:srgbClr val="D4D4D4"/>
                 </a:solidFill>
@@ -14666,7 +14687,7 @@
               <a:t>de</a:t>
             </a:r>
             <a:r>
-              <a:rPr sz="2000" i="0" b="0">
+              <a:rPr sz="1600" i="0" b="0">
                 <a:solidFill>
                   <a:srgbClr val="D4D4D4"/>
                 </a:solidFill>
@@ -14675,7 +14696,7 @@
               <a:t> </a:t>
             </a:r>
             <a:r>
-              <a:rPr sz="2000" i="0" b="0">
+              <a:rPr sz="1600" i="0" b="0">
                 <a:solidFill>
                   <a:srgbClr val="D4D4D4"/>
                 </a:solidFill>
@@ -14684,7 +14705,7 @@
               <a:t>errores</a:t>
             </a:r>
             <a:r>
-              <a:rPr sz="2000" i="0" b="0">
+              <a:rPr sz="1600" i="0" b="0">
                 <a:solidFill>
                   <a:srgbClr val="D4D4D4"/>
                 </a:solidFill>
@@ -14693,7 +14714,7 @@
               <a:t> 5</a:t>
             </a:r>
             <a:r>
-              <a:rPr sz="2000" i="0" b="0">
+              <a:rPr sz="1600" i="0" b="0">
                 <a:solidFill>
                   <a:srgbClr val="D4D4D4"/>
                 </a:solidFill>
@@ -14702,7 +14723,7 @@
               <a:t>xx</a:t>
             </a:r>
             <a:r>
-              <a:rPr sz="2000" i="0" b="0">
+              <a:rPr sz="1600" i="0" b="0">
                 <a:solidFill>
                   <a:srgbClr val="D4D4D4"/>
                 </a:solidFill>
@@ -14711,7 +14732,7 @@
               <a:t>    | &lt; </a:t>
             </a:r>
             <a:r>
-              <a:rPr sz="2000" i="0" b="0">
+              <a:rPr sz="1600" i="0" b="0">
                 <a:solidFill>
                   <a:srgbClr val="B5CEA8"/>
                 </a:solidFill>
@@ -14720,7 +14741,7 @@
               <a:t>1</a:t>
             </a:r>
             <a:r>
-              <a:rPr sz="2000" i="0" b="0">
+              <a:rPr sz="1600" i="0" b="0">
                 <a:solidFill>
                   <a:srgbClr val="D4D4D4"/>
                 </a:solidFill>
@@ -14729,7 +14750,7 @@
               <a:t> %    | </a:t>
             </a:r>
             <a:r>
-              <a:rPr sz="2000" i="0" b="0">
+              <a:rPr sz="1600" i="0" b="0">
                 <a:solidFill>
                   <a:srgbClr val="D4D4D4"/>
                 </a:solidFill>
@@ -14738,7 +14759,7 @@
               <a:t>conteo</a:t>
             </a:r>
             <a:r>
-              <a:rPr sz="2000" i="0" b="0">
+              <a:rPr sz="1600" i="0" b="0">
                 <a:solidFill>
                   <a:srgbClr val="D4D4D4"/>
                 </a:solidFill>
@@ -14747,7 +14768,7 @@
               <a:t> </a:t>
             </a:r>
             <a:r>
-              <a:rPr sz="2000" i="0" b="0">
+              <a:rPr sz="1600" i="0" b="0">
                 <a:solidFill>
                   <a:srgbClr val="D4D4D4"/>
                 </a:solidFill>
@@ -14756,7 +14777,7 @@
               <a:t>por</a:t>
             </a:r>
             <a:r>
-              <a:rPr sz="2000" i="0" b="0">
+              <a:rPr sz="1600" i="0" b="0">
                 <a:solidFill>
                   <a:srgbClr val="D4D4D4"/>
                 </a:solidFill>
@@ -14765,7 +14786,7 @@
               <a:t> </a:t>
             </a:r>
             <a:r>
-              <a:rPr sz="2000" i="0" b="0">
+              <a:rPr sz="1600" i="0" b="0">
                 <a:solidFill>
                   <a:srgbClr val="D4D4D4"/>
                 </a:solidFill>
@@ -14774,7 +14795,7 @@
               <a:t>minuto</a:t>
             </a:r>
             <a:r>
-              <a:rPr sz="2000" i="0" b="0">
+              <a:rPr sz="1600" i="0" b="0">
                 <a:solidFill>
                   <a:srgbClr val="D4D4D4"/>
                 </a:solidFill>
@@ -14783,7 +14804,7 @@
               <a:t>         | </a:t>
             </a:r>
             <a:r>
-              <a:rPr sz="2000" i="0" b="0">
+              <a:rPr sz="1600" i="0" b="0">
                 <a:solidFill>
                   <a:srgbClr val="D4D4D4"/>
                 </a:solidFill>
@@ -14792,7 +14813,7 @@
               <a:t>abrir</a:t>
             </a:r>
             <a:r>
-              <a:rPr sz="2000" i="0" b="0">
+              <a:rPr sz="1600" i="0" b="0">
                 <a:solidFill>
                   <a:srgbClr val="D4D4D4"/>
                 </a:solidFill>
@@ -14801,7 +14822,7 @@
               <a:t> </a:t>
             </a:r>
             <a:r>
-              <a:rPr sz="2000" i="0" b="0">
+              <a:rPr sz="1600" i="0" b="0">
                 <a:solidFill>
                   <a:srgbClr val="D4D4D4"/>
                 </a:solidFill>
@@ -14810,7 +14831,7 @@
               <a:t>el</a:t>
             </a:r>
             <a:r>
-              <a:rPr sz="2000" i="0" b="0">
+              <a:rPr sz="1600" i="0" b="0">
                 <a:solidFill>
                   <a:srgbClr val="D4D4D4"/>
                 </a:solidFill>
@@ -14819,7 +14840,7 @@
               <a:t> </a:t>
             </a:r>
             <a:r>
-              <a:rPr sz="2000" i="0" b="0">
+              <a:rPr sz="1600" i="0" b="0">
                 <a:solidFill>
                   <a:srgbClr val="D4D4D4"/>
                 </a:solidFill>
@@ -14828,7 +14849,7 @@
               <a:t>log</a:t>
             </a:r>
             <a:r>
-              <a:rPr sz="2000" i="0" b="0">
+              <a:rPr sz="1600" i="0" b="0">
                 <a:solidFill>
                   <a:srgbClr val="D4D4D4"/>
                 </a:solidFill>
@@ -14837,7 +14858,7 @@
               <a:t> </a:t>
             </a:r>
             <a:r>
-              <a:rPr sz="2000" i="0" b="0">
+              <a:rPr sz="1600" i="0" b="0">
                 <a:solidFill>
                   <a:srgbClr val="D4D4D4"/>
                 </a:solidFill>
@@ -14846,7 +14867,7 @@
               <a:t>del</a:t>
             </a:r>
             <a:r>
-              <a:rPr sz="2000" i="0" b="0">
+              <a:rPr sz="1600" i="0" b="0">
                 <a:solidFill>
                   <a:srgbClr val="D4D4D4"/>
                 </a:solidFill>
@@ -14855,7 +14876,7 @@
               <a:t> </a:t>
             </a:r>
             <a:r>
-              <a:rPr sz="2000" i="0" b="0">
+              <a:rPr sz="1600" i="0" b="0">
                 <a:solidFill>
                   <a:srgbClr val="D4D4D4"/>
                 </a:solidFill>
@@ -14864,7 +14885,7 @@
               <a:t>paso</a:t>
             </a:r>
             <a:r>
-              <a:rPr sz="2000" i="0" b="0">
+              <a:rPr sz="1600" i="0" b="0">
                 <a:solidFill>
                   <a:srgbClr val="D4D4D4"/>
                 </a:solidFill>
@@ -14876,11 +14897,11 @@
           <a:p>
             <a:pPr>
               <a:spcAft>
-                <a:spcPts val="428"/>
+                <a:spcPts val="342"/>
               </a:spcAft>
             </a:pPr>
             <a:r>
-              <a:rPr sz="2000" i="0" b="0">
+              <a:rPr sz="1600" i="0" b="0">
                 <a:solidFill>
                   <a:srgbClr val="D4D4D4"/>
                 </a:solidFill>
@@ -14889,7 +14910,7 @@
               <a:t>| </a:t>
             </a:r>
             <a:r>
-              <a:rPr sz="2000" i="0" b="0">
+              <a:rPr sz="1600" i="0" b="0">
                 <a:solidFill>
                   <a:srgbClr val="D4D4D4"/>
                 </a:solidFill>
@@ -14898,7 +14919,7 @@
               <a:t>CPU</a:t>
             </a:r>
             <a:r>
-              <a:rPr sz="2000" i="0" b="0">
+              <a:rPr sz="1600" i="0" b="0">
                 <a:solidFill>
                   <a:srgbClr val="D4D4D4"/>
                 </a:solidFill>
@@ -14907,7 +14928,7 @@
               <a:t> </a:t>
             </a:r>
             <a:r>
-              <a:rPr sz="2000" i="0" b="0">
+              <a:rPr sz="1600" i="0" b="0">
                 <a:solidFill>
                   <a:srgbClr val="D4D4D4"/>
                 </a:solidFill>
@@ -14916,7 +14937,7 @@
               <a:t>de</a:t>
             </a:r>
             <a:r>
-              <a:rPr sz="2000" i="0" b="0">
+              <a:rPr sz="1600" i="0" b="0">
                 <a:solidFill>
                   <a:srgbClr val="D4D4D4"/>
                 </a:solidFill>
@@ -14925,7 +14946,7 @@
               <a:t> </a:t>
             </a:r>
             <a:r>
-              <a:rPr sz="2000" i="0" b="0">
+              <a:rPr sz="1600" i="0" b="0">
                 <a:solidFill>
                   <a:srgbClr val="D4D4D4"/>
                 </a:solidFill>
@@ -14934,7 +14955,7 @@
               <a:t>la</a:t>
             </a:r>
             <a:r>
-              <a:rPr sz="2000" i="0" b="0">
+              <a:rPr sz="1600" i="0" b="0">
                 <a:solidFill>
                   <a:srgbClr val="D4D4D4"/>
                 </a:solidFill>
@@ -14943,7 +14964,7 @@
               <a:t> </a:t>
             </a:r>
             <a:r>
-              <a:rPr sz="2000" i="0" b="0">
+              <a:rPr sz="1600" i="0" b="0">
                 <a:solidFill>
                   <a:srgbClr val="D4D4D4"/>
                 </a:solidFill>
@@ -14952,7 +14973,7 @@
               <a:t>API</a:t>
             </a:r>
             <a:r>
-              <a:rPr sz="2000" i="0" b="0">
+              <a:rPr sz="1600" i="0" b="0">
                 <a:solidFill>
                   <a:srgbClr val="D4D4D4"/>
                 </a:solidFill>
@@ -14961,7 +14982,7 @@
               <a:t>          | &lt; </a:t>
             </a:r>
             <a:r>
-              <a:rPr sz="2000" i="0" b="0">
+              <a:rPr sz="1600" i="0" b="0">
                 <a:solidFill>
                   <a:srgbClr val="B5CEA8"/>
                 </a:solidFill>
@@ -14970,7 +14991,7 @@
               <a:t>70</a:t>
             </a:r>
             <a:r>
-              <a:rPr sz="2000" i="0" b="0">
+              <a:rPr sz="1600" i="0" b="0">
                 <a:solidFill>
                   <a:srgbClr val="D4D4D4"/>
                 </a:solidFill>
@@ -14979,7 +15000,7 @@
               <a:t> %   | </a:t>
             </a:r>
             <a:r>
-              <a:rPr sz="2000" i="0" b="0">
+              <a:rPr sz="1600" i="0" b="0">
                 <a:solidFill>
                   <a:srgbClr val="D4D4D4"/>
                 </a:solidFill>
@@ -14988,7 +15009,7 @@
               <a:t>metrica</a:t>
             </a:r>
             <a:r>
-              <a:rPr sz="2000" i="0" b="0">
+              <a:rPr sz="1600" i="0" b="0">
                 <a:solidFill>
                   <a:srgbClr val="D4D4D4"/>
                 </a:solidFill>
@@ -14997,7 +15018,7 @@
               <a:t> </a:t>
             </a:r>
             <a:r>
-              <a:rPr sz="2000" i="0" b="0">
+              <a:rPr sz="1600" i="0" b="0">
                 <a:solidFill>
                   <a:srgbClr val="D4D4D4"/>
                 </a:solidFill>
@@ -15006,7 +15027,7 @@
               <a:t>del</a:t>
             </a:r>
             <a:r>
-              <a:rPr sz="2000" i="0" b="0">
+              <a:rPr sz="1600" i="0" b="0">
                 <a:solidFill>
                   <a:srgbClr val="D4D4D4"/>
                 </a:solidFill>
@@ -15015,7 +15036,7 @@
               <a:t> </a:t>
             </a:r>
             <a:r>
-              <a:rPr sz="2000" i="0" b="0">
+              <a:rPr sz="1600" i="0" b="0">
                 <a:solidFill>
                   <a:srgbClr val="D4D4D4"/>
                 </a:solidFill>
@@ -15024,7 +15045,7 @@
               <a:t>proveedor</a:t>
             </a:r>
             <a:r>
-              <a:rPr sz="2000" i="0" b="0">
+              <a:rPr sz="1600" i="0" b="0">
                 <a:solidFill>
                   <a:srgbClr val="D4D4D4"/>
                 </a:solidFill>
@@ -15033,7 +15054,7 @@
               <a:t>     | </a:t>
             </a:r>
             <a:r>
-              <a:rPr sz="2000" i="0" b="0">
+              <a:rPr sz="1600" i="0" b="0">
                 <a:solidFill>
                   <a:srgbClr val="D4D4D4"/>
                 </a:solidFill>
@@ -15042,7 +15063,7 @@
               <a:t>escalar</a:t>
             </a:r>
             <a:r>
-              <a:rPr sz="2000" i="0" b="0">
+              <a:rPr sz="1600" i="0" b="0">
                 <a:solidFill>
                   <a:srgbClr val="D4D4D4"/>
                 </a:solidFill>
@@ -15051,7 +15072,7 @@
               <a:t> </a:t>
             </a:r>
             <a:r>
-              <a:rPr sz="2000" i="0" b="0">
+              <a:rPr sz="1600" i="0" b="0">
                 <a:solidFill>
                   <a:srgbClr val="DCDCAA"/>
                 </a:solidFill>
@@ -15060,7 +15081,7 @@
               <a:t>horizontal</a:t>
             </a:r>
             <a:r>
-              <a:rPr sz="2000" i="0" b="0">
+              <a:rPr sz="1600" i="0" b="0">
                 <a:solidFill>
                   <a:srgbClr val="D4D4D4"/>
                 </a:solidFill>
@@ -15069,7 +15090,7 @@
               <a:t> (</a:t>
             </a:r>
             <a:r>
-              <a:rPr sz="2000" i="0" b="0">
+              <a:rPr sz="1600" i="0" b="0">
                 <a:solidFill>
                   <a:srgbClr val="D4D4D4"/>
                 </a:solidFill>
@@ -15078,7 +15099,7 @@
               <a:t>Clase</a:t>
             </a:r>
             <a:r>
-              <a:rPr sz="2000" i="0" b="0">
+              <a:rPr sz="1600" i="0" b="0">
                 <a:solidFill>
                   <a:srgbClr val="D4D4D4"/>
                 </a:solidFill>
@@ -15087,7 +15108,7 @@
               <a:t> </a:t>
             </a:r>
             <a:r>
-              <a:rPr sz="2000" i="0" b="0">
+              <a:rPr sz="1600" i="0" b="0">
                 <a:solidFill>
                   <a:srgbClr val="B5CEA8"/>
                 </a:solidFill>
@@ -15096,7 +15117,7 @@
               <a:t>13</a:t>
             </a:r>
             <a:r>
-              <a:rPr sz="2000" i="0" b="0">
+              <a:rPr sz="1600" i="0" b="0">
                 <a:solidFill>
                   <a:srgbClr val="D4D4D4"/>
                 </a:solidFill>
@@ -15108,11 +15129,11 @@
           <a:p>
             <a:pPr>
               <a:spcAft>
-                <a:spcPts val="428"/>
+                <a:spcPts val="342"/>
               </a:spcAft>
             </a:pPr>
             <a:r>
-              <a:rPr sz="2000" i="0" b="0">
+              <a:rPr sz="1600" i="0" b="0">
                 <a:solidFill>
                   <a:srgbClr val="D4D4D4"/>
                 </a:solidFill>
@@ -15124,11 +15145,11 @@
           <a:p>
             <a:pPr>
               <a:spcAft>
-                <a:spcPts val="428"/>
+                <a:spcPts val="342"/>
               </a:spcAft>
             </a:pPr>
             <a:r>
-              <a:rPr sz="2000" i="0" b="0">
+              <a:rPr sz="1600" i="0" b="0">
                 <a:solidFill>
                   <a:srgbClr val="D4D4D4"/>
                 </a:solidFill>
@@ -15137,7 +15158,7 @@
               <a:t>El</a:t>
             </a:r>
             <a:r>
-              <a:rPr sz="2000" i="0" b="0">
+              <a:rPr sz="1600" i="0" b="0">
                 <a:solidFill>
                   <a:srgbClr val="D4D4D4"/>
                 </a:solidFill>
@@ -15146,7 +15167,7 @@
               <a:t> </a:t>
             </a:r>
             <a:r>
-              <a:rPr sz="2000" i="0" b="0">
+              <a:rPr sz="1600" i="0" b="0">
                 <a:solidFill>
                   <a:srgbClr val="D4D4D4"/>
                 </a:solidFill>
@@ -15155,7 +15176,7 @@
               <a:t>PROMEDIO</a:t>
             </a:r>
             <a:r>
-              <a:rPr sz="2000" i="0" b="0">
+              <a:rPr sz="1600" i="0" b="0">
                 <a:solidFill>
                   <a:srgbClr val="D4D4D4"/>
                 </a:solidFill>
@@ -15164,7 +15185,7 @@
               <a:t> </a:t>
             </a:r>
             <a:r>
-              <a:rPr sz="2000" i="0" b="0">
+              <a:rPr sz="1600" i="0" b="0">
                 <a:solidFill>
                   <a:srgbClr val="D4D4D4"/>
                 </a:solidFill>
@@ -15173,7 +15194,7 @@
               <a:t>no</a:t>
             </a:r>
             <a:r>
-              <a:rPr sz="2000" i="0" b="0">
+              <a:rPr sz="1600" i="0" b="0">
                 <a:solidFill>
                   <a:srgbClr val="D4D4D4"/>
                 </a:solidFill>
@@ -15182,7 +15203,7 @@
               <a:t> </a:t>
             </a:r>
             <a:r>
-              <a:rPr sz="2000" i="0" b="0">
+              <a:rPr sz="1600" i="0" b="0">
                 <a:solidFill>
                   <a:srgbClr val="D4D4D4"/>
                 </a:solidFill>
@@ -15191,7 +15212,7 @@
               <a:t>sirve</a:t>
             </a:r>
             <a:r>
-              <a:rPr sz="2000" i="0" b="0">
+              <a:rPr sz="1600" i="0" b="0">
                 <a:solidFill>
                   <a:srgbClr val="D4D4D4"/>
                 </a:solidFill>
@@ -15200,7 +15221,7 @@
               <a:t>: </a:t>
             </a:r>
             <a:r>
-              <a:rPr sz="2000" i="0" b="0">
+              <a:rPr sz="1600" i="0" b="0">
                 <a:solidFill>
                   <a:srgbClr val="D4D4D4"/>
                 </a:solidFill>
@@ -15209,7 +15230,7 @@
               <a:t>con</a:t>
             </a:r>
             <a:r>
-              <a:rPr sz="2000" i="0" b="0">
+              <a:rPr sz="1600" i="0" b="0">
                 <a:solidFill>
                   <a:srgbClr val="D4D4D4"/>
                 </a:solidFill>
@@ -15218,7 +15239,7 @@
               <a:t> </a:t>
             </a:r>
             <a:r>
-              <a:rPr sz="2000" i="0" b="0">
+              <a:rPr sz="1600" i="0" b="0">
                 <a:solidFill>
                   <a:srgbClr val="B5CEA8"/>
                 </a:solidFill>
@@ -15227,7 +15248,7 @@
               <a:t>99</a:t>
             </a:r>
             <a:r>
-              <a:rPr sz="2000" i="0" b="0">
+              <a:rPr sz="1600" i="0" b="0">
                 <a:solidFill>
                   <a:srgbClr val="D4D4D4"/>
                 </a:solidFill>
@@ -15236,7 +15257,7 @@
               <a:t> </a:t>
             </a:r>
             <a:r>
-              <a:rPr sz="2000" i="0" b="0">
+              <a:rPr sz="1600" i="0" b="0">
                 <a:solidFill>
                   <a:srgbClr val="D4D4D4"/>
                 </a:solidFill>
@@ -15245,7 +15266,7 @@
               <a:t>respuestas</a:t>
             </a:r>
             <a:r>
-              <a:rPr sz="2000" i="0" b="0">
+              <a:rPr sz="1600" i="0" b="0">
                 <a:solidFill>
                   <a:srgbClr val="D4D4D4"/>
                 </a:solidFill>
@@ -15254,7 +15275,7 @@
               <a:t> </a:t>
             </a:r>
             <a:r>
-              <a:rPr sz="2000" i="0" b="0">
+              <a:rPr sz="1600" i="0" b="0">
                 <a:solidFill>
                   <a:srgbClr val="D4D4D4"/>
                 </a:solidFill>
@@ -15263,7 +15284,7 @@
               <a:t>de</a:t>
             </a:r>
             <a:r>
-              <a:rPr sz="2000" i="0" b="0">
+              <a:rPr sz="1600" i="0" b="0">
                 <a:solidFill>
                   <a:srgbClr val="D4D4D4"/>
                 </a:solidFill>
@@ -15272,7 +15293,7 @@
               <a:t> </a:t>
             </a:r>
             <a:r>
-              <a:rPr sz="2000" i="0" b="0">
+              <a:rPr sz="1600" i="0" b="0">
                 <a:solidFill>
                   <a:srgbClr val="B5CEA8"/>
                 </a:solidFill>
@@ -15281,7 +15302,7 @@
               <a:t>10</a:t>
             </a:r>
             <a:r>
-              <a:rPr sz="2000" i="0" b="0">
+              <a:rPr sz="1600" i="0" b="0">
                 <a:solidFill>
                   <a:srgbClr val="D4D4D4"/>
                 </a:solidFill>
@@ -15290,7 +15311,7 @@
               <a:t> </a:t>
             </a:r>
             <a:r>
-              <a:rPr sz="2000" i="0" b="0">
+              <a:rPr sz="1600" i="0" b="0">
                 <a:solidFill>
                   <a:srgbClr val="D4D4D4"/>
                 </a:solidFill>
@@ -15299,7 +15320,7 @@
               <a:t>ms</a:t>
             </a:r>
             <a:r>
-              <a:rPr sz="2000" i="0" b="0">
+              <a:rPr sz="1600" i="0" b="0">
                 <a:solidFill>
                   <a:srgbClr val="D4D4D4"/>
                 </a:solidFill>
@@ -15308,7 +15329,7 @@
               <a:t> </a:t>
             </a:r>
             <a:r>
-              <a:rPr sz="2000" i="0" b="0">
+              <a:rPr sz="1600" i="0" b="0">
                 <a:solidFill>
                   <a:srgbClr val="D4D4D4"/>
                 </a:solidFill>
@@ -15317,7 +15338,7 @@
               <a:t>y</a:t>
             </a:r>
             <a:r>
-              <a:rPr sz="2000" i="0" b="0">
+              <a:rPr sz="1600" i="0" b="0">
                 <a:solidFill>
                   <a:srgbClr val="D4D4D4"/>
                 </a:solidFill>
@@ -15326,7 +15347,7 @@
               <a:t> </a:t>
             </a:r>
             <a:r>
-              <a:rPr sz="2000" i="0" b="0">
+              <a:rPr sz="1600" i="0" b="0">
                 <a:solidFill>
                   <a:srgbClr val="D4D4D4"/>
                 </a:solidFill>
@@ -15335,7 +15356,7 @@
               <a:t>una</a:t>
             </a:r>
             <a:r>
-              <a:rPr sz="2000" i="0" b="0">
+              <a:rPr sz="1600" i="0" b="0">
                 <a:solidFill>
                   <a:srgbClr val="D4D4D4"/>
                 </a:solidFill>
@@ -15344,7 +15365,7 @@
               <a:t> </a:t>
             </a:r>
             <a:r>
-              <a:rPr sz="2000" i="0" b="0">
+              <a:rPr sz="1600" i="0" b="0">
                 <a:solidFill>
                   <a:srgbClr val="D4D4D4"/>
                 </a:solidFill>
@@ -15353,7 +15374,7 @@
               <a:t>de</a:t>
             </a:r>
             <a:r>
-              <a:rPr sz="2000" i="0" b="0">
+              <a:rPr sz="1600" i="0" b="0">
                 <a:solidFill>
                   <a:srgbClr val="D4D4D4"/>
                 </a:solidFill>
@@ -15362,7 +15383,7 @@
               <a:t> </a:t>
             </a:r>
             <a:r>
-              <a:rPr sz="2000" i="0" b="0">
+              <a:rPr sz="1600" i="0" b="0">
                 <a:solidFill>
                   <a:srgbClr val="B5CEA8"/>
                 </a:solidFill>
@@ -15371,7 +15392,7 @@
               <a:t>5</a:t>
             </a:r>
             <a:r>
-              <a:rPr sz="2000" i="0" b="0">
+              <a:rPr sz="1600" i="0" b="0">
                 <a:solidFill>
                   <a:srgbClr val="D4D4D4"/>
                 </a:solidFill>
@@ -15380,7 +15401,7 @@
               <a:t> </a:t>
             </a:r>
             <a:r>
-              <a:rPr sz="2000" i="0" b="0">
+              <a:rPr sz="1600" i="0" b="0">
                 <a:solidFill>
                   <a:srgbClr val="D4D4D4"/>
                 </a:solidFill>
@@ -15392,11 +15413,11 @@
           <a:p>
             <a:pPr>
               <a:spcAft>
-                <a:spcPts val="428"/>
+                <a:spcPts val="342"/>
               </a:spcAft>
             </a:pPr>
             <a:r>
-              <a:rPr sz="2000" i="0" b="0">
+              <a:rPr sz="1600" i="0" b="0">
                 <a:solidFill>
                   <a:srgbClr val="D4D4D4"/>
                 </a:solidFill>
@@ -15405,7 +15426,7 @@
               <a:t>da</a:t>
             </a:r>
             <a:r>
-              <a:rPr sz="2000" i="0" b="0">
+              <a:rPr sz="1600" i="0" b="0">
                 <a:solidFill>
                   <a:srgbClr val="D4D4D4"/>
                 </a:solidFill>
@@ -15414,7 +15435,7 @@
               <a:t> </a:t>
             </a:r>
             <a:r>
-              <a:rPr sz="2000" i="0" b="0">
+              <a:rPr sz="1600" i="0" b="0">
                 <a:solidFill>
                   <a:srgbClr val="B5CEA8"/>
                 </a:solidFill>
@@ -15423,7 +15444,7 @@
               <a:t>60</a:t>
             </a:r>
             <a:r>
-              <a:rPr sz="2000" i="0" b="0">
+              <a:rPr sz="1600" i="0" b="0">
                 <a:solidFill>
                   <a:srgbClr val="D4D4D4"/>
                 </a:solidFill>
@@ -15432,7 +15453,7 @@
               <a:t> </a:t>
             </a:r>
             <a:r>
-              <a:rPr sz="2000" i="0" b="0">
+              <a:rPr sz="1600" i="0" b="0">
                 <a:solidFill>
                   <a:srgbClr val="D4D4D4"/>
                 </a:solidFill>
@@ -15441,7 +15462,7 @@
               <a:t>ms</a:t>
             </a:r>
             <a:r>
-              <a:rPr sz="2000" i="0" b="0">
+              <a:rPr sz="1600" i="0" b="0">
                 <a:solidFill>
                   <a:srgbClr val="D4D4D4"/>
                 </a:solidFill>
@@ -15450,7 +15471,7 @@
               <a:t>, </a:t>
             </a:r>
             <a:r>
-              <a:rPr sz="2000" i="0" b="0">
+              <a:rPr sz="1600" i="0" b="0">
                 <a:solidFill>
                   <a:srgbClr val="D4D4D4"/>
                 </a:solidFill>
@@ -15459,7 +15480,7 @@
               <a:t>y</a:t>
             </a:r>
             <a:r>
-              <a:rPr sz="2000" i="0" b="0">
+              <a:rPr sz="1600" i="0" b="0">
                 <a:solidFill>
                   <a:srgbClr val="D4D4D4"/>
                 </a:solidFill>
@@ -15468,7 +15489,7 @@
               <a:t> </a:t>
             </a:r>
             <a:r>
-              <a:rPr sz="2000" i="0" b="0">
+              <a:rPr sz="1600" i="0" b="0">
                 <a:solidFill>
                   <a:srgbClr val="D4D4D4"/>
                 </a:solidFill>
@@ -15477,7 +15498,7 @@
               <a:t>el</a:t>
             </a:r>
             <a:r>
-              <a:rPr sz="2000" i="0" b="0">
+              <a:rPr sz="1600" i="0" b="0">
                 <a:solidFill>
                   <a:srgbClr val="D4D4D4"/>
                 </a:solidFill>
@@ -15486,7 +15507,7 @@
               <a:t> </a:t>
             </a:r>
             <a:r>
-              <a:rPr sz="2000" i="0" b="0">
+              <a:rPr sz="1600" i="0" b="0">
                 <a:solidFill>
                   <a:srgbClr val="D4D4D4"/>
                 </a:solidFill>
@@ -15495,7 +15516,7 @@
               <a:t>usuario</a:t>
             </a:r>
             <a:r>
-              <a:rPr sz="2000" i="0" b="0">
+              <a:rPr sz="1600" i="0" b="0">
                 <a:solidFill>
                   <a:srgbClr val="D4D4D4"/>
                 </a:solidFill>
@@ -15504,7 +15525,7 @@
               <a:t> </a:t>
             </a:r>
             <a:r>
-              <a:rPr sz="2000" i="0" b="0">
+              <a:rPr sz="1600" i="0" b="0">
                 <a:solidFill>
                   <a:srgbClr val="D4D4D4"/>
                 </a:solidFill>
@@ -15513,7 +15534,7 @@
               <a:t>que</a:t>
             </a:r>
             <a:r>
-              <a:rPr sz="2000" i="0" b="0">
+              <a:rPr sz="1600" i="0" b="0">
                 <a:solidFill>
                   <a:srgbClr val="D4D4D4"/>
                 </a:solidFill>
@@ -15522,7 +15543,7 @@
               <a:t> </a:t>
             </a:r>
             <a:r>
-              <a:rPr sz="2000" i="0" b="0">
+              <a:rPr sz="1600" i="0" b="0">
                 <a:solidFill>
                   <a:srgbClr val="D4D4D4"/>
                 </a:solidFill>
@@ -15531,7 +15552,7 @@
               <a:t>espero</a:t>
             </a:r>
             <a:r>
-              <a:rPr sz="2000" i="0" b="0">
+              <a:rPr sz="1600" i="0" b="0">
                 <a:solidFill>
                   <a:srgbClr val="D4D4D4"/>
                 </a:solidFill>
@@ -15540,7 +15561,7 @@
               <a:t> </a:t>
             </a:r>
             <a:r>
-              <a:rPr sz="2000" i="0" b="0">
+              <a:rPr sz="1600" i="0" b="0">
                 <a:solidFill>
                   <a:srgbClr val="B5CEA8"/>
                 </a:solidFill>
@@ -15549,7 +15570,7 @@
               <a:t>5</a:t>
             </a:r>
             <a:r>
-              <a:rPr sz="2000" i="0" b="0">
+              <a:rPr sz="1600" i="0" b="0">
                 <a:solidFill>
                   <a:srgbClr val="D4D4D4"/>
                 </a:solidFill>
@@ -15558,7 +15579,7 @@
               <a:t> </a:t>
             </a:r>
             <a:r>
-              <a:rPr sz="2000" i="0" b="0">
+              <a:rPr sz="1600" i="0" b="0">
                 <a:solidFill>
                   <a:srgbClr val="D4D4D4"/>
                 </a:solidFill>
@@ -15567,7 +15588,7 @@
               <a:t>s</a:t>
             </a:r>
             <a:r>
-              <a:rPr sz="2000" i="0" b="0">
+              <a:rPr sz="1600" i="0" b="0">
                 <a:solidFill>
                   <a:srgbClr val="D4D4D4"/>
                 </a:solidFill>
@@ -15576,7 +15597,7 @@
               <a:t> </a:t>
             </a:r>
             <a:r>
-              <a:rPr sz="2000" i="0" b="0">
+              <a:rPr sz="1600" i="0" b="0">
                 <a:solidFill>
                   <a:srgbClr val="D4D4D4"/>
                 </a:solidFill>
@@ -15585,7 +15606,7 @@
               <a:t>existe</a:t>
             </a:r>
             <a:r>
-              <a:rPr sz="2000" i="0" b="0">
+              <a:rPr sz="1600" i="0" b="0">
                 <a:solidFill>
                   <a:srgbClr val="D4D4D4"/>
                 </a:solidFill>
@@ -15594,7 +15615,7 @@
               <a:t>. </a:t>
             </a:r>
             <a:r>
-              <a:rPr sz="2000" i="0" b="0">
+              <a:rPr sz="1600" i="0" b="0">
                 <a:solidFill>
                   <a:srgbClr val="D4D4D4"/>
                 </a:solidFill>
@@ -15603,7 +15624,7 @@
               <a:t>Por</a:t>
             </a:r>
             <a:r>
-              <a:rPr sz="2000" i="0" b="0">
+              <a:rPr sz="1600" i="0" b="0">
                 <a:solidFill>
                   <a:srgbClr val="D4D4D4"/>
                 </a:solidFill>
@@ -15612,7 +15633,7 @@
               <a:t> </a:t>
             </a:r>
             <a:r>
-              <a:rPr sz="2000" i="0" b="0">
+              <a:rPr sz="1600" i="0" b="0">
                 <a:solidFill>
                   <a:srgbClr val="D4D4D4"/>
                 </a:solidFill>
@@ -15621,7 +15642,7 @@
               <a:t>eso</a:t>
             </a:r>
             <a:r>
-              <a:rPr sz="2000" i="0" b="0">
+              <a:rPr sz="1600" i="0" b="0">
                 <a:solidFill>
                   <a:srgbClr val="D4D4D4"/>
                 </a:solidFill>
@@ -15630,7 +15651,7 @@
               <a:t> </a:t>
             </a:r>
             <a:r>
-              <a:rPr sz="2000" i="0" b="0">
+              <a:rPr sz="1600" i="0" b="0">
                 <a:solidFill>
                   <a:srgbClr val="D4D4D4"/>
                 </a:solidFill>
@@ -15639,7 +15660,7 @@
               <a:t>p95</a:t>
             </a:r>
             <a:r>
-              <a:rPr sz="2000" i="0" b="0">
+              <a:rPr sz="1600" i="0" b="0">
                 <a:solidFill>
                   <a:srgbClr val="D4D4D4"/>
                 </a:solidFill>
@@ -15652,7 +15673,7 @@
       </p:sp>
       <p:sp>
         <p:nvSpPr>
-          <p:cNvPr id="12" name="TextBox 11"/>
+          <p:cNvPr id="13" name="TextBox 12"/>
           <p:cNvSpPr txBox="1"/>
           <p:nvPr/>
         </p:nvSpPr>
